--- a/docs/proposals/2026-12_docomo_christmas-ws/企画書_NTTドコモ_クリスマスWS.pptx
+++ b/docs/proposals/2026-12_docomo_christmas-ws/企画書_NTTドコモ_クリスマスWS.pptx
@@ -120,26 +120,26 @@
   <p:extLst>
     <p:ext uri="{521415D9-36F7-43E2-AB2F-B90AF26B5E84}">
       <p14:sectionLst xmlns:p14="http://schemas.microsoft.com/office/powerpoint/2010/main">
-        <p14:section name="表紙" id="{38bc42ca-3c7a-c7db-42e7-584e65740de3}">
+        <p14:section name="表紙" id="{c21ba4cd-eb88-6a20-ba11-bf9fdbc1ae94}">
           <p14:sldIdLst>
             <p14:sldId id="256"/>
           </p14:sldIdLst>
         </p14:section>
-        <p14:section name="ご提案の概要" id="{416a15d6-13c7-8b1e-80ce-ff6e21cf841b}">
+        <p14:section name="ご提案の概要" id="{9f7902c4-81c1-f049-2afe-1bfef6ef0a88}">
           <p14:sldIdLst>
             <p14:sldId id="257"/>
             <p14:sldId id="258"/>
             <p14:sldId id="259"/>
           </p14:sldIdLst>
         </p14:section>
-        <p14:section name="ワークショップ" id="{12ef634c-08a4-2f4d-e831-b7ab2b2508ff}">
+        <p14:section name="ワークショップ" id="{4b3a8e1e-f9b3-7d92-1cc7-452cd0fcbbbe}">
           <p14:sldIdLst>
             <p14:sldId id="260"/>
             <p14:sldId id="261"/>
             <p14:sldId id="262"/>
           </p14:sldIdLst>
         </p14:section>
-        <p14:section name="店頭演出" id="{56d4b8be-cea4-2172-15d0-bb5323860158}">
+        <p14:section name="店頭演出" id="{3c37e768-5ca8-9d7d-5c1e-f1f3ed5f23d2}">
           <p14:sldIdLst>
             <p14:sldId id="263"/>
             <p14:sldId id="264"/>
@@ -147,7 +147,7 @@
             <p14:sldId id="266"/>
           </p14:sldIdLst>
         </p14:section>
-        <p14:section name="運用・お見積" id="{51178683-dd99-7fd1-92b7-21d72e0ee0c2}">
+        <p14:section name="運用・お見積" id="{f3f5222e-706a-5258-8450-1e8cd83ef67d}">
           <p14:sldIdLst>
             <p14:sldId id="267"/>
             <p14:sldId id="268"/>
@@ -11158,243 +11158,40 @@
           </a:p>
         </p:txBody>
       </p:sp>
-      <p:sp>
-        <p:nvSpPr>
-          <p:cNvPr id="3" name="main_globe"/>
-          <p:cNvSpPr/>
-          <p:nvPr/>
-        </p:nvSpPr>
-        <p:spPr>
-          <a:xfrm>
-            <a:off x="822960" y="1234440"/>
-            <a:ext cx="2103120" cy="2103120"/>
-          </a:xfrm>
-          <a:prstGeom prst="ellipse">
-            <a:avLst/>
-          </a:prstGeom>
-          <a:solidFill>
-            <a:srgbClr val="DDEFF7"/>
-          </a:solidFill>
-          <a:ln w="19050">
-            <a:solidFill>
-              <a:srgbClr val="9CC9DD"/>
-            </a:solidFill>
-            <a:prstDash val="solid"/>
-          </a:ln>
-        </p:spPr>
-      </p:sp>
-      <p:sp>
-        <p:nvSpPr>
-          <p:cNvPr id="4" name="main_tree"/>
-          <p:cNvSpPr/>
-          <p:nvPr/>
-        </p:nvSpPr>
-        <p:spPr>
-          <a:xfrm>
-            <a:off x="1516990" y="1865376"/>
-            <a:ext cx="715061" cy="946404"/>
-          </a:xfrm>
-          <a:prstGeom prst="triangle">
-            <a:avLst/>
-          </a:prstGeom>
-          <a:solidFill>
-            <a:schemeClr val="accent2"/>
-          </a:solidFill>
-          <a:ln w="12700">
-            <a:solidFill>
-              <a:schemeClr val="accent2"/>
-            </a:solidFill>
-            <a:prstDash val="solid"/>
-          </a:ln>
-        </p:spPr>
-      </p:sp>
-      <p:sp>
-        <p:nvSpPr>
-          <p:cNvPr id="5" name="main_snow0"/>
-          <p:cNvSpPr/>
-          <p:nvPr/>
-        </p:nvSpPr>
-        <p:spPr>
-          <a:xfrm>
-            <a:off x="1243584" y="1760220"/>
-            <a:ext cx="126187" cy="126187"/>
-          </a:xfrm>
-          <a:prstGeom prst="ellipse">
-            <a:avLst/>
-          </a:prstGeom>
-          <a:solidFill>
-            <a:srgbClr val="FFFFFF"/>
-          </a:solidFill>
-          <a:ln w="6350">
-            <a:solidFill>
-              <a:srgbClr val="9CC9DD"/>
-            </a:solidFill>
-            <a:prstDash val="solid"/>
-          </a:ln>
-        </p:spPr>
-      </p:sp>
-      <p:sp>
-        <p:nvSpPr>
-          <p:cNvPr id="6" name="main_snow1"/>
-          <p:cNvSpPr/>
-          <p:nvPr/>
-        </p:nvSpPr>
-        <p:spPr>
-          <a:xfrm>
-            <a:off x="2295144" y="1655064"/>
-            <a:ext cx="126187" cy="126187"/>
-          </a:xfrm>
-          <a:prstGeom prst="ellipse">
-            <a:avLst/>
-          </a:prstGeom>
-          <a:solidFill>
-            <a:srgbClr val="FFFFFF"/>
-          </a:solidFill>
-          <a:ln w="6350">
-            <a:solidFill>
-              <a:srgbClr val="9CC9DD"/>
-            </a:solidFill>
-            <a:prstDash val="solid"/>
-          </a:ln>
-        </p:spPr>
-      </p:sp>
-      <p:sp>
-        <p:nvSpPr>
-          <p:cNvPr id="7" name="main_snow2"/>
-          <p:cNvSpPr/>
-          <p:nvPr/>
-        </p:nvSpPr>
-        <p:spPr>
-          <a:xfrm>
-            <a:off x="1348740" y="2496312"/>
-            <a:ext cx="126187" cy="126187"/>
-          </a:xfrm>
-          <a:prstGeom prst="ellipse">
-            <a:avLst/>
-          </a:prstGeom>
-          <a:solidFill>
-            <a:srgbClr val="FFFFFF"/>
-          </a:solidFill>
-          <a:ln w="6350">
-            <a:solidFill>
-              <a:srgbClr val="9CC9DD"/>
-            </a:solidFill>
-            <a:prstDash val="solid"/>
-          </a:ln>
-        </p:spPr>
-      </p:sp>
-      <p:sp>
-        <p:nvSpPr>
-          <p:cNvPr id="8" name="main_snow3"/>
-          <p:cNvSpPr/>
-          <p:nvPr/>
-        </p:nvSpPr>
-        <p:spPr>
-          <a:xfrm>
-            <a:off x="2400300" y="2391156"/>
-            <a:ext cx="126187" cy="126187"/>
-          </a:xfrm>
-          <a:prstGeom prst="ellipse">
-            <a:avLst/>
-          </a:prstGeom>
-          <a:solidFill>
-            <a:srgbClr val="FFFFFF"/>
-          </a:solidFill>
-          <a:ln w="6350">
-            <a:solidFill>
-              <a:srgbClr val="9CC9DD"/>
-            </a:solidFill>
-            <a:prstDash val="solid"/>
-          </a:ln>
-        </p:spPr>
-      </p:sp>
-      <p:sp>
-        <p:nvSpPr>
-          <p:cNvPr id="9" name="main_snow4"/>
-          <p:cNvSpPr/>
-          <p:nvPr/>
-        </p:nvSpPr>
-        <p:spPr>
-          <a:xfrm>
-            <a:off x="1874520" y="1549908"/>
-            <a:ext cx="126187" cy="126187"/>
-          </a:xfrm>
-          <a:prstGeom prst="ellipse">
-            <a:avLst/>
-          </a:prstGeom>
-          <a:solidFill>
-            <a:srgbClr val="FFFFFF"/>
-          </a:solidFill>
-          <a:ln w="6350">
-            <a:solidFill>
-              <a:srgbClr val="9CC9DD"/>
-            </a:solidFill>
-            <a:prstDash val="solid"/>
-          </a:ln>
-        </p:spPr>
-      </p:sp>
-      <p:sp>
-        <p:nvSpPr>
-          <p:cNvPr id="10" name="main_snow5"/>
-          <p:cNvSpPr/>
-          <p:nvPr/>
-        </p:nvSpPr>
-        <p:spPr>
-          <a:xfrm>
-            <a:off x="2126894" y="2706624"/>
-            <a:ext cx="126187" cy="126187"/>
-          </a:xfrm>
-          <a:prstGeom prst="ellipse">
-            <a:avLst/>
-          </a:prstGeom>
-          <a:solidFill>
-            <a:srgbClr val="FFFFFF"/>
-          </a:solidFill>
-          <a:ln w="6350">
-            <a:solidFill>
-              <a:srgbClr val="9CC9DD"/>
-            </a:solidFill>
-            <a:prstDash val="solid"/>
-          </a:ln>
-        </p:spPr>
-      </p:sp>
-      <p:sp>
-        <p:nvSpPr>
-          <p:cNvPr id="11" name="main_base"/>
-          <p:cNvSpPr/>
-          <p:nvPr/>
-        </p:nvSpPr>
-        <p:spPr>
-          <a:xfrm>
-            <a:off x="1033272" y="3085186"/>
-            <a:ext cx="1682496" cy="525780"/>
-          </a:xfrm>
-          <a:prstGeom prst="roundRect">
-            <a:avLst>
-              <a:gd name="adj" fmla="val 8696"/>
-            </a:avLst>
-          </a:prstGeom>
-          <a:solidFill>
-            <a:schemeClr val="accent1"/>
-          </a:solidFill>
-          <a:ln w="12700">
-            <a:solidFill>
-              <a:schemeClr val="accent1"/>
-            </a:solidFill>
-            <a:prstDash val="solid"/>
-          </a:ln>
-        </p:spPr>
-      </p:sp>
-      <p:sp>
-        <p:nvSpPr>
-          <p:cNvPr id="12" name="Text 10"/>
+      <p:pic>
+        <p:nvPicPr>
+          <p:cNvPr id="3" name="img_snowdome" descr="スノードームの完成イメージ">    </p:cNvPr>
+          <p:cNvPicPr>
+            <a:picLocks noChangeAspect="1"/>
+          </p:cNvPicPr>
+          <p:nvPr/>
+        </p:nvPicPr>
+        <p:blipFill>
+          <a:blip r:embed="rId1"/>
+          <a:stretch>
+            <a:fillRect/>
+          </a:stretch>
+        </p:blipFill>
+        <p:spPr>
+          <a:xfrm>
+            <a:off x="457200" y="1005840"/>
+            <a:ext cx="2926080" cy="2926080"/>
+          </a:xfrm>
+          <a:prstGeom prst="rect">
+            <a:avLst/>
+          </a:prstGeom>
+        </p:spPr>
+      </p:pic>
+      <p:sp>
+        <p:nvSpPr>
+          <p:cNvPr id="4" name="Text 1"/>
           <p:cNvSpPr txBox="1"/>
           <p:nvPr/>
         </p:nvSpPr>
         <p:spPr>
           <a:xfrm>
-            <a:off x="457200" y="3931920"/>
-            <a:ext cx="2926080" cy="365760"/>
+            <a:off x="182880" y="4023360"/>
+            <a:ext cx="3474720" cy="365760"/>
           </a:xfrm>
           <a:prstGeom prst="rect">
             <a:avLst/>
@@ -11415,7 +11212,7 @@
                   <a:schemeClr val="accent4"/>
                 </a:solidFill>
               </a:rPr>
-              <a:t>クリスマス専用の新コンテンツ</a:t>
+              <a:t>完成イメージ</a:t>
             </a:r>
             <a:endParaRPr lang="en-US" sz="1300" dirty="0"/>
           </a:p>
@@ -11423,7 +11220,7 @@
       </p:sp>
       <p:sp>
         <p:nvSpPr>
-          <p:cNvPr id="13" name="Text 11"/>
+          <p:cNvPr id="5" name="Text 2"/>
           <p:cNvSpPr txBox="1"/>
           <p:nvPr/>
         </p:nvSpPr>
@@ -11459,7 +11256,7 @@
       </p:sp>
       <p:sp>
         <p:nvSpPr>
-          <p:cNvPr id="14" name="Text 12"/>
+          <p:cNvPr id="6" name="Text 3"/>
           <p:cNvSpPr txBox="1"/>
           <p:nvPr/>
         </p:nvSpPr>
@@ -11495,7 +11292,7 @@
       </p:sp>
       <p:sp>
         <p:nvSpPr>
-          <p:cNvPr id="15" name="Text 13"/>
+          <p:cNvPr id="7" name="Text 4"/>
           <p:cNvSpPr txBox="1"/>
           <p:nvPr/>
         </p:nvSpPr>
@@ -11531,7 +11328,7 @@
       </p:sp>
       <p:sp>
         <p:nvSpPr>
-          <p:cNvPr id="16" name="Text 14"/>
+          <p:cNvPr id="8" name="Text 5"/>
           <p:cNvSpPr txBox="1"/>
           <p:nvPr/>
         </p:nvSpPr>
@@ -11567,7 +11364,7 @@
       </p:sp>
       <p:sp>
         <p:nvSpPr>
-          <p:cNvPr id="17" name="Text 15"/>
+          <p:cNvPr id="9" name="Text 6"/>
           <p:cNvSpPr txBox="1"/>
           <p:nvPr/>
         </p:nvSpPr>
@@ -11603,7 +11400,7 @@
       </p:sp>
       <p:sp>
         <p:nvSpPr>
-          <p:cNvPr id="18" name="Text 16"/>
+          <p:cNvPr id="10" name="Text 7"/>
           <p:cNvSpPr txBox="1"/>
           <p:nvPr/>
         </p:nvSpPr>
@@ -11639,7 +11436,7 @@
       </p:sp>
       <p:sp>
         <p:nvSpPr>
-          <p:cNvPr id="19" name="Text 17"/>
+          <p:cNvPr id="11" name="Text 8"/>
           <p:cNvSpPr txBox="1"/>
           <p:nvPr/>
         </p:nvSpPr>
@@ -11675,7 +11472,7 @@
       </p:sp>
       <p:sp>
         <p:nvSpPr>
-          <p:cNvPr id="20" name="Text 18"/>
+          <p:cNvPr id="12" name="Text 9"/>
           <p:cNvSpPr txBox="1"/>
           <p:nvPr/>
         </p:nvSpPr>

--- a/docs/proposals/2026-12_docomo_christmas-ws/企画書_NTTドコモ_クリスマスWS.pptx
+++ b/docs/proposals/2026-12_docomo_christmas-ws/企画書_NTTドコモ_クリスマスWS.pptx
@@ -19,9 +19,10 @@
     <p:sldId id="267" r:id="rId13"/>
     <p:sldId id="268" r:id="rId14"/>
     <p:sldId id="269" r:id="rId15"/>
+    <p:sldId id="270" r:id="rId16"/>
   </p:sldIdLst>
   <p:notesMasterIdLst>
-    <p:notesMasterId r:id="rId16"/>
+    <p:notesMasterId r:id="rId17"/>
   </p:notesMasterIdLst>
   <p:sldSz cx="9144000" cy="5143500"/>
   <p:notesSz cx="5143500" cy="9144000"/>
@@ -120,38 +121,39 @@
   <p:extLst>
     <p:ext uri="{521415D9-36F7-43E2-AB2F-B90AF26B5E84}">
       <p14:sectionLst xmlns:p14="http://schemas.microsoft.com/office/powerpoint/2010/main">
-        <p14:section name="表紙" id="{c21ba4cd-eb88-6a20-ba11-bf9fdbc1ae94}">
+        <p14:section name="表紙" id="{da6624f7-f545-6171-b07a-b83446d9004d}">
           <p14:sldIdLst>
             <p14:sldId id="256"/>
           </p14:sldIdLst>
         </p14:section>
-        <p14:section name="ご提案の概要" id="{9f7902c4-81c1-f049-2afe-1bfef6ef0a88}">
+        <p14:section name="ご提案の概要" id="{35b16945-b03d-0010-b072-0a591e452b31}">
           <p14:sldIdLst>
             <p14:sldId id="257"/>
             <p14:sldId id="258"/>
             <p14:sldId id="259"/>
           </p14:sldIdLst>
         </p14:section>
-        <p14:section name="ワークショップ" id="{4b3a8e1e-f9b3-7d92-1cc7-452cd0fcbbbe}">
+        <p14:section name="ワークショップ" id="{e905b895-c3db-11dd-f646-a88e0bc356c6}">
           <p14:sldIdLst>
             <p14:sldId id="260"/>
             <p14:sldId id="261"/>
             <p14:sldId id="262"/>
+            <p14:sldId id="263"/>
           </p14:sldIdLst>
         </p14:section>
-        <p14:section name="店頭演出" id="{3c37e768-5ca8-9d7d-5c1e-f1f3ed5f23d2}">
+        <p14:section name="店頭演出" id="{b3964270-7385-24b3-2d77-00ebdfcc29bc}">
           <p14:sldIdLst>
-            <p14:sldId id="263"/>
             <p14:sldId id="264"/>
             <p14:sldId id="265"/>
             <p14:sldId id="266"/>
+            <p14:sldId id="267"/>
           </p14:sldIdLst>
         </p14:section>
-        <p14:section name="運用・お見積" id="{f3f5222e-706a-5258-8450-1e8cd83ef67d}">
+        <p14:section name="運用・お見積" id="{4eefe3a4-e2bd-161d-24bd-770bb740c52e}">
           <p14:sldIdLst>
-            <p14:sldId id="267"/>
             <p14:sldId id="268"/>
             <p14:sldId id="269"/>
+            <p14:sldId id="270"/>
           </p14:sldIdLst>
         </p14:section>
       </p14:sectionLst>
@@ -1040,6 +1042,94 @@
 </p:notes>
 </file>
 
+<file path=ppt/notesSlides/notesSlide15.xml><?xml version="1.0" encoding="utf-8"?>
+<p:notes xmlns:a="http://schemas.openxmlformats.org/drawingml/2006/main" xmlns:r="http://schemas.openxmlformats.org/officeDocument/2006/relationships" xmlns:p="http://schemas.openxmlformats.org/presentationml/2006/main">
+  <p:cSld>
+    <p:spTree>
+      <p:nvGrpSpPr>
+        <p:cNvPr id="1" name=""/>
+        <p:cNvGrpSpPr/>
+        <p:nvPr/>
+      </p:nvGrpSpPr>
+      <p:grpSpPr>
+        <a:xfrm>
+          <a:off x="0" y="0"/>
+          <a:ext cx="0" cy="0"/>
+          <a:chOff x="0" y="0"/>
+          <a:chExt cx="0" cy="0"/>
+        </a:xfrm>
+      </p:grpSpPr>
+      <p:sp>
+        <p:nvSpPr>
+          <p:cNvPr id="2" name="Slide Image Placeholder 1"/>
+          <p:cNvSpPr>
+            <a:spLocks noGrp="1" noRot="1" noChangeAspect="1"/>
+          </p:cNvSpPr>
+          <p:nvPr>
+            <p:ph type="sldImg"/>
+          </p:nvPr>
+        </p:nvSpPr>
+        <p:spPr/>
+      </p:sp>
+      <p:sp>
+        <p:nvSpPr>
+          <p:cNvPr id="3" name="Notes Placeholder 2"/>
+          <p:cNvSpPr>
+            <a:spLocks noGrp="1"/>
+          </p:cNvSpPr>
+          <p:nvPr>
+            <p:ph type="body" idx="1"/>
+          </p:nvPr>
+        </p:nvSpPr>
+        <p:spPr/>
+        <p:txBody>
+          <a:bodyPr/>
+          <a:lstStyle/>
+          <a:p>
+            <a:r>
+              <a:rPr lang="en-US" dirty="0"/>
+              <a:t/>
+            </a:r>
+            <a:endParaRPr lang="en-US" dirty="0"/>
+          </a:p>
+        </p:txBody>
+      </p:sp>
+      <p:sp>
+        <p:nvSpPr>
+          <p:cNvPr id="4" name="Slide Number Placeholder 3"/>
+          <p:cNvSpPr>
+            <a:spLocks noGrp="1"/>
+          </p:cNvSpPr>
+          <p:nvPr>
+            <p:ph type="sldNum" sz="quarter" idx="10"/>
+          </p:nvPr>
+        </p:nvSpPr>
+        <p:spPr/>
+        <p:txBody>
+          <a:bodyPr/>
+          <a:lstStyle/>
+          <a:p>
+            <a:fld id="{F7021451-1387-4CA6-816F-3879F97B5CBC}" type="slidenum">
+              <a:rPr lang="en-US"/>
+              <a:t>15</a:t>
+            </a:fld>
+            <a:endParaRPr lang="en-US"/>
+          </a:p>
+        </p:txBody>
+      </p:sp>
+    </p:spTree>
+    <p:extLst>
+      <p:ext uri="{BB962C8B-B14F-4D97-AF65-F5344CB8AC3E}">
+        <p14:creationId xmlns:p14="http://schemas.microsoft.com/office/powerpoint/2010/main" val="1024086991"/>
+      </p:ext>
+    </p:extLst>
+  </p:cSld>
+  <p:clrMapOvr>
+    <a:masterClrMapping/>
+  </p:clrMapOvr>
+</p:notes>
+</file>
+
 <file path=ppt/notesSlides/notesSlide2.xml><?xml version="1.0" encoding="utf-8"?>
 <p:notes xmlns:a="http://schemas.openxmlformats.org/drawingml/2006/main" xmlns:r="http://schemas.openxmlformats.org/officeDocument/2006/relationships" xmlns:p="http://schemas.openxmlformats.org/presentationml/2006/main">
   <p:cSld>
@@ -1780,7 +1870,7 @@
     <p:bg>
       <p:bgPr>
         <a:solidFill>
-          <a:schemeClr val="tx2"/>
+          <a:schemeClr val="accent5"/>
         </a:solidFill>
       </p:bgPr>
     </p:bg>
@@ -1808,8 +1898,8 @@
         </p:nvSpPr>
         <p:spPr>
           <a:xfrm>
-            <a:off x="548640" y="1417320"/>
-            <a:ext cx="8046720" cy="1188720"/>
+            <a:off x="548640" y="1371600"/>
+            <a:ext cx="5120640" cy="1280160"/>
           </a:xfrm>
           <a:prstGeom prst="rect">
             <a:avLst/>
@@ -1822,9 +1912,9 @@
           <a:lstStyle>
             <a:lvl1pPr indent="0" marL="0">
               <a:buNone/>
-              <a:defRPr lang="en-US" sz="3400" b="1" dirty="0">
-                <a:solidFill>
-                  <a:schemeClr val="bg1"/>
+              <a:defRPr lang="en-US" sz="3000" b="1" dirty="0">
+                <a:solidFill>
+                  <a:schemeClr val="tx2"/>
                 </a:solidFill>
               </a:defRPr>
             </a:lvl1pPr>
@@ -1833,7 +1923,7 @@
             <a:pPr indent="0" marL="0">
               <a:buNone/>
             </a:pPr>
-            <a:endParaRPr lang="en-US" sz="3400" dirty="0"/>
+            <a:endParaRPr lang="en-US" sz="3000" dirty="0"/>
           </a:p>
         </p:txBody>
       </p:sp>
@@ -1847,8 +1937,8 @@
         </p:nvSpPr>
         <p:spPr>
           <a:xfrm>
-            <a:off x="548640" y="2651760"/>
-            <a:ext cx="8046720" cy="822960"/>
+            <a:off x="548640" y="2743200"/>
+            <a:ext cx="5120640" cy="822960"/>
           </a:xfrm>
           <a:prstGeom prst="rect">
             <a:avLst/>
@@ -1861,9 +1951,9 @@
           <a:lstStyle>
             <a:lvl1pPr indent="0" marL="0">
               <a:buNone/>
-              <a:defRPr lang="en-US" sz="1600" dirty="0">
-                <a:solidFill>
-                  <a:schemeClr val="accent5"/>
+              <a:defRPr lang="en-US" sz="1500" dirty="0">
+                <a:solidFill>
+                  <a:schemeClr val="tx1"/>
                 </a:solidFill>
               </a:defRPr>
             </a:lvl1pPr>
@@ -1872,7 +1962,7 @@
             <a:pPr indent="0" marL="0">
               <a:buNone/>
             </a:pPr>
-            <a:endParaRPr lang="en-US" sz="1600" dirty="0"/>
+            <a:endParaRPr lang="en-US" sz="1500" dirty="0"/>
           </a:p>
         </p:txBody>
       </p:sp>
@@ -1977,7 +2067,7 @@
                   <a:schemeClr val="accent4"/>
                 </a:solidFill>
               </a:rPr>
-              <a:t>株式会社DreamCreation ｜ クリスマスワークショップパッケージ ご提案</a:t>
+              <a:t>株式会社DreamCreation ｜ ドコモイベント支援向けコンテンツ提案</a:t>
             </a:r>
             <a:endParaRPr lang="en-US" sz="900" dirty="0"/>
           </a:p>
@@ -2380,6 +2470,44 @@
       <p:sp>
         <p:nvSpPr>
           <p:cNvPr id="2" name="Text 0"/>
+          <p:cNvSpPr txBox="1"/>
+          <p:nvPr/>
+        </p:nvSpPr>
+        <p:spPr>
+          <a:xfrm>
+            <a:off x="548640" y="548640"/>
+            <a:ext cx="2926080" cy="365760"/>
+          </a:xfrm>
+          <a:prstGeom prst="rect">
+            <a:avLst/>
+          </a:prstGeom>
+          <a:solidFill>
+            <a:schemeClr val="tx2"/>
+          </a:solidFill>
+          <a:ln/>
+        </p:spPr>
+        <p:txBody>
+          <a:bodyPr wrap="square" lIns="635" tIns="635" rIns="635" bIns="635" rtlCol="0" anchor="ctr"/>
+          <a:lstStyle/>
+          <a:p>
+            <a:pPr algn="ctr" indent="0" marL="0">
+              <a:buNone/>
+            </a:pPr>
+            <a:r>
+              <a:rPr lang="en-US" sz="1300" b="1" dirty="0">
+                <a:solidFill>
+                  <a:schemeClr val="bg1"/>
+                </a:solidFill>
+              </a:rPr>
+              <a:t>ドコモ様向け 提案書</a:t>
+            </a:r>
+            <a:endParaRPr lang="en-US" sz="1300" dirty="0"/>
+          </a:p>
+        </p:txBody>
+      </p:sp>
+      <p:sp>
+        <p:nvSpPr>
+          <p:cNvPr id="3" name="Text 0"/>
           <p:cNvSpPr/>
           <p:nvPr>
             <p:ph idx="100" type="title" hasCustomPrompt="1"/>
@@ -2387,51 +2515,51 @@
         </p:nvSpPr>
         <p:spPr>
           <a:xfrm>
-            <a:off x="548640" y="1417320"/>
-            <a:ext cx="8046720" cy="1188720"/>
-          </a:xfrm>
-          <a:prstGeom prst="rect">
-            <a:avLst/>
-          </a:prstGeom>
-          <a:noFill/>
-          <a:ln/>
-        </p:spPr>
-        <p:txBody>
-          <a:bodyPr wrap="square" rtlCol="0" anchor="ctr"/>
+            <a:off x="548640" y="1371600"/>
+            <a:ext cx="5120640" cy="1280160"/>
+          </a:xfrm>
+          <a:prstGeom prst="rect">
+            <a:avLst/>
+          </a:prstGeom>
+          <a:noFill/>
+          <a:ln/>
+        </p:spPr>
+        <p:txBody>
+          <a:bodyPr wrap="square" lIns="0" tIns="0" rIns="0" bIns="0" rtlCol="0" anchor="ctr"/>
           <a:lstStyle/>
           <a:p>
             <a:pPr indent="0" marL="0">
               <a:buNone/>
             </a:pPr>
             <a:r>
-              <a:rPr lang="en-US" sz="3400" b="1" dirty="0">
-                <a:solidFill>
-                  <a:schemeClr val="bg1"/>
-                </a:solidFill>
-              </a:rPr>
-              <a:t>ドコモショップ</a:t>
-            </a:r>
-            <a:endParaRPr lang="en-US" sz="3400" dirty="0"/>
+              <a:rPr lang="en-US" sz="3000" b="1" dirty="0">
+                <a:solidFill>
+                  <a:schemeClr val="tx2"/>
+                </a:solidFill>
+              </a:rPr>
+              <a:t>ドコモイベント支援向け</a:t>
+            </a:r>
+            <a:endParaRPr lang="en-US" sz="3000" dirty="0"/>
           </a:p>
           <a:p>
             <a:pPr indent="0" marL="0">
               <a:buNone/>
             </a:pPr>
             <a:r>
-              <a:rPr lang="en-US" sz="3400" b="1" dirty="0">
-                <a:solidFill>
-                  <a:schemeClr val="bg1"/>
-                </a:solidFill>
-              </a:rPr>
-              <a:t>クリスマスワークショップパッケージ</a:t>
-            </a:r>
-            <a:endParaRPr lang="en-US" sz="3400" dirty="0"/>
-          </a:p>
-        </p:txBody>
-      </p:sp>
-      <p:sp>
-        <p:nvSpPr>
-          <p:cNvPr id="3" name="Text 0"/>
+              <a:rPr lang="en-US" sz="3000" b="1" dirty="0">
+                <a:solidFill>
+                  <a:schemeClr val="tx2"/>
+                </a:solidFill>
+              </a:rPr>
+              <a:t>コンテンツ提案</a:t>
+            </a:r>
+            <a:endParaRPr lang="en-US" sz="3000" dirty="0"/>
+          </a:p>
+        </p:txBody>
+      </p:sp>
+      <p:sp>
+        <p:nvSpPr>
+          <p:cNvPr id="4" name="Text 0"/>
           <p:cNvSpPr/>
           <p:nvPr>
             <p:ph idx="101" type="body" hasCustomPrompt="1"/>
@@ -2439,67 +2567,45 @@
         </p:nvSpPr>
         <p:spPr>
           <a:xfrm>
-            <a:off x="548640" y="2651760"/>
-            <a:ext cx="8046720" cy="822960"/>
-          </a:xfrm>
-          <a:prstGeom prst="rect">
-            <a:avLst/>
-          </a:prstGeom>
-          <a:noFill/>
-          <a:ln/>
-        </p:spPr>
-        <p:txBody>
-          <a:bodyPr wrap="square" rtlCol="0" anchor="t"/>
+            <a:off x="548640" y="2743200"/>
+            <a:ext cx="5120640" cy="822960"/>
+          </a:xfrm>
+          <a:prstGeom prst="rect">
+            <a:avLst/>
+          </a:prstGeom>
+          <a:noFill/>
+          <a:ln/>
+        </p:spPr>
+        <p:txBody>
+          <a:bodyPr wrap="square" lIns="0" tIns="0" rIns="0" bIns="0" rtlCol="0" anchor="t"/>
           <a:lstStyle/>
           <a:p>
             <a:pPr indent="0" marL="0">
               <a:buNone/>
             </a:pPr>
             <a:r>
-              <a:rPr lang="en-US" sz="1600" dirty="0">
-                <a:solidFill>
-                  <a:schemeClr val="accent5"/>
-                </a:solidFill>
-              </a:rPr>
-              <a:t>毎週ちがう“つくる体験”で、12月の来店を4回に。</a:t>
-            </a:r>
-            <a:endParaRPr lang="en-US" sz="1600" dirty="0"/>
-          </a:p>
-        </p:txBody>
-      </p:sp>
-      <p:sp>
-        <p:nvSpPr>
-          <p:cNvPr id="4" name="Text 2"/>
-          <p:cNvSpPr txBox="1"/>
-          <p:nvPr/>
-        </p:nvSpPr>
-        <p:spPr>
-          <a:xfrm>
-            <a:off x="548640" y="502920"/>
-            <a:ext cx="8046720" cy="365760"/>
-          </a:xfrm>
-          <a:prstGeom prst="rect">
-            <a:avLst/>
-          </a:prstGeom>
-          <a:noFill/>
-          <a:ln/>
-        </p:spPr>
-        <p:txBody>
-          <a:bodyPr wrap="square" lIns="635" tIns="635" rIns="635" bIns="635" rtlCol="0" anchor="t"/>
-          <a:lstStyle/>
+              <a:rPr lang="en-US" sz="1500" dirty="0">
+                <a:solidFill>
+                  <a:schemeClr val="tx1"/>
+                </a:solidFill>
+              </a:rPr>
+              <a:t>クリスマス限定ワークショップで、</a:t>
+            </a:r>
+            <a:endParaRPr lang="en-US" sz="1500" dirty="0"/>
+          </a:p>
           <a:p>
             <a:pPr indent="0" marL="0">
               <a:buNone/>
             </a:pPr>
             <a:r>
-              <a:rPr lang="en-US" sz="1400" dirty="0">
-                <a:solidFill>
-                  <a:schemeClr val="bg1"/>
-                </a:solidFill>
-              </a:rPr>
-              <a:t>株式会社NTTドコモ　チャネル統括部　イベントマネジメント担当 御中</a:t>
-            </a:r>
-            <a:endParaRPr lang="en-US" sz="1400" dirty="0"/>
+              <a:rPr lang="en-US" sz="1500" dirty="0">
+                <a:solidFill>
+                  <a:schemeClr val="tx1"/>
+                </a:solidFill>
+              </a:rPr>
+              <a:t>家族の来店と商談のきっかけを毎週つくる</a:t>
+            </a:r>
+            <a:endParaRPr lang="en-US" sz="1500" dirty="0"/>
           </a:p>
         </p:txBody>
       </p:sp>
@@ -2511,8 +2617,8 @@
         </p:nvSpPr>
         <p:spPr>
           <a:xfrm>
-            <a:off x="548640" y="4206240"/>
-            <a:ext cx="5486400" cy="365760"/>
+            <a:off x="548640" y="3977640"/>
+            <a:ext cx="5303520" cy="640080"/>
           </a:xfrm>
           <a:prstGeom prst="rect">
             <a:avLst/>
@@ -2528,243 +2634,90 @@
               <a:buNone/>
             </a:pPr>
             <a:r>
-              <a:rPr lang="en-US" sz="1400" dirty="0">
-                <a:solidFill>
-                  <a:schemeClr val="bg1"/>
+              <a:rPr lang="en-US" sz="1200" dirty="0">
+                <a:solidFill>
+                  <a:schemeClr val="tx1"/>
+                </a:solidFill>
+              </a:rPr>
+              <a:t>株式会社NTTドコモ　チャネル統括部　イベントマネジメント担当 御中</a:t>
+            </a:r>
+            <a:endParaRPr lang="en-US" sz="1200" dirty="0"/>
+          </a:p>
+          <a:p>
+            <a:pPr indent="0" marL="0">
+              <a:buNone/>
+            </a:pPr>
+            <a:r>
+              <a:rPr lang="en-US" sz="1200" dirty="0">
+                <a:solidFill>
+                  <a:schemeClr val="tx1"/>
                 </a:solidFill>
               </a:rPr>
               <a:t>2026年10月　株式会社DreamCreation</a:t>
             </a:r>
-            <a:endParaRPr lang="en-US" sz="1400" dirty="0"/>
-          </a:p>
-        </p:txBody>
-      </p:sp>
-      <p:sp>
-        <p:nvSpPr>
-          <p:cNvPr id="6" name="cover_globe"/>
-          <p:cNvSpPr/>
-          <p:nvPr/>
-        </p:nvSpPr>
-        <p:spPr>
-          <a:xfrm>
-            <a:off x="7406640" y="3429000"/>
-            <a:ext cx="1005840" cy="1005840"/>
+            <a:endParaRPr lang="en-US" sz="1200" dirty="0"/>
+          </a:p>
+        </p:txBody>
+      </p:sp>
+      <p:pic>
+        <p:nvPicPr>
+          <p:cNvPr id="6" name="cover_img" descr="スノードームの完成イメージ">    </p:cNvPr>
+          <p:cNvPicPr>
+            <a:picLocks noChangeAspect="1"/>
+          </p:cNvPicPr>
+          <p:nvPr/>
+        </p:nvPicPr>
+        <p:blipFill>
+          <a:blip r:embed="rId1"/>
+          <a:stretch>
+            <a:fillRect/>
+          </a:stretch>
+        </p:blipFill>
+        <p:spPr>
+          <a:xfrm>
+            <a:off x="5943600" y="914400"/>
+            <a:ext cx="2743200" cy="2743200"/>
           </a:xfrm>
           <a:prstGeom prst="ellipse">
             <a:avLst/>
           </a:prstGeom>
-          <a:solidFill>
-            <a:srgbClr val="DDEFF7"/>
-          </a:solidFill>
-          <a:ln w="19050">
-            <a:solidFill>
-              <a:srgbClr val="9CC9DD"/>
-            </a:solidFill>
-            <a:prstDash val="solid"/>
-          </a:ln>
-        </p:spPr>
-      </p:sp>
-      <p:sp>
-        <p:nvSpPr>
-          <p:cNvPr id="7" name="cover_tree"/>
-          <p:cNvSpPr/>
-          <p:nvPr/>
-        </p:nvSpPr>
-        <p:spPr>
-          <a:xfrm>
-            <a:off x="7738567" y="3730752"/>
-            <a:ext cx="341986" cy="452628"/>
-          </a:xfrm>
-          <a:prstGeom prst="triangle">
-            <a:avLst/>
-          </a:prstGeom>
-          <a:solidFill>
-            <a:schemeClr val="accent2"/>
-          </a:solidFill>
-          <a:ln w="12700">
-            <a:solidFill>
-              <a:schemeClr val="accent2"/>
-            </a:solidFill>
-            <a:prstDash val="solid"/>
-          </a:ln>
-        </p:spPr>
-      </p:sp>
-      <p:sp>
-        <p:nvSpPr>
-          <p:cNvPr id="8" name="cover_snow0"/>
-          <p:cNvSpPr/>
-          <p:nvPr/>
-        </p:nvSpPr>
-        <p:spPr>
-          <a:xfrm>
-            <a:off x="7607808" y="3680460"/>
-            <a:ext cx="60350" cy="60350"/>
-          </a:xfrm>
-          <a:prstGeom prst="ellipse">
-            <a:avLst/>
-          </a:prstGeom>
-          <a:solidFill>
-            <a:srgbClr val="FFFFFF"/>
-          </a:solidFill>
-          <a:ln w="6350">
-            <a:solidFill>
-              <a:srgbClr val="9CC9DD"/>
-            </a:solidFill>
-            <a:prstDash val="solid"/>
-          </a:ln>
-        </p:spPr>
-      </p:sp>
-      <p:sp>
-        <p:nvSpPr>
-          <p:cNvPr id="9" name="cover_snow1"/>
-          <p:cNvSpPr/>
-          <p:nvPr/>
-        </p:nvSpPr>
-        <p:spPr>
-          <a:xfrm>
-            <a:off x="8110728" y="3630168"/>
-            <a:ext cx="60350" cy="60350"/>
-          </a:xfrm>
-          <a:prstGeom prst="ellipse">
-            <a:avLst/>
-          </a:prstGeom>
-          <a:solidFill>
-            <a:srgbClr val="FFFFFF"/>
-          </a:solidFill>
-          <a:ln w="6350">
-            <a:solidFill>
-              <a:srgbClr val="9CC9DD"/>
-            </a:solidFill>
-            <a:prstDash val="solid"/>
-          </a:ln>
-        </p:spPr>
-      </p:sp>
-      <p:sp>
-        <p:nvSpPr>
-          <p:cNvPr id="10" name="cover_snow2"/>
-          <p:cNvSpPr/>
-          <p:nvPr/>
-        </p:nvSpPr>
-        <p:spPr>
-          <a:xfrm>
-            <a:off x="7658100" y="4032504"/>
-            <a:ext cx="60350" cy="60350"/>
-          </a:xfrm>
-          <a:prstGeom prst="ellipse">
-            <a:avLst/>
-          </a:prstGeom>
-          <a:solidFill>
-            <a:srgbClr val="FFFFFF"/>
-          </a:solidFill>
-          <a:ln w="6350">
-            <a:solidFill>
-              <a:srgbClr val="9CC9DD"/>
-            </a:solidFill>
-            <a:prstDash val="solid"/>
-          </a:ln>
-        </p:spPr>
-      </p:sp>
-      <p:sp>
-        <p:nvSpPr>
-          <p:cNvPr id="11" name="cover_snow3"/>
-          <p:cNvSpPr/>
-          <p:nvPr/>
-        </p:nvSpPr>
-        <p:spPr>
-          <a:xfrm>
-            <a:off x="8161020" y="3982212"/>
-            <a:ext cx="60350" cy="60350"/>
-          </a:xfrm>
-          <a:prstGeom prst="ellipse">
-            <a:avLst/>
-          </a:prstGeom>
-          <a:solidFill>
-            <a:srgbClr val="FFFFFF"/>
-          </a:solidFill>
-          <a:ln w="6350">
-            <a:solidFill>
-              <a:srgbClr val="9CC9DD"/>
-            </a:solidFill>
-            <a:prstDash val="solid"/>
-          </a:ln>
-        </p:spPr>
-      </p:sp>
-      <p:sp>
-        <p:nvSpPr>
-          <p:cNvPr id="12" name="cover_snow4"/>
-          <p:cNvSpPr/>
-          <p:nvPr/>
-        </p:nvSpPr>
-        <p:spPr>
-          <a:xfrm>
-            <a:off x="7909560" y="3579876"/>
-            <a:ext cx="60350" cy="60350"/>
-          </a:xfrm>
-          <a:prstGeom prst="ellipse">
-            <a:avLst/>
-          </a:prstGeom>
-          <a:solidFill>
-            <a:srgbClr val="FFFFFF"/>
-          </a:solidFill>
-          <a:ln w="6350">
-            <a:solidFill>
-              <a:srgbClr val="9CC9DD"/>
-            </a:solidFill>
-            <a:prstDash val="solid"/>
-          </a:ln>
-        </p:spPr>
-      </p:sp>
-      <p:sp>
-        <p:nvSpPr>
-          <p:cNvPr id="13" name="cover_snow5"/>
-          <p:cNvSpPr/>
-          <p:nvPr/>
-        </p:nvSpPr>
-        <p:spPr>
-          <a:xfrm>
-            <a:off x="8030261" y="4133088"/>
-            <a:ext cx="60350" cy="60350"/>
-          </a:xfrm>
-          <a:prstGeom prst="ellipse">
-            <a:avLst/>
-          </a:prstGeom>
-          <a:solidFill>
-            <a:srgbClr val="FFFFFF"/>
-          </a:solidFill>
-          <a:ln w="6350">
-            <a:solidFill>
-              <a:srgbClr val="9CC9DD"/>
-            </a:solidFill>
-            <a:prstDash val="solid"/>
-          </a:ln>
-        </p:spPr>
-      </p:sp>
-      <p:sp>
-        <p:nvSpPr>
-          <p:cNvPr id="14" name="cover_base"/>
-          <p:cNvSpPr/>
-          <p:nvPr/>
-        </p:nvSpPr>
-        <p:spPr>
-          <a:xfrm>
-            <a:off x="7507224" y="4314139"/>
-            <a:ext cx="804672" cy="251460"/>
-          </a:xfrm>
-          <a:prstGeom prst="roundRect">
-            <a:avLst>
-              <a:gd name="adj" fmla="val 18182"/>
-            </a:avLst>
-          </a:prstGeom>
-          <a:solidFill>
-            <a:schemeClr val="accent1"/>
-          </a:solidFill>
-          <a:ln w="12700">
-            <a:solidFill>
-              <a:schemeClr val="accent1"/>
-            </a:solidFill>
-            <a:prstDash val="solid"/>
-          </a:ln>
-        </p:spPr>
+        </p:spPr>
+      </p:pic>
+      <p:sp>
+        <p:nvSpPr>
+          <p:cNvPr id="7" name="Text 4"/>
+          <p:cNvSpPr txBox="1"/>
+          <p:nvPr/>
+        </p:nvSpPr>
+        <p:spPr>
+          <a:xfrm>
+            <a:off x="5943600" y="3794760"/>
+            <a:ext cx="2743200" cy="365760"/>
+          </a:xfrm>
+          <a:prstGeom prst="rect">
+            <a:avLst/>
+          </a:prstGeom>
+          <a:noFill/>
+          <a:ln/>
+        </p:spPr>
+        <p:txBody>
+          <a:bodyPr wrap="square" lIns="635" tIns="635" rIns="635" bIns="635" rtlCol="0" anchor="t"/>
+          <a:lstStyle/>
+          <a:p>
+            <a:pPr algn="ctr" indent="0" marL="0">
+              <a:buNone/>
+            </a:pPr>
+            <a:r>
+              <a:rPr lang="en-US" sz="1500" b="1" dirty="0">
+                <a:solidFill>
+                  <a:schemeClr val="tx2"/>
+                </a:solidFill>
+              </a:rPr>
+              <a:t>2026.11.28 ─ 12.25</a:t>
+            </a:r>
+            <a:endParaRPr lang="en-US" sz="1500" dirty="0"/>
+          </a:p>
+        </p:txBody>
       </p:sp>
     </p:spTree>
   </p:cSld>
@@ -2823,7 +2776,7 @@
                   <a:schemeClr val="tx2"/>
                 </a:solidFill>
               </a:rPr>
-              <a:t>コスプレ（全週で週替わり展開）</a:t>
+              <a:t>ワークショップ開催中ツール（案）</a:t>
             </a:r>
             <a:endParaRPr lang="en-US" sz="2400" dirty="0"/>
           </a:p>
@@ -2831,18 +2784,18 @@
       </p:sp>
       <p:sp>
         <p:nvSpPr>
-          <p:cNvPr id="3" name="cos_0"/>
+          <p:cNvPr id="3" name="tool_0"/>
           <p:cNvSpPr/>
           <p:nvPr/>
         </p:nvSpPr>
         <p:spPr>
           <a:xfrm>
             <a:off x="457200" y="1051560"/>
-            <a:ext cx="2606040" cy="1188720"/>
+            <a:ext cx="4023360" cy="1051560"/>
           </a:xfrm>
           <a:prstGeom prst="roundRect">
             <a:avLst>
-              <a:gd name="adj" fmla="val 6154"/>
+              <a:gd name="adj" fmla="val 6957"/>
             </a:avLst>
           </a:prstGeom>
           <a:solidFill>
@@ -2858,14 +2811,14 @@
       </p:sp>
       <p:sp>
         <p:nvSpPr>
-          <p:cNvPr id="4" name="cos_dot_0"/>
+          <p:cNvPr id="4" name="tool_badge_0"/>
           <p:cNvSpPr/>
           <p:nvPr/>
         </p:nvSpPr>
         <p:spPr>
           <a:xfrm>
-            <a:off x="640080" y="1371600"/>
-            <a:ext cx="548640" cy="548640"/>
+            <a:off x="640080" y="1325880"/>
+            <a:ext cx="457200" cy="457200"/>
           </a:xfrm>
           <a:prstGeom prst="ellipse">
             <a:avLst/>
@@ -2889,31 +2842,31 @@
         </p:nvSpPr>
         <p:spPr>
           <a:xfrm>
-            <a:off x="1325880" y="1234440"/>
-            <a:ext cx="1645920" cy="411480"/>
-          </a:xfrm>
-          <a:prstGeom prst="rect">
-            <a:avLst/>
-          </a:prstGeom>
-          <a:noFill/>
-          <a:ln/>
-        </p:spPr>
-        <p:txBody>
-          <a:bodyPr wrap="square" lIns="635" tIns="635" rIns="635" bIns="635" rtlCol="0" anchor="t"/>
-          <a:lstStyle/>
-          <a:p>
-            <a:pPr indent="0" marL="0">
-              <a:buNone/>
-            </a:pPr>
-            <a:r>
-              <a:rPr lang="en-US" sz="1400" b="1" dirty="0">
-                <a:solidFill>
-                  <a:schemeClr val="tx2"/>
-                </a:solidFill>
-              </a:rPr>
-              <a:t>サンタ（男女）</a:t>
-            </a:r>
-            <a:endParaRPr lang="en-US" sz="1400" dirty="0"/>
+            <a:off x="640080" y="1325880"/>
+            <a:ext cx="457200" cy="457200"/>
+          </a:xfrm>
+          <a:prstGeom prst="rect">
+            <a:avLst/>
+          </a:prstGeom>
+          <a:noFill/>
+          <a:ln/>
+        </p:spPr>
+        <p:txBody>
+          <a:bodyPr wrap="square" lIns="0" tIns="0" rIns="0" bIns="0" rtlCol="0" anchor="ctr"/>
+          <a:lstStyle/>
+          <a:p>
+            <a:pPr algn="ctr" indent="0" marL="0">
+              <a:buNone/>
+            </a:pPr>
+            <a:r>
+              <a:rPr lang="en-US" sz="1300" b="1" dirty="0">
+                <a:solidFill>
+                  <a:schemeClr val="bg1"/>
+                </a:solidFill>
+              </a:rPr>
+              <a:t>A</a:t>
+            </a:r>
+            <a:endParaRPr lang="en-US" sz="1300" dirty="0"/>
           </a:p>
         </p:txBody>
       </p:sp>
@@ -2925,8 +2878,8 @@
         </p:nvSpPr>
         <p:spPr>
           <a:xfrm>
-            <a:off x="1325880" y="1645920"/>
-            <a:ext cx="1645920" cy="502920"/>
+            <a:off x="1234440" y="1161288"/>
+            <a:ext cx="3108960" cy="365760"/>
           </a:xfrm>
           <a:prstGeom prst="rect">
             <a:avLst/>
@@ -2942,31 +2895,67 @@
               <a:buNone/>
             </a:pPr>
             <a:r>
-              <a:rPr lang="en-US" sz="1100" dirty="0">
+              <a:rPr lang="en-US" sz="1500" b="1" dirty="0">
+                <a:solidFill>
+                  <a:schemeClr val="tx2"/>
+                </a:solidFill>
+              </a:rPr>
+              <a:t>スタンド看板</a:t>
+            </a:r>
+            <a:endParaRPr lang="en-US" sz="1500" dirty="0"/>
+          </a:p>
+        </p:txBody>
+      </p:sp>
+      <p:sp>
+        <p:nvSpPr>
+          <p:cNvPr id="7" name="Text 5"/>
+          <p:cNvSpPr txBox="1"/>
+          <p:nvPr/>
+        </p:nvSpPr>
+        <p:spPr>
+          <a:xfrm>
+            <a:off x="1234440" y="1527048"/>
+            <a:ext cx="3108960" cy="502920"/>
+          </a:xfrm>
+          <a:prstGeom prst="rect">
+            <a:avLst/>
+          </a:prstGeom>
+          <a:noFill/>
+          <a:ln/>
+        </p:spPr>
+        <p:txBody>
+          <a:bodyPr wrap="square" lIns="635" tIns="635" rIns="635" bIns="635" rtlCol="0" anchor="t"/>
+          <a:lstStyle/>
+          <a:p>
+            <a:pPr indent="0" marL="0">
+              <a:buNone/>
+            </a:pPr>
+            <a:r>
+              <a:rPr lang="en-US" sz="1200" dirty="0">
                 <a:solidFill>
                   <a:schemeClr val="tx1"/>
                 </a:solidFill>
               </a:rPr>
-              <a:t>帽子・ひげ・ベルト付セット</a:t>
-            </a:r>
-            <a:endParaRPr lang="en-US" sz="1100" dirty="0"/>
-          </a:p>
-        </p:txBody>
-      </p:sp>
-      <p:sp>
-        <p:nvSpPr>
-          <p:cNvPr id="7" name="cos_1"/>
+              <a:t>ツリー型A型看板「ただいまワークショップ開催中」</a:t>
+            </a:r>
+            <a:endParaRPr lang="en-US" sz="1200" dirty="0"/>
+          </a:p>
+        </p:txBody>
+      </p:sp>
+      <p:sp>
+        <p:nvSpPr>
+          <p:cNvPr id="8" name="tool_1"/>
           <p:cNvSpPr/>
           <p:nvPr/>
         </p:nvSpPr>
         <p:spPr>
           <a:xfrm>
-            <a:off x="3246120" y="1051560"/>
-            <a:ext cx="2606040" cy="1188720"/>
+            <a:off x="4663440" y="1051560"/>
+            <a:ext cx="4023360" cy="1051560"/>
           </a:xfrm>
           <a:prstGeom prst="roundRect">
             <a:avLst>
-              <a:gd name="adj" fmla="val 6154"/>
+              <a:gd name="adj" fmla="val 6957"/>
             </a:avLst>
           </a:prstGeom>
           <a:solidFill>
@@ -2982,24 +2971,24 @@
       </p:sp>
       <p:sp>
         <p:nvSpPr>
-          <p:cNvPr id="8" name="cos_dot_1"/>
+          <p:cNvPr id="9" name="tool_badge_1"/>
           <p:cNvSpPr/>
           <p:nvPr/>
         </p:nvSpPr>
         <p:spPr>
           <a:xfrm>
-            <a:off x="3429000" y="1371600"/>
-            <a:ext cx="548640" cy="548640"/>
+            <a:off x="4846320" y="1325880"/>
+            <a:ext cx="457200" cy="457200"/>
           </a:xfrm>
           <a:prstGeom prst="ellipse">
             <a:avLst/>
           </a:prstGeom>
           <a:solidFill>
-            <a:srgbClr val="8B5A2B"/>
+            <a:schemeClr val="tx2"/>
           </a:solidFill>
           <a:ln w="12700">
             <a:solidFill>
-              <a:srgbClr val="8B5A2B"/>
+              <a:schemeClr val="tx2"/>
             </a:solidFill>
             <a:prstDash val="solid"/>
           </a:ln>
@@ -3007,50 +2996,50 @@
       </p:sp>
       <p:sp>
         <p:nvSpPr>
-          <p:cNvPr id="9" name="Text 7"/>
-          <p:cNvSpPr txBox="1"/>
-          <p:nvPr/>
-        </p:nvSpPr>
-        <p:spPr>
-          <a:xfrm>
-            <a:off x="4114800" y="1234440"/>
-            <a:ext cx="1645920" cy="411480"/>
-          </a:xfrm>
-          <a:prstGeom prst="rect">
-            <a:avLst/>
-          </a:prstGeom>
-          <a:noFill/>
-          <a:ln/>
-        </p:spPr>
-        <p:txBody>
-          <a:bodyPr wrap="square" lIns="635" tIns="635" rIns="635" bIns="635" rtlCol="0" anchor="t"/>
-          <a:lstStyle/>
-          <a:p>
-            <a:pPr indent="0" marL="0">
-              <a:buNone/>
-            </a:pPr>
-            <a:r>
-              <a:rPr lang="en-US" sz="1400" b="1" dirty="0">
-                <a:solidFill>
-                  <a:schemeClr val="tx2"/>
-                </a:solidFill>
-              </a:rPr>
-              <a:t>トナカイ</a:t>
-            </a:r>
-            <a:endParaRPr lang="en-US" sz="1400" dirty="0"/>
-          </a:p>
-        </p:txBody>
-      </p:sp>
-      <p:sp>
-        <p:nvSpPr>
           <p:cNvPr id="10" name="Text 8"/>
           <p:cNvSpPr txBox="1"/>
           <p:nvPr/>
         </p:nvSpPr>
         <p:spPr>
           <a:xfrm>
-            <a:off x="4114800" y="1645920"/>
-            <a:ext cx="1645920" cy="502920"/>
+            <a:off x="4846320" y="1325880"/>
+            <a:ext cx="457200" cy="457200"/>
+          </a:xfrm>
+          <a:prstGeom prst="rect">
+            <a:avLst/>
+          </a:prstGeom>
+          <a:noFill/>
+          <a:ln/>
+        </p:spPr>
+        <p:txBody>
+          <a:bodyPr wrap="square" lIns="0" tIns="0" rIns="0" bIns="0" rtlCol="0" anchor="ctr"/>
+          <a:lstStyle/>
+          <a:p>
+            <a:pPr algn="ctr" indent="0" marL="0">
+              <a:buNone/>
+            </a:pPr>
+            <a:r>
+              <a:rPr lang="en-US" sz="1300" b="1" dirty="0">
+                <a:solidFill>
+                  <a:schemeClr val="bg1"/>
+                </a:solidFill>
+              </a:rPr>
+              <a:t>B</a:t>
+            </a:r>
+            <a:endParaRPr lang="en-US" sz="1300" dirty="0"/>
+          </a:p>
+        </p:txBody>
+      </p:sp>
+      <p:sp>
+        <p:nvSpPr>
+          <p:cNvPr id="11" name="Text 9"/>
+          <p:cNvSpPr txBox="1"/>
+          <p:nvPr/>
+        </p:nvSpPr>
+        <p:spPr>
+          <a:xfrm>
+            <a:off x="5440680" y="1161288"/>
+            <a:ext cx="3108960" cy="365760"/>
           </a:xfrm>
           <a:prstGeom prst="rect">
             <a:avLst/>
@@ -3066,31 +3055,67 @@
               <a:buNone/>
             </a:pPr>
             <a:r>
-              <a:rPr lang="en-US" sz="1100" dirty="0">
+              <a:rPr lang="en-US" sz="1500" b="1" dirty="0">
+                <a:solidFill>
+                  <a:schemeClr val="tx2"/>
+                </a:solidFill>
+              </a:rPr>
+              <a:t>のぼり・タペストリー</a:t>
+            </a:r>
+            <a:endParaRPr lang="en-US" sz="1500" dirty="0"/>
+          </a:p>
+        </p:txBody>
+      </p:sp>
+      <p:sp>
+        <p:nvSpPr>
+          <p:cNvPr id="12" name="Text 10"/>
+          <p:cNvSpPr txBox="1"/>
+          <p:nvPr/>
+        </p:nvSpPr>
+        <p:spPr>
+          <a:xfrm>
+            <a:off x="5440680" y="1527048"/>
+            <a:ext cx="3108960" cy="502920"/>
+          </a:xfrm>
+          <a:prstGeom prst="rect">
+            <a:avLst/>
+          </a:prstGeom>
+          <a:noFill/>
+          <a:ln/>
+        </p:spPr>
+        <p:txBody>
+          <a:bodyPr wrap="square" lIns="635" tIns="635" rIns="635" bIns="635" rtlCol="0" anchor="t"/>
+          <a:lstStyle/>
+          <a:p>
+            <a:pPr indent="0" marL="0">
+              <a:buNone/>
+            </a:pPr>
+            <a:r>
+              <a:rPr lang="en-US" sz="1200" dirty="0">
                 <a:solidFill>
                   <a:schemeClr val="tx1"/>
                 </a:solidFill>
               </a:rPr>
-              <a:t>フリース着ぐるみ＋角カチューシャ</a:t>
-            </a:r>
-            <a:endParaRPr lang="en-US" sz="1100" dirty="0"/>
-          </a:p>
-        </p:txBody>
-      </p:sp>
-      <p:sp>
-        <p:nvSpPr>
-          <p:cNvPr id="11" name="cos_2"/>
+              <a:t>クリスマス柄。遠目でも開催がわかる</a:t>
+            </a:r>
+            <a:endParaRPr lang="en-US" sz="1200" dirty="0"/>
+          </a:p>
+        </p:txBody>
+      </p:sp>
+      <p:sp>
+        <p:nvSpPr>
+          <p:cNvPr id="13" name="tool_2"/>
           <p:cNvSpPr/>
           <p:nvPr/>
         </p:nvSpPr>
         <p:spPr>
           <a:xfrm>
-            <a:off x="6035040" y="1051560"/>
-            <a:ext cx="2606040" cy="1188720"/>
+            <a:off x="457200" y="2240280"/>
+            <a:ext cx="4023360" cy="1051560"/>
           </a:xfrm>
           <a:prstGeom prst="roundRect">
             <a:avLst>
-              <a:gd name="adj" fmla="val 6154"/>
+              <a:gd name="adj" fmla="val 6957"/>
             </a:avLst>
           </a:prstGeom>
           <a:solidFill>
@@ -3106,24 +3131,24 @@
       </p:sp>
       <p:sp>
         <p:nvSpPr>
-          <p:cNvPr id="12" name="cos_dot_2"/>
+          <p:cNvPr id="14" name="tool_badge_2"/>
           <p:cNvSpPr/>
           <p:nvPr/>
         </p:nvSpPr>
         <p:spPr>
           <a:xfrm>
-            <a:off x="6217920" y="1371600"/>
-            <a:ext cx="548640" cy="548640"/>
+            <a:off x="640080" y="2514600"/>
+            <a:ext cx="457200" cy="457200"/>
           </a:xfrm>
           <a:prstGeom prst="ellipse">
             <a:avLst/>
           </a:prstGeom>
           <a:solidFill>
-            <a:srgbClr val="9CC9DD"/>
+            <a:schemeClr val="accent1"/>
           </a:solidFill>
           <a:ln w="12700">
             <a:solidFill>
-              <a:srgbClr val="9CC9DD"/>
+              <a:schemeClr val="accent1"/>
             </a:solidFill>
             <a:prstDash val="solid"/>
           </a:ln>
@@ -3131,14 +3156,50 @@
       </p:sp>
       <p:sp>
         <p:nvSpPr>
-          <p:cNvPr id="13" name="Text 11"/>
+          <p:cNvPr id="15" name="Text 13"/>
           <p:cNvSpPr txBox="1"/>
           <p:nvPr/>
         </p:nvSpPr>
         <p:spPr>
           <a:xfrm>
-            <a:off x="6903720" y="1234440"/>
-            <a:ext cx="1645920" cy="411480"/>
+            <a:off x="640080" y="2514600"/>
+            <a:ext cx="457200" cy="457200"/>
+          </a:xfrm>
+          <a:prstGeom prst="rect">
+            <a:avLst/>
+          </a:prstGeom>
+          <a:noFill/>
+          <a:ln/>
+        </p:spPr>
+        <p:txBody>
+          <a:bodyPr wrap="square" lIns="0" tIns="0" rIns="0" bIns="0" rtlCol="0" anchor="ctr"/>
+          <a:lstStyle/>
+          <a:p>
+            <a:pPr algn="ctr" indent="0" marL="0">
+              <a:buNone/>
+            </a:pPr>
+            <a:r>
+              <a:rPr lang="en-US" sz="1300" b="1" dirty="0">
+                <a:solidFill>
+                  <a:schemeClr val="bg1"/>
+                </a:solidFill>
+              </a:rPr>
+              <a:t>C</a:t>
+            </a:r>
+            <a:endParaRPr lang="en-US" sz="1300" dirty="0"/>
+          </a:p>
+        </p:txBody>
+      </p:sp>
+      <p:sp>
+        <p:nvSpPr>
+          <p:cNvPr id="16" name="Text 14"/>
+          <p:cNvSpPr txBox="1"/>
+          <p:nvPr/>
+        </p:nvSpPr>
+        <p:spPr>
+          <a:xfrm>
+            <a:off x="1234440" y="2350008"/>
+            <a:ext cx="3108960" cy="365760"/>
           </a:xfrm>
           <a:prstGeom prst="rect">
             <a:avLst/>
@@ -3154,27 +3215,27 @@
               <a:buNone/>
             </a:pPr>
             <a:r>
-              <a:rPr lang="en-US" sz="1400" b="1" dirty="0">
+              <a:rPr lang="en-US" sz="1500" b="1" dirty="0">
                 <a:solidFill>
                   <a:schemeClr val="tx2"/>
                 </a:solidFill>
               </a:rPr>
-              <a:t>雪だるま</a:t>
-            </a:r>
-            <a:endParaRPr lang="en-US" sz="1400" dirty="0"/>
-          </a:p>
-        </p:txBody>
-      </p:sp>
-      <p:sp>
-        <p:nvSpPr>
-          <p:cNvPr id="14" name="Text 12"/>
+              <a:t>テーブル装飾</a:t>
+            </a:r>
+            <a:endParaRPr lang="en-US" sz="1500" dirty="0"/>
+          </a:p>
+        </p:txBody>
+      </p:sp>
+      <p:sp>
+        <p:nvSpPr>
+          <p:cNvPr id="17" name="Text 15"/>
           <p:cNvSpPr txBox="1"/>
           <p:nvPr/>
         </p:nvSpPr>
         <p:spPr>
           <a:xfrm>
-            <a:off x="6903720" y="1645920"/>
-            <a:ext cx="1645920" cy="502920"/>
+            <a:off x="1234440" y="2715768"/>
+            <a:ext cx="3108960" cy="502920"/>
           </a:xfrm>
           <a:prstGeom prst="rect">
             <a:avLst/>
@@ -3190,31 +3251,31 @@
               <a:buNone/>
             </a:pPr>
             <a:r>
-              <a:rPr lang="en-US" sz="1100" dirty="0">
+              <a:rPr lang="en-US" sz="1200" dirty="0">
                 <a:solidFill>
                   <a:schemeClr val="tx1"/>
                 </a:solidFill>
               </a:rPr>
-              <a:t>着ぐるみ／ポンチョ</a:t>
-            </a:r>
-            <a:endParaRPr lang="en-US" sz="1100" dirty="0"/>
-          </a:p>
-        </p:txBody>
-      </p:sp>
-      <p:sp>
-        <p:nvSpPr>
-          <p:cNvPr id="15" name="cos_3"/>
+              <a:t>赤緑のテーブルクロス、ミニツリー、LEDライト</a:t>
+            </a:r>
+            <a:endParaRPr lang="en-US" sz="1200" dirty="0"/>
+          </a:p>
+        </p:txBody>
+      </p:sp>
+      <p:sp>
+        <p:nvSpPr>
+          <p:cNvPr id="18" name="tool_3"/>
           <p:cNvSpPr/>
           <p:nvPr/>
         </p:nvSpPr>
         <p:spPr>
           <a:xfrm>
-            <a:off x="457200" y="2377440"/>
-            <a:ext cx="2606040" cy="1188720"/>
+            <a:off x="4663440" y="2240280"/>
+            <a:ext cx="4023360" cy="1051560"/>
           </a:xfrm>
           <a:prstGeom prst="roundRect">
             <a:avLst>
-              <a:gd name="adj" fmla="val 6154"/>
+              <a:gd name="adj" fmla="val 6957"/>
             </a:avLst>
           </a:prstGeom>
           <a:solidFill>
@@ -3230,24 +3291,24 @@
       </p:sp>
       <p:sp>
         <p:nvSpPr>
-          <p:cNvPr id="16" name="cos_dot_3"/>
+          <p:cNvPr id="19" name="tool_badge_3"/>
           <p:cNvSpPr/>
           <p:nvPr/>
         </p:nvSpPr>
         <p:spPr>
           <a:xfrm>
-            <a:off x="640080" y="2697480"/>
-            <a:ext cx="548640" cy="548640"/>
+            <a:off x="4846320" y="2514600"/>
+            <a:ext cx="457200" cy="457200"/>
           </a:xfrm>
           <a:prstGeom prst="ellipse">
             <a:avLst/>
           </a:prstGeom>
           <a:solidFill>
-            <a:schemeClr val="accent2"/>
+            <a:schemeClr val="tx2"/>
           </a:solidFill>
           <a:ln w="12700">
             <a:solidFill>
-              <a:schemeClr val="accent2"/>
+              <a:schemeClr val="tx2"/>
             </a:solidFill>
             <a:prstDash val="solid"/>
           </a:ln>
@@ -3255,14 +3316,50 @@
       </p:sp>
       <p:sp>
         <p:nvSpPr>
-          <p:cNvPr id="17" name="Text 15"/>
+          <p:cNvPr id="20" name="Text 18"/>
           <p:cNvSpPr txBox="1"/>
           <p:nvPr/>
         </p:nvSpPr>
         <p:spPr>
           <a:xfrm>
-            <a:off x="1325880" y="2560320"/>
-            <a:ext cx="1645920" cy="411480"/>
+            <a:off x="4846320" y="2514600"/>
+            <a:ext cx="457200" cy="457200"/>
+          </a:xfrm>
+          <a:prstGeom prst="rect">
+            <a:avLst/>
+          </a:prstGeom>
+          <a:noFill/>
+          <a:ln/>
+        </p:spPr>
+        <p:txBody>
+          <a:bodyPr wrap="square" lIns="0" tIns="0" rIns="0" bIns="0" rtlCol="0" anchor="ctr"/>
+          <a:lstStyle/>
+          <a:p>
+            <a:pPr algn="ctr" indent="0" marL="0">
+              <a:buNone/>
+            </a:pPr>
+            <a:r>
+              <a:rPr lang="en-US" sz="1300" b="1" dirty="0">
+                <a:solidFill>
+                  <a:schemeClr val="bg1"/>
+                </a:solidFill>
+              </a:rPr>
+              <a:t>D</a:t>
+            </a:r>
+            <a:endParaRPr lang="en-US" sz="1300" dirty="0"/>
+          </a:p>
+        </p:txBody>
+      </p:sp>
+      <p:sp>
+        <p:nvSpPr>
+          <p:cNvPr id="21" name="Text 19"/>
+          <p:cNvSpPr txBox="1"/>
+          <p:nvPr/>
+        </p:nvSpPr>
+        <p:spPr>
+          <a:xfrm>
+            <a:off x="5440680" y="2350008"/>
+            <a:ext cx="3108960" cy="365760"/>
           </a:xfrm>
           <a:prstGeom prst="rect">
             <a:avLst/>
@@ -3278,27 +3375,27 @@
               <a:buNone/>
             </a:pPr>
             <a:r>
-              <a:rPr lang="en-US" sz="1400" b="1" dirty="0">
+              <a:rPr lang="en-US" sz="1500" b="1" dirty="0">
                 <a:solidFill>
                   <a:schemeClr val="tx2"/>
                 </a:solidFill>
               </a:rPr>
-              <a:t>エルフ</a:t>
-            </a:r>
-            <a:endParaRPr lang="en-US" sz="1400" dirty="0"/>
-          </a:p>
-        </p:txBody>
-      </p:sp>
-      <p:sp>
-        <p:nvSpPr>
-          <p:cNvPr id="18" name="Text 16"/>
+              <a:t>吊り下げPOP</a:t>
+            </a:r>
+            <a:endParaRPr lang="en-US" sz="1500" dirty="0"/>
+          </a:p>
+        </p:txBody>
+      </p:sp>
+      <p:sp>
+        <p:nvSpPr>
+          <p:cNvPr id="22" name="Text 20"/>
           <p:cNvSpPr txBox="1"/>
           <p:nvPr/>
         </p:nvSpPr>
         <p:spPr>
           <a:xfrm>
-            <a:off x="1325880" y="2971800"/>
-            <a:ext cx="1645920" cy="502920"/>
+            <a:off x="5440680" y="2715768"/>
+            <a:ext cx="3108960" cy="502920"/>
           </a:xfrm>
           <a:prstGeom prst="rect">
             <a:avLst/>
@@ -3314,31 +3411,31 @@
               <a:buNone/>
             </a:pPr>
             <a:r>
-              <a:rPr lang="en-US" sz="1100" dirty="0">
+              <a:rPr lang="en-US" sz="1200" dirty="0">
                 <a:solidFill>
                   <a:schemeClr val="tx1"/>
                 </a:solidFill>
               </a:rPr>
-              <a:t>緑の衣装＋とんがり帽子</a:t>
-            </a:r>
-            <a:endParaRPr lang="en-US" sz="1100" dirty="0"/>
-          </a:p>
-        </p:txBody>
-      </p:sp>
-      <p:sp>
-        <p:nvSpPr>
-          <p:cNvPr id="19" name="cos_4"/>
+              <a:t>雪の結晶・オーナメント型で天井から演出</a:t>
+            </a:r>
+            <a:endParaRPr lang="en-US" sz="1200" dirty="0"/>
+          </a:p>
+        </p:txBody>
+      </p:sp>
+      <p:sp>
+        <p:nvSpPr>
+          <p:cNvPr id="23" name="tool_4"/>
           <p:cNvSpPr/>
           <p:nvPr/>
         </p:nvSpPr>
         <p:spPr>
           <a:xfrm>
-            <a:off x="3246120" y="2377440"/>
-            <a:ext cx="2606040" cy="1188720"/>
+            <a:off x="457200" y="3429000"/>
+            <a:ext cx="4023360" cy="1051560"/>
           </a:xfrm>
           <a:prstGeom prst="roundRect">
             <a:avLst>
-              <a:gd name="adj" fmla="val 6154"/>
+              <a:gd name="adj" fmla="val 6957"/>
             </a:avLst>
           </a:prstGeom>
           <a:solidFill>
@@ -3354,24 +3451,24 @@
       </p:sp>
       <p:sp>
         <p:nvSpPr>
-          <p:cNvPr id="20" name="cos_dot_4"/>
+          <p:cNvPr id="24" name="tool_badge_4"/>
           <p:cNvSpPr/>
           <p:nvPr/>
         </p:nvSpPr>
         <p:spPr>
           <a:xfrm>
-            <a:off x="3429000" y="2697480"/>
-            <a:ext cx="548640" cy="548640"/>
+            <a:off x="640080" y="3703320"/>
+            <a:ext cx="457200" cy="457200"/>
           </a:xfrm>
           <a:prstGeom prst="ellipse">
             <a:avLst/>
           </a:prstGeom>
           <a:solidFill>
-            <a:srgbClr val="B7792E"/>
+            <a:schemeClr val="accent1"/>
           </a:solidFill>
           <a:ln w="12700">
             <a:solidFill>
-              <a:srgbClr val="B7792E"/>
+              <a:schemeClr val="accent1"/>
             </a:solidFill>
             <a:prstDash val="solid"/>
           </a:ln>
@@ -3379,14 +3476,50 @@
       </p:sp>
       <p:sp>
         <p:nvSpPr>
-          <p:cNvPr id="21" name="Text 19"/>
+          <p:cNvPr id="25" name="Text 23"/>
           <p:cNvSpPr txBox="1"/>
           <p:nvPr/>
         </p:nvSpPr>
         <p:spPr>
           <a:xfrm>
-            <a:off x="4114800" y="2560320"/>
-            <a:ext cx="1645920" cy="411480"/>
+            <a:off x="640080" y="3703320"/>
+            <a:ext cx="457200" cy="457200"/>
+          </a:xfrm>
+          <a:prstGeom prst="rect">
+            <a:avLst/>
+          </a:prstGeom>
+          <a:noFill/>
+          <a:ln/>
+        </p:spPr>
+        <p:txBody>
+          <a:bodyPr wrap="square" lIns="0" tIns="0" rIns="0" bIns="0" rtlCol="0" anchor="ctr"/>
+          <a:lstStyle/>
+          <a:p>
+            <a:pPr algn="ctr" indent="0" marL="0">
+              <a:buNone/>
+            </a:pPr>
+            <a:r>
+              <a:rPr lang="en-US" sz="1300" b="1" dirty="0">
+                <a:solidFill>
+                  <a:schemeClr val="bg1"/>
+                </a:solidFill>
+              </a:rPr>
+              <a:t>E</a:t>
+            </a:r>
+            <a:endParaRPr lang="en-US" sz="1300" dirty="0"/>
+          </a:p>
+        </p:txBody>
+      </p:sp>
+      <p:sp>
+        <p:nvSpPr>
+          <p:cNvPr id="26" name="Text 24"/>
+          <p:cNvSpPr txBox="1"/>
+          <p:nvPr/>
+        </p:nvSpPr>
+        <p:spPr>
+          <a:xfrm>
+            <a:off x="1234440" y="3538728"/>
+            <a:ext cx="3108960" cy="365760"/>
           </a:xfrm>
           <a:prstGeom prst="rect">
             <a:avLst/>
@@ -3402,27 +3535,27 @@
               <a:buNone/>
             </a:pPr>
             <a:r>
-              <a:rPr lang="en-US" sz="1400" b="1" dirty="0">
+              <a:rPr lang="en-US" sz="1500" b="1" dirty="0">
                 <a:solidFill>
                   <a:schemeClr val="tx2"/>
                 </a:solidFill>
               </a:rPr>
-              <a:t>ジンジャーブレッド</a:t>
-            </a:r>
-            <a:endParaRPr lang="en-US" sz="1400" dirty="0"/>
-          </a:p>
-        </p:txBody>
-      </p:sp>
-      <p:sp>
-        <p:nvSpPr>
-          <p:cNvPr id="22" name="Text 20"/>
+              <a:t>作品ディスプレイ</a:t>
+            </a:r>
+            <a:endParaRPr lang="en-US" sz="1500" dirty="0"/>
+          </a:p>
+        </p:txBody>
+      </p:sp>
+      <p:sp>
+        <p:nvSpPr>
+          <p:cNvPr id="27" name="Text 25"/>
           <p:cNvSpPr txBox="1"/>
           <p:nvPr/>
         </p:nvSpPr>
         <p:spPr>
           <a:xfrm>
-            <a:off x="4114800" y="2971800"/>
-            <a:ext cx="1645920" cy="502920"/>
+            <a:off x="1234440" y="3904488"/>
+            <a:ext cx="3108960" cy="502920"/>
           </a:xfrm>
           <a:prstGeom prst="rect">
             <a:avLst/>
@@ -3438,31 +3571,31 @@
               <a:buNone/>
             </a:pPr>
             <a:r>
-              <a:rPr lang="en-US" sz="1100" dirty="0">
+              <a:rPr lang="en-US" sz="1200" dirty="0">
                 <a:solidFill>
                   <a:schemeClr val="tx1"/>
                 </a:solidFill>
               </a:rPr>
-              <a:t>着ぐるみタイプ</a:t>
-            </a:r>
-            <a:endParaRPr lang="en-US" sz="1100" dirty="0"/>
-          </a:p>
-        </p:txBody>
-      </p:sp>
-      <p:sp>
-        <p:nvSpPr>
-          <p:cNvPr id="23" name="cos_5"/>
+              <a:t>完成見本を展示し、通行客に“つくれるもの”を見せる</a:t>
+            </a:r>
+            <a:endParaRPr lang="en-US" sz="1200" dirty="0"/>
+          </a:p>
+        </p:txBody>
+      </p:sp>
+      <p:sp>
+        <p:nvSpPr>
+          <p:cNvPr id="28" name="tool_5"/>
           <p:cNvSpPr/>
           <p:nvPr/>
         </p:nvSpPr>
         <p:spPr>
           <a:xfrm>
-            <a:off x="6035040" y="2377440"/>
-            <a:ext cx="2606040" cy="1188720"/>
+            <a:off x="4663440" y="3429000"/>
+            <a:ext cx="4023360" cy="1051560"/>
           </a:xfrm>
           <a:prstGeom prst="roundRect">
             <a:avLst>
-              <a:gd name="adj" fmla="val 6154"/>
+              <a:gd name="adj" fmla="val 6957"/>
             </a:avLst>
           </a:prstGeom>
           <a:solidFill>
@@ -3478,24 +3611,24 @@
       </p:sp>
       <p:sp>
         <p:nvSpPr>
-          <p:cNvPr id="24" name="cos_dot_5"/>
+          <p:cNvPr id="29" name="tool_badge_5"/>
           <p:cNvSpPr/>
           <p:nvPr/>
         </p:nvSpPr>
         <p:spPr>
           <a:xfrm>
-            <a:off x="6217920" y="2697480"/>
-            <a:ext cx="548640" cy="548640"/>
+            <a:off x="4846320" y="3703320"/>
+            <a:ext cx="457200" cy="457200"/>
           </a:xfrm>
           <a:prstGeom prst="ellipse">
             <a:avLst/>
           </a:prstGeom>
           <a:solidFill>
-            <a:schemeClr val="accent4"/>
+            <a:schemeClr val="tx2"/>
           </a:solidFill>
           <a:ln w="12700">
             <a:solidFill>
-              <a:schemeClr val="accent4"/>
+              <a:schemeClr val="tx2"/>
             </a:solidFill>
             <a:prstDash val="solid"/>
           </a:ln>
@@ -3503,14 +3636,50 @@
       </p:sp>
       <p:sp>
         <p:nvSpPr>
-          <p:cNvPr id="25" name="Text 23"/>
+          <p:cNvPr id="30" name="Text 28"/>
           <p:cNvSpPr txBox="1"/>
           <p:nvPr/>
         </p:nvSpPr>
         <p:spPr>
           <a:xfrm>
-            <a:off x="6903720" y="2560320"/>
-            <a:ext cx="1645920" cy="411480"/>
+            <a:off x="4846320" y="3703320"/>
+            <a:ext cx="457200" cy="457200"/>
+          </a:xfrm>
+          <a:prstGeom prst="rect">
+            <a:avLst/>
+          </a:prstGeom>
+          <a:noFill/>
+          <a:ln/>
+        </p:spPr>
+        <p:txBody>
+          <a:bodyPr wrap="square" lIns="0" tIns="0" rIns="0" bIns="0" rtlCol="0" anchor="ctr"/>
+          <a:lstStyle/>
+          <a:p>
+            <a:pPr algn="ctr" indent="0" marL="0">
+              <a:buNone/>
+            </a:pPr>
+            <a:r>
+              <a:rPr lang="en-US" sz="1300" b="1" dirty="0">
+                <a:solidFill>
+                  <a:schemeClr val="bg1"/>
+                </a:solidFill>
+              </a:rPr>
+              <a:t>F</a:t>
+            </a:r>
+            <a:endParaRPr lang="en-US" sz="1300" dirty="0"/>
+          </a:p>
+        </p:txBody>
+      </p:sp>
+      <p:sp>
+        <p:nvSpPr>
+          <p:cNvPr id="31" name="Text 29"/>
+          <p:cNvSpPr txBox="1"/>
+          <p:nvPr/>
+        </p:nvSpPr>
+        <p:spPr>
+          <a:xfrm>
+            <a:off x="5440680" y="3538728"/>
+            <a:ext cx="3108960" cy="365760"/>
           </a:xfrm>
           <a:prstGeom prst="rect">
             <a:avLst/>
@@ -3526,27 +3695,27 @@
               <a:buNone/>
             </a:pPr>
             <a:r>
-              <a:rPr lang="en-US" sz="1400" b="1" dirty="0">
+              <a:rPr lang="en-US" sz="1500" b="1" dirty="0">
                 <a:solidFill>
                   <a:schemeClr val="tx2"/>
                 </a:solidFill>
               </a:rPr>
-              <a:t>クリスマスツリー</a:t>
-            </a:r>
-            <a:endParaRPr lang="en-US" sz="1400" dirty="0"/>
-          </a:p>
-        </p:txBody>
-      </p:sp>
-      <p:sp>
-        <p:nvSpPr>
-          <p:cNvPr id="26" name="Text 24"/>
+              <a:t>週替わり告知カード</a:t>
+            </a:r>
+            <a:endParaRPr lang="en-US" sz="1500" dirty="0"/>
+          </a:p>
+        </p:txBody>
+      </p:sp>
+      <p:sp>
+        <p:nvSpPr>
+          <p:cNvPr id="32" name="Text 30"/>
           <p:cNvSpPr txBox="1"/>
           <p:nvPr/>
         </p:nvSpPr>
         <p:spPr>
           <a:xfrm>
-            <a:off x="6903720" y="2971800"/>
-            <a:ext cx="1645920" cy="502920"/>
+            <a:off x="5440680" y="3904488"/>
+            <a:ext cx="3108960" cy="502920"/>
           </a:xfrm>
           <a:prstGeom prst="rect">
             <a:avLst/>
@@ -3562,50 +3731,14 @@
               <a:buNone/>
             </a:pPr>
             <a:r>
-              <a:rPr lang="en-US" sz="1100" dirty="0">
+              <a:rPr lang="en-US" sz="1200" dirty="0">
                 <a:solidFill>
                   <a:schemeClr val="tx1"/>
                 </a:solidFill>
               </a:rPr>
-              <a:t>かぶり物・ポンチョ</a:t>
-            </a:r>
-            <a:endParaRPr lang="en-US" sz="1100" dirty="0"/>
-          </a:p>
-        </p:txBody>
-      </p:sp>
-      <p:sp>
-        <p:nvSpPr>
-          <p:cNvPr id="27" name="Text 25"/>
-          <p:cNvSpPr txBox="1"/>
-          <p:nvPr/>
-        </p:nvSpPr>
-        <p:spPr>
-          <a:xfrm>
-            <a:off x="457200" y="3794760"/>
-            <a:ext cx="8229600" cy="640080"/>
-          </a:xfrm>
-          <a:prstGeom prst="rect">
-            <a:avLst/>
-          </a:prstGeom>
-          <a:noFill/>
-          <a:ln/>
-        </p:spPr>
-        <p:txBody>
-          <a:bodyPr wrap="square" lIns="635" tIns="635" rIns="635" bIns="635" rtlCol="0" anchor="t"/>
-          <a:lstStyle/>
-          <a:p>
-            <a:pPr indent="0" marL="0">
-              <a:buNone/>
-            </a:pPr>
-            <a:r>
-              <a:rPr lang="en-US" sz="1300" dirty="0">
-                <a:solidFill>
-                  <a:schemeClr val="tx1"/>
-                </a:solidFill>
-              </a:rPr>
-              <a:t>Amazonで調達可能な市販衣装から選定（大人サイズ・スタッフ着用）。週ごとに衣装を入れ替え、毎週ちがう店頭の雰囲気をつくります。</a:t>
-            </a:r>
-            <a:endParaRPr lang="en-US" sz="1300" dirty="0"/>
+              <a:t>「来週はこれがつくれる！」で再来店を促す</a:t>
+            </a:r>
+            <a:endParaRPr lang="en-US" sz="1200" dirty="0"/>
           </a:p>
         </p:txBody>
       </p:sp>
@@ -3711,7 +3844,7 @@
                   <a:schemeClr val="tx2"/>
                 </a:solidFill>
               </a:rPr>
-              <a:t>B0ポスター　デザイン案</a:t>
+              <a:t>コスプレ（全週で週替わり展開）</a:t>
             </a:r>
             <a:endParaRPr lang="en-US" sz="2400" dirty="0"/>
           </a:p>
@@ -3719,16 +3852,415 @@
       </p:sp>
       <p:sp>
         <p:nvSpPr>
-          <p:cNvPr id="3" name="poster_A"/>
+          <p:cNvPr id="3" name="cos_0"/>
           <p:cNvSpPr/>
           <p:nvPr/>
         </p:nvSpPr>
         <p:spPr>
           <a:xfrm>
-            <a:off x="1143000" y="1051560"/>
-            <a:ext cx="1234440" cy="1737360"/>
-          </a:xfrm>
-          <a:prstGeom prst="rect">
+            <a:off x="457200" y="1051560"/>
+            <a:ext cx="2606040" cy="1188720"/>
+          </a:xfrm>
+          <a:prstGeom prst="roundRect">
+            <a:avLst>
+              <a:gd name="adj" fmla="val 6154"/>
+            </a:avLst>
+          </a:prstGeom>
+          <a:solidFill>
+            <a:schemeClr val="bg2"/>
+          </a:solidFill>
+          <a:ln w="12700">
+            <a:solidFill>
+              <a:schemeClr val="bg2"/>
+            </a:solidFill>
+            <a:prstDash val="solid"/>
+          </a:ln>
+        </p:spPr>
+      </p:sp>
+      <p:sp>
+        <p:nvSpPr>
+          <p:cNvPr id="4" name="cos_dot_0"/>
+          <p:cNvSpPr/>
+          <p:nvPr/>
+        </p:nvSpPr>
+        <p:spPr>
+          <a:xfrm>
+            <a:off x="640080" y="1371600"/>
+            <a:ext cx="548640" cy="548640"/>
+          </a:xfrm>
+          <a:prstGeom prst="ellipse">
+            <a:avLst/>
+          </a:prstGeom>
+          <a:solidFill>
+            <a:schemeClr val="accent1"/>
+          </a:solidFill>
+          <a:ln w="12700">
+            <a:solidFill>
+              <a:schemeClr val="accent1"/>
+            </a:solidFill>
+            <a:prstDash val="solid"/>
+          </a:ln>
+        </p:spPr>
+      </p:sp>
+      <p:sp>
+        <p:nvSpPr>
+          <p:cNvPr id="5" name="Text 3"/>
+          <p:cNvSpPr txBox="1"/>
+          <p:nvPr/>
+        </p:nvSpPr>
+        <p:spPr>
+          <a:xfrm>
+            <a:off x="1325880" y="1234440"/>
+            <a:ext cx="1645920" cy="411480"/>
+          </a:xfrm>
+          <a:prstGeom prst="rect">
+            <a:avLst/>
+          </a:prstGeom>
+          <a:noFill/>
+          <a:ln/>
+        </p:spPr>
+        <p:txBody>
+          <a:bodyPr wrap="square" lIns="635" tIns="635" rIns="635" bIns="635" rtlCol="0" anchor="t"/>
+          <a:lstStyle/>
+          <a:p>
+            <a:pPr indent="0" marL="0">
+              <a:buNone/>
+            </a:pPr>
+            <a:r>
+              <a:rPr lang="en-US" sz="1400" b="1" dirty="0">
+                <a:solidFill>
+                  <a:schemeClr val="tx2"/>
+                </a:solidFill>
+              </a:rPr>
+              <a:t>サンタ（男女）</a:t>
+            </a:r>
+            <a:endParaRPr lang="en-US" sz="1400" dirty="0"/>
+          </a:p>
+        </p:txBody>
+      </p:sp>
+      <p:sp>
+        <p:nvSpPr>
+          <p:cNvPr id="6" name="Text 4"/>
+          <p:cNvSpPr txBox="1"/>
+          <p:nvPr/>
+        </p:nvSpPr>
+        <p:spPr>
+          <a:xfrm>
+            <a:off x="1325880" y="1645920"/>
+            <a:ext cx="1645920" cy="502920"/>
+          </a:xfrm>
+          <a:prstGeom prst="rect">
+            <a:avLst/>
+          </a:prstGeom>
+          <a:noFill/>
+          <a:ln/>
+        </p:spPr>
+        <p:txBody>
+          <a:bodyPr wrap="square" lIns="635" tIns="635" rIns="635" bIns="635" rtlCol="0" anchor="t"/>
+          <a:lstStyle/>
+          <a:p>
+            <a:pPr indent="0" marL="0">
+              <a:buNone/>
+            </a:pPr>
+            <a:r>
+              <a:rPr lang="en-US" sz="1100" dirty="0">
+                <a:solidFill>
+                  <a:schemeClr val="tx1"/>
+                </a:solidFill>
+              </a:rPr>
+              <a:t>帽子・ひげ・ベルト付セット</a:t>
+            </a:r>
+            <a:endParaRPr lang="en-US" sz="1100" dirty="0"/>
+          </a:p>
+        </p:txBody>
+      </p:sp>
+      <p:sp>
+        <p:nvSpPr>
+          <p:cNvPr id="7" name="cos_1"/>
+          <p:cNvSpPr/>
+          <p:nvPr/>
+        </p:nvSpPr>
+        <p:spPr>
+          <a:xfrm>
+            <a:off x="3246120" y="1051560"/>
+            <a:ext cx="2606040" cy="1188720"/>
+          </a:xfrm>
+          <a:prstGeom prst="roundRect">
+            <a:avLst>
+              <a:gd name="adj" fmla="val 6154"/>
+            </a:avLst>
+          </a:prstGeom>
+          <a:solidFill>
+            <a:schemeClr val="bg2"/>
+          </a:solidFill>
+          <a:ln w="12700">
+            <a:solidFill>
+              <a:schemeClr val="bg2"/>
+            </a:solidFill>
+            <a:prstDash val="solid"/>
+          </a:ln>
+        </p:spPr>
+      </p:sp>
+      <p:sp>
+        <p:nvSpPr>
+          <p:cNvPr id="8" name="cos_dot_1"/>
+          <p:cNvSpPr/>
+          <p:nvPr/>
+        </p:nvSpPr>
+        <p:spPr>
+          <a:xfrm>
+            <a:off x="3429000" y="1371600"/>
+            <a:ext cx="548640" cy="548640"/>
+          </a:xfrm>
+          <a:prstGeom prst="ellipse">
+            <a:avLst/>
+          </a:prstGeom>
+          <a:solidFill>
+            <a:srgbClr val="8B5A2B"/>
+          </a:solidFill>
+          <a:ln w="12700">
+            <a:solidFill>
+              <a:srgbClr val="8B5A2B"/>
+            </a:solidFill>
+            <a:prstDash val="solid"/>
+          </a:ln>
+        </p:spPr>
+      </p:sp>
+      <p:sp>
+        <p:nvSpPr>
+          <p:cNvPr id="9" name="Text 7"/>
+          <p:cNvSpPr txBox="1"/>
+          <p:nvPr/>
+        </p:nvSpPr>
+        <p:spPr>
+          <a:xfrm>
+            <a:off x="4114800" y="1234440"/>
+            <a:ext cx="1645920" cy="411480"/>
+          </a:xfrm>
+          <a:prstGeom prst="rect">
+            <a:avLst/>
+          </a:prstGeom>
+          <a:noFill/>
+          <a:ln/>
+        </p:spPr>
+        <p:txBody>
+          <a:bodyPr wrap="square" lIns="635" tIns="635" rIns="635" bIns="635" rtlCol="0" anchor="t"/>
+          <a:lstStyle/>
+          <a:p>
+            <a:pPr indent="0" marL="0">
+              <a:buNone/>
+            </a:pPr>
+            <a:r>
+              <a:rPr lang="en-US" sz="1400" b="1" dirty="0">
+                <a:solidFill>
+                  <a:schemeClr val="tx2"/>
+                </a:solidFill>
+              </a:rPr>
+              <a:t>トナカイ</a:t>
+            </a:r>
+            <a:endParaRPr lang="en-US" sz="1400" dirty="0"/>
+          </a:p>
+        </p:txBody>
+      </p:sp>
+      <p:sp>
+        <p:nvSpPr>
+          <p:cNvPr id="10" name="Text 8"/>
+          <p:cNvSpPr txBox="1"/>
+          <p:nvPr/>
+        </p:nvSpPr>
+        <p:spPr>
+          <a:xfrm>
+            <a:off x="4114800" y="1645920"/>
+            <a:ext cx="1645920" cy="502920"/>
+          </a:xfrm>
+          <a:prstGeom prst="rect">
+            <a:avLst/>
+          </a:prstGeom>
+          <a:noFill/>
+          <a:ln/>
+        </p:spPr>
+        <p:txBody>
+          <a:bodyPr wrap="square" lIns="635" tIns="635" rIns="635" bIns="635" rtlCol="0" anchor="t"/>
+          <a:lstStyle/>
+          <a:p>
+            <a:pPr indent="0" marL="0">
+              <a:buNone/>
+            </a:pPr>
+            <a:r>
+              <a:rPr lang="en-US" sz="1100" dirty="0">
+                <a:solidFill>
+                  <a:schemeClr val="tx1"/>
+                </a:solidFill>
+              </a:rPr>
+              <a:t>フリース着ぐるみ＋角カチューシャ</a:t>
+            </a:r>
+            <a:endParaRPr lang="en-US" sz="1100" dirty="0"/>
+          </a:p>
+        </p:txBody>
+      </p:sp>
+      <p:sp>
+        <p:nvSpPr>
+          <p:cNvPr id="11" name="cos_2"/>
+          <p:cNvSpPr/>
+          <p:nvPr/>
+        </p:nvSpPr>
+        <p:spPr>
+          <a:xfrm>
+            <a:off x="6035040" y="1051560"/>
+            <a:ext cx="2606040" cy="1188720"/>
+          </a:xfrm>
+          <a:prstGeom prst="roundRect">
+            <a:avLst>
+              <a:gd name="adj" fmla="val 6154"/>
+            </a:avLst>
+          </a:prstGeom>
+          <a:solidFill>
+            <a:schemeClr val="bg2"/>
+          </a:solidFill>
+          <a:ln w="12700">
+            <a:solidFill>
+              <a:schemeClr val="bg2"/>
+            </a:solidFill>
+            <a:prstDash val="solid"/>
+          </a:ln>
+        </p:spPr>
+      </p:sp>
+      <p:sp>
+        <p:nvSpPr>
+          <p:cNvPr id="12" name="cos_dot_2"/>
+          <p:cNvSpPr/>
+          <p:nvPr/>
+        </p:nvSpPr>
+        <p:spPr>
+          <a:xfrm>
+            <a:off x="6217920" y="1371600"/>
+            <a:ext cx="548640" cy="548640"/>
+          </a:xfrm>
+          <a:prstGeom prst="ellipse">
+            <a:avLst/>
+          </a:prstGeom>
+          <a:solidFill>
+            <a:srgbClr val="9CC9DD"/>
+          </a:solidFill>
+          <a:ln w="12700">
+            <a:solidFill>
+              <a:srgbClr val="9CC9DD"/>
+            </a:solidFill>
+            <a:prstDash val="solid"/>
+          </a:ln>
+        </p:spPr>
+      </p:sp>
+      <p:sp>
+        <p:nvSpPr>
+          <p:cNvPr id="13" name="Text 11"/>
+          <p:cNvSpPr txBox="1"/>
+          <p:nvPr/>
+        </p:nvSpPr>
+        <p:spPr>
+          <a:xfrm>
+            <a:off x="6903720" y="1234440"/>
+            <a:ext cx="1645920" cy="411480"/>
+          </a:xfrm>
+          <a:prstGeom prst="rect">
+            <a:avLst/>
+          </a:prstGeom>
+          <a:noFill/>
+          <a:ln/>
+        </p:spPr>
+        <p:txBody>
+          <a:bodyPr wrap="square" lIns="635" tIns="635" rIns="635" bIns="635" rtlCol="0" anchor="t"/>
+          <a:lstStyle/>
+          <a:p>
+            <a:pPr indent="0" marL="0">
+              <a:buNone/>
+            </a:pPr>
+            <a:r>
+              <a:rPr lang="en-US" sz="1400" b="1" dirty="0">
+                <a:solidFill>
+                  <a:schemeClr val="tx2"/>
+                </a:solidFill>
+              </a:rPr>
+              <a:t>雪だるま</a:t>
+            </a:r>
+            <a:endParaRPr lang="en-US" sz="1400" dirty="0"/>
+          </a:p>
+        </p:txBody>
+      </p:sp>
+      <p:sp>
+        <p:nvSpPr>
+          <p:cNvPr id="14" name="Text 12"/>
+          <p:cNvSpPr txBox="1"/>
+          <p:nvPr/>
+        </p:nvSpPr>
+        <p:spPr>
+          <a:xfrm>
+            <a:off x="6903720" y="1645920"/>
+            <a:ext cx="1645920" cy="502920"/>
+          </a:xfrm>
+          <a:prstGeom prst="rect">
+            <a:avLst/>
+          </a:prstGeom>
+          <a:noFill/>
+          <a:ln/>
+        </p:spPr>
+        <p:txBody>
+          <a:bodyPr wrap="square" lIns="635" tIns="635" rIns="635" bIns="635" rtlCol="0" anchor="t"/>
+          <a:lstStyle/>
+          <a:p>
+            <a:pPr indent="0" marL="0">
+              <a:buNone/>
+            </a:pPr>
+            <a:r>
+              <a:rPr lang="en-US" sz="1100" dirty="0">
+                <a:solidFill>
+                  <a:schemeClr val="tx1"/>
+                </a:solidFill>
+              </a:rPr>
+              <a:t>着ぐるみ／ポンチョ</a:t>
+            </a:r>
+            <a:endParaRPr lang="en-US" sz="1100" dirty="0"/>
+          </a:p>
+        </p:txBody>
+      </p:sp>
+      <p:sp>
+        <p:nvSpPr>
+          <p:cNvPr id="15" name="cos_3"/>
+          <p:cNvSpPr/>
+          <p:nvPr/>
+        </p:nvSpPr>
+        <p:spPr>
+          <a:xfrm>
+            <a:off x="457200" y="2377440"/>
+            <a:ext cx="2606040" cy="1188720"/>
+          </a:xfrm>
+          <a:prstGeom prst="roundRect">
+            <a:avLst>
+              <a:gd name="adj" fmla="val 6154"/>
+            </a:avLst>
+          </a:prstGeom>
+          <a:solidFill>
+            <a:schemeClr val="bg2"/>
+          </a:solidFill>
+          <a:ln w="12700">
+            <a:solidFill>
+              <a:schemeClr val="bg2"/>
+            </a:solidFill>
+            <a:prstDash val="solid"/>
+          </a:ln>
+        </p:spPr>
+      </p:sp>
+      <p:sp>
+        <p:nvSpPr>
+          <p:cNvPr id="16" name="cos_dot_3"/>
+          <p:cNvSpPr/>
+          <p:nvPr/>
+        </p:nvSpPr>
+        <p:spPr>
+          <a:xfrm>
+            <a:off x="640080" y="2697480"/>
+            <a:ext cx="548640" cy="548640"/>
+          </a:xfrm>
+          <a:prstGeom prst="ellipse">
             <a:avLst/>
           </a:prstGeom>
           <a:solidFill>
@@ -3744,50 +4276,50 @@
       </p:sp>
       <p:sp>
         <p:nvSpPr>
-          <p:cNvPr id="4" name="Text 2"/>
+          <p:cNvPr id="17" name="Text 15"/>
           <p:cNvSpPr txBox="1"/>
           <p:nvPr/>
         </p:nvSpPr>
         <p:spPr>
           <a:xfrm>
-            <a:off x="1143000" y="1051560"/>
-            <a:ext cx="1234440" cy="1737360"/>
-          </a:xfrm>
-          <a:prstGeom prst="rect">
-            <a:avLst/>
-          </a:prstGeom>
-          <a:noFill/>
-          <a:ln/>
-        </p:spPr>
-        <p:txBody>
-          <a:bodyPr wrap="square" lIns="0" tIns="0" rIns="0" bIns="0" rtlCol="0" anchor="ctr"/>
-          <a:lstStyle/>
-          <a:p>
-            <a:pPr algn="ctr" indent="0" marL="0">
-              <a:buNone/>
-            </a:pPr>
-            <a:r>
-              <a:rPr lang="en-US" sz="4000" b="1" dirty="0">
-                <a:solidFill>
-                  <a:schemeClr val="bg1"/>
-                </a:solidFill>
-              </a:rPr>
-              <a:t>A</a:t>
-            </a:r>
-            <a:endParaRPr lang="en-US" sz="4000" dirty="0"/>
-          </a:p>
-        </p:txBody>
-      </p:sp>
-      <p:sp>
-        <p:nvSpPr>
-          <p:cNvPr id="5" name="Text 3"/>
+            <a:off x="1325880" y="2560320"/>
+            <a:ext cx="1645920" cy="411480"/>
+          </a:xfrm>
+          <a:prstGeom prst="rect">
+            <a:avLst/>
+          </a:prstGeom>
+          <a:noFill/>
+          <a:ln/>
+        </p:spPr>
+        <p:txBody>
+          <a:bodyPr wrap="square" lIns="635" tIns="635" rIns="635" bIns="635" rtlCol="0" anchor="t"/>
+          <a:lstStyle/>
+          <a:p>
+            <a:pPr indent="0" marL="0">
+              <a:buNone/>
+            </a:pPr>
+            <a:r>
+              <a:rPr lang="en-US" sz="1400" b="1" dirty="0">
+                <a:solidFill>
+                  <a:schemeClr val="tx2"/>
+                </a:solidFill>
+              </a:rPr>
+              <a:t>エルフ</a:t>
+            </a:r>
+            <a:endParaRPr lang="en-US" sz="1400" dirty="0"/>
+          </a:p>
+        </p:txBody>
+      </p:sp>
+      <p:sp>
+        <p:nvSpPr>
+          <p:cNvPr id="18" name="Text 16"/>
           <p:cNvSpPr txBox="1"/>
           <p:nvPr/>
         </p:nvSpPr>
         <p:spPr>
           <a:xfrm>
-            <a:off x="457200" y="2880360"/>
-            <a:ext cx="2606040" cy="365760"/>
+            <a:off x="1325880" y="2971800"/>
+            <a:ext cx="1645920" cy="502920"/>
           </a:xfrm>
           <a:prstGeom prst="rect">
             <a:avLst/>
@@ -3799,77 +4331,43 @@
           <a:bodyPr wrap="square" lIns="635" tIns="635" rIns="635" bIns="635" rtlCol="0" anchor="t"/>
           <a:lstStyle/>
           <a:p>
-            <a:pPr algn="ctr" indent="0" marL="0">
-              <a:buNone/>
-            </a:pPr>
-            <a:r>
-              <a:rPr lang="en-US" sz="1500" b="1" dirty="0">
-                <a:solidFill>
-                  <a:schemeClr val="tx2"/>
-                </a:solidFill>
-              </a:rPr>
-              <a:t>スノードーム主役</a:t>
-            </a:r>
-            <a:endParaRPr lang="en-US" sz="1500" dirty="0"/>
-          </a:p>
-        </p:txBody>
-      </p:sp>
-      <p:sp>
-        <p:nvSpPr>
-          <p:cNvPr id="6" name="Text 4"/>
-          <p:cNvSpPr txBox="1"/>
-          <p:nvPr/>
-        </p:nvSpPr>
-        <p:spPr>
-          <a:xfrm>
-            <a:off x="548640" y="3291840"/>
-            <a:ext cx="2423160" cy="914400"/>
-          </a:xfrm>
-          <a:prstGeom prst="rect">
-            <a:avLst/>
-          </a:prstGeom>
-          <a:noFill/>
-          <a:ln/>
-        </p:spPr>
-        <p:txBody>
-          <a:bodyPr wrap="square" lIns="635" tIns="635" rIns="635" bIns="635" rtlCol="0" anchor="t"/>
-          <a:lstStyle/>
-          <a:p>
             <a:pPr indent="0" marL="0">
               <a:buNone/>
             </a:pPr>
             <a:r>
-              <a:rPr lang="en-US" sz="1200" dirty="0">
+              <a:rPr lang="en-US" sz="1100" dirty="0">
                 <a:solidFill>
                   <a:schemeClr val="tx1"/>
                 </a:solidFill>
               </a:rPr>
-              <a:t>大きなスノードームの中に雪景色とお店。「あなただけのスノードームをつくろう」</a:t>
-            </a:r>
-            <a:endParaRPr lang="en-US" sz="1200" dirty="0"/>
-          </a:p>
-        </p:txBody>
-      </p:sp>
-      <p:sp>
-        <p:nvSpPr>
-          <p:cNvPr id="7" name="poster_B"/>
+              <a:t>緑の衣装＋とんがり帽子</a:t>
+            </a:r>
+            <a:endParaRPr lang="en-US" sz="1100" dirty="0"/>
+          </a:p>
+        </p:txBody>
+      </p:sp>
+      <p:sp>
+        <p:nvSpPr>
+          <p:cNvPr id="19" name="cos_4"/>
           <p:cNvSpPr/>
           <p:nvPr/>
         </p:nvSpPr>
         <p:spPr>
           <a:xfrm>
-            <a:off x="3931920" y="1051560"/>
-            <a:ext cx="1234440" cy="1737360"/>
-          </a:xfrm>
-          <a:prstGeom prst="rect">
-            <a:avLst/>
+            <a:off x="3246120" y="2377440"/>
+            <a:ext cx="2606040" cy="1188720"/>
+          </a:xfrm>
+          <a:prstGeom prst="roundRect">
+            <a:avLst>
+              <a:gd name="adj" fmla="val 6154"/>
+            </a:avLst>
           </a:prstGeom>
           <a:solidFill>
-            <a:schemeClr val="accent1"/>
+            <a:schemeClr val="bg2"/>
           </a:solidFill>
           <a:ln w="12700">
             <a:solidFill>
-              <a:schemeClr val="accent1"/>
+              <a:schemeClr val="bg2"/>
             </a:solidFill>
             <a:prstDash val="solid"/>
           </a:ln>
@@ -3877,132 +4375,24 @@
       </p:sp>
       <p:sp>
         <p:nvSpPr>
-          <p:cNvPr id="8" name="Text 6"/>
-          <p:cNvSpPr txBox="1"/>
-          <p:nvPr/>
-        </p:nvSpPr>
-        <p:spPr>
-          <a:xfrm>
-            <a:off x="3931920" y="1051560"/>
-            <a:ext cx="1234440" cy="1737360"/>
-          </a:xfrm>
-          <a:prstGeom prst="rect">
-            <a:avLst/>
-          </a:prstGeom>
-          <a:noFill/>
-          <a:ln/>
-        </p:spPr>
-        <p:txBody>
-          <a:bodyPr wrap="square" lIns="0" tIns="0" rIns="0" bIns="0" rtlCol="0" anchor="ctr"/>
-          <a:lstStyle/>
-          <a:p>
-            <a:pPr algn="ctr" indent="0" marL="0">
-              <a:buNone/>
-            </a:pPr>
-            <a:r>
-              <a:rPr lang="en-US" sz="4000" b="1" dirty="0">
-                <a:solidFill>
-                  <a:schemeClr val="bg1"/>
-                </a:solidFill>
-              </a:rPr>
-              <a:t>B</a:t>
-            </a:r>
-            <a:endParaRPr lang="en-US" sz="4000" dirty="0"/>
-          </a:p>
-        </p:txBody>
-      </p:sp>
-      <p:sp>
-        <p:nvSpPr>
-          <p:cNvPr id="9" name="Text 7"/>
-          <p:cNvSpPr txBox="1"/>
-          <p:nvPr/>
-        </p:nvSpPr>
-        <p:spPr>
-          <a:xfrm>
-            <a:off x="3246120" y="2880360"/>
-            <a:ext cx="2606040" cy="365760"/>
-          </a:xfrm>
-          <a:prstGeom prst="rect">
-            <a:avLst/>
-          </a:prstGeom>
-          <a:noFill/>
-          <a:ln/>
-        </p:spPr>
-        <p:txBody>
-          <a:bodyPr wrap="square" lIns="635" tIns="635" rIns="635" bIns="635" rtlCol="0" anchor="t"/>
-          <a:lstStyle/>
-          <a:p>
-            <a:pPr algn="ctr" indent="0" marL="0">
-              <a:buNone/>
-            </a:pPr>
-            <a:r>
-              <a:rPr lang="en-US" sz="1500" b="1" dirty="0">
-                <a:solidFill>
-                  <a:schemeClr val="accent1"/>
-                </a:solidFill>
-              </a:rPr>
-              <a:t>4週カレンダー型（推奨）</a:t>
-            </a:r>
-            <a:endParaRPr lang="en-US" sz="1500" dirty="0"/>
-          </a:p>
-        </p:txBody>
-      </p:sp>
-      <p:sp>
-        <p:nvSpPr>
-          <p:cNvPr id="10" name="Text 8"/>
-          <p:cNvSpPr txBox="1"/>
-          <p:nvPr/>
-        </p:nvSpPr>
-        <p:spPr>
-          <a:xfrm>
-            <a:off x="3337560" y="3291840"/>
-            <a:ext cx="2423160" cy="914400"/>
-          </a:xfrm>
-          <a:prstGeom prst="rect">
-            <a:avLst/>
-          </a:prstGeom>
-          <a:noFill/>
-          <a:ln/>
-        </p:spPr>
-        <p:txBody>
-          <a:bodyPr wrap="square" lIns="635" tIns="635" rIns="635" bIns="635" rtlCol="0" anchor="t"/>
-          <a:lstStyle/>
-          <a:p>
-            <a:pPr indent="0" marL="0">
-              <a:buNone/>
-            </a:pPr>
-            <a:r>
-              <a:rPr lang="en-US" sz="1200" dirty="0">
-                <a:solidFill>
-                  <a:schemeClr val="tx1"/>
-                </a:solidFill>
-              </a:rPr>
-              <a:t>4週の内容をアドベントカレンダー風に配置。「毎週かわる！クリスマスワークショップ」</a:t>
-            </a:r>
-            <a:endParaRPr lang="en-US" sz="1200" dirty="0"/>
-          </a:p>
-        </p:txBody>
-      </p:sp>
-      <p:sp>
-        <p:nvSpPr>
-          <p:cNvPr id="11" name="poster_C"/>
+          <p:cNvPr id="20" name="cos_dot_4"/>
           <p:cNvSpPr/>
           <p:nvPr/>
         </p:nvSpPr>
         <p:spPr>
           <a:xfrm>
-            <a:off x="6720840" y="1051560"/>
-            <a:ext cx="1234440" cy="1737360"/>
-          </a:xfrm>
-          <a:prstGeom prst="rect">
+            <a:off x="3429000" y="2697480"/>
+            <a:ext cx="548640" cy="548640"/>
+          </a:xfrm>
+          <a:prstGeom prst="ellipse">
             <a:avLst/>
           </a:prstGeom>
           <a:solidFill>
-            <a:schemeClr val="accent2"/>
+            <a:srgbClr val="B7792E"/>
           </a:solidFill>
           <a:ln w="12700">
             <a:solidFill>
-              <a:schemeClr val="accent2"/>
+              <a:srgbClr val="B7792E"/>
             </a:solidFill>
             <a:prstDash val="solid"/>
           </a:ln>
@@ -4010,50 +4400,50 @@
       </p:sp>
       <p:sp>
         <p:nvSpPr>
-          <p:cNvPr id="12" name="Text 10"/>
+          <p:cNvPr id="21" name="Text 19"/>
           <p:cNvSpPr txBox="1"/>
           <p:nvPr/>
         </p:nvSpPr>
         <p:spPr>
           <a:xfrm>
-            <a:off x="6720840" y="1051560"/>
-            <a:ext cx="1234440" cy="1737360"/>
-          </a:xfrm>
-          <a:prstGeom prst="rect">
-            <a:avLst/>
-          </a:prstGeom>
-          <a:noFill/>
-          <a:ln/>
-        </p:spPr>
-        <p:txBody>
-          <a:bodyPr wrap="square" lIns="0" tIns="0" rIns="0" bIns="0" rtlCol="0" anchor="ctr"/>
-          <a:lstStyle/>
-          <a:p>
-            <a:pPr algn="ctr" indent="0" marL="0">
-              <a:buNone/>
-            </a:pPr>
-            <a:r>
-              <a:rPr lang="en-US" sz="4000" b="1" dirty="0">
-                <a:solidFill>
-                  <a:schemeClr val="bg1"/>
-                </a:solidFill>
-              </a:rPr>
-              <a:t>C</a:t>
-            </a:r>
-            <a:endParaRPr lang="en-US" sz="4000" dirty="0"/>
-          </a:p>
-        </p:txBody>
-      </p:sp>
-      <p:sp>
-        <p:nvSpPr>
-          <p:cNvPr id="13" name="Text 11"/>
+            <a:off x="4114800" y="2560320"/>
+            <a:ext cx="1645920" cy="411480"/>
+          </a:xfrm>
+          <a:prstGeom prst="rect">
+            <a:avLst/>
+          </a:prstGeom>
+          <a:noFill/>
+          <a:ln/>
+        </p:spPr>
+        <p:txBody>
+          <a:bodyPr wrap="square" lIns="635" tIns="635" rIns="635" bIns="635" rtlCol="0" anchor="t"/>
+          <a:lstStyle/>
+          <a:p>
+            <a:pPr indent="0" marL="0">
+              <a:buNone/>
+            </a:pPr>
+            <a:r>
+              <a:rPr lang="en-US" sz="1400" b="1" dirty="0">
+                <a:solidFill>
+                  <a:schemeClr val="tx2"/>
+                </a:solidFill>
+              </a:rPr>
+              <a:t>ジンジャーブレッド</a:t>
+            </a:r>
+            <a:endParaRPr lang="en-US" sz="1400" dirty="0"/>
+          </a:p>
+        </p:txBody>
+      </p:sp>
+      <p:sp>
+        <p:nvSpPr>
+          <p:cNvPr id="22" name="Text 20"/>
           <p:cNvSpPr txBox="1"/>
           <p:nvPr/>
         </p:nvSpPr>
         <p:spPr>
           <a:xfrm>
-            <a:off x="6035040" y="2880360"/>
-            <a:ext cx="2606040" cy="365760"/>
+            <a:off x="4114800" y="2971800"/>
+            <a:ext cx="1645920" cy="502920"/>
           </a:xfrm>
           <a:prstGeom prst="rect">
             <a:avLst/>
@@ -4065,31 +4455,119 @@
           <a:bodyPr wrap="square" lIns="635" tIns="635" rIns="635" bIns="635" rtlCol="0" anchor="t"/>
           <a:lstStyle/>
           <a:p>
-            <a:pPr algn="ctr" indent="0" marL="0">
-              <a:buNone/>
-            </a:pPr>
-            <a:r>
-              <a:rPr lang="en-US" sz="1500" b="1" dirty="0">
+            <a:pPr indent="0" marL="0">
+              <a:buNone/>
+            </a:pPr>
+            <a:r>
+              <a:rPr lang="en-US" sz="1100" dirty="0">
+                <a:solidFill>
+                  <a:schemeClr val="tx1"/>
+                </a:solidFill>
+              </a:rPr>
+              <a:t>着ぐるみタイプ</a:t>
+            </a:r>
+            <a:endParaRPr lang="en-US" sz="1100" dirty="0"/>
+          </a:p>
+        </p:txBody>
+      </p:sp>
+      <p:sp>
+        <p:nvSpPr>
+          <p:cNvPr id="23" name="cos_5"/>
+          <p:cNvSpPr/>
+          <p:nvPr/>
+        </p:nvSpPr>
+        <p:spPr>
+          <a:xfrm>
+            <a:off x="6035040" y="2377440"/>
+            <a:ext cx="2606040" cy="1188720"/>
+          </a:xfrm>
+          <a:prstGeom prst="roundRect">
+            <a:avLst>
+              <a:gd name="adj" fmla="val 6154"/>
+            </a:avLst>
+          </a:prstGeom>
+          <a:solidFill>
+            <a:schemeClr val="bg2"/>
+          </a:solidFill>
+          <a:ln w="12700">
+            <a:solidFill>
+              <a:schemeClr val="bg2"/>
+            </a:solidFill>
+            <a:prstDash val="solid"/>
+          </a:ln>
+        </p:spPr>
+      </p:sp>
+      <p:sp>
+        <p:nvSpPr>
+          <p:cNvPr id="24" name="cos_dot_5"/>
+          <p:cNvSpPr/>
+          <p:nvPr/>
+        </p:nvSpPr>
+        <p:spPr>
+          <a:xfrm>
+            <a:off x="6217920" y="2697480"/>
+            <a:ext cx="548640" cy="548640"/>
+          </a:xfrm>
+          <a:prstGeom prst="ellipse">
+            <a:avLst/>
+          </a:prstGeom>
+          <a:solidFill>
+            <a:schemeClr val="accent4"/>
+          </a:solidFill>
+          <a:ln w="12700">
+            <a:solidFill>
+              <a:schemeClr val="accent4"/>
+            </a:solidFill>
+            <a:prstDash val="solid"/>
+          </a:ln>
+        </p:spPr>
+      </p:sp>
+      <p:sp>
+        <p:nvSpPr>
+          <p:cNvPr id="25" name="Text 23"/>
+          <p:cNvSpPr txBox="1"/>
+          <p:nvPr/>
+        </p:nvSpPr>
+        <p:spPr>
+          <a:xfrm>
+            <a:off x="6903720" y="2560320"/>
+            <a:ext cx="1645920" cy="411480"/>
+          </a:xfrm>
+          <a:prstGeom prst="rect">
+            <a:avLst/>
+          </a:prstGeom>
+          <a:noFill/>
+          <a:ln/>
+        </p:spPr>
+        <p:txBody>
+          <a:bodyPr wrap="square" lIns="635" tIns="635" rIns="635" bIns="635" rtlCol="0" anchor="t"/>
+          <a:lstStyle/>
+          <a:p>
+            <a:pPr indent="0" marL="0">
+              <a:buNone/>
+            </a:pPr>
+            <a:r>
+              <a:rPr lang="en-US" sz="1400" b="1" dirty="0">
                 <a:solidFill>
                   <a:schemeClr val="tx2"/>
                 </a:solidFill>
               </a:rPr>
-              <a:t>キャラクター型</a:t>
-            </a:r>
-            <a:endParaRPr lang="en-US" sz="1500" dirty="0"/>
-          </a:p>
-        </p:txBody>
-      </p:sp>
-      <p:sp>
-        <p:nvSpPr>
-          <p:cNvPr id="14" name="Text 12"/>
+              <a:t>クリスマスツリー</a:t>
+            </a:r>
+            <a:endParaRPr lang="en-US" sz="1400" dirty="0"/>
+          </a:p>
+        </p:txBody>
+      </p:sp>
+      <p:sp>
+        <p:nvSpPr>
+          <p:cNvPr id="26" name="Text 24"/>
           <p:cNvSpPr txBox="1"/>
           <p:nvPr/>
         </p:nvSpPr>
         <p:spPr>
           <a:xfrm>
-            <a:off x="6126480" y="3291840"/>
-            <a:ext cx="2423160" cy="914400"/>
+            <a:off x="6903720" y="2971800"/>
+            <a:ext cx="1645920" cy="502920"/>
           </a:xfrm>
           <a:prstGeom prst="rect">
             <a:avLst/>
@@ -4105,27 +4583,27 @@
               <a:buNone/>
             </a:pPr>
             <a:r>
-              <a:rPr lang="en-US" sz="1200" dirty="0">
+              <a:rPr lang="en-US" sz="1100" dirty="0">
                 <a:solidFill>
                   <a:schemeClr val="tx1"/>
                 </a:solidFill>
               </a:rPr>
-              <a:t>サンタ・雪だるま・トナカイが手招き。完成作品の写真を大きく配置</a:t>
-            </a:r>
-            <a:endParaRPr lang="en-US" sz="1200" dirty="0"/>
-          </a:p>
-        </p:txBody>
-      </p:sp>
-      <p:sp>
-        <p:nvSpPr>
-          <p:cNvPr id="15" name="Text 13"/>
+              <a:t>かぶり物・ポンチョ</a:t>
+            </a:r>
+            <a:endParaRPr lang="en-US" sz="1100" dirty="0"/>
+          </a:p>
+        </p:txBody>
+      </p:sp>
+      <p:sp>
+        <p:nvSpPr>
+          <p:cNvPr id="27" name="Text 25"/>
           <p:cNvSpPr txBox="1"/>
           <p:nvPr/>
         </p:nvSpPr>
         <p:spPr>
           <a:xfrm>
-            <a:off x="457200" y="4297680"/>
-            <a:ext cx="8229600" cy="365760"/>
+            <a:off x="457200" y="3794760"/>
+            <a:ext cx="8229600" cy="640080"/>
           </a:xfrm>
           <a:prstGeom prst="rect">
             <a:avLst/>
@@ -4141,14 +4619,14 @@
               <a:buNone/>
             </a:pPr>
             <a:r>
-              <a:rPr lang="en-US" sz="1200" dirty="0">
-                <a:solidFill>
-                  <a:schemeClr val="accent4"/>
-                </a:solidFill>
-              </a:rPr>
-              <a:t>共通：開催日時・対象年齢・参加条件・店舗名記入欄（手書き可）</a:t>
-            </a:r>
-            <a:endParaRPr lang="en-US" sz="1200" dirty="0"/>
+              <a:rPr lang="en-US" sz="1300" dirty="0">
+                <a:solidFill>
+                  <a:schemeClr val="tx1"/>
+                </a:solidFill>
+              </a:rPr>
+              <a:t>Amazonで調達可能な市販衣装から選定（大人サイズ・スタッフ着用）。週ごとに衣装を入れ替え、毎週ちがう店頭の雰囲気をつくります。</a:t>
+            </a:r>
+            <a:endParaRPr lang="en-US" sz="1300" dirty="0"/>
           </a:p>
         </p:txBody>
       </p:sp>
@@ -4254,7 +4732,7 @@
                   <a:schemeClr val="tx2"/>
                 </a:solidFill>
               </a:rPr>
-              <a:t>運用フロー・スケジュール</a:t>
+              <a:t>B0ボードPOP　デザイン案</a:t>
             </a:r>
             <a:endParaRPr lang="en-US" sz="2400" dirty="0"/>
           </a:p>
@@ -4262,24 +4740,24 @@
       </p:sp>
       <p:sp>
         <p:nvSpPr>
-          <p:cNvPr id="3" name="step_0"/>
+          <p:cNvPr id="3" name="poster_A"/>
           <p:cNvSpPr/>
           <p:nvPr/>
         </p:nvSpPr>
         <p:spPr>
           <a:xfrm>
-            <a:off x="457200" y="1188720"/>
-            <a:ext cx="1600200" cy="731520"/>
-          </a:xfrm>
-          <a:prstGeom prst="chevron">
+            <a:off x="1143000" y="1051560"/>
+            <a:ext cx="1234440" cy="1737360"/>
+          </a:xfrm>
+          <a:prstGeom prst="rect">
             <a:avLst/>
           </a:prstGeom>
           <a:solidFill>
-            <a:schemeClr val="accent2"/>
+            <a:schemeClr val="accent5"/>
           </a:solidFill>
           <a:ln w="12700">
             <a:solidFill>
-              <a:schemeClr val="bg1"/>
+              <a:schemeClr val="accent1"/>
             </a:solidFill>
             <a:prstDash val="solid"/>
           </a:ln>
@@ -4293,8 +4771,8 @@
         </p:nvSpPr>
         <p:spPr>
           <a:xfrm>
-            <a:off x="640080" y="1188720"/>
-            <a:ext cx="1280160" cy="731520"/>
+            <a:off x="1143000" y="1051560"/>
+            <a:ext cx="1234440" cy="1737360"/>
           </a:xfrm>
           <a:prstGeom prst="rect">
             <a:avLst/>
@@ -4310,14 +4788,14 @@
               <a:buNone/>
             </a:pPr>
             <a:r>
-              <a:rPr lang="en-US" sz="1300" b="1" dirty="0">
-                <a:solidFill>
-                  <a:schemeClr val="bg1"/>
-                </a:solidFill>
-              </a:rPr>
-              <a:t>ご発注</a:t>
-            </a:r>
-            <a:endParaRPr lang="en-US" sz="1300" dirty="0"/>
+              <a:rPr lang="en-US" sz="4000" b="1" dirty="0">
+                <a:solidFill>
+                  <a:schemeClr val="tx2"/>
+                </a:solidFill>
+              </a:rPr>
+              <a:t>A</a:t>
+            </a:r>
+            <a:endParaRPr lang="en-US" sz="4000" dirty="0"/>
           </a:p>
         </p:txBody>
       </p:sp>
@@ -4329,8 +4807,8 @@
         </p:nvSpPr>
         <p:spPr>
           <a:xfrm>
-            <a:off x="457200" y="2011680"/>
-            <a:ext cx="1600200" cy="685800"/>
+            <a:off x="457200" y="2880360"/>
+            <a:ext cx="2606040" cy="365760"/>
           </a:xfrm>
           <a:prstGeom prst="rect">
             <a:avLst/>
@@ -4346,51 +4824,73 @@
               <a:buNone/>
             </a:pPr>
             <a:r>
+              <a:rPr lang="en-US" sz="1500" b="1" dirty="0">
+                <a:solidFill>
+                  <a:schemeClr val="tx2"/>
+                </a:solidFill>
+              </a:rPr>
+              <a:t>スノードーム主役</a:t>
+            </a:r>
+            <a:endParaRPr lang="en-US" sz="1500" dirty="0"/>
+          </a:p>
+        </p:txBody>
+      </p:sp>
+      <p:sp>
+        <p:nvSpPr>
+          <p:cNvPr id="6" name="Text 4"/>
+          <p:cNvSpPr txBox="1"/>
+          <p:nvPr/>
+        </p:nvSpPr>
+        <p:spPr>
+          <a:xfrm>
+            <a:off x="548640" y="3291840"/>
+            <a:ext cx="2423160" cy="914400"/>
+          </a:xfrm>
+          <a:prstGeom prst="rect">
+            <a:avLst/>
+          </a:prstGeom>
+          <a:noFill/>
+          <a:ln/>
+        </p:spPr>
+        <p:txBody>
+          <a:bodyPr wrap="square" lIns="635" tIns="635" rIns="635" bIns="635" rtlCol="0" anchor="t"/>
+          <a:lstStyle/>
+          <a:p>
+            <a:pPr indent="0" marL="0">
+              <a:buNone/>
+            </a:pPr>
+            <a:r>
               <a:rPr lang="en-US" sz="1200" dirty="0">
                 <a:solidFill>
                   <a:schemeClr val="tx1"/>
                 </a:solidFill>
               </a:rPr>
-              <a:t>10月下旬〜</a:t>
+              <a:t>大きなスノードームの中に雪景色とお店。「あなただけのスノードームをつくろう」</a:t>
             </a:r>
             <a:endParaRPr lang="en-US" sz="1200" dirty="0"/>
           </a:p>
-          <a:p>
-            <a:pPr algn="ctr" indent="0" marL="0">
-              <a:buNone/>
-            </a:pPr>
-            <a:r>
-              <a:rPr lang="en-US" sz="1200" dirty="0">
-                <a:solidFill>
-                  <a:schemeClr val="tx1"/>
-                </a:solidFill>
-              </a:rPr>
-              <a:t>11月上旬</a:t>
-            </a:r>
-            <a:endParaRPr lang="en-US" sz="1200" dirty="0"/>
-          </a:p>
-        </p:txBody>
-      </p:sp>
-      <p:sp>
-        <p:nvSpPr>
-          <p:cNvPr id="6" name="step_1"/>
+        </p:txBody>
+      </p:sp>
+      <p:sp>
+        <p:nvSpPr>
+          <p:cNvPr id="7" name="poster_B"/>
           <p:cNvSpPr/>
           <p:nvPr/>
         </p:nvSpPr>
         <p:spPr>
           <a:xfrm>
-            <a:off x="2139696" y="1188720"/>
-            <a:ext cx="1600200" cy="731520"/>
-          </a:xfrm>
-          <a:prstGeom prst="chevron">
+            <a:off x="3931920" y="1051560"/>
+            <a:ext cx="1234440" cy="1737360"/>
+          </a:xfrm>
+          <a:prstGeom prst="rect">
             <a:avLst/>
           </a:prstGeom>
           <a:solidFill>
-            <a:schemeClr val="accent2"/>
+            <a:schemeClr val="tx2"/>
           </a:solidFill>
           <a:ln w="12700">
             <a:solidFill>
-              <a:schemeClr val="bg1"/>
+              <a:schemeClr val="tx2"/>
             </a:solidFill>
             <a:prstDash val="solid"/>
           </a:ln>
@@ -4398,50 +4898,50 @@
       </p:sp>
       <p:sp>
         <p:nvSpPr>
-          <p:cNvPr id="7" name="Text 5"/>
-          <p:cNvSpPr txBox="1"/>
-          <p:nvPr/>
-        </p:nvSpPr>
-        <p:spPr>
-          <a:xfrm>
-            <a:off x="2322576" y="1188720"/>
-            <a:ext cx="1280160" cy="731520"/>
-          </a:xfrm>
-          <a:prstGeom prst="rect">
-            <a:avLst/>
-          </a:prstGeom>
-          <a:noFill/>
-          <a:ln/>
-        </p:spPr>
-        <p:txBody>
-          <a:bodyPr wrap="square" lIns="0" tIns="0" rIns="0" bIns="0" rtlCol="0" anchor="ctr"/>
-          <a:lstStyle/>
-          <a:p>
-            <a:pPr algn="ctr" indent="0" marL="0">
-              <a:buNone/>
-            </a:pPr>
-            <a:r>
-              <a:rPr lang="en-US" sz="1300" b="1" dirty="0">
-                <a:solidFill>
-                  <a:schemeClr val="bg1"/>
-                </a:solidFill>
-              </a:rPr>
-              <a:t>制作・調達</a:t>
-            </a:r>
-            <a:endParaRPr lang="en-US" sz="1300" dirty="0"/>
-          </a:p>
-        </p:txBody>
-      </p:sp>
-      <p:sp>
-        <p:nvSpPr>
           <p:cNvPr id="8" name="Text 6"/>
           <p:cNvSpPr txBox="1"/>
           <p:nvPr/>
         </p:nvSpPr>
         <p:spPr>
           <a:xfrm>
-            <a:off x="2139696" y="2011680"/>
-            <a:ext cx="1600200" cy="685800"/>
+            <a:off x="3931920" y="1051560"/>
+            <a:ext cx="1234440" cy="1737360"/>
+          </a:xfrm>
+          <a:prstGeom prst="rect">
+            <a:avLst/>
+          </a:prstGeom>
+          <a:noFill/>
+          <a:ln/>
+        </p:spPr>
+        <p:txBody>
+          <a:bodyPr wrap="square" lIns="0" tIns="0" rIns="0" bIns="0" rtlCol="0" anchor="ctr"/>
+          <a:lstStyle/>
+          <a:p>
+            <a:pPr algn="ctr" indent="0" marL="0">
+              <a:buNone/>
+            </a:pPr>
+            <a:r>
+              <a:rPr lang="en-US" sz="4000" b="1" dirty="0">
+                <a:solidFill>
+                  <a:schemeClr val="bg1"/>
+                </a:solidFill>
+              </a:rPr>
+              <a:t>B</a:t>
+            </a:r>
+            <a:endParaRPr lang="en-US" sz="4000" dirty="0"/>
+          </a:p>
+        </p:txBody>
+      </p:sp>
+      <p:sp>
+        <p:nvSpPr>
+          <p:cNvPr id="9" name="Text 7"/>
+          <p:cNvSpPr txBox="1"/>
+          <p:nvPr/>
+        </p:nvSpPr>
+        <p:spPr>
+          <a:xfrm>
+            <a:off x="3246120" y="2880360"/>
+            <a:ext cx="2606040" cy="365760"/>
           </a:xfrm>
           <a:prstGeom prst="rect">
             <a:avLst/>
@@ -4457,51 +4957,73 @@
               <a:buNone/>
             </a:pPr>
             <a:r>
+              <a:rPr lang="en-US" sz="1500" b="1" dirty="0">
+                <a:solidFill>
+                  <a:schemeClr val="accent1"/>
+                </a:solidFill>
+              </a:rPr>
+              <a:t>4週カレンダー型（推奨）</a:t>
+            </a:r>
+            <a:endParaRPr lang="en-US" sz="1500" dirty="0"/>
+          </a:p>
+        </p:txBody>
+      </p:sp>
+      <p:sp>
+        <p:nvSpPr>
+          <p:cNvPr id="10" name="Text 8"/>
+          <p:cNvSpPr txBox="1"/>
+          <p:nvPr/>
+        </p:nvSpPr>
+        <p:spPr>
+          <a:xfrm>
+            <a:off x="3337560" y="3291840"/>
+            <a:ext cx="2423160" cy="914400"/>
+          </a:xfrm>
+          <a:prstGeom prst="rect">
+            <a:avLst/>
+          </a:prstGeom>
+          <a:noFill/>
+          <a:ln/>
+        </p:spPr>
+        <p:txBody>
+          <a:bodyPr wrap="square" lIns="635" tIns="635" rIns="635" bIns="635" rtlCol="0" anchor="t"/>
+          <a:lstStyle/>
+          <a:p>
+            <a:pPr indent="0" marL="0">
+              <a:buNone/>
+            </a:pPr>
+            <a:r>
               <a:rPr lang="en-US" sz="1200" dirty="0">
                 <a:solidFill>
                   <a:schemeClr val="tx1"/>
                 </a:solidFill>
               </a:rPr>
-              <a:t>キット・ポスター</a:t>
+              <a:t>4週の内容をアドベントカレンダー風に配置。「毎週かわる！クリスマスワークショップ」</a:t>
             </a:r>
             <a:endParaRPr lang="en-US" sz="1200" dirty="0"/>
           </a:p>
-          <a:p>
-            <a:pPr algn="ctr" indent="0" marL="0">
-              <a:buNone/>
-            </a:pPr>
-            <a:r>
-              <a:rPr lang="en-US" sz="1200" dirty="0">
-                <a:solidFill>
-                  <a:schemeClr val="tx1"/>
-                </a:solidFill>
-              </a:rPr>
-              <a:t>衣装・ツール</a:t>
-            </a:r>
-            <a:endParaRPr lang="en-US" sz="1200" dirty="0"/>
-          </a:p>
-        </p:txBody>
-      </p:sp>
-      <p:sp>
-        <p:nvSpPr>
-          <p:cNvPr id="9" name="step_2"/>
+        </p:txBody>
+      </p:sp>
+      <p:sp>
+        <p:nvSpPr>
+          <p:cNvPr id="11" name="poster_C"/>
           <p:cNvSpPr/>
           <p:nvPr/>
         </p:nvSpPr>
         <p:spPr>
           <a:xfrm>
-            <a:off x="3822192" y="1188720"/>
-            <a:ext cx="1600200" cy="731520"/>
-          </a:xfrm>
-          <a:prstGeom prst="chevron">
+            <a:off x="6720840" y="1051560"/>
+            <a:ext cx="1234440" cy="1737360"/>
+          </a:xfrm>
+          <a:prstGeom prst="rect">
             <a:avLst/>
           </a:prstGeom>
           <a:solidFill>
-            <a:schemeClr val="accent2"/>
+            <a:schemeClr val="accent5"/>
           </a:solidFill>
           <a:ln w="12700">
             <a:solidFill>
-              <a:schemeClr val="bg1"/>
+              <a:schemeClr val="accent1"/>
             </a:solidFill>
             <a:prstDash val="solid"/>
           </a:ln>
@@ -4509,14 +5031,14 @@
       </p:sp>
       <p:sp>
         <p:nvSpPr>
-          <p:cNvPr id="10" name="Text 8"/>
+          <p:cNvPr id="12" name="Text 10"/>
           <p:cNvSpPr txBox="1"/>
           <p:nvPr/>
         </p:nvSpPr>
         <p:spPr>
           <a:xfrm>
-            <a:off x="4005072" y="1188720"/>
-            <a:ext cx="1280160" cy="731520"/>
+            <a:off x="6720840" y="1051560"/>
+            <a:ext cx="1234440" cy="1737360"/>
           </a:xfrm>
           <a:prstGeom prst="rect">
             <a:avLst/>
@@ -4532,91 +5054,16 @@
               <a:buNone/>
             </a:pPr>
             <a:r>
-              <a:rPr lang="en-US" sz="1300" b="1" dirty="0">
-                <a:solidFill>
-                  <a:schemeClr val="bg1"/>
-                </a:solidFill>
-              </a:rPr>
-              <a:t>配送</a:t>
-            </a:r>
-            <a:endParaRPr lang="en-US" sz="1300" dirty="0"/>
-          </a:p>
-        </p:txBody>
-      </p:sp>
-      <p:sp>
-        <p:nvSpPr>
-          <p:cNvPr id="11" name="Text 9"/>
-          <p:cNvSpPr txBox="1"/>
-          <p:nvPr/>
-        </p:nvSpPr>
-        <p:spPr>
-          <a:xfrm>
-            <a:off x="3822192" y="2011680"/>
-            <a:ext cx="1600200" cy="685800"/>
-          </a:xfrm>
-          <a:prstGeom prst="rect">
-            <a:avLst/>
-          </a:prstGeom>
-          <a:noFill/>
-          <a:ln/>
-        </p:spPr>
-        <p:txBody>
-          <a:bodyPr wrap="square" lIns="635" tIns="635" rIns="635" bIns="635" rtlCol="0" anchor="t"/>
-          <a:lstStyle/>
-          <a:p>
-            <a:pPr algn="ctr" indent="0" marL="0">
-              <a:buNone/>
-            </a:pPr>
-            <a:r>
-              <a:rPr lang="en-US" sz="1200" dirty="0">
-                <a:solidFill>
-                  <a:schemeClr val="tx1"/>
-                </a:solidFill>
-              </a:rPr>
-              <a:t>10地区へ</a:t>
-            </a:r>
-            <a:endParaRPr lang="en-US" sz="1200" dirty="0"/>
-          </a:p>
-          <a:p>
-            <a:pPr algn="ctr" indent="0" marL="0">
-              <a:buNone/>
-            </a:pPr>
-            <a:r>
-              <a:rPr lang="en-US" sz="1200" dirty="0">
-                <a:solidFill>
-                  <a:schemeClr val="tx1"/>
-                </a:solidFill>
-              </a:rPr>
-              <a:t>11月下旬着</a:t>
-            </a:r>
-            <a:endParaRPr lang="en-US" sz="1200" dirty="0"/>
-          </a:p>
-        </p:txBody>
-      </p:sp>
-      <p:sp>
-        <p:nvSpPr>
-          <p:cNvPr id="12" name="step_3"/>
-          <p:cNvSpPr/>
-          <p:nvPr/>
-        </p:nvSpPr>
-        <p:spPr>
-          <a:xfrm>
-            <a:off x="5504688" y="1188720"/>
-            <a:ext cx="1600200" cy="731520"/>
-          </a:xfrm>
-          <a:prstGeom prst="chevron">
-            <a:avLst/>
-          </a:prstGeom>
-          <a:solidFill>
-            <a:schemeClr val="accent1"/>
-          </a:solidFill>
-          <a:ln w="12700">
-            <a:solidFill>
-              <a:schemeClr val="bg1"/>
-            </a:solidFill>
-            <a:prstDash val="solid"/>
-          </a:ln>
-        </p:spPr>
+              <a:rPr lang="en-US" sz="4000" b="1" dirty="0">
+                <a:solidFill>
+                  <a:schemeClr val="tx2"/>
+                </a:solidFill>
+              </a:rPr>
+              <a:t>C</a:t>
+            </a:r>
+            <a:endParaRPr lang="en-US" sz="4000" dirty="0"/>
+          </a:p>
+        </p:txBody>
       </p:sp>
       <p:sp>
         <p:nvSpPr>
@@ -4626,31 +5073,31 @@
         </p:nvSpPr>
         <p:spPr>
           <a:xfrm>
-            <a:off x="5687568" y="1188720"/>
-            <a:ext cx="1280160" cy="731520"/>
-          </a:xfrm>
-          <a:prstGeom prst="rect">
-            <a:avLst/>
-          </a:prstGeom>
-          <a:noFill/>
-          <a:ln/>
-        </p:spPr>
-        <p:txBody>
-          <a:bodyPr wrap="square" lIns="0" tIns="0" rIns="0" bIns="0" rtlCol="0" anchor="ctr"/>
+            <a:off x="6035040" y="2880360"/>
+            <a:ext cx="2606040" cy="365760"/>
+          </a:xfrm>
+          <a:prstGeom prst="rect">
+            <a:avLst/>
+          </a:prstGeom>
+          <a:noFill/>
+          <a:ln/>
+        </p:spPr>
+        <p:txBody>
+          <a:bodyPr wrap="square" lIns="635" tIns="635" rIns="635" bIns="635" rtlCol="0" anchor="t"/>
           <a:lstStyle/>
           <a:p>
             <a:pPr algn="ctr" indent="0" marL="0">
               <a:buNone/>
             </a:pPr>
             <a:r>
-              <a:rPr lang="en-US" sz="1300" b="1" dirty="0">
-                <a:solidFill>
-                  <a:schemeClr val="bg1"/>
-                </a:solidFill>
-              </a:rPr>
-              <a:t>店舗で実施</a:t>
-            </a:r>
-            <a:endParaRPr lang="en-US" sz="1300" dirty="0"/>
+              <a:rPr lang="en-US" sz="1500" b="1" dirty="0">
+                <a:solidFill>
+                  <a:schemeClr val="tx2"/>
+                </a:solidFill>
+              </a:rPr>
+              <a:t>キャラクター型</a:t>
+            </a:r>
+            <a:endParaRPr lang="en-US" sz="1500" dirty="0"/>
           </a:p>
         </p:txBody>
       </p:sp>
@@ -4662,8 +5109,8 @@
         </p:nvSpPr>
         <p:spPr>
           <a:xfrm>
-            <a:off x="5504688" y="2011680"/>
-            <a:ext cx="1600200" cy="685800"/>
+            <a:off x="6126480" y="3291840"/>
+            <a:ext cx="2423160" cy="914400"/>
           </a:xfrm>
           <a:prstGeom prst="rect">
             <a:avLst/>
@@ -4675,7 +5122,7 @@
           <a:bodyPr wrap="square" lIns="635" tIns="635" rIns="635" bIns="635" rtlCol="0" anchor="t"/>
           <a:lstStyle/>
           <a:p>
-            <a:pPr algn="ctr" indent="0" marL="0">
+            <a:pPr indent="0" marL="0">
               <a:buNone/>
             </a:pPr>
             <a:r>
@@ -4684,236 +5131,45 @@
                   <a:schemeClr val="tx1"/>
                 </a:solidFill>
               </a:rPr>
-              <a:t>11/28〜12/25</a:t>
+              <a:t>サンタ・雪だるま・トナカイが手招き。完成作品の写真を大きく配置</a:t>
             </a:r>
             <a:endParaRPr lang="en-US" sz="1200" dirty="0"/>
           </a:p>
-          <a:p>
-            <a:pPr algn="ctr" indent="0" marL="0">
+        </p:txBody>
+      </p:sp>
+      <p:sp>
+        <p:nvSpPr>
+          <p:cNvPr id="15" name="Text 13"/>
+          <p:cNvSpPr txBox="1"/>
+          <p:nvPr/>
+        </p:nvSpPr>
+        <p:spPr>
+          <a:xfrm>
+            <a:off x="457200" y="4297680"/>
+            <a:ext cx="8229600" cy="365760"/>
+          </a:xfrm>
+          <a:prstGeom prst="rect">
+            <a:avLst/>
+          </a:prstGeom>
+          <a:noFill/>
+          <a:ln/>
+        </p:spPr>
+        <p:txBody>
+          <a:bodyPr wrap="square" lIns="635" tIns="635" rIns="635" bIns="635" rtlCol="0" anchor="t"/>
+          <a:lstStyle/>
+          <a:p>
+            <a:pPr indent="0" marL="0">
               <a:buNone/>
             </a:pPr>
             <a:r>
               <a:rPr lang="en-US" sz="1200" dirty="0">
                 <a:solidFill>
-                  <a:schemeClr val="tx1"/>
-                </a:solidFill>
-              </a:rPr>
-              <a:t>4週間</a:t>
+                  <a:schemeClr val="accent4"/>
+                </a:solidFill>
+              </a:rPr>
+              <a:t>共通：開催日時・対象年齢・参加条件・店舗名記入欄（手書き可）</a:t>
             </a:r>
             <a:endParaRPr lang="en-US" sz="1200" dirty="0"/>
-          </a:p>
-        </p:txBody>
-      </p:sp>
-      <p:sp>
-        <p:nvSpPr>
-          <p:cNvPr id="15" name="step_4"/>
-          <p:cNvSpPr/>
-          <p:nvPr/>
-        </p:nvSpPr>
-        <p:spPr>
-          <a:xfrm>
-            <a:off x="7187184" y="1188720"/>
-            <a:ext cx="1600200" cy="731520"/>
-          </a:xfrm>
-          <a:prstGeom prst="chevron">
-            <a:avLst/>
-          </a:prstGeom>
-          <a:solidFill>
-            <a:schemeClr val="accent2"/>
-          </a:solidFill>
-          <a:ln w="12700">
-            <a:solidFill>
-              <a:schemeClr val="bg1"/>
-            </a:solidFill>
-            <a:prstDash val="solid"/>
-          </a:ln>
-        </p:spPr>
-      </p:sp>
-      <p:sp>
-        <p:nvSpPr>
-          <p:cNvPr id="16" name="Text 14"/>
-          <p:cNvSpPr txBox="1"/>
-          <p:nvPr/>
-        </p:nvSpPr>
-        <p:spPr>
-          <a:xfrm>
-            <a:off x="7370064" y="1188720"/>
-            <a:ext cx="1280160" cy="731520"/>
-          </a:xfrm>
-          <a:prstGeom prst="rect">
-            <a:avLst/>
-          </a:prstGeom>
-          <a:noFill/>
-          <a:ln/>
-        </p:spPr>
-        <p:txBody>
-          <a:bodyPr wrap="square" lIns="0" tIns="0" rIns="0" bIns="0" rtlCol="0" anchor="ctr"/>
-          <a:lstStyle/>
-          <a:p>
-            <a:pPr algn="ctr" indent="0" marL="0">
-              <a:buNone/>
-            </a:pPr>
-            <a:r>
-              <a:rPr lang="en-US" sz="1300" b="1" dirty="0">
-                <a:solidFill>
-                  <a:schemeClr val="bg1"/>
-                </a:solidFill>
-              </a:rPr>
-              <a:t>回収</a:t>
-            </a:r>
-            <a:endParaRPr lang="en-US" sz="1300" dirty="0"/>
-          </a:p>
-        </p:txBody>
-      </p:sp>
-      <p:sp>
-        <p:nvSpPr>
-          <p:cNvPr id="17" name="Text 15"/>
-          <p:cNvSpPr txBox="1"/>
-          <p:nvPr/>
-        </p:nvSpPr>
-        <p:spPr>
-          <a:xfrm>
-            <a:off x="7187184" y="2011680"/>
-            <a:ext cx="1600200" cy="685800"/>
-          </a:xfrm>
-          <a:prstGeom prst="rect">
-            <a:avLst/>
-          </a:prstGeom>
-          <a:noFill/>
-          <a:ln/>
-        </p:spPr>
-        <p:txBody>
-          <a:bodyPr wrap="square" lIns="635" tIns="635" rIns="635" bIns="635" rtlCol="0" anchor="t"/>
-          <a:lstStyle/>
-          <a:p>
-            <a:pPr algn="ctr" indent="0" marL="0">
-              <a:buNone/>
-            </a:pPr>
-            <a:r>
-              <a:rPr lang="en-US" sz="1200" dirty="0">
-                <a:solidFill>
-                  <a:schemeClr val="tx1"/>
-                </a:solidFill>
-              </a:rPr>
-              <a:t>期間終了後</a:t>
-            </a:r>
-            <a:endParaRPr lang="en-US" sz="1200" dirty="0"/>
-          </a:p>
-          <a:p>
-            <a:pPr algn="ctr" indent="0" marL="0">
-              <a:buNone/>
-            </a:pPr>
-            <a:r>
-              <a:rPr lang="en-US" sz="1200" dirty="0">
-                <a:solidFill>
-                  <a:schemeClr val="tx1"/>
-                </a:solidFill>
-              </a:rPr>
-              <a:t>アーチを回収</a:t>
-            </a:r>
-            <a:endParaRPr lang="en-US" sz="1200" dirty="0"/>
-          </a:p>
-        </p:txBody>
-      </p:sp>
-      <p:sp>
-        <p:nvSpPr>
-          <p:cNvPr id="18" name="ops_note"/>
-          <p:cNvSpPr/>
-          <p:nvPr/>
-        </p:nvSpPr>
-        <p:spPr>
-          <a:xfrm>
-            <a:off x="457200" y="2926080"/>
-            <a:ext cx="8229600" cy="1600200"/>
-          </a:xfrm>
-          <a:prstGeom prst="roundRect">
-            <a:avLst>
-              <a:gd name="adj" fmla="val 4571"/>
-            </a:avLst>
-          </a:prstGeom>
-          <a:solidFill>
-            <a:schemeClr val="bg2"/>
-          </a:solidFill>
-          <a:ln w="12700">
-            <a:solidFill>
-              <a:schemeClr val="bg2"/>
-            </a:solidFill>
-            <a:prstDash val="solid"/>
-          </a:ln>
-        </p:spPr>
-      </p:sp>
-      <p:sp>
-        <p:nvSpPr>
-          <p:cNvPr id="19" name="Text 17"/>
-          <p:cNvSpPr txBox="1"/>
-          <p:nvPr/>
-        </p:nvSpPr>
-        <p:spPr>
-          <a:xfrm>
-            <a:off x="640080" y="3017520"/>
-            <a:ext cx="7863840" cy="1417320"/>
-          </a:xfrm>
-          <a:prstGeom prst="rect">
-            <a:avLst/>
-          </a:prstGeom>
-          <a:noFill/>
-          <a:ln/>
-        </p:spPr>
-        <p:txBody>
-          <a:bodyPr wrap="square" lIns="635" tIns="635" rIns="635" bIns="635" rtlCol="0" anchor="t"/>
-          <a:lstStyle/>
-          <a:p>
-            <a:pPr indent="0" marL="0">
-              <a:spcAft>
-                <a:spcPts val="400"/>
-              </a:spcAft>
-              <a:buNone/>
-            </a:pPr>
-            <a:r>
-              <a:rPr lang="en-US" sz="1500" b="1" dirty="0">
-                <a:solidFill>
-                  <a:schemeClr val="tx2"/>
-                </a:solidFill>
-              </a:rPr>
-              <a:t>店舗スタッフ様だけで運営できる体制</a:t>
-            </a:r>
-            <a:endParaRPr lang="en-US" sz="1300" dirty="0"/>
-          </a:p>
-          <a:p>
-            <a:pPr marL="342900" indent="-342900">
-              <a:spcAft>
-                <a:spcPts val="400"/>
-              </a:spcAft>
-              <a:buSzPct val="100000"/>
-              <a:buChar char="•"/>
-            </a:pPr>
-            <a:r>
-              <a:rPr lang="en-US" sz="1300" dirty="0">
-                <a:solidFill>
-                  <a:schemeClr val="tx1"/>
-                </a:solidFill>
-              </a:rPr>
-              <a:t>運営スタッフの派遣はなし。キット・物品と運用マニュアル（準備・受付・制作手順・片付け）をお届けします。</a:t>
-            </a:r>
-            <a:endParaRPr lang="en-US" sz="1300" dirty="0"/>
-          </a:p>
-          <a:p>
-            <a:pPr marL="342900" indent="-342900">
-              <a:spcAft>
-                <a:spcPts val="400"/>
-              </a:spcAft>
-              <a:buSzPct val="100000"/>
-              <a:buChar char="•"/>
-            </a:pPr>
-            <a:r>
-              <a:rPr lang="en-US" sz="1300" dirty="0">
-                <a:solidFill>
-                  <a:schemeClr val="tx1"/>
-                </a:solidFill>
-              </a:rPr>
-              <a:t>週替わりの内容に合わせ、キットは週ごとに仕分けして納品します。</a:t>
-            </a:r>
-            <a:endParaRPr lang="en-US" sz="1300" dirty="0"/>
           </a:p>
         </p:txBody>
       </p:sp>
@@ -5019,6 +5275,789 @@
                   <a:schemeClr val="tx2"/>
                 </a:solidFill>
               </a:rPr>
+              <a:t>運用フロー・スケジュール</a:t>
+            </a:r>
+            <a:endParaRPr lang="en-US" sz="2400" dirty="0"/>
+          </a:p>
+        </p:txBody>
+      </p:sp>
+      <p:sp>
+        <p:nvSpPr>
+          <p:cNvPr id="3" name="step_0"/>
+          <p:cNvSpPr/>
+          <p:nvPr/>
+        </p:nvSpPr>
+        <p:spPr>
+          <a:xfrm>
+            <a:off x="457200" y="1188720"/>
+            <a:ext cx="1600200" cy="731520"/>
+          </a:xfrm>
+          <a:prstGeom prst="chevron">
+            <a:avLst/>
+          </a:prstGeom>
+          <a:solidFill>
+            <a:schemeClr val="accent1"/>
+          </a:solidFill>
+          <a:ln w="12700">
+            <a:solidFill>
+              <a:schemeClr val="bg1"/>
+            </a:solidFill>
+            <a:prstDash val="solid"/>
+          </a:ln>
+        </p:spPr>
+      </p:sp>
+      <p:sp>
+        <p:nvSpPr>
+          <p:cNvPr id="4" name="Text 2"/>
+          <p:cNvSpPr txBox="1"/>
+          <p:nvPr/>
+        </p:nvSpPr>
+        <p:spPr>
+          <a:xfrm>
+            <a:off x="640080" y="1188720"/>
+            <a:ext cx="1280160" cy="731520"/>
+          </a:xfrm>
+          <a:prstGeom prst="rect">
+            <a:avLst/>
+          </a:prstGeom>
+          <a:noFill/>
+          <a:ln/>
+        </p:spPr>
+        <p:txBody>
+          <a:bodyPr wrap="square" lIns="0" tIns="0" rIns="0" bIns="0" rtlCol="0" anchor="ctr"/>
+          <a:lstStyle/>
+          <a:p>
+            <a:pPr algn="ctr" indent="0" marL="0">
+              <a:buNone/>
+            </a:pPr>
+            <a:r>
+              <a:rPr lang="en-US" sz="1300" b="1" dirty="0">
+                <a:solidFill>
+                  <a:schemeClr val="bg1"/>
+                </a:solidFill>
+              </a:rPr>
+              <a:t>ご発注</a:t>
+            </a:r>
+            <a:endParaRPr lang="en-US" sz="1300" dirty="0"/>
+          </a:p>
+        </p:txBody>
+      </p:sp>
+      <p:sp>
+        <p:nvSpPr>
+          <p:cNvPr id="5" name="Text 3"/>
+          <p:cNvSpPr txBox="1"/>
+          <p:nvPr/>
+        </p:nvSpPr>
+        <p:spPr>
+          <a:xfrm>
+            <a:off x="457200" y="2011680"/>
+            <a:ext cx="1600200" cy="685800"/>
+          </a:xfrm>
+          <a:prstGeom prst="rect">
+            <a:avLst/>
+          </a:prstGeom>
+          <a:noFill/>
+          <a:ln/>
+        </p:spPr>
+        <p:txBody>
+          <a:bodyPr wrap="square" lIns="635" tIns="635" rIns="635" bIns="635" rtlCol="0" anchor="t"/>
+          <a:lstStyle/>
+          <a:p>
+            <a:pPr algn="ctr" indent="0" marL="0">
+              <a:buNone/>
+            </a:pPr>
+            <a:r>
+              <a:rPr lang="en-US" sz="1200" dirty="0">
+                <a:solidFill>
+                  <a:schemeClr val="tx1"/>
+                </a:solidFill>
+              </a:rPr>
+              <a:t>10月下旬〜</a:t>
+            </a:r>
+            <a:endParaRPr lang="en-US" sz="1200" dirty="0"/>
+          </a:p>
+          <a:p>
+            <a:pPr algn="ctr" indent="0" marL="0">
+              <a:buNone/>
+            </a:pPr>
+            <a:r>
+              <a:rPr lang="en-US" sz="1200" dirty="0">
+                <a:solidFill>
+                  <a:schemeClr val="tx1"/>
+                </a:solidFill>
+              </a:rPr>
+              <a:t>11月上旬</a:t>
+            </a:r>
+            <a:endParaRPr lang="en-US" sz="1200" dirty="0"/>
+          </a:p>
+        </p:txBody>
+      </p:sp>
+      <p:sp>
+        <p:nvSpPr>
+          <p:cNvPr id="6" name="step_1"/>
+          <p:cNvSpPr/>
+          <p:nvPr/>
+        </p:nvSpPr>
+        <p:spPr>
+          <a:xfrm>
+            <a:off x="2139696" y="1188720"/>
+            <a:ext cx="1600200" cy="731520"/>
+          </a:xfrm>
+          <a:prstGeom prst="chevron">
+            <a:avLst/>
+          </a:prstGeom>
+          <a:solidFill>
+            <a:schemeClr val="accent1"/>
+          </a:solidFill>
+          <a:ln w="12700">
+            <a:solidFill>
+              <a:schemeClr val="bg1"/>
+            </a:solidFill>
+            <a:prstDash val="solid"/>
+          </a:ln>
+        </p:spPr>
+      </p:sp>
+      <p:sp>
+        <p:nvSpPr>
+          <p:cNvPr id="7" name="Text 5"/>
+          <p:cNvSpPr txBox="1"/>
+          <p:nvPr/>
+        </p:nvSpPr>
+        <p:spPr>
+          <a:xfrm>
+            <a:off x="2322576" y="1188720"/>
+            <a:ext cx="1280160" cy="731520"/>
+          </a:xfrm>
+          <a:prstGeom prst="rect">
+            <a:avLst/>
+          </a:prstGeom>
+          <a:noFill/>
+          <a:ln/>
+        </p:spPr>
+        <p:txBody>
+          <a:bodyPr wrap="square" lIns="0" tIns="0" rIns="0" bIns="0" rtlCol="0" anchor="ctr"/>
+          <a:lstStyle/>
+          <a:p>
+            <a:pPr algn="ctr" indent="0" marL="0">
+              <a:buNone/>
+            </a:pPr>
+            <a:r>
+              <a:rPr lang="en-US" sz="1300" b="1" dirty="0">
+                <a:solidFill>
+                  <a:schemeClr val="bg1"/>
+                </a:solidFill>
+              </a:rPr>
+              <a:t>制作・調達</a:t>
+            </a:r>
+            <a:endParaRPr lang="en-US" sz="1300" dirty="0"/>
+          </a:p>
+        </p:txBody>
+      </p:sp>
+      <p:sp>
+        <p:nvSpPr>
+          <p:cNvPr id="8" name="Text 6"/>
+          <p:cNvSpPr txBox="1"/>
+          <p:nvPr/>
+        </p:nvSpPr>
+        <p:spPr>
+          <a:xfrm>
+            <a:off x="2139696" y="2011680"/>
+            <a:ext cx="1600200" cy="685800"/>
+          </a:xfrm>
+          <a:prstGeom prst="rect">
+            <a:avLst/>
+          </a:prstGeom>
+          <a:noFill/>
+          <a:ln/>
+        </p:spPr>
+        <p:txBody>
+          <a:bodyPr wrap="square" lIns="635" tIns="635" rIns="635" bIns="635" rtlCol="0" anchor="t"/>
+          <a:lstStyle/>
+          <a:p>
+            <a:pPr algn="ctr" indent="0" marL="0">
+              <a:buNone/>
+            </a:pPr>
+            <a:r>
+              <a:rPr lang="en-US" sz="1200" dirty="0">
+                <a:solidFill>
+                  <a:schemeClr val="tx1"/>
+                </a:solidFill>
+              </a:rPr>
+              <a:t>キット・ポスター</a:t>
+            </a:r>
+            <a:endParaRPr lang="en-US" sz="1200" dirty="0"/>
+          </a:p>
+          <a:p>
+            <a:pPr algn="ctr" indent="0" marL="0">
+              <a:buNone/>
+            </a:pPr>
+            <a:r>
+              <a:rPr lang="en-US" sz="1200" dirty="0">
+                <a:solidFill>
+                  <a:schemeClr val="tx1"/>
+                </a:solidFill>
+              </a:rPr>
+              <a:t>衣装・ツール</a:t>
+            </a:r>
+            <a:endParaRPr lang="en-US" sz="1200" dirty="0"/>
+          </a:p>
+        </p:txBody>
+      </p:sp>
+      <p:sp>
+        <p:nvSpPr>
+          <p:cNvPr id="9" name="step_2"/>
+          <p:cNvSpPr/>
+          <p:nvPr/>
+        </p:nvSpPr>
+        <p:spPr>
+          <a:xfrm>
+            <a:off x="3822192" y="1188720"/>
+            <a:ext cx="1600200" cy="731520"/>
+          </a:xfrm>
+          <a:prstGeom prst="chevron">
+            <a:avLst/>
+          </a:prstGeom>
+          <a:solidFill>
+            <a:schemeClr val="accent1"/>
+          </a:solidFill>
+          <a:ln w="12700">
+            <a:solidFill>
+              <a:schemeClr val="bg1"/>
+            </a:solidFill>
+            <a:prstDash val="solid"/>
+          </a:ln>
+        </p:spPr>
+      </p:sp>
+      <p:sp>
+        <p:nvSpPr>
+          <p:cNvPr id="10" name="Text 8"/>
+          <p:cNvSpPr txBox="1"/>
+          <p:nvPr/>
+        </p:nvSpPr>
+        <p:spPr>
+          <a:xfrm>
+            <a:off x="4005072" y="1188720"/>
+            <a:ext cx="1280160" cy="731520"/>
+          </a:xfrm>
+          <a:prstGeom prst="rect">
+            <a:avLst/>
+          </a:prstGeom>
+          <a:noFill/>
+          <a:ln/>
+        </p:spPr>
+        <p:txBody>
+          <a:bodyPr wrap="square" lIns="0" tIns="0" rIns="0" bIns="0" rtlCol="0" anchor="ctr"/>
+          <a:lstStyle/>
+          <a:p>
+            <a:pPr algn="ctr" indent="0" marL="0">
+              <a:buNone/>
+            </a:pPr>
+            <a:r>
+              <a:rPr lang="en-US" sz="1300" b="1" dirty="0">
+                <a:solidFill>
+                  <a:schemeClr val="bg1"/>
+                </a:solidFill>
+              </a:rPr>
+              <a:t>配送・検品</a:t>
+            </a:r>
+            <a:endParaRPr lang="en-US" sz="1300" dirty="0"/>
+          </a:p>
+        </p:txBody>
+      </p:sp>
+      <p:sp>
+        <p:nvSpPr>
+          <p:cNvPr id="11" name="Text 9"/>
+          <p:cNvSpPr txBox="1"/>
+          <p:nvPr/>
+        </p:nvSpPr>
+        <p:spPr>
+          <a:xfrm>
+            <a:off x="3822192" y="2011680"/>
+            <a:ext cx="1600200" cy="685800"/>
+          </a:xfrm>
+          <a:prstGeom prst="rect">
+            <a:avLst/>
+          </a:prstGeom>
+          <a:noFill/>
+          <a:ln/>
+        </p:spPr>
+        <p:txBody>
+          <a:bodyPr wrap="square" lIns="635" tIns="635" rIns="635" bIns="635" rtlCol="0" anchor="t"/>
+          <a:lstStyle/>
+          <a:p>
+            <a:pPr algn="ctr" indent="0" marL="0">
+              <a:buNone/>
+            </a:pPr>
+            <a:r>
+              <a:rPr lang="en-US" sz="1200" dirty="0">
+                <a:solidFill>
+                  <a:schemeClr val="tx1"/>
+                </a:solidFill>
+              </a:rPr>
+              <a:t>11月下旬着</a:t>
+            </a:r>
+            <a:endParaRPr lang="en-US" sz="1200" dirty="0"/>
+          </a:p>
+          <a:p>
+            <a:pPr algn="ctr" indent="0" marL="0">
+              <a:buNone/>
+            </a:pPr>
+            <a:r>
+              <a:rPr lang="en-US" sz="1200" dirty="0">
+                <a:solidFill>
+                  <a:schemeClr val="tx1"/>
+                </a:solidFill>
+              </a:rPr>
+              <a:t>検品確認書を返送</a:t>
+            </a:r>
+            <a:endParaRPr lang="en-US" sz="1200" dirty="0"/>
+          </a:p>
+        </p:txBody>
+      </p:sp>
+      <p:sp>
+        <p:nvSpPr>
+          <p:cNvPr id="12" name="step_3"/>
+          <p:cNvSpPr/>
+          <p:nvPr/>
+        </p:nvSpPr>
+        <p:spPr>
+          <a:xfrm>
+            <a:off x="5504688" y="1188720"/>
+            <a:ext cx="1600200" cy="731520"/>
+          </a:xfrm>
+          <a:prstGeom prst="chevron">
+            <a:avLst/>
+          </a:prstGeom>
+          <a:solidFill>
+            <a:schemeClr val="tx2"/>
+          </a:solidFill>
+          <a:ln w="12700">
+            <a:solidFill>
+              <a:schemeClr val="bg1"/>
+            </a:solidFill>
+            <a:prstDash val="solid"/>
+          </a:ln>
+        </p:spPr>
+      </p:sp>
+      <p:sp>
+        <p:nvSpPr>
+          <p:cNvPr id="13" name="Text 11"/>
+          <p:cNvSpPr txBox="1"/>
+          <p:nvPr/>
+        </p:nvSpPr>
+        <p:spPr>
+          <a:xfrm>
+            <a:off x="5687568" y="1188720"/>
+            <a:ext cx="1280160" cy="731520"/>
+          </a:xfrm>
+          <a:prstGeom prst="rect">
+            <a:avLst/>
+          </a:prstGeom>
+          <a:noFill/>
+          <a:ln/>
+        </p:spPr>
+        <p:txBody>
+          <a:bodyPr wrap="square" lIns="0" tIns="0" rIns="0" bIns="0" rtlCol="0" anchor="ctr"/>
+          <a:lstStyle/>
+          <a:p>
+            <a:pPr algn="ctr" indent="0" marL="0">
+              <a:buNone/>
+            </a:pPr>
+            <a:r>
+              <a:rPr lang="en-US" sz="1300" b="1" dirty="0">
+                <a:solidFill>
+                  <a:schemeClr val="bg1"/>
+                </a:solidFill>
+              </a:rPr>
+              <a:t>店舗で実施</a:t>
+            </a:r>
+            <a:endParaRPr lang="en-US" sz="1300" dirty="0"/>
+          </a:p>
+        </p:txBody>
+      </p:sp>
+      <p:sp>
+        <p:nvSpPr>
+          <p:cNvPr id="14" name="Text 12"/>
+          <p:cNvSpPr txBox="1"/>
+          <p:nvPr/>
+        </p:nvSpPr>
+        <p:spPr>
+          <a:xfrm>
+            <a:off x="5504688" y="2011680"/>
+            <a:ext cx="1600200" cy="685800"/>
+          </a:xfrm>
+          <a:prstGeom prst="rect">
+            <a:avLst/>
+          </a:prstGeom>
+          <a:noFill/>
+          <a:ln/>
+        </p:spPr>
+        <p:txBody>
+          <a:bodyPr wrap="square" lIns="635" tIns="635" rIns="635" bIns="635" rtlCol="0" anchor="t"/>
+          <a:lstStyle/>
+          <a:p>
+            <a:pPr algn="ctr" indent="0" marL="0">
+              <a:buNone/>
+            </a:pPr>
+            <a:r>
+              <a:rPr lang="en-US" sz="1200" dirty="0">
+                <a:solidFill>
+                  <a:schemeClr val="tx1"/>
+                </a:solidFill>
+              </a:rPr>
+              <a:t>11/28〜12/25</a:t>
+            </a:r>
+            <a:endParaRPr lang="en-US" sz="1200" dirty="0"/>
+          </a:p>
+          <a:p>
+            <a:pPr algn="ctr" indent="0" marL="0">
+              <a:buNone/>
+            </a:pPr>
+            <a:r>
+              <a:rPr lang="en-US" sz="1200" dirty="0">
+                <a:solidFill>
+                  <a:schemeClr val="tx1"/>
+                </a:solidFill>
+              </a:rPr>
+              <a:t>4週間</a:t>
+            </a:r>
+            <a:endParaRPr lang="en-US" sz="1200" dirty="0"/>
+          </a:p>
+        </p:txBody>
+      </p:sp>
+      <p:sp>
+        <p:nvSpPr>
+          <p:cNvPr id="15" name="step_4"/>
+          <p:cNvSpPr/>
+          <p:nvPr/>
+        </p:nvSpPr>
+        <p:spPr>
+          <a:xfrm>
+            <a:off x="7187184" y="1188720"/>
+            <a:ext cx="1600200" cy="731520"/>
+          </a:xfrm>
+          <a:prstGeom prst="chevron">
+            <a:avLst/>
+          </a:prstGeom>
+          <a:solidFill>
+            <a:schemeClr val="accent1"/>
+          </a:solidFill>
+          <a:ln w="12700">
+            <a:solidFill>
+              <a:schemeClr val="bg1"/>
+            </a:solidFill>
+            <a:prstDash val="solid"/>
+          </a:ln>
+        </p:spPr>
+      </p:sp>
+      <p:sp>
+        <p:nvSpPr>
+          <p:cNvPr id="16" name="Text 14"/>
+          <p:cNvSpPr txBox="1"/>
+          <p:nvPr/>
+        </p:nvSpPr>
+        <p:spPr>
+          <a:xfrm>
+            <a:off x="7370064" y="1188720"/>
+            <a:ext cx="1280160" cy="731520"/>
+          </a:xfrm>
+          <a:prstGeom prst="rect">
+            <a:avLst/>
+          </a:prstGeom>
+          <a:noFill/>
+          <a:ln/>
+        </p:spPr>
+        <p:txBody>
+          <a:bodyPr wrap="square" lIns="0" tIns="0" rIns="0" bIns="0" rtlCol="0" anchor="ctr"/>
+          <a:lstStyle/>
+          <a:p>
+            <a:pPr algn="ctr" indent="0" marL="0">
+              <a:buNone/>
+            </a:pPr>
+            <a:r>
+              <a:rPr lang="en-US" sz="1300" b="1" dirty="0">
+                <a:solidFill>
+                  <a:schemeClr val="bg1"/>
+                </a:solidFill>
+              </a:rPr>
+              <a:t>返却</a:t>
+            </a:r>
+            <a:endParaRPr lang="en-US" sz="1300" dirty="0"/>
+          </a:p>
+        </p:txBody>
+      </p:sp>
+      <p:sp>
+        <p:nvSpPr>
+          <p:cNvPr id="17" name="Text 15"/>
+          <p:cNvSpPr txBox="1"/>
+          <p:nvPr/>
+        </p:nvSpPr>
+        <p:spPr>
+          <a:xfrm>
+            <a:off x="7187184" y="2011680"/>
+            <a:ext cx="1600200" cy="685800"/>
+          </a:xfrm>
+          <a:prstGeom prst="rect">
+            <a:avLst/>
+          </a:prstGeom>
+          <a:noFill/>
+          <a:ln/>
+        </p:spPr>
+        <p:txBody>
+          <a:bodyPr wrap="square" lIns="635" tIns="635" rIns="635" bIns="635" rtlCol="0" anchor="t"/>
+          <a:lstStyle/>
+          <a:p>
+            <a:pPr algn="ctr" indent="0" marL="0">
+              <a:buNone/>
+            </a:pPr>
+            <a:r>
+              <a:rPr lang="en-US" sz="1200" dirty="0">
+                <a:solidFill>
+                  <a:schemeClr val="tx1"/>
+                </a:solidFill>
+              </a:rPr>
+              <a:t>アーチを梱包</a:t>
+            </a:r>
+            <a:endParaRPr lang="en-US" sz="1200" dirty="0"/>
+          </a:p>
+          <a:p>
+            <a:pPr algn="ctr" indent="0" marL="0">
+              <a:buNone/>
+            </a:pPr>
+            <a:r>
+              <a:rPr lang="en-US" sz="1200" dirty="0">
+                <a:solidFill>
+                  <a:schemeClr val="tx1"/>
+                </a:solidFill>
+              </a:rPr>
+              <a:t>着払い伝票で返送</a:t>
+            </a:r>
+            <a:endParaRPr lang="en-US" sz="1200" dirty="0"/>
+          </a:p>
+        </p:txBody>
+      </p:sp>
+      <p:sp>
+        <p:nvSpPr>
+          <p:cNvPr id="18" name="ops_note"/>
+          <p:cNvSpPr/>
+          <p:nvPr/>
+        </p:nvSpPr>
+        <p:spPr>
+          <a:xfrm>
+            <a:off x="457200" y="2926080"/>
+            <a:ext cx="8229600" cy="1600200"/>
+          </a:xfrm>
+          <a:prstGeom prst="roundRect">
+            <a:avLst>
+              <a:gd name="adj" fmla="val 4571"/>
+            </a:avLst>
+          </a:prstGeom>
+          <a:solidFill>
+            <a:schemeClr val="bg2"/>
+          </a:solidFill>
+          <a:ln w="12700">
+            <a:solidFill>
+              <a:schemeClr val="bg2"/>
+            </a:solidFill>
+            <a:prstDash val="solid"/>
+          </a:ln>
+        </p:spPr>
+      </p:sp>
+      <p:sp>
+        <p:nvSpPr>
+          <p:cNvPr id="19" name="Text 17"/>
+          <p:cNvSpPr txBox="1"/>
+          <p:nvPr/>
+        </p:nvSpPr>
+        <p:spPr>
+          <a:xfrm>
+            <a:off x="640080" y="3017520"/>
+            <a:ext cx="7863840" cy="1417320"/>
+          </a:xfrm>
+          <a:prstGeom prst="rect">
+            <a:avLst/>
+          </a:prstGeom>
+          <a:noFill/>
+          <a:ln/>
+        </p:spPr>
+        <p:txBody>
+          <a:bodyPr wrap="square" lIns="635" tIns="635" rIns="635" bIns="635" rtlCol="0" anchor="t"/>
+          <a:lstStyle/>
+          <a:p>
+            <a:pPr indent="0" marL="0">
+              <a:spcAft>
+                <a:spcPts val="400"/>
+              </a:spcAft>
+              <a:buNone/>
+            </a:pPr>
+            <a:r>
+              <a:rPr lang="en-US" sz="1500" b="1" dirty="0">
+                <a:solidFill>
+                  <a:schemeClr val="tx2"/>
+                </a:solidFill>
+              </a:rPr>
+              <a:t>店舗スタッフ様だけで運営できる体制</a:t>
+            </a:r>
+            <a:endParaRPr lang="en-US" sz="1300" dirty="0"/>
+          </a:p>
+          <a:p>
+            <a:pPr marL="342900" indent="-342900">
+              <a:spcAft>
+                <a:spcPts val="400"/>
+              </a:spcAft>
+              <a:buSzPct val="100000"/>
+              <a:buChar char="•"/>
+            </a:pPr>
+            <a:r>
+              <a:rPr lang="en-US" sz="1300" dirty="0">
+                <a:solidFill>
+                  <a:schemeClr val="tx1"/>
+                </a:solidFill>
+              </a:rPr>
+              <a:t>運営スタッフの派遣はなし。キット・物品と運用マニュアル（準備・受付・制作手順・片付け）をお届けします。</a:t>
+            </a:r>
+            <a:endParaRPr lang="en-US" sz="1300" dirty="0"/>
+          </a:p>
+          <a:p>
+            <a:pPr marL="342900" indent="-342900">
+              <a:spcAft>
+                <a:spcPts val="400"/>
+              </a:spcAft>
+              <a:buSzPct val="100000"/>
+              <a:buChar char="•"/>
+            </a:pPr>
+            <a:r>
+              <a:rPr lang="en-US" sz="1300" dirty="0">
+                <a:solidFill>
+                  <a:schemeClr val="tx1"/>
+                </a:solidFill>
+              </a:rPr>
+              <a:t>週替わりの内容に合わせ、キットは週ごとに仕分けして納品します。</a:t>
+            </a:r>
+            <a:endParaRPr lang="en-US" sz="1300" dirty="0"/>
+          </a:p>
+          <a:p>
+            <a:pPr marL="342900" indent="-342900">
+              <a:spcAft>
+                <a:spcPts val="400"/>
+              </a:spcAft>
+              <a:buSzPct val="100000"/>
+              <a:buChar char="•"/>
+            </a:pPr>
+            <a:r>
+              <a:rPr lang="en-US" sz="1300" dirty="0">
+                <a:solidFill>
+                  <a:schemeClr val="tx1"/>
+                </a:solidFill>
+              </a:rPr>
+              <a:t>アーチの返却は箱・緩衝材を再利用し、同梱の着払い伝票で発送いただくだけです。</a:t>
+            </a:r>
+            <a:endParaRPr lang="en-US" sz="1300" dirty="0"/>
+          </a:p>
+        </p:txBody>
+      </p:sp>
+      <p:sp>
+        <p:nvSpPr>
+          <p:cNvPr id="25" name="Slide Number Placeholder 0"/>
+          <p:cNvSpPr>
+            <a:spLocks noGrp="1"/>
+          </p:cNvSpPr>
+          <p:nvPr>
+            <p:ph type="sldNum" sz="quarter" idx="4294967295"/>
+          </p:nvPr>
+        </p:nvSpPr>
+        <p:spPr>
+          <a:xfrm>
+            <a:off x="8229600" y="4800600"/>
+            <a:ext cx="457200" cy="228600"/>
+          </a:xfrm>
+          <a:prstGeom prst="rect">
+            <a:avLst/>
+          </a:prstGeom>
+          <a:extLst>
+            <a:ext uri="{C572A759-6A51-4108-AA02-DFA0A04FC94B}">
+              <ma14:wrappingTextBoxFlag xmlns:ma14="http://schemas.microsoft.com/office/mac/drawingml/2011/main" val="0"/>
+            </a:ext>
+          </a:extLst>
+        </p:spPr>
+        <p:txBody>
+          <a:bodyPr/>
+          <a:lstStyle>
+            <a:lvl1pPr>
+              <a:defRPr sz="900">
+                <a:solidFill>
+                  <a:schemeClr val="accent4"/>
+                </a:solidFill>
+              </a:defRPr>
+            </a:lvl1pPr>
+          </a:lstStyle>
+          <a:p>
+            <a:pPr algn="r"/>
+            <a:fld id="{F7021451-1387-4CA6-816F-3879F97B5CBC}" type="slidenum">
+              <a:rPr b="0" lang="en-US"/>
+              <a:t>13</a:t>
+            </a:fld>
+            <a:endParaRPr lang="en-US"/>
+          </a:p>
+        </p:txBody>
+      </p:sp>
+    </p:spTree>
+  </p:cSld>
+  <p:clrMapOvr>
+    <a:masterClrMapping/>
+  </p:clrMapOvr>
+</p:sld>
+</file>
+
+<file path=ppt/slides/slide14.xml><?xml version="1.0" encoding="utf-8"?>
+<p:sld xmlns:a="http://schemas.openxmlformats.org/drawingml/2006/main" xmlns:r="http://schemas.openxmlformats.org/officeDocument/2006/relationships" xmlns:p="http://schemas.openxmlformats.org/presentationml/2006/main">
+  <p:cSld name="Slide 14">
+    <p:spTree>
+      <p:nvGrpSpPr>
+        <p:cNvPr id="1" name=""/>
+        <p:cNvGrpSpPr/>
+        <p:nvPr/>
+      </p:nvGrpSpPr>
+      <p:grpSpPr>
+        <a:xfrm>
+          <a:off x="0" y="0"/>
+          <a:ext cx="0" cy="0"/>
+          <a:chOff x="0" y="0"/>
+          <a:chExt cx="0" cy="0"/>
+        </a:xfrm>
+      </p:grpSpPr>
+      <p:sp>
+        <p:nvSpPr>
+          <p:cNvPr id="2" name="Text 0"/>
+          <p:cNvSpPr/>
+          <p:nvPr>
+            <p:ph idx="100" type="title" hasCustomPrompt="1"/>
+          </p:nvPr>
+        </p:nvSpPr>
+        <p:spPr>
+          <a:xfrm>
+            <a:off x="457200" y="256032"/>
+            <a:ext cx="8229600" cy="548640"/>
+          </a:xfrm>
+          <a:prstGeom prst="rect">
+            <a:avLst/>
+          </a:prstGeom>
+          <a:noFill/>
+          <a:ln/>
+        </p:spPr>
+        <p:txBody>
+          <a:bodyPr wrap="square" lIns="0" tIns="0" rIns="0" bIns="0" rtlCol="0" anchor="ctr"/>
+          <a:lstStyle/>
+          <a:p>
+            <a:pPr indent="0" marL="0">
+              <a:buNone/>
+            </a:pPr>
+            <a:r>
+              <a:rPr lang="en-US" sz="2400" b="1" dirty="0">
+                <a:solidFill>
+                  <a:schemeClr val="tx2"/>
+                </a:solidFill>
+              </a:rPr>
               <a:t>御見積書</a:t>
             </a:r>
             <a:endParaRPr lang="en-US" sz="2400" dirty="0"/>
@@ -5177,7 +6216,7 @@
       </p:sp>
       <p:graphicFrame>
         <p:nvGraphicFramePr>
-          <p:cNvPr id="14" name="quote_table"/>
+          <p:cNvPr id="15" name="quote_table"/>
           <p:cNvGraphicFramePr>
             <a:graphicFrameLocks noGrp="1"/>
           </p:cNvGraphicFramePr>
@@ -5229,7 +6268,7 @@
                   <a:tcPr marL="91440" marR="91440" marT="45720" marB="45720" anchor="ctr">
                     <a:lnL w="9525" cap="flat" cmpd="sng" algn="ctr">
                       <a:solidFill>
-                        <a:srgbClr val="B9C6BC"/>
+                        <a:srgbClr val="E9B9C0"/>
                       </a:solidFill>
                       <a:prstDash val="solid"/>
                       <a:round/>
@@ -5238,7 +6277,7 @@
                     </a:lnL>
                     <a:lnR w="9525" cap="flat" cmpd="sng" algn="ctr">
                       <a:solidFill>
-                        <a:srgbClr val="B9C6BC"/>
+                        <a:srgbClr val="E9B9C0"/>
                       </a:solidFill>
                       <a:prstDash val="solid"/>
                       <a:round/>
@@ -5247,7 +6286,7 @@
                     </a:lnR>
                     <a:lnT w="9525" cap="flat" cmpd="sng" algn="ctr">
                       <a:solidFill>
-                        <a:srgbClr val="B9C6BC"/>
+                        <a:srgbClr val="E9B9C0"/>
                       </a:solidFill>
                       <a:prstDash val="solid"/>
                       <a:round/>
@@ -5256,7 +6295,7 @@
                     </a:lnT>
                     <a:lnB w="9525" cap="flat" cmpd="sng" algn="ctr">
                       <a:solidFill>
-                        <a:srgbClr val="B9C6BC"/>
+                        <a:srgbClr val="E9B9C0"/>
                       </a:solidFill>
                       <a:prstDash val="solid"/>
                       <a:round/>
@@ -5264,7 +6303,7 @@
                       <a:tailEnd type="none" w="med" len="med"/>
                     </a:lnB>
                     <a:solidFill>
-                      <a:schemeClr val="accent2"/>
+                      <a:schemeClr val="tx2"/>
                     </a:solidFill>
                   </a:tcPr>
                 </a:tc>
@@ -5290,7 +6329,7 @@
                   <a:tcPr marL="91440" marR="91440" marT="45720" marB="45720" anchor="ctr">
                     <a:lnL w="9525" cap="flat" cmpd="sng" algn="ctr">
                       <a:solidFill>
-                        <a:srgbClr val="B9C6BC"/>
+                        <a:srgbClr val="E9B9C0"/>
                       </a:solidFill>
                       <a:prstDash val="solid"/>
                       <a:round/>
@@ -5299,7 +6338,7 @@
                     </a:lnL>
                     <a:lnR w="9525" cap="flat" cmpd="sng" algn="ctr">
                       <a:solidFill>
-                        <a:srgbClr val="B9C6BC"/>
+                        <a:srgbClr val="E9B9C0"/>
                       </a:solidFill>
                       <a:prstDash val="solid"/>
                       <a:round/>
@@ -5308,7 +6347,7 @@
                     </a:lnR>
                     <a:lnT w="9525" cap="flat" cmpd="sng" algn="ctr">
                       <a:solidFill>
-                        <a:srgbClr val="B9C6BC"/>
+                        <a:srgbClr val="E9B9C0"/>
                       </a:solidFill>
                       <a:prstDash val="solid"/>
                       <a:round/>
@@ -5317,7 +6356,7 @@
                     </a:lnT>
                     <a:lnB w="9525" cap="flat" cmpd="sng" algn="ctr">
                       <a:solidFill>
-                        <a:srgbClr val="B9C6BC"/>
+                        <a:srgbClr val="E9B9C0"/>
                       </a:solidFill>
                       <a:prstDash val="solid"/>
                       <a:round/>
@@ -5325,7 +6364,7 @@
                       <a:tailEnd type="none" w="med" len="med"/>
                     </a:lnB>
                     <a:solidFill>
-                      <a:schemeClr val="accent2"/>
+                      <a:schemeClr val="tx2"/>
                     </a:solidFill>
                   </a:tcPr>
                 </a:tc>
@@ -5351,7 +6390,7 @@
                   <a:tcPr marL="91440" marR="91440" marT="45720" marB="45720" anchor="ctr">
                     <a:lnL w="9525" cap="flat" cmpd="sng" algn="ctr">
                       <a:solidFill>
-                        <a:srgbClr val="B9C6BC"/>
+                        <a:srgbClr val="E9B9C0"/>
                       </a:solidFill>
                       <a:prstDash val="solid"/>
                       <a:round/>
@@ -5360,7 +6399,7 @@
                     </a:lnL>
                     <a:lnR w="9525" cap="flat" cmpd="sng" algn="ctr">
                       <a:solidFill>
-                        <a:srgbClr val="B9C6BC"/>
+                        <a:srgbClr val="E9B9C0"/>
                       </a:solidFill>
                       <a:prstDash val="solid"/>
                       <a:round/>
@@ -5369,7 +6408,7 @@
                     </a:lnR>
                     <a:lnT w="9525" cap="flat" cmpd="sng" algn="ctr">
                       <a:solidFill>
-                        <a:srgbClr val="B9C6BC"/>
+                        <a:srgbClr val="E9B9C0"/>
                       </a:solidFill>
                       <a:prstDash val="solid"/>
                       <a:round/>
@@ -5378,7 +6417,7 @@
                     </a:lnT>
                     <a:lnB w="9525" cap="flat" cmpd="sng" algn="ctr">
                       <a:solidFill>
-                        <a:srgbClr val="B9C6BC"/>
+                        <a:srgbClr val="E9B9C0"/>
                       </a:solidFill>
                       <a:prstDash val="solid"/>
                       <a:round/>
@@ -5386,7 +6425,7 @@
                       <a:tailEnd type="none" w="med" len="med"/>
                     </a:lnB>
                     <a:solidFill>
-                      <a:schemeClr val="accent2"/>
+                      <a:schemeClr val="tx2"/>
                     </a:solidFill>
                   </a:tcPr>
                 </a:tc>
@@ -5412,7 +6451,7 @@
                   <a:tcPr marL="91440" marR="91440" marT="45720" marB="45720" anchor="ctr">
                     <a:lnL w="9525" cap="flat" cmpd="sng" algn="ctr">
                       <a:solidFill>
-                        <a:srgbClr val="B9C6BC"/>
+                        <a:srgbClr val="E9B9C0"/>
                       </a:solidFill>
                       <a:prstDash val="solid"/>
                       <a:round/>
@@ -5421,7 +6460,7 @@
                     </a:lnL>
                     <a:lnR w="9525" cap="flat" cmpd="sng" algn="ctr">
                       <a:solidFill>
-                        <a:srgbClr val="B9C6BC"/>
+                        <a:srgbClr val="E9B9C0"/>
                       </a:solidFill>
                       <a:prstDash val="solid"/>
                       <a:round/>
@@ -5430,7 +6469,7 @@
                     </a:lnR>
                     <a:lnT w="9525" cap="flat" cmpd="sng" algn="ctr">
                       <a:solidFill>
-                        <a:srgbClr val="B9C6BC"/>
+                        <a:srgbClr val="E9B9C0"/>
                       </a:solidFill>
                       <a:prstDash val="solid"/>
                       <a:round/>
@@ -5439,7 +6478,7 @@
                     </a:lnT>
                     <a:lnB w="9525" cap="flat" cmpd="sng" algn="ctr">
                       <a:solidFill>
-                        <a:srgbClr val="B9C6BC"/>
+                        <a:srgbClr val="E9B9C0"/>
                       </a:solidFill>
                       <a:prstDash val="solid"/>
                       <a:round/>
@@ -5447,7 +6486,7 @@
                       <a:tailEnd type="none" w="med" len="med"/>
                     </a:lnB>
                     <a:solidFill>
-                      <a:schemeClr val="accent2"/>
+                      <a:schemeClr val="tx2"/>
                     </a:solidFill>
                   </a:tcPr>
                 </a:tc>
@@ -5473,7 +6512,7 @@
                   <a:tcPr marL="91440" marR="91440" marT="45720" marB="45720" anchor="ctr">
                     <a:lnL w="9525" cap="flat" cmpd="sng" algn="ctr">
                       <a:solidFill>
-                        <a:srgbClr val="B9C6BC"/>
+                        <a:srgbClr val="E9B9C0"/>
                       </a:solidFill>
                       <a:prstDash val="solid"/>
                       <a:round/>
@@ -5482,7 +6521,7 @@
                     </a:lnL>
                     <a:lnR w="9525" cap="flat" cmpd="sng" algn="ctr">
                       <a:solidFill>
-                        <a:srgbClr val="B9C6BC"/>
+                        <a:srgbClr val="E9B9C0"/>
                       </a:solidFill>
                       <a:prstDash val="solid"/>
                       <a:round/>
@@ -5491,7 +6530,7 @@
                     </a:lnR>
                     <a:lnT w="9525" cap="flat" cmpd="sng" algn="ctr">
                       <a:solidFill>
-                        <a:srgbClr val="B9C6BC"/>
+                        <a:srgbClr val="E9B9C0"/>
                       </a:solidFill>
                       <a:prstDash val="solid"/>
                       <a:round/>
@@ -5500,7 +6539,7 @@
                     </a:lnT>
                     <a:lnB w="9525" cap="flat" cmpd="sng" algn="ctr">
                       <a:solidFill>
-                        <a:srgbClr val="B9C6BC"/>
+                        <a:srgbClr val="E9B9C0"/>
                       </a:solidFill>
                       <a:prstDash val="solid"/>
                       <a:round/>
@@ -5508,7 +6547,7 @@
                       <a:tailEnd type="none" w="med" len="med"/>
                     </a:lnB>
                     <a:solidFill>
-                      <a:schemeClr val="accent2"/>
+                      <a:schemeClr val="tx2"/>
                     </a:solidFill>
                   </a:tcPr>
                 </a:tc>
@@ -5534,7 +6573,7 @@
                   <a:tcPr marL="91440" marR="91440" marT="45720" marB="45720" anchor="ctr">
                     <a:lnL w="9525" cap="flat" cmpd="sng" algn="ctr">
                       <a:solidFill>
-                        <a:srgbClr val="B9C6BC"/>
+                        <a:srgbClr val="E9B9C0"/>
                       </a:solidFill>
                       <a:prstDash val="solid"/>
                       <a:round/>
@@ -5543,7 +6582,7 @@
                     </a:lnL>
                     <a:lnR w="9525" cap="flat" cmpd="sng" algn="ctr">
                       <a:solidFill>
-                        <a:srgbClr val="B9C6BC"/>
+                        <a:srgbClr val="E9B9C0"/>
                       </a:solidFill>
                       <a:prstDash val="solid"/>
                       <a:round/>
@@ -5552,7 +6591,7 @@
                     </a:lnR>
                     <a:lnT w="9525" cap="flat" cmpd="sng" algn="ctr">
                       <a:solidFill>
-                        <a:srgbClr val="B9C6BC"/>
+                        <a:srgbClr val="E9B9C0"/>
                       </a:solidFill>
                       <a:prstDash val="solid"/>
                       <a:round/>
@@ -5561,7 +6600,7 @@
                     </a:lnT>
                     <a:lnB w="9525" cap="flat" cmpd="sng" algn="ctr">
                       <a:solidFill>
-                        <a:srgbClr val="B9C6BC"/>
+                        <a:srgbClr val="E9B9C0"/>
                       </a:solidFill>
                       <a:prstDash val="solid"/>
                       <a:round/>
@@ -5569,7 +6608,7 @@
                       <a:tailEnd type="none" w="med" len="med"/>
                     </a:lnB>
                     <a:solidFill>
-                      <a:schemeClr val="accent2"/>
+                      <a:schemeClr val="tx2"/>
                     </a:solidFill>
                   </a:tcPr>
                 </a:tc>
@@ -5595,7 +6634,7 @@
                   <a:tcPr marL="91440" marR="91440" marT="45720" marB="45720" anchor="ctr">
                     <a:lnL w="9525" cap="flat" cmpd="sng" algn="ctr">
                       <a:solidFill>
-                        <a:srgbClr val="B9C6BC"/>
+                        <a:srgbClr val="E9B9C0"/>
                       </a:solidFill>
                       <a:prstDash val="solid"/>
                       <a:round/>
@@ -5604,7 +6643,7 @@
                     </a:lnL>
                     <a:lnR w="9525" cap="flat" cmpd="sng" algn="ctr">
                       <a:solidFill>
-                        <a:srgbClr val="B9C6BC"/>
+                        <a:srgbClr val="E9B9C0"/>
                       </a:solidFill>
                       <a:prstDash val="solid"/>
                       <a:round/>
@@ -5613,7 +6652,7 @@
                     </a:lnR>
                     <a:lnT w="9525" cap="flat" cmpd="sng" algn="ctr">
                       <a:solidFill>
-                        <a:srgbClr val="B9C6BC"/>
+                        <a:srgbClr val="E9B9C0"/>
                       </a:solidFill>
                       <a:prstDash val="solid"/>
                       <a:round/>
@@ -5622,7 +6661,7 @@
                     </a:lnT>
                     <a:lnB w="9525" cap="flat" cmpd="sng" algn="ctr">
                       <a:solidFill>
-                        <a:srgbClr val="B9C6BC"/>
+                        <a:srgbClr val="E9B9C0"/>
                       </a:solidFill>
                       <a:prstDash val="solid"/>
                       <a:round/>
@@ -5630,7 +6669,7 @@
                       <a:tailEnd type="none" w="med" len="med"/>
                     </a:lnB>
                     <a:solidFill>
-                      <a:schemeClr val="accent2"/>
+                      <a:schemeClr val="tx2"/>
                     </a:solidFill>
                   </a:tcPr>
                 </a:tc>
@@ -5658,7 +6697,7 @@
                   <a:tcPr marL="91440" marR="91440" marT="45720" marB="45720" anchor="ctr">
                     <a:lnL w="9525" cap="flat" cmpd="sng" algn="ctr">
                       <a:solidFill>
-                        <a:srgbClr val="B9C6BC"/>
+                        <a:srgbClr val="E9B9C0"/>
                       </a:solidFill>
                       <a:prstDash val="solid"/>
                       <a:round/>
@@ -5667,7 +6706,7 @@
                     </a:lnL>
                     <a:lnR w="9525" cap="flat" cmpd="sng" algn="ctr">
                       <a:solidFill>
-                        <a:srgbClr val="B9C6BC"/>
+                        <a:srgbClr val="E9B9C0"/>
                       </a:solidFill>
                       <a:prstDash val="solid"/>
                       <a:round/>
@@ -5676,7 +6715,7 @@
                     </a:lnR>
                     <a:lnT w="9525" cap="flat" cmpd="sng" algn="ctr">
                       <a:solidFill>
-                        <a:srgbClr val="B9C6BC"/>
+                        <a:srgbClr val="E9B9C0"/>
                       </a:solidFill>
                       <a:prstDash val="solid"/>
                       <a:round/>
@@ -5685,7 +6724,7 @@
                     </a:lnT>
                     <a:lnB w="9525" cap="flat" cmpd="sng" algn="ctr">
                       <a:solidFill>
-                        <a:srgbClr val="B9C6BC"/>
+                        <a:srgbClr val="E9B9C0"/>
                       </a:solidFill>
                       <a:prstDash val="solid"/>
                       <a:round/>
@@ -5716,7 +6755,7 @@
                   <a:tcPr marL="91440" marR="91440" marT="45720" marB="45720" anchor="ctr">
                     <a:lnL w="9525" cap="flat" cmpd="sng" algn="ctr">
                       <a:solidFill>
-                        <a:srgbClr val="B9C6BC"/>
+                        <a:srgbClr val="E9B9C0"/>
                       </a:solidFill>
                       <a:prstDash val="solid"/>
                       <a:round/>
@@ -5725,7 +6764,7 @@
                     </a:lnL>
                     <a:lnR w="9525" cap="flat" cmpd="sng" algn="ctr">
                       <a:solidFill>
-                        <a:srgbClr val="B9C6BC"/>
+                        <a:srgbClr val="E9B9C0"/>
                       </a:solidFill>
                       <a:prstDash val="solid"/>
                       <a:round/>
@@ -5734,7 +6773,7 @@
                     </a:lnR>
                     <a:lnT w="9525" cap="flat" cmpd="sng" algn="ctr">
                       <a:solidFill>
-                        <a:srgbClr val="B9C6BC"/>
+                        <a:srgbClr val="E9B9C0"/>
                       </a:solidFill>
                       <a:prstDash val="solid"/>
                       <a:round/>
@@ -5743,7 +6782,7 @@
                     </a:lnT>
                     <a:lnB w="9525" cap="flat" cmpd="sng" algn="ctr">
                       <a:solidFill>
-                        <a:srgbClr val="B9C6BC"/>
+                        <a:srgbClr val="E9B9C0"/>
                       </a:solidFill>
                       <a:prstDash val="solid"/>
                       <a:round/>
@@ -5774,7 +6813,7 @@
                   <a:tcPr marL="91440" marR="91440" marT="45720" marB="45720" anchor="ctr">
                     <a:lnL w="9525" cap="flat" cmpd="sng" algn="ctr">
                       <a:solidFill>
-                        <a:srgbClr val="B9C6BC"/>
+                        <a:srgbClr val="E9B9C0"/>
                       </a:solidFill>
                       <a:prstDash val="solid"/>
                       <a:round/>
@@ -5783,7 +6822,7 @@
                     </a:lnL>
                     <a:lnR w="9525" cap="flat" cmpd="sng" algn="ctr">
                       <a:solidFill>
-                        <a:srgbClr val="B9C6BC"/>
+                        <a:srgbClr val="E9B9C0"/>
                       </a:solidFill>
                       <a:prstDash val="solid"/>
                       <a:round/>
@@ -5792,7 +6831,7 @@
                     </a:lnR>
                     <a:lnT w="9525" cap="flat" cmpd="sng" algn="ctr">
                       <a:solidFill>
-                        <a:srgbClr val="B9C6BC"/>
+                        <a:srgbClr val="E9B9C0"/>
                       </a:solidFill>
                       <a:prstDash val="solid"/>
                       <a:round/>
@@ -5801,7 +6840,7 @@
                     </a:lnT>
                     <a:lnB w="9525" cap="flat" cmpd="sng" algn="ctr">
                       <a:solidFill>
-                        <a:srgbClr val="B9C6BC"/>
+                        <a:srgbClr val="E9B9C0"/>
                       </a:solidFill>
                       <a:prstDash val="solid"/>
                       <a:round/>
@@ -5832,7 +6871,7 @@
                   <a:tcPr marL="91440" marR="91440" marT="45720" marB="45720" anchor="ctr">
                     <a:lnL w="9525" cap="flat" cmpd="sng" algn="ctr">
                       <a:solidFill>
-                        <a:srgbClr val="B9C6BC"/>
+                        <a:srgbClr val="E9B9C0"/>
                       </a:solidFill>
                       <a:prstDash val="solid"/>
                       <a:round/>
@@ -5841,7 +6880,7 @@
                     </a:lnL>
                     <a:lnR w="9525" cap="flat" cmpd="sng" algn="ctr">
                       <a:solidFill>
-                        <a:srgbClr val="B9C6BC"/>
+                        <a:srgbClr val="E9B9C0"/>
                       </a:solidFill>
                       <a:prstDash val="solid"/>
                       <a:round/>
@@ -5850,7 +6889,7 @@
                     </a:lnR>
                     <a:lnT w="9525" cap="flat" cmpd="sng" algn="ctr">
                       <a:solidFill>
-                        <a:srgbClr val="B9C6BC"/>
+                        <a:srgbClr val="E9B9C0"/>
                       </a:solidFill>
                       <a:prstDash val="solid"/>
                       <a:round/>
@@ -5859,7 +6898,7 @@
                     </a:lnT>
                     <a:lnB w="9525" cap="flat" cmpd="sng" algn="ctr">
                       <a:solidFill>
-                        <a:srgbClr val="B9C6BC"/>
+                        <a:srgbClr val="E9B9C0"/>
                       </a:solidFill>
                       <a:prstDash val="solid"/>
                       <a:round/>
@@ -5890,7 +6929,7 @@
                   <a:tcPr marL="91440" marR="91440" marT="45720" marB="45720" anchor="ctr">
                     <a:lnL w="9525" cap="flat" cmpd="sng" algn="ctr">
                       <a:solidFill>
-                        <a:srgbClr val="B9C6BC"/>
+                        <a:srgbClr val="E9B9C0"/>
                       </a:solidFill>
                       <a:prstDash val="solid"/>
                       <a:round/>
@@ -5899,7 +6938,7 @@
                     </a:lnL>
                     <a:lnR w="9525" cap="flat" cmpd="sng" algn="ctr">
                       <a:solidFill>
-                        <a:srgbClr val="B9C6BC"/>
+                        <a:srgbClr val="E9B9C0"/>
                       </a:solidFill>
                       <a:prstDash val="solid"/>
                       <a:round/>
@@ -5908,7 +6947,7 @@
                     </a:lnR>
                     <a:lnT w="9525" cap="flat" cmpd="sng" algn="ctr">
                       <a:solidFill>
-                        <a:srgbClr val="B9C6BC"/>
+                        <a:srgbClr val="E9B9C0"/>
                       </a:solidFill>
                       <a:prstDash val="solid"/>
                       <a:round/>
@@ -5917,7 +6956,7 @@
                     </a:lnT>
                     <a:lnB w="9525" cap="flat" cmpd="sng" algn="ctr">
                       <a:solidFill>
-                        <a:srgbClr val="B9C6BC"/>
+                        <a:srgbClr val="E9B9C0"/>
                       </a:solidFill>
                       <a:prstDash val="solid"/>
                       <a:round/>
@@ -5948,7 +6987,7 @@
                   <a:tcPr marL="91440" marR="91440" marT="45720" marB="45720" anchor="ctr">
                     <a:lnL w="9525" cap="flat" cmpd="sng" algn="ctr">
                       <a:solidFill>
-                        <a:srgbClr val="B9C6BC"/>
+                        <a:srgbClr val="E9B9C0"/>
                       </a:solidFill>
                       <a:prstDash val="solid"/>
                       <a:round/>
@@ -5957,7 +6996,7 @@
                     </a:lnL>
                     <a:lnR w="9525" cap="flat" cmpd="sng" algn="ctr">
                       <a:solidFill>
-                        <a:srgbClr val="B9C6BC"/>
+                        <a:srgbClr val="E9B9C0"/>
                       </a:solidFill>
                       <a:prstDash val="solid"/>
                       <a:round/>
@@ -5966,7 +7005,7 @@
                     </a:lnR>
                     <a:lnT w="9525" cap="flat" cmpd="sng" algn="ctr">
                       <a:solidFill>
-                        <a:srgbClr val="B9C6BC"/>
+                        <a:srgbClr val="E9B9C0"/>
                       </a:solidFill>
                       <a:prstDash val="solid"/>
                       <a:round/>
@@ -5975,7 +7014,7 @@
                     </a:lnT>
                     <a:lnB w="9525" cap="flat" cmpd="sng" algn="ctr">
                       <a:solidFill>
-                        <a:srgbClr val="B9C6BC"/>
+                        <a:srgbClr val="E9B9C0"/>
                       </a:solidFill>
                       <a:prstDash val="solid"/>
                       <a:round/>
@@ -6006,7 +7045,7 @@
                   <a:tcPr marL="91440" marR="91440" marT="45720" marB="45720" anchor="ctr">
                     <a:lnL w="9525" cap="flat" cmpd="sng" algn="ctr">
                       <a:solidFill>
-                        <a:srgbClr val="B9C6BC"/>
+                        <a:srgbClr val="E9B9C0"/>
                       </a:solidFill>
                       <a:prstDash val="solid"/>
                       <a:round/>
@@ -6015,7 +7054,7 @@
                     </a:lnL>
                     <a:lnR w="9525" cap="flat" cmpd="sng" algn="ctr">
                       <a:solidFill>
-                        <a:srgbClr val="B9C6BC"/>
+                        <a:srgbClr val="E9B9C0"/>
                       </a:solidFill>
                       <a:prstDash val="solid"/>
                       <a:round/>
@@ -6024,7 +7063,7 @@
                     </a:lnR>
                     <a:lnT w="9525" cap="flat" cmpd="sng" algn="ctr">
                       <a:solidFill>
-                        <a:srgbClr val="B9C6BC"/>
+                        <a:srgbClr val="E9B9C0"/>
                       </a:solidFill>
                       <a:prstDash val="solid"/>
                       <a:round/>
@@ -6033,7 +7072,7 @@
                     </a:lnT>
                     <a:lnB w="9525" cap="flat" cmpd="sng" algn="ctr">
                       <a:solidFill>
-                        <a:srgbClr val="B9C6BC"/>
+                        <a:srgbClr val="E9B9C0"/>
                       </a:solidFill>
                       <a:prstDash val="solid"/>
                       <a:round/>
@@ -6066,7 +7105,7 @@
                   <a:tcPr marL="91440" marR="91440" marT="45720" marB="45720" anchor="ctr">
                     <a:lnL w="9525" cap="flat" cmpd="sng" algn="ctr">
                       <a:solidFill>
-                        <a:srgbClr val="B9C6BC"/>
+                        <a:srgbClr val="E9B9C0"/>
                       </a:solidFill>
                       <a:prstDash val="solid"/>
                       <a:round/>
@@ -6075,7 +7114,7 @@
                     </a:lnL>
                     <a:lnR w="9525" cap="flat" cmpd="sng" algn="ctr">
                       <a:solidFill>
-                        <a:srgbClr val="B9C6BC"/>
+                        <a:srgbClr val="E9B9C0"/>
                       </a:solidFill>
                       <a:prstDash val="solid"/>
                       <a:round/>
@@ -6084,7 +7123,7 @@
                     </a:lnR>
                     <a:lnT w="9525" cap="flat" cmpd="sng" algn="ctr">
                       <a:solidFill>
-                        <a:srgbClr val="B9C6BC"/>
+                        <a:srgbClr val="E9B9C0"/>
                       </a:solidFill>
                       <a:prstDash val="solid"/>
                       <a:round/>
@@ -6093,7 +7132,7 @@
                     </a:lnT>
                     <a:lnB w="9525" cap="flat" cmpd="sng" algn="ctr">
                       <a:solidFill>
-                        <a:srgbClr val="B9C6BC"/>
+                        <a:srgbClr val="E9B9C0"/>
                       </a:solidFill>
                       <a:prstDash val="solid"/>
                       <a:round/>
@@ -6116,7 +7155,7 @@
                             <a:schemeClr val="tx1"/>
                           </a:solidFill>
                         </a:rPr>
-                        <a:t>販促物一式（クリスマスアーチ・B0ポスター10枚・開催中ツール・コスプレ）</a:t>
+                        <a:t>販促物一式（クリスマスアーチ・B0ボードPOP10枚・開催中ツール・コスプレ）</a:t>
                       </a:r>
                       <a:endParaRPr lang="en-US" sz="1000" dirty="0"/>
                     </a:p>
@@ -6124,7 +7163,7 @@
                   <a:tcPr marL="91440" marR="91440" marT="45720" marB="45720" anchor="ctr">
                     <a:lnL w="9525" cap="flat" cmpd="sng" algn="ctr">
                       <a:solidFill>
-                        <a:srgbClr val="B9C6BC"/>
+                        <a:srgbClr val="E9B9C0"/>
                       </a:solidFill>
                       <a:prstDash val="solid"/>
                       <a:round/>
@@ -6133,7 +7172,7 @@
                     </a:lnL>
                     <a:lnR w="9525" cap="flat" cmpd="sng" algn="ctr">
                       <a:solidFill>
-                        <a:srgbClr val="B9C6BC"/>
+                        <a:srgbClr val="E9B9C0"/>
                       </a:solidFill>
                       <a:prstDash val="solid"/>
                       <a:round/>
@@ -6142,7 +7181,7 @@
                     </a:lnR>
                     <a:lnT w="9525" cap="flat" cmpd="sng" algn="ctr">
                       <a:solidFill>
-                        <a:srgbClr val="B9C6BC"/>
+                        <a:srgbClr val="E9B9C0"/>
                       </a:solidFill>
                       <a:prstDash val="solid"/>
                       <a:round/>
@@ -6151,7 +7190,7 @@
                     </a:lnT>
                     <a:lnB w="9525" cap="flat" cmpd="sng" algn="ctr">
                       <a:solidFill>
-                        <a:srgbClr val="B9C6BC"/>
+                        <a:srgbClr val="E9B9C0"/>
                       </a:solidFill>
                       <a:prstDash val="solid"/>
                       <a:round/>
@@ -6182,7 +7221,7 @@
                   <a:tcPr marL="91440" marR="91440" marT="45720" marB="45720" anchor="ctr">
                     <a:lnL w="9525" cap="flat" cmpd="sng" algn="ctr">
                       <a:solidFill>
-                        <a:srgbClr val="B9C6BC"/>
+                        <a:srgbClr val="E9B9C0"/>
                       </a:solidFill>
                       <a:prstDash val="solid"/>
                       <a:round/>
@@ -6191,7 +7230,7 @@
                     </a:lnL>
                     <a:lnR w="9525" cap="flat" cmpd="sng" algn="ctr">
                       <a:solidFill>
-                        <a:srgbClr val="B9C6BC"/>
+                        <a:srgbClr val="E9B9C0"/>
                       </a:solidFill>
                       <a:prstDash val="solid"/>
                       <a:round/>
@@ -6200,7 +7239,7 @@
                     </a:lnR>
                     <a:lnT w="9525" cap="flat" cmpd="sng" algn="ctr">
                       <a:solidFill>
-                        <a:srgbClr val="B9C6BC"/>
+                        <a:srgbClr val="E9B9C0"/>
                       </a:solidFill>
                       <a:prstDash val="solid"/>
                       <a:round/>
@@ -6209,7 +7248,7 @@
                     </a:lnT>
                     <a:lnB w="9525" cap="flat" cmpd="sng" algn="ctr">
                       <a:solidFill>
-                        <a:srgbClr val="B9C6BC"/>
+                        <a:srgbClr val="E9B9C0"/>
                       </a:solidFill>
                       <a:prstDash val="solid"/>
                       <a:round/>
@@ -6240,7 +7279,7 @@
                   <a:tcPr marL="91440" marR="91440" marT="45720" marB="45720" anchor="ctr">
                     <a:lnL w="9525" cap="flat" cmpd="sng" algn="ctr">
                       <a:solidFill>
-                        <a:srgbClr val="B9C6BC"/>
+                        <a:srgbClr val="E9B9C0"/>
                       </a:solidFill>
                       <a:prstDash val="solid"/>
                       <a:round/>
@@ -6249,7 +7288,7 @@
                     </a:lnL>
                     <a:lnR w="9525" cap="flat" cmpd="sng" algn="ctr">
                       <a:solidFill>
-                        <a:srgbClr val="B9C6BC"/>
+                        <a:srgbClr val="E9B9C0"/>
                       </a:solidFill>
                       <a:prstDash val="solid"/>
                       <a:round/>
@@ -6258,7 +7297,7 @@
                     </a:lnR>
                     <a:lnT w="9525" cap="flat" cmpd="sng" algn="ctr">
                       <a:solidFill>
-                        <a:srgbClr val="B9C6BC"/>
+                        <a:srgbClr val="E9B9C0"/>
                       </a:solidFill>
                       <a:prstDash val="solid"/>
                       <a:round/>
@@ -6267,7 +7306,7 @@
                     </a:lnT>
                     <a:lnB w="9525" cap="flat" cmpd="sng" algn="ctr">
                       <a:solidFill>
-                        <a:srgbClr val="B9C6BC"/>
+                        <a:srgbClr val="E9B9C0"/>
                       </a:solidFill>
                       <a:prstDash val="solid"/>
                       <a:round/>
@@ -6298,7 +7337,7 @@
                   <a:tcPr marL="91440" marR="91440" marT="45720" marB="45720" anchor="ctr">
                     <a:lnL w="9525" cap="flat" cmpd="sng" algn="ctr">
                       <a:solidFill>
-                        <a:srgbClr val="B9C6BC"/>
+                        <a:srgbClr val="E9B9C0"/>
                       </a:solidFill>
                       <a:prstDash val="solid"/>
                       <a:round/>
@@ -6307,7 +7346,7 @@
                     </a:lnL>
                     <a:lnR w="9525" cap="flat" cmpd="sng" algn="ctr">
                       <a:solidFill>
-                        <a:srgbClr val="B9C6BC"/>
+                        <a:srgbClr val="E9B9C0"/>
                       </a:solidFill>
                       <a:prstDash val="solid"/>
                       <a:round/>
@@ -6316,7 +7355,7 @@
                     </a:lnR>
                     <a:lnT w="9525" cap="flat" cmpd="sng" algn="ctr">
                       <a:solidFill>
-                        <a:srgbClr val="B9C6BC"/>
+                        <a:srgbClr val="E9B9C0"/>
                       </a:solidFill>
                       <a:prstDash val="solid"/>
                       <a:round/>
@@ -6325,7 +7364,7 @@
                     </a:lnT>
                     <a:lnB w="9525" cap="flat" cmpd="sng" algn="ctr">
                       <a:solidFill>
-                        <a:srgbClr val="B9C6BC"/>
+                        <a:srgbClr val="E9B9C0"/>
                       </a:solidFill>
                       <a:prstDash val="solid"/>
                       <a:round/>
@@ -6356,7 +7395,7 @@
                   <a:tcPr marL="91440" marR="91440" marT="45720" marB="45720" anchor="ctr">
                     <a:lnL w="9525" cap="flat" cmpd="sng" algn="ctr">
                       <a:solidFill>
-                        <a:srgbClr val="B9C6BC"/>
+                        <a:srgbClr val="E9B9C0"/>
                       </a:solidFill>
                       <a:prstDash val="solid"/>
                       <a:round/>
@@ -6365,7 +7404,7 @@
                     </a:lnL>
                     <a:lnR w="9525" cap="flat" cmpd="sng" algn="ctr">
                       <a:solidFill>
-                        <a:srgbClr val="B9C6BC"/>
+                        <a:srgbClr val="E9B9C0"/>
                       </a:solidFill>
                       <a:prstDash val="solid"/>
                       <a:round/>
@@ -6374,7 +7413,7 @@
                     </a:lnR>
                     <a:lnT w="9525" cap="flat" cmpd="sng" algn="ctr">
                       <a:solidFill>
-                        <a:srgbClr val="B9C6BC"/>
+                        <a:srgbClr val="E9B9C0"/>
                       </a:solidFill>
                       <a:prstDash val="solid"/>
                       <a:round/>
@@ -6383,7 +7422,7 @@
                     </a:lnT>
                     <a:lnB w="9525" cap="flat" cmpd="sng" algn="ctr">
                       <a:solidFill>
-                        <a:srgbClr val="B9C6BC"/>
+                        <a:srgbClr val="E9B9C0"/>
                       </a:solidFill>
                       <a:prstDash val="solid"/>
                       <a:round/>
@@ -6414,7 +7453,7 @@
                   <a:tcPr marL="91440" marR="91440" marT="45720" marB="45720" anchor="ctr">
                     <a:lnL w="9525" cap="flat" cmpd="sng" algn="ctr">
                       <a:solidFill>
-                        <a:srgbClr val="B9C6BC"/>
+                        <a:srgbClr val="E9B9C0"/>
                       </a:solidFill>
                       <a:prstDash val="solid"/>
                       <a:round/>
@@ -6423,7 +7462,7 @@
                     </a:lnL>
                     <a:lnR w="9525" cap="flat" cmpd="sng" algn="ctr">
                       <a:solidFill>
-                        <a:srgbClr val="B9C6BC"/>
+                        <a:srgbClr val="E9B9C0"/>
                       </a:solidFill>
                       <a:prstDash val="solid"/>
                       <a:round/>
@@ -6432,7 +7471,7 @@
                     </a:lnR>
                     <a:lnT w="9525" cap="flat" cmpd="sng" algn="ctr">
                       <a:solidFill>
-                        <a:srgbClr val="B9C6BC"/>
+                        <a:srgbClr val="E9B9C0"/>
                       </a:solidFill>
                       <a:prstDash val="solid"/>
                       <a:round/>
@@ -6441,7 +7480,7 @@
                     </a:lnT>
                     <a:lnB w="9525" cap="flat" cmpd="sng" algn="ctr">
                       <a:solidFill>
-                        <a:srgbClr val="B9C6BC"/>
+                        <a:srgbClr val="E9B9C0"/>
                       </a:solidFill>
                       <a:prstDash val="solid"/>
                       <a:round/>
@@ -6474,7 +7513,7 @@
                   <a:tcPr marL="91440" marR="91440" marT="45720" marB="45720" anchor="ctr">
                     <a:lnL w="9525" cap="flat" cmpd="sng" algn="ctr">
                       <a:solidFill>
-                        <a:srgbClr val="B9C6BC"/>
+                        <a:srgbClr val="E9B9C0"/>
                       </a:solidFill>
                       <a:prstDash val="solid"/>
                       <a:round/>
@@ -6483,7 +7522,7 @@
                     </a:lnL>
                     <a:lnR w="9525" cap="flat" cmpd="sng" algn="ctr">
                       <a:solidFill>
-                        <a:srgbClr val="B9C6BC"/>
+                        <a:srgbClr val="E9B9C0"/>
                       </a:solidFill>
                       <a:prstDash val="solid"/>
                       <a:round/>
@@ -6492,7 +7531,7 @@
                     </a:lnR>
                     <a:lnT w="9525" cap="flat" cmpd="sng" algn="ctr">
                       <a:solidFill>
-                        <a:srgbClr val="B9C6BC"/>
+                        <a:srgbClr val="E9B9C0"/>
                       </a:solidFill>
                       <a:prstDash val="solid"/>
                       <a:round/>
@@ -6501,7 +7540,7 @@
                     </a:lnT>
                     <a:lnB w="9525" cap="flat" cmpd="sng" algn="ctr">
                       <a:solidFill>
-                        <a:srgbClr val="B9C6BC"/>
+                        <a:srgbClr val="E9B9C0"/>
                       </a:solidFill>
                       <a:prstDash val="solid"/>
                       <a:round/>
@@ -6532,7 +7571,7 @@
                   <a:tcPr marL="91440" marR="91440" marT="45720" marB="45720" anchor="ctr">
                     <a:lnL w="9525" cap="flat" cmpd="sng" algn="ctr">
                       <a:solidFill>
-                        <a:srgbClr val="B9C6BC"/>
+                        <a:srgbClr val="E9B9C0"/>
                       </a:solidFill>
                       <a:prstDash val="solid"/>
                       <a:round/>
@@ -6541,7 +7580,7 @@
                     </a:lnL>
                     <a:lnR w="9525" cap="flat" cmpd="sng" algn="ctr">
                       <a:solidFill>
-                        <a:srgbClr val="B9C6BC"/>
+                        <a:srgbClr val="E9B9C0"/>
                       </a:solidFill>
                       <a:prstDash val="solid"/>
                       <a:round/>
@@ -6550,7 +7589,7 @@
                     </a:lnR>
                     <a:lnT w="9525" cap="flat" cmpd="sng" algn="ctr">
                       <a:solidFill>
-                        <a:srgbClr val="B9C6BC"/>
+                        <a:srgbClr val="E9B9C0"/>
                       </a:solidFill>
                       <a:prstDash val="solid"/>
                       <a:round/>
@@ -6559,7 +7598,7 @@
                     </a:lnT>
                     <a:lnB w="9525" cap="flat" cmpd="sng" algn="ctr">
                       <a:solidFill>
-                        <a:srgbClr val="B9C6BC"/>
+                        <a:srgbClr val="E9B9C0"/>
                       </a:solidFill>
                       <a:prstDash val="solid"/>
                       <a:round/>
@@ -6590,7 +7629,7 @@
                   <a:tcPr marL="91440" marR="91440" marT="45720" marB="45720" anchor="ctr">
                     <a:lnL w="9525" cap="flat" cmpd="sng" algn="ctr">
                       <a:solidFill>
-                        <a:srgbClr val="B9C6BC"/>
+                        <a:srgbClr val="E9B9C0"/>
                       </a:solidFill>
                       <a:prstDash val="solid"/>
                       <a:round/>
@@ -6599,7 +7638,7 @@
                     </a:lnL>
                     <a:lnR w="9525" cap="flat" cmpd="sng" algn="ctr">
                       <a:solidFill>
-                        <a:srgbClr val="B9C6BC"/>
+                        <a:srgbClr val="E9B9C0"/>
                       </a:solidFill>
                       <a:prstDash val="solid"/>
                       <a:round/>
@@ -6608,7 +7647,7 @@
                     </a:lnR>
                     <a:lnT w="9525" cap="flat" cmpd="sng" algn="ctr">
                       <a:solidFill>
-                        <a:srgbClr val="B9C6BC"/>
+                        <a:srgbClr val="E9B9C0"/>
                       </a:solidFill>
                       <a:prstDash val="solid"/>
                       <a:round/>
@@ -6617,7 +7656,7 @@
                     </a:lnT>
                     <a:lnB w="9525" cap="flat" cmpd="sng" algn="ctr">
                       <a:solidFill>
-                        <a:srgbClr val="B9C6BC"/>
+                        <a:srgbClr val="E9B9C0"/>
                       </a:solidFill>
                       <a:prstDash val="solid"/>
                       <a:round/>
@@ -6648,7 +7687,7 @@
                   <a:tcPr marL="91440" marR="91440" marT="45720" marB="45720" anchor="ctr">
                     <a:lnL w="9525" cap="flat" cmpd="sng" algn="ctr">
                       <a:solidFill>
-                        <a:srgbClr val="B9C6BC"/>
+                        <a:srgbClr val="E9B9C0"/>
                       </a:solidFill>
                       <a:prstDash val="solid"/>
                       <a:round/>
@@ -6657,7 +7696,7 @@
                     </a:lnL>
                     <a:lnR w="9525" cap="flat" cmpd="sng" algn="ctr">
                       <a:solidFill>
-                        <a:srgbClr val="B9C6BC"/>
+                        <a:srgbClr val="E9B9C0"/>
                       </a:solidFill>
                       <a:prstDash val="solid"/>
                       <a:round/>
@@ -6666,7 +7705,7 @@
                     </a:lnR>
                     <a:lnT w="9525" cap="flat" cmpd="sng" algn="ctr">
                       <a:solidFill>
-                        <a:srgbClr val="B9C6BC"/>
+                        <a:srgbClr val="E9B9C0"/>
                       </a:solidFill>
                       <a:prstDash val="solid"/>
                       <a:round/>
@@ -6675,7 +7714,7 @@
                     </a:lnT>
                     <a:lnB w="9525" cap="flat" cmpd="sng" algn="ctr">
                       <a:solidFill>
-                        <a:srgbClr val="B9C6BC"/>
+                        <a:srgbClr val="E9B9C0"/>
                       </a:solidFill>
                       <a:prstDash val="solid"/>
                       <a:round/>
@@ -6706,7 +7745,7 @@
                   <a:tcPr marL="91440" marR="91440" marT="45720" marB="45720" anchor="ctr">
                     <a:lnL w="9525" cap="flat" cmpd="sng" algn="ctr">
                       <a:solidFill>
-                        <a:srgbClr val="B9C6BC"/>
+                        <a:srgbClr val="E9B9C0"/>
                       </a:solidFill>
                       <a:prstDash val="solid"/>
                       <a:round/>
@@ -6715,7 +7754,7 @@
                     </a:lnL>
                     <a:lnR w="9525" cap="flat" cmpd="sng" algn="ctr">
                       <a:solidFill>
-                        <a:srgbClr val="B9C6BC"/>
+                        <a:srgbClr val="E9B9C0"/>
                       </a:solidFill>
                       <a:prstDash val="solid"/>
                       <a:round/>
@@ -6724,7 +7763,7 @@
                     </a:lnR>
                     <a:lnT w="9525" cap="flat" cmpd="sng" algn="ctr">
                       <a:solidFill>
-                        <a:srgbClr val="B9C6BC"/>
+                        <a:srgbClr val="E9B9C0"/>
                       </a:solidFill>
                       <a:prstDash val="solid"/>
                       <a:round/>
@@ -6733,7 +7772,7 @@
                     </a:lnT>
                     <a:lnB w="9525" cap="flat" cmpd="sng" algn="ctr">
                       <a:solidFill>
-                        <a:srgbClr val="B9C6BC"/>
+                        <a:srgbClr val="E9B9C0"/>
                       </a:solidFill>
                       <a:prstDash val="solid"/>
                       <a:round/>
@@ -6764,7 +7803,7 @@
                   <a:tcPr marL="91440" marR="91440" marT="45720" marB="45720" anchor="ctr">
                     <a:lnL w="9525" cap="flat" cmpd="sng" algn="ctr">
                       <a:solidFill>
-                        <a:srgbClr val="B9C6BC"/>
+                        <a:srgbClr val="E9B9C0"/>
                       </a:solidFill>
                       <a:prstDash val="solid"/>
                       <a:round/>
@@ -6773,7 +7812,7 @@
                     </a:lnL>
                     <a:lnR w="9525" cap="flat" cmpd="sng" algn="ctr">
                       <a:solidFill>
-                        <a:srgbClr val="B9C6BC"/>
+                        <a:srgbClr val="E9B9C0"/>
                       </a:solidFill>
                       <a:prstDash val="solid"/>
                       <a:round/>
@@ -6782,7 +7821,7 @@
                     </a:lnR>
                     <a:lnT w="9525" cap="flat" cmpd="sng" algn="ctr">
                       <a:solidFill>
-                        <a:srgbClr val="B9C6BC"/>
+                        <a:srgbClr val="E9B9C0"/>
                       </a:solidFill>
                       <a:prstDash val="solid"/>
                       <a:round/>
@@ -6791,7 +7830,7 @@
                     </a:lnT>
                     <a:lnB w="9525" cap="flat" cmpd="sng" algn="ctr">
                       <a:solidFill>
-                        <a:srgbClr val="B9C6BC"/>
+                        <a:srgbClr val="E9B9C0"/>
                       </a:solidFill>
                       <a:prstDash val="solid"/>
                       <a:round/>
@@ -6814,7 +7853,7 @@
                   <a:tcPr marL="91440" marR="91440" marT="45720" marB="45720" anchor="ctr">
                     <a:lnL w="9525" cap="flat" cmpd="sng" algn="ctr">
                       <a:solidFill>
-                        <a:srgbClr val="B9C6BC"/>
+                        <a:srgbClr val="E9B9C0"/>
                       </a:solidFill>
                       <a:prstDash val="solid"/>
                       <a:round/>
@@ -6823,7 +7862,7 @@
                     </a:lnL>
                     <a:lnR w="9525" cap="flat" cmpd="sng" algn="ctr">
                       <a:solidFill>
-                        <a:srgbClr val="B9C6BC"/>
+                        <a:srgbClr val="E9B9C0"/>
                       </a:solidFill>
                       <a:prstDash val="solid"/>
                       <a:round/>
@@ -6832,7 +7871,7 @@
                     </a:lnR>
                     <a:lnT w="9525" cap="flat" cmpd="sng" algn="ctr">
                       <a:solidFill>
-                        <a:srgbClr val="B9C6BC"/>
+                        <a:srgbClr val="E9B9C0"/>
                       </a:solidFill>
                       <a:prstDash val="solid"/>
                       <a:round/>
@@ -6841,7 +7880,7 @@
                     </a:lnT>
                     <a:lnB w="9525" cap="flat" cmpd="sng" algn="ctr">
                       <a:solidFill>
-                        <a:srgbClr val="B9C6BC"/>
+                        <a:srgbClr val="E9B9C0"/>
                       </a:solidFill>
                       <a:prstDash val="solid"/>
                       <a:round/>
@@ -6874,7 +7913,7 @@
                   <a:tcPr marL="91440" marR="91440" marT="45720" marB="45720" anchor="ctr">
                     <a:lnL w="9525" cap="flat" cmpd="sng" algn="ctr">
                       <a:solidFill>
-                        <a:srgbClr val="B9C6BC"/>
+                        <a:srgbClr val="E9B9C0"/>
                       </a:solidFill>
                       <a:prstDash val="solid"/>
                       <a:round/>
@@ -6883,7 +7922,7 @@
                     </a:lnL>
                     <a:lnR w="9525" cap="flat" cmpd="sng" algn="ctr">
                       <a:solidFill>
-                        <a:srgbClr val="B9C6BC"/>
+                        <a:srgbClr val="E9B9C0"/>
                       </a:solidFill>
                       <a:prstDash val="solid"/>
                       <a:round/>
@@ -6892,7 +7931,7 @@
                     </a:lnR>
                     <a:lnT w="9525" cap="flat" cmpd="sng" algn="ctr">
                       <a:solidFill>
-                        <a:srgbClr val="B9C6BC"/>
+                        <a:srgbClr val="E9B9C0"/>
                       </a:solidFill>
                       <a:prstDash val="solid"/>
                       <a:round/>
@@ -6901,7 +7940,7 @@
                     </a:lnT>
                     <a:lnB w="9525" cap="flat" cmpd="sng" algn="ctr">
                       <a:solidFill>
-                        <a:srgbClr val="B9C6BC"/>
+                        <a:srgbClr val="E9B9C0"/>
                       </a:solidFill>
                       <a:prstDash val="solid"/>
                       <a:round/>
@@ -6932,7 +7971,7 @@
                   <a:tcPr marL="91440" marR="91440" marT="45720" marB="45720" anchor="ctr">
                     <a:lnL w="9525" cap="flat" cmpd="sng" algn="ctr">
                       <a:solidFill>
-                        <a:srgbClr val="B9C6BC"/>
+                        <a:srgbClr val="E9B9C0"/>
                       </a:solidFill>
                       <a:prstDash val="solid"/>
                       <a:round/>
@@ -6941,7 +7980,7 @@
                     </a:lnL>
                     <a:lnR w="9525" cap="flat" cmpd="sng" algn="ctr">
                       <a:solidFill>
-                        <a:srgbClr val="B9C6BC"/>
+                        <a:srgbClr val="E9B9C0"/>
                       </a:solidFill>
                       <a:prstDash val="solid"/>
                       <a:round/>
@@ -6950,7 +7989,7 @@
                     </a:lnR>
                     <a:lnT w="9525" cap="flat" cmpd="sng" algn="ctr">
                       <a:solidFill>
-                        <a:srgbClr val="B9C6BC"/>
+                        <a:srgbClr val="E9B9C0"/>
                       </a:solidFill>
                       <a:prstDash val="solid"/>
                       <a:round/>
@@ -6959,7 +7998,7 @@
                     </a:lnT>
                     <a:lnB w="9525" cap="flat" cmpd="sng" algn="ctr">
                       <a:solidFill>
-                        <a:srgbClr val="B9C6BC"/>
+                        <a:srgbClr val="E9B9C0"/>
                       </a:solidFill>
                       <a:prstDash val="solid"/>
                       <a:round/>
@@ -6990,7 +8029,7 @@
                   <a:tcPr marL="91440" marR="91440" marT="45720" marB="45720" anchor="ctr">
                     <a:lnL w="9525" cap="flat" cmpd="sng" algn="ctr">
                       <a:solidFill>
-                        <a:srgbClr val="B9C6BC"/>
+                        <a:srgbClr val="E9B9C0"/>
                       </a:solidFill>
                       <a:prstDash val="solid"/>
                       <a:round/>
@@ -6999,7 +8038,7 @@
                     </a:lnL>
                     <a:lnR w="9525" cap="flat" cmpd="sng" algn="ctr">
                       <a:solidFill>
-                        <a:srgbClr val="B9C6BC"/>
+                        <a:srgbClr val="E9B9C0"/>
                       </a:solidFill>
                       <a:prstDash val="solid"/>
                       <a:round/>
@@ -7008,7 +8047,7 @@
                     </a:lnR>
                     <a:lnT w="9525" cap="flat" cmpd="sng" algn="ctr">
                       <a:solidFill>
-                        <a:srgbClr val="B9C6BC"/>
+                        <a:srgbClr val="E9B9C0"/>
                       </a:solidFill>
                       <a:prstDash val="solid"/>
                       <a:round/>
@@ -7017,7 +8056,7 @@
                     </a:lnT>
                     <a:lnB w="9525" cap="flat" cmpd="sng" algn="ctr">
                       <a:solidFill>
-                        <a:srgbClr val="B9C6BC"/>
+                        <a:srgbClr val="E9B9C0"/>
                       </a:solidFill>
                       <a:prstDash val="solid"/>
                       <a:round/>
@@ -7048,7 +8087,7 @@
                   <a:tcPr marL="91440" marR="91440" marT="45720" marB="45720" anchor="ctr">
                     <a:lnL w="9525" cap="flat" cmpd="sng" algn="ctr">
                       <a:solidFill>
-                        <a:srgbClr val="B9C6BC"/>
+                        <a:srgbClr val="E9B9C0"/>
                       </a:solidFill>
                       <a:prstDash val="solid"/>
                       <a:round/>
@@ -7057,7 +8096,7 @@
                     </a:lnL>
                     <a:lnR w="9525" cap="flat" cmpd="sng" algn="ctr">
                       <a:solidFill>
-                        <a:srgbClr val="B9C6BC"/>
+                        <a:srgbClr val="E9B9C0"/>
                       </a:solidFill>
                       <a:prstDash val="solid"/>
                       <a:round/>
@@ -7066,7 +8105,7 @@
                     </a:lnR>
                     <a:lnT w="9525" cap="flat" cmpd="sng" algn="ctr">
                       <a:solidFill>
-                        <a:srgbClr val="B9C6BC"/>
+                        <a:srgbClr val="E9B9C0"/>
                       </a:solidFill>
                       <a:prstDash val="solid"/>
                       <a:round/>
@@ -7075,7 +8114,7 @@
                     </a:lnT>
                     <a:lnB w="9525" cap="flat" cmpd="sng" algn="ctr">
                       <a:solidFill>
-                        <a:srgbClr val="B9C6BC"/>
+                        <a:srgbClr val="E9B9C0"/>
                       </a:solidFill>
                       <a:prstDash val="solid"/>
                       <a:round/>
@@ -7106,7 +8145,7 @@
                   <a:tcPr marL="91440" marR="91440" marT="45720" marB="45720" anchor="ctr">
                     <a:lnL w="9525" cap="flat" cmpd="sng" algn="ctr">
                       <a:solidFill>
-                        <a:srgbClr val="B9C6BC"/>
+                        <a:srgbClr val="E9B9C0"/>
                       </a:solidFill>
                       <a:prstDash val="solid"/>
                       <a:round/>
@@ -7115,7 +8154,7 @@
                     </a:lnL>
                     <a:lnR w="9525" cap="flat" cmpd="sng" algn="ctr">
                       <a:solidFill>
-                        <a:srgbClr val="B9C6BC"/>
+                        <a:srgbClr val="E9B9C0"/>
                       </a:solidFill>
                       <a:prstDash val="solid"/>
                       <a:round/>
@@ -7124,7 +8163,7 @@
                     </a:lnR>
                     <a:lnT w="9525" cap="flat" cmpd="sng" algn="ctr">
                       <a:solidFill>
-                        <a:srgbClr val="B9C6BC"/>
+                        <a:srgbClr val="E9B9C0"/>
                       </a:solidFill>
                       <a:prstDash val="solid"/>
                       <a:round/>
@@ -7133,7 +8172,7 @@
                     </a:lnT>
                     <a:lnB w="9525" cap="flat" cmpd="sng" algn="ctr">
                       <a:solidFill>
-                        <a:srgbClr val="B9C6BC"/>
+                        <a:srgbClr val="E9B9C0"/>
                       </a:solidFill>
                       <a:prstDash val="solid"/>
                       <a:round/>
@@ -7164,7 +8203,7 @@
                   <a:tcPr marL="91440" marR="91440" marT="45720" marB="45720" anchor="ctr">
                     <a:lnL w="9525" cap="flat" cmpd="sng" algn="ctr">
                       <a:solidFill>
-                        <a:srgbClr val="B9C6BC"/>
+                        <a:srgbClr val="E9B9C0"/>
                       </a:solidFill>
                       <a:prstDash val="solid"/>
                       <a:round/>
@@ -7173,7 +8212,7 @@
                     </a:lnL>
                     <a:lnR w="9525" cap="flat" cmpd="sng" algn="ctr">
                       <a:solidFill>
-                        <a:srgbClr val="B9C6BC"/>
+                        <a:srgbClr val="E9B9C0"/>
                       </a:solidFill>
                       <a:prstDash val="solid"/>
                       <a:round/>
@@ -7182,7 +8221,7 @@
                     </a:lnR>
                     <a:lnT w="9525" cap="flat" cmpd="sng" algn="ctr">
                       <a:solidFill>
-                        <a:srgbClr val="B9C6BC"/>
+                        <a:srgbClr val="E9B9C0"/>
                       </a:solidFill>
                       <a:prstDash val="solid"/>
                       <a:round/>
@@ -7191,7 +8230,7 @@
                     </a:lnT>
                     <a:lnB w="9525" cap="flat" cmpd="sng" algn="ctr">
                       <a:solidFill>
-                        <a:srgbClr val="B9C6BC"/>
+                        <a:srgbClr val="E9B9C0"/>
                       </a:solidFill>
                       <a:prstDash val="solid"/>
                       <a:round/>
@@ -7222,7 +8261,7 @@
                   <a:tcPr marL="91440" marR="91440" marT="45720" marB="45720" anchor="ctr">
                     <a:lnL w="9525" cap="flat" cmpd="sng" algn="ctr">
                       <a:solidFill>
-                        <a:srgbClr val="B9C6BC"/>
+                        <a:srgbClr val="E9B9C0"/>
                       </a:solidFill>
                       <a:prstDash val="solid"/>
                       <a:round/>
@@ -7231,7 +8270,7 @@
                     </a:lnL>
                     <a:lnR w="9525" cap="flat" cmpd="sng" algn="ctr">
                       <a:solidFill>
-                        <a:srgbClr val="B9C6BC"/>
+                        <a:srgbClr val="E9B9C0"/>
                       </a:solidFill>
                       <a:prstDash val="solid"/>
                       <a:round/>
@@ -7240,7 +8279,7 @@
                     </a:lnR>
                     <a:lnT w="9525" cap="flat" cmpd="sng" algn="ctr">
                       <a:solidFill>
-                        <a:srgbClr val="B9C6BC"/>
+                        <a:srgbClr val="E9B9C0"/>
                       </a:solidFill>
                       <a:prstDash val="solid"/>
                       <a:round/>
@@ -7249,7 +8288,7 @@
                     </a:lnT>
                     <a:lnB w="9525" cap="flat" cmpd="sng" algn="ctr">
                       <a:solidFill>
-                        <a:srgbClr val="B9C6BC"/>
+                        <a:srgbClr val="E9B9C0"/>
                       </a:solidFill>
                       <a:prstDash val="solid"/>
                       <a:round/>
@@ -7643,7 +8682,7 @@
             <a:pPr algn="r"/>
             <a:fld id="{F7021451-1387-4CA6-816F-3879F97B5CBC}" type="slidenum">
               <a:rPr b="0" lang="en-US"/>
-              <a:t>13</a:t>
+              <a:t>14</a:t>
             </a:fld>
             <a:endParaRPr lang="en-US"/>
           </a:p>
@@ -7657,9 +8696,9 @@
 </p:sld>
 </file>
 
-<file path=ppt/slides/slide14.xml><?xml version="1.0" encoding="utf-8"?>
+<file path=ppt/slides/slide15.xml><?xml version="1.0" encoding="utf-8"?>
 <p:sld xmlns:a="http://schemas.openxmlformats.org/drawingml/2006/main" xmlns:r="http://schemas.openxmlformats.org/officeDocument/2006/relationships" xmlns:p="http://schemas.openxmlformats.org/presentationml/2006/main">
-  <p:cSld name="Slide 14">
+  <p:cSld name="Slide 15">
     <p:spTree>
       <p:nvGrpSpPr>
         <p:cNvPr id="1" name=""/>
@@ -7684,31 +8723,31 @@
         </p:nvSpPr>
         <p:spPr>
           <a:xfrm>
-            <a:off x="548640" y="1417320"/>
-            <a:ext cx="8046720" cy="1188720"/>
-          </a:xfrm>
-          <a:prstGeom prst="rect">
-            <a:avLst/>
-          </a:prstGeom>
-          <a:noFill/>
-          <a:ln/>
-        </p:spPr>
-        <p:txBody>
-          <a:bodyPr wrap="square" rtlCol="0" anchor="ctr"/>
+            <a:off x="548640" y="1371600"/>
+            <a:ext cx="5120640" cy="1280160"/>
+          </a:xfrm>
+          <a:prstGeom prst="rect">
+            <a:avLst/>
+          </a:prstGeom>
+          <a:noFill/>
+          <a:ln/>
+        </p:spPr>
+        <p:txBody>
+          <a:bodyPr wrap="square" lIns="0" tIns="0" rIns="0" bIns="0" rtlCol="0" anchor="ctr"/>
           <a:lstStyle/>
           <a:p>
             <a:pPr indent="0" marL="0">
               <a:buNone/>
             </a:pPr>
             <a:r>
-              <a:rPr lang="en-US" sz="3400" b="1" dirty="0">
-                <a:solidFill>
-                  <a:schemeClr val="bg1"/>
+              <a:rPr lang="en-US" sz="3000" b="1" dirty="0">
+                <a:solidFill>
+                  <a:schemeClr val="tx2"/>
                 </a:solidFill>
               </a:rPr>
               <a:t>株式会社DreamCreation</a:t>
             </a:r>
-            <a:endParaRPr lang="en-US" sz="3400" dirty="0"/>
+            <a:endParaRPr lang="en-US" sz="3000" dirty="0"/>
           </a:p>
         </p:txBody>
       </p:sp>
@@ -7722,43 +8761,67 @@
         </p:nvSpPr>
         <p:spPr>
           <a:xfrm>
-            <a:off x="548640" y="2651760"/>
-            <a:ext cx="8046720" cy="822960"/>
-          </a:xfrm>
-          <a:prstGeom prst="rect">
-            <a:avLst/>
-          </a:prstGeom>
-          <a:noFill/>
-          <a:ln/>
-        </p:spPr>
-        <p:txBody>
-          <a:bodyPr wrap="square" rtlCol="0" anchor="t"/>
+            <a:off x="548640" y="2743200"/>
+            <a:ext cx="5120640" cy="822960"/>
+          </a:xfrm>
+          <a:prstGeom prst="rect">
+            <a:avLst/>
+          </a:prstGeom>
+          <a:noFill/>
+          <a:ln/>
+        </p:spPr>
+        <p:txBody>
+          <a:bodyPr wrap="square" lIns="0" tIns="0" rIns="0" bIns="0" rtlCol="0" anchor="t"/>
           <a:lstStyle/>
           <a:p>
             <a:pPr indent="0" marL="0">
               <a:buNone/>
             </a:pPr>
             <a:r>
-              <a:rPr lang="en-US" sz="1600" dirty="0">
-                <a:solidFill>
-                  <a:schemeClr val="accent5"/>
+              <a:rPr lang="en-US" sz="1500" dirty="0">
+                <a:solidFill>
+                  <a:schemeClr val="tx1"/>
                 </a:solidFill>
               </a:rPr>
               <a:t>こどもが夢中になる体験を、企画から当日の準備物まで一社でお届けします。</a:t>
             </a:r>
-            <a:endParaRPr lang="en-US" sz="1600" dirty="0"/>
-          </a:p>
-        </p:txBody>
-      </p:sp>
-      <p:sp>
-        <p:nvSpPr>
-          <p:cNvPr id="4" name="Text 2"/>
+            <a:endParaRPr lang="en-US" sz="1500" dirty="0"/>
+          </a:p>
+        </p:txBody>
+      </p:sp>
+      <p:pic>
+        <p:nvPicPr>
+          <p:cNvPr id="4" name="end_img" descr="肉球スクイーズ">    </p:cNvPr>
+          <p:cNvPicPr>
+            <a:picLocks noChangeAspect="1"/>
+          </p:cNvPicPr>
+          <p:nvPr/>
+        </p:nvPicPr>
+        <p:blipFill>
+          <a:blip r:embed="rId1"/>
+          <a:stretch>
+            <a:fillRect/>
+          </a:stretch>
+        </p:blipFill>
+        <p:spPr>
+          <a:xfrm>
+            <a:off x="5943600" y="914400"/>
+            <a:ext cx="2743200" cy="2743200"/>
+          </a:xfrm>
+          <a:prstGeom prst="ellipse">
+            <a:avLst/>
+          </a:prstGeom>
+        </p:spPr>
+      </p:pic>
+      <p:sp>
+        <p:nvSpPr>
+          <p:cNvPr id="5" name="Text 2"/>
           <p:cNvSpPr txBox="1"/>
           <p:nvPr/>
         </p:nvSpPr>
         <p:spPr>
           <a:xfrm>
-            <a:off x="548640" y="3657600"/>
+            <a:off x="548640" y="3749040"/>
             <a:ext cx="8046720" cy="731520"/>
           </a:xfrm>
           <a:prstGeom prst="rect">
@@ -7777,10 +8840,10 @@
             <a:r>
               <a:rPr lang="en-US" sz="1300" dirty="0">
                 <a:solidFill>
-                  <a:schemeClr val="bg1"/>
-                </a:solidFill>
-              </a:rPr>
-              <a:t>主な実績：大手家電量販店・大型商業施設・携帯キャリア店頭イベント（全国対応）</a:t>
+                  <a:schemeClr val="tx1"/>
+                </a:solidFill>
+              </a:rPr>
+              <a:t>主な実績：ドコモショップ・量販店ドコモブース・大型商業施設でのイベント（全国対応）</a:t>
             </a:r>
             <a:endParaRPr lang="en-US" sz="1300" dirty="0"/>
           </a:p>
@@ -7791,7 +8854,7 @@
             <a:r>
               <a:rPr lang="en-US" sz="1300" dirty="0">
                 <a:solidFill>
-                  <a:schemeClr val="bg1"/>
+                  <a:schemeClr val="tx1"/>
                 </a:solidFill>
               </a:rPr>
               <a:t>TEL 070-1319-2126　／　MAIL data@d-creation-o.com</a:t>
@@ -7947,7 +9010,7 @@
                       <a:tailEnd type="none" w="med" len="med"/>
                     </a:lnB>
                     <a:solidFill>
-                      <a:schemeClr val="accent2"/>
+                      <a:schemeClr val="accent1"/>
                     </a:solidFill>
                   </a:tcPr>
                 </a:tc>
@@ -8071,7 +9134,7 @@
                       <a:tailEnd type="none" w="med" len="med"/>
                     </a:lnB>
                     <a:solidFill>
-                      <a:schemeClr val="accent2"/>
+                      <a:schemeClr val="accent1"/>
                     </a:solidFill>
                   </a:tcPr>
                 </a:tc>
@@ -8195,7 +9258,7 @@
                       <a:tailEnd type="none" w="med" len="med"/>
                     </a:lnB>
                     <a:solidFill>
-                      <a:schemeClr val="accent2"/>
+                      <a:schemeClr val="accent1"/>
                     </a:solidFill>
                   </a:tcPr>
                 </a:tc>
@@ -8319,7 +9382,7 @@
                       <a:tailEnd type="none" w="med" len="med"/>
                     </a:lnB>
                     <a:solidFill>
-                      <a:schemeClr val="accent2"/>
+                      <a:schemeClr val="accent1"/>
                     </a:solidFill>
                   </a:tcPr>
                 </a:tc>
@@ -8443,7 +9506,7 @@
                       <a:tailEnd type="none" w="med" len="med"/>
                     </a:lnB>
                     <a:solidFill>
-                      <a:schemeClr val="accent2"/>
+                      <a:schemeClr val="accent1"/>
                     </a:solidFill>
                   </a:tcPr>
                 </a:tc>
@@ -8567,7 +9630,7 @@
                       <a:tailEnd type="none" w="med" len="med"/>
                     </a:lnB>
                     <a:solidFill>
-                      <a:schemeClr val="accent2"/>
+                      <a:schemeClr val="accent1"/>
                     </a:solidFill>
                   </a:tcPr>
                 </a:tc>
@@ -9432,7 +10495,7 @@
                   <a:schemeClr val="tx2"/>
                 </a:solidFill>
               </a:rPr>
-              <a:t>企画コンセプト</a:t>
+              <a:t>本企画の3つの目的</a:t>
             </a:r>
             <a:endParaRPr lang="en-US" sz="2400" dirty="0"/>
           </a:p>
@@ -9446,8 +10509,8 @@
         </p:nvSpPr>
         <p:spPr>
           <a:xfrm>
-            <a:off x="457200" y="1051560"/>
-            <a:ext cx="8229600" cy="1005840"/>
+            <a:off x="457200" y="1005840"/>
+            <a:ext cx="8229600" cy="411480"/>
           </a:xfrm>
           <a:prstGeom prst="rect">
             <a:avLst/>
@@ -9463,45 +10526,31 @@
               <a:buNone/>
             </a:pPr>
             <a:r>
-              <a:rPr lang="en-US" sz="2400" b="1" dirty="0">
+              <a:rPr lang="en-US" sz="1500" b="1" dirty="0">
                 <a:solidFill>
                   <a:schemeClr val="accent1"/>
                 </a:solidFill>
               </a:rPr>
-              <a:t>毎週ちがう“つくる体験”で、</a:t>
-            </a:r>
-            <a:endParaRPr lang="en-US" sz="2400" dirty="0"/>
-          </a:p>
-          <a:p>
-            <a:pPr indent="0" marL="0">
-              <a:buNone/>
-            </a:pPr>
-            <a:r>
-              <a:rPr lang="en-US" sz="2400" b="1" dirty="0">
-                <a:solidFill>
-                  <a:schemeClr val="accent1"/>
-                </a:solidFill>
-              </a:rPr>
-              <a:t>12月の来店を4回に。</a:t>
-            </a:r>
-            <a:endParaRPr lang="en-US" sz="2400" dirty="0"/>
-          </a:p>
-        </p:txBody>
-      </p:sp>
-      <p:sp>
-        <p:nvSpPr>
-          <p:cNvPr id="4" name="concept_1"/>
+              <a:t>無料のクリスマス体験で家族連れを惹きつけ、毎週の来店と商談機会を創出します。</a:t>
+            </a:r>
+            <a:endParaRPr lang="en-US" sz="1500" dirty="0"/>
+          </a:p>
+        </p:txBody>
+      </p:sp>
+      <p:sp>
+        <p:nvSpPr>
+          <p:cNvPr id="4" name="goal_1"/>
           <p:cNvSpPr/>
           <p:nvPr/>
         </p:nvSpPr>
         <p:spPr>
           <a:xfrm>
-            <a:off x="457200" y="2331720"/>
-            <a:ext cx="2606040" cy="2194560"/>
+            <a:off x="457200" y="1600200"/>
+            <a:ext cx="2606040" cy="2926080"/>
           </a:xfrm>
           <a:prstGeom prst="roundRect">
             <a:avLst>
-              <a:gd name="adj" fmla="val 3333"/>
+              <a:gd name="adj" fmla="val 2807"/>
             </a:avLst>
           </a:prstGeom>
           <a:solidFill>
@@ -9517,14 +10566,14 @@
       </p:sp>
       <p:sp>
         <p:nvSpPr>
-          <p:cNvPr id="5" name="concept_badge_1"/>
+          <p:cNvPr id="5" name="goal_badge_1"/>
           <p:cNvSpPr/>
           <p:nvPr/>
         </p:nvSpPr>
         <p:spPr>
           <a:xfrm>
-            <a:off x="640080" y="2487168"/>
-            <a:ext cx="457200" cy="457200"/>
+            <a:off x="640080" y="1783080"/>
+            <a:ext cx="548640" cy="548640"/>
           </a:xfrm>
           <a:prstGeom prst="ellipse">
             <a:avLst/>
@@ -9548,8 +10597,8 @@
         </p:nvSpPr>
         <p:spPr>
           <a:xfrm>
-            <a:off x="640080" y="2487168"/>
-            <a:ext cx="457200" cy="457200"/>
+            <a:off x="640080" y="1783080"/>
+            <a:ext cx="548640" cy="548640"/>
           </a:xfrm>
           <a:prstGeom prst="rect">
             <a:avLst/>
@@ -9584,8 +10633,8 @@
         </p:nvSpPr>
         <p:spPr>
           <a:xfrm>
-            <a:off x="1188720" y="2514600"/>
-            <a:ext cx="1783080" cy="411480"/>
+            <a:off x="1325880" y="1737360"/>
+            <a:ext cx="1645920" cy="685800"/>
           </a:xfrm>
           <a:prstGeom prst="rect">
             <a:avLst/>
@@ -9601,14 +10650,28 @@
               <a:buNone/>
             </a:pPr>
             <a:r>
-              <a:rPr lang="en-US" sz="1600" b="1" dirty="0">
+              <a:rPr lang="en-US" sz="1500" b="1" dirty="0">
                 <a:solidFill>
                   <a:schemeClr val="tx2"/>
                 </a:solidFill>
               </a:rPr>
-              <a:t>飽きさせない</a:t>
-            </a:r>
-            <a:endParaRPr lang="en-US" sz="1600" dirty="0"/>
+              <a:t>家族連れが</a:t>
+            </a:r>
+            <a:endParaRPr lang="en-US" sz="1500" dirty="0"/>
+          </a:p>
+          <a:p>
+            <a:pPr indent="0" marL="0">
+              <a:buNone/>
+            </a:pPr>
+            <a:r>
+              <a:rPr lang="en-US" sz="1500" b="1" dirty="0">
+                <a:solidFill>
+                  <a:schemeClr val="tx2"/>
+                </a:solidFill>
+              </a:rPr>
+              <a:t>自然に集まる</a:t>
+            </a:r>
+            <a:endParaRPr lang="en-US" sz="1500" dirty="0"/>
           </a:p>
         </p:txBody>
       </p:sp>
@@ -9620,8 +10683,8 @@
         </p:nvSpPr>
         <p:spPr>
           <a:xfrm>
-            <a:off x="640080" y="3063240"/>
-            <a:ext cx="2286000" cy="1371600"/>
+            <a:off x="640080" y="2606040"/>
+            <a:ext cx="2286000" cy="1737360"/>
           </a:xfrm>
           <a:prstGeom prst="rect">
             <a:avLst/>
@@ -9642,7 +10705,7 @@
                   <a:schemeClr val="tx1"/>
                 </a:solidFill>
               </a:rPr>
-              <a:t>スノードームとスクイーズを週替わりで実施。型・モチーフも毎週変えて「来週は何がつくれる？」をつくる。</a:t>
+              <a:t>クリスマスアーチ＋コスプレ＋B0ボードPOPで、通行中のファミリー層をブースへ誘導。</a:t>
             </a:r>
             <a:endParaRPr lang="en-US" sz="1300" dirty="0"/>
           </a:p>
@@ -9650,18 +10713,18 @@
       </p:sp>
       <p:sp>
         <p:nvSpPr>
-          <p:cNvPr id="9" name="concept_2"/>
+          <p:cNvPr id="9" name="goal_2"/>
           <p:cNvSpPr/>
           <p:nvPr/>
         </p:nvSpPr>
         <p:spPr>
           <a:xfrm>
-            <a:off x="3246120" y="2331720"/>
-            <a:ext cx="2606040" cy="2194560"/>
+            <a:off x="3246120" y="1600200"/>
+            <a:ext cx="2606040" cy="2926080"/>
           </a:xfrm>
           <a:prstGeom prst="roundRect">
             <a:avLst>
-              <a:gd name="adj" fmla="val 3333"/>
+              <a:gd name="adj" fmla="val 2807"/>
             </a:avLst>
           </a:prstGeom>
           <a:solidFill>
@@ -9677,14 +10740,14 @@
       </p:sp>
       <p:sp>
         <p:nvSpPr>
-          <p:cNvPr id="10" name="concept_badge_2"/>
+          <p:cNvPr id="10" name="goal_badge_2"/>
           <p:cNvSpPr/>
           <p:nvPr/>
         </p:nvSpPr>
         <p:spPr>
           <a:xfrm>
-            <a:off x="3429000" y="2487168"/>
-            <a:ext cx="457200" cy="457200"/>
+            <a:off x="3429000" y="1783080"/>
+            <a:ext cx="548640" cy="548640"/>
           </a:xfrm>
           <a:prstGeom prst="ellipse">
             <a:avLst/>
@@ -9708,8 +10771,8 @@
         </p:nvSpPr>
         <p:spPr>
           <a:xfrm>
-            <a:off x="3429000" y="2487168"/>
-            <a:ext cx="457200" cy="457200"/>
+            <a:off x="3429000" y="1783080"/>
+            <a:ext cx="548640" cy="548640"/>
           </a:xfrm>
           <a:prstGeom prst="rect">
             <a:avLst/>
@@ -9744,8 +10807,8 @@
         </p:nvSpPr>
         <p:spPr>
           <a:xfrm>
-            <a:off x="3977640" y="2514600"/>
-            <a:ext cx="1783080" cy="411480"/>
+            <a:off x="4114800" y="1737360"/>
+            <a:ext cx="1645920" cy="685800"/>
           </a:xfrm>
           <a:prstGeom prst="rect">
             <a:avLst/>
@@ -9761,14 +10824,28 @@
               <a:buNone/>
             </a:pPr>
             <a:r>
-              <a:rPr lang="en-US" sz="1600" b="1" dirty="0">
+              <a:rPr lang="en-US" sz="1500" b="1" dirty="0">
                 <a:solidFill>
                   <a:schemeClr val="tx2"/>
                 </a:solidFill>
               </a:rPr>
-              <a:t>足を止める</a:t>
-            </a:r>
-            <a:endParaRPr lang="en-US" sz="1600" dirty="0"/>
+              <a:t>毎週ちがう</a:t>
+            </a:r>
+            <a:endParaRPr lang="en-US" sz="1500" dirty="0"/>
+          </a:p>
+          <a:p>
+            <a:pPr indent="0" marL="0">
+              <a:buNone/>
+            </a:pPr>
+            <a:r>
+              <a:rPr lang="en-US" sz="1500" b="1" dirty="0">
+                <a:solidFill>
+                  <a:schemeClr val="tx2"/>
+                </a:solidFill>
+              </a:rPr>
+              <a:t>作品で再来店</a:t>
+            </a:r>
+            <a:endParaRPr lang="en-US" sz="1500" dirty="0"/>
           </a:p>
         </p:txBody>
       </p:sp>
@@ -9780,8 +10857,8 @@
         </p:nvSpPr>
         <p:spPr>
           <a:xfrm>
-            <a:off x="3429000" y="3063240"/>
-            <a:ext cx="2286000" cy="1371600"/>
+            <a:off x="3429000" y="2606040"/>
+            <a:ext cx="2286000" cy="1737360"/>
           </a:xfrm>
           <a:prstGeom prst="rect">
             <a:avLst/>
@@ -9802,7 +10879,7 @@
                   <a:schemeClr val="tx1"/>
                 </a:solidFill>
               </a:rPr>
-              <a:t>クリスマスアーチ＋スタッフのコスプレ（全週・週替わり）で、通行客に開催中がひと目で伝わる。</a:t>
+              <a:t>スノードームとスクイーズを週替わりで。型・モチーフも変え、4週連続の来店動機に。</a:t>
             </a:r>
             <a:endParaRPr lang="en-US" sz="1300" dirty="0"/>
           </a:p>
@@ -9810,18 +10887,18 @@
       </p:sp>
       <p:sp>
         <p:nvSpPr>
-          <p:cNvPr id="14" name="concept_3"/>
+          <p:cNvPr id="14" name="goal_3"/>
           <p:cNvSpPr/>
           <p:nvPr/>
         </p:nvSpPr>
         <p:spPr>
           <a:xfrm>
-            <a:off x="6035040" y="2331720"/>
-            <a:ext cx="2606040" cy="2194560"/>
+            <a:off x="6035040" y="1600200"/>
+            <a:ext cx="2606040" cy="2926080"/>
           </a:xfrm>
           <a:prstGeom prst="roundRect">
             <a:avLst>
-              <a:gd name="adj" fmla="val 3333"/>
+              <a:gd name="adj" fmla="val 2807"/>
             </a:avLst>
           </a:prstGeom>
           <a:solidFill>
@@ -9837,14 +10914,14 @@
       </p:sp>
       <p:sp>
         <p:nvSpPr>
-          <p:cNvPr id="15" name="concept_badge_3"/>
+          <p:cNvPr id="15" name="goal_badge_3"/>
           <p:cNvSpPr/>
           <p:nvPr/>
         </p:nvSpPr>
         <p:spPr>
           <a:xfrm>
-            <a:off x="6217920" y="2487168"/>
-            <a:ext cx="457200" cy="457200"/>
+            <a:off x="6217920" y="1783080"/>
+            <a:ext cx="548640" cy="548640"/>
           </a:xfrm>
           <a:prstGeom prst="ellipse">
             <a:avLst/>
@@ -9868,8 +10945,8 @@
         </p:nvSpPr>
         <p:spPr>
           <a:xfrm>
-            <a:off x="6217920" y="2487168"/>
-            <a:ext cx="457200" cy="457200"/>
+            <a:off x="6217920" y="1783080"/>
+            <a:ext cx="548640" cy="548640"/>
           </a:xfrm>
           <a:prstGeom prst="rect">
             <a:avLst/>
@@ -9904,8 +10981,8 @@
         </p:nvSpPr>
         <p:spPr>
           <a:xfrm>
-            <a:off x="6766560" y="2514600"/>
-            <a:ext cx="1783080" cy="411480"/>
+            <a:off x="6903720" y="1737360"/>
+            <a:ext cx="1645920" cy="685800"/>
           </a:xfrm>
           <a:prstGeom prst="rect">
             <a:avLst/>
@@ -9921,14 +10998,28 @@
               <a:buNone/>
             </a:pPr>
             <a:r>
-              <a:rPr lang="en-US" sz="1600" b="1" dirty="0">
+              <a:rPr lang="en-US" sz="1500" b="1" dirty="0">
                 <a:solidFill>
                   <a:schemeClr val="tx2"/>
                 </a:solidFill>
               </a:rPr>
-              <a:t>着座につなげる</a:t>
-            </a:r>
-            <a:endParaRPr lang="en-US" sz="1600" dirty="0"/>
+              <a:t>親子分離で</a:t>
+            </a:r>
+            <a:endParaRPr lang="en-US" sz="1500" dirty="0"/>
+          </a:p>
+          <a:p>
+            <a:pPr indent="0" marL="0">
+              <a:buNone/>
+            </a:pPr>
+            <a:r>
+              <a:rPr lang="en-US" sz="1500" b="1" dirty="0">
+                <a:solidFill>
+                  <a:schemeClr val="tx2"/>
+                </a:solidFill>
+              </a:rPr>
+              <a:t>商談機会を創出</a:t>
+            </a:r>
+            <a:endParaRPr lang="en-US" sz="1500" dirty="0"/>
           </a:p>
         </p:txBody>
       </p:sp>
@@ -9940,8 +11031,8 @@
         </p:nvSpPr>
         <p:spPr>
           <a:xfrm>
-            <a:off x="6217920" y="3063240"/>
-            <a:ext cx="2286000" cy="1371600"/>
+            <a:off x="6217920" y="2606040"/>
+            <a:ext cx="2286000" cy="1737360"/>
           </a:xfrm>
           <a:prstGeom prst="rect">
             <a:avLst/>
@@ -9962,7 +11053,7 @@
                   <a:schemeClr val="tx1"/>
                 </a:solidFill>
               </a:rPr>
-              <a:t>制作時間（約15〜20分）が保護者様との会話・商談時間になる。</a:t>
+              <a:t>お子様は約20分の制作に集中。その間に保護者様をカウンターへご案内できます。</a:t>
             </a:r>
             <a:endParaRPr lang="en-US" sz="1300" dirty="0"/>
           </a:p>
@@ -10688,7 +11779,7 @@
                   <a:schemeClr val="tx2"/>
                 </a:solidFill>
               </a:rPr>
-              <a:t>B0ポスター 10枚</a:t>
+              <a:t>B0ボードPOP</a:t>
             </a:r>
             <a:endParaRPr lang="en-US" sz="1500" dirty="0"/>
           </a:p>
@@ -10724,7 +11815,7 @@
                   <a:schemeClr val="tx1"/>
                 </a:solidFill>
               </a:rPr>
-              <a:t>4週の内容がひと目でわかるデザイン</a:t>
+              <a:t>10枚。4週の内容がひと目でわかるデザイン</a:t>
             </a:r>
             <a:endParaRPr lang="en-US" sz="1200" dirty="0"/>
           </a:p>
@@ -11608,7 +12699,7 @@
                   <a:schemeClr val="tx2"/>
                 </a:solidFill>
               </a:rPr>
-              <a:t>目玉②　スクイーズ作り</a:t>
+              <a:t>目玉②　スクイーズ作り（ぷにラボ）</a:t>
             </a:r>
             <a:endParaRPr lang="en-US" sz="2400" dirty="0"/>
           </a:p>
@@ -11616,7 +12707,7 @@
       </p:sp>
       <p:pic>
         <p:nvPicPr>
-          <p:cNvPr id="3" name="img_squeeze" descr="スクイーズ作品">    </p:cNvPr>
+          <p:cNvPr id="3" name="img_squeeze_event" descr="ドコモ店頭でのスクイーズ作成体験ブース">    </p:cNvPr>
           <p:cNvPicPr>
             <a:picLocks noChangeAspect="1"/>
           </p:cNvPicPr>
@@ -11630,17 +12721,17 @@
         </p:blipFill>
         <p:spPr>
           <a:xfrm>
-            <a:off x="457200" y="1051560"/>
-            <a:ext cx="1828800" cy="1828800"/>
-          </a:xfrm>
-          <a:prstGeom prst="ellipse">
+            <a:off x="457200" y="1005840"/>
+            <a:ext cx="2057400" cy="2743200"/>
+          </a:xfrm>
+          <a:prstGeom prst="rect">
             <a:avLst/>
           </a:prstGeom>
         </p:spPr>
       </p:pic>
       <p:pic>
         <p:nvPicPr>
-          <p:cNvPr id="4" name="img_punilab" descr="ぷにラボの動物型スクイーズ">    </p:cNvPr>
+          <p:cNvPr id="4" name="img_punilab_paw" descr="肉球スクイーズの完成品">    </p:cNvPr>
           <p:cNvPicPr>
             <a:picLocks noChangeAspect="1"/>
           </p:cNvPicPr>
@@ -11654,10 +12745,10 @@
         </p:blipFill>
         <p:spPr>
           <a:xfrm>
-            <a:off x="1463040" y="2514600"/>
-            <a:ext cx="1828800" cy="1828800"/>
-          </a:xfrm>
-          <a:prstGeom prst="ellipse">
+            <a:off x="2651760" y="1005840"/>
+            <a:ext cx="2743200" cy="2743200"/>
+          </a:xfrm>
+          <a:prstGeom prst="rect">
             <a:avLst/>
           </a:prstGeom>
         </p:spPr>
@@ -11670,8 +12761,8 @@
         </p:nvSpPr>
         <p:spPr>
           <a:xfrm>
-            <a:off x="3749040" y="1097280"/>
-            <a:ext cx="1463040" cy="731520"/>
+            <a:off x="457200" y="3794760"/>
+            <a:ext cx="2057400" cy="457200"/>
           </a:xfrm>
           <a:prstGeom prst="rect">
             <a:avLst/>
@@ -11687,14 +12778,28 @@
               <a:buNone/>
             </a:pPr>
             <a:r>
-              <a:rPr lang="en-US" sz="1400" b="1" dirty="0">
-                <a:solidFill>
-                  <a:schemeClr val="accent1"/>
-                </a:solidFill>
-              </a:rPr>
-              <a:t>内容</a:t>
-            </a:r>
-            <a:endParaRPr lang="en-US" sz="1400" dirty="0"/>
+              <a:rPr lang="en-US" sz="1000" dirty="0">
+                <a:solidFill>
+                  <a:schemeClr val="accent4"/>
+                </a:solidFill>
+              </a:rPr>
+              <a:t>ドコモ店頭での実施風景</a:t>
+            </a:r>
+            <a:endParaRPr lang="en-US" sz="1000" dirty="0"/>
+          </a:p>
+          <a:p>
+            <a:pPr indent="0" marL="0">
+              <a:buNone/>
+            </a:pPr>
+            <a:r>
+              <a:rPr lang="en-US" sz="1000" dirty="0">
+                <a:solidFill>
+                  <a:schemeClr val="accent4"/>
+                </a:solidFill>
+              </a:rPr>
+              <a:t>（ヨドバシ梅田）</a:t>
+            </a:r>
+            <a:endParaRPr lang="en-US" sz="1000" dirty="0"/>
           </a:p>
         </p:txBody>
       </p:sp>
@@ -11706,8 +12811,8 @@
         </p:nvSpPr>
         <p:spPr>
           <a:xfrm>
-            <a:off x="5212080" y="1097280"/>
-            <a:ext cx="3474720" cy="731520"/>
+            <a:off x="2651760" y="3794760"/>
+            <a:ext cx="2743200" cy="274320"/>
           </a:xfrm>
           <a:prstGeom prst="rect">
             <a:avLst/>
@@ -11723,14 +12828,14 @@
               <a:buNone/>
             </a:pPr>
             <a:r>
-              <a:rPr lang="en-US" sz="1400" dirty="0">
-                <a:solidFill>
-                  <a:schemeClr val="tx1"/>
-                </a:solidFill>
-              </a:rPr>
-              <a:t>型とカラーを選び、型から剥がしてマジックパウダーで仕上げる人気コンテンツ「ぷにラボ」をクリスマス仕様に</a:t>
-            </a:r>
-            <a:endParaRPr lang="en-US" sz="1400" dirty="0"/>
+              <a:rPr lang="en-US" sz="1000" dirty="0">
+                <a:solidFill>
+                  <a:schemeClr val="accent4"/>
+                </a:solidFill>
+              </a:rPr>
+              <a:t>完成品（肉球スクイーズ）</a:t>
+            </a:r>
+            <a:endParaRPr lang="en-US" sz="1000" dirty="0"/>
           </a:p>
         </p:txBody>
       </p:sp>
@@ -11742,8 +12847,8 @@
         </p:nvSpPr>
         <p:spPr>
           <a:xfrm>
-            <a:off x="3749040" y="1965960"/>
-            <a:ext cx="1463040" cy="731520"/>
+            <a:off x="5623560" y="1005840"/>
+            <a:ext cx="3063240" cy="274320"/>
           </a:xfrm>
           <a:prstGeom prst="rect">
             <a:avLst/>
@@ -11759,14 +12864,14 @@
               <a:buNone/>
             </a:pPr>
             <a:r>
-              <a:rPr lang="en-US" sz="1400" b="1" dirty="0">
+              <a:rPr lang="en-US" sz="1300" b="1" dirty="0">
                 <a:solidFill>
                   <a:schemeClr val="accent1"/>
                 </a:solidFill>
               </a:rPr>
-              <a:t>クリスマス仕様</a:t>
-            </a:r>
-            <a:endParaRPr lang="en-US" sz="1400" dirty="0"/>
+              <a:t>内容</a:t>
+            </a:r>
+            <a:endParaRPr lang="en-US" sz="1300" dirty="0"/>
           </a:p>
         </p:txBody>
       </p:sp>
@@ -11778,8 +12883,8 @@
         </p:nvSpPr>
         <p:spPr>
           <a:xfrm>
-            <a:off x="5212080" y="1965960"/>
-            <a:ext cx="3474720" cy="731520"/>
+            <a:off x="5623560" y="1280160"/>
+            <a:ext cx="3063240" cy="566928"/>
           </a:xfrm>
           <a:prstGeom prst="rect">
             <a:avLst/>
@@ -11795,14 +12900,14 @@
               <a:buNone/>
             </a:pPr>
             <a:r>
-              <a:rPr lang="en-US" sz="1400" dirty="0">
+              <a:rPr lang="en-US" sz="1200" dirty="0">
                 <a:solidFill>
                   <a:schemeClr val="tx1"/>
                 </a:solidFill>
               </a:rPr>
-              <a:t>ツリー・ブーツ・雪だるま・プレゼント型／赤・緑・白カラー</a:t>
-            </a:r>
-            <a:endParaRPr lang="en-US" sz="1400" dirty="0"/>
+              <a:t>型とカラーを選び、液を混ぜて型に流し込む。型のまま持ち帰り、おうちで完成</a:t>
+            </a:r>
+            <a:endParaRPr lang="en-US" sz="1200" dirty="0"/>
           </a:p>
         </p:txBody>
       </p:sp>
@@ -11814,8 +12919,8 @@
         </p:nvSpPr>
         <p:spPr>
           <a:xfrm>
-            <a:off x="3749040" y="2834640"/>
-            <a:ext cx="1463040" cy="731520"/>
+            <a:off x="5623560" y="1874520"/>
+            <a:ext cx="3063240" cy="274320"/>
           </a:xfrm>
           <a:prstGeom prst="rect">
             <a:avLst/>
@@ -11831,14 +12936,14 @@
               <a:buNone/>
             </a:pPr>
             <a:r>
-              <a:rPr lang="en-US" sz="1400" b="1" dirty="0">
+              <a:rPr lang="en-US" sz="1300" b="1" dirty="0">
                 <a:solidFill>
                   <a:schemeClr val="accent1"/>
                 </a:solidFill>
               </a:rPr>
-              <a:t>所要時間</a:t>
-            </a:r>
-            <a:endParaRPr lang="en-US" sz="1400" dirty="0"/>
+              <a:t>クリスマス仕様</a:t>
+            </a:r>
+            <a:endParaRPr lang="en-US" sz="1300" dirty="0"/>
           </a:p>
         </p:txBody>
       </p:sp>
@@ -11850,8 +12955,8 @@
         </p:nvSpPr>
         <p:spPr>
           <a:xfrm>
-            <a:off x="5212080" y="2834640"/>
-            <a:ext cx="3474720" cy="731520"/>
+            <a:off x="5623560" y="2148840"/>
+            <a:ext cx="3063240" cy="566928"/>
           </a:xfrm>
           <a:prstGeom prst="rect">
             <a:avLst/>
@@ -11867,14 +12972,14 @@
               <a:buNone/>
             </a:pPr>
             <a:r>
-              <a:rPr lang="en-US" sz="1400" dirty="0">
+              <a:rPr lang="en-US" sz="1200" dirty="0">
                 <a:solidFill>
                   <a:schemeClr val="tx1"/>
                 </a:solidFill>
               </a:rPr>
-              <a:t>約20分／人</a:t>
-            </a:r>
-            <a:endParaRPr lang="en-US" sz="1400" dirty="0"/>
+              <a:t>ツリー・ブーツ・雪だるま・プレゼント型／赤・緑・白</a:t>
+            </a:r>
+            <a:endParaRPr lang="en-US" sz="1200" dirty="0"/>
           </a:p>
         </p:txBody>
       </p:sp>
@@ -11886,8 +12991,8 @@
         </p:nvSpPr>
         <p:spPr>
           <a:xfrm>
-            <a:off x="3749040" y="3703320"/>
-            <a:ext cx="1463040" cy="731520"/>
+            <a:off x="5623560" y="2743200"/>
+            <a:ext cx="3063240" cy="274320"/>
           </a:xfrm>
           <a:prstGeom prst="rect">
             <a:avLst/>
@@ -11903,14 +13008,14 @@
               <a:buNone/>
             </a:pPr>
             <a:r>
-              <a:rPr lang="en-US" sz="1400" b="1" dirty="0">
+              <a:rPr lang="en-US" sz="1300" b="1" dirty="0">
                 <a:solidFill>
                   <a:schemeClr val="accent1"/>
                 </a:solidFill>
               </a:rPr>
-              <a:t>実績</a:t>
-            </a:r>
-            <a:endParaRPr lang="en-US" sz="1400" dirty="0"/>
+              <a:t>所要時間</a:t>
+            </a:r>
+            <a:endParaRPr lang="en-US" sz="1300" dirty="0"/>
           </a:p>
         </p:txBody>
       </p:sp>
@@ -11922,8 +13027,8 @@
         </p:nvSpPr>
         <p:spPr>
           <a:xfrm>
-            <a:off x="5212080" y="3703320"/>
-            <a:ext cx="3474720" cy="731520"/>
+            <a:off x="5623560" y="3017520"/>
+            <a:ext cx="3063240" cy="566928"/>
           </a:xfrm>
           <a:prstGeom prst="rect">
             <a:avLst/>
@@ -11939,14 +13044,86 @@
               <a:buNone/>
             </a:pPr>
             <a:r>
-              <a:rPr lang="en-US" sz="1400" dirty="0">
+              <a:rPr lang="en-US" sz="1200" dirty="0">
                 <a:solidFill>
                   <a:schemeClr val="tx1"/>
                 </a:solidFill>
               </a:rPr>
-              <a:t>ドコモショップ店頭で実施実績あり</a:t>
-            </a:r>
-            <a:endParaRPr lang="en-US" sz="1400" dirty="0"/>
+              <a:t>会場作業 約20分（＋自宅仕上げ）</a:t>
+            </a:r>
+            <a:endParaRPr lang="en-US" sz="1200" dirty="0"/>
+          </a:p>
+        </p:txBody>
+      </p:sp>
+      <p:sp>
+        <p:nvSpPr>
+          <p:cNvPr id="13" name="Text 9"/>
+          <p:cNvSpPr txBox="1"/>
+          <p:nvPr/>
+        </p:nvSpPr>
+        <p:spPr>
+          <a:xfrm>
+            <a:off x="5623560" y="3611880"/>
+            <a:ext cx="3063240" cy="274320"/>
+          </a:xfrm>
+          <a:prstGeom prst="rect">
+            <a:avLst/>
+          </a:prstGeom>
+          <a:noFill/>
+          <a:ln/>
+        </p:spPr>
+        <p:txBody>
+          <a:bodyPr wrap="square" lIns="635" tIns="635" rIns="635" bIns="635" rtlCol="0" anchor="t"/>
+          <a:lstStyle/>
+          <a:p>
+            <a:pPr indent="0" marL="0">
+              <a:buNone/>
+            </a:pPr>
+            <a:r>
+              <a:rPr lang="en-US" sz="1300" b="1" dirty="0">
+                <a:solidFill>
+                  <a:schemeClr val="accent1"/>
+                </a:solidFill>
+              </a:rPr>
+              <a:t>実績</a:t>
+            </a:r>
+            <a:endParaRPr lang="en-US" sz="1300" dirty="0"/>
+          </a:p>
+        </p:txBody>
+      </p:sp>
+      <p:sp>
+        <p:nvSpPr>
+          <p:cNvPr id="14" name="Text 10"/>
+          <p:cNvSpPr txBox="1"/>
+          <p:nvPr/>
+        </p:nvSpPr>
+        <p:spPr>
+          <a:xfrm>
+            <a:off x="5623560" y="3886200"/>
+            <a:ext cx="3063240" cy="566928"/>
+          </a:xfrm>
+          <a:prstGeom prst="rect">
+            <a:avLst/>
+          </a:prstGeom>
+          <a:noFill/>
+          <a:ln/>
+        </p:spPr>
+        <p:txBody>
+          <a:bodyPr wrap="square" lIns="635" tIns="635" rIns="635" bIns="635" rtlCol="0" anchor="t"/>
+          <a:lstStyle/>
+          <a:p>
+            <a:pPr indent="0" marL="0">
+              <a:buNone/>
+            </a:pPr>
+            <a:r>
+              <a:rPr lang="en-US" sz="1200" dirty="0">
+                <a:solidFill>
+                  <a:schemeClr val="tx1"/>
+                </a:solidFill>
+              </a:rPr>
+              <a:t>ドコモショップ・量販店のドコモブースで実施済み</a:t>
+            </a:r>
+            <a:endParaRPr lang="en-US" sz="1200" dirty="0"/>
           </a:p>
         </p:txBody>
       </p:sp>
@@ -12285,11 +13462,11 @@
             </a:avLst>
           </a:prstGeom>
           <a:solidFill>
-            <a:schemeClr val="accent2"/>
+            <a:schemeClr val="tx2"/>
           </a:solidFill>
           <a:ln w="12700">
             <a:solidFill>
-              <a:schemeClr val="accent2"/>
+              <a:schemeClr val="tx2"/>
             </a:solidFill>
             <a:prstDash val="solid"/>
           </a:ln>
@@ -12495,11 +13672,11 @@
             </a:avLst>
           </a:prstGeom>
           <a:solidFill>
-            <a:schemeClr val="accent2"/>
+            <a:schemeClr val="tx2"/>
           </a:solidFill>
           <a:ln w="12700">
             <a:solidFill>
-              <a:schemeClr val="accent2"/>
+              <a:schemeClr val="tx2"/>
             </a:solidFill>
             <a:prstDash val="solid"/>
           </a:ln>
@@ -13036,85 +14213,27 @@
                   <a:schemeClr val="tx2"/>
                 </a:solidFill>
               </a:rPr>
-              <a:t>クリスマスアーチ（開催中ツールの主役）</a:t>
+              <a:t>親子分離の運用設計</a:t>
             </a:r>
             <a:endParaRPr lang="en-US" sz="2400" dirty="0"/>
           </a:p>
         </p:txBody>
       </p:sp>
-      <p:pic>
-        <p:nvPicPr>
-          <p:cNvPr id="3" name="img_arch" descr="サンタとスノーマン付きのエアーアーチ参考写真">    </p:cNvPr>
-          <p:cNvPicPr>
-            <a:picLocks noChangeAspect="1"/>
-          </p:cNvPicPr>
-          <p:nvPr/>
-        </p:nvPicPr>
-        <p:blipFill>
-          <a:blip r:embed="rId1"/>
-          <a:stretch>
-            <a:fillRect/>
-          </a:stretch>
-        </p:blipFill>
-        <p:spPr>
-          <a:xfrm>
-            <a:off x="457200" y="1051560"/>
-            <a:ext cx="3291840" cy="3273552"/>
-          </a:xfrm>
-          <a:prstGeom prst="rect">
-            <a:avLst/>
-          </a:prstGeom>
-        </p:spPr>
-      </p:pic>
-      <p:sp>
-        <p:nvSpPr>
-          <p:cNvPr id="4" name="Text 1"/>
-          <p:cNvSpPr txBox="1"/>
-          <p:nvPr/>
-        </p:nvSpPr>
-        <p:spPr>
-          <a:xfrm>
-            <a:off x="457200" y="4370832"/>
-            <a:ext cx="3291840" cy="274320"/>
-          </a:xfrm>
-          <a:prstGeom prst="rect">
-            <a:avLst/>
-          </a:prstGeom>
-          <a:noFill/>
-          <a:ln/>
-        </p:spPr>
-        <p:txBody>
-          <a:bodyPr wrap="square" lIns="635" tIns="635" rIns="635" bIns="635" rtlCol="0" anchor="t"/>
-          <a:lstStyle/>
-          <a:p>
-            <a:pPr indent="0" marL="0">
-              <a:buNone/>
-            </a:pPr>
-            <a:r>
-              <a:rPr lang="en-US" sz="1000" dirty="0">
-                <a:solidFill>
-                  <a:schemeClr val="accent4"/>
-                </a:solidFill>
-              </a:rPr>
-              <a:t>参考イメージ</a:t>
-            </a:r>
-            <a:endParaRPr lang="en-US" sz="1000" dirty="0"/>
-          </a:p>
-        </p:txBody>
-      </p:sp>
-      <p:sp>
-        <p:nvSpPr>
-          <p:cNvPr id="5" name="arch_badge_0"/>
+      <p:sp>
+        <p:nvSpPr>
+          <p:cNvPr id="3" name="pc_head_0"/>
           <p:cNvSpPr/>
           <p:nvPr/>
         </p:nvSpPr>
         <p:spPr>
           <a:xfrm>
-            <a:off x="4114800" y="1097280"/>
-            <a:ext cx="411480" cy="411480"/>
-          </a:xfrm>
-          <a:prstGeom prst="ellipse">
-            <a:avLst/>
+            <a:off x="457200" y="1005840"/>
+            <a:ext cx="4023360" cy="548640"/>
+          </a:xfrm>
+          <a:prstGeom prst="roundRect">
+            <a:avLst>
+              <a:gd name="adj" fmla="val 13333"/>
+            </a:avLst>
           </a:prstGeom>
           <a:solidFill>
             <a:schemeClr val="accent1"/>
@@ -13129,14 +14248,14 @@
       </p:sp>
       <p:sp>
         <p:nvSpPr>
-          <p:cNvPr id="6" name="Text 3"/>
+          <p:cNvPr id="4" name="Text 2"/>
           <p:cNvSpPr txBox="1"/>
           <p:nvPr/>
         </p:nvSpPr>
         <p:spPr>
           <a:xfrm>
-            <a:off x="4114800" y="1097280"/>
-            <a:ext cx="411480" cy="411480"/>
+            <a:off x="457200" y="1005840"/>
+            <a:ext cx="4023360" cy="548640"/>
           </a:xfrm>
           <a:prstGeom prst="rect">
             <a:avLst/>
@@ -13152,99 +14271,54 @@
               <a:buNone/>
             </a:pPr>
             <a:r>
-              <a:rPr lang="en-US" sz="1300" b="1" dirty="0">
+              <a:rPr lang="en-US" sz="1600" b="1" dirty="0">
                 <a:solidFill>
                   <a:schemeClr val="bg1"/>
                 </a:solidFill>
               </a:rPr>
-              <a:t>1</a:t>
-            </a:r>
-            <a:endParaRPr lang="en-US" sz="1300" dirty="0"/>
-          </a:p>
-        </p:txBody>
-      </p:sp>
-      <p:sp>
-        <p:nvSpPr>
-          <p:cNvPr id="7" name="Text 4"/>
-          <p:cNvSpPr txBox="1"/>
-          <p:nvPr/>
-        </p:nvSpPr>
-        <p:spPr>
-          <a:xfrm>
-            <a:off x="4663440" y="1078992"/>
-            <a:ext cx="4023360" cy="365760"/>
-          </a:xfrm>
-          <a:prstGeom prst="rect">
-            <a:avLst/>
-          </a:prstGeom>
-          <a:noFill/>
-          <a:ln/>
-        </p:spPr>
-        <p:txBody>
-          <a:bodyPr wrap="square" lIns="635" tIns="635" rIns="635" bIns="635" rtlCol="0" anchor="t"/>
-          <a:lstStyle/>
-          <a:p>
-            <a:pPr indent="0" marL="0">
-              <a:buNone/>
-            </a:pPr>
-            <a:r>
-              <a:rPr lang="en-US" sz="1500" b="1" dirty="0">
-                <a:solidFill>
-                  <a:schemeClr val="tx2"/>
-                </a:solidFill>
-              </a:rPr>
-              <a:t>遠くからでも目立つ</a:t>
-            </a:r>
-            <a:endParaRPr lang="en-US" sz="1500" dirty="0"/>
-          </a:p>
-        </p:txBody>
-      </p:sp>
-      <p:sp>
-        <p:nvSpPr>
-          <p:cNvPr id="8" name="Text 5"/>
-          <p:cNvSpPr txBox="1"/>
-          <p:nvPr/>
-        </p:nvSpPr>
-        <p:spPr>
-          <a:xfrm>
-            <a:off x="4663440" y="1463040"/>
-            <a:ext cx="4023360" cy="640080"/>
-          </a:xfrm>
-          <a:prstGeom prst="rect">
-            <a:avLst/>
-          </a:prstGeom>
-          <a:noFill/>
-          <a:ln/>
-        </p:spPr>
-        <p:txBody>
-          <a:bodyPr wrap="square" lIns="635" tIns="635" rIns="635" bIns="635" rtlCol="0" anchor="t"/>
-          <a:lstStyle/>
-          <a:p>
-            <a:pPr indent="0" marL="0">
-              <a:buNone/>
-            </a:pPr>
-            <a:r>
-              <a:rPr lang="en-US" sz="1300" dirty="0">
-                <a:solidFill>
-                  <a:schemeClr val="tx1"/>
-                </a:solidFill>
-              </a:rPr>
-              <a:t>サンタ＆スノーマン付きのエアーアーチを入口に設置。ワークショップ開催中がひと目で伝わる。</a:t>
-            </a:r>
-            <a:endParaRPr lang="en-US" sz="1300" dirty="0"/>
-          </a:p>
-        </p:txBody>
-      </p:sp>
-      <p:sp>
-        <p:nvSpPr>
-          <p:cNvPr id="9" name="arch_badge_1"/>
+              <a:t>お子様　約20分</a:t>
+            </a:r>
+            <a:endParaRPr lang="en-US" sz="1600" dirty="0"/>
+          </a:p>
+        </p:txBody>
+      </p:sp>
+      <p:sp>
+        <p:nvSpPr>
+          <p:cNvPr id="5" name="pc_0_0"/>
           <p:cNvSpPr/>
           <p:nvPr/>
         </p:nvSpPr>
         <p:spPr>
           <a:xfrm>
-            <a:off x="4114800" y="2194560"/>
-            <a:ext cx="411480" cy="411480"/>
+            <a:off x="457200" y="1691640"/>
+            <a:ext cx="4023360" cy="530352"/>
+          </a:xfrm>
+          <a:prstGeom prst="roundRect">
+            <a:avLst>
+              <a:gd name="adj" fmla="val 13793"/>
+            </a:avLst>
+          </a:prstGeom>
+          <a:solidFill>
+            <a:schemeClr val="bg2"/>
+          </a:solidFill>
+          <a:ln w="12700">
+            <a:solidFill>
+              <a:schemeClr val="bg2"/>
+            </a:solidFill>
+            <a:prstDash val="solid"/>
+          </a:ln>
+        </p:spPr>
+      </p:sp>
+      <p:sp>
+        <p:nvSpPr>
+          <p:cNvPr id="6" name="pc_b_0_0"/>
+          <p:cNvSpPr/>
+          <p:nvPr/>
+        </p:nvSpPr>
+        <p:spPr>
+          <a:xfrm>
+            <a:off x="566928" y="1773936"/>
+            <a:ext cx="365760" cy="365760"/>
           </a:xfrm>
           <a:prstGeom prst="ellipse">
             <a:avLst/>
@@ -13262,14 +14336,14 @@
       </p:sp>
       <p:sp>
         <p:nvSpPr>
-          <p:cNvPr id="10" name="Text 7"/>
+          <p:cNvPr id="7" name="Text 5"/>
           <p:cNvSpPr txBox="1"/>
           <p:nvPr/>
         </p:nvSpPr>
         <p:spPr>
           <a:xfrm>
-            <a:off x="4114800" y="2194560"/>
-            <a:ext cx="411480" cy="411480"/>
+            <a:off x="566928" y="1773936"/>
+            <a:ext cx="365760" cy="365760"/>
           </a:xfrm>
           <a:prstGeom prst="rect">
             <a:avLst/>
@@ -13290,7 +14364,7 @@
                   <a:schemeClr val="bg1"/>
                 </a:solidFill>
               </a:rPr>
-              <a:t>2</a:t>
+              <a:t>1</a:t>
             </a:r>
             <a:endParaRPr lang="en-US" sz="1300" dirty="0"/>
           </a:p>
@@ -13298,71 +14372,35 @@
       </p:sp>
       <p:sp>
         <p:nvSpPr>
-          <p:cNvPr id="11" name="Text 8"/>
+          <p:cNvPr id="8" name="Text 6"/>
           <p:cNvSpPr txBox="1"/>
           <p:nvPr/>
         </p:nvSpPr>
         <p:spPr>
           <a:xfrm>
-            <a:off x="4663440" y="2176272"/>
-            <a:ext cx="4023360" cy="365760"/>
-          </a:xfrm>
-          <a:prstGeom prst="rect">
-            <a:avLst/>
-          </a:prstGeom>
-          <a:noFill/>
-          <a:ln/>
-        </p:spPr>
-        <p:txBody>
-          <a:bodyPr wrap="square" lIns="635" tIns="635" rIns="635" bIns="635" rtlCol="0" anchor="t"/>
+            <a:off x="1051560" y="1691640"/>
+            <a:ext cx="3337560" cy="530352"/>
+          </a:xfrm>
+          <a:prstGeom prst="rect">
+            <a:avLst/>
+          </a:prstGeom>
+          <a:noFill/>
+          <a:ln/>
+        </p:spPr>
+        <p:txBody>
+          <a:bodyPr wrap="square" lIns="635" tIns="635" rIns="635" bIns="635" rtlCol="0" anchor="ctr"/>
           <a:lstStyle/>
           <a:p>
             <a:pPr indent="0" marL="0">
               <a:buNone/>
             </a:pPr>
             <a:r>
-              <a:rPr lang="en-US" sz="1500" b="1" dirty="0">
-                <a:solidFill>
-                  <a:schemeClr val="tx2"/>
-                </a:solidFill>
-              </a:rPr>
-              <a:t>フォトスポットに</a:t>
-            </a:r>
-            <a:endParaRPr lang="en-US" sz="1500" dirty="0"/>
-          </a:p>
-        </p:txBody>
-      </p:sp>
-      <p:sp>
-        <p:nvSpPr>
-          <p:cNvPr id="12" name="Text 9"/>
-          <p:cNvSpPr txBox="1"/>
-          <p:nvPr/>
-        </p:nvSpPr>
-        <p:spPr>
-          <a:xfrm>
-            <a:off x="4663440" y="2560320"/>
-            <a:ext cx="4023360" cy="640080"/>
-          </a:xfrm>
-          <a:prstGeom prst="rect">
-            <a:avLst/>
-          </a:prstGeom>
-          <a:noFill/>
-          <a:ln/>
-        </p:spPr>
-        <p:txBody>
-          <a:bodyPr wrap="square" lIns="635" tIns="635" rIns="635" bIns="635" rtlCol="0" anchor="t"/>
-          <a:lstStyle/>
-          <a:p>
-            <a:pPr indent="0" marL="0">
-              <a:buNone/>
-            </a:pPr>
-            <a:r>
               <a:rPr lang="en-US" sz="1300" dirty="0">
                 <a:solidFill>
                   <a:schemeClr val="tx1"/>
                 </a:solidFill>
               </a:rPr>
-              <a:t>アーチ前での記念撮影がSNS投稿のきっかけに。</a:t>
+              <a:t>スノードーム／スクイーズを選ぶ</a:t>
             </a:r>
             <a:endParaRPr lang="en-US" sz="1300" dirty="0"/>
           </a:p>
@@ -13370,14 +14408,41 @@
       </p:sp>
       <p:sp>
         <p:nvSpPr>
-          <p:cNvPr id="13" name="arch_badge_2"/>
+          <p:cNvPr id="9" name="pc_0_1"/>
           <p:cNvSpPr/>
           <p:nvPr/>
         </p:nvSpPr>
         <p:spPr>
           <a:xfrm>
-            <a:off x="4114800" y="3291840"/>
-            <a:ext cx="411480" cy="411480"/>
+            <a:off x="457200" y="2313432"/>
+            <a:ext cx="4023360" cy="530352"/>
+          </a:xfrm>
+          <a:prstGeom prst="roundRect">
+            <a:avLst>
+              <a:gd name="adj" fmla="val 13793"/>
+            </a:avLst>
+          </a:prstGeom>
+          <a:solidFill>
+            <a:schemeClr val="bg2"/>
+          </a:solidFill>
+          <a:ln w="12700">
+            <a:solidFill>
+              <a:schemeClr val="bg2"/>
+            </a:solidFill>
+            <a:prstDash val="solid"/>
+          </a:ln>
+        </p:spPr>
+      </p:sp>
+      <p:sp>
+        <p:nvSpPr>
+          <p:cNvPr id="10" name="pc_b_0_1"/>
+          <p:cNvSpPr/>
+          <p:nvPr/>
+        </p:nvSpPr>
+        <p:spPr>
+          <a:xfrm>
+            <a:off x="566928" y="2395728"/>
+            <a:ext cx="365760" cy="365760"/>
           </a:xfrm>
           <a:prstGeom prst="ellipse">
             <a:avLst/>
@@ -13395,14 +14460,14 @@
       </p:sp>
       <p:sp>
         <p:nvSpPr>
-          <p:cNvPr id="14" name="Text 11"/>
+          <p:cNvPr id="11" name="Text 9"/>
           <p:cNvSpPr txBox="1"/>
           <p:nvPr/>
         </p:nvSpPr>
         <p:spPr>
           <a:xfrm>
-            <a:off x="4114800" y="3291840"/>
-            <a:ext cx="411480" cy="411480"/>
+            <a:off x="566928" y="2395728"/>
+            <a:ext cx="365760" cy="365760"/>
           </a:xfrm>
           <a:prstGeom prst="rect">
             <a:avLst/>
@@ -13423,6 +14488,130 @@
                   <a:schemeClr val="bg1"/>
                 </a:solidFill>
               </a:rPr>
+              <a:t>2</a:t>
+            </a:r>
+            <a:endParaRPr lang="en-US" sz="1300" dirty="0"/>
+          </a:p>
+        </p:txBody>
+      </p:sp>
+      <p:sp>
+        <p:nvSpPr>
+          <p:cNvPr id="12" name="Text 10"/>
+          <p:cNvSpPr txBox="1"/>
+          <p:nvPr/>
+        </p:nvSpPr>
+        <p:spPr>
+          <a:xfrm>
+            <a:off x="1051560" y="2313432"/>
+            <a:ext cx="3337560" cy="530352"/>
+          </a:xfrm>
+          <a:prstGeom prst="rect">
+            <a:avLst/>
+          </a:prstGeom>
+          <a:noFill/>
+          <a:ln/>
+        </p:spPr>
+        <p:txBody>
+          <a:bodyPr wrap="square" lIns="635" tIns="635" rIns="635" bIns="635" rtlCol="0" anchor="ctr"/>
+          <a:lstStyle/>
+          <a:p>
+            <a:pPr indent="0" marL="0">
+              <a:buNone/>
+            </a:pPr>
+            <a:r>
+              <a:rPr lang="en-US" sz="1300" dirty="0">
+                <a:solidFill>
+                  <a:schemeClr val="tx1"/>
+                </a:solidFill>
+              </a:rPr>
+              <a:t>見本と手順カードを見ながら制作に集中</a:t>
+            </a:r>
+            <a:endParaRPr lang="en-US" sz="1300" dirty="0"/>
+          </a:p>
+        </p:txBody>
+      </p:sp>
+      <p:sp>
+        <p:nvSpPr>
+          <p:cNvPr id="13" name="pc_0_2"/>
+          <p:cNvSpPr/>
+          <p:nvPr/>
+        </p:nvSpPr>
+        <p:spPr>
+          <a:xfrm>
+            <a:off x="457200" y="2935224"/>
+            <a:ext cx="4023360" cy="530352"/>
+          </a:xfrm>
+          <a:prstGeom prst="roundRect">
+            <a:avLst>
+              <a:gd name="adj" fmla="val 13793"/>
+            </a:avLst>
+          </a:prstGeom>
+          <a:solidFill>
+            <a:schemeClr val="bg2"/>
+          </a:solidFill>
+          <a:ln w="12700">
+            <a:solidFill>
+              <a:schemeClr val="bg2"/>
+            </a:solidFill>
+            <a:prstDash val="solid"/>
+          </a:ln>
+        </p:spPr>
+      </p:sp>
+      <p:sp>
+        <p:nvSpPr>
+          <p:cNvPr id="14" name="pc_b_0_2"/>
+          <p:cNvSpPr/>
+          <p:nvPr/>
+        </p:nvSpPr>
+        <p:spPr>
+          <a:xfrm>
+            <a:off x="566928" y="3017520"/>
+            <a:ext cx="365760" cy="365760"/>
+          </a:xfrm>
+          <a:prstGeom prst="ellipse">
+            <a:avLst/>
+          </a:prstGeom>
+          <a:solidFill>
+            <a:schemeClr val="accent1"/>
+          </a:solidFill>
+          <a:ln w="12700">
+            <a:solidFill>
+              <a:schemeClr val="accent1"/>
+            </a:solidFill>
+            <a:prstDash val="solid"/>
+          </a:ln>
+        </p:spPr>
+      </p:sp>
+      <p:sp>
+        <p:nvSpPr>
+          <p:cNvPr id="15" name="Text 13"/>
+          <p:cNvSpPr txBox="1"/>
+          <p:nvPr/>
+        </p:nvSpPr>
+        <p:spPr>
+          <a:xfrm>
+            <a:off x="566928" y="3017520"/>
+            <a:ext cx="365760" cy="365760"/>
+          </a:xfrm>
+          <a:prstGeom prst="rect">
+            <a:avLst/>
+          </a:prstGeom>
+          <a:noFill/>
+          <a:ln/>
+        </p:spPr>
+        <p:txBody>
+          <a:bodyPr wrap="square" lIns="0" tIns="0" rIns="0" bIns="0" rtlCol="0" anchor="ctr"/>
+          <a:lstStyle/>
+          <a:p>
+            <a:pPr algn="ctr" indent="0" marL="0">
+              <a:buNone/>
+            </a:pPr>
+            <a:r>
+              <a:rPr lang="en-US" sz="1300" b="1" dirty="0">
+                <a:solidFill>
+                  <a:schemeClr val="bg1"/>
+                </a:solidFill>
+              </a:rPr>
               <a:t>3</a:t>
             </a:r>
             <a:endParaRPr lang="en-US" sz="1300" dirty="0"/>
@@ -13431,14 +14620,733 @@
       </p:sp>
       <p:sp>
         <p:nvSpPr>
-          <p:cNvPr id="15" name="Text 12"/>
+          <p:cNvPr id="16" name="Text 14"/>
           <p:cNvSpPr txBox="1"/>
           <p:nvPr/>
         </p:nvSpPr>
         <p:spPr>
           <a:xfrm>
-            <a:off x="4663440" y="3273552"/>
-            <a:ext cx="4023360" cy="365760"/>
+            <a:off x="1051560" y="2935224"/>
+            <a:ext cx="3337560" cy="530352"/>
+          </a:xfrm>
+          <a:prstGeom prst="rect">
+            <a:avLst/>
+          </a:prstGeom>
+          <a:noFill/>
+          <a:ln/>
+        </p:spPr>
+        <p:txBody>
+          <a:bodyPr wrap="square" lIns="635" tIns="635" rIns="635" bIns="635" rtlCol="0" anchor="ctr"/>
+          <a:lstStyle/>
+          <a:p>
+            <a:pPr indent="0" marL="0">
+              <a:buNone/>
+            </a:pPr>
+            <a:r>
+              <a:rPr lang="en-US" sz="1300" dirty="0">
+                <a:solidFill>
+                  <a:schemeClr val="tx1"/>
+                </a:solidFill>
+              </a:rPr>
+              <a:t>完成（スクイーズは型のまま袋へ）</a:t>
+            </a:r>
+            <a:endParaRPr lang="en-US" sz="1300" dirty="0"/>
+          </a:p>
+        </p:txBody>
+      </p:sp>
+      <p:sp>
+        <p:nvSpPr>
+          <p:cNvPr id="17" name="pc_0_3"/>
+          <p:cNvSpPr/>
+          <p:nvPr/>
+        </p:nvSpPr>
+        <p:spPr>
+          <a:xfrm>
+            <a:off x="457200" y="3557016"/>
+            <a:ext cx="4023360" cy="530352"/>
+          </a:xfrm>
+          <a:prstGeom prst="roundRect">
+            <a:avLst>
+              <a:gd name="adj" fmla="val 13793"/>
+            </a:avLst>
+          </a:prstGeom>
+          <a:solidFill>
+            <a:schemeClr val="bg2"/>
+          </a:solidFill>
+          <a:ln w="12700">
+            <a:solidFill>
+              <a:schemeClr val="bg2"/>
+            </a:solidFill>
+            <a:prstDash val="solid"/>
+          </a:ln>
+        </p:spPr>
+      </p:sp>
+      <p:sp>
+        <p:nvSpPr>
+          <p:cNvPr id="18" name="pc_b_0_3"/>
+          <p:cNvSpPr/>
+          <p:nvPr/>
+        </p:nvSpPr>
+        <p:spPr>
+          <a:xfrm>
+            <a:off x="566928" y="3639312"/>
+            <a:ext cx="365760" cy="365760"/>
+          </a:xfrm>
+          <a:prstGeom prst="ellipse">
+            <a:avLst/>
+          </a:prstGeom>
+          <a:solidFill>
+            <a:schemeClr val="accent1"/>
+          </a:solidFill>
+          <a:ln w="12700">
+            <a:solidFill>
+              <a:schemeClr val="accent1"/>
+            </a:solidFill>
+            <a:prstDash val="solid"/>
+          </a:ln>
+        </p:spPr>
+      </p:sp>
+      <p:sp>
+        <p:nvSpPr>
+          <p:cNvPr id="19" name="Text 17"/>
+          <p:cNvSpPr txBox="1"/>
+          <p:nvPr/>
+        </p:nvSpPr>
+        <p:spPr>
+          <a:xfrm>
+            <a:off x="566928" y="3639312"/>
+            <a:ext cx="365760" cy="365760"/>
+          </a:xfrm>
+          <a:prstGeom prst="rect">
+            <a:avLst/>
+          </a:prstGeom>
+          <a:noFill/>
+          <a:ln/>
+        </p:spPr>
+        <p:txBody>
+          <a:bodyPr wrap="square" lIns="0" tIns="0" rIns="0" bIns="0" rtlCol="0" anchor="ctr"/>
+          <a:lstStyle/>
+          <a:p>
+            <a:pPr algn="ctr" indent="0" marL="0">
+              <a:buNone/>
+            </a:pPr>
+            <a:r>
+              <a:rPr lang="en-US" sz="1300" b="1" dirty="0">
+                <a:solidFill>
+                  <a:schemeClr val="bg1"/>
+                </a:solidFill>
+              </a:rPr>
+              <a:t>4</a:t>
+            </a:r>
+            <a:endParaRPr lang="en-US" sz="1300" dirty="0"/>
+          </a:p>
+        </p:txBody>
+      </p:sp>
+      <p:sp>
+        <p:nvSpPr>
+          <p:cNvPr id="20" name="Text 18"/>
+          <p:cNvSpPr txBox="1"/>
+          <p:nvPr/>
+        </p:nvSpPr>
+        <p:spPr>
+          <a:xfrm>
+            <a:off x="1051560" y="3557016"/>
+            <a:ext cx="3337560" cy="530352"/>
+          </a:xfrm>
+          <a:prstGeom prst="rect">
+            <a:avLst/>
+          </a:prstGeom>
+          <a:noFill/>
+          <a:ln/>
+        </p:spPr>
+        <p:txBody>
+          <a:bodyPr wrap="square" lIns="635" tIns="635" rIns="635" bIns="635" rtlCol="0" anchor="ctr"/>
+          <a:lstStyle/>
+          <a:p>
+            <a:pPr indent="0" marL="0">
+              <a:buNone/>
+            </a:pPr>
+            <a:r>
+              <a:rPr lang="en-US" sz="1300" dirty="0">
+                <a:solidFill>
+                  <a:schemeClr val="tx1"/>
+                </a:solidFill>
+              </a:rPr>
+              <a:t>作品を持って保護者様と合流</a:t>
+            </a:r>
+            <a:endParaRPr lang="en-US" sz="1300" dirty="0"/>
+          </a:p>
+        </p:txBody>
+      </p:sp>
+      <p:sp>
+        <p:nvSpPr>
+          <p:cNvPr id="21" name="pc_head_1"/>
+          <p:cNvSpPr/>
+          <p:nvPr/>
+        </p:nvSpPr>
+        <p:spPr>
+          <a:xfrm>
+            <a:off x="4663440" y="1005840"/>
+            <a:ext cx="4023360" cy="548640"/>
+          </a:xfrm>
+          <a:prstGeom prst="roundRect">
+            <a:avLst>
+              <a:gd name="adj" fmla="val 13333"/>
+            </a:avLst>
+          </a:prstGeom>
+          <a:solidFill>
+            <a:schemeClr val="tx2"/>
+          </a:solidFill>
+          <a:ln w="12700">
+            <a:solidFill>
+              <a:schemeClr val="tx2"/>
+            </a:solidFill>
+            <a:prstDash val="solid"/>
+          </a:ln>
+        </p:spPr>
+      </p:sp>
+      <p:sp>
+        <p:nvSpPr>
+          <p:cNvPr id="22" name="Text 20"/>
+          <p:cNvSpPr txBox="1"/>
+          <p:nvPr/>
+        </p:nvSpPr>
+        <p:spPr>
+          <a:xfrm>
+            <a:off x="4663440" y="1005840"/>
+            <a:ext cx="4023360" cy="548640"/>
+          </a:xfrm>
+          <a:prstGeom prst="rect">
+            <a:avLst/>
+          </a:prstGeom>
+          <a:noFill/>
+          <a:ln/>
+        </p:spPr>
+        <p:txBody>
+          <a:bodyPr wrap="square" lIns="0" tIns="0" rIns="0" bIns="0" rtlCol="0" anchor="ctr"/>
+          <a:lstStyle/>
+          <a:p>
+            <a:pPr algn="ctr" indent="0" marL="0">
+              <a:buNone/>
+            </a:pPr>
+            <a:r>
+              <a:rPr lang="en-US" sz="1600" b="1" dirty="0">
+                <a:solidFill>
+                  <a:schemeClr val="bg1"/>
+                </a:solidFill>
+              </a:rPr>
+              <a:t>保護者様　約20分</a:t>
+            </a:r>
+            <a:endParaRPr lang="en-US" sz="1600" dirty="0"/>
+          </a:p>
+        </p:txBody>
+      </p:sp>
+      <p:sp>
+        <p:nvSpPr>
+          <p:cNvPr id="23" name="pc_1_0"/>
+          <p:cNvSpPr/>
+          <p:nvPr/>
+        </p:nvSpPr>
+        <p:spPr>
+          <a:xfrm>
+            <a:off x="4663440" y="1691640"/>
+            <a:ext cx="4023360" cy="530352"/>
+          </a:xfrm>
+          <a:prstGeom prst="roundRect">
+            <a:avLst>
+              <a:gd name="adj" fmla="val 13793"/>
+            </a:avLst>
+          </a:prstGeom>
+          <a:solidFill>
+            <a:schemeClr val="bg2"/>
+          </a:solidFill>
+          <a:ln w="12700">
+            <a:solidFill>
+              <a:schemeClr val="bg2"/>
+            </a:solidFill>
+            <a:prstDash val="solid"/>
+          </a:ln>
+        </p:spPr>
+      </p:sp>
+      <p:sp>
+        <p:nvSpPr>
+          <p:cNvPr id="24" name="pc_b_1_0"/>
+          <p:cNvSpPr/>
+          <p:nvPr/>
+        </p:nvSpPr>
+        <p:spPr>
+          <a:xfrm>
+            <a:off x="4773168" y="1773936"/>
+            <a:ext cx="365760" cy="365760"/>
+          </a:xfrm>
+          <a:prstGeom prst="ellipse">
+            <a:avLst/>
+          </a:prstGeom>
+          <a:solidFill>
+            <a:schemeClr val="tx2"/>
+          </a:solidFill>
+          <a:ln w="12700">
+            <a:solidFill>
+              <a:schemeClr val="tx2"/>
+            </a:solidFill>
+            <a:prstDash val="solid"/>
+          </a:ln>
+        </p:spPr>
+      </p:sp>
+      <p:sp>
+        <p:nvSpPr>
+          <p:cNvPr id="25" name="Text 23"/>
+          <p:cNvSpPr txBox="1"/>
+          <p:nvPr/>
+        </p:nvSpPr>
+        <p:spPr>
+          <a:xfrm>
+            <a:off x="4773168" y="1773936"/>
+            <a:ext cx="365760" cy="365760"/>
+          </a:xfrm>
+          <a:prstGeom prst="rect">
+            <a:avLst/>
+          </a:prstGeom>
+          <a:noFill/>
+          <a:ln/>
+        </p:spPr>
+        <p:txBody>
+          <a:bodyPr wrap="square" lIns="0" tIns="0" rIns="0" bIns="0" rtlCol="0" anchor="ctr"/>
+          <a:lstStyle/>
+          <a:p>
+            <a:pPr algn="ctr" indent="0" marL="0">
+              <a:buNone/>
+            </a:pPr>
+            <a:r>
+              <a:rPr lang="en-US" sz="1300" b="1" dirty="0">
+                <a:solidFill>
+                  <a:schemeClr val="bg1"/>
+                </a:solidFill>
+              </a:rPr>
+              <a:t>1</a:t>
+            </a:r>
+            <a:endParaRPr lang="en-US" sz="1300" dirty="0"/>
+          </a:p>
+        </p:txBody>
+      </p:sp>
+      <p:sp>
+        <p:nvSpPr>
+          <p:cNvPr id="26" name="Text 24"/>
+          <p:cNvSpPr txBox="1"/>
+          <p:nvPr/>
+        </p:nvSpPr>
+        <p:spPr>
+          <a:xfrm>
+            <a:off x="5257800" y="1691640"/>
+            <a:ext cx="3337560" cy="530352"/>
+          </a:xfrm>
+          <a:prstGeom prst="rect">
+            <a:avLst/>
+          </a:prstGeom>
+          <a:noFill/>
+          <a:ln/>
+        </p:spPr>
+        <p:txBody>
+          <a:bodyPr wrap="square" lIns="635" tIns="635" rIns="635" bIns="635" rtlCol="0" anchor="ctr"/>
+          <a:lstStyle/>
+          <a:p>
+            <a:pPr indent="0" marL="0">
+              <a:buNone/>
+            </a:pPr>
+            <a:r>
+              <a:rPr lang="en-US" sz="1300" dirty="0">
+                <a:solidFill>
+                  <a:schemeClr val="tx1"/>
+                </a:solidFill>
+              </a:rPr>
+              <a:t>隣接の商談カウンターへご案内</a:t>
+            </a:r>
+            <a:endParaRPr lang="en-US" sz="1300" dirty="0"/>
+          </a:p>
+        </p:txBody>
+      </p:sp>
+      <p:sp>
+        <p:nvSpPr>
+          <p:cNvPr id="27" name="pc_1_1"/>
+          <p:cNvSpPr/>
+          <p:nvPr/>
+        </p:nvSpPr>
+        <p:spPr>
+          <a:xfrm>
+            <a:off x="4663440" y="2313432"/>
+            <a:ext cx="4023360" cy="530352"/>
+          </a:xfrm>
+          <a:prstGeom prst="roundRect">
+            <a:avLst>
+              <a:gd name="adj" fmla="val 13793"/>
+            </a:avLst>
+          </a:prstGeom>
+          <a:solidFill>
+            <a:schemeClr val="bg2"/>
+          </a:solidFill>
+          <a:ln w="12700">
+            <a:solidFill>
+              <a:schemeClr val="bg2"/>
+            </a:solidFill>
+            <a:prstDash val="solid"/>
+          </a:ln>
+        </p:spPr>
+      </p:sp>
+      <p:sp>
+        <p:nvSpPr>
+          <p:cNvPr id="28" name="pc_b_1_1"/>
+          <p:cNvSpPr/>
+          <p:nvPr/>
+        </p:nvSpPr>
+        <p:spPr>
+          <a:xfrm>
+            <a:off x="4773168" y="2395728"/>
+            <a:ext cx="365760" cy="365760"/>
+          </a:xfrm>
+          <a:prstGeom prst="ellipse">
+            <a:avLst/>
+          </a:prstGeom>
+          <a:solidFill>
+            <a:schemeClr val="tx2"/>
+          </a:solidFill>
+          <a:ln w="12700">
+            <a:solidFill>
+              <a:schemeClr val="tx2"/>
+            </a:solidFill>
+            <a:prstDash val="solid"/>
+          </a:ln>
+        </p:spPr>
+      </p:sp>
+      <p:sp>
+        <p:nvSpPr>
+          <p:cNvPr id="29" name="Text 27"/>
+          <p:cNvSpPr txBox="1"/>
+          <p:nvPr/>
+        </p:nvSpPr>
+        <p:spPr>
+          <a:xfrm>
+            <a:off x="4773168" y="2395728"/>
+            <a:ext cx="365760" cy="365760"/>
+          </a:xfrm>
+          <a:prstGeom prst="rect">
+            <a:avLst/>
+          </a:prstGeom>
+          <a:noFill/>
+          <a:ln/>
+        </p:spPr>
+        <p:txBody>
+          <a:bodyPr wrap="square" lIns="0" tIns="0" rIns="0" bIns="0" rtlCol="0" anchor="ctr"/>
+          <a:lstStyle/>
+          <a:p>
+            <a:pPr algn="ctr" indent="0" marL="0">
+              <a:buNone/>
+            </a:pPr>
+            <a:r>
+              <a:rPr lang="en-US" sz="1300" b="1" dirty="0">
+                <a:solidFill>
+                  <a:schemeClr val="bg1"/>
+                </a:solidFill>
+              </a:rPr>
+              <a:t>2</a:t>
+            </a:r>
+            <a:endParaRPr lang="en-US" sz="1300" dirty="0"/>
+          </a:p>
+        </p:txBody>
+      </p:sp>
+      <p:sp>
+        <p:nvSpPr>
+          <p:cNvPr id="30" name="Text 28"/>
+          <p:cNvSpPr txBox="1"/>
+          <p:nvPr/>
+        </p:nvSpPr>
+        <p:spPr>
+          <a:xfrm>
+            <a:off x="5257800" y="2313432"/>
+            <a:ext cx="3337560" cy="530352"/>
+          </a:xfrm>
+          <a:prstGeom prst="rect">
+            <a:avLst/>
+          </a:prstGeom>
+          <a:noFill/>
+          <a:ln/>
+        </p:spPr>
+        <p:txBody>
+          <a:bodyPr wrap="square" lIns="635" tIns="635" rIns="635" bIns="635" rtlCol="0" anchor="ctr"/>
+          <a:lstStyle/>
+          <a:p>
+            <a:pPr indent="0" marL="0">
+              <a:buNone/>
+            </a:pPr>
+            <a:r>
+              <a:rPr lang="en-US" sz="1300" dirty="0">
+                <a:solidFill>
+                  <a:schemeClr val="tx1"/>
+                </a:solidFill>
+              </a:rPr>
+              <a:t>料金プラン・機種変更のご相談</a:t>
+            </a:r>
+            <a:endParaRPr lang="en-US" sz="1300" dirty="0"/>
+          </a:p>
+        </p:txBody>
+      </p:sp>
+      <p:sp>
+        <p:nvSpPr>
+          <p:cNvPr id="31" name="pc_1_2"/>
+          <p:cNvSpPr/>
+          <p:nvPr/>
+        </p:nvSpPr>
+        <p:spPr>
+          <a:xfrm>
+            <a:off x="4663440" y="2935224"/>
+            <a:ext cx="4023360" cy="530352"/>
+          </a:xfrm>
+          <a:prstGeom prst="roundRect">
+            <a:avLst>
+              <a:gd name="adj" fmla="val 13793"/>
+            </a:avLst>
+          </a:prstGeom>
+          <a:solidFill>
+            <a:schemeClr val="bg2"/>
+          </a:solidFill>
+          <a:ln w="12700">
+            <a:solidFill>
+              <a:schemeClr val="bg2"/>
+            </a:solidFill>
+            <a:prstDash val="solid"/>
+          </a:ln>
+        </p:spPr>
+      </p:sp>
+      <p:sp>
+        <p:nvSpPr>
+          <p:cNvPr id="32" name="pc_b_1_2"/>
+          <p:cNvSpPr/>
+          <p:nvPr/>
+        </p:nvSpPr>
+        <p:spPr>
+          <a:xfrm>
+            <a:off x="4773168" y="3017520"/>
+            <a:ext cx="365760" cy="365760"/>
+          </a:xfrm>
+          <a:prstGeom prst="ellipse">
+            <a:avLst/>
+          </a:prstGeom>
+          <a:solidFill>
+            <a:schemeClr val="tx2"/>
+          </a:solidFill>
+          <a:ln w="12700">
+            <a:solidFill>
+              <a:schemeClr val="tx2"/>
+            </a:solidFill>
+            <a:prstDash val="solid"/>
+          </a:ln>
+        </p:spPr>
+      </p:sp>
+      <p:sp>
+        <p:nvSpPr>
+          <p:cNvPr id="33" name="Text 31"/>
+          <p:cNvSpPr txBox="1"/>
+          <p:nvPr/>
+        </p:nvSpPr>
+        <p:spPr>
+          <a:xfrm>
+            <a:off x="4773168" y="3017520"/>
+            <a:ext cx="365760" cy="365760"/>
+          </a:xfrm>
+          <a:prstGeom prst="rect">
+            <a:avLst/>
+          </a:prstGeom>
+          <a:noFill/>
+          <a:ln/>
+        </p:spPr>
+        <p:txBody>
+          <a:bodyPr wrap="square" lIns="0" tIns="0" rIns="0" bIns="0" rtlCol="0" anchor="ctr"/>
+          <a:lstStyle/>
+          <a:p>
+            <a:pPr algn="ctr" indent="0" marL="0">
+              <a:buNone/>
+            </a:pPr>
+            <a:r>
+              <a:rPr lang="en-US" sz="1300" b="1" dirty="0">
+                <a:solidFill>
+                  <a:schemeClr val="bg1"/>
+                </a:solidFill>
+              </a:rPr>
+              <a:t>3</a:t>
+            </a:r>
+            <a:endParaRPr lang="en-US" sz="1300" dirty="0"/>
+          </a:p>
+        </p:txBody>
+      </p:sp>
+      <p:sp>
+        <p:nvSpPr>
+          <p:cNvPr id="34" name="Text 32"/>
+          <p:cNvSpPr txBox="1"/>
+          <p:nvPr/>
+        </p:nvSpPr>
+        <p:spPr>
+          <a:xfrm>
+            <a:off x="5257800" y="2935224"/>
+            <a:ext cx="3337560" cy="530352"/>
+          </a:xfrm>
+          <a:prstGeom prst="rect">
+            <a:avLst/>
+          </a:prstGeom>
+          <a:noFill/>
+          <a:ln/>
+        </p:spPr>
+        <p:txBody>
+          <a:bodyPr wrap="square" lIns="635" tIns="635" rIns="635" bIns="635" rtlCol="0" anchor="ctr"/>
+          <a:lstStyle/>
+          <a:p>
+            <a:pPr indent="0" marL="0">
+              <a:buNone/>
+            </a:pPr>
+            <a:r>
+              <a:rPr lang="en-US" sz="1300" dirty="0">
+                <a:solidFill>
+                  <a:schemeClr val="tx1"/>
+                </a:solidFill>
+              </a:rPr>
+              <a:t>見積ご依頼でクリスマス特典をご案内</a:t>
+            </a:r>
+            <a:endParaRPr lang="en-US" sz="1300" dirty="0"/>
+          </a:p>
+        </p:txBody>
+      </p:sp>
+      <p:sp>
+        <p:nvSpPr>
+          <p:cNvPr id="35" name="pc_1_3"/>
+          <p:cNvSpPr/>
+          <p:nvPr/>
+        </p:nvSpPr>
+        <p:spPr>
+          <a:xfrm>
+            <a:off x="4663440" y="3557016"/>
+            <a:ext cx="4023360" cy="530352"/>
+          </a:xfrm>
+          <a:prstGeom prst="roundRect">
+            <a:avLst>
+              <a:gd name="adj" fmla="val 13793"/>
+            </a:avLst>
+          </a:prstGeom>
+          <a:solidFill>
+            <a:schemeClr val="bg2"/>
+          </a:solidFill>
+          <a:ln w="12700">
+            <a:solidFill>
+              <a:schemeClr val="bg2"/>
+            </a:solidFill>
+            <a:prstDash val="solid"/>
+          </a:ln>
+        </p:spPr>
+      </p:sp>
+      <p:sp>
+        <p:nvSpPr>
+          <p:cNvPr id="36" name="pc_b_1_3"/>
+          <p:cNvSpPr/>
+          <p:nvPr/>
+        </p:nvSpPr>
+        <p:spPr>
+          <a:xfrm>
+            <a:off x="4773168" y="3639312"/>
+            <a:ext cx="365760" cy="365760"/>
+          </a:xfrm>
+          <a:prstGeom prst="ellipse">
+            <a:avLst/>
+          </a:prstGeom>
+          <a:solidFill>
+            <a:schemeClr val="tx2"/>
+          </a:solidFill>
+          <a:ln w="12700">
+            <a:solidFill>
+              <a:schemeClr val="tx2"/>
+            </a:solidFill>
+            <a:prstDash val="solid"/>
+          </a:ln>
+        </p:spPr>
+      </p:sp>
+      <p:sp>
+        <p:nvSpPr>
+          <p:cNvPr id="37" name="Text 35"/>
+          <p:cNvSpPr txBox="1"/>
+          <p:nvPr/>
+        </p:nvSpPr>
+        <p:spPr>
+          <a:xfrm>
+            <a:off x="4773168" y="3639312"/>
+            <a:ext cx="365760" cy="365760"/>
+          </a:xfrm>
+          <a:prstGeom prst="rect">
+            <a:avLst/>
+          </a:prstGeom>
+          <a:noFill/>
+          <a:ln/>
+        </p:spPr>
+        <p:txBody>
+          <a:bodyPr wrap="square" lIns="0" tIns="0" rIns="0" bIns="0" rtlCol="0" anchor="ctr"/>
+          <a:lstStyle/>
+          <a:p>
+            <a:pPr algn="ctr" indent="0" marL="0">
+              <a:buNone/>
+            </a:pPr>
+            <a:r>
+              <a:rPr lang="en-US" sz="1300" b="1" dirty="0">
+                <a:solidFill>
+                  <a:schemeClr val="bg1"/>
+                </a:solidFill>
+              </a:rPr>
+              <a:t>4</a:t>
+            </a:r>
+            <a:endParaRPr lang="en-US" sz="1300" dirty="0"/>
+          </a:p>
+        </p:txBody>
+      </p:sp>
+      <p:sp>
+        <p:nvSpPr>
+          <p:cNvPr id="38" name="Text 36"/>
+          <p:cNvSpPr txBox="1"/>
+          <p:nvPr/>
+        </p:nvSpPr>
+        <p:spPr>
+          <a:xfrm>
+            <a:off x="5257800" y="3557016"/>
+            <a:ext cx="3337560" cy="530352"/>
+          </a:xfrm>
+          <a:prstGeom prst="rect">
+            <a:avLst/>
+          </a:prstGeom>
+          <a:noFill/>
+          <a:ln/>
+        </p:spPr>
+        <p:txBody>
+          <a:bodyPr wrap="square" lIns="635" tIns="635" rIns="635" bIns="635" rtlCol="0" anchor="ctr"/>
+          <a:lstStyle/>
+          <a:p>
+            <a:pPr indent="0" marL="0">
+              <a:buNone/>
+            </a:pPr>
+            <a:r>
+              <a:rPr lang="en-US" sz="1300" dirty="0">
+                <a:solidFill>
+                  <a:schemeClr val="tx1"/>
+                </a:solidFill>
+              </a:rPr>
+              <a:t>お子様の完成作品を一緒に確認</a:t>
+            </a:r>
+            <a:endParaRPr lang="en-US" sz="1300" dirty="0"/>
+          </a:p>
+        </p:txBody>
+      </p:sp>
+      <p:sp>
+        <p:nvSpPr>
+          <p:cNvPr id="39" name="Text 37"/>
+          <p:cNvSpPr txBox="1"/>
+          <p:nvPr/>
+        </p:nvSpPr>
+        <p:spPr>
+          <a:xfrm>
+            <a:off x="457200" y="4224528"/>
+            <a:ext cx="8229600" cy="365760"/>
           </a:xfrm>
           <a:prstGeom prst="rect">
             <a:avLst/>
@@ -13454,50 +15362,14 @@
               <a:buNone/>
             </a:pPr>
             <a:r>
-              <a:rPr lang="en-US" sz="1500" b="1" dirty="0">
-                <a:solidFill>
-                  <a:schemeClr val="tx2"/>
-                </a:solidFill>
-              </a:rPr>
-              <a:t>期間中レンタル</a:t>
-            </a:r>
-            <a:endParaRPr lang="en-US" sz="1500" dirty="0"/>
-          </a:p>
-        </p:txBody>
-      </p:sp>
-      <p:sp>
-        <p:nvSpPr>
-          <p:cNvPr id="16" name="Text 13"/>
-          <p:cNvSpPr txBox="1"/>
-          <p:nvPr/>
-        </p:nvSpPr>
-        <p:spPr>
-          <a:xfrm>
-            <a:off x="4663440" y="3657600"/>
-            <a:ext cx="4023360" cy="640080"/>
-          </a:xfrm>
-          <a:prstGeom prst="rect">
-            <a:avLst/>
-          </a:prstGeom>
-          <a:noFill/>
-          <a:ln/>
-        </p:spPr>
-        <p:txBody>
-          <a:bodyPr wrap="square" lIns="635" tIns="635" rIns="635" bIns="635" rtlCol="0" anchor="t"/>
-          <a:lstStyle/>
-          <a:p>
-            <a:pPr indent="0" marL="0">
-              <a:buNone/>
-            </a:pPr>
-            <a:r>
-              <a:rPr lang="en-US" sz="1300" dirty="0">
-                <a:solidFill>
-                  <a:schemeClr val="tx1"/>
-                </a:solidFill>
-              </a:rPr>
-              <a:t>4週の期間中は返却不要。期間終了後に回収。</a:t>
-            </a:r>
-            <a:endParaRPr lang="en-US" sz="1300" dirty="0"/>
+              <a:rPr lang="en-US" sz="1200" dirty="0">
+                <a:solidFill>
+                  <a:schemeClr val="accent4"/>
+                </a:solidFill>
+              </a:rPr>
+              <a:t>運営スタッフの派遣はなし。店舗スタッフ様1名でも回せるよう、手順カードと運用マニュアルを同梱します。</a:t>
+            </a:r>
+            <a:endParaRPr lang="en-US" sz="1200" dirty="0"/>
           </a:p>
         </p:txBody>
       </p:sp>
@@ -13603,49 +15475,82 @@
                   <a:schemeClr val="tx2"/>
                 </a:solidFill>
               </a:rPr>
-              <a:t>ワークショップ開催中ツール（案）</a:t>
+              <a:t>クリスマスアーチ（開催中ツールの主役）</a:t>
             </a:r>
             <a:endParaRPr lang="en-US" sz="2400" dirty="0"/>
           </a:p>
         </p:txBody>
       </p:sp>
-      <p:sp>
-        <p:nvSpPr>
-          <p:cNvPr id="3" name="tool_0"/>
+      <p:pic>
+        <p:nvPicPr>
+          <p:cNvPr id="3" name="img_arch" descr="サンタとスノーマン付きのエアーアーチ参考写真">    </p:cNvPr>
+          <p:cNvPicPr>
+            <a:picLocks noChangeAspect="1"/>
+          </p:cNvPicPr>
+          <p:nvPr/>
+        </p:nvPicPr>
+        <p:blipFill>
+          <a:blip r:embed="rId1"/>
+          <a:stretch>
+            <a:fillRect/>
+          </a:stretch>
+        </p:blipFill>
+        <p:spPr>
+          <a:xfrm>
+            <a:off x="457200" y="1051560"/>
+            <a:ext cx="3291840" cy="3273552"/>
+          </a:xfrm>
+          <a:prstGeom prst="rect">
+            <a:avLst/>
+          </a:prstGeom>
+        </p:spPr>
+      </p:pic>
+      <p:sp>
+        <p:nvSpPr>
+          <p:cNvPr id="4" name="Text 1"/>
+          <p:cNvSpPr txBox="1"/>
+          <p:nvPr/>
+        </p:nvSpPr>
+        <p:spPr>
+          <a:xfrm>
+            <a:off x="457200" y="4370832"/>
+            <a:ext cx="3291840" cy="274320"/>
+          </a:xfrm>
+          <a:prstGeom prst="rect">
+            <a:avLst/>
+          </a:prstGeom>
+          <a:noFill/>
+          <a:ln/>
+        </p:spPr>
+        <p:txBody>
+          <a:bodyPr wrap="square" lIns="635" tIns="635" rIns="635" bIns="635" rtlCol="0" anchor="t"/>
+          <a:lstStyle/>
+          <a:p>
+            <a:pPr indent="0" marL="0">
+              <a:buNone/>
+            </a:pPr>
+            <a:r>
+              <a:rPr lang="en-US" sz="1000" dirty="0">
+                <a:solidFill>
+                  <a:schemeClr val="accent4"/>
+                </a:solidFill>
+              </a:rPr>
+              <a:t>参考イメージ</a:t>
+            </a:r>
+            <a:endParaRPr lang="en-US" sz="1000" dirty="0"/>
+          </a:p>
+        </p:txBody>
+      </p:sp>
+      <p:sp>
+        <p:nvSpPr>
+          <p:cNvPr id="5" name="arch_badge_0"/>
           <p:cNvSpPr/>
           <p:nvPr/>
         </p:nvSpPr>
         <p:spPr>
           <a:xfrm>
-            <a:off x="457200" y="1051560"/>
-            <a:ext cx="4023360" cy="1051560"/>
-          </a:xfrm>
-          <a:prstGeom prst="roundRect">
-            <a:avLst>
-              <a:gd name="adj" fmla="val 6957"/>
-            </a:avLst>
-          </a:prstGeom>
-          <a:solidFill>
-            <a:schemeClr val="bg2"/>
-          </a:solidFill>
-          <a:ln w="12700">
-            <a:solidFill>
-              <a:schemeClr val="bg2"/>
-            </a:solidFill>
-            <a:prstDash val="solid"/>
-          </a:ln>
-        </p:spPr>
-      </p:sp>
-      <p:sp>
-        <p:nvSpPr>
-          <p:cNvPr id="4" name="tool_badge_0"/>
-          <p:cNvSpPr/>
-          <p:nvPr/>
-        </p:nvSpPr>
-        <p:spPr>
-          <a:xfrm>
-            <a:off x="640080" y="1325880"/>
-            <a:ext cx="457200" cy="457200"/>
+            <a:off x="4114800" y="1097280"/>
+            <a:ext cx="411480" cy="411480"/>
           </a:xfrm>
           <a:prstGeom prst="ellipse">
             <a:avLst/>
@@ -13663,14 +15568,14 @@
       </p:sp>
       <p:sp>
         <p:nvSpPr>
-          <p:cNvPr id="5" name="Text 3"/>
+          <p:cNvPr id="6" name="Text 3"/>
           <p:cNvSpPr txBox="1"/>
           <p:nvPr/>
         </p:nvSpPr>
         <p:spPr>
           <a:xfrm>
-            <a:off x="640080" y="1325880"/>
-            <a:ext cx="457200" cy="457200"/>
+            <a:off x="4114800" y="1097280"/>
+            <a:ext cx="411480" cy="411480"/>
           </a:xfrm>
           <a:prstGeom prst="rect">
             <a:avLst/>
@@ -13691,7 +15596,7 @@
                   <a:schemeClr val="bg1"/>
                 </a:solidFill>
               </a:rPr>
-              <a:t>A</a:t>
+              <a:t>1</a:t>
             </a:r>
             <a:endParaRPr lang="en-US" sz="1300" dirty="0"/>
           </a:p>
@@ -13699,14 +15604,14 @@
       </p:sp>
       <p:sp>
         <p:nvSpPr>
-          <p:cNvPr id="6" name="Text 4"/>
+          <p:cNvPr id="7" name="Text 4"/>
           <p:cNvSpPr txBox="1"/>
           <p:nvPr/>
         </p:nvSpPr>
         <p:spPr>
           <a:xfrm>
-            <a:off x="1234440" y="1161288"/>
-            <a:ext cx="3108960" cy="365760"/>
+            <a:off x="4663440" y="1078992"/>
+            <a:ext cx="4023360" cy="365760"/>
           </a:xfrm>
           <a:prstGeom prst="rect">
             <a:avLst/>
@@ -13727,7 +15632,7 @@
                   <a:schemeClr val="tx2"/>
                 </a:solidFill>
               </a:rPr>
-              <a:t>スタンド看板</a:t>
+              <a:t>遠くからでも目立つ</a:t>
             </a:r>
             <a:endParaRPr lang="en-US" sz="1500" dirty="0"/>
           </a:p>
@@ -13735,14 +15640,14 @@
       </p:sp>
       <p:sp>
         <p:nvSpPr>
-          <p:cNvPr id="7" name="Text 5"/>
+          <p:cNvPr id="8" name="Text 5"/>
           <p:cNvSpPr txBox="1"/>
           <p:nvPr/>
         </p:nvSpPr>
         <p:spPr>
           <a:xfrm>
-            <a:off x="1234440" y="1527048"/>
-            <a:ext cx="3108960" cy="502920"/>
+            <a:off x="4663440" y="1463040"/>
+            <a:ext cx="4023360" cy="640080"/>
           </a:xfrm>
           <a:prstGeom prst="rect">
             <a:avLst/>
@@ -13758,214 +15663,27 @@
               <a:buNone/>
             </a:pPr>
             <a:r>
-              <a:rPr lang="en-US" sz="1200" dirty="0">
+              <a:rPr lang="en-US" sz="1300" dirty="0">
                 <a:solidFill>
                   <a:schemeClr val="tx1"/>
                 </a:solidFill>
               </a:rPr>
-              <a:t>ツリー型A型看板「ただいまワークショップ開催中」</a:t>
-            </a:r>
-            <a:endParaRPr lang="en-US" sz="1200" dirty="0"/>
-          </a:p>
-        </p:txBody>
-      </p:sp>
-      <p:sp>
-        <p:nvSpPr>
-          <p:cNvPr id="8" name="tool_1"/>
+              <a:t>サンタ＆スノーマン付きのエアーアーチを入口に設置。ワークショップ開催中がひと目で伝わる。</a:t>
+            </a:r>
+            <a:endParaRPr lang="en-US" sz="1300" dirty="0"/>
+          </a:p>
+        </p:txBody>
+      </p:sp>
+      <p:sp>
+        <p:nvSpPr>
+          <p:cNvPr id="9" name="arch_badge_1"/>
           <p:cNvSpPr/>
           <p:nvPr/>
         </p:nvSpPr>
         <p:spPr>
           <a:xfrm>
-            <a:off x="4663440" y="1051560"/>
-            <a:ext cx="4023360" cy="1051560"/>
-          </a:xfrm>
-          <a:prstGeom prst="roundRect">
-            <a:avLst>
-              <a:gd name="adj" fmla="val 6957"/>
-            </a:avLst>
-          </a:prstGeom>
-          <a:solidFill>
-            <a:schemeClr val="bg2"/>
-          </a:solidFill>
-          <a:ln w="12700">
-            <a:solidFill>
-              <a:schemeClr val="bg2"/>
-            </a:solidFill>
-            <a:prstDash val="solid"/>
-          </a:ln>
-        </p:spPr>
-      </p:sp>
-      <p:sp>
-        <p:nvSpPr>
-          <p:cNvPr id="9" name="tool_badge_1"/>
-          <p:cNvSpPr/>
-          <p:nvPr/>
-        </p:nvSpPr>
-        <p:spPr>
-          <a:xfrm>
-            <a:off x="4846320" y="1325880"/>
-            <a:ext cx="457200" cy="457200"/>
-          </a:xfrm>
-          <a:prstGeom prst="ellipse">
-            <a:avLst/>
-          </a:prstGeom>
-          <a:solidFill>
-            <a:schemeClr val="accent2"/>
-          </a:solidFill>
-          <a:ln w="12700">
-            <a:solidFill>
-              <a:schemeClr val="accent2"/>
-            </a:solidFill>
-            <a:prstDash val="solid"/>
-          </a:ln>
-        </p:spPr>
-      </p:sp>
-      <p:sp>
-        <p:nvSpPr>
-          <p:cNvPr id="10" name="Text 8"/>
-          <p:cNvSpPr txBox="1"/>
-          <p:nvPr/>
-        </p:nvSpPr>
-        <p:spPr>
-          <a:xfrm>
-            <a:off x="4846320" y="1325880"/>
-            <a:ext cx="457200" cy="457200"/>
-          </a:xfrm>
-          <a:prstGeom prst="rect">
-            <a:avLst/>
-          </a:prstGeom>
-          <a:noFill/>
-          <a:ln/>
-        </p:spPr>
-        <p:txBody>
-          <a:bodyPr wrap="square" lIns="0" tIns="0" rIns="0" bIns="0" rtlCol="0" anchor="ctr"/>
-          <a:lstStyle/>
-          <a:p>
-            <a:pPr algn="ctr" indent="0" marL="0">
-              <a:buNone/>
-            </a:pPr>
-            <a:r>
-              <a:rPr lang="en-US" sz="1300" b="1" dirty="0">
-                <a:solidFill>
-                  <a:schemeClr val="bg1"/>
-                </a:solidFill>
-              </a:rPr>
-              <a:t>B</a:t>
-            </a:r>
-            <a:endParaRPr lang="en-US" sz="1300" dirty="0"/>
-          </a:p>
-        </p:txBody>
-      </p:sp>
-      <p:sp>
-        <p:nvSpPr>
-          <p:cNvPr id="11" name="Text 9"/>
-          <p:cNvSpPr txBox="1"/>
-          <p:nvPr/>
-        </p:nvSpPr>
-        <p:spPr>
-          <a:xfrm>
-            <a:off x="5440680" y="1161288"/>
-            <a:ext cx="3108960" cy="365760"/>
-          </a:xfrm>
-          <a:prstGeom prst="rect">
-            <a:avLst/>
-          </a:prstGeom>
-          <a:noFill/>
-          <a:ln/>
-        </p:spPr>
-        <p:txBody>
-          <a:bodyPr wrap="square" lIns="635" tIns="635" rIns="635" bIns="635" rtlCol="0" anchor="t"/>
-          <a:lstStyle/>
-          <a:p>
-            <a:pPr indent="0" marL="0">
-              <a:buNone/>
-            </a:pPr>
-            <a:r>
-              <a:rPr lang="en-US" sz="1500" b="1" dirty="0">
-                <a:solidFill>
-                  <a:schemeClr val="tx2"/>
-                </a:solidFill>
-              </a:rPr>
-              <a:t>のぼり・タペストリー</a:t>
-            </a:r>
-            <a:endParaRPr lang="en-US" sz="1500" dirty="0"/>
-          </a:p>
-        </p:txBody>
-      </p:sp>
-      <p:sp>
-        <p:nvSpPr>
-          <p:cNvPr id="12" name="Text 10"/>
-          <p:cNvSpPr txBox="1"/>
-          <p:nvPr/>
-        </p:nvSpPr>
-        <p:spPr>
-          <a:xfrm>
-            <a:off x="5440680" y="1527048"/>
-            <a:ext cx="3108960" cy="502920"/>
-          </a:xfrm>
-          <a:prstGeom prst="rect">
-            <a:avLst/>
-          </a:prstGeom>
-          <a:noFill/>
-          <a:ln/>
-        </p:spPr>
-        <p:txBody>
-          <a:bodyPr wrap="square" lIns="635" tIns="635" rIns="635" bIns="635" rtlCol="0" anchor="t"/>
-          <a:lstStyle/>
-          <a:p>
-            <a:pPr indent="0" marL="0">
-              <a:buNone/>
-            </a:pPr>
-            <a:r>
-              <a:rPr lang="en-US" sz="1200" dirty="0">
-                <a:solidFill>
-                  <a:schemeClr val="tx1"/>
-                </a:solidFill>
-              </a:rPr>
-              <a:t>クリスマス柄。遠目でも開催がわかる</a:t>
-            </a:r>
-            <a:endParaRPr lang="en-US" sz="1200" dirty="0"/>
-          </a:p>
-        </p:txBody>
-      </p:sp>
-      <p:sp>
-        <p:nvSpPr>
-          <p:cNvPr id="13" name="tool_2"/>
-          <p:cNvSpPr/>
-          <p:nvPr/>
-        </p:nvSpPr>
-        <p:spPr>
-          <a:xfrm>
-            <a:off x="457200" y="2240280"/>
-            <a:ext cx="4023360" cy="1051560"/>
-          </a:xfrm>
-          <a:prstGeom prst="roundRect">
-            <a:avLst>
-              <a:gd name="adj" fmla="val 6957"/>
-            </a:avLst>
-          </a:prstGeom>
-          <a:solidFill>
-            <a:schemeClr val="bg2"/>
-          </a:solidFill>
-          <a:ln w="12700">
-            <a:solidFill>
-              <a:schemeClr val="bg2"/>
-            </a:solidFill>
-            <a:prstDash val="solid"/>
-          </a:ln>
-        </p:spPr>
-      </p:sp>
-      <p:sp>
-        <p:nvSpPr>
-          <p:cNvPr id="14" name="tool_badge_2"/>
-          <p:cNvSpPr/>
-          <p:nvPr/>
-        </p:nvSpPr>
-        <p:spPr>
-          <a:xfrm>
-            <a:off x="640080" y="2514600"/>
-            <a:ext cx="457200" cy="457200"/>
+            <a:off x="4114800" y="2194560"/>
+            <a:ext cx="411480" cy="411480"/>
           </a:xfrm>
           <a:prstGeom prst="ellipse">
             <a:avLst/>
@@ -13983,14 +15701,14 @@
       </p:sp>
       <p:sp>
         <p:nvSpPr>
-          <p:cNvPr id="15" name="Text 13"/>
+          <p:cNvPr id="10" name="Text 7"/>
           <p:cNvSpPr txBox="1"/>
           <p:nvPr/>
         </p:nvSpPr>
         <p:spPr>
           <a:xfrm>
-            <a:off x="640080" y="2514600"/>
-            <a:ext cx="457200" cy="457200"/>
+            <a:off x="4114800" y="2194560"/>
+            <a:ext cx="411480" cy="411480"/>
           </a:xfrm>
           <a:prstGeom prst="rect">
             <a:avLst/>
@@ -14011,7 +15729,7 @@
                   <a:schemeClr val="bg1"/>
                 </a:solidFill>
               </a:rPr>
-              <a:t>C</a:t>
+              <a:t>2</a:t>
             </a:r>
             <a:endParaRPr lang="en-US" sz="1300" dirty="0"/>
           </a:p>
@@ -14019,14 +15737,14 @@
       </p:sp>
       <p:sp>
         <p:nvSpPr>
-          <p:cNvPr id="16" name="Text 14"/>
+          <p:cNvPr id="11" name="Text 8"/>
           <p:cNvSpPr txBox="1"/>
           <p:nvPr/>
         </p:nvSpPr>
         <p:spPr>
           <a:xfrm>
-            <a:off x="1234440" y="2350008"/>
-            <a:ext cx="3108960" cy="365760"/>
+            <a:off x="4663440" y="2176272"/>
+            <a:ext cx="4023360" cy="365760"/>
           </a:xfrm>
           <a:prstGeom prst="rect">
             <a:avLst/>
@@ -14047,7 +15765,7 @@
                   <a:schemeClr val="tx2"/>
                 </a:solidFill>
               </a:rPr>
-              <a:t>テーブル装飾</a:t>
+              <a:t>フォトスポットに</a:t>
             </a:r>
             <a:endParaRPr lang="en-US" sz="1500" dirty="0"/>
           </a:p>
@@ -14055,14 +15773,14 @@
       </p:sp>
       <p:sp>
         <p:nvSpPr>
-          <p:cNvPr id="17" name="Text 15"/>
+          <p:cNvPr id="12" name="Text 9"/>
           <p:cNvSpPr txBox="1"/>
           <p:nvPr/>
         </p:nvSpPr>
         <p:spPr>
           <a:xfrm>
-            <a:off x="1234440" y="2715768"/>
-            <a:ext cx="3108960" cy="502920"/>
+            <a:off x="4663440" y="2560320"/>
+            <a:ext cx="4023360" cy="640080"/>
           </a:xfrm>
           <a:prstGeom prst="rect">
             <a:avLst/>
@@ -14078,214 +15796,27 @@
               <a:buNone/>
             </a:pPr>
             <a:r>
-              <a:rPr lang="en-US" sz="1200" dirty="0">
+              <a:rPr lang="en-US" sz="1300" dirty="0">
                 <a:solidFill>
                   <a:schemeClr val="tx1"/>
                 </a:solidFill>
               </a:rPr>
-              <a:t>赤緑のテーブルクロス、ミニツリー、LEDライト</a:t>
-            </a:r>
-            <a:endParaRPr lang="en-US" sz="1200" dirty="0"/>
-          </a:p>
-        </p:txBody>
-      </p:sp>
-      <p:sp>
-        <p:nvSpPr>
-          <p:cNvPr id="18" name="tool_3"/>
+              <a:t>アーチ前での記念撮影がSNS投稿のきっかけに。</a:t>
+            </a:r>
+            <a:endParaRPr lang="en-US" sz="1300" dirty="0"/>
+          </a:p>
+        </p:txBody>
+      </p:sp>
+      <p:sp>
+        <p:nvSpPr>
+          <p:cNvPr id="13" name="arch_badge_2"/>
           <p:cNvSpPr/>
           <p:nvPr/>
         </p:nvSpPr>
         <p:spPr>
           <a:xfrm>
-            <a:off x="4663440" y="2240280"/>
-            <a:ext cx="4023360" cy="1051560"/>
-          </a:xfrm>
-          <a:prstGeom prst="roundRect">
-            <a:avLst>
-              <a:gd name="adj" fmla="val 6957"/>
-            </a:avLst>
-          </a:prstGeom>
-          <a:solidFill>
-            <a:schemeClr val="bg2"/>
-          </a:solidFill>
-          <a:ln w="12700">
-            <a:solidFill>
-              <a:schemeClr val="bg2"/>
-            </a:solidFill>
-            <a:prstDash val="solid"/>
-          </a:ln>
-        </p:spPr>
-      </p:sp>
-      <p:sp>
-        <p:nvSpPr>
-          <p:cNvPr id="19" name="tool_badge_3"/>
-          <p:cNvSpPr/>
-          <p:nvPr/>
-        </p:nvSpPr>
-        <p:spPr>
-          <a:xfrm>
-            <a:off x="4846320" y="2514600"/>
-            <a:ext cx="457200" cy="457200"/>
-          </a:xfrm>
-          <a:prstGeom prst="ellipse">
-            <a:avLst/>
-          </a:prstGeom>
-          <a:solidFill>
-            <a:schemeClr val="accent2"/>
-          </a:solidFill>
-          <a:ln w="12700">
-            <a:solidFill>
-              <a:schemeClr val="accent2"/>
-            </a:solidFill>
-            <a:prstDash val="solid"/>
-          </a:ln>
-        </p:spPr>
-      </p:sp>
-      <p:sp>
-        <p:nvSpPr>
-          <p:cNvPr id="20" name="Text 18"/>
-          <p:cNvSpPr txBox="1"/>
-          <p:nvPr/>
-        </p:nvSpPr>
-        <p:spPr>
-          <a:xfrm>
-            <a:off x="4846320" y="2514600"/>
-            <a:ext cx="457200" cy="457200"/>
-          </a:xfrm>
-          <a:prstGeom prst="rect">
-            <a:avLst/>
-          </a:prstGeom>
-          <a:noFill/>
-          <a:ln/>
-        </p:spPr>
-        <p:txBody>
-          <a:bodyPr wrap="square" lIns="0" tIns="0" rIns="0" bIns="0" rtlCol="0" anchor="ctr"/>
-          <a:lstStyle/>
-          <a:p>
-            <a:pPr algn="ctr" indent="0" marL="0">
-              <a:buNone/>
-            </a:pPr>
-            <a:r>
-              <a:rPr lang="en-US" sz="1300" b="1" dirty="0">
-                <a:solidFill>
-                  <a:schemeClr val="bg1"/>
-                </a:solidFill>
-              </a:rPr>
-              <a:t>D</a:t>
-            </a:r>
-            <a:endParaRPr lang="en-US" sz="1300" dirty="0"/>
-          </a:p>
-        </p:txBody>
-      </p:sp>
-      <p:sp>
-        <p:nvSpPr>
-          <p:cNvPr id="21" name="Text 19"/>
-          <p:cNvSpPr txBox="1"/>
-          <p:nvPr/>
-        </p:nvSpPr>
-        <p:spPr>
-          <a:xfrm>
-            <a:off x="5440680" y="2350008"/>
-            <a:ext cx="3108960" cy="365760"/>
-          </a:xfrm>
-          <a:prstGeom prst="rect">
-            <a:avLst/>
-          </a:prstGeom>
-          <a:noFill/>
-          <a:ln/>
-        </p:spPr>
-        <p:txBody>
-          <a:bodyPr wrap="square" lIns="635" tIns="635" rIns="635" bIns="635" rtlCol="0" anchor="t"/>
-          <a:lstStyle/>
-          <a:p>
-            <a:pPr indent="0" marL="0">
-              <a:buNone/>
-            </a:pPr>
-            <a:r>
-              <a:rPr lang="en-US" sz="1500" b="1" dirty="0">
-                <a:solidFill>
-                  <a:schemeClr val="tx2"/>
-                </a:solidFill>
-              </a:rPr>
-              <a:t>吊り下げPOP</a:t>
-            </a:r>
-            <a:endParaRPr lang="en-US" sz="1500" dirty="0"/>
-          </a:p>
-        </p:txBody>
-      </p:sp>
-      <p:sp>
-        <p:nvSpPr>
-          <p:cNvPr id="22" name="Text 20"/>
-          <p:cNvSpPr txBox="1"/>
-          <p:nvPr/>
-        </p:nvSpPr>
-        <p:spPr>
-          <a:xfrm>
-            <a:off x="5440680" y="2715768"/>
-            <a:ext cx="3108960" cy="502920"/>
-          </a:xfrm>
-          <a:prstGeom prst="rect">
-            <a:avLst/>
-          </a:prstGeom>
-          <a:noFill/>
-          <a:ln/>
-        </p:spPr>
-        <p:txBody>
-          <a:bodyPr wrap="square" lIns="635" tIns="635" rIns="635" bIns="635" rtlCol="0" anchor="t"/>
-          <a:lstStyle/>
-          <a:p>
-            <a:pPr indent="0" marL="0">
-              <a:buNone/>
-            </a:pPr>
-            <a:r>
-              <a:rPr lang="en-US" sz="1200" dirty="0">
-                <a:solidFill>
-                  <a:schemeClr val="tx1"/>
-                </a:solidFill>
-              </a:rPr>
-              <a:t>雪の結晶・オーナメント型で天井から演出</a:t>
-            </a:r>
-            <a:endParaRPr lang="en-US" sz="1200" dirty="0"/>
-          </a:p>
-        </p:txBody>
-      </p:sp>
-      <p:sp>
-        <p:nvSpPr>
-          <p:cNvPr id="23" name="tool_4"/>
-          <p:cNvSpPr/>
-          <p:nvPr/>
-        </p:nvSpPr>
-        <p:spPr>
-          <a:xfrm>
-            <a:off x="457200" y="3429000"/>
-            <a:ext cx="4023360" cy="1051560"/>
-          </a:xfrm>
-          <a:prstGeom prst="roundRect">
-            <a:avLst>
-              <a:gd name="adj" fmla="val 6957"/>
-            </a:avLst>
-          </a:prstGeom>
-          <a:solidFill>
-            <a:schemeClr val="bg2"/>
-          </a:solidFill>
-          <a:ln w="12700">
-            <a:solidFill>
-              <a:schemeClr val="bg2"/>
-            </a:solidFill>
-            <a:prstDash val="solid"/>
-          </a:ln>
-        </p:spPr>
-      </p:sp>
-      <p:sp>
-        <p:nvSpPr>
-          <p:cNvPr id="24" name="tool_badge_4"/>
-          <p:cNvSpPr/>
-          <p:nvPr/>
-        </p:nvSpPr>
-        <p:spPr>
-          <a:xfrm>
-            <a:off x="640080" y="3703320"/>
-            <a:ext cx="457200" cy="457200"/>
+            <a:off x="4114800" y="3291840"/>
+            <a:ext cx="411480" cy="411480"/>
           </a:xfrm>
           <a:prstGeom prst="ellipse">
             <a:avLst/>
@@ -14303,14 +15834,14 @@
       </p:sp>
       <p:sp>
         <p:nvSpPr>
-          <p:cNvPr id="25" name="Text 23"/>
+          <p:cNvPr id="14" name="Text 11"/>
           <p:cNvSpPr txBox="1"/>
           <p:nvPr/>
         </p:nvSpPr>
         <p:spPr>
           <a:xfrm>
-            <a:off x="640080" y="3703320"/>
-            <a:ext cx="457200" cy="457200"/>
+            <a:off x="4114800" y="3291840"/>
+            <a:ext cx="411480" cy="411480"/>
           </a:xfrm>
           <a:prstGeom prst="rect">
             <a:avLst/>
@@ -14331,7 +15862,7 @@
                   <a:schemeClr val="bg1"/>
                 </a:solidFill>
               </a:rPr>
-              <a:t>E</a:t>
+              <a:t>3</a:t>
             </a:r>
             <a:endParaRPr lang="en-US" sz="1300" dirty="0"/>
           </a:p>
@@ -14339,14 +15870,14 @@
       </p:sp>
       <p:sp>
         <p:nvSpPr>
-          <p:cNvPr id="26" name="Text 24"/>
+          <p:cNvPr id="15" name="Text 12"/>
           <p:cNvSpPr txBox="1"/>
           <p:nvPr/>
         </p:nvSpPr>
         <p:spPr>
           <a:xfrm>
-            <a:off x="1234440" y="3538728"/>
-            <a:ext cx="3108960" cy="365760"/>
+            <a:off x="4663440" y="3273552"/>
+            <a:ext cx="4023360" cy="365760"/>
           </a:xfrm>
           <a:prstGeom prst="rect">
             <a:avLst/>
@@ -14367,7 +15898,7 @@
                   <a:schemeClr val="tx2"/>
                 </a:solidFill>
               </a:rPr>
-              <a:t>作品ディスプレイ</a:t>
+              <a:t>期間中レンタル</a:t>
             </a:r>
             <a:endParaRPr lang="en-US" sz="1500" dirty="0"/>
           </a:p>
@@ -14375,14 +15906,14 @@
       </p:sp>
       <p:sp>
         <p:nvSpPr>
-          <p:cNvPr id="27" name="Text 25"/>
+          <p:cNvPr id="16" name="Text 13"/>
           <p:cNvSpPr txBox="1"/>
           <p:nvPr/>
         </p:nvSpPr>
         <p:spPr>
           <a:xfrm>
-            <a:off x="1234440" y="3904488"/>
-            <a:ext cx="3108960" cy="502920"/>
+            <a:off x="4663440" y="3657600"/>
+            <a:ext cx="4023360" cy="640080"/>
           </a:xfrm>
           <a:prstGeom prst="rect">
             <a:avLst/>
@@ -14398,174 +15929,14 @@
               <a:buNone/>
             </a:pPr>
             <a:r>
-              <a:rPr lang="en-US" sz="1200" dirty="0">
+              <a:rPr lang="en-US" sz="1300" dirty="0">
                 <a:solidFill>
                   <a:schemeClr val="tx1"/>
                 </a:solidFill>
               </a:rPr>
-              <a:t>完成見本を展示し、通行客に“つくれるもの”を見せる</a:t>
-            </a:r>
-            <a:endParaRPr lang="en-US" sz="1200" dirty="0"/>
-          </a:p>
-        </p:txBody>
-      </p:sp>
-      <p:sp>
-        <p:nvSpPr>
-          <p:cNvPr id="28" name="tool_5"/>
-          <p:cNvSpPr/>
-          <p:nvPr/>
-        </p:nvSpPr>
-        <p:spPr>
-          <a:xfrm>
-            <a:off x="4663440" y="3429000"/>
-            <a:ext cx="4023360" cy="1051560"/>
-          </a:xfrm>
-          <a:prstGeom prst="roundRect">
-            <a:avLst>
-              <a:gd name="adj" fmla="val 6957"/>
-            </a:avLst>
-          </a:prstGeom>
-          <a:solidFill>
-            <a:schemeClr val="bg2"/>
-          </a:solidFill>
-          <a:ln w="12700">
-            <a:solidFill>
-              <a:schemeClr val="bg2"/>
-            </a:solidFill>
-            <a:prstDash val="solid"/>
-          </a:ln>
-        </p:spPr>
-      </p:sp>
-      <p:sp>
-        <p:nvSpPr>
-          <p:cNvPr id="29" name="tool_badge_5"/>
-          <p:cNvSpPr/>
-          <p:nvPr/>
-        </p:nvSpPr>
-        <p:spPr>
-          <a:xfrm>
-            <a:off x="4846320" y="3703320"/>
-            <a:ext cx="457200" cy="457200"/>
-          </a:xfrm>
-          <a:prstGeom prst="ellipse">
-            <a:avLst/>
-          </a:prstGeom>
-          <a:solidFill>
-            <a:schemeClr val="accent2"/>
-          </a:solidFill>
-          <a:ln w="12700">
-            <a:solidFill>
-              <a:schemeClr val="accent2"/>
-            </a:solidFill>
-            <a:prstDash val="solid"/>
-          </a:ln>
-        </p:spPr>
-      </p:sp>
-      <p:sp>
-        <p:nvSpPr>
-          <p:cNvPr id="30" name="Text 28"/>
-          <p:cNvSpPr txBox="1"/>
-          <p:nvPr/>
-        </p:nvSpPr>
-        <p:spPr>
-          <a:xfrm>
-            <a:off x="4846320" y="3703320"/>
-            <a:ext cx="457200" cy="457200"/>
-          </a:xfrm>
-          <a:prstGeom prst="rect">
-            <a:avLst/>
-          </a:prstGeom>
-          <a:noFill/>
-          <a:ln/>
-        </p:spPr>
-        <p:txBody>
-          <a:bodyPr wrap="square" lIns="0" tIns="0" rIns="0" bIns="0" rtlCol="0" anchor="ctr"/>
-          <a:lstStyle/>
-          <a:p>
-            <a:pPr algn="ctr" indent="0" marL="0">
-              <a:buNone/>
-            </a:pPr>
-            <a:r>
-              <a:rPr lang="en-US" sz="1300" b="1" dirty="0">
-                <a:solidFill>
-                  <a:schemeClr val="bg1"/>
-                </a:solidFill>
-              </a:rPr>
-              <a:t>F</a:t>
+              <a:t>4週の期間中は返却不要。期間終了後に回収。</a:t>
             </a:r>
             <a:endParaRPr lang="en-US" sz="1300" dirty="0"/>
-          </a:p>
-        </p:txBody>
-      </p:sp>
-      <p:sp>
-        <p:nvSpPr>
-          <p:cNvPr id="31" name="Text 29"/>
-          <p:cNvSpPr txBox="1"/>
-          <p:nvPr/>
-        </p:nvSpPr>
-        <p:spPr>
-          <a:xfrm>
-            <a:off x="5440680" y="3538728"/>
-            <a:ext cx="3108960" cy="365760"/>
-          </a:xfrm>
-          <a:prstGeom prst="rect">
-            <a:avLst/>
-          </a:prstGeom>
-          <a:noFill/>
-          <a:ln/>
-        </p:spPr>
-        <p:txBody>
-          <a:bodyPr wrap="square" lIns="635" tIns="635" rIns="635" bIns="635" rtlCol="0" anchor="t"/>
-          <a:lstStyle/>
-          <a:p>
-            <a:pPr indent="0" marL="0">
-              <a:buNone/>
-            </a:pPr>
-            <a:r>
-              <a:rPr lang="en-US" sz="1500" b="1" dirty="0">
-                <a:solidFill>
-                  <a:schemeClr val="tx2"/>
-                </a:solidFill>
-              </a:rPr>
-              <a:t>週替わり告知カード</a:t>
-            </a:r>
-            <a:endParaRPr lang="en-US" sz="1500" dirty="0"/>
-          </a:p>
-        </p:txBody>
-      </p:sp>
-      <p:sp>
-        <p:nvSpPr>
-          <p:cNvPr id="32" name="Text 30"/>
-          <p:cNvSpPr txBox="1"/>
-          <p:nvPr/>
-        </p:nvSpPr>
-        <p:spPr>
-          <a:xfrm>
-            <a:off x="5440680" y="3904488"/>
-            <a:ext cx="3108960" cy="502920"/>
-          </a:xfrm>
-          <a:prstGeom prst="rect">
-            <a:avLst/>
-          </a:prstGeom>
-          <a:noFill/>
-          <a:ln/>
-        </p:spPr>
-        <p:txBody>
-          <a:bodyPr wrap="square" lIns="635" tIns="635" rIns="635" bIns="635" rtlCol="0" anchor="t"/>
-          <a:lstStyle/>
-          <a:p>
-            <a:pPr indent="0" marL="0">
-              <a:buNone/>
-            </a:pPr>
-            <a:r>
-              <a:rPr lang="en-US" sz="1200" dirty="0">
-                <a:solidFill>
-                  <a:schemeClr val="tx1"/>
-                </a:solidFill>
-              </a:rPr>
-              <a:t>「来週はこれがつくれる！」で再来店を促す</a:t>
-            </a:r>
-            <a:endParaRPr lang="en-US" sz="1200" dirty="0"/>
           </a:p>
         </p:txBody>
       </p:sp>
@@ -14623,47 +15994,47 @@
 </file>
 
 <file path=ppt/theme/theme1.xml><?xml version="1.0" encoding="utf-8"?>
-<a:theme xmlns:a="http://schemas.openxmlformats.org/drawingml/2006/main" name="NextVision Christmas">
+<a:theme xmlns:a="http://schemas.openxmlformats.org/drawingml/2006/main" name="Docomo Light Red">
   <a:themeElements>
-    <a:clrScheme name="NextVision Christmas">
+    <a:clrScheme name="Docomo Light Red">
       <a:dk1>
-        <a:srgbClr val="222222"/>
+        <a:srgbClr val="333333"/>
       </a:dk1>
       <a:lt1>
         <a:srgbClr val="FFFFFF"/>
       </a:lt1>
       <a:dk2>
-        <a:srgbClr val="1E4D2B"/>
+        <a:srgbClr val="B8283A"/>
       </a:dk2>
       <a:lt2>
-        <a:srgbClr val="EEF3EF"/>
+        <a:srgbClr val="FDEFF1"/>
       </a:lt2>
       <a:accent1>
-        <a:srgbClr val="B3202E"/>
+        <a:srgbClr val="E0485A"/>
       </a:accent1>
       <a:accent2>
-        <a:srgbClr val="1E4D2B"/>
+        <a:srgbClr val="2E7D4F"/>
       </a:accent2>
       <a:accent3>
-        <a:srgbClr val="C9A227"/>
+        <a:srgbClr val="D9A21B"/>
       </a:accent3>
       <a:accent4>
-        <a:srgbClr val="6B8F71"/>
+        <a:srgbClr val="8A6A6E"/>
       </a:accent4>
       <a:accent5>
-        <a:srgbClr val="DCE7DF"/>
+        <a:srgbClr val="FBE3E6"/>
       </a:accent5>
       <a:accent6>
-        <a:srgbClr val="7A1420"/>
+        <a:srgbClr val="8E1F2C"/>
       </a:accent6>
       <a:hlink>
-        <a:srgbClr val="B3202E"/>
+        <a:srgbClr val="B8283A"/>
       </a:hlink>
       <a:folHlink>
-        <a:srgbClr val="7A1420"/>
+        <a:srgbClr val="8E1F2C"/>
       </a:folHlink>
     </a:clrScheme>
-    <a:fontScheme name="NextVision Christmas">
+    <a:fontScheme name="Docomo Light Red">
       <a:majorFont>
         <a:latin typeface="メイリオ"/>
         <a:ea typeface=""/>

--- a/docs/proposals/2026-12_docomo_christmas-ws/企画書_NTTドコモ_クリスマスWS.pptx
+++ b/docs/proposals/2026-12_docomo_christmas-ws/企画書_NTTドコモ_クリスマスWS.pptx
@@ -20,9 +20,10 @@
     <p:sldId id="268" r:id="rId14"/>
     <p:sldId id="269" r:id="rId15"/>
     <p:sldId id="270" r:id="rId16"/>
+    <p:sldId id="271" r:id="rId17"/>
   </p:sldIdLst>
   <p:notesMasterIdLst>
-    <p:notesMasterId r:id="rId17"/>
+    <p:notesMasterId r:id="rId18"/>
   </p:notesMasterIdLst>
   <p:sldSz cx="9144000" cy="5143500"/>
   <p:notesSz cx="5143500" cy="9144000"/>
@@ -121,39 +122,40 @@
   <p:extLst>
     <p:ext uri="{521415D9-36F7-43E2-AB2F-B90AF26B5E84}">
       <p14:sectionLst xmlns:p14="http://schemas.microsoft.com/office/powerpoint/2010/main">
-        <p14:section name="表紙" id="{da6624f7-f545-6171-b07a-b83446d9004d}">
+        <p14:section name="表紙" id="{f93e01e8-1bb2-064e-1e6a-3282b96a3a0e}">
           <p14:sldIdLst>
             <p14:sldId id="256"/>
           </p14:sldIdLst>
         </p14:section>
-        <p14:section name="ご提案の概要" id="{35b16945-b03d-0010-b072-0a591e452b31}">
+        <p14:section name="ご提案の概要" id="{1ce7f68b-bd97-be12-940e-e3fc153e4684}">
           <p14:sldIdLst>
             <p14:sldId id="257"/>
             <p14:sldId id="258"/>
             <p14:sldId id="259"/>
           </p14:sldIdLst>
         </p14:section>
-        <p14:section name="ワークショップ" id="{e905b895-c3db-11dd-f646-a88e0bc356c6}">
+        <p14:section name="ワークショップ" id="{3759879a-f9b7-1f19-8da7-70730d5c7ba0}">
           <p14:sldIdLst>
             <p14:sldId id="260"/>
             <p14:sldId id="261"/>
             <p14:sldId id="262"/>
             <p14:sldId id="263"/>
+            <p14:sldId id="264"/>
           </p14:sldIdLst>
         </p14:section>
-        <p14:section name="店頭演出" id="{b3964270-7385-24b3-2d77-00ebdfcc29bc}">
+        <p14:section name="店頭演出" id="{682051b3-3d80-7a2a-39a1-c63b66754d78}">
           <p14:sldIdLst>
-            <p14:sldId id="264"/>
             <p14:sldId id="265"/>
             <p14:sldId id="266"/>
             <p14:sldId id="267"/>
+            <p14:sldId id="268"/>
           </p14:sldIdLst>
         </p14:section>
-        <p14:section name="運用・お見積" id="{4eefe3a4-e2bd-161d-24bd-770bb740c52e}">
+        <p14:section name="運用・お見積" id="{3a3118b5-26d6-3a0d-afbd-5d6c8bae61e9}">
           <p14:sldIdLst>
-            <p14:sldId id="268"/>
             <p14:sldId id="269"/>
             <p14:sldId id="270"/>
+            <p14:sldId id="271"/>
           </p14:sldIdLst>
         </p14:section>
       </p14:sectionLst>
@@ -1112,6 +1114,94 @@
             <a:fld id="{F7021451-1387-4CA6-816F-3879F97B5CBC}" type="slidenum">
               <a:rPr lang="en-US"/>
               <a:t>15</a:t>
+            </a:fld>
+            <a:endParaRPr lang="en-US"/>
+          </a:p>
+        </p:txBody>
+      </p:sp>
+    </p:spTree>
+    <p:extLst>
+      <p:ext uri="{BB962C8B-B14F-4D97-AF65-F5344CB8AC3E}">
+        <p14:creationId xmlns:p14="http://schemas.microsoft.com/office/powerpoint/2010/main" val="1024086991"/>
+      </p:ext>
+    </p:extLst>
+  </p:cSld>
+  <p:clrMapOvr>
+    <a:masterClrMapping/>
+  </p:clrMapOvr>
+</p:notes>
+</file>
+
+<file path=ppt/notesSlides/notesSlide16.xml><?xml version="1.0" encoding="utf-8"?>
+<p:notes xmlns:a="http://schemas.openxmlformats.org/drawingml/2006/main" xmlns:r="http://schemas.openxmlformats.org/officeDocument/2006/relationships" xmlns:p="http://schemas.openxmlformats.org/presentationml/2006/main">
+  <p:cSld>
+    <p:spTree>
+      <p:nvGrpSpPr>
+        <p:cNvPr id="1" name=""/>
+        <p:cNvGrpSpPr/>
+        <p:nvPr/>
+      </p:nvGrpSpPr>
+      <p:grpSpPr>
+        <a:xfrm>
+          <a:off x="0" y="0"/>
+          <a:ext cx="0" cy="0"/>
+          <a:chOff x="0" y="0"/>
+          <a:chExt cx="0" cy="0"/>
+        </a:xfrm>
+      </p:grpSpPr>
+      <p:sp>
+        <p:nvSpPr>
+          <p:cNvPr id="2" name="Slide Image Placeholder 1"/>
+          <p:cNvSpPr>
+            <a:spLocks noGrp="1" noRot="1" noChangeAspect="1"/>
+          </p:cNvSpPr>
+          <p:nvPr>
+            <p:ph type="sldImg"/>
+          </p:nvPr>
+        </p:nvSpPr>
+        <p:spPr/>
+      </p:sp>
+      <p:sp>
+        <p:nvSpPr>
+          <p:cNvPr id="3" name="Notes Placeholder 2"/>
+          <p:cNvSpPr>
+            <a:spLocks noGrp="1"/>
+          </p:cNvSpPr>
+          <p:nvPr>
+            <p:ph type="body" idx="1"/>
+          </p:nvPr>
+        </p:nvSpPr>
+        <p:spPr/>
+        <p:txBody>
+          <a:bodyPr/>
+          <a:lstStyle/>
+          <a:p>
+            <a:r>
+              <a:rPr lang="en-US" dirty="0"/>
+              <a:t/>
+            </a:r>
+            <a:endParaRPr lang="en-US" dirty="0"/>
+          </a:p>
+        </p:txBody>
+      </p:sp>
+      <p:sp>
+        <p:nvSpPr>
+          <p:cNvPr id="4" name="Slide Number Placeholder 3"/>
+          <p:cNvSpPr>
+            <a:spLocks noGrp="1"/>
+          </p:cNvSpPr>
+          <p:nvPr>
+            <p:ph type="sldNum" sz="quarter" idx="10"/>
+          </p:nvPr>
+        </p:nvSpPr>
+        <p:spPr/>
+        <p:txBody>
+          <a:bodyPr/>
+          <a:lstStyle/>
+          <a:p>
+            <a:fld id="{F7021451-1387-4CA6-816F-3879F97B5CBC}" type="slidenum">
+              <a:rPr lang="en-US"/>
+              <a:t>16</a:t>
             </a:fld>
             <a:endParaRPr lang="en-US"/>
           </a:p>
@@ -2776,49 +2866,142 @@
                   <a:schemeClr val="tx2"/>
                 </a:solidFill>
               </a:rPr>
-              <a:t>ワークショップ開催中ツール（案）</a:t>
+              <a:t>クリスマスアーチ（開催中ツールの主役）</a:t>
             </a:r>
             <a:endParaRPr lang="en-US" sz="2400" dirty="0"/>
           </a:p>
         </p:txBody>
       </p:sp>
-      <p:sp>
-        <p:nvSpPr>
-          <p:cNvPr id="3" name="tool_0"/>
+      <p:pic>
+        <p:nvPicPr>
+          <p:cNvPr id="3" name="img_arch" descr="店頭に設置したクリスマスアーチのイメージ">    </p:cNvPr>
+          <p:cNvPicPr>
+            <a:picLocks noChangeAspect="1"/>
+          </p:cNvPicPr>
+          <p:nvPr/>
+        </p:nvPicPr>
+        <p:blipFill>
+          <a:blip r:embed="rId1"/>
+          <a:stretch>
+            <a:fillRect/>
+          </a:stretch>
+        </p:blipFill>
+        <p:spPr>
+          <a:xfrm>
+            <a:off x="457200" y="1005840"/>
+            <a:ext cx="3429000" cy="3429000"/>
+          </a:xfrm>
+          <a:prstGeom prst="rect">
+            <a:avLst/>
+          </a:prstGeom>
+        </p:spPr>
+      </p:pic>
+      <p:sp>
+        <p:nvSpPr>
+          <p:cNvPr id="4" name="Text 1"/>
+          <p:cNvSpPr txBox="1"/>
+          <p:nvPr/>
+        </p:nvSpPr>
+        <p:spPr>
+          <a:xfrm>
+            <a:off x="457200" y="4462272"/>
+            <a:ext cx="3429000" cy="228600"/>
+          </a:xfrm>
+          <a:prstGeom prst="rect">
+            <a:avLst/>
+          </a:prstGeom>
+          <a:noFill/>
+          <a:ln/>
+        </p:spPr>
+        <p:txBody>
+          <a:bodyPr wrap="square" lIns="635" tIns="635" rIns="635" bIns="635" rtlCol="0" anchor="t"/>
+          <a:lstStyle/>
+          <a:p>
+            <a:pPr indent="0" marL="0">
+              <a:buNone/>
+            </a:pPr>
+            <a:r>
+              <a:rPr lang="en-US" sz="1000" dirty="0">
+                <a:solidFill>
+                  <a:schemeClr val="accent4"/>
+                </a:solidFill>
+              </a:rPr>
+              <a:t>設置イメージ（AI生成）</a:t>
+            </a:r>
+            <a:endParaRPr lang="en-US" sz="1000" dirty="0"/>
+          </a:p>
+        </p:txBody>
+      </p:sp>
+      <p:pic>
+        <p:nvPicPr>
+          <p:cNvPr id="5" name="img_arch_ref" descr="アーチ参考商品">    </p:cNvPr>
+          <p:cNvPicPr>
+            <a:picLocks noChangeAspect="1"/>
+          </p:cNvPicPr>
+          <p:nvPr/>
+        </p:nvPicPr>
+        <p:blipFill>
+          <a:blip r:embed="rId2"/>
+          <a:stretch>
+            <a:fillRect/>
+          </a:stretch>
+        </p:blipFill>
+        <p:spPr>
+          <a:xfrm>
+            <a:off x="7543800" y="3429000"/>
+            <a:ext cx="1143000" cy="1133856"/>
+          </a:xfrm>
+          <a:prstGeom prst="rect">
+            <a:avLst/>
+          </a:prstGeom>
+        </p:spPr>
+      </p:pic>
+      <p:sp>
+        <p:nvSpPr>
+          <p:cNvPr id="6" name="Text 2"/>
+          <p:cNvSpPr txBox="1"/>
+          <p:nvPr/>
+        </p:nvSpPr>
+        <p:spPr>
+          <a:xfrm>
+            <a:off x="6675120" y="4297680"/>
+            <a:ext cx="822960" cy="274320"/>
+          </a:xfrm>
+          <a:prstGeom prst="rect">
+            <a:avLst/>
+          </a:prstGeom>
+          <a:noFill/>
+          <a:ln/>
+        </p:spPr>
+        <p:txBody>
+          <a:bodyPr wrap="square" lIns="635" tIns="635" rIns="635" bIns="635" rtlCol="0" anchor="t"/>
+          <a:lstStyle/>
+          <a:p>
+            <a:pPr algn="r" indent="0" marL="0">
+              <a:buNone/>
+            </a:pPr>
+            <a:r>
+              <a:rPr lang="en-US" sz="1000" dirty="0">
+                <a:solidFill>
+                  <a:schemeClr val="accent4"/>
+                </a:solidFill>
+              </a:rPr>
+              <a:t>参考商品</a:t>
+            </a:r>
+            <a:endParaRPr lang="en-US" sz="1000" dirty="0"/>
+          </a:p>
+        </p:txBody>
+      </p:sp>
+      <p:sp>
+        <p:nvSpPr>
+          <p:cNvPr id="7" name="arch_badge_0"/>
           <p:cNvSpPr/>
           <p:nvPr/>
         </p:nvSpPr>
         <p:spPr>
           <a:xfrm>
-            <a:off x="457200" y="1051560"/>
-            <a:ext cx="4023360" cy="1051560"/>
-          </a:xfrm>
-          <a:prstGeom prst="roundRect">
-            <a:avLst>
-              <a:gd name="adj" fmla="val 6957"/>
-            </a:avLst>
-          </a:prstGeom>
-          <a:solidFill>
-            <a:schemeClr val="bg2"/>
-          </a:solidFill>
-          <a:ln w="12700">
-            <a:solidFill>
-              <a:schemeClr val="bg2"/>
-            </a:solidFill>
-            <a:prstDash val="solid"/>
-          </a:ln>
-        </p:spPr>
-      </p:sp>
-      <p:sp>
-        <p:nvSpPr>
-          <p:cNvPr id="4" name="tool_badge_0"/>
-          <p:cNvSpPr/>
-          <p:nvPr/>
-        </p:nvSpPr>
-        <p:spPr>
-          <a:xfrm>
-            <a:off x="640080" y="1325880"/>
-            <a:ext cx="457200" cy="457200"/>
+            <a:off x="4206240" y="1051560"/>
+            <a:ext cx="384048" cy="384048"/>
           </a:xfrm>
           <a:prstGeom prst="ellipse">
             <a:avLst/>
@@ -2836,14 +3019,14 @@
       </p:sp>
       <p:sp>
         <p:nvSpPr>
-          <p:cNvPr id="5" name="Text 3"/>
+          <p:cNvPr id="8" name="Text 4"/>
           <p:cNvSpPr txBox="1"/>
           <p:nvPr/>
         </p:nvSpPr>
         <p:spPr>
           <a:xfrm>
-            <a:off x="640080" y="1325880"/>
-            <a:ext cx="457200" cy="457200"/>
+            <a:off x="4206240" y="1051560"/>
+            <a:ext cx="384048" cy="384048"/>
           </a:xfrm>
           <a:prstGeom prst="rect">
             <a:avLst/>
@@ -2864,7 +3047,7 @@
                   <a:schemeClr val="bg1"/>
                 </a:solidFill>
               </a:rPr>
-              <a:t>A</a:t>
+              <a:t>1</a:t>
             </a:r>
             <a:endParaRPr lang="en-US" sz="1300" dirty="0"/>
           </a:p>
@@ -2872,14 +3055,14 @@
       </p:sp>
       <p:sp>
         <p:nvSpPr>
-          <p:cNvPr id="6" name="Text 4"/>
+          <p:cNvPr id="9" name="Text 5"/>
           <p:cNvSpPr txBox="1"/>
           <p:nvPr/>
         </p:nvSpPr>
         <p:spPr>
           <a:xfrm>
-            <a:off x="1234440" y="1161288"/>
-            <a:ext cx="3108960" cy="365760"/>
+            <a:off x="4709160" y="1024128"/>
+            <a:ext cx="3977640" cy="320040"/>
           </a:xfrm>
           <a:prstGeom prst="rect">
             <a:avLst/>
@@ -2895,27 +3078,27 @@
               <a:buNone/>
             </a:pPr>
             <a:r>
-              <a:rPr lang="en-US" sz="1500" b="1" dirty="0">
+              <a:rPr lang="en-US" sz="1400" b="1" dirty="0">
                 <a:solidFill>
                   <a:schemeClr val="tx2"/>
                 </a:solidFill>
               </a:rPr>
-              <a:t>スタンド看板</a:t>
-            </a:r>
-            <a:endParaRPr lang="en-US" sz="1500" dirty="0"/>
-          </a:p>
-        </p:txBody>
-      </p:sp>
-      <p:sp>
-        <p:nvSpPr>
-          <p:cNvPr id="7" name="Text 5"/>
+              <a:t>遠くからでも目立つ</a:t>
+            </a:r>
+            <a:endParaRPr lang="en-US" sz="1400" dirty="0"/>
+          </a:p>
+        </p:txBody>
+      </p:sp>
+      <p:sp>
+        <p:nvSpPr>
+          <p:cNvPr id="10" name="Text 6"/>
           <p:cNvSpPr txBox="1"/>
           <p:nvPr/>
         </p:nvSpPr>
         <p:spPr>
           <a:xfrm>
-            <a:off x="1234440" y="1527048"/>
-            <a:ext cx="3108960" cy="502920"/>
+            <a:off x="4709160" y="1344168"/>
+            <a:ext cx="3977640" cy="457200"/>
           </a:xfrm>
           <a:prstGeom prst="rect">
             <a:avLst/>
@@ -2936,7 +3119,7 @@
                   <a:schemeClr val="tx1"/>
                 </a:solidFill>
               </a:rPr>
-              <a:t>ツリー型A型看板「ただいまワークショップ開催中」</a:t>
+              <a:t>サンタ＆スノーマン付きのエアーアーチを入口に設置。開催中がひと目で伝わる。</a:t>
             </a:r>
             <a:endParaRPr lang="en-US" sz="1200" dirty="0"/>
           </a:p>
@@ -2944,201 +3127,14 @@
       </p:sp>
       <p:sp>
         <p:nvSpPr>
-          <p:cNvPr id="8" name="tool_1"/>
+          <p:cNvPr id="11" name="arch_badge_1"/>
           <p:cNvSpPr/>
           <p:nvPr/>
         </p:nvSpPr>
         <p:spPr>
           <a:xfrm>
-            <a:off x="4663440" y="1051560"/>
-            <a:ext cx="4023360" cy="1051560"/>
-          </a:xfrm>
-          <a:prstGeom prst="roundRect">
-            <a:avLst>
-              <a:gd name="adj" fmla="val 6957"/>
-            </a:avLst>
-          </a:prstGeom>
-          <a:solidFill>
-            <a:schemeClr val="bg2"/>
-          </a:solidFill>
-          <a:ln w="12700">
-            <a:solidFill>
-              <a:schemeClr val="bg2"/>
-            </a:solidFill>
-            <a:prstDash val="solid"/>
-          </a:ln>
-        </p:spPr>
-      </p:sp>
-      <p:sp>
-        <p:nvSpPr>
-          <p:cNvPr id="9" name="tool_badge_1"/>
-          <p:cNvSpPr/>
-          <p:nvPr/>
-        </p:nvSpPr>
-        <p:spPr>
-          <a:xfrm>
-            <a:off x="4846320" y="1325880"/>
-            <a:ext cx="457200" cy="457200"/>
-          </a:xfrm>
-          <a:prstGeom prst="ellipse">
-            <a:avLst/>
-          </a:prstGeom>
-          <a:solidFill>
-            <a:schemeClr val="tx2"/>
-          </a:solidFill>
-          <a:ln w="12700">
-            <a:solidFill>
-              <a:schemeClr val="tx2"/>
-            </a:solidFill>
-            <a:prstDash val="solid"/>
-          </a:ln>
-        </p:spPr>
-      </p:sp>
-      <p:sp>
-        <p:nvSpPr>
-          <p:cNvPr id="10" name="Text 8"/>
-          <p:cNvSpPr txBox="1"/>
-          <p:nvPr/>
-        </p:nvSpPr>
-        <p:spPr>
-          <a:xfrm>
-            <a:off x="4846320" y="1325880"/>
-            <a:ext cx="457200" cy="457200"/>
-          </a:xfrm>
-          <a:prstGeom prst="rect">
-            <a:avLst/>
-          </a:prstGeom>
-          <a:noFill/>
-          <a:ln/>
-        </p:spPr>
-        <p:txBody>
-          <a:bodyPr wrap="square" lIns="0" tIns="0" rIns="0" bIns="0" rtlCol="0" anchor="ctr"/>
-          <a:lstStyle/>
-          <a:p>
-            <a:pPr algn="ctr" indent="0" marL="0">
-              <a:buNone/>
-            </a:pPr>
-            <a:r>
-              <a:rPr lang="en-US" sz="1300" b="1" dirty="0">
-                <a:solidFill>
-                  <a:schemeClr val="bg1"/>
-                </a:solidFill>
-              </a:rPr>
-              <a:t>B</a:t>
-            </a:r>
-            <a:endParaRPr lang="en-US" sz="1300" dirty="0"/>
-          </a:p>
-        </p:txBody>
-      </p:sp>
-      <p:sp>
-        <p:nvSpPr>
-          <p:cNvPr id="11" name="Text 9"/>
-          <p:cNvSpPr txBox="1"/>
-          <p:nvPr/>
-        </p:nvSpPr>
-        <p:spPr>
-          <a:xfrm>
-            <a:off x="5440680" y="1161288"/>
-            <a:ext cx="3108960" cy="365760"/>
-          </a:xfrm>
-          <a:prstGeom prst="rect">
-            <a:avLst/>
-          </a:prstGeom>
-          <a:noFill/>
-          <a:ln/>
-        </p:spPr>
-        <p:txBody>
-          <a:bodyPr wrap="square" lIns="635" tIns="635" rIns="635" bIns="635" rtlCol="0" anchor="t"/>
-          <a:lstStyle/>
-          <a:p>
-            <a:pPr indent="0" marL="0">
-              <a:buNone/>
-            </a:pPr>
-            <a:r>
-              <a:rPr lang="en-US" sz="1500" b="1" dirty="0">
-                <a:solidFill>
-                  <a:schemeClr val="tx2"/>
-                </a:solidFill>
-              </a:rPr>
-              <a:t>のぼり・タペストリー</a:t>
-            </a:r>
-            <a:endParaRPr lang="en-US" sz="1500" dirty="0"/>
-          </a:p>
-        </p:txBody>
-      </p:sp>
-      <p:sp>
-        <p:nvSpPr>
-          <p:cNvPr id="12" name="Text 10"/>
-          <p:cNvSpPr txBox="1"/>
-          <p:nvPr/>
-        </p:nvSpPr>
-        <p:spPr>
-          <a:xfrm>
-            <a:off x="5440680" y="1527048"/>
-            <a:ext cx="3108960" cy="502920"/>
-          </a:xfrm>
-          <a:prstGeom prst="rect">
-            <a:avLst/>
-          </a:prstGeom>
-          <a:noFill/>
-          <a:ln/>
-        </p:spPr>
-        <p:txBody>
-          <a:bodyPr wrap="square" lIns="635" tIns="635" rIns="635" bIns="635" rtlCol="0" anchor="t"/>
-          <a:lstStyle/>
-          <a:p>
-            <a:pPr indent="0" marL="0">
-              <a:buNone/>
-            </a:pPr>
-            <a:r>
-              <a:rPr lang="en-US" sz="1200" dirty="0">
-                <a:solidFill>
-                  <a:schemeClr val="tx1"/>
-                </a:solidFill>
-              </a:rPr>
-              <a:t>クリスマス柄。遠目でも開催がわかる</a:t>
-            </a:r>
-            <a:endParaRPr lang="en-US" sz="1200" dirty="0"/>
-          </a:p>
-        </p:txBody>
-      </p:sp>
-      <p:sp>
-        <p:nvSpPr>
-          <p:cNvPr id="13" name="tool_2"/>
-          <p:cNvSpPr/>
-          <p:nvPr/>
-        </p:nvSpPr>
-        <p:spPr>
-          <a:xfrm>
-            <a:off x="457200" y="2240280"/>
-            <a:ext cx="4023360" cy="1051560"/>
-          </a:xfrm>
-          <a:prstGeom prst="roundRect">
-            <a:avLst>
-              <a:gd name="adj" fmla="val 6957"/>
-            </a:avLst>
-          </a:prstGeom>
-          <a:solidFill>
-            <a:schemeClr val="bg2"/>
-          </a:solidFill>
-          <a:ln w="12700">
-            <a:solidFill>
-              <a:schemeClr val="bg2"/>
-            </a:solidFill>
-            <a:prstDash val="solid"/>
-          </a:ln>
-        </p:spPr>
-      </p:sp>
-      <p:sp>
-        <p:nvSpPr>
-          <p:cNvPr id="14" name="tool_badge_2"/>
-          <p:cNvSpPr/>
-          <p:nvPr/>
-        </p:nvSpPr>
-        <p:spPr>
-          <a:xfrm>
-            <a:off x="640080" y="2514600"/>
-            <a:ext cx="457200" cy="457200"/>
+            <a:off x="4206240" y="1828800"/>
+            <a:ext cx="384048" cy="384048"/>
           </a:xfrm>
           <a:prstGeom prst="ellipse">
             <a:avLst/>
@@ -3156,14 +3152,14 @@
       </p:sp>
       <p:sp>
         <p:nvSpPr>
-          <p:cNvPr id="15" name="Text 13"/>
+          <p:cNvPr id="12" name="Text 8"/>
           <p:cNvSpPr txBox="1"/>
           <p:nvPr/>
         </p:nvSpPr>
         <p:spPr>
           <a:xfrm>
-            <a:off x="640080" y="2514600"/>
-            <a:ext cx="457200" cy="457200"/>
+            <a:off x="4206240" y="1828800"/>
+            <a:ext cx="384048" cy="384048"/>
           </a:xfrm>
           <a:prstGeom prst="rect">
             <a:avLst/>
@@ -3184,7 +3180,7 @@
                   <a:schemeClr val="bg1"/>
                 </a:solidFill>
               </a:rPr>
-              <a:t>C</a:t>
+              <a:t>2</a:t>
             </a:r>
             <a:endParaRPr lang="en-US" sz="1300" dirty="0"/>
           </a:p>
@@ -3192,14 +3188,14 @@
       </p:sp>
       <p:sp>
         <p:nvSpPr>
-          <p:cNvPr id="16" name="Text 14"/>
+          <p:cNvPr id="13" name="Text 9"/>
           <p:cNvSpPr txBox="1"/>
           <p:nvPr/>
         </p:nvSpPr>
         <p:spPr>
           <a:xfrm>
-            <a:off x="1234440" y="2350008"/>
-            <a:ext cx="3108960" cy="365760"/>
+            <a:off x="4709160" y="1801368"/>
+            <a:ext cx="3977640" cy="320040"/>
           </a:xfrm>
           <a:prstGeom prst="rect">
             <a:avLst/>
@@ -3215,27 +3211,27 @@
               <a:buNone/>
             </a:pPr>
             <a:r>
-              <a:rPr lang="en-US" sz="1500" b="1" dirty="0">
+              <a:rPr lang="en-US" sz="1400" b="1" dirty="0">
                 <a:solidFill>
                   <a:schemeClr val="tx2"/>
                 </a:solidFill>
               </a:rPr>
-              <a:t>テーブル装飾</a:t>
-            </a:r>
-            <a:endParaRPr lang="en-US" sz="1500" dirty="0"/>
-          </a:p>
-        </p:txBody>
-      </p:sp>
-      <p:sp>
-        <p:nvSpPr>
-          <p:cNvPr id="17" name="Text 15"/>
+              <a:t>フォトスポットに</a:t>
+            </a:r>
+            <a:endParaRPr lang="en-US" sz="1400" dirty="0"/>
+          </a:p>
+        </p:txBody>
+      </p:sp>
+      <p:sp>
+        <p:nvSpPr>
+          <p:cNvPr id="14" name="Text 10"/>
           <p:cNvSpPr txBox="1"/>
           <p:nvPr/>
         </p:nvSpPr>
         <p:spPr>
           <a:xfrm>
-            <a:off x="1234440" y="2715768"/>
-            <a:ext cx="3108960" cy="502920"/>
+            <a:off x="4709160" y="2121408"/>
+            <a:ext cx="3977640" cy="457200"/>
           </a:xfrm>
           <a:prstGeom prst="rect">
             <a:avLst/>
@@ -3256,7 +3252,7 @@
                   <a:schemeClr val="tx1"/>
                 </a:solidFill>
               </a:rPr>
-              <a:t>赤緑のテーブルクロス、ミニツリー、LEDライト</a:t>
+              <a:t>アーチ前での記念撮影がSNS投稿のきっかけに。</a:t>
             </a:r>
             <a:endParaRPr lang="en-US" sz="1200" dirty="0"/>
           </a:p>
@@ -3264,201 +3260,14 @@
       </p:sp>
       <p:sp>
         <p:nvSpPr>
-          <p:cNvPr id="18" name="tool_3"/>
+          <p:cNvPr id="15" name="arch_badge_2"/>
           <p:cNvSpPr/>
           <p:nvPr/>
         </p:nvSpPr>
         <p:spPr>
           <a:xfrm>
-            <a:off x="4663440" y="2240280"/>
-            <a:ext cx="4023360" cy="1051560"/>
-          </a:xfrm>
-          <a:prstGeom prst="roundRect">
-            <a:avLst>
-              <a:gd name="adj" fmla="val 6957"/>
-            </a:avLst>
-          </a:prstGeom>
-          <a:solidFill>
-            <a:schemeClr val="bg2"/>
-          </a:solidFill>
-          <a:ln w="12700">
-            <a:solidFill>
-              <a:schemeClr val="bg2"/>
-            </a:solidFill>
-            <a:prstDash val="solid"/>
-          </a:ln>
-        </p:spPr>
-      </p:sp>
-      <p:sp>
-        <p:nvSpPr>
-          <p:cNvPr id="19" name="tool_badge_3"/>
-          <p:cNvSpPr/>
-          <p:nvPr/>
-        </p:nvSpPr>
-        <p:spPr>
-          <a:xfrm>
-            <a:off x="4846320" y="2514600"/>
-            <a:ext cx="457200" cy="457200"/>
-          </a:xfrm>
-          <a:prstGeom prst="ellipse">
-            <a:avLst/>
-          </a:prstGeom>
-          <a:solidFill>
-            <a:schemeClr val="tx2"/>
-          </a:solidFill>
-          <a:ln w="12700">
-            <a:solidFill>
-              <a:schemeClr val="tx2"/>
-            </a:solidFill>
-            <a:prstDash val="solid"/>
-          </a:ln>
-        </p:spPr>
-      </p:sp>
-      <p:sp>
-        <p:nvSpPr>
-          <p:cNvPr id="20" name="Text 18"/>
-          <p:cNvSpPr txBox="1"/>
-          <p:nvPr/>
-        </p:nvSpPr>
-        <p:spPr>
-          <a:xfrm>
-            <a:off x="4846320" y="2514600"/>
-            <a:ext cx="457200" cy="457200"/>
-          </a:xfrm>
-          <a:prstGeom prst="rect">
-            <a:avLst/>
-          </a:prstGeom>
-          <a:noFill/>
-          <a:ln/>
-        </p:spPr>
-        <p:txBody>
-          <a:bodyPr wrap="square" lIns="0" tIns="0" rIns="0" bIns="0" rtlCol="0" anchor="ctr"/>
-          <a:lstStyle/>
-          <a:p>
-            <a:pPr algn="ctr" indent="0" marL="0">
-              <a:buNone/>
-            </a:pPr>
-            <a:r>
-              <a:rPr lang="en-US" sz="1300" b="1" dirty="0">
-                <a:solidFill>
-                  <a:schemeClr val="bg1"/>
-                </a:solidFill>
-              </a:rPr>
-              <a:t>D</a:t>
-            </a:r>
-            <a:endParaRPr lang="en-US" sz="1300" dirty="0"/>
-          </a:p>
-        </p:txBody>
-      </p:sp>
-      <p:sp>
-        <p:nvSpPr>
-          <p:cNvPr id="21" name="Text 19"/>
-          <p:cNvSpPr txBox="1"/>
-          <p:nvPr/>
-        </p:nvSpPr>
-        <p:spPr>
-          <a:xfrm>
-            <a:off x="5440680" y="2350008"/>
-            <a:ext cx="3108960" cy="365760"/>
-          </a:xfrm>
-          <a:prstGeom prst="rect">
-            <a:avLst/>
-          </a:prstGeom>
-          <a:noFill/>
-          <a:ln/>
-        </p:spPr>
-        <p:txBody>
-          <a:bodyPr wrap="square" lIns="635" tIns="635" rIns="635" bIns="635" rtlCol="0" anchor="t"/>
-          <a:lstStyle/>
-          <a:p>
-            <a:pPr indent="0" marL="0">
-              <a:buNone/>
-            </a:pPr>
-            <a:r>
-              <a:rPr lang="en-US" sz="1500" b="1" dirty="0">
-                <a:solidFill>
-                  <a:schemeClr val="tx2"/>
-                </a:solidFill>
-              </a:rPr>
-              <a:t>吊り下げPOP</a:t>
-            </a:r>
-            <a:endParaRPr lang="en-US" sz="1500" dirty="0"/>
-          </a:p>
-        </p:txBody>
-      </p:sp>
-      <p:sp>
-        <p:nvSpPr>
-          <p:cNvPr id="22" name="Text 20"/>
-          <p:cNvSpPr txBox="1"/>
-          <p:nvPr/>
-        </p:nvSpPr>
-        <p:spPr>
-          <a:xfrm>
-            <a:off x="5440680" y="2715768"/>
-            <a:ext cx="3108960" cy="502920"/>
-          </a:xfrm>
-          <a:prstGeom prst="rect">
-            <a:avLst/>
-          </a:prstGeom>
-          <a:noFill/>
-          <a:ln/>
-        </p:spPr>
-        <p:txBody>
-          <a:bodyPr wrap="square" lIns="635" tIns="635" rIns="635" bIns="635" rtlCol="0" anchor="t"/>
-          <a:lstStyle/>
-          <a:p>
-            <a:pPr indent="0" marL="0">
-              <a:buNone/>
-            </a:pPr>
-            <a:r>
-              <a:rPr lang="en-US" sz="1200" dirty="0">
-                <a:solidFill>
-                  <a:schemeClr val="tx1"/>
-                </a:solidFill>
-              </a:rPr>
-              <a:t>雪の結晶・オーナメント型で天井から演出</a:t>
-            </a:r>
-            <a:endParaRPr lang="en-US" sz="1200" dirty="0"/>
-          </a:p>
-        </p:txBody>
-      </p:sp>
-      <p:sp>
-        <p:nvSpPr>
-          <p:cNvPr id="23" name="tool_4"/>
-          <p:cNvSpPr/>
-          <p:nvPr/>
-        </p:nvSpPr>
-        <p:spPr>
-          <a:xfrm>
-            <a:off x="457200" y="3429000"/>
-            <a:ext cx="4023360" cy="1051560"/>
-          </a:xfrm>
-          <a:prstGeom prst="roundRect">
-            <a:avLst>
-              <a:gd name="adj" fmla="val 6957"/>
-            </a:avLst>
-          </a:prstGeom>
-          <a:solidFill>
-            <a:schemeClr val="bg2"/>
-          </a:solidFill>
-          <a:ln w="12700">
-            <a:solidFill>
-              <a:schemeClr val="bg2"/>
-            </a:solidFill>
-            <a:prstDash val="solid"/>
-          </a:ln>
-        </p:spPr>
-      </p:sp>
-      <p:sp>
-        <p:nvSpPr>
-          <p:cNvPr id="24" name="tool_badge_4"/>
-          <p:cNvSpPr/>
-          <p:nvPr/>
-        </p:nvSpPr>
-        <p:spPr>
-          <a:xfrm>
-            <a:off x="640080" y="3703320"/>
-            <a:ext cx="457200" cy="457200"/>
+            <a:off x="4206240" y="2606040"/>
+            <a:ext cx="384048" cy="384048"/>
           </a:xfrm>
           <a:prstGeom prst="ellipse">
             <a:avLst/>
@@ -3476,14 +3285,14 @@
       </p:sp>
       <p:sp>
         <p:nvSpPr>
-          <p:cNvPr id="25" name="Text 23"/>
+          <p:cNvPr id="16" name="Text 12"/>
           <p:cNvSpPr txBox="1"/>
           <p:nvPr/>
         </p:nvSpPr>
         <p:spPr>
           <a:xfrm>
-            <a:off x="640080" y="3703320"/>
-            <a:ext cx="457200" cy="457200"/>
+            <a:off x="4206240" y="2606040"/>
+            <a:ext cx="384048" cy="384048"/>
           </a:xfrm>
           <a:prstGeom prst="rect">
             <a:avLst/>
@@ -3504,7 +3313,7 @@
                   <a:schemeClr val="bg1"/>
                 </a:solidFill>
               </a:rPr>
-              <a:t>E</a:t>
+              <a:t>3</a:t>
             </a:r>
             <a:endParaRPr lang="en-US" sz="1300" dirty="0"/>
           </a:p>
@@ -3512,14 +3321,14 @@
       </p:sp>
       <p:sp>
         <p:nvSpPr>
-          <p:cNvPr id="26" name="Text 24"/>
+          <p:cNvPr id="17" name="Text 13"/>
           <p:cNvSpPr txBox="1"/>
           <p:nvPr/>
         </p:nvSpPr>
         <p:spPr>
           <a:xfrm>
-            <a:off x="1234440" y="3538728"/>
-            <a:ext cx="3108960" cy="365760"/>
+            <a:off x="4709160" y="2578608"/>
+            <a:ext cx="3977640" cy="320040"/>
           </a:xfrm>
           <a:prstGeom prst="rect">
             <a:avLst/>
@@ -3535,27 +3344,27 @@
               <a:buNone/>
             </a:pPr>
             <a:r>
-              <a:rPr lang="en-US" sz="1500" b="1" dirty="0">
+              <a:rPr lang="en-US" sz="1400" b="1" dirty="0">
                 <a:solidFill>
                   <a:schemeClr val="tx2"/>
                 </a:solidFill>
               </a:rPr>
-              <a:t>作品ディスプレイ</a:t>
-            </a:r>
-            <a:endParaRPr lang="en-US" sz="1500" dirty="0"/>
-          </a:p>
-        </p:txBody>
-      </p:sp>
-      <p:sp>
-        <p:nvSpPr>
-          <p:cNvPr id="27" name="Text 25"/>
+              <a:t>期間中レンタル</a:t>
+            </a:r>
+            <a:endParaRPr lang="en-US" sz="1400" dirty="0"/>
+          </a:p>
+        </p:txBody>
+      </p:sp>
+      <p:sp>
+        <p:nvSpPr>
+          <p:cNvPr id="18" name="Text 14"/>
           <p:cNvSpPr txBox="1"/>
           <p:nvPr/>
         </p:nvSpPr>
         <p:spPr>
           <a:xfrm>
-            <a:off x="1234440" y="3904488"/>
-            <a:ext cx="3108960" cy="502920"/>
+            <a:off x="4709160" y="2898648"/>
+            <a:ext cx="3977640" cy="457200"/>
           </a:xfrm>
           <a:prstGeom prst="rect">
             <a:avLst/>
@@ -3576,167 +3385,7 @@
                   <a:schemeClr val="tx1"/>
                 </a:solidFill>
               </a:rPr>
-              <a:t>完成見本を展示し、通行客に“つくれるもの”を見せる</a:t>
-            </a:r>
-            <a:endParaRPr lang="en-US" sz="1200" dirty="0"/>
-          </a:p>
-        </p:txBody>
-      </p:sp>
-      <p:sp>
-        <p:nvSpPr>
-          <p:cNvPr id="28" name="tool_5"/>
-          <p:cNvSpPr/>
-          <p:nvPr/>
-        </p:nvSpPr>
-        <p:spPr>
-          <a:xfrm>
-            <a:off x="4663440" y="3429000"/>
-            <a:ext cx="4023360" cy="1051560"/>
-          </a:xfrm>
-          <a:prstGeom prst="roundRect">
-            <a:avLst>
-              <a:gd name="adj" fmla="val 6957"/>
-            </a:avLst>
-          </a:prstGeom>
-          <a:solidFill>
-            <a:schemeClr val="bg2"/>
-          </a:solidFill>
-          <a:ln w="12700">
-            <a:solidFill>
-              <a:schemeClr val="bg2"/>
-            </a:solidFill>
-            <a:prstDash val="solid"/>
-          </a:ln>
-        </p:spPr>
-      </p:sp>
-      <p:sp>
-        <p:nvSpPr>
-          <p:cNvPr id="29" name="tool_badge_5"/>
-          <p:cNvSpPr/>
-          <p:nvPr/>
-        </p:nvSpPr>
-        <p:spPr>
-          <a:xfrm>
-            <a:off x="4846320" y="3703320"/>
-            <a:ext cx="457200" cy="457200"/>
-          </a:xfrm>
-          <a:prstGeom prst="ellipse">
-            <a:avLst/>
-          </a:prstGeom>
-          <a:solidFill>
-            <a:schemeClr val="tx2"/>
-          </a:solidFill>
-          <a:ln w="12700">
-            <a:solidFill>
-              <a:schemeClr val="tx2"/>
-            </a:solidFill>
-            <a:prstDash val="solid"/>
-          </a:ln>
-        </p:spPr>
-      </p:sp>
-      <p:sp>
-        <p:nvSpPr>
-          <p:cNvPr id="30" name="Text 28"/>
-          <p:cNvSpPr txBox="1"/>
-          <p:nvPr/>
-        </p:nvSpPr>
-        <p:spPr>
-          <a:xfrm>
-            <a:off x="4846320" y="3703320"/>
-            <a:ext cx="457200" cy="457200"/>
-          </a:xfrm>
-          <a:prstGeom prst="rect">
-            <a:avLst/>
-          </a:prstGeom>
-          <a:noFill/>
-          <a:ln/>
-        </p:spPr>
-        <p:txBody>
-          <a:bodyPr wrap="square" lIns="0" tIns="0" rIns="0" bIns="0" rtlCol="0" anchor="ctr"/>
-          <a:lstStyle/>
-          <a:p>
-            <a:pPr algn="ctr" indent="0" marL="0">
-              <a:buNone/>
-            </a:pPr>
-            <a:r>
-              <a:rPr lang="en-US" sz="1300" b="1" dirty="0">
-                <a:solidFill>
-                  <a:schemeClr val="bg1"/>
-                </a:solidFill>
-              </a:rPr>
-              <a:t>F</a:t>
-            </a:r>
-            <a:endParaRPr lang="en-US" sz="1300" dirty="0"/>
-          </a:p>
-        </p:txBody>
-      </p:sp>
-      <p:sp>
-        <p:nvSpPr>
-          <p:cNvPr id="31" name="Text 29"/>
-          <p:cNvSpPr txBox="1"/>
-          <p:nvPr/>
-        </p:nvSpPr>
-        <p:spPr>
-          <a:xfrm>
-            <a:off x="5440680" y="3538728"/>
-            <a:ext cx="3108960" cy="365760"/>
-          </a:xfrm>
-          <a:prstGeom prst="rect">
-            <a:avLst/>
-          </a:prstGeom>
-          <a:noFill/>
-          <a:ln/>
-        </p:spPr>
-        <p:txBody>
-          <a:bodyPr wrap="square" lIns="635" tIns="635" rIns="635" bIns="635" rtlCol="0" anchor="t"/>
-          <a:lstStyle/>
-          <a:p>
-            <a:pPr indent="0" marL="0">
-              <a:buNone/>
-            </a:pPr>
-            <a:r>
-              <a:rPr lang="en-US" sz="1500" b="1" dirty="0">
-                <a:solidFill>
-                  <a:schemeClr val="tx2"/>
-                </a:solidFill>
-              </a:rPr>
-              <a:t>週替わり告知カード</a:t>
-            </a:r>
-            <a:endParaRPr lang="en-US" sz="1500" dirty="0"/>
-          </a:p>
-        </p:txBody>
-      </p:sp>
-      <p:sp>
-        <p:nvSpPr>
-          <p:cNvPr id="32" name="Text 30"/>
-          <p:cNvSpPr txBox="1"/>
-          <p:nvPr/>
-        </p:nvSpPr>
-        <p:spPr>
-          <a:xfrm>
-            <a:off x="5440680" y="3904488"/>
-            <a:ext cx="3108960" cy="502920"/>
-          </a:xfrm>
-          <a:prstGeom prst="rect">
-            <a:avLst/>
-          </a:prstGeom>
-          <a:noFill/>
-          <a:ln/>
-        </p:spPr>
-        <p:txBody>
-          <a:bodyPr wrap="square" lIns="635" tIns="635" rIns="635" bIns="635" rtlCol="0" anchor="t"/>
-          <a:lstStyle/>
-          <a:p>
-            <a:pPr indent="0" marL="0">
-              <a:buNone/>
-            </a:pPr>
-            <a:r>
-              <a:rPr lang="en-US" sz="1200" dirty="0">
-                <a:solidFill>
-                  <a:schemeClr val="tx1"/>
-                </a:solidFill>
-              </a:rPr>
-              <a:t>「来週はこれがつくれる！」で再来店を促す</a:t>
+              <a:t>4週の期間中は返却不要。終了後に着払いで返送。</a:t>
             </a:r>
             <a:endParaRPr lang="en-US" sz="1200" dirty="0"/>
           </a:p>
@@ -3844,74 +3493,45 @@
                   <a:schemeClr val="tx2"/>
                 </a:solidFill>
               </a:rPr>
-              <a:t>コスプレ（全週で週替わり展開）</a:t>
+              <a:t>ワークショップ開催中ツール（デザイン案）</a:t>
             </a:r>
             <a:endParaRPr lang="en-US" sz="2400" dirty="0"/>
           </a:p>
         </p:txBody>
       </p:sp>
-      <p:sp>
-        <p:nvSpPr>
-          <p:cNvPr id="3" name="cos_0"/>
-          <p:cNvSpPr/>
-          <p:nvPr/>
-        </p:nvSpPr>
-        <p:spPr>
-          <a:xfrm>
-            <a:off x="457200" y="1051560"/>
-            <a:ext cx="2606040" cy="1188720"/>
-          </a:xfrm>
-          <a:prstGeom prst="roundRect">
-            <a:avLst>
-              <a:gd name="adj" fmla="val 6154"/>
-            </a:avLst>
-          </a:prstGeom>
-          <a:solidFill>
-            <a:schemeClr val="bg2"/>
-          </a:solidFill>
-          <a:ln w="12700">
-            <a:solidFill>
-              <a:schemeClr val="bg2"/>
-            </a:solidFill>
-            <a:prstDash val="solid"/>
-          </a:ln>
-        </p:spPr>
-      </p:sp>
-      <p:sp>
-        <p:nvSpPr>
-          <p:cNvPr id="4" name="cos_dot_0"/>
-          <p:cNvSpPr/>
-          <p:nvPr/>
-        </p:nvSpPr>
-        <p:spPr>
-          <a:xfrm>
-            <a:off x="640080" y="1371600"/>
-            <a:ext cx="548640" cy="548640"/>
-          </a:xfrm>
-          <a:prstGeom prst="ellipse">
-            <a:avLst/>
-          </a:prstGeom>
-          <a:solidFill>
-            <a:schemeClr val="accent1"/>
-          </a:solidFill>
-          <a:ln w="12700">
-            <a:solidFill>
-              <a:schemeClr val="accent1"/>
-            </a:solidFill>
-            <a:prstDash val="solid"/>
-          </a:ln>
-        </p:spPr>
-      </p:sp>
-      <p:sp>
-        <p:nvSpPr>
-          <p:cNvPr id="5" name="Text 3"/>
+      <p:pic>
+        <p:nvPicPr>
+          <p:cNvPr id="3" name="img_tablecloth" descr="テーブルクロスデザイン案">    </p:cNvPr>
+          <p:cNvPicPr>
+            <a:picLocks noChangeAspect="1"/>
+          </p:cNvPicPr>
+          <p:nvPr/>
+        </p:nvPicPr>
+        <p:blipFill>
+          <a:blip r:embed="rId1"/>
+          <a:srcRect l="0" r="0" t="0" b="0"/>
+          <a:stretch/>
+        </p:blipFill>
+        <p:spPr>
+          <a:xfrm>
+            <a:off x="457200" y="960120"/>
+            <a:ext cx="2560320" cy="2331720"/>
+          </a:xfrm>
+          <a:prstGeom prst="rect">
+            <a:avLst/>
+          </a:prstGeom>
+        </p:spPr>
+      </p:pic>
+      <p:sp>
+        <p:nvSpPr>
+          <p:cNvPr id="4" name="Text 1"/>
           <p:cNvSpPr txBox="1"/>
           <p:nvPr/>
         </p:nvSpPr>
         <p:spPr>
           <a:xfrm>
-            <a:off x="1325880" y="1234440"/>
-            <a:ext cx="1645920" cy="411480"/>
+            <a:off x="457200" y="3383280"/>
+            <a:ext cx="2560320" cy="320040"/>
           </a:xfrm>
           <a:prstGeom prst="rect">
             <a:avLst/>
@@ -3932,7 +3552,7 @@
                   <a:schemeClr val="tx2"/>
                 </a:solidFill>
               </a:rPr>
-              <a:t>サンタ（男女）</a:t>
+              <a:t>テーブルクロス</a:t>
             </a:r>
             <a:endParaRPr lang="en-US" sz="1400" dirty="0"/>
           </a:p>
@@ -3940,14 +3560,14 @@
       </p:sp>
       <p:sp>
         <p:nvSpPr>
-          <p:cNvPr id="6" name="Text 4"/>
+          <p:cNvPr id="5" name="Text 2"/>
           <p:cNvSpPr txBox="1"/>
           <p:nvPr/>
         </p:nvSpPr>
         <p:spPr>
           <a:xfrm>
-            <a:off x="1325880" y="1645920"/>
-            <a:ext cx="1645920" cy="502920"/>
+            <a:off x="457200" y="3703320"/>
+            <a:ext cx="2560320" cy="502920"/>
           </a:xfrm>
           <a:prstGeom prst="rect">
             <a:avLst/>
@@ -3968,74 +3588,260 @@
                   <a:schemeClr val="tx1"/>
                 </a:solidFill>
               </a:rPr>
-              <a:t>帽子・ひげ・ベルト付セット</a:t>
+              <a:t>赤地に雪の結晶とヒイラギ柄。ミニツリー・LEDライトと一緒に</a:t>
             </a:r>
             <a:endParaRPr lang="en-US" sz="1100" dirty="0"/>
           </a:p>
         </p:txBody>
       </p:sp>
-      <p:sp>
-        <p:nvSpPr>
-          <p:cNvPr id="7" name="cos_1"/>
-          <p:cNvSpPr/>
-          <p:nvPr/>
-        </p:nvSpPr>
-        <p:spPr>
-          <a:xfrm>
-            <a:off x="3246120" y="1051560"/>
-            <a:ext cx="2606040" cy="1188720"/>
-          </a:xfrm>
-          <a:prstGeom prst="roundRect">
-            <a:avLst>
-              <a:gd name="adj" fmla="val 6154"/>
-            </a:avLst>
-          </a:prstGeom>
-          <a:solidFill>
-            <a:schemeClr val="bg2"/>
-          </a:solidFill>
-          <a:ln w="12700">
-            <a:solidFill>
-              <a:schemeClr val="bg2"/>
-            </a:solidFill>
-            <a:prstDash val="solid"/>
-          </a:ln>
-        </p:spPr>
-      </p:sp>
-      <p:sp>
-        <p:nvSpPr>
-          <p:cNvPr id="8" name="cos_dot_1"/>
-          <p:cNvSpPr/>
-          <p:nvPr/>
-        </p:nvSpPr>
-        <p:spPr>
-          <a:xfrm>
-            <a:off x="3429000" y="1371600"/>
-            <a:ext cx="548640" cy="548640"/>
-          </a:xfrm>
-          <a:prstGeom prst="ellipse">
-            <a:avLst/>
-          </a:prstGeom>
-          <a:solidFill>
-            <a:srgbClr val="8B5A2B"/>
-          </a:solidFill>
-          <a:ln w="12700">
-            <a:solidFill>
-              <a:srgbClr val="8B5A2B"/>
-            </a:solidFill>
-            <a:prstDash val="solid"/>
-          </a:ln>
-        </p:spPr>
-      </p:sp>
-      <p:sp>
-        <p:nvSpPr>
-          <p:cNvPr id="9" name="Text 7"/>
+      <p:pic>
+        <p:nvPicPr>
+          <p:cNvPr id="6" name="img_nobori" descr="のぼりデザイン案">    </p:cNvPr>
+          <p:cNvPicPr>
+            <a:picLocks noChangeAspect="1"/>
+          </p:cNvPicPr>
+          <p:nvPr/>
+        </p:nvPicPr>
+        <p:blipFill>
+          <a:blip r:embed="rId2"/>
+          <a:stretch>
+            <a:fillRect/>
+          </a:stretch>
+        </p:blipFill>
+        <p:spPr>
+          <a:xfrm>
+            <a:off x="3794760" y="960120"/>
+            <a:ext cx="1554480" cy="2331720"/>
+          </a:xfrm>
+          <a:prstGeom prst="rect">
+            <a:avLst/>
+          </a:prstGeom>
+        </p:spPr>
+      </p:pic>
+      <p:sp>
+        <p:nvSpPr>
+          <p:cNvPr id="7" name="Text 3"/>
           <p:cNvSpPr txBox="1"/>
           <p:nvPr/>
         </p:nvSpPr>
         <p:spPr>
           <a:xfrm>
-            <a:off x="4114800" y="1234440"/>
-            <a:ext cx="1645920" cy="411480"/>
+            <a:off x="4617720" y="1325880"/>
+            <a:ext cx="219456" cy="1005840"/>
+          </a:xfrm>
+          <a:prstGeom prst="rect">
+            <a:avLst/>
+          </a:prstGeom>
+          <a:noFill/>
+          <a:ln/>
+        </p:spPr>
+        <p:txBody>
+          <a:bodyPr wrap="square" lIns="0" tIns="0" rIns="0" bIns="0" rtlCol="0" anchor="ctr"/>
+          <a:lstStyle/>
+          <a:p>
+            <a:pPr algn="ctr" indent="0" marL="0">
+              <a:lnSpc>
+                <a:spcPct val="85000"/>
+              </a:lnSpc>
+              <a:buNone/>
+            </a:pPr>
+            <a:r>
+              <a:rPr lang="en-US" sz="1000" b="1" dirty="0">
+                <a:solidFill>
+                  <a:schemeClr val="tx2"/>
+                </a:solidFill>
+              </a:rPr>
+              <a:t>ク</a:t>
+            </a:r>
+            <a:endParaRPr lang="en-US" sz="1000" dirty="0"/>
+          </a:p>
+          <a:p>
+            <a:pPr algn="ctr" indent="0" marL="0">
+              <a:lnSpc>
+                <a:spcPct val="85000"/>
+              </a:lnSpc>
+              <a:buNone/>
+            </a:pPr>
+            <a:r>
+              <a:rPr lang="en-US" sz="1000" b="1" dirty="0">
+                <a:solidFill>
+                  <a:schemeClr val="tx2"/>
+                </a:solidFill>
+              </a:rPr>
+              <a:t>リ</a:t>
+            </a:r>
+            <a:endParaRPr lang="en-US" sz="1000" dirty="0"/>
+          </a:p>
+          <a:p>
+            <a:pPr algn="ctr" indent="0" marL="0">
+              <a:lnSpc>
+                <a:spcPct val="85000"/>
+              </a:lnSpc>
+              <a:buNone/>
+            </a:pPr>
+            <a:r>
+              <a:rPr lang="en-US" sz="1000" b="1" dirty="0">
+                <a:solidFill>
+                  <a:schemeClr val="tx2"/>
+                </a:solidFill>
+              </a:rPr>
+              <a:t>ス</a:t>
+            </a:r>
+            <a:endParaRPr lang="en-US" sz="1000" dirty="0"/>
+          </a:p>
+          <a:p>
+            <a:pPr algn="ctr" indent="0" marL="0">
+              <a:lnSpc>
+                <a:spcPct val="85000"/>
+              </a:lnSpc>
+              <a:buNone/>
+            </a:pPr>
+            <a:r>
+              <a:rPr lang="en-US" sz="1000" b="1" dirty="0">
+                <a:solidFill>
+                  <a:schemeClr val="tx2"/>
+                </a:solidFill>
+              </a:rPr>
+              <a:t>マ</a:t>
+            </a:r>
+            <a:endParaRPr lang="en-US" sz="1000" dirty="0"/>
+          </a:p>
+          <a:p>
+            <a:pPr algn="ctr" indent="0" marL="0">
+              <a:lnSpc>
+                <a:spcPct val="85000"/>
+              </a:lnSpc>
+              <a:buNone/>
+            </a:pPr>
+            <a:r>
+              <a:rPr lang="en-US" sz="1000" b="1" dirty="0">
+                <a:solidFill>
+                  <a:schemeClr val="tx2"/>
+                </a:solidFill>
+              </a:rPr>
+              <a:t>ス</a:t>
+            </a:r>
+            <a:endParaRPr lang="en-US" sz="1000" dirty="0"/>
+          </a:p>
+        </p:txBody>
+      </p:sp>
+      <p:sp>
+        <p:nvSpPr>
+          <p:cNvPr id="8" name="Text 4"/>
+          <p:cNvSpPr txBox="1"/>
+          <p:nvPr/>
+        </p:nvSpPr>
+        <p:spPr>
+          <a:xfrm>
+            <a:off x="4407408" y="1325880"/>
+            <a:ext cx="219456" cy="1005840"/>
+          </a:xfrm>
+          <a:prstGeom prst="rect">
+            <a:avLst/>
+          </a:prstGeom>
+          <a:noFill/>
+          <a:ln/>
+        </p:spPr>
+        <p:txBody>
+          <a:bodyPr wrap="square" lIns="0" tIns="0" rIns="0" bIns="0" rtlCol="0" anchor="ctr"/>
+          <a:lstStyle/>
+          <a:p>
+            <a:pPr algn="ctr" indent="0" marL="0">
+              <a:lnSpc>
+                <a:spcPct val="85000"/>
+              </a:lnSpc>
+              <a:buNone/>
+            </a:pPr>
+            <a:r>
+              <a:rPr lang="en-US" sz="1000" b="1" dirty="0">
+                <a:solidFill>
+                  <a:schemeClr val="tx2"/>
+                </a:solidFill>
+              </a:rPr>
+              <a:t>W</a:t>
+            </a:r>
+            <a:endParaRPr lang="en-US" sz="1000" dirty="0"/>
+          </a:p>
+          <a:p>
+            <a:pPr algn="ctr" indent="0" marL="0">
+              <a:lnSpc>
+                <a:spcPct val="85000"/>
+              </a:lnSpc>
+              <a:buNone/>
+            </a:pPr>
+            <a:r>
+              <a:rPr lang="en-US" sz="1000" b="1" dirty="0">
+                <a:solidFill>
+                  <a:schemeClr val="tx2"/>
+                </a:solidFill>
+              </a:rPr>
+              <a:t>S</a:t>
+            </a:r>
+            <a:endParaRPr lang="en-US" sz="1000" dirty="0"/>
+          </a:p>
+          <a:p>
+            <a:pPr algn="ctr" indent="0" marL="0">
+              <a:lnSpc>
+                <a:spcPct val="85000"/>
+              </a:lnSpc>
+              <a:buNone/>
+            </a:pPr>
+            <a:r>
+              <a:rPr lang="en-US" sz="1000" b="1" dirty="0">
+                <a:solidFill>
+                  <a:schemeClr val="tx2"/>
+                </a:solidFill>
+              </a:rPr>
+              <a:t>開</a:t>
+            </a:r>
+            <a:endParaRPr lang="en-US" sz="1000" dirty="0"/>
+          </a:p>
+          <a:p>
+            <a:pPr algn="ctr" indent="0" marL="0">
+              <a:lnSpc>
+                <a:spcPct val="85000"/>
+              </a:lnSpc>
+              <a:buNone/>
+            </a:pPr>
+            <a:r>
+              <a:rPr lang="en-US" sz="1000" b="1" dirty="0">
+                <a:solidFill>
+                  <a:schemeClr val="tx2"/>
+                </a:solidFill>
+              </a:rPr>
+              <a:t>催</a:t>
+            </a:r>
+            <a:endParaRPr lang="en-US" sz="1000" dirty="0"/>
+          </a:p>
+          <a:p>
+            <a:pPr algn="ctr" indent="0" marL="0">
+              <a:lnSpc>
+                <a:spcPct val="85000"/>
+              </a:lnSpc>
+              <a:buNone/>
+            </a:pPr>
+            <a:r>
+              <a:rPr lang="en-US" sz="1000" b="1" dirty="0">
+                <a:solidFill>
+                  <a:schemeClr val="tx2"/>
+                </a:solidFill>
+              </a:rPr>
+              <a:t>中</a:t>
+            </a:r>
+            <a:endParaRPr lang="en-US" sz="1000" dirty="0"/>
+          </a:p>
+        </p:txBody>
+      </p:sp>
+      <p:sp>
+        <p:nvSpPr>
+          <p:cNvPr id="9" name="Text 5"/>
+          <p:cNvSpPr txBox="1"/>
+          <p:nvPr/>
+        </p:nvSpPr>
+        <p:spPr>
+          <a:xfrm>
+            <a:off x="3291840" y="3383280"/>
+            <a:ext cx="2560320" cy="320040"/>
           </a:xfrm>
           <a:prstGeom prst="rect">
             <a:avLst/>
@@ -4056,7 +3862,7 @@
                   <a:schemeClr val="tx2"/>
                 </a:solidFill>
               </a:rPr>
-              <a:t>トナカイ</a:t>
+              <a:t>のぼり</a:t>
             </a:r>
             <a:endParaRPr lang="en-US" sz="1400" dirty="0"/>
           </a:p>
@@ -4064,14 +3870,14 @@
       </p:sp>
       <p:sp>
         <p:nvSpPr>
-          <p:cNvPr id="10" name="Text 8"/>
+          <p:cNvPr id="10" name="Text 6"/>
           <p:cNvSpPr txBox="1"/>
           <p:nvPr/>
         </p:nvSpPr>
         <p:spPr>
           <a:xfrm>
-            <a:off x="4114800" y="1645920"/>
-            <a:ext cx="1645920" cy="502920"/>
+            <a:off x="3291840" y="3703320"/>
+            <a:ext cx="2560320" cy="502920"/>
           </a:xfrm>
           <a:prstGeom prst="rect">
             <a:avLst/>
@@ -4092,74 +3898,109 @@
                   <a:schemeClr val="tx1"/>
                 </a:solidFill>
               </a:rPr>
-              <a:t>フリース着ぐるみ＋角カチューシャ</a:t>
+              <a:t>薄い赤×雪の結晶。遠目でも開催がわかる縦型</a:t>
             </a:r>
             <a:endParaRPr lang="en-US" sz="1100" dirty="0"/>
           </a:p>
         </p:txBody>
       </p:sp>
-      <p:sp>
-        <p:nvSpPr>
-          <p:cNvPr id="11" name="cos_2"/>
-          <p:cNvSpPr/>
-          <p:nvPr/>
-        </p:nvSpPr>
-        <p:spPr>
-          <a:xfrm>
-            <a:off x="6035040" y="1051560"/>
-            <a:ext cx="2606040" cy="1188720"/>
-          </a:xfrm>
-          <a:prstGeom prst="roundRect">
-            <a:avLst>
-              <a:gd name="adj" fmla="val 6154"/>
-            </a:avLst>
-          </a:prstGeom>
-          <a:solidFill>
-            <a:schemeClr val="bg2"/>
-          </a:solidFill>
-          <a:ln w="12700">
-            <a:solidFill>
-              <a:schemeClr val="bg2"/>
-            </a:solidFill>
-            <a:prstDash val="solid"/>
-          </a:ln>
-        </p:spPr>
-      </p:sp>
-      <p:sp>
-        <p:nvSpPr>
-          <p:cNvPr id="12" name="cos_dot_2"/>
-          <p:cNvSpPr/>
-          <p:nvPr/>
-        </p:nvSpPr>
-        <p:spPr>
-          <a:xfrm>
-            <a:off x="6217920" y="1371600"/>
-            <a:ext cx="548640" cy="548640"/>
-          </a:xfrm>
-          <a:prstGeom prst="ellipse">
-            <a:avLst/>
-          </a:prstGeom>
-          <a:solidFill>
-            <a:srgbClr val="9CC9DD"/>
-          </a:solidFill>
-          <a:ln w="12700">
-            <a:solidFill>
-              <a:srgbClr val="9CC9DD"/>
-            </a:solidFill>
-            <a:prstDash val="solid"/>
-          </a:ln>
-        </p:spPr>
-      </p:sp>
-      <p:sp>
-        <p:nvSpPr>
-          <p:cNvPr id="13" name="Text 11"/>
+      <p:pic>
+        <p:nvPicPr>
+          <p:cNvPr id="11" name="img_stand_sign" descr="スタンド看板デザイン案">    </p:cNvPr>
+          <p:cNvPicPr>
+            <a:picLocks noChangeAspect="1"/>
+          </p:cNvPicPr>
+          <p:nvPr/>
+        </p:nvPicPr>
+        <p:blipFill>
+          <a:blip r:embed="rId3"/>
+          <a:srcRect l="0" r="0" t="0" b="0"/>
+          <a:stretch/>
+        </p:blipFill>
+        <p:spPr>
+          <a:xfrm>
+            <a:off x="6126480" y="960120"/>
+            <a:ext cx="2560320" cy="2331720"/>
+          </a:xfrm>
+          <a:prstGeom prst="rect">
+            <a:avLst/>
+          </a:prstGeom>
+        </p:spPr>
+      </p:pic>
+      <p:sp>
+        <p:nvSpPr>
+          <p:cNvPr id="12" name="Text 7"/>
           <p:cNvSpPr txBox="1"/>
           <p:nvPr/>
         </p:nvSpPr>
         <p:spPr>
           <a:xfrm>
-            <a:off x="6903720" y="1234440"/>
-            <a:ext cx="1645920" cy="411480"/>
+            <a:off x="7040880" y="1645920"/>
+            <a:ext cx="914400" cy="777240"/>
+          </a:xfrm>
+          <a:prstGeom prst="rect">
+            <a:avLst/>
+          </a:prstGeom>
+          <a:noFill/>
+          <a:ln/>
+        </p:spPr>
+        <p:txBody>
+          <a:bodyPr wrap="square" lIns="0" tIns="0" rIns="0" bIns="0" rtlCol="0" anchor="ctr"/>
+          <a:lstStyle/>
+          <a:p>
+            <a:pPr algn="ctr" indent="0" marL="0">
+              <a:buNone/>
+            </a:pPr>
+            <a:r>
+              <a:rPr lang="en-US" sz="1100" b="1" dirty="0">
+                <a:solidFill>
+                  <a:schemeClr val="tx2"/>
+                </a:solidFill>
+              </a:rPr>
+              <a:t>ただいま</a:t>
+            </a:r>
+            <a:endParaRPr lang="en-US" sz="1100" dirty="0"/>
+          </a:p>
+          <a:p>
+            <a:pPr algn="ctr" indent="0" marL="0">
+              <a:buNone/>
+            </a:pPr>
+            <a:r>
+              <a:rPr lang="en-US" sz="1100" b="1" dirty="0">
+                <a:solidFill>
+                  <a:schemeClr val="tx2"/>
+                </a:solidFill>
+              </a:rPr>
+              <a:t>WS</a:t>
+            </a:r>
+            <a:endParaRPr lang="en-US" sz="1100" dirty="0"/>
+          </a:p>
+          <a:p>
+            <a:pPr algn="ctr" indent="0" marL="0">
+              <a:buNone/>
+            </a:pPr>
+            <a:r>
+              <a:rPr lang="en-US" sz="1100" b="1" dirty="0">
+                <a:solidFill>
+                  <a:schemeClr val="tx2"/>
+                </a:solidFill>
+              </a:rPr>
+              <a:t>開催中</a:t>
+            </a:r>
+            <a:endParaRPr lang="en-US" sz="1100" dirty="0"/>
+          </a:p>
+        </p:txBody>
+      </p:sp>
+      <p:sp>
+        <p:nvSpPr>
+          <p:cNvPr id="13" name="Text 8"/>
+          <p:cNvSpPr txBox="1"/>
+          <p:nvPr/>
+        </p:nvSpPr>
+        <p:spPr>
+          <a:xfrm>
+            <a:off x="6126480" y="3383280"/>
+            <a:ext cx="2560320" cy="320040"/>
           </a:xfrm>
           <a:prstGeom prst="rect">
             <a:avLst/>
@@ -4180,7 +4021,7 @@
                   <a:schemeClr val="tx2"/>
                 </a:solidFill>
               </a:rPr>
-              <a:t>雪だるま</a:t>
+              <a:t>スタンド看板</a:t>
             </a:r>
             <a:endParaRPr lang="en-US" sz="1400" dirty="0"/>
           </a:p>
@@ -4188,14 +4029,14 @@
       </p:sp>
       <p:sp>
         <p:nvSpPr>
-          <p:cNvPr id="14" name="Text 12"/>
+          <p:cNvPr id="14" name="Text 9"/>
           <p:cNvSpPr txBox="1"/>
           <p:nvPr/>
         </p:nvSpPr>
         <p:spPr>
           <a:xfrm>
-            <a:off x="6903720" y="1645920"/>
-            <a:ext cx="1645920" cy="502920"/>
+            <a:off x="6126480" y="3703320"/>
+            <a:ext cx="2560320" cy="502920"/>
           </a:xfrm>
           <a:prstGeom prst="rect">
             <a:avLst/>
@@ -4216,7 +4057,7 @@
                   <a:schemeClr val="tx1"/>
                 </a:solidFill>
               </a:rPr>
-              <a:t>着ぐるみ／ポンチョ</a:t>
+              <a:t>ツリー型A型看板「ただいまワークショップ開催中」</a:t>
             </a:r>
             <a:endParaRPr lang="en-US" sz="1100" dirty="0"/>
           </a:p>
@@ -4224,66 +4065,14 @@
       </p:sp>
       <p:sp>
         <p:nvSpPr>
-          <p:cNvPr id="15" name="cos_3"/>
-          <p:cNvSpPr/>
-          <p:nvPr/>
-        </p:nvSpPr>
-        <p:spPr>
-          <a:xfrm>
-            <a:off x="457200" y="2377440"/>
-            <a:ext cx="2606040" cy="1188720"/>
-          </a:xfrm>
-          <a:prstGeom prst="roundRect">
-            <a:avLst>
-              <a:gd name="adj" fmla="val 6154"/>
-            </a:avLst>
-          </a:prstGeom>
-          <a:solidFill>
-            <a:schemeClr val="bg2"/>
-          </a:solidFill>
-          <a:ln w="12700">
-            <a:solidFill>
-              <a:schemeClr val="bg2"/>
-            </a:solidFill>
-            <a:prstDash val="solid"/>
-          </a:ln>
-        </p:spPr>
-      </p:sp>
-      <p:sp>
-        <p:nvSpPr>
-          <p:cNvPr id="16" name="cos_dot_3"/>
-          <p:cNvSpPr/>
-          <p:nvPr/>
-        </p:nvSpPr>
-        <p:spPr>
-          <a:xfrm>
-            <a:off x="640080" y="2697480"/>
-            <a:ext cx="548640" cy="548640"/>
-          </a:xfrm>
-          <a:prstGeom prst="ellipse">
-            <a:avLst/>
-          </a:prstGeom>
-          <a:solidFill>
-            <a:schemeClr val="accent2"/>
-          </a:solidFill>
-          <a:ln w="12700">
-            <a:solidFill>
-              <a:schemeClr val="accent2"/>
-            </a:solidFill>
-            <a:prstDash val="solid"/>
-          </a:ln>
-        </p:spPr>
-      </p:sp>
-      <p:sp>
-        <p:nvSpPr>
-          <p:cNvPr id="17" name="Text 15"/>
+          <p:cNvPr id="15" name="Text 10"/>
           <p:cNvSpPr txBox="1"/>
           <p:nvPr/>
         </p:nvSpPr>
         <p:spPr>
           <a:xfrm>
-            <a:off x="1325880" y="2560320"/>
-            <a:ext cx="1645920" cy="411480"/>
+            <a:off x="457200" y="4315968"/>
+            <a:ext cx="8229600" cy="365760"/>
           </a:xfrm>
           <a:prstGeom prst="rect">
             <a:avLst/>
@@ -4299,334 +4088,14 @@
               <a:buNone/>
             </a:pPr>
             <a:r>
-              <a:rPr lang="en-US" sz="1400" b="1" dirty="0">
-                <a:solidFill>
-                  <a:schemeClr val="tx2"/>
-                </a:solidFill>
-              </a:rPr>
-              <a:t>エルフ</a:t>
-            </a:r>
-            <a:endParaRPr lang="en-US" sz="1400" dirty="0"/>
-          </a:p>
-        </p:txBody>
-      </p:sp>
-      <p:sp>
-        <p:nvSpPr>
-          <p:cNvPr id="18" name="Text 16"/>
-          <p:cNvSpPr txBox="1"/>
-          <p:nvPr/>
-        </p:nvSpPr>
-        <p:spPr>
-          <a:xfrm>
-            <a:off x="1325880" y="2971800"/>
-            <a:ext cx="1645920" cy="502920"/>
-          </a:xfrm>
-          <a:prstGeom prst="rect">
-            <a:avLst/>
-          </a:prstGeom>
-          <a:noFill/>
-          <a:ln/>
-        </p:spPr>
-        <p:txBody>
-          <a:bodyPr wrap="square" lIns="635" tIns="635" rIns="635" bIns="635" rtlCol="0" anchor="t"/>
-          <a:lstStyle/>
-          <a:p>
-            <a:pPr indent="0" marL="0">
-              <a:buNone/>
-            </a:pPr>
-            <a:r>
-              <a:rPr lang="en-US" sz="1100" dirty="0">
-                <a:solidFill>
-                  <a:schemeClr val="tx1"/>
-                </a:solidFill>
-              </a:rPr>
-              <a:t>緑の衣装＋とんがり帽子</a:t>
-            </a:r>
-            <a:endParaRPr lang="en-US" sz="1100" dirty="0"/>
-          </a:p>
-        </p:txBody>
-      </p:sp>
-      <p:sp>
-        <p:nvSpPr>
-          <p:cNvPr id="19" name="cos_4"/>
-          <p:cNvSpPr/>
-          <p:nvPr/>
-        </p:nvSpPr>
-        <p:spPr>
-          <a:xfrm>
-            <a:off x="3246120" y="2377440"/>
-            <a:ext cx="2606040" cy="1188720"/>
-          </a:xfrm>
-          <a:prstGeom prst="roundRect">
-            <a:avLst>
-              <a:gd name="adj" fmla="val 6154"/>
-            </a:avLst>
-          </a:prstGeom>
-          <a:solidFill>
-            <a:schemeClr val="bg2"/>
-          </a:solidFill>
-          <a:ln w="12700">
-            <a:solidFill>
-              <a:schemeClr val="bg2"/>
-            </a:solidFill>
-            <a:prstDash val="solid"/>
-          </a:ln>
-        </p:spPr>
-      </p:sp>
-      <p:sp>
-        <p:nvSpPr>
-          <p:cNvPr id="20" name="cos_dot_4"/>
-          <p:cNvSpPr/>
-          <p:nvPr/>
-        </p:nvSpPr>
-        <p:spPr>
-          <a:xfrm>
-            <a:off x="3429000" y="2697480"/>
-            <a:ext cx="548640" cy="548640"/>
-          </a:xfrm>
-          <a:prstGeom prst="ellipse">
-            <a:avLst/>
-          </a:prstGeom>
-          <a:solidFill>
-            <a:srgbClr val="B7792E"/>
-          </a:solidFill>
-          <a:ln w="12700">
-            <a:solidFill>
-              <a:srgbClr val="B7792E"/>
-            </a:solidFill>
-            <a:prstDash val="solid"/>
-          </a:ln>
-        </p:spPr>
-      </p:sp>
-      <p:sp>
-        <p:nvSpPr>
-          <p:cNvPr id="21" name="Text 19"/>
-          <p:cNvSpPr txBox="1"/>
-          <p:nvPr/>
-        </p:nvSpPr>
-        <p:spPr>
-          <a:xfrm>
-            <a:off x="4114800" y="2560320"/>
-            <a:ext cx="1645920" cy="411480"/>
-          </a:xfrm>
-          <a:prstGeom prst="rect">
-            <a:avLst/>
-          </a:prstGeom>
-          <a:noFill/>
-          <a:ln/>
-        </p:spPr>
-        <p:txBody>
-          <a:bodyPr wrap="square" lIns="635" tIns="635" rIns="635" bIns="635" rtlCol="0" anchor="t"/>
-          <a:lstStyle/>
-          <a:p>
-            <a:pPr indent="0" marL="0">
-              <a:buNone/>
-            </a:pPr>
-            <a:r>
-              <a:rPr lang="en-US" sz="1400" b="1" dirty="0">
-                <a:solidFill>
-                  <a:schemeClr val="tx2"/>
-                </a:solidFill>
-              </a:rPr>
-              <a:t>ジンジャーブレッド</a:t>
-            </a:r>
-            <a:endParaRPr lang="en-US" sz="1400" dirty="0"/>
-          </a:p>
-        </p:txBody>
-      </p:sp>
-      <p:sp>
-        <p:nvSpPr>
-          <p:cNvPr id="22" name="Text 20"/>
-          <p:cNvSpPr txBox="1"/>
-          <p:nvPr/>
-        </p:nvSpPr>
-        <p:spPr>
-          <a:xfrm>
-            <a:off x="4114800" y="2971800"/>
-            <a:ext cx="1645920" cy="502920"/>
-          </a:xfrm>
-          <a:prstGeom prst="rect">
-            <a:avLst/>
-          </a:prstGeom>
-          <a:noFill/>
-          <a:ln/>
-        </p:spPr>
-        <p:txBody>
-          <a:bodyPr wrap="square" lIns="635" tIns="635" rIns="635" bIns="635" rtlCol="0" anchor="t"/>
-          <a:lstStyle/>
-          <a:p>
-            <a:pPr indent="0" marL="0">
-              <a:buNone/>
-            </a:pPr>
-            <a:r>
-              <a:rPr lang="en-US" sz="1100" dirty="0">
-                <a:solidFill>
-                  <a:schemeClr val="tx1"/>
-                </a:solidFill>
-              </a:rPr>
-              <a:t>着ぐるみタイプ</a:t>
-            </a:r>
-            <a:endParaRPr lang="en-US" sz="1100" dirty="0"/>
-          </a:p>
-        </p:txBody>
-      </p:sp>
-      <p:sp>
-        <p:nvSpPr>
-          <p:cNvPr id="23" name="cos_5"/>
-          <p:cNvSpPr/>
-          <p:nvPr/>
-        </p:nvSpPr>
-        <p:spPr>
-          <a:xfrm>
-            <a:off x="6035040" y="2377440"/>
-            <a:ext cx="2606040" cy="1188720"/>
-          </a:xfrm>
-          <a:prstGeom prst="roundRect">
-            <a:avLst>
-              <a:gd name="adj" fmla="val 6154"/>
-            </a:avLst>
-          </a:prstGeom>
-          <a:solidFill>
-            <a:schemeClr val="bg2"/>
-          </a:solidFill>
-          <a:ln w="12700">
-            <a:solidFill>
-              <a:schemeClr val="bg2"/>
-            </a:solidFill>
-            <a:prstDash val="solid"/>
-          </a:ln>
-        </p:spPr>
-      </p:sp>
-      <p:sp>
-        <p:nvSpPr>
-          <p:cNvPr id="24" name="cos_dot_5"/>
-          <p:cNvSpPr/>
-          <p:nvPr/>
-        </p:nvSpPr>
-        <p:spPr>
-          <a:xfrm>
-            <a:off x="6217920" y="2697480"/>
-            <a:ext cx="548640" cy="548640"/>
-          </a:xfrm>
-          <a:prstGeom prst="ellipse">
-            <a:avLst/>
-          </a:prstGeom>
-          <a:solidFill>
-            <a:schemeClr val="accent4"/>
-          </a:solidFill>
-          <a:ln w="12700">
-            <a:solidFill>
-              <a:schemeClr val="accent4"/>
-            </a:solidFill>
-            <a:prstDash val="solid"/>
-          </a:ln>
-        </p:spPr>
-      </p:sp>
-      <p:sp>
-        <p:nvSpPr>
-          <p:cNvPr id="25" name="Text 23"/>
-          <p:cNvSpPr txBox="1"/>
-          <p:nvPr/>
-        </p:nvSpPr>
-        <p:spPr>
-          <a:xfrm>
-            <a:off x="6903720" y="2560320"/>
-            <a:ext cx="1645920" cy="411480"/>
-          </a:xfrm>
-          <a:prstGeom prst="rect">
-            <a:avLst/>
-          </a:prstGeom>
-          <a:noFill/>
-          <a:ln/>
-        </p:spPr>
-        <p:txBody>
-          <a:bodyPr wrap="square" lIns="635" tIns="635" rIns="635" bIns="635" rtlCol="0" anchor="t"/>
-          <a:lstStyle/>
-          <a:p>
-            <a:pPr indent="0" marL="0">
-              <a:buNone/>
-            </a:pPr>
-            <a:r>
-              <a:rPr lang="en-US" sz="1400" b="1" dirty="0">
-                <a:solidFill>
-                  <a:schemeClr val="tx2"/>
-                </a:solidFill>
-              </a:rPr>
-              <a:t>クリスマスツリー</a:t>
-            </a:r>
-            <a:endParaRPr lang="en-US" sz="1400" dirty="0"/>
-          </a:p>
-        </p:txBody>
-      </p:sp>
-      <p:sp>
-        <p:nvSpPr>
-          <p:cNvPr id="26" name="Text 24"/>
-          <p:cNvSpPr txBox="1"/>
-          <p:nvPr/>
-        </p:nvSpPr>
-        <p:spPr>
-          <a:xfrm>
-            <a:off x="6903720" y="2971800"/>
-            <a:ext cx="1645920" cy="502920"/>
-          </a:xfrm>
-          <a:prstGeom prst="rect">
-            <a:avLst/>
-          </a:prstGeom>
-          <a:noFill/>
-          <a:ln/>
-        </p:spPr>
-        <p:txBody>
-          <a:bodyPr wrap="square" lIns="635" tIns="635" rIns="635" bIns="635" rtlCol="0" anchor="t"/>
-          <a:lstStyle/>
-          <a:p>
-            <a:pPr indent="0" marL="0">
-              <a:buNone/>
-            </a:pPr>
-            <a:r>
-              <a:rPr lang="en-US" sz="1100" dirty="0">
-                <a:solidFill>
-                  <a:schemeClr val="tx1"/>
-                </a:solidFill>
-              </a:rPr>
-              <a:t>かぶり物・ポンチョ</a:t>
-            </a:r>
-            <a:endParaRPr lang="en-US" sz="1100" dirty="0"/>
-          </a:p>
-        </p:txBody>
-      </p:sp>
-      <p:sp>
-        <p:nvSpPr>
-          <p:cNvPr id="27" name="Text 25"/>
-          <p:cNvSpPr txBox="1"/>
-          <p:nvPr/>
-        </p:nvSpPr>
-        <p:spPr>
-          <a:xfrm>
-            <a:off x="457200" y="3794760"/>
-            <a:ext cx="8229600" cy="640080"/>
-          </a:xfrm>
-          <a:prstGeom prst="rect">
-            <a:avLst/>
-          </a:prstGeom>
-          <a:noFill/>
-          <a:ln/>
-        </p:spPr>
-        <p:txBody>
-          <a:bodyPr wrap="square" lIns="635" tIns="635" rIns="635" bIns="635" rtlCol="0" anchor="t"/>
-          <a:lstStyle/>
-          <a:p>
-            <a:pPr indent="0" marL="0">
-              <a:buNone/>
-            </a:pPr>
-            <a:r>
-              <a:rPr lang="en-US" sz="1300" dirty="0">
-                <a:solidFill>
-                  <a:schemeClr val="tx1"/>
-                </a:solidFill>
-              </a:rPr>
-              <a:t>Amazonで調達可能な市販衣装から選定（大人サイズ・スタッフ着用）。週ごとに衣装を入れ替え、毎週ちがう店頭の雰囲気をつくります。</a:t>
-            </a:r>
-            <a:endParaRPr lang="en-US" sz="1300" dirty="0"/>
+              <a:rPr lang="en-US" sz="1000" dirty="0">
+                <a:solidFill>
+                  <a:schemeClr val="accent4"/>
+                </a:solidFill>
+              </a:rPr>
+              <a:t>その他：吊り下げPOP（雪の結晶）／作品ディスプレイ台／週替わり告知カード「来週はこれがつくれる！」　※画像はAI生成のイメージ</a:t>
+            </a:r>
+            <a:endParaRPr lang="en-US" sz="1000" dirty="0"/>
           </a:p>
         </p:txBody>
       </p:sp>
@@ -4732,7 +4201,7 @@
                   <a:schemeClr val="tx2"/>
                 </a:solidFill>
               </a:rPr>
-              <a:t>B0ボードPOP　デザイン案</a:t>
+              <a:t>コスプレ（全週で週替わり展開・Amazon調達）</a:t>
             </a:r>
             <a:endParaRPr lang="en-US" sz="2400" dirty="0"/>
           </a:p>
@@ -4740,75 +4209,100 @@
       </p:sp>
       <p:sp>
         <p:nvSpPr>
-          <p:cNvPr id="3" name="poster_A"/>
+          <p:cNvPr id="3" name="cos_0"/>
           <p:cNvSpPr/>
           <p:nvPr/>
         </p:nvSpPr>
         <p:spPr>
           <a:xfrm>
-            <a:off x="1143000" y="1051560"/>
-            <a:ext cx="1234440" cy="1737360"/>
-          </a:xfrm>
-          <a:prstGeom prst="rect">
-            <a:avLst/>
+            <a:off x="457200" y="960120"/>
+            <a:ext cx="2606040" cy="1600200"/>
+          </a:xfrm>
+          <a:prstGeom prst="roundRect">
+            <a:avLst>
+              <a:gd name="adj" fmla="val 4571"/>
+            </a:avLst>
           </a:prstGeom>
           <a:solidFill>
-            <a:schemeClr val="accent5"/>
+            <a:schemeClr val="bg2"/>
           </a:solidFill>
           <a:ln w="12700">
             <a:solidFill>
-              <a:schemeClr val="accent1"/>
+              <a:schemeClr val="bg2"/>
             </a:solidFill>
             <a:prstDash val="solid"/>
           </a:ln>
         </p:spPr>
       </p:sp>
-      <p:sp>
-        <p:nvSpPr>
-          <p:cNvPr id="4" name="Text 2"/>
+      <p:pic>
+        <p:nvPicPr>
+          <p:cNvPr id="4" name="img_cos_santa" descr="サンタ（男女）の衣装イメージ">    </p:cNvPr>
+          <p:cNvPicPr>
+            <a:picLocks noChangeAspect="1"/>
+          </p:cNvPicPr>
+          <p:nvPr/>
+        </p:nvPicPr>
+        <p:blipFill>
+          <a:blip r:embed="rId1"/>
+          <a:srcRect l="0" r="0" t="0" b="0"/>
+          <a:stretch/>
+        </p:blipFill>
+        <p:spPr>
+          <a:xfrm>
+            <a:off x="548640" y="1051560"/>
+            <a:ext cx="1143000" cy="1417320"/>
+          </a:xfrm>
+          <a:prstGeom prst="rect">
+            <a:avLst/>
+          </a:prstGeom>
+        </p:spPr>
+      </p:pic>
+      <p:sp>
+        <p:nvSpPr>
+          <p:cNvPr id="5" name="Text 2"/>
           <p:cNvSpPr txBox="1"/>
           <p:nvPr/>
         </p:nvSpPr>
         <p:spPr>
           <a:xfrm>
-            <a:off x="1143000" y="1051560"/>
-            <a:ext cx="1234440" cy="1737360"/>
-          </a:xfrm>
-          <a:prstGeom prst="rect">
-            <a:avLst/>
-          </a:prstGeom>
-          <a:noFill/>
-          <a:ln/>
-        </p:spPr>
-        <p:txBody>
-          <a:bodyPr wrap="square" lIns="0" tIns="0" rIns="0" bIns="0" rtlCol="0" anchor="ctr"/>
-          <a:lstStyle/>
-          <a:p>
-            <a:pPr algn="ctr" indent="0" marL="0">
-              <a:buNone/>
-            </a:pPr>
-            <a:r>
-              <a:rPr lang="en-US" sz="4000" b="1" dirty="0">
+            <a:off x="1783080" y="1069848"/>
+            <a:ext cx="1234440" cy="457200"/>
+          </a:xfrm>
+          <a:prstGeom prst="rect">
+            <a:avLst/>
+          </a:prstGeom>
+          <a:noFill/>
+          <a:ln/>
+        </p:spPr>
+        <p:txBody>
+          <a:bodyPr wrap="square" lIns="635" tIns="635" rIns="635" bIns="635" rtlCol="0" anchor="t"/>
+          <a:lstStyle/>
+          <a:p>
+            <a:pPr indent="0" marL="0">
+              <a:buNone/>
+            </a:pPr>
+            <a:r>
+              <a:rPr lang="en-US" sz="1300" b="1" dirty="0">
                 <a:solidFill>
                   <a:schemeClr val="tx2"/>
                 </a:solidFill>
               </a:rPr>
-              <a:t>A</a:t>
-            </a:r>
-            <a:endParaRPr lang="en-US" sz="4000" dirty="0"/>
-          </a:p>
-        </p:txBody>
-      </p:sp>
-      <p:sp>
-        <p:nvSpPr>
-          <p:cNvPr id="5" name="Text 3"/>
+              <a:t>サンタ（男女）</a:t>
+            </a:r>
+            <a:endParaRPr lang="en-US" sz="1300" dirty="0"/>
+          </a:p>
+        </p:txBody>
+      </p:sp>
+      <p:sp>
+        <p:nvSpPr>
+          <p:cNvPr id="6" name="Text 3"/>
           <p:cNvSpPr txBox="1"/>
           <p:nvPr/>
         </p:nvSpPr>
         <p:spPr>
           <a:xfrm>
-            <a:off x="457200" y="2880360"/>
-            <a:ext cx="2606040" cy="365760"/>
+            <a:off x="1783080" y="1527048"/>
+            <a:ext cx="1234440" cy="960120"/>
           </a:xfrm>
           <a:prstGeom prst="rect">
             <a:avLst/>
@@ -4820,128 +4314,145 @@
           <a:bodyPr wrap="square" lIns="635" tIns="635" rIns="635" bIns="635" rtlCol="0" anchor="t"/>
           <a:lstStyle/>
           <a:p>
-            <a:pPr algn="ctr" indent="0" marL="0">
-              <a:buNone/>
-            </a:pPr>
-            <a:r>
-              <a:rPr lang="en-US" sz="1500" b="1" dirty="0">
-                <a:solidFill>
-                  <a:schemeClr val="tx2"/>
-                </a:solidFill>
-              </a:rPr>
-              <a:t>スノードーム主役</a:t>
-            </a:r>
-            <a:endParaRPr lang="en-US" sz="1500" dirty="0"/>
-          </a:p>
-        </p:txBody>
-      </p:sp>
-      <p:sp>
-        <p:nvSpPr>
-          <p:cNvPr id="6" name="Text 4"/>
-          <p:cNvSpPr txBox="1"/>
-          <p:nvPr/>
-        </p:nvSpPr>
-        <p:spPr>
-          <a:xfrm>
-            <a:off x="548640" y="3291840"/>
-            <a:ext cx="2423160" cy="914400"/>
-          </a:xfrm>
-          <a:prstGeom prst="rect">
-            <a:avLst/>
-          </a:prstGeom>
-          <a:noFill/>
-          <a:ln/>
-        </p:spPr>
-        <p:txBody>
-          <a:bodyPr wrap="square" lIns="635" tIns="635" rIns="635" bIns="635" rtlCol="0" anchor="t"/>
-          <a:lstStyle/>
-          <a:p>
             <a:pPr indent="0" marL="0">
               <a:buNone/>
             </a:pPr>
             <a:r>
-              <a:rPr lang="en-US" sz="1200" dirty="0">
+              <a:rPr lang="en-US" sz="900" dirty="0">
+                <a:solidFill>
+                  <a:schemeClr val="accent4"/>
+                </a:solidFill>
+              </a:rPr>
+              <a:t>検索語</a:t>
+            </a:r>
+            <a:endParaRPr lang="en-US" sz="1400" dirty="0"/>
+          </a:p>
+          <a:p>
+            <a:pPr indent="0" marL="0">
+              <a:buNone/>
+            </a:pPr>
+            <a:r>
+              <a:rPr lang="en-US" sz="1000" dirty="0">
                 <a:solidFill>
                   <a:schemeClr val="tx1"/>
                 </a:solidFill>
               </a:rPr>
-              <a:t>大きなスノードームの中に雪景色とお店。「あなただけのスノードームをつくろう」</a:t>
-            </a:r>
-            <a:endParaRPr lang="en-US" sz="1200" dirty="0"/>
-          </a:p>
-        </p:txBody>
-      </p:sp>
-      <p:sp>
-        <p:nvSpPr>
-          <p:cNvPr id="7" name="poster_B"/>
+              <a:t>サンタ コスプレ 大人 セット</a:t>
+            </a:r>
+            <a:endParaRPr lang="en-US" sz="1400" dirty="0"/>
+          </a:p>
+          <a:p>
+            <a:pPr indent="0" marL="0">
+              <a:buNone/>
+            </a:pPr>
+            <a:r>
+              <a:rPr lang="en-US" sz="1100" b="1" dirty="0">
+                <a:solidFill>
+                  <a:schemeClr val="accent1"/>
+                </a:solidFill>
+              </a:rPr>
+              <a:t>2,000〜5,000円</a:t>
+            </a:r>
+            <a:endParaRPr lang="en-US" sz="1400" dirty="0"/>
+          </a:p>
+        </p:txBody>
+      </p:sp>
+      <p:sp>
+        <p:nvSpPr>
+          <p:cNvPr id="7" name="cos_1"/>
           <p:cNvSpPr/>
           <p:nvPr/>
         </p:nvSpPr>
         <p:spPr>
           <a:xfrm>
-            <a:off x="3931920" y="1051560"/>
-            <a:ext cx="1234440" cy="1737360"/>
-          </a:xfrm>
-          <a:prstGeom prst="rect">
-            <a:avLst/>
+            <a:off x="3246120" y="960120"/>
+            <a:ext cx="2606040" cy="1600200"/>
+          </a:xfrm>
+          <a:prstGeom prst="roundRect">
+            <a:avLst>
+              <a:gd name="adj" fmla="val 4571"/>
+            </a:avLst>
           </a:prstGeom>
           <a:solidFill>
-            <a:schemeClr val="tx2"/>
+            <a:schemeClr val="bg2"/>
           </a:solidFill>
           <a:ln w="12700">
             <a:solidFill>
-              <a:schemeClr val="tx2"/>
+              <a:schemeClr val="bg2"/>
             </a:solidFill>
             <a:prstDash val="solid"/>
           </a:ln>
         </p:spPr>
       </p:sp>
-      <p:sp>
-        <p:nvSpPr>
-          <p:cNvPr id="8" name="Text 6"/>
+      <p:pic>
+        <p:nvPicPr>
+          <p:cNvPr id="8" name="img_cos_reindeer" descr="トナカイの衣装イメージ">    </p:cNvPr>
+          <p:cNvPicPr>
+            <a:picLocks noChangeAspect="1"/>
+          </p:cNvPicPr>
+          <p:nvPr/>
+        </p:nvPicPr>
+        <p:blipFill>
+          <a:blip r:embed="rId2"/>
+          <a:srcRect l="0" r="0" t="0" b="0"/>
+          <a:stretch/>
+        </p:blipFill>
+        <p:spPr>
+          <a:xfrm>
+            <a:off x="3337560" y="1051560"/>
+            <a:ext cx="1143000" cy="1417320"/>
+          </a:xfrm>
+          <a:prstGeom prst="rect">
+            <a:avLst/>
+          </a:prstGeom>
+        </p:spPr>
+      </p:pic>
+      <p:sp>
+        <p:nvSpPr>
+          <p:cNvPr id="9" name="Text 5"/>
           <p:cNvSpPr txBox="1"/>
           <p:nvPr/>
         </p:nvSpPr>
         <p:spPr>
           <a:xfrm>
-            <a:off x="3931920" y="1051560"/>
-            <a:ext cx="1234440" cy="1737360"/>
-          </a:xfrm>
-          <a:prstGeom prst="rect">
-            <a:avLst/>
-          </a:prstGeom>
-          <a:noFill/>
-          <a:ln/>
-        </p:spPr>
-        <p:txBody>
-          <a:bodyPr wrap="square" lIns="0" tIns="0" rIns="0" bIns="0" rtlCol="0" anchor="ctr"/>
-          <a:lstStyle/>
-          <a:p>
-            <a:pPr algn="ctr" indent="0" marL="0">
-              <a:buNone/>
-            </a:pPr>
-            <a:r>
-              <a:rPr lang="en-US" sz="4000" b="1" dirty="0">
-                <a:solidFill>
-                  <a:schemeClr val="bg1"/>
-                </a:solidFill>
-              </a:rPr>
-              <a:t>B</a:t>
-            </a:r>
-            <a:endParaRPr lang="en-US" sz="4000" dirty="0"/>
-          </a:p>
-        </p:txBody>
-      </p:sp>
-      <p:sp>
-        <p:nvSpPr>
-          <p:cNvPr id="9" name="Text 7"/>
+            <a:off x="4572000" y="1069848"/>
+            <a:ext cx="1234440" cy="457200"/>
+          </a:xfrm>
+          <a:prstGeom prst="rect">
+            <a:avLst/>
+          </a:prstGeom>
+          <a:noFill/>
+          <a:ln/>
+        </p:spPr>
+        <p:txBody>
+          <a:bodyPr wrap="square" lIns="635" tIns="635" rIns="635" bIns="635" rtlCol="0" anchor="t"/>
+          <a:lstStyle/>
+          <a:p>
+            <a:pPr indent="0" marL="0">
+              <a:buNone/>
+            </a:pPr>
+            <a:r>
+              <a:rPr lang="en-US" sz="1300" b="1" dirty="0">
+                <a:solidFill>
+                  <a:schemeClr val="tx2"/>
+                </a:solidFill>
+              </a:rPr>
+              <a:t>トナカイ</a:t>
+            </a:r>
+            <a:endParaRPr lang="en-US" sz="1300" dirty="0"/>
+          </a:p>
+        </p:txBody>
+      </p:sp>
+      <p:sp>
+        <p:nvSpPr>
+          <p:cNvPr id="10" name="Text 6"/>
           <p:cNvSpPr txBox="1"/>
           <p:nvPr/>
         </p:nvSpPr>
         <p:spPr>
           <a:xfrm>
-            <a:off x="3246120" y="2880360"/>
-            <a:ext cx="2606040" cy="365760"/>
+            <a:off x="4572000" y="1527048"/>
+            <a:ext cx="1234440" cy="960120"/>
           </a:xfrm>
           <a:prstGeom prst="rect">
             <a:avLst/>
@@ -4953,128 +4464,145 @@
           <a:bodyPr wrap="square" lIns="635" tIns="635" rIns="635" bIns="635" rtlCol="0" anchor="t"/>
           <a:lstStyle/>
           <a:p>
-            <a:pPr algn="ctr" indent="0" marL="0">
-              <a:buNone/>
-            </a:pPr>
-            <a:r>
-              <a:rPr lang="en-US" sz="1500" b="1" dirty="0">
+            <a:pPr indent="0" marL="0">
+              <a:buNone/>
+            </a:pPr>
+            <a:r>
+              <a:rPr lang="en-US" sz="900" dirty="0">
+                <a:solidFill>
+                  <a:schemeClr val="accent4"/>
+                </a:solidFill>
+              </a:rPr>
+              <a:t>検索語</a:t>
+            </a:r>
+            <a:endParaRPr lang="en-US" sz="1400" dirty="0"/>
+          </a:p>
+          <a:p>
+            <a:pPr indent="0" marL="0">
+              <a:buNone/>
+            </a:pPr>
+            <a:r>
+              <a:rPr lang="en-US" sz="1000" dirty="0">
+                <a:solidFill>
+                  <a:schemeClr val="tx1"/>
+                </a:solidFill>
+              </a:rPr>
+              <a:t>トナカイ 着ぐるみ 大人</a:t>
+            </a:r>
+            <a:endParaRPr lang="en-US" sz="1400" dirty="0"/>
+          </a:p>
+          <a:p>
+            <a:pPr indent="0" marL="0">
+              <a:buNone/>
+            </a:pPr>
+            <a:r>
+              <a:rPr lang="en-US" sz="1100" b="1" dirty="0">
                 <a:solidFill>
                   <a:schemeClr val="accent1"/>
                 </a:solidFill>
               </a:rPr>
-              <a:t>4週カレンダー型（推奨）</a:t>
-            </a:r>
-            <a:endParaRPr lang="en-US" sz="1500" dirty="0"/>
-          </a:p>
-        </p:txBody>
-      </p:sp>
-      <p:sp>
-        <p:nvSpPr>
-          <p:cNvPr id="10" name="Text 8"/>
-          <p:cNvSpPr txBox="1"/>
-          <p:nvPr/>
-        </p:nvSpPr>
-        <p:spPr>
-          <a:xfrm>
-            <a:off x="3337560" y="3291840"/>
-            <a:ext cx="2423160" cy="914400"/>
-          </a:xfrm>
-          <a:prstGeom prst="rect">
-            <a:avLst/>
-          </a:prstGeom>
-          <a:noFill/>
-          <a:ln/>
-        </p:spPr>
-        <p:txBody>
-          <a:bodyPr wrap="square" lIns="635" tIns="635" rIns="635" bIns="635" rtlCol="0" anchor="t"/>
-          <a:lstStyle/>
-          <a:p>
-            <a:pPr indent="0" marL="0">
-              <a:buNone/>
-            </a:pPr>
-            <a:r>
-              <a:rPr lang="en-US" sz="1200" dirty="0">
-                <a:solidFill>
-                  <a:schemeClr val="tx1"/>
-                </a:solidFill>
-              </a:rPr>
-              <a:t>4週の内容をアドベントカレンダー風に配置。「毎週かわる！クリスマスワークショップ」</a:t>
-            </a:r>
-            <a:endParaRPr lang="en-US" sz="1200" dirty="0"/>
-          </a:p>
-        </p:txBody>
-      </p:sp>
-      <p:sp>
-        <p:nvSpPr>
-          <p:cNvPr id="11" name="poster_C"/>
+              <a:t>3,000〜6,000円</a:t>
+            </a:r>
+            <a:endParaRPr lang="en-US" sz="1400" dirty="0"/>
+          </a:p>
+        </p:txBody>
+      </p:sp>
+      <p:sp>
+        <p:nvSpPr>
+          <p:cNvPr id="11" name="cos_2"/>
           <p:cNvSpPr/>
           <p:nvPr/>
         </p:nvSpPr>
         <p:spPr>
           <a:xfrm>
-            <a:off x="6720840" y="1051560"/>
-            <a:ext cx="1234440" cy="1737360"/>
-          </a:xfrm>
-          <a:prstGeom prst="rect">
-            <a:avLst/>
+            <a:off x="6035040" y="960120"/>
+            <a:ext cx="2606040" cy="1600200"/>
+          </a:xfrm>
+          <a:prstGeom prst="roundRect">
+            <a:avLst>
+              <a:gd name="adj" fmla="val 4571"/>
+            </a:avLst>
           </a:prstGeom>
           <a:solidFill>
-            <a:schemeClr val="accent5"/>
+            <a:schemeClr val="bg2"/>
           </a:solidFill>
           <a:ln w="12700">
             <a:solidFill>
-              <a:schemeClr val="accent1"/>
+              <a:schemeClr val="bg2"/>
             </a:solidFill>
             <a:prstDash val="solid"/>
           </a:ln>
         </p:spPr>
       </p:sp>
-      <p:sp>
-        <p:nvSpPr>
-          <p:cNvPr id="12" name="Text 10"/>
+      <p:pic>
+        <p:nvPicPr>
+          <p:cNvPr id="12" name="img_cos_snowman" descr="雪だるまの衣装イメージ">    </p:cNvPr>
+          <p:cNvPicPr>
+            <a:picLocks noChangeAspect="1"/>
+          </p:cNvPicPr>
+          <p:nvPr/>
+        </p:nvPicPr>
+        <p:blipFill>
+          <a:blip r:embed="rId3"/>
+          <a:srcRect l="0" r="0" t="0" b="0"/>
+          <a:stretch/>
+        </p:blipFill>
+        <p:spPr>
+          <a:xfrm>
+            <a:off x="6126480" y="1051560"/>
+            <a:ext cx="1143000" cy="1417320"/>
+          </a:xfrm>
+          <a:prstGeom prst="rect">
+            <a:avLst/>
+          </a:prstGeom>
+        </p:spPr>
+      </p:pic>
+      <p:sp>
+        <p:nvSpPr>
+          <p:cNvPr id="13" name="Text 8"/>
           <p:cNvSpPr txBox="1"/>
           <p:nvPr/>
         </p:nvSpPr>
         <p:spPr>
           <a:xfrm>
-            <a:off x="6720840" y="1051560"/>
-            <a:ext cx="1234440" cy="1737360"/>
-          </a:xfrm>
-          <a:prstGeom prst="rect">
-            <a:avLst/>
-          </a:prstGeom>
-          <a:noFill/>
-          <a:ln/>
-        </p:spPr>
-        <p:txBody>
-          <a:bodyPr wrap="square" lIns="0" tIns="0" rIns="0" bIns="0" rtlCol="0" anchor="ctr"/>
-          <a:lstStyle/>
-          <a:p>
-            <a:pPr algn="ctr" indent="0" marL="0">
-              <a:buNone/>
-            </a:pPr>
-            <a:r>
-              <a:rPr lang="en-US" sz="4000" b="1" dirty="0">
+            <a:off x="7360920" y="1069848"/>
+            <a:ext cx="1234440" cy="457200"/>
+          </a:xfrm>
+          <a:prstGeom prst="rect">
+            <a:avLst/>
+          </a:prstGeom>
+          <a:noFill/>
+          <a:ln/>
+        </p:spPr>
+        <p:txBody>
+          <a:bodyPr wrap="square" lIns="635" tIns="635" rIns="635" bIns="635" rtlCol="0" anchor="t"/>
+          <a:lstStyle/>
+          <a:p>
+            <a:pPr indent="0" marL="0">
+              <a:buNone/>
+            </a:pPr>
+            <a:r>
+              <a:rPr lang="en-US" sz="1300" b="1" dirty="0">
                 <a:solidFill>
                   <a:schemeClr val="tx2"/>
                 </a:solidFill>
               </a:rPr>
-              <a:t>C</a:t>
-            </a:r>
-            <a:endParaRPr lang="en-US" sz="4000" dirty="0"/>
-          </a:p>
-        </p:txBody>
-      </p:sp>
-      <p:sp>
-        <p:nvSpPr>
-          <p:cNvPr id="13" name="Text 11"/>
+              <a:t>雪だるま</a:t>
+            </a:r>
+            <a:endParaRPr lang="en-US" sz="1300" dirty="0"/>
+          </a:p>
+        </p:txBody>
+      </p:sp>
+      <p:sp>
+        <p:nvSpPr>
+          <p:cNvPr id="14" name="Text 9"/>
           <p:cNvSpPr txBox="1"/>
           <p:nvPr/>
         </p:nvSpPr>
         <p:spPr>
           <a:xfrm>
-            <a:off x="6035040" y="2880360"/>
-            <a:ext cx="2606040" cy="365760"/>
+            <a:off x="7360920" y="1527048"/>
+            <a:ext cx="1234440" cy="960120"/>
           </a:xfrm>
           <a:prstGeom prst="rect">
             <a:avLst/>
@@ -5086,31 +4614,145 @@
           <a:bodyPr wrap="square" lIns="635" tIns="635" rIns="635" bIns="635" rtlCol="0" anchor="t"/>
           <a:lstStyle/>
           <a:p>
-            <a:pPr algn="ctr" indent="0" marL="0">
-              <a:buNone/>
-            </a:pPr>
-            <a:r>
-              <a:rPr lang="en-US" sz="1500" b="1" dirty="0">
+            <a:pPr indent="0" marL="0">
+              <a:buNone/>
+            </a:pPr>
+            <a:r>
+              <a:rPr lang="en-US" sz="900" dirty="0">
+                <a:solidFill>
+                  <a:schemeClr val="accent4"/>
+                </a:solidFill>
+              </a:rPr>
+              <a:t>検索語</a:t>
+            </a:r>
+            <a:endParaRPr lang="en-US" sz="1400" dirty="0"/>
+          </a:p>
+          <a:p>
+            <a:pPr indent="0" marL="0">
+              <a:buNone/>
+            </a:pPr>
+            <a:r>
+              <a:rPr lang="en-US" sz="1000" dirty="0">
+                <a:solidFill>
+                  <a:schemeClr val="tx1"/>
+                </a:solidFill>
+              </a:rPr>
+              <a:t>雪だるま 着ぐるみ 大人</a:t>
+            </a:r>
+            <a:endParaRPr lang="en-US" sz="1400" dirty="0"/>
+          </a:p>
+          <a:p>
+            <a:pPr indent="0" marL="0">
+              <a:buNone/>
+            </a:pPr>
+            <a:r>
+              <a:rPr lang="en-US" sz="1100" b="1" dirty="0">
+                <a:solidFill>
+                  <a:schemeClr val="accent1"/>
+                </a:solidFill>
+              </a:rPr>
+              <a:t>3,000〜6,000円</a:t>
+            </a:r>
+            <a:endParaRPr lang="en-US" sz="1400" dirty="0"/>
+          </a:p>
+        </p:txBody>
+      </p:sp>
+      <p:sp>
+        <p:nvSpPr>
+          <p:cNvPr id="15" name="cos_3"/>
+          <p:cNvSpPr/>
+          <p:nvPr/>
+        </p:nvSpPr>
+        <p:spPr>
+          <a:xfrm>
+            <a:off x="457200" y="2697480"/>
+            <a:ext cx="2606040" cy="1600200"/>
+          </a:xfrm>
+          <a:prstGeom prst="roundRect">
+            <a:avLst>
+              <a:gd name="adj" fmla="val 4571"/>
+            </a:avLst>
+          </a:prstGeom>
+          <a:solidFill>
+            <a:schemeClr val="bg2"/>
+          </a:solidFill>
+          <a:ln w="12700">
+            <a:solidFill>
+              <a:schemeClr val="bg2"/>
+            </a:solidFill>
+            <a:prstDash val="solid"/>
+          </a:ln>
+        </p:spPr>
+      </p:sp>
+      <p:pic>
+        <p:nvPicPr>
+          <p:cNvPr id="16" name="img_cos_elf" descr="エルフの衣装イメージ">    </p:cNvPr>
+          <p:cNvPicPr>
+            <a:picLocks noChangeAspect="1"/>
+          </p:cNvPicPr>
+          <p:nvPr/>
+        </p:nvPicPr>
+        <p:blipFill>
+          <a:blip r:embed="rId4"/>
+          <a:srcRect l="0" r="0" t="0" b="0"/>
+          <a:stretch/>
+        </p:blipFill>
+        <p:spPr>
+          <a:xfrm>
+            <a:off x="548640" y="2788920"/>
+            <a:ext cx="1143000" cy="1417320"/>
+          </a:xfrm>
+          <a:prstGeom prst="rect">
+            <a:avLst/>
+          </a:prstGeom>
+        </p:spPr>
+      </p:pic>
+      <p:sp>
+        <p:nvSpPr>
+          <p:cNvPr id="17" name="Text 11"/>
+          <p:cNvSpPr txBox="1"/>
+          <p:nvPr/>
+        </p:nvSpPr>
+        <p:spPr>
+          <a:xfrm>
+            <a:off x="1783080" y="2807208"/>
+            <a:ext cx="1234440" cy="457200"/>
+          </a:xfrm>
+          <a:prstGeom prst="rect">
+            <a:avLst/>
+          </a:prstGeom>
+          <a:noFill/>
+          <a:ln/>
+        </p:spPr>
+        <p:txBody>
+          <a:bodyPr wrap="square" lIns="635" tIns="635" rIns="635" bIns="635" rtlCol="0" anchor="t"/>
+          <a:lstStyle/>
+          <a:p>
+            <a:pPr indent="0" marL="0">
+              <a:buNone/>
+            </a:pPr>
+            <a:r>
+              <a:rPr lang="en-US" sz="1300" b="1" dirty="0">
                 <a:solidFill>
                   <a:schemeClr val="tx2"/>
                 </a:solidFill>
               </a:rPr>
-              <a:t>キャラクター型</a:t>
-            </a:r>
-            <a:endParaRPr lang="en-US" sz="1500" dirty="0"/>
-          </a:p>
-        </p:txBody>
-      </p:sp>
-      <p:sp>
-        <p:nvSpPr>
-          <p:cNvPr id="14" name="Text 12"/>
+              <a:t>エルフ</a:t>
+            </a:r>
+            <a:endParaRPr lang="en-US" sz="1300" dirty="0"/>
+          </a:p>
+        </p:txBody>
+      </p:sp>
+      <p:sp>
+        <p:nvSpPr>
+          <p:cNvPr id="18" name="Text 12"/>
           <p:cNvSpPr txBox="1"/>
           <p:nvPr/>
         </p:nvSpPr>
         <p:spPr>
           <a:xfrm>
-            <a:off x="6126480" y="3291840"/>
-            <a:ext cx="2423160" cy="914400"/>
+            <a:off x="1783080" y="3264408"/>
+            <a:ext cx="1234440" cy="960120"/>
           </a:xfrm>
           <a:prstGeom prst="rect">
             <a:avLst/>
@@ -5126,27 +4768,105 @@
               <a:buNone/>
             </a:pPr>
             <a:r>
-              <a:rPr lang="en-US" sz="1200" dirty="0">
+              <a:rPr lang="en-US" sz="900" dirty="0">
+                <a:solidFill>
+                  <a:schemeClr val="accent4"/>
+                </a:solidFill>
+              </a:rPr>
+              <a:t>検索語</a:t>
+            </a:r>
+            <a:endParaRPr lang="en-US" sz="1400" dirty="0"/>
+          </a:p>
+          <a:p>
+            <a:pPr indent="0" marL="0">
+              <a:buNone/>
+            </a:pPr>
+            <a:r>
+              <a:rPr lang="en-US" sz="1000" dirty="0">
                 <a:solidFill>
                   <a:schemeClr val="tx1"/>
                 </a:solidFill>
               </a:rPr>
-              <a:t>サンタ・雪だるま・トナカイが手招き。完成作品の写真を大きく配置</a:t>
-            </a:r>
-            <a:endParaRPr lang="en-US" sz="1200" dirty="0"/>
-          </a:p>
-        </p:txBody>
-      </p:sp>
-      <p:sp>
-        <p:nvSpPr>
-          <p:cNvPr id="15" name="Text 13"/>
+              <a:t>エルフ コスプレ 大人 クリスマス</a:t>
+            </a:r>
+            <a:endParaRPr lang="en-US" sz="1400" dirty="0"/>
+          </a:p>
+          <a:p>
+            <a:pPr indent="0" marL="0">
+              <a:buNone/>
+            </a:pPr>
+            <a:r>
+              <a:rPr lang="en-US" sz="1100" b="1" dirty="0">
+                <a:solidFill>
+                  <a:schemeClr val="accent1"/>
+                </a:solidFill>
+              </a:rPr>
+              <a:t>2,500〜5,000円</a:t>
+            </a:r>
+            <a:endParaRPr lang="en-US" sz="1400" dirty="0"/>
+          </a:p>
+        </p:txBody>
+      </p:sp>
+      <p:sp>
+        <p:nvSpPr>
+          <p:cNvPr id="19" name="cos_4"/>
+          <p:cNvSpPr/>
+          <p:nvPr/>
+        </p:nvSpPr>
+        <p:spPr>
+          <a:xfrm>
+            <a:off x="3246120" y="2697480"/>
+            <a:ext cx="2606040" cy="1600200"/>
+          </a:xfrm>
+          <a:prstGeom prst="roundRect">
+            <a:avLst>
+              <a:gd name="adj" fmla="val 4571"/>
+            </a:avLst>
+          </a:prstGeom>
+          <a:solidFill>
+            <a:schemeClr val="bg2"/>
+          </a:solidFill>
+          <a:ln w="12700">
+            <a:solidFill>
+              <a:schemeClr val="bg2"/>
+            </a:solidFill>
+            <a:prstDash val="solid"/>
+          </a:ln>
+        </p:spPr>
+      </p:sp>
+      <p:pic>
+        <p:nvPicPr>
+          <p:cNvPr id="20" name="img_cos_gingerbread" descr="ジンジャー ブレッドの衣装イメージ">    </p:cNvPr>
+          <p:cNvPicPr>
+            <a:picLocks noChangeAspect="1"/>
+          </p:cNvPicPr>
+          <p:nvPr/>
+        </p:nvPicPr>
+        <p:blipFill>
+          <a:blip r:embed="rId5"/>
+          <a:srcRect l="0" r="0" t="0" b="0"/>
+          <a:stretch/>
+        </p:blipFill>
+        <p:spPr>
+          <a:xfrm>
+            <a:off x="3337560" y="2788920"/>
+            <a:ext cx="1143000" cy="1417320"/>
+          </a:xfrm>
+          <a:prstGeom prst="rect">
+            <a:avLst/>
+          </a:prstGeom>
+        </p:spPr>
+      </p:pic>
+      <p:sp>
+        <p:nvSpPr>
+          <p:cNvPr id="21" name="Text 14"/>
           <p:cNvSpPr txBox="1"/>
           <p:nvPr/>
         </p:nvSpPr>
         <p:spPr>
           <a:xfrm>
-            <a:off x="457200" y="4297680"/>
-            <a:ext cx="8229600" cy="365760"/>
+            <a:off x="4572000" y="2807208"/>
+            <a:ext cx="1234440" cy="457200"/>
           </a:xfrm>
           <a:prstGeom prst="rect">
             <a:avLst/>
@@ -5162,14 +4882,278 @@
               <a:buNone/>
             </a:pPr>
             <a:r>
-              <a:rPr lang="en-US" sz="1200" dirty="0">
+              <a:rPr lang="en-US" sz="1300" b="1" dirty="0">
+                <a:solidFill>
+                  <a:schemeClr val="tx2"/>
+                </a:solidFill>
+              </a:rPr>
+              <a:t>ジンジャー</a:t>
+            </a:r>
+            <a:endParaRPr lang="en-US" sz="1300" dirty="0"/>
+          </a:p>
+          <a:p>
+            <a:pPr indent="0" marL="0">
+              <a:buNone/>
+            </a:pPr>
+            <a:r>
+              <a:rPr lang="en-US" sz="1300" b="1" dirty="0">
+                <a:solidFill>
+                  <a:schemeClr val="tx2"/>
+                </a:solidFill>
+              </a:rPr>
+              <a:t>ブレッド</a:t>
+            </a:r>
+            <a:endParaRPr lang="en-US" sz="1300" dirty="0"/>
+          </a:p>
+        </p:txBody>
+      </p:sp>
+      <p:sp>
+        <p:nvSpPr>
+          <p:cNvPr id="22" name="Text 15"/>
+          <p:cNvSpPr txBox="1"/>
+          <p:nvPr/>
+        </p:nvSpPr>
+        <p:spPr>
+          <a:xfrm>
+            <a:off x="4572000" y="3264408"/>
+            <a:ext cx="1234440" cy="960120"/>
+          </a:xfrm>
+          <a:prstGeom prst="rect">
+            <a:avLst/>
+          </a:prstGeom>
+          <a:noFill/>
+          <a:ln/>
+        </p:spPr>
+        <p:txBody>
+          <a:bodyPr wrap="square" lIns="635" tIns="635" rIns="635" bIns="635" rtlCol="0" anchor="t"/>
+          <a:lstStyle/>
+          <a:p>
+            <a:pPr indent="0" marL="0">
+              <a:buNone/>
+            </a:pPr>
+            <a:r>
+              <a:rPr lang="en-US" sz="900" dirty="0">
                 <a:solidFill>
                   <a:schemeClr val="accent4"/>
                 </a:solidFill>
               </a:rPr>
-              <a:t>共通：開催日時・対象年齢・参加条件・店舗名記入欄（手書き可）</a:t>
-            </a:r>
-            <a:endParaRPr lang="en-US" sz="1200" dirty="0"/>
+              <a:t>検索語</a:t>
+            </a:r>
+            <a:endParaRPr lang="en-US" sz="1400" dirty="0"/>
+          </a:p>
+          <a:p>
+            <a:pPr indent="0" marL="0">
+              <a:buNone/>
+            </a:pPr>
+            <a:r>
+              <a:rPr lang="en-US" sz="1000" dirty="0">
+                <a:solidFill>
+                  <a:schemeClr val="tx1"/>
+                </a:solidFill>
+              </a:rPr>
+              <a:t>ジンジャーブレッドマン 着ぐるみ</a:t>
+            </a:r>
+            <a:endParaRPr lang="en-US" sz="1400" dirty="0"/>
+          </a:p>
+          <a:p>
+            <a:pPr indent="0" marL="0">
+              <a:buNone/>
+            </a:pPr>
+            <a:r>
+              <a:rPr lang="en-US" sz="1100" b="1" dirty="0">
+                <a:solidFill>
+                  <a:schemeClr val="accent1"/>
+                </a:solidFill>
+              </a:rPr>
+              <a:t>4,000〜8,000円</a:t>
+            </a:r>
+            <a:endParaRPr lang="en-US" sz="1400" dirty="0"/>
+          </a:p>
+        </p:txBody>
+      </p:sp>
+      <p:sp>
+        <p:nvSpPr>
+          <p:cNvPr id="23" name="cos_5"/>
+          <p:cNvSpPr/>
+          <p:nvPr/>
+        </p:nvSpPr>
+        <p:spPr>
+          <a:xfrm>
+            <a:off x="6035040" y="2697480"/>
+            <a:ext cx="2606040" cy="1600200"/>
+          </a:xfrm>
+          <a:prstGeom prst="roundRect">
+            <a:avLst>
+              <a:gd name="adj" fmla="val 4571"/>
+            </a:avLst>
+          </a:prstGeom>
+          <a:solidFill>
+            <a:schemeClr val="bg2"/>
+          </a:solidFill>
+          <a:ln w="12700">
+            <a:solidFill>
+              <a:schemeClr val="bg2"/>
+            </a:solidFill>
+            <a:prstDash val="solid"/>
+          </a:ln>
+        </p:spPr>
+      </p:sp>
+      <p:pic>
+        <p:nvPicPr>
+          <p:cNvPr id="24" name="img_cos_tree" descr="ツリーの衣装イメージ">    </p:cNvPr>
+          <p:cNvPicPr>
+            <a:picLocks noChangeAspect="1"/>
+          </p:cNvPicPr>
+          <p:nvPr/>
+        </p:nvPicPr>
+        <p:blipFill>
+          <a:blip r:embed="rId6"/>
+          <a:srcRect l="0" r="0" t="0" b="0"/>
+          <a:stretch/>
+        </p:blipFill>
+        <p:spPr>
+          <a:xfrm>
+            <a:off x="6126480" y="2788920"/>
+            <a:ext cx="1143000" cy="1417320"/>
+          </a:xfrm>
+          <a:prstGeom prst="rect">
+            <a:avLst/>
+          </a:prstGeom>
+        </p:spPr>
+      </p:pic>
+      <p:sp>
+        <p:nvSpPr>
+          <p:cNvPr id="25" name="Text 17"/>
+          <p:cNvSpPr txBox="1"/>
+          <p:nvPr/>
+        </p:nvSpPr>
+        <p:spPr>
+          <a:xfrm>
+            <a:off x="7360920" y="2807208"/>
+            <a:ext cx="1234440" cy="457200"/>
+          </a:xfrm>
+          <a:prstGeom prst="rect">
+            <a:avLst/>
+          </a:prstGeom>
+          <a:noFill/>
+          <a:ln/>
+        </p:spPr>
+        <p:txBody>
+          <a:bodyPr wrap="square" lIns="635" tIns="635" rIns="635" bIns="635" rtlCol="0" anchor="t"/>
+          <a:lstStyle/>
+          <a:p>
+            <a:pPr indent="0" marL="0">
+              <a:buNone/>
+            </a:pPr>
+            <a:r>
+              <a:rPr lang="en-US" sz="1300" b="1" dirty="0">
+                <a:solidFill>
+                  <a:schemeClr val="tx2"/>
+                </a:solidFill>
+              </a:rPr>
+              <a:t>ツリー</a:t>
+            </a:r>
+            <a:endParaRPr lang="en-US" sz="1300" dirty="0"/>
+          </a:p>
+        </p:txBody>
+      </p:sp>
+      <p:sp>
+        <p:nvSpPr>
+          <p:cNvPr id="26" name="Text 18"/>
+          <p:cNvSpPr txBox="1"/>
+          <p:nvPr/>
+        </p:nvSpPr>
+        <p:spPr>
+          <a:xfrm>
+            <a:off x="7360920" y="3264408"/>
+            <a:ext cx="1234440" cy="960120"/>
+          </a:xfrm>
+          <a:prstGeom prst="rect">
+            <a:avLst/>
+          </a:prstGeom>
+          <a:noFill/>
+          <a:ln/>
+        </p:spPr>
+        <p:txBody>
+          <a:bodyPr wrap="square" lIns="635" tIns="635" rIns="635" bIns="635" rtlCol="0" anchor="t"/>
+          <a:lstStyle/>
+          <a:p>
+            <a:pPr indent="0" marL="0">
+              <a:buNone/>
+            </a:pPr>
+            <a:r>
+              <a:rPr lang="en-US" sz="900" dirty="0">
+                <a:solidFill>
+                  <a:schemeClr val="accent4"/>
+                </a:solidFill>
+              </a:rPr>
+              <a:t>検索語</a:t>
+            </a:r>
+            <a:endParaRPr lang="en-US" sz="1400" dirty="0"/>
+          </a:p>
+          <a:p>
+            <a:pPr indent="0" marL="0">
+              <a:buNone/>
+            </a:pPr>
+            <a:r>
+              <a:rPr lang="en-US" sz="1000" dirty="0">
+                <a:solidFill>
+                  <a:schemeClr val="tx1"/>
+                </a:solidFill>
+              </a:rPr>
+              <a:t>クリスマスツリー ポンチョ 仮装</a:t>
+            </a:r>
+            <a:endParaRPr lang="en-US" sz="1400" dirty="0"/>
+          </a:p>
+          <a:p>
+            <a:pPr indent="0" marL="0">
+              <a:buNone/>
+            </a:pPr>
+            <a:r>
+              <a:rPr lang="en-US" sz="1100" b="1" dirty="0">
+                <a:solidFill>
+                  <a:schemeClr val="accent1"/>
+                </a:solidFill>
+              </a:rPr>
+              <a:t>2,000〜4,000円</a:t>
+            </a:r>
+            <a:endParaRPr lang="en-US" sz="1400" dirty="0"/>
+          </a:p>
+        </p:txBody>
+      </p:sp>
+      <p:sp>
+        <p:nvSpPr>
+          <p:cNvPr id="27" name="Text 19"/>
+          <p:cNvSpPr txBox="1"/>
+          <p:nvPr/>
+        </p:nvSpPr>
+        <p:spPr>
+          <a:xfrm>
+            <a:off x="457200" y="4434840"/>
+            <a:ext cx="8229600" cy="274320"/>
+          </a:xfrm>
+          <a:prstGeom prst="rect">
+            <a:avLst/>
+          </a:prstGeom>
+          <a:noFill/>
+          <a:ln/>
+        </p:spPr>
+        <p:txBody>
+          <a:bodyPr wrap="square" lIns="635" tIns="635" rIns="635" bIns="635" rtlCol="0" anchor="t"/>
+          <a:lstStyle/>
+          <a:p>
+            <a:pPr indent="0" marL="0">
+              <a:buNone/>
+            </a:pPr>
+            <a:r>
+              <a:rPr lang="en-US" sz="1000" dirty="0">
+                <a:solidFill>
+                  <a:schemeClr val="accent4"/>
+                </a:solidFill>
+              </a:rPr>
+              <a:t>画像はAI生成のイメージ。価格は想定（税込・1着）で、Amazonの実商品・在庫は発注前に確認します。</a:t>
+            </a:r>
+            <a:endParaRPr lang="en-US" sz="1000" dirty="0"/>
           </a:p>
         </p:txBody>
       </p:sp>
@@ -5275,47 +5259,46 @@
                   <a:schemeClr val="tx2"/>
                 </a:solidFill>
               </a:rPr>
-              <a:t>運用フロー・スケジュール</a:t>
+              <a:t>B0ボードPOP　デザイン案</a:t>
             </a:r>
             <a:endParaRPr lang="en-US" sz="2400" dirty="0"/>
           </a:p>
         </p:txBody>
       </p:sp>
-      <p:sp>
-        <p:nvSpPr>
-          <p:cNvPr id="3" name="step_0"/>
-          <p:cNvSpPr/>
-          <p:nvPr/>
-        </p:nvSpPr>
-        <p:spPr>
-          <a:xfrm>
-            <a:off x="457200" y="1188720"/>
-            <a:ext cx="1600200" cy="731520"/>
-          </a:xfrm>
-          <a:prstGeom prst="chevron">
-            <a:avLst/>
-          </a:prstGeom>
-          <a:solidFill>
-            <a:schemeClr val="accent1"/>
-          </a:solidFill>
-          <a:ln w="12700">
-            <a:solidFill>
-              <a:schemeClr val="bg1"/>
-            </a:solidFill>
-            <a:prstDash val="solid"/>
-          </a:ln>
-        </p:spPr>
-      </p:sp>
-      <p:sp>
-        <p:nvSpPr>
-          <p:cNvPr id="4" name="Text 2"/>
+      <p:pic>
+        <p:nvPicPr>
+          <p:cNvPr id="3" name="img_poster_a" descr="B0ボードPOP A案">    </p:cNvPr>
+          <p:cNvPicPr>
+            <a:picLocks noChangeAspect="1"/>
+          </p:cNvPicPr>
+          <p:nvPr/>
+        </p:nvPicPr>
+        <p:blipFill>
+          <a:blip r:embed="rId1"/>
+          <a:stretch>
+            <a:fillRect/>
+          </a:stretch>
+        </p:blipFill>
+        <p:spPr>
+          <a:xfrm>
+            <a:off x="777240" y="914400"/>
+            <a:ext cx="1965960" cy="2926080"/>
+          </a:xfrm>
+          <a:prstGeom prst="rect">
+            <a:avLst/>
+          </a:prstGeom>
+        </p:spPr>
+      </p:pic>
+      <p:sp>
+        <p:nvSpPr>
+          <p:cNvPr id="4" name="Text 1"/>
           <p:cNvSpPr txBox="1"/>
           <p:nvPr/>
         </p:nvSpPr>
         <p:spPr>
           <a:xfrm>
-            <a:off x="640080" y="1188720"/>
-            <a:ext cx="1280160" cy="731520"/>
+            <a:off x="868680" y="1207008"/>
+            <a:ext cx="1783080" cy="877824"/>
           </a:xfrm>
           <a:prstGeom prst="rect">
             <a:avLst/>
@@ -5333,322 +5316,151 @@
             <a:r>
               <a:rPr lang="en-US" sz="1300" b="1" dirty="0">
                 <a:solidFill>
-                  <a:schemeClr val="bg1"/>
-                </a:solidFill>
-              </a:rPr>
-              <a:t>ご発注</a:t>
+                  <a:schemeClr val="tx2"/>
+                </a:solidFill>
+              </a:rPr>
+              <a:t>あなただけの</a:t>
             </a:r>
             <a:endParaRPr lang="en-US" sz="1300" dirty="0"/>
           </a:p>
-        </p:txBody>
-      </p:sp>
-      <p:sp>
-        <p:nvSpPr>
-          <p:cNvPr id="5" name="Text 3"/>
+          <a:p>
+            <a:pPr algn="ctr" indent="0" marL="0">
+              <a:buNone/>
+            </a:pPr>
+            <a:r>
+              <a:rPr lang="en-US" sz="1300" b="1" dirty="0">
+                <a:solidFill>
+                  <a:schemeClr val="tx2"/>
+                </a:solidFill>
+              </a:rPr>
+              <a:t>スノードームを</a:t>
+            </a:r>
+            <a:endParaRPr lang="en-US" sz="1300" dirty="0"/>
+          </a:p>
+          <a:p>
+            <a:pPr algn="ctr" indent="0" marL="0">
+              <a:buNone/>
+            </a:pPr>
+            <a:r>
+              <a:rPr lang="en-US" sz="1300" b="1" dirty="0">
+                <a:solidFill>
+                  <a:schemeClr val="tx2"/>
+                </a:solidFill>
+              </a:rPr>
+              <a:t>つくろう</a:t>
+            </a:r>
+            <a:endParaRPr lang="en-US" sz="1300" dirty="0"/>
+          </a:p>
+        </p:txBody>
+      </p:sp>
+      <p:sp>
+        <p:nvSpPr>
+          <p:cNvPr id="5" name="Text 2"/>
           <p:cNvSpPr txBox="1"/>
           <p:nvPr/>
         </p:nvSpPr>
         <p:spPr>
           <a:xfrm>
-            <a:off x="457200" y="2011680"/>
-            <a:ext cx="1600200" cy="685800"/>
-          </a:xfrm>
-          <a:prstGeom prst="rect">
-            <a:avLst/>
-          </a:prstGeom>
-          <a:noFill/>
-          <a:ln/>
-        </p:spPr>
-        <p:txBody>
-          <a:bodyPr wrap="square" lIns="635" tIns="635" rIns="635" bIns="635" rtlCol="0" anchor="t"/>
-          <a:lstStyle/>
-          <a:p>
-            <a:pPr algn="ctr" indent="0" marL="0">
-              <a:buNone/>
-            </a:pPr>
-            <a:r>
-              <a:rPr lang="en-US" sz="1200" dirty="0">
-                <a:solidFill>
-                  <a:schemeClr val="tx1"/>
-                </a:solidFill>
-              </a:rPr>
-              <a:t>10月下旬〜</a:t>
-            </a:r>
-            <a:endParaRPr lang="en-US" sz="1200" dirty="0"/>
-          </a:p>
-          <a:p>
-            <a:pPr algn="ctr" indent="0" marL="0">
-              <a:buNone/>
-            </a:pPr>
-            <a:r>
-              <a:rPr lang="en-US" sz="1200" dirty="0">
-                <a:solidFill>
-                  <a:schemeClr val="tx1"/>
-                </a:solidFill>
-              </a:rPr>
-              <a:t>11月上旬</a:t>
-            </a:r>
-            <a:endParaRPr lang="en-US" sz="1200" dirty="0"/>
-          </a:p>
-        </p:txBody>
-      </p:sp>
-      <p:sp>
-        <p:nvSpPr>
-          <p:cNvPr id="6" name="step_1"/>
-          <p:cNvSpPr/>
-          <p:nvPr/>
-        </p:nvSpPr>
-        <p:spPr>
-          <a:xfrm>
-            <a:off x="2139696" y="1188720"/>
-            <a:ext cx="1600200" cy="731520"/>
-          </a:xfrm>
-          <a:prstGeom prst="chevron">
-            <a:avLst/>
-          </a:prstGeom>
-          <a:solidFill>
-            <a:schemeClr val="accent1"/>
-          </a:solidFill>
-          <a:ln w="12700">
-            <a:solidFill>
-              <a:schemeClr val="bg1"/>
-            </a:solidFill>
-            <a:prstDash val="solid"/>
-          </a:ln>
-        </p:spPr>
-      </p:sp>
-      <p:sp>
-        <p:nvSpPr>
-          <p:cNvPr id="7" name="Text 5"/>
-          <p:cNvSpPr txBox="1"/>
-          <p:nvPr/>
-        </p:nvSpPr>
-        <p:spPr>
-          <a:xfrm>
-            <a:off x="2322576" y="1188720"/>
-            <a:ext cx="1280160" cy="731520"/>
-          </a:xfrm>
-          <a:prstGeom prst="rect">
-            <a:avLst/>
-          </a:prstGeom>
-          <a:noFill/>
-          <a:ln/>
-        </p:spPr>
-        <p:txBody>
-          <a:bodyPr wrap="square" lIns="0" tIns="0" rIns="0" bIns="0" rtlCol="0" anchor="ctr"/>
-          <a:lstStyle/>
-          <a:p>
-            <a:pPr algn="ctr" indent="0" marL="0">
-              <a:buNone/>
-            </a:pPr>
-            <a:r>
-              <a:rPr lang="en-US" sz="1300" b="1" dirty="0">
-                <a:solidFill>
-                  <a:schemeClr val="bg1"/>
-                </a:solidFill>
-              </a:rPr>
-              <a:t>制作・調達</a:t>
-            </a:r>
-            <a:endParaRPr lang="en-US" sz="1300" dirty="0"/>
-          </a:p>
-        </p:txBody>
-      </p:sp>
-      <p:sp>
-        <p:nvSpPr>
-          <p:cNvPr id="8" name="Text 6"/>
-          <p:cNvSpPr txBox="1"/>
-          <p:nvPr/>
-        </p:nvSpPr>
-        <p:spPr>
-          <a:xfrm>
-            <a:off x="2139696" y="2011680"/>
-            <a:ext cx="1600200" cy="685800"/>
-          </a:xfrm>
-          <a:prstGeom prst="rect">
-            <a:avLst/>
-          </a:prstGeom>
-          <a:noFill/>
-          <a:ln/>
-        </p:spPr>
-        <p:txBody>
-          <a:bodyPr wrap="square" lIns="635" tIns="635" rIns="635" bIns="635" rtlCol="0" anchor="t"/>
-          <a:lstStyle/>
-          <a:p>
-            <a:pPr algn="ctr" indent="0" marL="0">
-              <a:buNone/>
-            </a:pPr>
-            <a:r>
-              <a:rPr lang="en-US" sz="1200" dirty="0">
-                <a:solidFill>
-                  <a:schemeClr val="tx1"/>
-                </a:solidFill>
-              </a:rPr>
-              <a:t>キット・ポスター</a:t>
-            </a:r>
-            <a:endParaRPr lang="en-US" sz="1200" dirty="0"/>
-          </a:p>
-          <a:p>
-            <a:pPr algn="ctr" indent="0" marL="0">
-              <a:buNone/>
-            </a:pPr>
-            <a:r>
-              <a:rPr lang="en-US" sz="1200" dirty="0">
-                <a:solidFill>
-                  <a:schemeClr val="tx1"/>
-                </a:solidFill>
-              </a:rPr>
-              <a:t>衣装・ツール</a:t>
-            </a:r>
-            <a:endParaRPr lang="en-US" sz="1200" dirty="0"/>
-          </a:p>
-        </p:txBody>
-      </p:sp>
-      <p:sp>
-        <p:nvSpPr>
-          <p:cNvPr id="9" name="step_2"/>
-          <p:cNvSpPr/>
-          <p:nvPr/>
-        </p:nvSpPr>
-        <p:spPr>
-          <a:xfrm>
-            <a:off x="3822192" y="1188720"/>
-            <a:ext cx="1600200" cy="731520"/>
-          </a:xfrm>
-          <a:prstGeom prst="chevron">
-            <a:avLst/>
-          </a:prstGeom>
-          <a:solidFill>
-            <a:schemeClr val="accent1"/>
-          </a:solidFill>
-          <a:ln w="12700">
-            <a:solidFill>
-              <a:schemeClr val="bg1"/>
-            </a:solidFill>
-            <a:prstDash val="solid"/>
-          </a:ln>
-        </p:spPr>
-      </p:sp>
-      <p:sp>
-        <p:nvSpPr>
-          <p:cNvPr id="10" name="Text 8"/>
-          <p:cNvSpPr txBox="1"/>
-          <p:nvPr/>
-        </p:nvSpPr>
-        <p:spPr>
-          <a:xfrm>
-            <a:off x="4005072" y="1188720"/>
-            <a:ext cx="1280160" cy="731520"/>
-          </a:xfrm>
-          <a:prstGeom prst="rect">
-            <a:avLst/>
-          </a:prstGeom>
-          <a:noFill/>
-          <a:ln/>
-        </p:spPr>
-        <p:txBody>
-          <a:bodyPr wrap="square" lIns="0" tIns="0" rIns="0" bIns="0" rtlCol="0" anchor="ctr"/>
-          <a:lstStyle/>
-          <a:p>
-            <a:pPr algn="ctr" indent="0" marL="0">
-              <a:buNone/>
-            </a:pPr>
-            <a:r>
-              <a:rPr lang="en-US" sz="1300" b="1" dirty="0">
-                <a:solidFill>
-                  <a:schemeClr val="bg1"/>
-                </a:solidFill>
-              </a:rPr>
-              <a:t>配送・検品</a:t>
-            </a:r>
-            <a:endParaRPr lang="en-US" sz="1300" dirty="0"/>
-          </a:p>
-        </p:txBody>
-      </p:sp>
-      <p:sp>
-        <p:nvSpPr>
-          <p:cNvPr id="11" name="Text 9"/>
-          <p:cNvSpPr txBox="1"/>
-          <p:nvPr/>
-        </p:nvSpPr>
-        <p:spPr>
-          <a:xfrm>
-            <a:off x="3822192" y="2011680"/>
-            <a:ext cx="1600200" cy="685800"/>
-          </a:xfrm>
-          <a:prstGeom prst="rect">
-            <a:avLst/>
-          </a:prstGeom>
-          <a:noFill/>
-          <a:ln/>
-        </p:spPr>
-        <p:txBody>
-          <a:bodyPr wrap="square" lIns="635" tIns="635" rIns="635" bIns="635" rtlCol="0" anchor="t"/>
-          <a:lstStyle/>
-          <a:p>
-            <a:pPr algn="ctr" indent="0" marL="0">
-              <a:buNone/>
-            </a:pPr>
-            <a:r>
-              <a:rPr lang="en-US" sz="1200" dirty="0">
-                <a:solidFill>
-                  <a:schemeClr val="tx1"/>
-                </a:solidFill>
-              </a:rPr>
-              <a:t>11月下旬着</a:t>
-            </a:r>
-            <a:endParaRPr lang="en-US" sz="1200" dirty="0"/>
-          </a:p>
-          <a:p>
-            <a:pPr algn="ctr" indent="0" marL="0">
-              <a:buNone/>
-            </a:pPr>
-            <a:r>
-              <a:rPr lang="en-US" sz="1200" dirty="0">
-                <a:solidFill>
-                  <a:schemeClr val="tx1"/>
-                </a:solidFill>
-              </a:rPr>
-              <a:t>検品確認書を返送</a:t>
-            </a:r>
-            <a:endParaRPr lang="en-US" sz="1200" dirty="0"/>
-          </a:p>
-        </p:txBody>
-      </p:sp>
-      <p:sp>
-        <p:nvSpPr>
-          <p:cNvPr id="12" name="step_3"/>
-          <p:cNvSpPr/>
-          <p:nvPr/>
-        </p:nvSpPr>
-        <p:spPr>
-          <a:xfrm>
-            <a:off x="5504688" y="1188720"/>
-            <a:ext cx="1600200" cy="731520"/>
-          </a:xfrm>
-          <a:prstGeom prst="chevron">
+            <a:off x="868680" y="3456432"/>
+            <a:ext cx="1783080" cy="274320"/>
+          </a:xfrm>
+          <a:prstGeom prst="rect">
             <a:avLst/>
           </a:prstGeom>
           <a:solidFill>
             <a:schemeClr val="tx2"/>
           </a:solidFill>
-          <a:ln w="12700">
-            <a:solidFill>
-              <a:schemeClr val="bg1"/>
-            </a:solidFill>
-            <a:prstDash val="solid"/>
-          </a:ln>
-        </p:spPr>
-      </p:sp>
-      <p:sp>
-        <p:nvSpPr>
-          <p:cNvPr id="13" name="Text 11"/>
+          <a:ln/>
+        </p:spPr>
+        <p:txBody>
+          <a:bodyPr wrap="square" lIns="0" tIns="0" rIns="0" bIns="0" rtlCol="0" anchor="ctr"/>
+          <a:lstStyle/>
+          <a:p>
+            <a:pPr algn="ctr" indent="0" marL="0">
+              <a:buNone/>
+            </a:pPr>
+            <a:r>
+              <a:rPr lang="en-US" sz="900" b="1" dirty="0">
+                <a:solidFill>
+                  <a:schemeClr val="bg1"/>
+                </a:solidFill>
+              </a:rPr>
+              <a:t>11/28〜12/25　参加無料</a:t>
+            </a:r>
+            <a:endParaRPr lang="en-US" sz="900" dirty="0"/>
+          </a:p>
+        </p:txBody>
+      </p:sp>
+      <p:sp>
+        <p:nvSpPr>
+          <p:cNvPr id="6" name="Text 3"/>
           <p:cNvSpPr txBox="1"/>
           <p:nvPr/>
         </p:nvSpPr>
         <p:spPr>
           <a:xfrm>
-            <a:off x="5687568" y="1188720"/>
-            <a:ext cx="1280160" cy="731520"/>
+            <a:off x="457200" y="3931920"/>
+            <a:ext cx="2606040" cy="320040"/>
+          </a:xfrm>
+          <a:prstGeom prst="rect">
+            <a:avLst/>
+          </a:prstGeom>
+          <a:noFill/>
+          <a:ln/>
+        </p:spPr>
+        <p:txBody>
+          <a:bodyPr wrap="square" lIns="635" tIns="635" rIns="635" bIns="635" rtlCol="0" anchor="t"/>
+          <a:lstStyle/>
+          <a:p>
+            <a:pPr algn="ctr" indent="0" marL="0">
+              <a:buNone/>
+            </a:pPr>
+            <a:r>
+              <a:rPr lang="en-US" sz="1300" b="1" dirty="0">
+                <a:solidFill>
+                  <a:schemeClr val="tx2"/>
+                </a:solidFill>
+              </a:rPr>
+              <a:t>A案　スノードーム主役</a:t>
+            </a:r>
+            <a:endParaRPr lang="en-US" sz="1300" dirty="0"/>
+          </a:p>
+        </p:txBody>
+      </p:sp>
+      <p:pic>
+        <p:nvPicPr>
+          <p:cNvPr id="7" name="img_poster_b" descr="B0ボードPOP B案">    </p:cNvPr>
+          <p:cNvPicPr>
+            <a:picLocks noChangeAspect="1"/>
+          </p:cNvPicPr>
+          <p:nvPr/>
+        </p:nvPicPr>
+        <p:blipFill>
+          <a:blip r:embed="rId2"/>
+          <a:stretch>
+            <a:fillRect/>
+          </a:stretch>
+        </p:blipFill>
+        <p:spPr>
+          <a:xfrm>
+            <a:off x="3566160" y="914400"/>
+            <a:ext cx="1965960" cy="2926080"/>
+          </a:xfrm>
+          <a:prstGeom prst="rect">
+            <a:avLst/>
+          </a:prstGeom>
+        </p:spPr>
+      </p:pic>
+      <p:sp>
+        <p:nvSpPr>
+          <p:cNvPr id="8" name="Text 4"/>
+          <p:cNvSpPr txBox="1"/>
+          <p:nvPr/>
+        </p:nvSpPr>
+        <p:spPr>
+          <a:xfrm>
+            <a:off x="3657600" y="1016813"/>
+            <a:ext cx="1783080" cy="298460"/>
           </a:xfrm>
           <a:prstGeom prst="rect">
             <a:avLst/>
@@ -5664,12 +5476,234 @@
               <a:buNone/>
             </a:pPr>
             <a:r>
+              <a:rPr lang="en-US" sz="1100" b="1" dirty="0">
+                <a:solidFill>
+                  <a:schemeClr val="tx2"/>
+                </a:solidFill>
+              </a:rPr>
+              <a:t>毎週かわる！</a:t>
+            </a:r>
+            <a:endParaRPr lang="en-US" sz="1100" dirty="0"/>
+          </a:p>
+        </p:txBody>
+      </p:sp>
+      <p:sp>
+        <p:nvSpPr>
+          <p:cNvPr id="9" name="Text 5"/>
+          <p:cNvSpPr txBox="1"/>
+          <p:nvPr/>
+        </p:nvSpPr>
+        <p:spPr>
+          <a:xfrm>
+            <a:off x="3657600" y="3456432"/>
+            <a:ext cx="1783080" cy="274320"/>
+          </a:xfrm>
+          <a:prstGeom prst="rect">
+            <a:avLst/>
+          </a:prstGeom>
+          <a:solidFill>
+            <a:schemeClr val="tx2"/>
+          </a:solidFill>
+          <a:ln/>
+        </p:spPr>
+        <p:txBody>
+          <a:bodyPr wrap="square" lIns="0" tIns="0" rIns="0" bIns="0" rtlCol="0" anchor="ctr"/>
+          <a:lstStyle/>
+          <a:p>
+            <a:pPr algn="ctr" indent="0" marL="0">
+              <a:buNone/>
+            </a:pPr>
+            <a:r>
+              <a:rPr lang="en-US" sz="900" b="1" dirty="0">
+                <a:solidFill>
+                  <a:schemeClr val="bg1"/>
+                </a:solidFill>
+              </a:rPr>
+              <a:t>11/28〜12/25　参加無料</a:t>
+            </a:r>
+            <a:endParaRPr lang="en-US" sz="900" dirty="0"/>
+          </a:p>
+        </p:txBody>
+      </p:sp>
+      <p:sp>
+        <p:nvSpPr>
+          <p:cNvPr id="10" name="Text 6"/>
+          <p:cNvSpPr txBox="1"/>
+          <p:nvPr/>
+        </p:nvSpPr>
+        <p:spPr>
+          <a:xfrm>
+            <a:off x="3246120" y="3931920"/>
+            <a:ext cx="2606040" cy="320040"/>
+          </a:xfrm>
+          <a:prstGeom prst="rect">
+            <a:avLst/>
+          </a:prstGeom>
+          <a:noFill/>
+          <a:ln/>
+        </p:spPr>
+        <p:txBody>
+          <a:bodyPr wrap="square" lIns="635" tIns="635" rIns="635" bIns="635" rtlCol="0" anchor="t"/>
+          <a:lstStyle/>
+          <a:p>
+            <a:pPr algn="ctr" indent="0" marL="0">
+              <a:buNone/>
+            </a:pPr>
+            <a:r>
               <a:rPr lang="en-US" sz="1300" b="1" dirty="0">
                 <a:solidFill>
+                  <a:schemeClr val="accent1"/>
+                </a:solidFill>
+              </a:rPr>
+              <a:t>B案　4週カレンダー型（推奨）</a:t>
+            </a:r>
+            <a:endParaRPr lang="en-US" sz="1300" dirty="0"/>
+          </a:p>
+        </p:txBody>
+      </p:sp>
+      <p:pic>
+        <p:nvPicPr>
+          <p:cNvPr id="11" name="img_poster_c" descr="B0ボードPOP C案">    </p:cNvPr>
+          <p:cNvPicPr>
+            <a:picLocks noChangeAspect="1"/>
+          </p:cNvPicPr>
+          <p:nvPr/>
+        </p:nvPicPr>
+        <p:blipFill>
+          <a:blip r:embed="rId3"/>
+          <a:stretch>
+            <a:fillRect/>
+          </a:stretch>
+        </p:blipFill>
+        <p:spPr>
+          <a:xfrm>
+            <a:off x="6355080" y="914400"/>
+            <a:ext cx="1965960" cy="2926080"/>
+          </a:xfrm>
+          <a:prstGeom prst="rect">
+            <a:avLst/>
+          </a:prstGeom>
+        </p:spPr>
+      </p:pic>
+      <p:sp>
+        <p:nvSpPr>
+          <p:cNvPr id="12" name="Text 7"/>
+          <p:cNvSpPr txBox="1"/>
+          <p:nvPr/>
+        </p:nvSpPr>
+        <p:spPr>
+          <a:xfrm>
+            <a:off x="6446520" y="1207008"/>
+            <a:ext cx="1783080" cy="737372"/>
+          </a:xfrm>
+          <a:prstGeom prst="rect">
+            <a:avLst/>
+          </a:prstGeom>
+          <a:noFill/>
+          <a:ln/>
+        </p:spPr>
+        <p:txBody>
+          <a:bodyPr wrap="square" lIns="0" tIns="0" rIns="0" bIns="0" rtlCol="0" anchor="ctr"/>
+          <a:lstStyle/>
+          <a:p>
+            <a:pPr algn="ctr" indent="0" marL="0">
+              <a:buNone/>
+            </a:pPr>
+            <a:r>
+              <a:rPr lang="en-US" sz="1300" b="1" dirty="0">
+                <a:solidFill>
+                  <a:schemeClr val="tx2"/>
+                </a:solidFill>
+              </a:rPr>
+              <a:t>クリスマス</a:t>
+            </a:r>
+            <a:endParaRPr lang="en-US" sz="1300" dirty="0"/>
+          </a:p>
+          <a:p>
+            <a:pPr algn="ctr" indent="0" marL="0">
+              <a:buNone/>
+            </a:pPr>
+            <a:r>
+              <a:rPr lang="en-US" sz="1300" b="1" dirty="0">
+                <a:solidFill>
+                  <a:schemeClr val="tx2"/>
+                </a:solidFill>
+              </a:rPr>
+              <a:t>ワークショップ開催中</a:t>
+            </a:r>
+            <a:endParaRPr lang="en-US" sz="1300" dirty="0"/>
+          </a:p>
+        </p:txBody>
+      </p:sp>
+      <p:sp>
+        <p:nvSpPr>
+          <p:cNvPr id="13" name="Text 8"/>
+          <p:cNvSpPr txBox="1"/>
+          <p:nvPr/>
+        </p:nvSpPr>
+        <p:spPr>
+          <a:xfrm>
+            <a:off x="6446520" y="3456432"/>
+            <a:ext cx="1783080" cy="274320"/>
+          </a:xfrm>
+          <a:prstGeom prst="rect">
+            <a:avLst/>
+          </a:prstGeom>
+          <a:solidFill>
+            <a:schemeClr val="tx2"/>
+          </a:solidFill>
+          <a:ln/>
+        </p:spPr>
+        <p:txBody>
+          <a:bodyPr wrap="square" lIns="0" tIns="0" rIns="0" bIns="0" rtlCol="0" anchor="ctr"/>
+          <a:lstStyle/>
+          <a:p>
+            <a:pPr algn="ctr" indent="0" marL="0">
+              <a:buNone/>
+            </a:pPr>
+            <a:r>
+              <a:rPr lang="en-US" sz="900" b="1" dirty="0">
+                <a:solidFill>
                   <a:schemeClr val="bg1"/>
                 </a:solidFill>
               </a:rPr>
-              <a:t>店舗で実施</a:t>
+              <a:t>11/28〜12/25　参加無料</a:t>
+            </a:r>
+            <a:endParaRPr lang="en-US" sz="900" dirty="0"/>
+          </a:p>
+        </p:txBody>
+      </p:sp>
+      <p:sp>
+        <p:nvSpPr>
+          <p:cNvPr id="14" name="Text 9"/>
+          <p:cNvSpPr txBox="1"/>
+          <p:nvPr/>
+        </p:nvSpPr>
+        <p:spPr>
+          <a:xfrm>
+            <a:off x="6035040" y="3931920"/>
+            <a:ext cx="2606040" cy="320040"/>
+          </a:xfrm>
+          <a:prstGeom prst="rect">
+            <a:avLst/>
+          </a:prstGeom>
+          <a:noFill/>
+          <a:ln/>
+        </p:spPr>
+        <p:txBody>
+          <a:bodyPr wrap="square" lIns="635" tIns="635" rIns="635" bIns="635" rtlCol="0" anchor="t"/>
+          <a:lstStyle/>
+          <a:p>
+            <a:pPr algn="ctr" indent="0" marL="0">
+              <a:buNone/>
+            </a:pPr>
+            <a:r>
+              <a:rPr lang="en-US" sz="1300" b="1" dirty="0">
+                <a:solidFill>
+                  <a:schemeClr val="tx2"/>
+                </a:solidFill>
+              </a:rPr>
+              <a:t>C案　キャラクター型</a:t>
             </a:r>
             <a:endParaRPr lang="en-US" sz="1300" dirty="0"/>
           </a:p>
@@ -5677,14 +5711,14 @@
       </p:sp>
       <p:sp>
         <p:nvSpPr>
-          <p:cNvPr id="14" name="Text 12"/>
+          <p:cNvPr id="15" name="Text 10"/>
           <p:cNvSpPr txBox="1"/>
           <p:nvPr/>
         </p:nvSpPr>
         <p:spPr>
           <a:xfrm>
-            <a:off x="5504688" y="2011680"/>
-            <a:ext cx="1600200" cy="685800"/>
+            <a:off x="457200" y="4343400"/>
+            <a:ext cx="8229600" cy="320040"/>
           </a:xfrm>
           <a:prstGeom prst="rect">
             <a:avLst/>
@@ -5696,263 +5730,18 @@
           <a:bodyPr wrap="square" lIns="635" tIns="635" rIns="635" bIns="635" rtlCol="0" anchor="t"/>
           <a:lstStyle/>
           <a:p>
-            <a:pPr algn="ctr" indent="0" marL="0">
-              <a:buNone/>
-            </a:pPr>
-            <a:r>
-              <a:rPr lang="en-US" sz="1200" dirty="0">
-                <a:solidFill>
-                  <a:schemeClr val="tx1"/>
-                </a:solidFill>
-              </a:rPr>
-              <a:t>11/28〜12/25</a:t>
-            </a:r>
-            <a:endParaRPr lang="en-US" sz="1200" dirty="0"/>
-          </a:p>
-          <a:p>
-            <a:pPr algn="ctr" indent="0" marL="0">
-              <a:buNone/>
-            </a:pPr>
-            <a:r>
-              <a:rPr lang="en-US" sz="1200" dirty="0">
-                <a:solidFill>
-                  <a:schemeClr val="tx1"/>
-                </a:solidFill>
-              </a:rPr>
-              <a:t>4週間</a:t>
-            </a:r>
-            <a:endParaRPr lang="en-US" sz="1200" dirty="0"/>
-          </a:p>
-        </p:txBody>
-      </p:sp>
-      <p:sp>
-        <p:nvSpPr>
-          <p:cNvPr id="15" name="step_4"/>
-          <p:cNvSpPr/>
-          <p:nvPr/>
-        </p:nvSpPr>
-        <p:spPr>
-          <a:xfrm>
-            <a:off x="7187184" y="1188720"/>
-            <a:ext cx="1600200" cy="731520"/>
-          </a:xfrm>
-          <a:prstGeom prst="chevron">
-            <a:avLst/>
-          </a:prstGeom>
-          <a:solidFill>
-            <a:schemeClr val="accent1"/>
-          </a:solidFill>
-          <a:ln w="12700">
-            <a:solidFill>
-              <a:schemeClr val="bg1"/>
-            </a:solidFill>
-            <a:prstDash val="solid"/>
-          </a:ln>
-        </p:spPr>
-      </p:sp>
-      <p:sp>
-        <p:nvSpPr>
-          <p:cNvPr id="16" name="Text 14"/>
-          <p:cNvSpPr txBox="1"/>
-          <p:nvPr/>
-        </p:nvSpPr>
-        <p:spPr>
-          <a:xfrm>
-            <a:off x="7370064" y="1188720"/>
-            <a:ext cx="1280160" cy="731520"/>
-          </a:xfrm>
-          <a:prstGeom prst="rect">
-            <a:avLst/>
-          </a:prstGeom>
-          <a:noFill/>
-          <a:ln/>
-        </p:spPr>
-        <p:txBody>
-          <a:bodyPr wrap="square" lIns="0" tIns="0" rIns="0" bIns="0" rtlCol="0" anchor="ctr"/>
-          <a:lstStyle/>
-          <a:p>
-            <a:pPr algn="ctr" indent="0" marL="0">
-              <a:buNone/>
-            </a:pPr>
-            <a:r>
-              <a:rPr lang="en-US" sz="1300" b="1" dirty="0">
-                <a:solidFill>
-                  <a:schemeClr val="bg1"/>
-                </a:solidFill>
-              </a:rPr>
-              <a:t>返却</a:t>
-            </a:r>
-            <a:endParaRPr lang="en-US" sz="1300" dirty="0"/>
-          </a:p>
-        </p:txBody>
-      </p:sp>
-      <p:sp>
-        <p:nvSpPr>
-          <p:cNvPr id="17" name="Text 15"/>
-          <p:cNvSpPr txBox="1"/>
-          <p:nvPr/>
-        </p:nvSpPr>
-        <p:spPr>
-          <a:xfrm>
-            <a:off x="7187184" y="2011680"/>
-            <a:ext cx="1600200" cy="685800"/>
-          </a:xfrm>
-          <a:prstGeom prst="rect">
-            <a:avLst/>
-          </a:prstGeom>
-          <a:noFill/>
-          <a:ln/>
-        </p:spPr>
-        <p:txBody>
-          <a:bodyPr wrap="square" lIns="635" tIns="635" rIns="635" bIns="635" rtlCol="0" anchor="t"/>
-          <a:lstStyle/>
-          <a:p>
-            <a:pPr algn="ctr" indent="0" marL="0">
-              <a:buNone/>
-            </a:pPr>
-            <a:r>
-              <a:rPr lang="en-US" sz="1200" dirty="0">
-                <a:solidFill>
-                  <a:schemeClr val="tx1"/>
-                </a:solidFill>
-              </a:rPr>
-              <a:t>アーチを梱包</a:t>
-            </a:r>
-            <a:endParaRPr lang="en-US" sz="1200" dirty="0"/>
-          </a:p>
-          <a:p>
-            <a:pPr algn="ctr" indent="0" marL="0">
-              <a:buNone/>
-            </a:pPr>
-            <a:r>
-              <a:rPr lang="en-US" sz="1200" dirty="0">
-                <a:solidFill>
-                  <a:schemeClr val="tx1"/>
-                </a:solidFill>
-              </a:rPr>
-              <a:t>着払い伝票で返送</a:t>
-            </a:r>
-            <a:endParaRPr lang="en-US" sz="1200" dirty="0"/>
-          </a:p>
-        </p:txBody>
-      </p:sp>
-      <p:sp>
-        <p:nvSpPr>
-          <p:cNvPr id="18" name="ops_note"/>
-          <p:cNvSpPr/>
-          <p:nvPr/>
-        </p:nvSpPr>
-        <p:spPr>
-          <a:xfrm>
-            <a:off x="457200" y="2926080"/>
-            <a:ext cx="8229600" cy="1600200"/>
-          </a:xfrm>
-          <a:prstGeom prst="roundRect">
-            <a:avLst>
-              <a:gd name="adj" fmla="val 4571"/>
-            </a:avLst>
-          </a:prstGeom>
-          <a:solidFill>
-            <a:schemeClr val="bg2"/>
-          </a:solidFill>
-          <a:ln w="12700">
-            <a:solidFill>
-              <a:schemeClr val="bg2"/>
-            </a:solidFill>
-            <a:prstDash val="solid"/>
-          </a:ln>
-        </p:spPr>
-      </p:sp>
-      <p:sp>
-        <p:nvSpPr>
-          <p:cNvPr id="19" name="Text 17"/>
-          <p:cNvSpPr txBox="1"/>
-          <p:nvPr/>
-        </p:nvSpPr>
-        <p:spPr>
-          <a:xfrm>
-            <a:off x="640080" y="3017520"/>
-            <a:ext cx="7863840" cy="1417320"/>
-          </a:xfrm>
-          <a:prstGeom prst="rect">
-            <a:avLst/>
-          </a:prstGeom>
-          <a:noFill/>
-          <a:ln/>
-        </p:spPr>
-        <p:txBody>
-          <a:bodyPr wrap="square" lIns="635" tIns="635" rIns="635" bIns="635" rtlCol="0" anchor="t"/>
-          <a:lstStyle/>
-          <a:p>
             <a:pPr indent="0" marL="0">
-              <a:spcAft>
-                <a:spcPts val="400"/>
-              </a:spcAft>
-              <a:buNone/>
-            </a:pPr>
-            <a:r>
-              <a:rPr lang="en-US" sz="1500" b="1" dirty="0">
-                <a:solidFill>
-                  <a:schemeClr val="tx2"/>
-                </a:solidFill>
-              </a:rPr>
-              <a:t>店舗スタッフ様だけで運営できる体制</a:t>
-            </a:r>
-            <a:endParaRPr lang="en-US" sz="1300" dirty="0"/>
-          </a:p>
-          <a:p>
-            <a:pPr marL="342900" indent="-342900">
-              <a:spcAft>
-                <a:spcPts val="400"/>
-              </a:spcAft>
-              <a:buSzPct val="100000"/>
-              <a:buChar char="•"/>
-            </a:pPr>
-            <a:r>
-              <a:rPr lang="en-US" sz="1300" dirty="0">
-                <a:solidFill>
-                  <a:schemeClr val="tx1"/>
-                </a:solidFill>
-              </a:rPr>
-              <a:t>運営スタッフの派遣はなし。キット・物品と運用マニュアル（準備・受付・制作手順・片付け）をお届けします。</a:t>
-            </a:r>
-            <a:endParaRPr lang="en-US" sz="1300" dirty="0"/>
-          </a:p>
-          <a:p>
-            <a:pPr marL="342900" indent="-342900">
-              <a:spcAft>
-                <a:spcPts val="400"/>
-              </a:spcAft>
-              <a:buSzPct val="100000"/>
-              <a:buChar char="•"/>
-            </a:pPr>
-            <a:r>
-              <a:rPr lang="en-US" sz="1300" dirty="0">
-                <a:solidFill>
-                  <a:schemeClr val="tx1"/>
-                </a:solidFill>
-              </a:rPr>
-              <a:t>週替わりの内容に合わせ、キットは週ごとに仕分けして納品します。</a:t>
-            </a:r>
-            <a:endParaRPr lang="en-US" sz="1300" dirty="0"/>
-          </a:p>
-          <a:p>
-            <a:pPr marL="342900" indent="-342900">
-              <a:spcAft>
-                <a:spcPts val="400"/>
-              </a:spcAft>
-              <a:buSzPct val="100000"/>
-              <a:buChar char="•"/>
-            </a:pPr>
-            <a:r>
-              <a:rPr lang="en-US" sz="1300" dirty="0">
-                <a:solidFill>
-                  <a:schemeClr val="tx1"/>
-                </a:solidFill>
-              </a:rPr>
-              <a:t>アーチの返却は箱・緩衝材を再利用し、同梱の着払い伝票で発送いただくだけです。</a:t>
-            </a:r>
-            <a:endParaRPr lang="en-US" sz="1300" dirty="0"/>
+              <a:buNone/>
+            </a:pPr>
+            <a:r>
+              <a:rPr lang="en-US" sz="1000" dirty="0">
+                <a:solidFill>
+                  <a:schemeClr val="accent4"/>
+                </a:solidFill>
+              </a:rPr>
+              <a:t>共通：開催日時・対象年齢・参加条件・店舗名記入欄（手書き可）　※背景はAI生成のイメージ</a:t>
+            </a:r>
+            <a:endParaRPr lang="en-US" sz="1000" dirty="0"/>
           </a:p>
         </p:txBody>
       </p:sp>
@@ -6058,6 +5847,789 @@
                   <a:schemeClr val="tx2"/>
                 </a:solidFill>
               </a:rPr>
+              <a:t>運用フロー・スケジュール</a:t>
+            </a:r>
+            <a:endParaRPr lang="en-US" sz="2400" dirty="0"/>
+          </a:p>
+        </p:txBody>
+      </p:sp>
+      <p:sp>
+        <p:nvSpPr>
+          <p:cNvPr id="3" name="step_0"/>
+          <p:cNvSpPr/>
+          <p:nvPr/>
+        </p:nvSpPr>
+        <p:spPr>
+          <a:xfrm>
+            <a:off x="457200" y="1188720"/>
+            <a:ext cx="1600200" cy="731520"/>
+          </a:xfrm>
+          <a:prstGeom prst="chevron">
+            <a:avLst/>
+          </a:prstGeom>
+          <a:solidFill>
+            <a:schemeClr val="accent1"/>
+          </a:solidFill>
+          <a:ln w="12700">
+            <a:solidFill>
+              <a:schemeClr val="bg1"/>
+            </a:solidFill>
+            <a:prstDash val="solid"/>
+          </a:ln>
+        </p:spPr>
+      </p:sp>
+      <p:sp>
+        <p:nvSpPr>
+          <p:cNvPr id="4" name="Text 2"/>
+          <p:cNvSpPr txBox="1"/>
+          <p:nvPr/>
+        </p:nvSpPr>
+        <p:spPr>
+          <a:xfrm>
+            <a:off x="640080" y="1188720"/>
+            <a:ext cx="1280160" cy="731520"/>
+          </a:xfrm>
+          <a:prstGeom prst="rect">
+            <a:avLst/>
+          </a:prstGeom>
+          <a:noFill/>
+          <a:ln/>
+        </p:spPr>
+        <p:txBody>
+          <a:bodyPr wrap="square" lIns="0" tIns="0" rIns="0" bIns="0" rtlCol="0" anchor="ctr"/>
+          <a:lstStyle/>
+          <a:p>
+            <a:pPr algn="ctr" indent="0" marL="0">
+              <a:buNone/>
+            </a:pPr>
+            <a:r>
+              <a:rPr lang="en-US" sz="1300" b="1" dirty="0">
+                <a:solidFill>
+                  <a:schemeClr val="bg1"/>
+                </a:solidFill>
+              </a:rPr>
+              <a:t>ご発注</a:t>
+            </a:r>
+            <a:endParaRPr lang="en-US" sz="1300" dirty="0"/>
+          </a:p>
+        </p:txBody>
+      </p:sp>
+      <p:sp>
+        <p:nvSpPr>
+          <p:cNvPr id="5" name="Text 3"/>
+          <p:cNvSpPr txBox="1"/>
+          <p:nvPr/>
+        </p:nvSpPr>
+        <p:spPr>
+          <a:xfrm>
+            <a:off x="457200" y="2011680"/>
+            <a:ext cx="1600200" cy="685800"/>
+          </a:xfrm>
+          <a:prstGeom prst="rect">
+            <a:avLst/>
+          </a:prstGeom>
+          <a:noFill/>
+          <a:ln/>
+        </p:spPr>
+        <p:txBody>
+          <a:bodyPr wrap="square" lIns="635" tIns="635" rIns="635" bIns="635" rtlCol="0" anchor="t"/>
+          <a:lstStyle/>
+          <a:p>
+            <a:pPr algn="ctr" indent="0" marL="0">
+              <a:buNone/>
+            </a:pPr>
+            <a:r>
+              <a:rPr lang="en-US" sz="1200" dirty="0">
+                <a:solidFill>
+                  <a:schemeClr val="tx1"/>
+                </a:solidFill>
+              </a:rPr>
+              <a:t>10月下旬〜</a:t>
+            </a:r>
+            <a:endParaRPr lang="en-US" sz="1200" dirty="0"/>
+          </a:p>
+          <a:p>
+            <a:pPr algn="ctr" indent="0" marL="0">
+              <a:buNone/>
+            </a:pPr>
+            <a:r>
+              <a:rPr lang="en-US" sz="1200" dirty="0">
+                <a:solidFill>
+                  <a:schemeClr val="tx1"/>
+                </a:solidFill>
+              </a:rPr>
+              <a:t>11月上旬</a:t>
+            </a:r>
+            <a:endParaRPr lang="en-US" sz="1200" dirty="0"/>
+          </a:p>
+        </p:txBody>
+      </p:sp>
+      <p:sp>
+        <p:nvSpPr>
+          <p:cNvPr id="6" name="step_1"/>
+          <p:cNvSpPr/>
+          <p:nvPr/>
+        </p:nvSpPr>
+        <p:spPr>
+          <a:xfrm>
+            <a:off x="2139696" y="1188720"/>
+            <a:ext cx="1600200" cy="731520"/>
+          </a:xfrm>
+          <a:prstGeom prst="chevron">
+            <a:avLst/>
+          </a:prstGeom>
+          <a:solidFill>
+            <a:schemeClr val="accent1"/>
+          </a:solidFill>
+          <a:ln w="12700">
+            <a:solidFill>
+              <a:schemeClr val="bg1"/>
+            </a:solidFill>
+            <a:prstDash val="solid"/>
+          </a:ln>
+        </p:spPr>
+      </p:sp>
+      <p:sp>
+        <p:nvSpPr>
+          <p:cNvPr id="7" name="Text 5"/>
+          <p:cNvSpPr txBox="1"/>
+          <p:nvPr/>
+        </p:nvSpPr>
+        <p:spPr>
+          <a:xfrm>
+            <a:off x="2322576" y="1188720"/>
+            <a:ext cx="1280160" cy="731520"/>
+          </a:xfrm>
+          <a:prstGeom prst="rect">
+            <a:avLst/>
+          </a:prstGeom>
+          <a:noFill/>
+          <a:ln/>
+        </p:spPr>
+        <p:txBody>
+          <a:bodyPr wrap="square" lIns="0" tIns="0" rIns="0" bIns="0" rtlCol="0" anchor="ctr"/>
+          <a:lstStyle/>
+          <a:p>
+            <a:pPr algn="ctr" indent="0" marL="0">
+              <a:buNone/>
+            </a:pPr>
+            <a:r>
+              <a:rPr lang="en-US" sz="1300" b="1" dirty="0">
+                <a:solidFill>
+                  <a:schemeClr val="bg1"/>
+                </a:solidFill>
+              </a:rPr>
+              <a:t>制作・調達</a:t>
+            </a:r>
+            <a:endParaRPr lang="en-US" sz="1300" dirty="0"/>
+          </a:p>
+        </p:txBody>
+      </p:sp>
+      <p:sp>
+        <p:nvSpPr>
+          <p:cNvPr id="8" name="Text 6"/>
+          <p:cNvSpPr txBox="1"/>
+          <p:nvPr/>
+        </p:nvSpPr>
+        <p:spPr>
+          <a:xfrm>
+            <a:off x="2139696" y="2011680"/>
+            <a:ext cx="1600200" cy="685800"/>
+          </a:xfrm>
+          <a:prstGeom prst="rect">
+            <a:avLst/>
+          </a:prstGeom>
+          <a:noFill/>
+          <a:ln/>
+        </p:spPr>
+        <p:txBody>
+          <a:bodyPr wrap="square" lIns="635" tIns="635" rIns="635" bIns="635" rtlCol="0" anchor="t"/>
+          <a:lstStyle/>
+          <a:p>
+            <a:pPr algn="ctr" indent="0" marL="0">
+              <a:buNone/>
+            </a:pPr>
+            <a:r>
+              <a:rPr lang="en-US" sz="1200" dirty="0">
+                <a:solidFill>
+                  <a:schemeClr val="tx1"/>
+                </a:solidFill>
+              </a:rPr>
+              <a:t>キット・ポスター</a:t>
+            </a:r>
+            <a:endParaRPr lang="en-US" sz="1200" dirty="0"/>
+          </a:p>
+          <a:p>
+            <a:pPr algn="ctr" indent="0" marL="0">
+              <a:buNone/>
+            </a:pPr>
+            <a:r>
+              <a:rPr lang="en-US" sz="1200" dirty="0">
+                <a:solidFill>
+                  <a:schemeClr val="tx1"/>
+                </a:solidFill>
+              </a:rPr>
+              <a:t>衣装・ツール</a:t>
+            </a:r>
+            <a:endParaRPr lang="en-US" sz="1200" dirty="0"/>
+          </a:p>
+        </p:txBody>
+      </p:sp>
+      <p:sp>
+        <p:nvSpPr>
+          <p:cNvPr id="9" name="step_2"/>
+          <p:cNvSpPr/>
+          <p:nvPr/>
+        </p:nvSpPr>
+        <p:spPr>
+          <a:xfrm>
+            <a:off x="3822192" y="1188720"/>
+            <a:ext cx="1600200" cy="731520"/>
+          </a:xfrm>
+          <a:prstGeom prst="chevron">
+            <a:avLst/>
+          </a:prstGeom>
+          <a:solidFill>
+            <a:schemeClr val="accent1"/>
+          </a:solidFill>
+          <a:ln w="12700">
+            <a:solidFill>
+              <a:schemeClr val="bg1"/>
+            </a:solidFill>
+            <a:prstDash val="solid"/>
+          </a:ln>
+        </p:spPr>
+      </p:sp>
+      <p:sp>
+        <p:nvSpPr>
+          <p:cNvPr id="10" name="Text 8"/>
+          <p:cNvSpPr txBox="1"/>
+          <p:nvPr/>
+        </p:nvSpPr>
+        <p:spPr>
+          <a:xfrm>
+            <a:off x="4005072" y="1188720"/>
+            <a:ext cx="1280160" cy="731520"/>
+          </a:xfrm>
+          <a:prstGeom prst="rect">
+            <a:avLst/>
+          </a:prstGeom>
+          <a:noFill/>
+          <a:ln/>
+        </p:spPr>
+        <p:txBody>
+          <a:bodyPr wrap="square" lIns="0" tIns="0" rIns="0" bIns="0" rtlCol="0" anchor="ctr"/>
+          <a:lstStyle/>
+          <a:p>
+            <a:pPr algn="ctr" indent="0" marL="0">
+              <a:buNone/>
+            </a:pPr>
+            <a:r>
+              <a:rPr lang="en-US" sz="1300" b="1" dirty="0">
+                <a:solidFill>
+                  <a:schemeClr val="bg1"/>
+                </a:solidFill>
+              </a:rPr>
+              <a:t>配送・検品</a:t>
+            </a:r>
+            <a:endParaRPr lang="en-US" sz="1300" dirty="0"/>
+          </a:p>
+        </p:txBody>
+      </p:sp>
+      <p:sp>
+        <p:nvSpPr>
+          <p:cNvPr id="11" name="Text 9"/>
+          <p:cNvSpPr txBox="1"/>
+          <p:nvPr/>
+        </p:nvSpPr>
+        <p:spPr>
+          <a:xfrm>
+            <a:off x="3822192" y="2011680"/>
+            <a:ext cx="1600200" cy="685800"/>
+          </a:xfrm>
+          <a:prstGeom prst="rect">
+            <a:avLst/>
+          </a:prstGeom>
+          <a:noFill/>
+          <a:ln/>
+        </p:spPr>
+        <p:txBody>
+          <a:bodyPr wrap="square" lIns="635" tIns="635" rIns="635" bIns="635" rtlCol="0" anchor="t"/>
+          <a:lstStyle/>
+          <a:p>
+            <a:pPr algn="ctr" indent="0" marL="0">
+              <a:buNone/>
+            </a:pPr>
+            <a:r>
+              <a:rPr lang="en-US" sz="1200" dirty="0">
+                <a:solidFill>
+                  <a:schemeClr val="tx1"/>
+                </a:solidFill>
+              </a:rPr>
+              <a:t>11月下旬着</a:t>
+            </a:r>
+            <a:endParaRPr lang="en-US" sz="1200" dirty="0"/>
+          </a:p>
+          <a:p>
+            <a:pPr algn="ctr" indent="0" marL="0">
+              <a:buNone/>
+            </a:pPr>
+            <a:r>
+              <a:rPr lang="en-US" sz="1200" dirty="0">
+                <a:solidFill>
+                  <a:schemeClr val="tx1"/>
+                </a:solidFill>
+              </a:rPr>
+              <a:t>検品確認書を返送</a:t>
+            </a:r>
+            <a:endParaRPr lang="en-US" sz="1200" dirty="0"/>
+          </a:p>
+        </p:txBody>
+      </p:sp>
+      <p:sp>
+        <p:nvSpPr>
+          <p:cNvPr id="12" name="step_3"/>
+          <p:cNvSpPr/>
+          <p:nvPr/>
+        </p:nvSpPr>
+        <p:spPr>
+          <a:xfrm>
+            <a:off x="5504688" y="1188720"/>
+            <a:ext cx="1600200" cy="731520"/>
+          </a:xfrm>
+          <a:prstGeom prst="chevron">
+            <a:avLst/>
+          </a:prstGeom>
+          <a:solidFill>
+            <a:schemeClr val="tx2"/>
+          </a:solidFill>
+          <a:ln w="12700">
+            <a:solidFill>
+              <a:schemeClr val="bg1"/>
+            </a:solidFill>
+            <a:prstDash val="solid"/>
+          </a:ln>
+        </p:spPr>
+      </p:sp>
+      <p:sp>
+        <p:nvSpPr>
+          <p:cNvPr id="13" name="Text 11"/>
+          <p:cNvSpPr txBox="1"/>
+          <p:nvPr/>
+        </p:nvSpPr>
+        <p:spPr>
+          <a:xfrm>
+            <a:off x="5687568" y="1188720"/>
+            <a:ext cx="1280160" cy="731520"/>
+          </a:xfrm>
+          <a:prstGeom prst="rect">
+            <a:avLst/>
+          </a:prstGeom>
+          <a:noFill/>
+          <a:ln/>
+        </p:spPr>
+        <p:txBody>
+          <a:bodyPr wrap="square" lIns="0" tIns="0" rIns="0" bIns="0" rtlCol="0" anchor="ctr"/>
+          <a:lstStyle/>
+          <a:p>
+            <a:pPr algn="ctr" indent="0" marL="0">
+              <a:buNone/>
+            </a:pPr>
+            <a:r>
+              <a:rPr lang="en-US" sz="1300" b="1" dirty="0">
+                <a:solidFill>
+                  <a:schemeClr val="bg1"/>
+                </a:solidFill>
+              </a:rPr>
+              <a:t>店舗で実施</a:t>
+            </a:r>
+            <a:endParaRPr lang="en-US" sz="1300" dirty="0"/>
+          </a:p>
+        </p:txBody>
+      </p:sp>
+      <p:sp>
+        <p:nvSpPr>
+          <p:cNvPr id="14" name="Text 12"/>
+          <p:cNvSpPr txBox="1"/>
+          <p:nvPr/>
+        </p:nvSpPr>
+        <p:spPr>
+          <a:xfrm>
+            <a:off x="5504688" y="2011680"/>
+            <a:ext cx="1600200" cy="685800"/>
+          </a:xfrm>
+          <a:prstGeom prst="rect">
+            <a:avLst/>
+          </a:prstGeom>
+          <a:noFill/>
+          <a:ln/>
+        </p:spPr>
+        <p:txBody>
+          <a:bodyPr wrap="square" lIns="635" tIns="635" rIns="635" bIns="635" rtlCol="0" anchor="t"/>
+          <a:lstStyle/>
+          <a:p>
+            <a:pPr algn="ctr" indent="0" marL="0">
+              <a:buNone/>
+            </a:pPr>
+            <a:r>
+              <a:rPr lang="en-US" sz="1200" dirty="0">
+                <a:solidFill>
+                  <a:schemeClr val="tx1"/>
+                </a:solidFill>
+              </a:rPr>
+              <a:t>11/28〜12/25</a:t>
+            </a:r>
+            <a:endParaRPr lang="en-US" sz="1200" dirty="0"/>
+          </a:p>
+          <a:p>
+            <a:pPr algn="ctr" indent="0" marL="0">
+              <a:buNone/>
+            </a:pPr>
+            <a:r>
+              <a:rPr lang="en-US" sz="1200" dirty="0">
+                <a:solidFill>
+                  <a:schemeClr val="tx1"/>
+                </a:solidFill>
+              </a:rPr>
+              <a:t>4週間</a:t>
+            </a:r>
+            <a:endParaRPr lang="en-US" sz="1200" dirty="0"/>
+          </a:p>
+        </p:txBody>
+      </p:sp>
+      <p:sp>
+        <p:nvSpPr>
+          <p:cNvPr id="15" name="step_4"/>
+          <p:cNvSpPr/>
+          <p:nvPr/>
+        </p:nvSpPr>
+        <p:spPr>
+          <a:xfrm>
+            <a:off x="7187184" y="1188720"/>
+            <a:ext cx="1600200" cy="731520"/>
+          </a:xfrm>
+          <a:prstGeom prst="chevron">
+            <a:avLst/>
+          </a:prstGeom>
+          <a:solidFill>
+            <a:schemeClr val="accent1"/>
+          </a:solidFill>
+          <a:ln w="12700">
+            <a:solidFill>
+              <a:schemeClr val="bg1"/>
+            </a:solidFill>
+            <a:prstDash val="solid"/>
+          </a:ln>
+        </p:spPr>
+      </p:sp>
+      <p:sp>
+        <p:nvSpPr>
+          <p:cNvPr id="16" name="Text 14"/>
+          <p:cNvSpPr txBox="1"/>
+          <p:nvPr/>
+        </p:nvSpPr>
+        <p:spPr>
+          <a:xfrm>
+            <a:off x="7370064" y="1188720"/>
+            <a:ext cx="1280160" cy="731520"/>
+          </a:xfrm>
+          <a:prstGeom prst="rect">
+            <a:avLst/>
+          </a:prstGeom>
+          <a:noFill/>
+          <a:ln/>
+        </p:spPr>
+        <p:txBody>
+          <a:bodyPr wrap="square" lIns="0" tIns="0" rIns="0" bIns="0" rtlCol="0" anchor="ctr"/>
+          <a:lstStyle/>
+          <a:p>
+            <a:pPr algn="ctr" indent="0" marL="0">
+              <a:buNone/>
+            </a:pPr>
+            <a:r>
+              <a:rPr lang="en-US" sz="1300" b="1" dirty="0">
+                <a:solidFill>
+                  <a:schemeClr val="bg1"/>
+                </a:solidFill>
+              </a:rPr>
+              <a:t>返却</a:t>
+            </a:r>
+            <a:endParaRPr lang="en-US" sz="1300" dirty="0"/>
+          </a:p>
+        </p:txBody>
+      </p:sp>
+      <p:sp>
+        <p:nvSpPr>
+          <p:cNvPr id="17" name="Text 15"/>
+          <p:cNvSpPr txBox="1"/>
+          <p:nvPr/>
+        </p:nvSpPr>
+        <p:spPr>
+          <a:xfrm>
+            <a:off x="7187184" y="2011680"/>
+            <a:ext cx="1600200" cy="685800"/>
+          </a:xfrm>
+          <a:prstGeom prst="rect">
+            <a:avLst/>
+          </a:prstGeom>
+          <a:noFill/>
+          <a:ln/>
+        </p:spPr>
+        <p:txBody>
+          <a:bodyPr wrap="square" lIns="635" tIns="635" rIns="635" bIns="635" rtlCol="0" anchor="t"/>
+          <a:lstStyle/>
+          <a:p>
+            <a:pPr algn="ctr" indent="0" marL="0">
+              <a:buNone/>
+            </a:pPr>
+            <a:r>
+              <a:rPr lang="en-US" sz="1200" dirty="0">
+                <a:solidFill>
+                  <a:schemeClr val="tx1"/>
+                </a:solidFill>
+              </a:rPr>
+              <a:t>アーチを梱包</a:t>
+            </a:r>
+            <a:endParaRPr lang="en-US" sz="1200" dirty="0"/>
+          </a:p>
+          <a:p>
+            <a:pPr algn="ctr" indent="0" marL="0">
+              <a:buNone/>
+            </a:pPr>
+            <a:r>
+              <a:rPr lang="en-US" sz="1200" dirty="0">
+                <a:solidFill>
+                  <a:schemeClr val="tx1"/>
+                </a:solidFill>
+              </a:rPr>
+              <a:t>着払い伝票で返送</a:t>
+            </a:r>
+            <a:endParaRPr lang="en-US" sz="1200" dirty="0"/>
+          </a:p>
+        </p:txBody>
+      </p:sp>
+      <p:sp>
+        <p:nvSpPr>
+          <p:cNvPr id="18" name="ops_note"/>
+          <p:cNvSpPr/>
+          <p:nvPr/>
+        </p:nvSpPr>
+        <p:spPr>
+          <a:xfrm>
+            <a:off x="457200" y="2926080"/>
+            <a:ext cx="8229600" cy="1600200"/>
+          </a:xfrm>
+          <a:prstGeom prst="roundRect">
+            <a:avLst>
+              <a:gd name="adj" fmla="val 4571"/>
+            </a:avLst>
+          </a:prstGeom>
+          <a:solidFill>
+            <a:schemeClr val="bg2"/>
+          </a:solidFill>
+          <a:ln w="12700">
+            <a:solidFill>
+              <a:schemeClr val="bg2"/>
+            </a:solidFill>
+            <a:prstDash val="solid"/>
+          </a:ln>
+        </p:spPr>
+      </p:sp>
+      <p:sp>
+        <p:nvSpPr>
+          <p:cNvPr id="19" name="Text 17"/>
+          <p:cNvSpPr txBox="1"/>
+          <p:nvPr/>
+        </p:nvSpPr>
+        <p:spPr>
+          <a:xfrm>
+            <a:off x="640080" y="3017520"/>
+            <a:ext cx="7863840" cy="1417320"/>
+          </a:xfrm>
+          <a:prstGeom prst="rect">
+            <a:avLst/>
+          </a:prstGeom>
+          <a:noFill/>
+          <a:ln/>
+        </p:spPr>
+        <p:txBody>
+          <a:bodyPr wrap="square" lIns="635" tIns="635" rIns="635" bIns="635" rtlCol="0" anchor="t"/>
+          <a:lstStyle/>
+          <a:p>
+            <a:pPr indent="0" marL="0">
+              <a:spcAft>
+                <a:spcPts val="400"/>
+              </a:spcAft>
+              <a:buNone/>
+            </a:pPr>
+            <a:r>
+              <a:rPr lang="en-US" sz="1500" b="1" dirty="0">
+                <a:solidFill>
+                  <a:schemeClr val="tx2"/>
+                </a:solidFill>
+              </a:rPr>
+              <a:t>店舗スタッフ様だけで運営できる体制</a:t>
+            </a:r>
+            <a:endParaRPr lang="en-US" sz="1300" dirty="0"/>
+          </a:p>
+          <a:p>
+            <a:pPr marL="342900" indent="-342900">
+              <a:spcAft>
+                <a:spcPts val="400"/>
+              </a:spcAft>
+              <a:buSzPct val="100000"/>
+              <a:buChar char="•"/>
+            </a:pPr>
+            <a:r>
+              <a:rPr lang="en-US" sz="1300" dirty="0">
+                <a:solidFill>
+                  <a:schemeClr val="tx1"/>
+                </a:solidFill>
+              </a:rPr>
+              <a:t>運営スタッフの派遣はなし。キット・物品と運用マニュアル（準備・受付・制作手順・片付け）をお届けします。</a:t>
+            </a:r>
+            <a:endParaRPr lang="en-US" sz="1300" dirty="0"/>
+          </a:p>
+          <a:p>
+            <a:pPr marL="342900" indent="-342900">
+              <a:spcAft>
+                <a:spcPts val="400"/>
+              </a:spcAft>
+              <a:buSzPct val="100000"/>
+              <a:buChar char="•"/>
+            </a:pPr>
+            <a:r>
+              <a:rPr lang="en-US" sz="1300" dirty="0">
+                <a:solidFill>
+                  <a:schemeClr val="tx1"/>
+                </a:solidFill>
+              </a:rPr>
+              <a:t>週替わりの内容に合わせ、キットは週ごとに仕分けして納品します。</a:t>
+            </a:r>
+            <a:endParaRPr lang="en-US" sz="1300" dirty="0"/>
+          </a:p>
+          <a:p>
+            <a:pPr marL="342900" indent="-342900">
+              <a:spcAft>
+                <a:spcPts val="400"/>
+              </a:spcAft>
+              <a:buSzPct val="100000"/>
+              <a:buChar char="•"/>
+            </a:pPr>
+            <a:r>
+              <a:rPr lang="en-US" sz="1300" dirty="0">
+                <a:solidFill>
+                  <a:schemeClr val="tx1"/>
+                </a:solidFill>
+              </a:rPr>
+              <a:t>アーチの返却は箱・緩衝材を再利用し、同梱の着払い伝票で発送いただくだけです。</a:t>
+            </a:r>
+            <a:endParaRPr lang="en-US" sz="1300" dirty="0"/>
+          </a:p>
+        </p:txBody>
+      </p:sp>
+      <p:sp>
+        <p:nvSpPr>
+          <p:cNvPr id="25" name="Slide Number Placeholder 0"/>
+          <p:cNvSpPr>
+            <a:spLocks noGrp="1"/>
+          </p:cNvSpPr>
+          <p:nvPr>
+            <p:ph type="sldNum" sz="quarter" idx="4294967295"/>
+          </p:nvPr>
+        </p:nvSpPr>
+        <p:spPr>
+          <a:xfrm>
+            <a:off x="8229600" y="4800600"/>
+            <a:ext cx="457200" cy="228600"/>
+          </a:xfrm>
+          <a:prstGeom prst="rect">
+            <a:avLst/>
+          </a:prstGeom>
+          <a:extLst>
+            <a:ext uri="{C572A759-6A51-4108-AA02-DFA0A04FC94B}">
+              <ma14:wrappingTextBoxFlag xmlns:ma14="http://schemas.microsoft.com/office/mac/drawingml/2011/main" val="0"/>
+            </a:ext>
+          </a:extLst>
+        </p:spPr>
+        <p:txBody>
+          <a:bodyPr/>
+          <a:lstStyle>
+            <a:lvl1pPr>
+              <a:defRPr sz="900">
+                <a:solidFill>
+                  <a:schemeClr val="accent4"/>
+                </a:solidFill>
+              </a:defRPr>
+            </a:lvl1pPr>
+          </a:lstStyle>
+          <a:p>
+            <a:pPr algn="r"/>
+            <a:fld id="{F7021451-1387-4CA6-816F-3879F97B5CBC}" type="slidenum">
+              <a:rPr b="0" lang="en-US"/>
+              <a:t>14</a:t>
+            </a:fld>
+            <a:endParaRPr lang="en-US"/>
+          </a:p>
+        </p:txBody>
+      </p:sp>
+    </p:spTree>
+  </p:cSld>
+  <p:clrMapOvr>
+    <a:masterClrMapping/>
+  </p:clrMapOvr>
+</p:sld>
+</file>
+
+<file path=ppt/slides/slide15.xml><?xml version="1.0" encoding="utf-8"?>
+<p:sld xmlns:a="http://schemas.openxmlformats.org/drawingml/2006/main" xmlns:r="http://schemas.openxmlformats.org/officeDocument/2006/relationships" xmlns:p="http://schemas.openxmlformats.org/presentationml/2006/main">
+  <p:cSld name="Slide 15">
+    <p:spTree>
+      <p:nvGrpSpPr>
+        <p:cNvPr id="1" name=""/>
+        <p:cNvGrpSpPr/>
+        <p:nvPr/>
+      </p:nvGrpSpPr>
+      <p:grpSpPr>
+        <a:xfrm>
+          <a:off x="0" y="0"/>
+          <a:ext cx="0" cy="0"/>
+          <a:chOff x="0" y="0"/>
+          <a:chExt cx="0" cy="0"/>
+        </a:xfrm>
+      </p:grpSpPr>
+      <p:sp>
+        <p:nvSpPr>
+          <p:cNvPr id="2" name="Text 0"/>
+          <p:cNvSpPr/>
+          <p:nvPr>
+            <p:ph idx="100" type="title" hasCustomPrompt="1"/>
+          </p:nvPr>
+        </p:nvSpPr>
+        <p:spPr>
+          <a:xfrm>
+            <a:off x="457200" y="256032"/>
+            <a:ext cx="8229600" cy="548640"/>
+          </a:xfrm>
+          <a:prstGeom prst="rect">
+            <a:avLst/>
+          </a:prstGeom>
+          <a:noFill/>
+          <a:ln/>
+        </p:spPr>
+        <p:txBody>
+          <a:bodyPr wrap="square" lIns="0" tIns="0" rIns="0" bIns="0" rtlCol="0" anchor="ctr"/>
+          <a:lstStyle/>
+          <a:p>
+            <a:pPr indent="0" marL="0">
+              <a:buNone/>
+            </a:pPr>
+            <a:r>
+              <a:rPr lang="en-US" sz="2400" b="1" dirty="0">
+                <a:solidFill>
+                  <a:schemeClr val="tx2"/>
+                </a:solidFill>
+              </a:rPr>
               <a:t>御見積書</a:t>
             </a:r>
             <a:endParaRPr lang="en-US" sz="2400" dirty="0"/>
@@ -6216,7 +6788,7 @@
       </p:sp>
       <p:graphicFrame>
         <p:nvGraphicFramePr>
-          <p:cNvPr id="15" name="quote_table"/>
+          <p:cNvPr id="16" name="quote_table"/>
           <p:cNvGraphicFramePr>
             <a:graphicFrameLocks noGrp="1"/>
           </p:cNvGraphicFramePr>
@@ -8682,7 +9254,7 @@
             <a:pPr algn="r"/>
             <a:fld id="{F7021451-1387-4CA6-816F-3879F97B5CBC}" type="slidenum">
               <a:rPr b="0" lang="en-US"/>
-              <a:t>14</a:t>
+              <a:t>15</a:t>
             </a:fld>
             <a:endParaRPr lang="en-US"/>
           </a:p>
@@ -8696,9 +9268,9 @@
 </p:sld>
 </file>
 
-<file path=ppt/slides/slide15.xml><?xml version="1.0" encoding="utf-8"?>
+<file path=ppt/slides/slide16.xml><?xml version="1.0" encoding="utf-8"?>
 <p:sld xmlns:a="http://schemas.openxmlformats.org/drawingml/2006/main" xmlns:r="http://schemas.openxmlformats.org/officeDocument/2006/relationships" xmlns:p="http://schemas.openxmlformats.org/presentationml/2006/main">
-  <p:cSld name="Slide 15">
+  <p:cSld name="Slide 16">
     <p:spTree>
       <p:nvGrpSpPr>
         <p:cNvPr id="1" name=""/>
@@ -13229,103 +13801,218 @@
                   <a:schemeClr val="tx2"/>
                 </a:solidFill>
               </a:rPr>
-              <a:t>4週ローテーション計画（11月最終週〜12月）</a:t>
+              <a:t>ワークショップキット（イメージ）</a:t>
             </a:r>
             <a:endParaRPr lang="en-US" sz="2400" dirty="0"/>
           </a:p>
         </p:txBody>
       </p:sp>
-      <p:sp>
-        <p:nvSpPr>
-          <p:cNvPr id="3" name="wk_head_0"/>
+      <p:pic>
+        <p:nvPicPr>
+          <p:cNvPr id="3" name="img_kit_snowdome" descr="スノードームキットのイメージ">    </p:cNvPr>
+          <p:cNvPicPr>
+            <a:picLocks noChangeAspect="1"/>
+          </p:cNvPicPr>
+          <p:nvPr/>
+        </p:nvPicPr>
+        <p:blipFill>
+          <a:blip r:embed="rId1"/>
+          <a:stretch>
+            <a:fillRect/>
+          </a:stretch>
+        </p:blipFill>
+        <p:spPr>
+          <a:xfrm>
+            <a:off x="457200" y="960120"/>
+            <a:ext cx="2240280" cy="2240280"/>
+          </a:xfrm>
+          <a:prstGeom prst="rect">
+            <a:avLst/>
+          </a:prstGeom>
+        </p:spPr>
+      </p:pic>
+      <p:sp>
+        <p:nvSpPr>
+          <p:cNvPr id="4" name="Text 1"/>
+          <p:cNvSpPr txBox="1"/>
+          <p:nvPr/>
+        </p:nvSpPr>
+        <p:spPr>
+          <a:xfrm>
+            <a:off x="2788920" y="1005840"/>
+            <a:ext cx="1737360" cy="365760"/>
+          </a:xfrm>
+          <a:prstGeom prst="rect">
+            <a:avLst/>
+          </a:prstGeom>
+          <a:noFill/>
+          <a:ln/>
+        </p:spPr>
+        <p:txBody>
+          <a:bodyPr wrap="square" lIns="635" tIns="635" rIns="635" bIns="635" rtlCol="0" anchor="t"/>
+          <a:lstStyle/>
+          <a:p>
+            <a:pPr indent="0" marL="0">
+              <a:buNone/>
+            </a:pPr>
+            <a:r>
+              <a:rPr lang="en-US" sz="1300" b="1" dirty="0">
+                <a:solidFill>
+                  <a:schemeClr val="tx2"/>
+                </a:solidFill>
+              </a:rPr>
+              <a:t>スノードームキット</a:t>
+            </a:r>
+            <a:endParaRPr lang="en-US" sz="1300" dirty="0"/>
+          </a:p>
+        </p:txBody>
+      </p:sp>
+      <p:sp>
+        <p:nvSpPr>
+          <p:cNvPr id="5" name="Text 2"/>
+          <p:cNvSpPr txBox="1"/>
+          <p:nvPr/>
+        </p:nvSpPr>
+        <p:spPr>
+          <a:xfrm>
+            <a:off x="2788920" y="1417320"/>
+            <a:ext cx="1737360" cy="1737360"/>
+          </a:xfrm>
+          <a:prstGeom prst="rect">
+            <a:avLst/>
+          </a:prstGeom>
+          <a:noFill/>
+          <a:ln/>
+        </p:spPr>
+        <p:txBody>
+          <a:bodyPr wrap="square" lIns="635" tIns="635" rIns="635" bIns="635" rtlCol="0" anchor="t"/>
+          <a:lstStyle/>
+          <a:p>
+            <a:pPr indent="0" marL="0">
+              <a:buNone/>
+            </a:pPr>
+            <a:r>
+              <a:rPr lang="en-US" sz="1100" dirty="0">
+                <a:solidFill>
+                  <a:schemeClr val="tx1"/>
+                </a:solidFill>
+              </a:rPr>
+              <a:t>ドーム・台座・ミニフィギュア（サンタ/ツリー/雪だるま）・ラメ雪・のり</a:t>
+            </a:r>
+            <a:endParaRPr lang="en-US" sz="1100" dirty="0"/>
+          </a:p>
+        </p:txBody>
+      </p:sp>
+      <p:pic>
+        <p:nvPicPr>
+          <p:cNvPr id="6" name="img_kit_squeeze" descr="スクイーズキットのイメージ">    </p:cNvPr>
+          <p:cNvPicPr>
+            <a:picLocks noChangeAspect="1"/>
+          </p:cNvPicPr>
+          <p:nvPr/>
+        </p:nvPicPr>
+        <p:blipFill>
+          <a:blip r:embed="rId2"/>
+          <a:stretch>
+            <a:fillRect/>
+          </a:stretch>
+        </p:blipFill>
+        <p:spPr>
+          <a:xfrm>
+            <a:off x="4663440" y="960120"/>
+            <a:ext cx="2240280" cy="2240280"/>
+          </a:xfrm>
+          <a:prstGeom prst="rect">
+            <a:avLst/>
+          </a:prstGeom>
+        </p:spPr>
+      </p:pic>
+      <p:sp>
+        <p:nvSpPr>
+          <p:cNvPr id="7" name="Text 3"/>
+          <p:cNvSpPr txBox="1"/>
+          <p:nvPr/>
+        </p:nvSpPr>
+        <p:spPr>
+          <a:xfrm>
+            <a:off x="6995160" y="1005840"/>
+            <a:ext cx="1737360" cy="365760"/>
+          </a:xfrm>
+          <a:prstGeom prst="rect">
+            <a:avLst/>
+          </a:prstGeom>
+          <a:noFill/>
+          <a:ln/>
+        </p:spPr>
+        <p:txBody>
+          <a:bodyPr wrap="square" lIns="635" tIns="635" rIns="635" bIns="635" rtlCol="0" anchor="t"/>
+          <a:lstStyle/>
+          <a:p>
+            <a:pPr indent="0" marL="0">
+              <a:buNone/>
+            </a:pPr>
+            <a:r>
+              <a:rPr lang="en-US" sz="1300" b="1" dirty="0">
+                <a:solidFill>
+                  <a:schemeClr val="tx2"/>
+                </a:solidFill>
+              </a:rPr>
+              <a:t>スクイーズキット</a:t>
+            </a:r>
+            <a:endParaRPr lang="en-US" sz="1300" dirty="0"/>
+          </a:p>
+        </p:txBody>
+      </p:sp>
+      <p:sp>
+        <p:nvSpPr>
+          <p:cNvPr id="8" name="Text 4"/>
+          <p:cNvSpPr txBox="1"/>
+          <p:nvPr/>
+        </p:nvSpPr>
+        <p:spPr>
+          <a:xfrm>
+            <a:off x="6995160" y="1417320"/>
+            <a:ext cx="1737360" cy="1737360"/>
+          </a:xfrm>
+          <a:prstGeom prst="rect">
+            <a:avLst/>
+          </a:prstGeom>
+          <a:noFill/>
+          <a:ln/>
+        </p:spPr>
+        <p:txBody>
+          <a:bodyPr wrap="square" lIns="635" tIns="635" rIns="635" bIns="635" rtlCol="0" anchor="t"/>
+          <a:lstStyle/>
+          <a:p>
+            <a:pPr indent="0" marL="0">
+              <a:buNone/>
+            </a:pPr>
+            <a:r>
+              <a:rPr lang="en-US" sz="1100" dirty="0">
+                <a:solidFill>
+                  <a:schemeClr val="tx1"/>
+                </a:solidFill>
+              </a:rPr>
+              <a:t>クリスマス型モールド・計量カップ・カラー液（赤/緑/白）・マジックパウダー</a:t>
+            </a:r>
+            <a:endParaRPr lang="en-US" sz="1100" dirty="0"/>
+          </a:p>
+        </p:txBody>
+      </p:sp>
+      <p:sp>
+        <p:nvSpPr>
+          <p:cNvPr id="9" name="kit_qty"/>
           <p:cNvSpPr/>
           <p:nvPr/>
         </p:nvSpPr>
         <p:spPr>
           <a:xfrm>
-            <a:off x="457200" y="1051560"/>
-            <a:ext cx="1920240" cy="685800"/>
+            <a:off x="457200" y="3429000"/>
+            <a:ext cx="8229600" cy="777240"/>
           </a:xfrm>
           <a:prstGeom prst="roundRect">
             <a:avLst>
-              <a:gd name="adj" fmla="val 10667"/>
-            </a:avLst>
-          </a:prstGeom>
-          <a:solidFill>
-            <a:schemeClr val="accent1"/>
-          </a:solidFill>
-          <a:ln w="12700">
-            <a:solidFill>
-              <a:schemeClr val="accent1"/>
-            </a:solidFill>
-            <a:prstDash val="solid"/>
-          </a:ln>
-        </p:spPr>
-      </p:sp>
-      <p:sp>
-        <p:nvSpPr>
-          <p:cNvPr id="4" name="Text 2"/>
-          <p:cNvSpPr txBox="1"/>
-          <p:nvPr/>
-        </p:nvSpPr>
-        <p:spPr>
-          <a:xfrm>
-            <a:off x="457200" y="1051560"/>
-            <a:ext cx="1920240" cy="685800"/>
-          </a:xfrm>
-          <a:prstGeom prst="rect">
-            <a:avLst/>
-          </a:prstGeom>
-          <a:noFill/>
-          <a:ln/>
-        </p:spPr>
-        <p:txBody>
-          <a:bodyPr wrap="square" lIns="0" tIns="0" rIns="0" bIns="0" rtlCol="0" anchor="ctr"/>
-          <a:lstStyle/>
-          <a:p>
-            <a:pPr algn="ctr" indent="0" marL="0">
-              <a:buNone/>
-            </a:pPr>
-            <a:r>
-              <a:rPr lang="en-US" sz="1600" b="1" dirty="0">
-                <a:solidFill>
-                  <a:schemeClr val="bg1"/>
-                </a:solidFill>
-              </a:rPr>
-              <a:t>第1週</a:t>
-            </a:r>
-            <a:endParaRPr lang="en-US" sz="1400" dirty="0"/>
-          </a:p>
-          <a:p>
-            <a:pPr algn="ctr" indent="0" marL="0">
-              <a:buNone/>
-            </a:pPr>
-            <a:r>
-              <a:rPr lang="en-US" sz="1100" dirty="0">
-                <a:solidFill>
-                  <a:schemeClr val="bg1"/>
-                </a:solidFill>
-              </a:rPr>
-              <a:t>11/28(土)〜12/4(金)</a:t>
-            </a:r>
-            <a:endParaRPr lang="en-US" sz="1400" dirty="0"/>
-          </a:p>
-        </p:txBody>
-      </p:sp>
-      <p:sp>
-        <p:nvSpPr>
-          <p:cNvPr id="5" name="wk_body_0"/>
-          <p:cNvSpPr/>
-          <p:nvPr/>
-        </p:nvSpPr>
-        <p:spPr>
-          <a:xfrm>
-            <a:off x="457200" y="1828800"/>
-            <a:ext cx="1920240" cy="2103120"/>
-          </a:xfrm>
-          <a:prstGeom prst="roundRect">
-            <a:avLst>
-              <a:gd name="adj" fmla="val 3810"/>
+              <a:gd name="adj" fmla="val 9412"/>
             </a:avLst>
           </a:prstGeom>
           <a:solidFill>
@@ -13341,14 +14028,14 @@
       </p:sp>
       <p:sp>
         <p:nvSpPr>
-          <p:cNvPr id="6" name="Text 4"/>
+          <p:cNvPr id="10" name="Text 6"/>
           <p:cNvSpPr txBox="1"/>
           <p:nvPr/>
         </p:nvSpPr>
         <p:spPr>
           <a:xfrm>
-            <a:off x="566928" y="1920240"/>
-            <a:ext cx="1700784" cy="1920240"/>
+            <a:off x="640080" y="3493008"/>
+            <a:ext cx="7863840" cy="658368"/>
           </a:xfrm>
           <a:prstGeom prst="rect">
             <a:avLst/>
@@ -13364,750 +14051,28 @@
               <a:buNone/>
             </a:pPr>
             <a:r>
+              <a:rPr lang="en-US" sz="1400" b="1" dirty="0">
+                <a:solidFill>
+                  <a:schemeClr val="tx2"/>
+                </a:solidFill>
+              </a:rPr>
+              <a:t>1地区 300個／週 × 4週 ＝ 1,200個（10地区で計12,000個）</a:t>
+            </a:r>
+            <a:endParaRPr lang="en-US" sz="1400" dirty="0"/>
+          </a:p>
+          <a:p>
+            <a:pPr indent="0" marL="0">
+              <a:buNone/>
+            </a:pPr>
+            <a:r>
               <a:rPr lang="en-US" sz="1100" dirty="0">
                 <a:solidFill>
-                  <a:schemeClr val="accent4"/>
-                </a:solidFill>
-              </a:rPr>
-              <a:t>ワークショップ</a:t>
+                  <a:schemeClr val="tx1"/>
+                </a:solidFill>
+              </a:rPr>
+              <a:t>週ごとに仕分けて納品。手順カード・見本1点を同梱。※画像はAI生成のイメージ</a:t>
             </a:r>
             <a:endParaRPr lang="en-US" sz="1400" dirty="0"/>
-          </a:p>
-          <a:p>
-            <a:pPr indent="0" marL="0">
-              <a:buNone/>
-            </a:pPr>
-            <a:r>
-              <a:rPr lang="en-US" sz="1600" b="1" dirty="0">
-                <a:solidFill>
-                  <a:schemeClr val="tx2"/>
-                </a:solidFill>
-              </a:rPr>
-              <a:t>スノードーム</a:t>
-            </a:r>
-            <a:endParaRPr lang="en-US" sz="1400" dirty="0"/>
-          </a:p>
-          <a:p>
-            <a:pPr indent="0" marL="0">
-              <a:buNone/>
-            </a:pPr>
-            <a:r>
-              <a:rPr lang="en-US" sz="1200" dirty="0">
-                <a:solidFill>
-                  <a:schemeClr val="tx1"/>
-                </a:solidFill>
-              </a:rPr>
-              <a:t>サンタモチーフ</a:t>
-            </a:r>
-            <a:endParaRPr lang="en-US" sz="1400" dirty="0"/>
-          </a:p>
-          <a:p>
-            <a:pPr indent="0" marL="0">
-              <a:buNone/>
-            </a:pPr>
-            <a:r>
-              <a:rPr lang="en-US" sz="800" dirty="0">
-                <a:solidFill>
-                  <a:schemeClr val="tx1"/>
-                </a:solidFill>
-              </a:rPr>
-              <a:t> </a:t>
-            </a:r>
-            <a:endParaRPr lang="en-US" sz="1400" dirty="0"/>
-          </a:p>
-          <a:p>
-            <a:pPr indent="0" marL="0">
-              <a:buNone/>
-            </a:pPr>
-            <a:r>
-              <a:rPr lang="en-US" sz="1100" dirty="0">
-                <a:solidFill>
-                  <a:schemeClr val="accent4"/>
-                </a:solidFill>
-              </a:rPr>
-              <a:t>コスプレ</a:t>
-            </a:r>
-            <a:endParaRPr lang="en-US" sz="1400" dirty="0"/>
-          </a:p>
-          <a:p>
-            <a:pPr indent="0" marL="0">
-              <a:buNone/>
-            </a:pPr>
-            <a:r>
-              <a:rPr lang="en-US" sz="1200" dirty="0">
-                <a:solidFill>
-                  <a:schemeClr val="tx1"/>
-                </a:solidFill>
-              </a:rPr>
-              <a:t>サンタ／トナカイ</a:t>
-            </a:r>
-            <a:endParaRPr lang="en-US" sz="1400" dirty="0"/>
-          </a:p>
-        </p:txBody>
-      </p:sp>
-      <p:sp>
-        <p:nvSpPr>
-          <p:cNvPr id="7" name="wk_head_1"/>
-          <p:cNvSpPr/>
-          <p:nvPr/>
-        </p:nvSpPr>
-        <p:spPr>
-          <a:xfrm>
-            <a:off x="2560320" y="1051560"/>
-            <a:ext cx="1920240" cy="685800"/>
-          </a:xfrm>
-          <a:prstGeom prst="roundRect">
-            <a:avLst>
-              <a:gd name="adj" fmla="val 10667"/>
-            </a:avLst>
-          </a:prstGeom>
-          <a:solidFill>
-            <a:schemeClr val="tx2"/>
-          </a:solidFill>
-          <a:ln w="12700">
-            <a:solidFill>
-              <a:schemeClr val="tx2"/>
-            </a:solidFill>
-            <a:prstDash val="solid"/>
-          </a:ln>
-        </p:spPr>
-      </p:sp>
-      <p:sp>
-        <p:nvSpPr>
-          <p:cNvPr id="8" name="Text 6"/>
-          <p:cNvSpPr txBox="1"/>
-          <p:nvPr/>
-        </p:nvSpPr>
-        <p:spPr>
-          <a:xfrm>
-            <a:off x="2560320" y="1051560"/>
-            <a:ext cx="1920240" cy="685800"/>
-          </a:xfrm>
-          <a:prstGeom prst="rect">
-            <a:avLst/>
-          </a:prstGeom>
-          <a:noFill/>
-          <a:ln/>
-        </p:spPr>
-        <p:txBody>
-          <a:bodyPr wrap="square" lIns="0" tIns="0" rIns="0" bIns="0" rtlCol="0" anchor="ctr"/>
-          <a:lstStyle/>
-          <a:p>
-            <a:pPr algn="ctr" indent="0" marL="0">
-              <a:buNone/>
-            </a:pPr>
-            <a:r>
-              <a:rPr lang="en-US" sz="1600" b="1" dirty="0">
-                <a:solidFill>
-                  <a:schemeClr val="bg1"/>
-                </a:solidFill>
-              </a:rPr>
-              <a:t>第2週</a:t>
-            </a:r>
-            <a:endParaRPr lang="en-US" sz="1400" dirty="0"/>
-          </a:p>
-          <a:p>
-            <a:pPr algn="ctr" indent="0" marL="0">
-              <a:buNone/>
-            </a:pPr>
-            <a:r>
-              <a:rPr lang="en-US" sz="1100" dirty="0">
-                <a:solidFill>
-                  <a:schemeClr val="bg1"/>
-                </a:solidFill>
-              </a:rPr>
-              <a:t>12/5(土)〜12/11(金)</a:t>
-            </a:r>
-            <a:endParaRPr lang="en-US" sz="1400" dirty="0"/>
-          </a:p>
-        </p:txBody>
-      </p:sp>
-      <p:sp>
-        <p:nvSpPr>
-          <p:cNvPr id="9" name="wk_body_1"/>
-          <p:cNvSpPr/>
-          <p:nvPr/>
-        </p:nvSpPr>
-        <p:spPr>
-          <a:xfrm>
-            <a:off x="2560320" y="1828800"/>
-            <a:ext cx="1920240" cy="2103120"/>
-          </a:xfrm>
-          <a:prstGeom prst="roundRect">
-            <a:avLst>
-              <a:gd name="adj" fmla="val 3810"/>
-            </a:avLst>
-          </a:prstGeom>
-          <a:solidFill>
-            <a:schemeClr val="bg2"/>
-          </a:solidFill>
-          <a:ln w="12700">
-            <a:solidFill>
-              <a:schemeClr val="bg2"/>
-            </a:solidFill>
-            <a:prstDash val="solid"/>
-          </a:ln>
-        </p:spPr>
-      </p:sp>
-      <p:sp>
-        <p:nvSpPr>
-          <p:cNvPr id="10" name="Text 8"/>
-          <p:cNvSpPr txBox="1"/>
-          <p:nvPr/>
-        </p:nvSpPr>
-        <p:spPr>
-          <a:xfrm>
-            <a:off x="2670048" y="1920240"/>
-            <a:ext cx="1700784" cy="1920240"/>
-          </a:xfrm>
-          <a:prstGeom prst="rect">
-            <a:avLst/>
-          </a:prstGeom>
-          <a:noFill/>
-          <a:ln/>
-        </p:spPr>
-        <p:txBody>
-          <a:bodyPr wrap="square" lIns="635" tIns="635" rIns="635" bIns="635" rtlCol="0" anchor="t"/>
-          <a:lstStyle/>
-          <a:p>
-            <a:pPr indent="0" marL="0">
-              <a:buNone/>
-            </a:pPr>
-            <a:r>
-              <a:rPr lang="en-US" sz="1100" dirty="0">
-                <a:solidFill>
-                  <a:schemeClr val="accent4"/>
-                </a:solidFill>
-              </a:rPr>
-              <a:t>ワークショップ</a:t>
-            </a:r>
-            <a:endParaRPr lang="en-US" sz="1400" dirty="0"/>
-          </a:p>
-          <a:p>
-            <a:pPr indent="0" marL="0">
-              <a:buNone/>
-            </a:pPr>
-            <a:r>
-              <a:rPr lang="en-US" sz="1600" b="1" dirty="0">
-                <a:solidFill>
-                  <a:schemeClr val="tx2"/>
-                </a:solidFill>
-              </a:rPr>
-              <a:t>スクイーズ</a:t>
-            </a:r>
-            <a:endParaRPr lang="en-US" sz="1400" dirty="0"/>
-          </a:p>
-          <a:p>
-            <a:pPr indent="0" marL="0">
-              <a:buNone/>
-            </a:pPr>
-            <a:r>
-              <a:rPr lang="en-US" sz="1200" dirty="0">
-                <a:solidFill>
-                  <a:schemeClr val="tx1"/>
-                </a:solidFill>
-              </a:rPr>
-              <a:t>ツリー・ブーツ型</a:t>
-            </a:r>
-            <a:endParaRPr lang="en-US" sz="1400" dirty="0"/>
-          </a:p>
-          <a:p>
-            <a:pPr indent="0" marL="0">
-              <a:buNone/>
-            </a:pPr>
-            <a:r>
-              <a:rPr lang="en-US" sz="800" dirty="0">
-                <a:solidFill>
-                  <a:schemeClr val="tx1"/>
-                </a:solidFill>
-              </a:rPr>
-              <a:t> </a:t>
-            </a:r>
-            <a:endParaRPr lang="en-US" sz="1400" dirty="0"/>
-          </a:p>
-          <a:p>
-            <a:pPr indent="0" marL="0">
-              <a:buNone/>
-            </a:pPr>
-            <a:r>
-              <a:rPr lang="en-US" sz="1100" dirty="0">
-                <a:solidFill>
-                  <a:schemeClr val="accent4"/>
-                </a:solidFill>
-              </a:rPr>
-              <a:t>コスプレ</a:t>
-            </a:r>
-            <a:endParaRPr lang="en-US" sz="1400" dirty="0"/>
-          </a:p>
-          <a:p>
-            <a:pPr indent="0" marL="0">
-              <a:buNone/>
-            </a:pPr>
-            <a:r>
-              <a:rPr lang="en-US" sz="1200" dirty="0">
-                <a:solidFill>
-                  <a:schemeClr val="tx1"/>
-                </a:solidFill>
-              </a:rPr>
-              <a:t>雪だるま／エルフ</a:t>
-            </a:r>
-            <a:endParaRPr lang="en-US" sz="1400" dirty="0"/>
-          </a:p>
-        </p:txBody>
-      </p:sp>
-      <p:sp>
-        <p:nvSpPr>
-          <p:cNvPr id="11" name="wk_head_2"/>
-          <p:cNvSpPr/>
-          <p:nvPr/>
-        </p:nvSpPr>
-        <p:spPr>
-          <a:xfrm>
-            <a:off x="4663440" y="1051560"/>
-            <a:ext cx="1920240" cy="685800"/>
-          </a:xfrm>
-          <a:prstGeom prst="roundRect">
-            <a:avLst>
-              <a:gd name="adj" fmla="val 10667"/>
-            </a:avLst>
-          </a:prstGeom>
-          <a:solidFill>
-            <a:schemeClr val="tx2"/>
-          </a:solidFill>
-          <a:ln w="12700">
-            <a:solidFill>
-              <a:schemeClr val="tx2"/>
-            </a:solidFill>
-            <a:prstDash val="solid"/>
-          </a:ln>
-        </p:spPr>
-      </p:sp>
-      <p:sp>
-        <p:nvSpPr>
-          <p:cNvPr id="12" name="Text 10"/>
-          <p:cNvSpPr txBox="1"/>
-          <p:nvPr/>
-        </p:nvSpPr>
-        <p:spPr>
-          <a:xfrm>
-            <a:off x="4663440" y="1051560"/>
-            <a:ext cx="1920240" cy="685800"/>
-          </a:xfrm>
-          <a:prstGeom prst="rect">
-            <a:avLst/>
-          </a:prstGeom>
-          <a:noFill/>
-          <a:ln/>
-        </p:spPr>
-        <p:txBody>
-          <a:bodyPr wrap="square" lIns="0" tIns="0" rIns="0" bIns="0" rtlCol="0" anchor="ctr"/>
-          <a:lstStyle/>
-          <a:p>
-            <a:pPr algn="ctr" indent="0" marL="0">
-              <a:buNone/>
-            </a:pPr>
-            <a:r>
-              <a:rPr lang="en-US" sz="1600" b="1" dirty="0">
-                <a:solidFill>
-                  <a:schemeClr val="bg1"/>
-                </a:solidFill>
-              </a:rPr>
-              <a:t>第3週</a:t>
-            </a:r>
-            <a:endParaRPr lang="en-US" sz="1400" dirty="0"/>
-          </a:p>
-          <a:p>
-            <a:pPr algn="ctr" indent="0" marL="0">
-              <a:buNone/>
-            </a:pPr>
-            <a:r>
-              <a:rPr lang="en-US" sz="1100" dirty="0">
-                <a:solidFill>
-                  <a:schemeClr val="bg1"/>
-                </a:solidFill>
-              </a:rPr>
-              <a:t>12/12(土)〜12/18(金)</a:t>
-            </a:r>
-            <a:endParaRPr lang="en-US" sz="1400" dirty="0"/>
-          </a:p>
-        </p:txBody>
-      </p:sp>
-      <p:sp>
-        <p:nvSpPr>
-          <p:cNvPr id="13" name="wk_body_2"/>
-          <p:cNvSpPr/>
-          <p:nvPr/>
-        </p:nvSpPr>
-        <p:spPr>
-          <a:xfrm>
-            <a:off x="4663440" y="1828800"/>
-            <a:ext cx="1920240" cy="2103120"/>
-          </a:xfrm>
-          <a:prstGeom prst="roundRect">
-            <a:avLst>
-              <a:gd name="adj" fmla="val 3810"/>
-            </a:avLst>
-          </a:prstGeom>
-          <a:solidFill>
-            <a:schemeClr val="bg2"/>
-          </a:solidFill>
-          <a:ln w="12700">
-            <a:solidFill>
-              <a:schemeClr val="bg2"/>
-            </a:solidFill>
-            <a:prstDash val="solid"/>
-          </a:ln>
-        </p:spPr>
-      </p:sp>
-      <p:sp>
-        <p:nvSpPr>
-          <p:cNvPr id="14" name="Text 12"/>
-          <p:cNvSpPr txBox="1"/>
-          <p:nvPr/>
-        </p:nvSpPr>
-        <p:spPr>
-          <a:xfrm>
-            <a:off x="4773168" y="1920240"/>
-            <a:ext cx="1700784" cy="1920240"/>
-          </a:xfrm>
-          <a:prstGeom prst="rect">
-            <a:avLst/>
-          </a:prstGeom>
-          <a:noFill/>
-          <a:ln/>
-        </p:spPr>
-        <p:txBody>
-          <a:bodyPr wrap="square" lIns="635" tIns="635" rIns="635" bIns="635" rtlCol="0" anchor="t"/>
-          <a:lstStyle/>
-          <a:p>
-            <a:pPr indent="0" marL="0">
-              <a:buNone/>
-            </a:pPr>
-            <a:r>
-              <a:rPr lang="en-US" sz="1100" dirty="0">
-                <a:solidFill>
-                  <a:schemeClr val="accent4"/>
-                </a:solidFill>
-              </a:rPr>
-              <a:t>ワークショップ</a:t>
-            </a:r>
-            <a:endParaRPr lang="en-US" sz="1400" dirty="0"/>
-          </a:p>
-          <a:p>
-            <a:pPr indent="0" marL="0">
-              <a:buNone/>
-            </a:pPr>
-            <a:r>
-              <a:rPr lang="en-US" sz="1600" b="1" dirty="0">
-                <a:solidFill>
-                  <a:schemeClr val="tx2"/>
-                </a:solidFill>
-              </a:rPr>
-              <a:t>スクイーズ</a:t>
-            </a:r>
-            <a:endParaRPr lang="en-US" sz="1400" dirty="0"/>
-          </a:p>
-          <a:p>
-            <a:pPr indent="0" marL="0">
-              <a:buNone/>
-            </a:pPr>
-            <a:r>
-              <a:rPr lang="en-US" sz="1200" dirty="0">
-                <a:solidFill>
-                  <a:schemeClr val="tx1"/>
-                </a:solidFill>
-              </a:rPr>
-              <a:t>雪だるま・プレゼント型</a:t>
-            </a:r>
-            <a:endParaRPr lang="en-US" sz="1400" dirty="0"/>
-          </a:p>
-          <a:p>
-            <a:pPr indent="0" marL="0">
-              <a:buNone/>
-            </a:pPr>
-            <a:r>
-              <a:rPr lang="en-US" sz="800" dirty="0">
-                <a:solidFill>
-                  <a:schemeClr val="tx1"/>
-                </a:solidFill>
-              </a:rPr>
-              <a:t> </a:t>
-            </a:r>
-            <a:endParaRPr lang="en-US" sz="1400" dirty="0"/>
-          </a:p>
-          <a:p>
-            <a:pPr indent="0" marL="0">
-              <a:buNone/>
-            </a:pPr>
-            <a:r>
-              <a:rPr lang="en-US" sz="1100" dirty="0">
-                <a:solidFill>
-                  <a:schemeClr val="accent4"/>
-                </a:solidFill>
-              </a:rPr>
-              <a:t>コスプレ</a:t>
-            </a:r>
-            <a:endParaRPr lang="en-US" sz="1400" dirty="0"/>
-          </a:p>
-          <a:p>
-            <a:pPr indent="0" marL="0">
-              <a:buNone/>
-            </a:pPr>
-            <a:r>
-              <a:rPr lang="en-US" sz="1200" dirty="0">
-                <a:solidFill>
-                  <a:schemeClr val="tx1"/>
-                </a:solidFill>
-              </a:rPr>
-              <a:t>トナカイ／ジンジャーブレッド</a:t>
-            </a:r>
-            <a:endParaRPr lang="en-US" sz="1400" dirty="0"/>
-          </a:p>
-        </p:txBody>
-      </p:sp>
-      <p:sp>
-        <p:nvSpPr>
-          <p:cNvPr id="15" name="wk_head_3"/>
-          <p:cNvSpPr/>
-          <p:nvPr/>
-        </p:nvSpPr>
-        <p:spPr>
-          <a:xfrm>
-            <a:off x="6766560" y="1051560"/>
-            <a:ext cx="1920240" cy="685800"/>
-          </a:xfrm>
-          <a:prstGeom prst="roundRect">
-            <a:avLst>
-              <a:gd name="adj" fmla="val 10667"/>
-            </a:avLst>
-          </a:prstGeom>
-          <a:solidFill>
-            <a:schemeClr val="accent1"/>
-          </a:solidFill>
-          <a:ln w="12700">
-            <a:solidFill>
-              <a:schemeClr val="accent1"/>
-            </a:solidFill>
-            <a:prstDash val="solid"/>
-          </a:ln>
-        </p:spPr>
-      </p:sp>
-      <p:sp>
-        <p:nvSpPr>
-          <p:cNvPr id="16" name="Text 14"/>
-          <p:cNvSpPr txBox="1"/>
-          <p:nvPr/>
-        </p:nvSpPr>
-        <p:spPr>
-          <a:xfrm>
-            <a:off x="6766560" y="1051560"/>
-            <a:ext cx="1920240" cy="685800"/>
-          </a:xfrm>
-          <a:prstGeom prst="rect">
-            <a:avLst/>
-          </a:prstGeom>
-          <a:noFill/>
-          <a:ln/>
-        </p:spPr>
-        <p:txBody>
-          <a:bodyPr wrap="square" lIns="0" tIns="0" rIns="0" bIns="0" rtlCol="0" anchor="ctr"/>
-          <a:lstStyle/>
-          <a:p>
-            <a:pPr algn="ctr" indent="0" marL="0">
-              <a:buNone/>
-            </a:pPr>
-            <a:r>
-              <a:rPr lang="en-US" sz="1600" b="1" dirty="0">
-                <a:solidFill>
-                  <a:schemeClr val="bg1"/>
-                </a:solidFill>
-              </a:rPr>
-              <a:t>第4週</a:t>
-            </a:r>
-            <a:endParaRPr lang="en-US" sz="1400" dirty="0"/>
-          </a:p>
-          <a:p>
-            <a:pPr algn="ctr" indent="0" marL="0">
-              <a:buNone/>
-            </a:pPr>
-            <a:r>
-              <a:rPr lang="en-US" sz="1100" dirty="0">
-                <a:solidFill>
-                  <a:schemeClr val="bg1"/>
-                </a:solidFill>
-              </a:rPr>
-              <a:t>12/19(土)〜12/25(金)</a:t>
-            </a:r>
-            <a:endParaRPr lang="en-US" sz="1400" dirty="0"/>
-          </a:p>
-        </p:txBody>
-      </p:sp>
-      <p:sp>
-        <p:nvSpPr>
-          <p:cNvPr id="17" name="wk_body_3"/>
-          <p:cNvSpPr/>
-          <p:nvPr/>
-        </p:nvSpPr>
-        <p:spPr>
-          <a:xfrm>
-            <a:off x="6766560" y="1828800"/>
-            <a:ext cx="1920240" cy="2103120"/>
-          </a:xfrm>
-          <a:prstGeom prst="roundRect">
-            <a:avLst>
-              <a:gd name="adj" fmla="val 3810"/>
-            </a:avLst>
-          </a:prstGeom>
-          <a:solidFill>
-            <a:schemeClr val="bg2"/>
-          </a:solidFill>
-          <a:ln w="12700">
-            <a:solidFill>
-              <a:schemeClr val="bg2"/>
-            </a:solidFill>
-            <a:prstDash val="solid"/>
-          </a:ln>
-        </p:spPr>
-      </p:sp>
-      <p:sp>
-        <p:nvSpPr>
-          <p:cNvPr id="18" name="Text 16"/>
-          <p:cNvSpPr txBox="1"/>
-          <p:nvPr/>
-        </p:nvSpPr>
-        <p:spPr>
-          <a:xfrm>
-            <a:off x="6876288" y="1920240"/>
-            <a:ext cx="1700784" cy="1920240"/>
-          </a:xfrm>
-          <a:prstGeom prst="rect">
-            <a:avLst/>
-          </a:prstGeom>
-          <a:noFill/>
-          <a:ln/>
-        </p:spPr>
-        <p:txBody>
-          <a:bodyPr wrap="square" lIns="635" tIns="635" rIns="635" bIns="635" rtlCol="0" anchor="t"/>
-          <a:lstStyle/>
-          <a:p>
-            <a:pPr indent="0" marL="0">
-              <a:buNone/>
-            </a:pPr>
-            <a:r>
-              <a:rPr lang="en-US" sz="1100" dirty="0">
-                <a:solidFill>
-                  <a:schemeClr val="accent4"/>
-                </a:solidFill>
-              </a:rPr>
-              <a:t>ワークショップ</a:t>
-            </a:r>
-            <a:endParaRPr lang="en-US" sz="1400" dirty="0"/>
-          </a:p>
-          <a:p>
-            <a:pPr indent="0" marL="0">
-              <a:buNone/>
-            </a:pPr>
-            <a:r>
-              <a:rPr lang="en-US" sz="1600" b="1" dirty="0">
-                <a:solidFill>
-                  <a:schemeClr val="tx2"/>
-                </a:solidFill>
-              </a:rPr>
-              <a:t>スノードーム</a:t>
-            </a:r>
-            <a:endParaRPr lang="en-US" sz="1400" dirty="0"/>
-          </a:p>
-          <a:p>
-            <a:pPr indent="0" marL="0">
-              <a:buNone/>
-            </a:pPr>
-            <a:r>
-              <a:rPr lang="en-US" sz="1200" dirty="0">
-                <a:solidFill>
-                  <a:schemeClr val="tx1"/>
-                </a:solidFill>
-              </a:rPr>
-              <a:t>雪だるま・トナカイモチーフ</a:t>
-            </a:r>
-            <a:endParaRPr lang="en-US" sz="1400" dirty="0"/>
-          </a:p>
-          <a:p>
-            <a:pPr indent="0" marL="0">
-              <a:buNone/>
-            </a:pPr>
-            <a:r>
-              <a:rPr lang="en-US" sz="800" dirty="0">
-                <a:solidFill>
-                  <a:schemeClr val="tx1"/>
-                </a:solidFill>
-              </a:rPr>
-              <a:t> </a:t>
-            </a:r>
-            <a:endParaRPr lang="en-US" sz="1400" dirty="0"/>
-          </a:p>
-          <a:p>
-            <a:pPr indent="0" marL="0">
-              <a:buNone/>
-            </a:pPr>
-            <a:r>
-              <a:rPr lang="en-US" sz="1100" dirty="0">
-                <a:solidFill>
-                  <a:schemeClr val="accent4"/>
-                </a:solidFill>
-              </a:rPr>
-              <a:t>コスプレ</a:t>
-            </a:r>
-            <a:endParaRPr lang="en-US" sz="1400" dirty="0"/>
-          </a:p>
-          <a:p>
-            <a:pPr indent="0" marL="0">
-              <a:buNone/>
-            </a:pPr>
-            <a:r>
-              <a:rPr lang="en-US" sz="1200" dirty="0">
-                <a:solidFill>
-                  <a:schemeClr val="tx1"/>
-                </a:solidFill>
-              </a:rPr>
-              <a:t>サンタ（男女）／ツリー</a:t>
-            </a:r>
-            <a:endParaRPr lang="en-US" sz="1400" dirty="0"/>
-          </a:p>
-        </p:txBody>
-      </p:sp>
-      <p:sp>
-        <p:nvSpPr>
-          <p:cNvPr id="19" name="Text 17"/>
-          <p:cNvSpPr txBox="1"/>
-          <p:nvPr/>
-        </p:nvSpPr>
-        <p:spPr>
-          <a:xfrm>
-            <a:off x="457200" y="4069080"/>
-            <a:ext cx="8229600" cy="548640"/>
-          </a:xfrm>
-          <a:prstGeom prst="rect">
-            <a:avLst/>
-          </a:prstGeom>
-          <a:noFill/>
-          <a:ln/>
-        </p:spPr>
-        <p:txBody>
-          <a:bodyPr wrap="square" lIns="635" tIns="635" rIns="635" bIns="635" rtlCol="0" anchor="t"/>
-          <a:lstStyle/>
-          <a:p>
-            <a:pPr indent="0" marL="0">
-              <a:buNone/>
-            </a:pPr>
-            <a:r>
-              <a:rPr lang="en-US" sz="1300" dirty="0">
-                <a:solidFill>
-                  <a:schemeClr val="tx1"/>
-                </a:solidFill>
-              </a:rPr>
-              <a:t>同じワークショップが続く週も、型・モチーフ・衣装を変えて“新作”として訴求。毎週来ても新しい体験になります。</a:t>
-            </a:r>
-            <a:endParaRPr lang="en-US" sz="1300" dirty="0"/>
           </a:p>
         </p:txBody>
       </p:sp>
@@ -14213,7 +14178,7 @@
                   <a:schemeClr val="tx2"/>
                 </a:solidFill>
               </a:rPr>
-              <a:t>親子分離の運用設計</a:t>
+              <a:t>4週ローテーション計画（11月最終週〜12月）</a:t>
             </a:r>
             <a:endParaRPr lang="en-US" sz="2400" dirty="0"/>
           </a:p>
@@ -14221,18 +14186,18 @@
       </p:sp>
       <p:sp>
         <p:nvSpPr>
-          <p:cNvPr id="3" name="pc_head_0"/>
+          <p:cNvPr id="3" name="wk_head_0"/>
           <p:cNvSpPr/>
           <p:nvPr/>
         </p:nvSpPr>
         <p:spPr>
           <a:xfrm>
-            <a:off x="457200" y="1005840"/>
-            <a:ext cx="4023360" cy="548640"/>
+            <a:off x="457200" y="1051560"/>
+            <a:ext cx="1920240" cy="685800"/>
           </a:xfrm>
           <a:prstGeom prst="roundRect">
             <a:avLst>
-              <a:gd name="adj" fmla="val 13333"/>
+              <a:gd name="adj" fmla="val 10667"/>
             </a:avLst>
           </a:prstGeom>
           <a:solidFill>
@@ -14254,8 +14219,8 @@
         </p:nvSpPr>
         <p:spPr>
           <a:xfrm>
-            <a:off x="457200" y="1005840"/>
-            <a:ext cx="4023360" cy="548640"/>
+            <a:off x="457200" y="1051560"/>
+            <a:ext cx="1920240" cy="685800"/>
           </a:xfrm>
           <a:prstGeom prst="rect">
             <a:avLst/>
@@ -14276,26 +14241,40 @@
                   <a:schemeClr val="bg1"/>
                 </a:solidFill>
               </a:rPr>
-              <a:t>お子様　約20分</a:t>
-            </a:r>
-            <a:endParaRPr lang="en-US" sz="1600" dirty="0"/>
-          </a:p>
-        </p:txBody>
-      </p:sp>
-      <p:sp>
-        <p:nvSpPr>
-          <p:cNvPr id="5" name="pc_0_0"/>
+              <a:t>第1週</a:t>
+            </a:r>
+            <a:endParaRPr lang="en-US" sz="1400" dirty="0"/>
+          </a:p>
+          <a:p>
+            <a:pPr algn="ctr" indent="0" marL="0">
+              <a:buNone/>
+            </a:pPr>
+            <a:r>
+              <a:rPr lang="en-US" sz="1100" dirty="0">
+                <a:solidFill>
+                  <a:schemeClr val="bg1"/>
+                </a:solidFill>
+              </a:rPr>
+              <a:t>11/28(土)〜12/4(金)</a:t>
+            </a:r>
+            <a:endParaRPr lang="en-US" sz="1400" dirty="0"/>
+          </a:p>
+        </p:txBody>
+      </p:sp>
+      <p:sp>
+        <p:nvSpPr>
+          <p:cNvPr id="5" name="wk_body_0"/>
           <p:cNvSpPr/>
           <p:nvPr/>
         </p:nvSpPr>
         <p:spPr>
           <a:xfrm>
-            <a:off x="457200" y="1691640"/>
-            <a:ext cx="4023360" cy="530352"/>
+            <a:off x="457200" y="1828800"/>
+            <a:ext cx="1920240" cy="2103120"/>
           </a:xfrm>
           <a:prstGeom prst="roundRect">
             <a:avLst>
-              <a:gd name="adj" fmla="val 13793"/>
+              <a:gd name="adj" fmla="val 3810"/>
             </a:avLst>
           </a:prstGeom>
           <a:solidFill>
@@ -14311,17 +14290,545 @@
       </p:sp>
       <p:sp>
         <p:nvSpPr>
-          <p:cNvPr id="6" name="pc_b_0_0"/>
+          <p:cNvPr id="6" name="Text 4"/>
+          <p:cNvSpPr txBox="1"/>
+          <p:nvPr/>
+        </p:nvSpPr>
+        <p:spPr>
+          <a:xfrm>
+            <a:off x="566928" y="1920240"/>
+            <a:ext cx="1700784" cy="1920240"/>
+          </a:xfrm>
+          <a:prstGeom prst="rect">
+            <a:avLst/>
+          </a:prstGeom>
+          <a:noFill/>
+          <a:ln/>
+        </p:spPr>
+        <p:txBody>
+          <a:bodyPr wrap="square" lIns="635" tIns="635" rIns="635" bIns="635" rtlCol="0" anchor="t"/>
+          <a:lstStyle/>
+          <a:p>
+            <a:pPr indent="0" marL="0">
+              <a:buNone/>
+            </a:pPr>
+            <a:r>
+              <a:rPr lang="en-US" sz="1100" dirty="0">
+                <a:solidFill>
+                  <a:schemeClr val="accent4"/>
+                </a:solidFill>
+              </a:rPr>
+              <a:t>ワークショップ</a:t>
+            </a:r>
+            <a:endParaRPr lang="en-US" sz="1400" dirty="0"/>
+          </a:p>
+          <a:p>
+            <a:pPr indent="0" marL="0">
+              <a:buNone/>
+            </a:pPr>
+            <a:r>
+              <a:rPr lang="en-US" sz="1600" b="1" dirty="0">
+                <a:solidFill>
+                  <a:schemeClr val="tx2"/>
+                </a:solidFill>
+              </a:rPr>
+              <a:t>スノードーム</a:t>
+            </a:r>
+            <a:endParaRPr lang="en-US" sz="1400" dirty="0"/>
+          </a:p>
+          <a:p>
+            <a:pPr indent="0" marL="0">
+              <a:buNone/>
+            </a:pPr>
+            <a:r>
+              <a:rPr lang="en-US" sz="1200" dirty="0">
+                <a:solidFill>
+                  <a:schemeClr val="tx1"/>
+                </a:solidFill>
+              </a:rPr>
+              <a:t>サンタモチーフ</a:t>
+            </a:r>
+            <a:endParaRPr lang="en-US" sz="1400" dirty="0"/>
+          </a:p>
+          <a:p>
+            <a:pPr indent="0" marL="0">
+              <a:buNone/>
+            </a:pPr>
+            <a:r>
+              <a:rPr lang="en-US" sz="800" dirty="0">
+                <a:solidFill>
+                  <a:schemeClr val="tx1"/>
+                </a:solidFill>
+              </a:rPr>
+              <a:t> </a:t>
+            </a:r>
+            <a:endParaRPr lang="en-US" sz="1400" dirty="0"/>
+          </a:p>
+          <a:p>
+            <a:pPr indent="0" marL="0">
+              <a:buNone/>
+            </a:pPr>
+            <a:r>
+              <a:rPr lang="en-US" sz="1100" dirty="0">
+                <a:solidFill>
+                  <a:schemeClr val="accent4"/>
+                </a:solidFill>
+              </a:rPr>
+              <a:t>コスプレ</a:t>
+            </a:r>
+            <a:endParaRPr lang="en-US" sz="1400" dirty="0"/>
+          </a:p>
+          <a:p>
+            <a:pPr indent="0" marL="0">
+              <a:buNone/>
+            </a:pPr>
+            <a:r>
+              <a:rPr lang="en-US" sz="1200" dirty="0">
+                <a:solidFill>
+                  <a:schemeClr val="tx1"/>
+                </a:solidFill>
+              </a:rPr>
+              <a:t>サンタ／トナカイ</a:t>
+            </a:r>
+            <a:endParaRPr lang="en-US" sz="1400" dirty="0"/>
+          </a:p>
+        </p:txBody>
+      </p:sp>
+      <p:sp>
+        <p:nvSpPr>
+          <p:cNvPr id="7" name="wk_head_1"/>
           <p:cNvSpPr/>
           <p:nvPr/>
         </p:nvSpPr>
         <p:spPr>
           <a:xfrm>
-            <a:off x="566928" y="1773936"/>
-            <a:ext cx="365760" cy="365760"/>
-          </a:xfrm>
-          <a:prstGeom prst="ellipse">
-            <a:avLst/>
+            <a:off x="2560320" y="1051560"/>
+            <a:ext cx="1920240" cy="685800"/>
+          </a:xfrm>
+          <a:prstGeom prst="roundRect">
+            <a:avLst>
+              <a:gd name="adj" fmla="val 10667"/>
+            </a:avLst>
+          </a:prstGeom>
+          <a:solidFill>
+            <a:schemeClr val="tx2"/>
+          </a:solidFill>
+          <a:ln w="12700">
+            <a:solidFill>
+              <a:schemeClr val="tx2"/>
+            </a:solidFill>
+            <a:prstDash val="solid"/>
+          </a:ln>
+        </p:spPr>
+      </p:sp>
+      <p:sp>
+        <p:nvSpPr>
+          <p:cNvPr id="8" name="Text 6"/>
+          <p:cNvSpPr txBox="1"/>
+          <p:nvPr/>
+        </p:nvSpPr>
+        <p:spPr>
+          <a:xfrm>
+            <a:off x="2560320" y="1051560"/>
+            <a:ext cx="1920240" cy="685800"/>
+          </a:xfrm>
+          <a:prstGeom prst="rect">
+            <a:avLst/>
+          </a:prstGeom>
+          <a:noFill/>
+          <a:ln/>
+        </p:spPr>
+        <p:txBody>
+          <a:bodyPr wrap="square" lIns="0" tIns="0" rIns="0" bIns="0" rtlCol="0" anchor="ctr"/>
+          <a:lstStyle/>
+          <a:p>
+            <a:pPr algn="ctr" indent="0" marL="0">
+              <a:buNone/>
+            </a:pPr>
+            <a:r>
+              <a:rPr lang="en-US" sz="1600" b="1" dirty="0">
+                <a:solidFill>
+                  <a:schemeClr val="bg1"/>
+                </a:solidFill>
+              </a:rPr>
+              <a:t>第2週</a:t>
+            </a:r>
+            <a:endParaRPr lang="en-US" sz="1400" dirty="0"/>
+          </a:p>
+          <a:p>
+            <a:pPr algn="ctr" indent="0" marL="0">
+              <a:buNone/>
+            </a:pPr>
+            <a:r>
+              <a:rPr lang="en-US" sz="1100" dirty="0">
+                <a:solidFill>
+                  <a:schemeClr val="bg1"/>
+                </a:solidFill>
+              </a:rPr>
+              <a:t>12/5(土)〜12/11(金)</a:t>
+            </a:r>
+            <a:endParaRPr lang="en-US" sz="1400" dirty="0"/>
+          </a:p>
+        </p:txBody>
+      </p:sp>
+      <p:sp>
+        <p:nvSpPr>
+          <p:cNvPr id="9" name="wk_body_1"/>
+          <p:cNvSpPr/>
+          <p:nvPr/>
+        </p:nvSpPr>
+        <p:spPr>
+          <a:xfrm>
+            <a:off x="2560320" y="1828800"/>
+            <a:ext cx="1920240" cy="2103120"/>
+          </a:xfrm>
+          <a:prstGeom prst="roundRect">
+            <a:avLst>
+              <a:gd name="adj" fmla="val 3810"/>
+            </a:avLst>
+          </a:prstGeom>
+          <a:solidFill>
+            <a:schemeClr val="bg2"/>
+          </a:solidFill>
+          <a:ln w="12700">
+            <a:solidFill>
+              <a:schemeClr val="bg2"/>
+            </a:solidFill>
+            <a:prstDash val="solid"/>
+          </a:ln>
+        </p:spPr>
+      </p:sp>
+      <p:sp>
+        <p:nvSpPr>
+          <p:cNvPr id="10" name="Text 8"/>
+          <p:cNvSpPr txBox="1"/>
+          <p:nvPr/>
+        </p:nvSpPr>
+        <p:spPr>
+          <a:xfrm>
+            <a:off x="2670048" y="1920240"/>
+            <a:ext cx="1700784" cy="1920240"/>
+          </a:xfrm>
+          <a:prstGeom prst="rect">
+            <a:avLst/>
+          </a:prstGeom>
+          <a:noFill/>
+          <a:ln/>
+        </p:spPr>
+        <p:txBody>
+          <a:bodyPr wrap="square" lIns="635" tIns="635" rIns="635" bIns="635" rtlCol="0" anchor="t"/>
+          <a:lstStyle/>
+          <a:p>
+            <a:pPr indent="0" marL="0">
+              <a:buNone/>
+            </a:pPr>
+            <a:r>
+              <a:rPr lang="en-US" sz="1100" dirty="0">
+                <a:solidFill>
+                  <a:schemeClr val="accent4"/>
+                </a:solidFill>
+              </a:rPr>
+              <a:t>ワークショップ</a:t>
+            </a:r>
+            <a:endParaRPr lang="en-US" sz="1400" dirty="0"/>
+          </a:p>
+          <a:p>
+            <a:pPr indent="0" marL="0">
+              <a:buNone/>
+            </a:pPr>
+            <a:r>
+              <a:rPr lang="en-US" sz="1600" b="1" dirty="0">
+                <a:solidFill>
+                  <a:schemeClr val="tx2"/>
+                </a:solidFill>
+              </a:rPr>
+              <a:t>スクイーズ</a:t>
+            </a:r>
+            <a:endParaRPr lang="en-US" sz="1400" dirty="0"/>
+          </a:p>
+          <a:p>
+            <a:pPr indent="0" marL="0">
+              <a:buNone/>
+            </a:pPr>
+            <a:r>
+              <a:rPr lang="en-US" sz="1200" dirty="0">
+                <a:solidFill>
+                  <a:schemeClr val="tx1"/>
+                </a:solidFill>
+              </a:rPr>
+              <a:t>ツリー・ブーツ型</a:t>
+            </a:r>
+            <a:endParaRPr lang="en-US" sz="1400" dirty="0"/>
+          </a:p>
+          <a:p>
+            <a:pPr indent="0" marL="0">
+              <a:buNone/>
+            </a:pPr>
+            <a:r>
+              <a:rPr lang="en-US" sz="800" dirty="0">
+                <a:solidFill>
+                  <a:schemeClr val="tx1"/>
+                </a:solidFill>
+              </a:rPr>
+              <a:t> </a:t>
+            </a:r>
+            <a:endParaRPr lang="en-US" sz="1400" dirty="0"/>
+          </a:p>
+          <a:p>
+            <a:pPr indent="0" marL="0">
+              <a:buNone/>
+            </a:pPr>
+            <a:r>
+              <a:rPr lang="en-US" sz="1100" dirty="0">
+                <a:solidFill>
+                  <a:schemeClr val="accent4"/>
+                </a:solidFill>
+              </a:rPr>
+              <a:t>コスプレ</a:t>
+            </a:r>
+            <a:endParaRPr lang="en-US" sz="1400" dirty="0"/>
+          </a:p>
+          <a:p>
+            <a:pPr indent="0" marL="0">
+              <a:buNone/>
+            </a:pPr>
+            <a:r>
+              <a:rPr lang="en-US" sz="1200" dirty="0">
+                <a:solidFill>
+                  <a:schemeClr val="tx1"/>
+                </a:solidFill>
+              </a:rPr>
+              <a:t>雪だるま／エルフ</a:t>
+            </a:r>
+            <a:endParaRPr lang="en-US" sz="1400" dirty="0"/>
+          </a:p>
+        </p:txBody>
+      </p:sp>
+      <p:sp>
+        <p:nvSpPr>
+          <p:cNvPr id="11" name="wk_head_2"/>
+          <p:cNvSpPr/>
+          <p:nvPr/>
+        </p:nvSpPr>
+        <p:spPr>
+          <a:xfrm>
+            <a:off x="4663440" y="1051560"/>
+            <a:ext cx="1920240" cy="685800"/>
+          </a:xfrm>
+          <a:prstGeom prst="roundRect">
+            <a:avLst>
+              <a:gd name="adj" fmla="val 10667"/>
+            </a:avLst>
+          </a:prstGeom>
+          <a:solidFill>
+            <a:schemeClr val="tx2"/>
+          </a:solidFill>
+          <a:ln w="12700">
+            <a:solidFill>
+              <a:schemeClr val="tx2"/>
+            </a:solidFill>
+            <a:prstDash val="solid"/>
+          </a:ln>
+        </p:spPr>
+      </p:sp>
+      <p:sp>
+        <p:nvSpPr>
+          <p:cNvPr id="12" name="Text 10"/>
+          <p:cNvSpPr txBox="1"/>
+          <p:nvPr/>
+        </p:nvSpPr>
+        <p:spPr>
+          <a:xfrm>
+            <a:off x="4663440" y="1051560"/>
+            <a:ext cx="1920240" cy="685800"/>
+          </a:xfrm>
+          <a:prstGeom prst="rect">
+            <a:avLst/>
+          </a:prstGeom>
+          <a:noFill/>
+          <a:ln/>
+        </p:spPr>
+        <p:txBody>
+          <a:bodyPr wrap="square" lIns="0" tIns="0" rIns="0" bIns="0" rtlCol="0" anchor="ctr"/>
+          <a:lstStyle/>
+          <a:p>
+            <a:pPr algn="ctr" indent="0" marL="0">
+              <a:buNone/>
+            </a:pPr>
+            <a:r>
+              <a:rPr lang="en-US" sz="1600" b="1" dirty="0">
+                <a:solidFill>
+                  <a:schemeClr val="bg1"/>
+                </a:solidFill>
+              </a:rPr>
+              <a:t>第3週</a:t>
+            </a:r>
+            <a:endParaRPr lang="en-US" sz="1400" dirty="0"/>
+          </a:p>
+          <a:p>
+            <a:pPr algn="ctr" indent="0" marL="0">
+              <a:buNone/>
+            </a:pPr>
+            <a:r>
+              <a:rPr lang="en-US" sz="1100" dirty="0">
+                <a:solidFill>
+                  <a:schemeClr val="bg1"/>
+                </a:solidFill>
+              </a:rPr>
+              <a:t>12/12(土)〜12/18(金)</a:t>
+            </a:r>
+            <a:endParaRPr lang="en-US" sz="1400" dirty="0"/>
+          </a:p>
+        </p:txBody>
+      </p:sp>
+      <p:sp>
+        <p:nvSpPr>
+          <p:cNvPr id="13" name="wk_body_2"/>
+          <p:cNvSpPr/>
+          <p:nvPr/>
+        </p:nvSpPr>
+        <p:spPr>
+          <a:xfrm>
+            <a:off x="4663440" y="1828800"/>
+            <a:ext cx="1920240" cy="2103120"/>
+          </a:xfrm>
+          <a:prstGeom prst="roundRect">
+            <a:avLst>
+              <a:gd name="adj" fmla="val 3810"/>
+            </a:avLst>
+          </a:prstGeom>
+          <a:solidFill>
+            <a:schemeClr val="bg2"/>
+          </a:solidFill>
+          <a:ln w="12700">
+            <a:solidFill>
+              <a:schemeClr val="bg2"/>
+            </a:solidFill>
+            <a:prstDash val="solid"/>
+          </a:ln>
+        </p:spPr>
+      </p:sp>
+      <p:sp>
+        <p:nvSpPr>
+          <p:cNvPr id="14" name="Text 12"/>
+          <p:cNvSpPr txBox="1"/>
+          <p:nvPr/>
+        </p:nvSpPr>
+        <p:spPr>
+          <a:xfrm>
+            <a:off x="4773168" y="1920240"/>
+            <a:ext cx="1700784" cy="1920240"/>
+          </a:xfrm>
+          <a:prstGeom prst="rect">
+            <a:avLst/>
+          </a:prstGeom>
+          <a:noFill/>
+          <a:ln/>
+        </p:spPr>
+        <p:txBody>
+          <a:bodyPr wrap="square" lIns="635" tIns="635" rIns="635" bIns="635" rtlCol="0" anchor="t"/>
+          <a:lstStyle/>
+          <a:p>
+            <a:pPr indent="0" marL="0">
+              <a:buNone/>
+            </a:pPr>
+            <a:r>
+              <a:rPr lang="en-US" sz="1100" dirty="0">
+                <a:solidFill>
+                  <a:schemeClr val="accent4"/>
+                </a:solidFill>
+              </a:rPr>
+              <a:t>ワークショップ</a:t>
+            </a:r>
+            <a:endParaRPr lang="en-US" sz="1400" dirty="0"/>
+          </a:p>
+          <a:p>
+            <a:pPr indent="0" marL="0">
+              <a:buNone/>
+            </a:pPr>
+            <a:r>
+              <a:rPr lang="en-US" sz="1600" b="1" dirty="0">
+                <a:solidFill>
+                  <a:schemeClr val="tx2"/>
+                </a:solidFill>
+              </a:rPr>
+              <a:t>スクイーズ</a:t>
+            </a:r>
+            <a:endParaRPr lang="en-US" sz="1400" dirty="0"/>
+          </a:p>
+          <a:p>
+            <a:pPr indent="0" marL="0">
+              <a:buNone/>
+            </a:pPr>
+            <a:r>
+              <a:rPr lang="en-US" sz="1200" dirty="0">
+                <a:solidFill>
+                  <a:schemeClr val="tx1"/>
+                </a:solidFill>
+              </a:rPr>
+              <a:t>雪だるま・プレゼント型</a:t>
+            </a:r>
+            <a:endParaRPr lang="en-US" sz="1400" dirty="0"/>
+          </a:p>
+          <a:p>
+            <a:pPr indent="0" marL="0">
+              <a:buNone/>
+            </a:pPr>
+            <a:r>
+              <a:rPr lang="en-US" sz="800" dirty="0">
+                <a:solidFill>
+                  <a:schemeClr val="tx1"/>
+                </a:solidFill>
+              </a:rPr>
+              <a:t> </a:t>
+            </a:r>
+            <a:endParaRPr lang="en-US" sz="1400" dirty="0"/>
+          </a:p>
+          <a:p>
+            <a:pPr indent="0" marL="0">
+              <a:buNone/>
+            </a:pPr>
+            <a:r>
+              <a:rPr lang="en-US" sz="1100" dirty="0">
+                <a:solidFill>
+                  <a:schemeClr val="accent4"/>
+                </a:solidFill>
+              </a:rPr>
+              <a:t>コスプレ</a:t>
+            </a:r>
+            <a:endParaRPr lang="en-US" sz="1400" dirty="0"/>
+          </a:p>
+          <a:p>
+            <a:pPr indent="0" marL="0">
+              <a:buNone/>
+            </a:pPr>
+            <a:r>
+              <a:rPr lang="en-US" sz="1200" dirty="0">
+                <a:solidFill>
+                  <a:schemeClr val="tx1"/>
+                </a:solidFill>
+              </a:rPr>
+              <a:t>トナカイ／ジンジャーブレッド</a:t>
+            </a:r>
+            <a:endParaRPr lang="en-US" sz="1400" dirty="0"/>
+          </a:p>
+        </p:txBody>
+      </p:sp>
+      <p:sp>
+        <p:nvSpPr>
+          <p:cNvPr id="15" name="wk_head_3"/>
+          <p:cNvSpPr/>
+          <p:nvPr/>
+        </p:nvSpPr>
+        <p:spPr>
+          <a:xfrm>
+            <a:off x="6766560" y="1051560"/>
+            <a:ext cx="1920240" cy="685800"/>
+          </a:xfrm>
+          <a:prstGeom prst="roundRect">
+            <a:avLst>
+              <a:gd name="adj" fmla="val 10667"/>
+            </a:avLst>
           </a:prstGeom>
           <a:solidFill>
             <a:schemeClr val="accent1"/>
@@ -14336,14 +14843,14 @@
       </p:sp>
       <p:sp>
         <p:nvSpPr>
-          <p:cNvPr id="7" name="Text 5"/>
+          <p:cNvPr id="16" name="Text 14"/>
           <p:cNvSpPr txBox="1"/>
           <p:nvPr/>
         </p:nvSpPr>
         <p:spPr>
           <a:xfrm>
-            <a:off x="566928" y="1773936"/>
-            <a:ext cx="365760" cy="365760"/>
+            <a:off x="6766560" y="1051560"/>
+            <a:ext cx="1920240" cy="685800"/>
           </a:xfrm>
           <a:prstGeom prst="rect">
             <a:avLst/>
@@ -14359,67 +14866,45 @@
               <a:buNone/>
             </a:pPr>
             <a:r>
-              <a:rPr lang="en-US" sz="1300" b="1" dirty="0">
+              <a:rPr lang="en-US" sz="1600" b="1" dirty="0">
                 <a:solidFill>
                   <a:schemeClr val="bg1"/>
                 </a:solidFill>
               </a:rPr>
-              <a:t>1</a:t>
-            </a:r>
-            <a:endParaRPr lang="en-US" sz="1300" dirty="0"/>
-          </a:p>
-        </p:txBody>
-      </p:sp>
-      <p:sp>
-        <p:nvSpPr>
-          <p:cNvPr id="8" name="Text 6"/>
-          <p:cNvSpPr txBox="1"/>
-          <p:nvPr/>
-        </p:nvSpPr>
-        <p:spPr>
-          <a:xfrm>
-            <a:off x="1051560" y="1691640"/>
-            <a:ext cx="3337560" cy="530352"/>
-          </a:xfrm>
-          <a:prstGeom prst="rect">
-            <a:avLst/>
-          </a:prstGeom>
-          <a:noFill/>
-          <a:ln/>
-        </p:spPr>
-        <p:txBody>
-          <a:bodyPr wrap="square" lIns="635" tIns="635" rIns="635" bIns="635" rtlCol="0" anchor="ctr"/>
-          <a:lstStyle/>
-          <a:p>
-            <a:pPr indent="0" marL="0">
-              <a:buNone/>
-            </a:pPr>
-            <a:r>
-              <a:rPr lang="en-US" sz="1300" dirty="0">
-                <a:solidFill>
-                  <a:schemeClr val="tx1"/>
-                </a:solidFill>
-              </a:rPr>
-              <a:t>スノードーム／スクイーズを選ぶ</a:t>
-            </a:r>
-            <a:endParaRPr lang="en-US" sz="1300" dirty="0"/>
-          </a:p>
-        </p:txBody>
-      </p:sp>
-      <p:sp>
-        <p:nvSpPr>
-          <p:cNvPr id="9" name="pc_0_1"/>
+              <a:t>第4週</a:t>
+            </a:r>
+            <a:endParaRPr lang="en-US" sz="1400" dirty="0"/>
+          </a:p>
+          <a:p>
+            <a:pPr algn="ctr" indent="0" marL="0">
+              <a:buNone/>
+            </a:pPr>
+            <a:r>
+              <a:rPr lang="en-US" sz="1100" dirty="0">
+                <a:solidFill>
+                  <a:schemeClr val="bg1"/>
+                </a:solidFill>
+              </a:rPr>
+              <a:t>12/19(土)〜12/25(金)</a:t>
+            </a:r>
+            <a:endParaRPr lang="en-US" sz="1400" dirty="0"/>
+          </a:p>
+        </p:txBody>
+      </p:sp>
+      <p:sp>
+        <p:nvSpPr>
+          <p:cNvPr id="17" name="wk_body_3"/>
           <p:cNvSpPr/>
           <p:nvPr/>
         </p:nvSpPr>
         <p:spPr>
           <a:xfrm>
-            <a:off x="457200" y="2313432"/>
-            <a:ext cx="4023360" cy="530352"/>
+            <a:off x="6766560" y="1828800"/>
+            <a:ext cx="1920240" cy="2103120"/>
           </a:xfrm>
           <a:prstGeom prst="roundRect">
             <a:avLst>
-              <a:gd name="adj" fmla="val 13793"/>
+              <a:gd name="adj" fmla="val 3810"/>
             </a:avLst>
           </a:prstGeom>
           <a:solidFill>
@@ -14435,276 +14920,109 @@
       </p:sp>
       <p:sp>
         <p:nvSpPr>
-          <p:cNvPr id="10" name="pc_b_0_1"/>
-          <p:cNvSpPr/>
-          <p:nvPr/>
-        </p:nvSpPr>
-        <p:spPr>
-          <a:xfrm>
-            <a:off x="566928" y="2395728"/>
-            <a:ext cx="365760" cy="365760"/>
-          </a:xfrm>
-          <a:prstGeom prst="ellipse">
-            <a:avLst/>
-          </a:prstGeom>
-          <a:solidFill>
-            <a:schemeClr val="accent1"/>
-          </a:solidFill>
-          <a:ln w="12700">
-            <a:solidFill>
-              <a:schemeClr val="accent1"/>
-            </a:solidFill>
-            <a:prstDash val="solid"/>
-          </a:ln>
-        </p:spPr>
-      </p:sp>
-      <p:sp>
-        <p:nvSpPr>
-          <p:cNvPr id="11" name="Text 9"/>
+          <p:cNvPr id="18" name="Text 16"/>
           <p:cNvSpPr txBox="1"/>
           <p:nvPr/>
         </p:nvSpPr>
         <p:spPr>
           <a:xfrm>
-            <a:off x="566928" y="2395728"/>
-            <a:ext cx="365760" cy="365760"/>
-          </a:xfrm>
-          <a:prstGeom prst="rect">
-            <a:avLst/>
-          </a:prstGeom>
-          <a:noFill/>
-          <a:ln/>
-        </p:spPr>
-        <p:txBody>
-          <a:bodyPr wrap="square" lIns="0" tIns="0" rIns="0" bIns="0" rtlCol="0" anchor="ctr"/>
-          <a:lstStyle/>
-          <a:p>
-            <a:pPr algn="ctr" indent="0" marL="0">
-              <a:buNone/>
-            </a:pPr>
-            <a:r>
-              <a:rPr lang="en-US" sz="1300" b="1" dirty="0">
-                <a:solidFill>
-                  <a:schemeClr val="bg1"/>
-                </a:solidFill>
-              </a:rPr>
-              <a:t>2</a:t>
-            </a:r>
-            <a:endParaRPr lang="en-US" sz="1300" dirty="0"/>
-          </a:p>
-        </p:txBody>
-      </p:sp>
-      <p:sp>
-        <p:nvSpPr>
-          <p:cNvPr id="12" name="Text 10"/>
-          <p:cNvSpPr txBox="1"/>
-          <p:nvPr/>
-        </p:nvSpPr>
-        <p:spPr>
-          <a:xfrm>
-            <a:off x="1051560" y="2313432"/>
-            <a:ext cx="3337560" cy="530352"/>
-          </a:xfrm>
-          <a:prstGeom prst="rect">
-            <a:avLst/>
-          </a:prstGeom>
-          <a:noFill/>
-          <a:ln/>
-        </p:spPr>
-        <p:txBody>
-          <a:bodyPr wrap="square" lIns="635" tIns="635" rIns="635" bIns="635" rtlCol="0" anchor="ctr"/>
+            <a:off x="6876288" y="1920240"/>
+            <a:ext cx="1700784" cy="1920240"/>
+          </a:xfrm>
+          <a:prstGeom prst="rect">
+            <a:avLst/>
+          </a:prstGeom>
+          <a:noFill/>
+          <a:ln/>
+        </p:spPr>
+        <p:txBody>
+          <a:bodyPr wrap="square" lIns="635" tIns="635" rIns="635" bIns="635" rtlCol="0" anchor="t"/>
           <a:lstStyle/>
           <a:p>
             <a:pPr indent="0" marL="0">
               <a:buNone/>
             </a:pPr>
             <a:r>
-              <a:rPr lang="en-US" sz="1300" dirty="0">
+              <a:rPr lang="en-US" sz="1100" dirty="0">
+                <a:solidFill>
+                  <a:schemeClr val="accent4"/>
+                </a:solidFill>
+              </a:rPr>
+              <a:t>ワークショップ</a:t>
+            </a:r>
+            <a:endParaRPr lang="en-US" sz="1400" dirty="0"/>
+          </a:p>
+          <a:p>
+            <a:pPr indent="0" marL="0">
+              <a:buNone/>
+            </a:pPr>
+            <a:r>
+              <a:rPr lang="en-US" sz="1600" b="1" dirty="0">
+                <a:solidFill>
+                  <a:schemeClr val="tx2"/>
+                </a:solidFill>
+              </a:rPr>
+              <a:t>スノードーム</a:t>
+            </a:r>
+            <a:endParaRPr lang="en-US" sz="1400" dirty="0"/>
+          </a:p>
+          <a:p>
+            <a:pPr indent="0" marL="0">
+              <a:buNone/>
+            </a:pPr>
+            <a:r>
+              <a:rPr lang="en-US" sz="1200" dirty="0">
                 <a:solidFill>
                   <a:schemeClr val="tx1"/>
                 </a:solidFill>
               </a:rPr>
-              <a:t>見本と手順カードを見ながら制作に集中</a:t>
-            </a:r>
-            <a:endParaRPr lang="en-US" sz="1300" dirty="0"/>
-          </a:p>
-        </p:txBody>
-      </p:sp>
-      <p:sp>
-        <p:nvSpPr>
-          <p:cNvPr id="13" name="pc_0_2"/>
-          <p:cNvSpPr/>
-          <p:nvPr/>
-        </p:nvSpPr>
-        <p:spPr>
-          <a:xfrm>
-            <a:off x="457200" y="2935224"/>
-            <a:ext cx="4023360" cy="530352"/>
-          </a:xfrm>
-          <a:prstGeom prst="roundRect">
-            <a:avLst>
-              <a:gd name="adj" fmla="val 13793"/>
-            </a:avLst>
-          </a:prstGeom>
-          <a:solidFill>
-            <a:schemeClr val="bg2"/>
-          </a:solidFill>
-          <a:ln w="12700">
-            <a:solidFill>
-              <a:schemeClr val="bg2"/>
-            </a:solidFill>
-            <a:prstDash val="solid"/>
-          </a:ln>
-        </p:spPr>
-      </p:sp>
-      <p:sp>
-        <p:nvSpPr>
-          <p:cNvPr id="14" name="pc_b_0_2"/>
-          <p:cNvSpPr/>
-          <p:nvPr/>
-        </p:nvSpPr>
-        <p:spPr>
-          <a:xfrm>
-            <a:off x="566928" y="3017520"/>
-            <a:ext cx="365760" cy="365760"/>
-          </a:xfrm>
-          <a:prstGeom prst="ellipse">
-            <a:avLst/>
-          </a:prstGeom>
-          <a:solidFill>
-            <a:schemeClr val="accent1"/>
-          </a:solidFill>
-          <a:ln w="12700">
-            <a:solidFill>
-              <a:schemeClr val="accent1"/>
-            </a:solidFill>
-            <a:prstDash val="solid"/>
-          </a:ln>
-        </p:spPr>
-      </p:sp>
-      <p:sp>
-        <p:nvSpPr>
-          <p:cNvPr id="15" name="Text 13"/>
-          <p:cNvSpPr txBox="1"/>
-          <p:nvPr/>
-        </p:nvSpPr>
-        <p:spPr>
-          <a:xfrm>
-            <a:off x="566928" y="3017520"/>
-            <a:ext cx="365760" cy="365760"/>
-          </a:xfrm>
-          <a:prstGeom prst="rect">
-            <a:avLst/>
-          </a:prstGeom>
-          <a:noFill/>
-          <a:ln/>
-        </p:spPr>
-        <p:txBody>
-          <a:bodyPr wrap="square" lIns="0" tIns="0" rIns="0" bIns="0" rtlCol="0" anchor="ctr"/>
-          <a:lstStyle/>
-          <a:p>
-            <a:pPr algn="ctr" indent="0" marL="0">
-              <a:buNone/>
-            </a:pPr>
-            <a:r>
-              <a:rPr lang="en-US" sz="1300" b="1" dirty="0">
-                <a:solidFill>
-                  <a:schemeClr val="bg1"/>
-                </a:solidFill>
-              </a:rPr>
-              <a:t>3</a:t>
-            </a:r>
-            <a:endParaRPr lang="en-US" sz="1300" dirty="0"/>
-          </a:p>
-        </p:txBody>
-      </p:sp>
-      <p:sp>
-        <p:nvSpPr>
-          <p:cNvPr id="16" name="Text 14"/>
-          <p:cNvSpPr txBox="1"/>
-          <p:nvPr/>
-        </p:nvSpPr>
-        <p:spPr>
-          <a:xfrm>
-            <a:off x="1051560" y="2935224"/>
-            <a:ext cx="3337560" cy="530352"/>
-          </a:xfrm>
-          <a:prstGeom prst="rect">
-            <a:avLst/>
-          </a:prstGeom>
-          <a:noFill/>
-          <a:ln/>
-        </p:spPr>
-        <p:txBody>
-          <a:bodyPr wrap="square" lIns="635" tIns="635" rIns="635" bIns="635" rtlCol="0" anchor="ctr"/>
-          <a:lstStyle/>
+              <a:t>雪だるま・トナカイモチーフ</a:t>
+            </a:r>
+            <a:endParaRPr lang="en-US" sz="1400" dirty="0"/>
+          </a:p>
           <a:p>
             <a:pPr indent="0" marL="0">
               <a:buNone/>
             </a:pPr>
             <a:r>
-              <a:rPr lang="en-US" sz="1300" dirty="0">
+              <a:rPr lang="en-US" sz="800" dirty="0">
                 <a:solidFill>
                   <a:schemeClr val="tx1"/>
                 </a:solidFill>
               </a:rPr>
-              <a:t>完成（スクイーズは型のまま袋へ）</a:t>
-            </a:r>
-            <a:endParaRPr lang="en-US" sz="1300" dirty="0"/>
-          </a:p>
-        </p:txBody>
-      </p:sp>
-      <p:sp>
-        <p:nvSpPr>
-          <p:cNvPr id="17" name="pc_0_3"/>
-          <p:cNvSpPr/>
-          <p:nvPr/>
-        </p:nvSpPr>
-        <p:spPr>
-          <a:xfrm>
-            <a:off x="457200" y="3557016"/>
-            <a:ext cx="4023360" cy="530352"/>
-          </a:xfrm>
-          <a:prstGeom prst="roundRect">
-            <a:avLst>
-              <a:gd name="adj" fmla="val 13793"/>
-            </a:avLst>
-          </a:prstGeom>
-          <a:solidFill>
-            <a:schemeClr val="bg2"/>
-          </a:solidFill>
-          <a:ln w="12700">
-            <a:solidFill>
-              <a:schemeClr val="bg2"/>
-            </a:solidFill>
-            <a:prstDash val="solid"/>
-          </a:ln>
-        </p:spPr>
-      </p:sp>
-      <p:sp>
-        <p:nvSpPr>
-          <p:cNvPr id="18" name="pc_b_0_3"/>
-          <p:cNvSpPr/>
-          <p:nvPr/>
-        </p:nvSpPr>
-        <p:spPr>
-          <a:xfrm>
-            <a:off x="566928" y="3639312"/>
-            <a:ext cx="365760" cy="365760"/>
-          </a:xfrm>
-          <a:prstGeom prst="ellipse">
-            <a:avLst/>
-          </a:prstGeom>
-          <a:solidFill>
-            <a:schemeClr val="accent1"/>
-          </a:solidFill>
-          <a:ln w="12700">
-            <a:solidFill>
-              <a:schemeClr val="accent1"/>
-            </a:solidFill>
-            <a:prstDash val="solid"/>
-          </a:ln>
-        </p:spPr>
+              <a:t> </a:t>
+            </a:r>
+            <a:endParaRPr lang="en-US" sz="1400" dirty="0"/>
+          </a:p>
+          <a:p>
+            <a:pPr indent="0" marL="0">
+              <a:buNone/>
+            </a:pPr>
+            <a:r>
+              <a:rPr lang="en-US" sz="1100" dirty="0">
+                <a:solidFill>
+                  <a:schemeClr val="accent4"/>
+                </a:solidFill>
+              </a:rPr>
+              <a:t>コスプレ</a:t>
+            </a:r>
+            <a:endParaRPr lang="en-US" sz="1400" dirty="0"/>
+          </a:p>
+          <a:p>
+            <a:pPr indent="0" marL="0">
+              <a:buNone/>
+            </a:pPr>
+            <a:r>
+              <a:rPr lang="en-US" sz="1200" dirty="0">
+                <a:solidFill>
+                  <a:schemeClr val="tx1"/>
+                </a:solidFill>
+              </a:rPr>
+              <a:t>サンタ（男女）／ツリー</a:t>
+            </a:r>
+            <a:endParaRPr lang="en-US" sz="1400" dirty="0"/>
+          </a:p>
+        </p:txBody>
       </p:sp>
       <p:sp>
         <p:nvSpPr>
@@ -14714,662 +15032,31 @@
         </p:nvSpPr>
         <p:spPr>
           <a:xfrm>
-            <a:off x="566928" y="3639312"/>
-            <a:ext cx="365760" cy="365760"/>
-          </a:xfrm>
-          <a:prstGeom prst="rect">
-            <a:avLst/>
-          </a:prstGeom>
-          <a:noFill/>
-          <a:ln/>
-        </p:spPr>
-        <p:txBody>
-          <a:bodyPr wrap="square" lIns="0" tIns="0" rIns="0" bIns="0" rtlCol="0" anchor="ctr"/>
-          <a:lstStyle/>
-          <a:p>
-            <a:pPr algn="ctr" indent="0" marL="0">
-              <a:buNone/>
-            </a:pPr>
-            <a:r>
-              <a:rPr lang="en-US" sz="1300" b="1" dirty="0">
-                <a:solidFill>
-                  <a:schemeClr val="bg1"/>
-                </a:solidFill>
-              </a:rPr>
-              <a:t>4</a:t>
+            <a:off x="457200" y="4069080"/>
+            <a:ext cx="8229600" cy="548640"/>
+          </a:xfrm>
+          <a:prstGeom prst="rect">
+            <a:avLst/>
+          </a:prstGeom>
+          <a:noFill/>
+          <a:ln/>
+        </p:spPr>
+        <p:txBody>
+          <a:bodyPr wrap="square" lIns="635" tIns="635" rIns="635" bIns="635" rtlCol="0" anchor="t"/>
+          <a:lstStyle/>
+          <a:p>
+            <a:pPr indent="0" marL="0">
+              <a:buNone/>
+            </a:pPr>
+            <a:r>
+              <a:rPr lang="en-US" sz="1300" dirty="0">
+                <a:solidFill>
+                  <a:schemeClr val="tx1"/>
+                </a:solidFill>
+              </a:rPr>
+              <a:t>同じワークショップが続く週も、型・モチーフ・衣装を変えて“新作”として訴求。毎週来ても新しい体験になります。</a:t>
             </a:r>
             <a:endParaRPr lang="en-US" sz="1300" dirty="0"/>
-          </a:p>
-        </p:txBody>
-      </p:sp>
-      <p:sp>
-        <p:nvSpPr>
-          <p:cNvPr id="20" name="Text 18"/>
-          <p:cNvSpPr txBox="1"/>
-          <p:nvPr/>
-        </p:nvSpPr>
-        <p:spPr>
-          <a:xfrm>
-            <a:off x="1051560" y="3557016"/>
-            <a:ext cx="3337560" cy="530352"/>
-          </a:xfrm>
-          <a:prstGeom prst="rect">
-            <a:avLst/>
-          </a:prstGeom>
-          <a:noFill/>
-          <a:ln/>
-        </p:spPr>
-        <p:txBody>
-          <a:bodyPr wrap="square" lIns="635" tIns="635" rIns="635" bIns="635" rtlCol="0" anchor="ctr"/>
-          <a:lstStyle/>
-          <a:p>
-            <a:pPr indent="0" marL="0">
-              <a:buNone/>
-            </a:pPr>
-            <a:r>
-              <a:rPr lang="en-US" sz="1300" dirty="0">
-                <a:solidFill>
-                  <a:schemeClr val="tx1"/>
-                </a:solidFill>
-              </a:rPr>
-              <a:t>作品を持って保護者様と合流</a:t>
-            </a:r>
-            <a:endParaRPr lang="en-US" sz="1300" dirty="0"/>
-          </a:p>
-        </p:txBody>
-      </p:sp>
-      <p:sp>
-        <p:nvSpPr>
-          <p:cNvPr id="21" name="pc_head_1"/>
-          <p:cNvSpPr/>
-          <p:nvPr/>
-        </p:nvSpPr>
-        <p:spPr>
-          <a:xfrm>
-            <a:off x="4663440" y="1005840"/>
-            <a:ext cx="4023360" cy="548640"/>
-          </a:xfrm>
-          <a:prstGeom prst="roundRect">
-            <a:avLst>
-              <a:gd name="adj" fmla="val 13333"/>
-            </a:avLst>
-          </a:prstGeom>
-          <a:solidFill>
-            <a:schemeClr val="tx2"/>
-          </a:solidFill>
-          <a:ln w="12700">
-            <a:solidFill>
-              <a:schemeClr val="tx2"/>
-            </a:solidFill>
-            <a:prstDash val="solid"/>
-          </a:ln>
-        </p:spPr>
-      </p:sp>
-      <p:sp>
-        <p:nvSpPr>
-          <p:cNvPr id="22" name="Text 20"/>
-          <p:cNvSpPr txBox="1"/>
-          <p:nvPr/>
-        </p:nvSpPr>
-        <p:spPr>
-          <a:xfrm>
-            <a:off x="4663440" y="1005840"/>
-            <a:ext cx="4023360" cy="548640"/>
-          </a:xfrm>
-          <a:prstGeom prst="rect">
-            <a:avLst/>
-          </a:prstGeom>
-          <a:noFill/>
-          <a:ln/>
-        </p:spPr>
-        <p:txBody>
-          <a:bodyPr wrap="square" lIns="0" tIns="0" rIns="0" bIns="0" rtlCol="0" anchor="ctr"/>
-          <a:lstStyle/>
-          <a:p>
-            <a:pPr algn="ctr" indent="0" marL="0">
-              <a:buNone/>
-            </a:pPr>
-            <a:r>
-              <a:rPr lang="en-US" sz="1600" b="1" dirty="0">
-                <a:solidFill>
-                  <a:schemeClr val="bg1"/>
-                </a:solidFill>
-              </a:rPr>
-              <a:t>保護者様　約20分</a:t>
-            </a:r>
-            <a:endParaRPr lang="en-US" sz="1600" dirty="0"/>
-          </a:p>
-        </p:txBody>
-      </p:sp>
-      <p:sp>
-        <p:nvSpPr>
-          <p:cNvPr id="23" name="pc_1_0"/>
-          <p:cNvSpPr/>
-          <p:nvPr/>
-        </p:nvSpPr>
-        <p:spPr>
-          <a:xfrm>
-            <a:off x="4663440" y="1691640"/>
-            <a:ext cx="4023360" cy="530352"/>
-          </a:xfrm>
-          <a:prstGeom prst="roundRect">
-            <a:avLst>
-              <a:gd name="adj" fmla="val 13793"/>
-            </a:avLst>
-          </a:prstGeom>
-          <a:solidFill>
-            <a:schemeClr val="bg2"/>
-          </a:solidFill>
-          <a:ln w="12700">
-            <a:solidFill>
-              <a:schemeClr val="bg2"/>
-            </a:solidFill>
-            <a:prstDash val="solid"/>
-          </a:ln>
-        </p:spPr>
-      </p:sp>
-      <p:sp>
-        <p:nvSpPr>
-          <p:cNvPr id="24" name="pc_b_1_0"/>
-          <p:cNvSpPr/>
-          <p:nvPr/>
-        </p:nvSpPr>
-        <p:spPr>
-          <a:xfrm>
-            <a:off x="4773168" y="1773936"/>
-            <a:ext cx="365760" cy="365760"/>
-          </a:xfrm>
-          <a:prstGeom prst="ellipse">
-            <a:avLst/>
-          </a:prstGeom>
-          <a:solidFill>
-            <a:schemeClr val="tx2"/>
-          </a:solidFill>
-          <a:ln w="12700">
-            <a:solidFill>
-              <a:schemeClr val="tx2"/>
-            </a:solidFill>
-            <a:prstDash val="solid"/>
-          </a:ln>
-        </p:spPr>
-      </p:sp>
-      <p:sp>
-        <p:nvSpPr>
-          <p:cNvPr id="25" name="Text 23"/>
-          <p:cNvSpPr txBox="1"/>
-          <p:nvPr/>
-        </p:nvSpPr>
-        <p:spPr>
-          <a:xfrm>
-            <a:off x="4773168" y="1773936"/>
-            <a:ext cx="365760" cy="365760"/>
-          </a:xfrm>
-          <a:prstGeom prst="rect">
-            <a:avLst/>
-          </a:prstGeom>
-          <a:noFill/>
-          <a:ln/>
-        </p:spPr>
-        <p:txBody>
-          <a:bodyPr wrap="square" lIns="0" tIns="0" rIns="0" bIns="0" rtlCol="0" anchor="ctr"/>
-          <a:lstStyle/>
-          <a:p>
-            <a:pPr algn="ctr" indent="0" marL="0">
-              <a:buNone/>
-            </a:pPr>
-            <a:r>
-              <a:rPr lang="en-US" sz="1300" b="1" dirty="0">
-                <a:solidFill>
-                  <a:schemeClr val="bg1"/>
-                </a:solidFill>
-              </a:rPr>
-              <a:t>1</a:t>
-            </a:r>
-            <a:endParaRPr lang="en-US" sz="1300" dirty="0"/>
-          </a:p>
-        </p:txBody>
-      </p:sp>
-      <p:sp>
-        <p:nvSpPr>
-          <p:cNvPr id="26" name="Text 24"/>
-          <p:cNvSpPr txBox="1"/>
-          <p:nvPr/>
-        </p:nvSpPr>
-        <p:spPr>
-          <a:xfrm>
-            <a:off x="5257800" y="1691640"/>
-            <a:ext cx="3337560" cy="530352"/>
-          </a:xfrm>
-          <a:prstGeom prst="rect">
-            <a:avLst/>
-          </a:prstGeom>
-          <a:noFill/>
-          <a:ln/>
-        </p:spPr>
-        <p:txBody>
-          <a:bodyPr wrap="square" lIns="635" tIns="635" rIns="635" bIns="635" rtlCol="0" anchor="ctr"/>
-          <a:lstStyle/>
-          <a:p>
-            <a:pPr indent="0" marL="0">
-              <a:buNone/>
-            </a:pPr>
-            <a:r>
-              <a:rPr lang="en-US" sz="1300" dirty="0">
-                <a:solidFill>
-                  <a:schemeClr val="tx1"/>
-                </a:solidFill>
-              </a:rPr>
-              <a:t>隣接の商談カウンターへご案内</a:t>
-            </a:r>
-            <a:endParaRPr lang="en-US" sz="1300" dirty="0"/>
-          </a:p>
-        </p:txBody>
-      </p:sp>
-      <p:sp>
-        <p:nvSpPr>
-          <p:cNvPr id="27" name="pc_1_1"/>
-          <p:cNvSpPr/>
-          <p:nvPr/>
-        </p:nvSpPr>
-        <p:spPr>
-          <a:xfrm>
-            <a:off x="4663440" y="2313432"/>
-            <a:ext cx="4023360" cy="530352"/>
-          </a:xfrm>
-          <a:prstGeom prst="roundRect">
-            <a:avLst>
-              <a:gd name="adj" fmla="val 13793"/>
-            </a:avLst>
-          </a:prstGeom>
-          <a:solidFill>
-            <a:schemeClr val="bg2"/>
-          </a:solidFill>
-          <a:ln w="12700">
-            <a:solidFill>
-              <a:schemeClr val="bg2"/>
-            </a:solidFill>
-            <a:prstDash val="solid"/>
-          </a:ln>
-        </p:spPr>
-      </p:sp>
-      <p:sp>
-        <p:nvSpPr>
-          <p:cNvPr id="28" name="pc_b_1_1"/>
-          <p:cNvSpPr/>
-          <p:nvPr/>
-        </p:nvSpPr>
-        <p:spPr>
-          <a:xfrm>
-            <a:off x="4773168" y="2395728"/>
-            <a:ext cx="365760" cy="365760"/>
-          </a:xfrm>
-          <a:prstGeom prst="ellipse">
-            <a:avLst/>
-          </a:prstGeom>
-          <a:solidFill>
-            <a:schemeClr val="tx2"/>
-          </a:solidFill>
-          <a:ln w="12700">
-            <a:solidFill>
-              <a:schemeClr val="tx2"/>
-            </a:solidFill>
-            <a:prstDash val="solid"/>
-          </a:ln>
-        </p:spPr>
-      </p:sp>
-      <p:sp>
-        <p:nvSpPr>
-          <p:cNvPr id="29" name="Text 27"/>
-          <p:cNvSpPr txBox="1"/>
-          <p:nvPr/>
-        </p:nvSpPr>
-        <p:spPr>
-          <a:xfrm>
-            <a:off x="4773168" y="2395728"/>
-            <a:ext cx="365760" cy="365760"/>
-          </a:xfrm>
-          <a:prstGeom prst="rect">
-            <a:avLst/>
-          </a:prstGeom>
-          <a:noFill/>
-          <a:ln/>
-        </p:spPr>
-        <p:txBody>
-          <a:bodyPr wrap="square" lIns="0" tIns="0" rIns="0" bIns="0" rtlCol="0" anchor="ctr"/>
-          <a:lstStyle/>
-          <a:p>
-            <a:pPr algn="ctr" indent="0" marL="0">
-              <a:buNone/>
-            </a:pPr>
-            <a:r>
-              <a:rPr lang="en-US" sz="1300" b="1" dirty="0">
-                <a:solidFill>
-                  <a:schemeClr val="bg1"/>
-                </a:solidFill>
-              </a:rPr>
-              <a:t>2</a:t>
-            </a:r>
-            <a:endParaRPr lang="en-US" sz="1300" dirty="0"/>
-          </a:p>
-        </p:txBody>
-      </p:sp>
-      <p:sp>
-        <p:nvSpPr>
-          <p:cNvPr id="30" name="Text 28"/>
-          <p:cNvSpPr txBox="1"/>
-          <p:nvPr/>
-        </p:nvSpPr>
-        <p:spPr>
-          <a:xfrm>
-            <a:off x="5257800" y="2313432"/>
-            <a:ext cx="3337560" cy="530352"/>
-          </a:xfrm>
-          <a:prstGeom prst="rect">
-            <a:avLst/>
-          </a:prstGeom>
-          <a:noFill/>
-          <a:ln/>
-        </p:spPr>
-        <p:txBody>
-          <a:bodyPr wrap="square" lIns="635" tIns="635" rIns="635" bIns="635" rtlCol="0" anchor="ctr"/>
-          <a:lstStyle/>
-          <a:p>
-            <a:pPr indent="0" marL="0">
-              <a:buNone/>
-            </a:pPr>
-            <a:r>
-              <a:rPr lang="en-US" sz="1300" dirty="0">
-                <a:solidFill>
-                  <a:schemeClr val="tx1"/>
-                </a:solidFill>
-              </a:rPr>
-              <a:t>料金プラン・機種変更のご相談</a:t>
-            </a:r>
-            <a:endParaRPr lang="en-US" sz="1300" dirty="0"/>
-          </a:p>
-        </p:txBody>
-      </p:sp>
-      <p:sp>
-        <p:nvSpPr>
-          <p:cNvPr id="31" name="pc_1_2"/>
-          <p:cNvSpPr/>
-          <p:nvPr/>
-        </p:nvSpPr>
-        <p:spPr>
-          <a:xfrm>
-            <a:off x="4663440" y="2935224"/>
-            <a:ext cx="4023360" cy="530352"/>
-          </a:xfrm>
-          <a:prstGeom prst="roundRect">
-            <a:avLst>
-              <a:gd name="adj" fmla="val 13793"/>
-            </a:avLst>
-          </a:prstGeom>
-          <a:solidFill>
-            <a:schemeClr val="bg2"/>
-          </a:solidFill>
-          <a:ln w="12700">
-            <a:solidFill>
-              <a:schemeClr val="bg2"/>
-            </a:solidFill>
-            <a:prstDash val="solid"/>
-          </a:ln>
-        </p:spPr>
-      </p:sp>
-      <p:sp>
-        <p:nvSpPr>
-          <p:cNvPr id="32" name="pc_b_1_2"/>
-          <p:cNvSpPr/>
-          <p:nvPr/>
-        </p:nvSpPr>
-        <p:spPr>
-          <a:xfrm>
-            <a:off x="4773168" y="3017520"/>
-            <a:ext cx="365760" cy="365760"/>
-          </a:xfrm>
-          <a:prstGeom prst="ellipse">
-            <a:avLst/>
-          </a:prstGeom>
-          <a:solidFill>
-            <a:schemeClr val="tx2"/>
-          </a:solidFill>
-          <a:ln w="12700">
-            <a:solidFill>
-              <a:schemeClr val="tx2"/>
-            </a:solidFill>
-            <a:prstDash val="solid"/>
-          </a:ln>
-        </p:spPr>
-      </p:sp>
-      <p:sp>
-        <p:nvSpPr>
-          <p:cNvPr id="33" name="Text 31"/>
-          <p:cNvSpPr txBox="1"/>
-          <p:nvPr/>
-        </p:nvSpPr>
-        <p:spPr>
-          <a:xfrm>
-            <a:off x="4773168" y="3017520"/>
-            <a:ext cx="365760" cy="365760"/>
-          </a:xfrm>
-          <a:prstGeom prst="rect">
-            <a:avLst/>
-          </a:prstGeom>
-          <a:noFill/>
-          <a:ln/>
-        </p:spPr>
-        <p:txBody>
-          <a:bodyPr wrap="square" lIns="0" tIns="0" rIns="0" bIns="0" rtlCol="0" anchor="ctr"/>
-          <a:lstStyle/>
-          <a:p>
-            <a:pPr algn="ctr" indent="0" marL="0">
-              <a:buNone/>
-            </a:pPr>
-            <a:r>
-              <a:rPr lang="en-US" sz="1300" b="1" dirty="0">
-                <a:solidFill>
-                  <a:schemeClr val="bg1"/>
-                </a:solidFill>
-              </a:rPr>
-              <a:t>3</a:t>
-            </a:r>
-            <a:endParaRPr lang="en-US" sz="1300" dirty="0"/>
-          </a:p>
-        </p:txBody>
-      </p:sp>
-      <p:sp>
-        <p:nvSpPr>
-          <p:cNvPr id="34" name="Text 32"/>
-          <p:cNvSpPr txBox="1"/>
-          <p:nvPr/>
-        </p:nvSpPr>
-        <p:spPr>
-          <a:xfrm>
-            <a:off x="5257800" y="2935224"/>
-            <a:ext cx="3337560" cy="530352"/>
-          </a:xfrm>
-          <a:prstGeom prst="rect">
-            <a:avLst/>
-          </a:prstGeom>
-          <a:noFill/>
-          <a:ln/>
-        </p:spPr>
-        <p:txBody>
-          <a:bodyPr wrap="square" lIns="635" tIns="635" rIns="635" bIns="635" rtlCol="0" anchor="ctr"/>
-          <a:lstStyle/>
-          <a:p>
-            <a:pPr indent="0" marL="0">
-              <a:buNone/>
-            </a:pPr>
-            <a:r>
-              <a:rPr lang="en-US" sz="1300" dirty="0">
-                <a:solidFill>
-                  <a:schemeClr val="tx1"/>
-                </a:solidFill>
-              </a:rPr>
-              <a:t>見積ご依頼でクリスマス特典をご案内</a:t>
-            </a:r>
-            <a:endParaRPr lang="en-US" sz="1300" dirty="0"/>
-          </a:p>
-        </p:txBody>
-      </p:sp>
-      <p:sp>
-        <p:nvSpPr>
-          <p:cNvPr id="35" name="pc_1_3"/>
-          <p:cNvSpPr/>
-          <p:nvPr/>
-        </p:nvSpPr>
-        <p:spPr>
-          <a:xfrm>
-            <a:off x="4663440" y="3557016"/>
-            <a:ext cx="4023360" cy="530352"/>
-          </a:xfrm>
-          <a:prstGeom prst="roundRect">
-            <a:avLst>
-              <a:gd name="adj" fmla="val 13793"/>
-            </a:avLst>
-          </a:prstGeom>
-          <a:solidFill>
-            <a:schemeClr val="bg2"/>
-          </a:solidFill>
-          <a:ln w="12700">
-            <a:solidFill>
-              <a:schemeClr val="bg2"/>
-            </a:solidFill>
-            <a:prstDash val="solid"/>
-          </a:ln>
-        </p:spPr>
-      </p:sp>
-      <p:sp>
-        <p:nvSpPr>
-          <p:cNvPr id="36" name="pc_b_1_3"/>
-          <p:cNvSpPr/>
-          <p:nvPr/>
-        </p:nvSpPr>
-        <p:spPr>
-          <a:xfrm>
-            <a:off x="4773168" y="3639312"/>
-            <a:ext cx="365760" cy="365760"/>
-          </a:xfrm>
-          <a:prstGeom prst="ellipse">
-            <a:avLst/>
-          </a:prstGeom>
-          <a:solidFill>
-            <a:schemeClr val="tx2"/>
-          </a:solidFill>
-          <a:ln w="12700">
-            <a:solidFill>
-              <a:schemeClr val="tx2"/>
-            </a:solidFill>
-            <a:prstDash val="solid"/>
-          </a:ln>
-        </p:spPr>
-      </p:sp>
-      <p:sp>
-        <p:nvSpPr>
-          <p:cNvPr id="37" name="Text 35"/>
-          <p:cNvSpPr txBox="1"/>
-          <p:nvPr/>
-        </p:nvSpPr>
-        <p:spPr>
-          <a:xfrm>
-            <a:off x="4773168" y="3639312"/>
-            <a:ext cx="365760" cy="365760"/>
-          </a:xfrm>
-          <a:prstGeom prst="rect">
-            <a:avLst/>
-          </a:prstGeom>
-          <a:noFill/>
-          <a:ln/>
-        </p:spPr>
-        <p:txBody>
-          <a:bodyPr wrap="square" lIns="0" tIns="0" rIns="0" bIns="0" rtlCol="0" anchor="ctr"/>
-          <a:lstStyle/>
-          <a:p>
-            <a:pPr algn="ctr" indent="0" marL="0">
-              <a:buNone/>
-            </a:pPr>
-            <a:r>
-              <a:rPr lang="en-US" sz="1300" b="1" dirty="0">
-                <a:solidFill>
-                  <a:schemeClr val="bg1"/>
-                </a:solidFill>
-              </a:rPr>
-              <a:t>4</a:t>
-            </a:r>
-            <a:endParaRPr lang="en-US" sz="1300" dirty="0"/>
-          </a:p>
-        </p:txBody>
-      </p:sp>
-      <p:sp>
-        <p:nvSpPr>
-          <p:cNvPr id="38" name="Text 36"/>
-          <p:cNvSpPr txBox="1"/>
-          <p:nvPr/>
-        </p:nvSpPr>
-        <p:spPr>
-          <a:xfrm>
-            <a:off x="5257800" y="3557016"/>
-            <a:ext cx="3337560" cy="530352"/>
-          </a:xfrm>
-          <a:prstGeom prst="rect">
-            <a:avLst/>
-          </a:prstGeom>
-          <a:noFill/>
-          <a:ln/>
-        </p:spPr>
-        <p:txBody>
-          <a:bodyPr wrap="square" lIns="635" tIns="635" rIns="635" bIns="635" rtlCol="0" anchor="ctr"/>
-          <a:lstStyle/>
-          <a:p>
-            <a:pPr indent="0" marL="0">
-              <a:buNone/>
-            </a:pPr>
-            <a:r>
-              <a:rPr lang="en-US" sz="1300" dirty="0">
-                <a:solidFill>
-                  <a:schemeClr val="tx1"/>
-                </a:solidFill>
-              </a:rPr>
-              <a:t>お子様の完成作品を一緒に確認</a:t>
-            </a:r>
-            <a:endParaRPr lang="en-US" sz="1300" dirty="0"/>
-          </a:p>
-        </p:txBody>
-      </p:sp>
-      <p:sp>
-        <p:nvSpPr>
-          <p:cNvPr id="39" name="Text 37"/>
-          <p:cNvSpPr txBox="1"/>
-          <p:nvPr/>
-        </p:nvSpPr>
-        <p:spPr>
-          <a:xfrm>
-            <a:off x="457200" y="4224528"/>
-            <a:ext cx="8229600" cy="365760"/>
-          </a:xfrm>
-          <a:prstGeom prst="rect">
-            <a:avLst/>
-          </a:prstGeom>
-          <a:noFill/>
-          <a:ln/>
-        </p:spPr>
-        <p:txBody>
-          <a:bodyPr wrap="square" lIns="635" tIns="635" rIns="635" bIns="635" rtlCol="0" anchor="t"/>
-          <a:lstStyle/>
-          <a:p>
-            <a:pPr indent="0" marL="0">
-              <a:buNone/>
-            </a:pPr>
-            <a:r>
-              <a:rPr lang="en-US" sz="1200" dirty="0">
-                <a:solidFill>
-                  <a:schemeClr val="accent4"/>
-                </a:solidFill>
-              </a:rPr>
-              <a:t>運営スタッフの派遣はなし。店舗スタッフ様1名でも回せるよう、手順カードと運用マニュアルを同梱します。</a:t>
-            </a:r>
-            <a:endParaRPr lang="en-US" sz="1200" dirty="0"/>
           </a:p>
         </p:txBody>
       </p:sp>
@@ -15475,85 +15162,27 @@
                   <a:schemeClr val="tx2"/>
                 </a:solidFill>
               </a:rPr>
-              <a:t>クリスマスアーチ（開催中ツールの主役）</a:t>
+              <a:t>親子分離の運用設計</a:t>
             </a:r>
             <a:endParaRPr lang="en-US" sz="2400" dirty="0"/>
           </a:p>
         </p:txBody>
       </p:sp>
-      <p:pic>
-        <p:nvPicPr>
-          <p:cNvPr id="3" name="img_arch" descr="サンタとスノーマン付きのエアーアーチ参考写真">    </p:cNvPr>
-          <p:cNvPicPr>
-            <a:picLocks noChangeAspect="1"/>
-          </p:cNvPicPr>
-          <p:nvPr/>
-        </p:nvPicPr>
-        <p:blipFill>
-          <a:blip r:embed="rId1"/>
-          <a:stretch>
-            <a:fillRect/>
-          </a:stretch>
-        </p:blipFill>
-        <p:spPr>
-          <a:xfrm>
-            <a:off x="457200" y="1051560"/>
-            <a:ext cx="3291840" cy="3273552"/>
-          </a:xfrm>
-          <a:prstGeom prst="rect">
-            <a:avLst/>
-          </a:prstGeom>
-        </p:spPr>
-      </p:pic>
-      <p:sp>
-        <p:nvSpPr>
-          <p:cNvPr id="4" name="Text 1"/>
-          <p:cNvSpPr txBox="1"/>
-          <p:nvPr/>
-        </p:nvSpPr>
-        <p:spPr>
-          <a:xfrm>
-            <a:off x="457200" y="4370832"/>
-            <a:ext cx="3291840" cy="274320"/>
-          </a:xfrm>
-          <a:prstGeom prst="rect">
-            <a:avLst/>
-          </a:prstGeom>
-          <a:noFill/>
-          <a:ln/>
-        </p:spPr>
-        <p:txBody>
-          <a:bodyPr wrap="square" lIns="635" tIns="635" rIns="635" bIns="635" rtlCol="0" anchor="t"/>
-          <a:lstStyle/>
-          <a:p>
-            <a:pPr indent="0" marL="0">
-              <a:buNone/>
-            </a:pPr>
-            <a:r>
-              <a:rPr lang="en-US" sz="1000" dirty="0">
-                <a:solidFill>
-                  <a:schemeClr val="accent4"/>
-                </a:solidFill>
-              </a:rPr>
-              <a:t>参考イメージ</a:t>
-            </a:r>
-            <a:endParaRPr lang="en-US" sz="1000" dirty="0"/>
-          </a:p>
-        </p:txBody>
-      </p:sp>
-      <p:sp>
-        <p:nvSpPr>
-          <p:cNvPr id="5" name="arch_badge_0"/>
+      <p:sp>
+        <p:nvSpPr>
+          <p:cNvPr id="3" name="pc_head_0"/>
           <p:cNvSpPr/>
           <p:nvPr/>
         </p:nvSpPr>
         <p:spPr>
           <a:xfrm>
-            <a:off x="4114800" y="1097280"/>
-            <a:ext cx="411480" cy="411480"/>
-          </a:xfrm>
-          <a:prstGeom prst="ellipse">
-            <a:avLst/>
+            <a:off x="457200" y="1005840"/>
+            <a:ext cx="4023360" cy="548640"/>
+          </a:xfrm>
+          <a:prstGeom prst="roundRect">
+            <a:avLst>
+              <a:gd name="adj" fmla="val 13333"/>
+            </a:avLst>
           </a:prstGeom>
           <a:solidFill>
             <a:schemeClr val="accent1"/>
@@ -15568,14 +15197,14 @@
       </p:sp>
       <p:sp>
         <p:nvSpPr>
-          <p:cNvPr id="6" name="Text 3"/>
+          <p:cNvPr id="4" name="Text 2"/>
           <p:cNvSpPr txBox="1"/>
           <p:nvPr/>
         </p:nvSpPr>
         <p:spPr>
           <a:xfrm>
-            <a:off x="4114800" y="1097280"/>
-            <a:ext cx="411480" cy="411480"/>
+            <a:off x="457200" y="1005840"/>
+            <a:ext cx="4023360" cy="548640"/>
           </a:xfrm>
           <a:prstGeom prst="rect">
             <a:avLst/>
@@ -15591,99 +15220,54 @@
               <a:buNone/>
             </a:pPr>
             <a:r>
-              <a:rPr lang="en-US" sz="1300" b="1" dirty="0">
+              <a:rPr lang="en-US" sz="1600" b="1" dirty="0">
                 <a:solidFill>
                   <a:schemeClr val="bg1"/>
                 </a:solidFill>
               </a:rPr>
-              <a:t>1</a:t>
-            </a:r>
-            <a:endParaRPr lang="en-US" sz="1300" dirty="0"/>
-          </a:p>
-        </p:txBody>
-      </p:sp>
-      <p:sp>
-        <p:nvSpPr>
-          <p:cNvPr id="7" name="Text 4"/>
-          <p:cNvSpPr txBox="1"/>
-          <p:nvPr/>
-        </p:nvSpPr>
-        <p:spPr>
-          <a:xfrm>
-            <a:off x="4663440" y="1078992"/>
-            <a:ext cx="4023360" cy="365760"/>
-          </a:xfrm>
-          <a:prstGeom prst="rect">
-            <a:avLst/>
-          </a:prstGeom>
-          <a:noFill/>
-          <a:ln/>
-        </p:spPr>
-        <p:txBody>
-          <a:bodyPr wrap="square" lIns="635" tIns="635" rIns="635" bIns="635" rtlCol="0" anchor="t"/>
-          <a:lstStyle/>
-          <a:p>
-            <a:pPr indent="0" marL="0">
-              <a:buNone/>
-            </a:pPr>
-            <a:r>
-              <a:rPr lang="en-US" sz="1500" b="1" dirty="0">
-                <a:solidFill>
-                  <a:schemeClr val="tx2"/>
-                </a:solidFill>
-              </a:rPr>
-              <a:t>遠くからでも目立つ</a:t>
-            </a:r>
-            <a:endParaRPr lang="en-US" sz="1500" dirty="0"/>
-          </a:p>
-        </p:txBody>
-      </p:sp>
-      <p:sp>
-        <p:nvSpPr>
-          <p:cNvPr id="8" name="Text 5"/>
-          <p:cNvSpPr txBox="1"/>
-          <p:nvPr/>
-        </p:nvSpPr>
-        <p:spPr>
-          <a:xfrm>
-            <a:off x="4663440" y="1463040"/>
-            <a:ext cx="4023360" cy="640080"/>
-          </a:xfrm>
-          <a:prstGeom prst="rect">
-            <a:avLst/>
-          </a:prstGeom>
-          <a:noFill/>
-          <a:ln/>
-        </p:spPr>
-        <p:txBody>
-          <a:bodyPr wrap="square" lIns="635" tIns="635" rIns="635" bIns="635" rtlCol="0" anchor="t"/>
-          <a:lstStyle/>
-          <a:p>
-            <a:pPr indent="0" marL="0">
-              <a:buNone/>
-            </a:pPr>
-            <a:r>
-              <a:rPr lang="en-US" sz="1300" dirty="0">
-                <a:solidFill>
-                  <a:schemeClr val="tx1"/>
-                </a:solidFill>
-              </a:rPr>
-              <a:t>サンタ＆スノーマン付きのエアーアーチを入口に設置。ワークショップ開催中がひと目で伝わる。</a:t>
-            </a:r>
-            <a:endParaRPr lang="en-US" sz="1300" dirty="0"/>
-          </a:p>
-        </p:txBody>
-      </p:sp>
-      <p:sp>
-        <p:nvSpPr>
-          <p:cNvPr id="9" name="arch_badge_1"/>
+              <a:t>お子様　約20分</a:t>
+            </a:r>
+            <a:endParaRPr lang="en-US" sz="1600" dirty="0"/>
+          </a:p>
+        </p:txBody>
+      </p:sp>
+      <p:sp>
+        <p:nvSpPr>
+          <p:cNvPr id="5" name="pc_0_0"/>
           <p:cNvSpPr/>
           <p:nvPr/>
         </p:nvSpPr>
         <p:spPr>
           <a:xfrm>
-            <a:off x="4114800" y="2194560"/>
-            <a:ext cx="411480" cy="411480"/>
+            <a:off x="457200" y="1691640"/>
+            <a:ext cx="4023360" cy="530352"/>
+          </a:xfrm>
+          <a:prstGeom prst="roundRect">
+            <a:avLst>
+              <a:gd name="adj" fmla="val 13793"/>
+            </a:avLst>
+          </a:prstGeom>
+          <a:solidFill>
+            <a:schemeClr val="bg2"/>
+          </a:solidFill>
+          <a:ln w="12700">
+            <a:solidFill>
+              <a:schemeClr val="bg2"/>
+            </a:solidFill>
+            <a:prstDash val="solid"/>
+          </a:ln>
+        </p:spPr>
+      </p:sp>
+      <p:sp>
+        <p:nvSpPr>
+          <p:cNvPr id="6" name="pc_b_0_0"/>
+          <p:cNvSpPr/>
+          <p:nvPr/>
+        </p:nvSpPr>
+        <p:spPr>
+          <a:xfrm>
+            <a:off x="566928" y="1773936"/>
+            <a:ext cx="365760" cy="365760"/>
           </a:xfrm>
           <a:prstGeom prst="ellipse">
             <a:avLst/>
@@ -15701,14 +15285,14 @@
       </p:sp>
       <p:sp>
         <p:nvSpPr>
-          <p:cNvPr id="10" name="Text 7"/>
+          <p:cNvPr id="7" name="Text 5"/>
           <p:cNvSpPr txBox="1"/>
           <p:nvPr/>
         </p:nvSpPr>
         <p:spPr>
           <a:xfrm>
-            <a:off x="4114800" y="2194560"/>
-            <a:ext cx="411480" cy="411480"/>
+            <a:off x="566928" y="1773936"/>
+            <a:ext cx="365760" cy="365760"/>
           </a:xfrm>
           <a:prstGeom prst="rect">
             <a:avLst/>
@@ -15729,7 +15313,7 @@
                   <a:schemeClr val="bg1"/>
                 </a:solidFill>
               </a:rPr>
-              <a:t>2</a:t>
+              <a:t>1</a:t>
             </a:r>
             <a:endParaRPr lang="en-US" sz="1300" dirty="0"/>
           </a:p>
@@ -15737,71 +15321,35 @@
       </p:sp>
       <p:sp>
         <p:nvSpPr>
-          <p:cNvPr id="11" name="Text 8"/>
+          <p:cNvPr id="8" name="Text 6"/>
           <p:cNvSpPr txBox="1"/>
           <p:nvPr/>
         </p:nvSpPr>
         <p:spPr>
           <a:xfrm>
-            <a:off x="4663440" y="2176272"/>
-            <a:ext cx="4023360" cy="365760"/>
-          </a:xfrm>
-          <a:prstGeom prst="rect">
-            <a:avLst/>
-          </a:prstGeom>
-          <a:noFill/>
-          <a:ln/>
-        </p:spPr>
-        <p:txBody>
-          <a:bodyPr wrap="square" lIns="635" tIns="635" rIns="635" bIns="635" rtlCol="0" anchor="t"/>
+            <a:off x="1051560" y="1691640"/>
+            <a:ext cx="3337560" cy="530352"/>
+          </a:xfrm>
+          <a:prstGeom prst="rect">
+            <a:avLst/>
+          </a:prstGeom>
+          <a:noFill/>
+          <a:ln/>
+        </p:spPr>
+        <p:txBody>
+          <a:bodyPr wrap="square" lIns="635" tIns="635" rIns="635" bIns="635" rtlCol="0" anchor="ctr"/>
           <a:lstStyle/>
           <a:p>
             <a:pPr indent="0" marL="0">
               <a:buNone/>
             </a:pPr>
             <a:r>
-              <a:rPr lang="en-US" sz="1500" b="1" dirty="0">
-                <a:solidFill>
-                  <a:schemeClr val="tx2"/>
-                </a:solidFill>
-              </a:rPr>
-              <a:t>フォトスポットに</a:t>
-            </a:r>
-            <a:endParaRPr lang="en-US" sz="1500" dirty="0"/>
-          </a:p>
-        </p:txBody>
-      </p:sp>
-      <p:sp>
-        <p:nvSpPr>
-          <p:cNvPr id="12" name="Text 9"/>
-          <p:cNvSpPr txBox="1"/>
-          <p:nvPr/>
-        </p:nvSpPr>
-        <p:spPr>
-          <a:xfrm>
-            <a:off x="4663440" y="2560320"/>
-            <a:ext cx="4023360" cy="640080"/>
-          </a:xfrm>
-          <a:prstGeom prst="rect">
-            <a:avLst/>
-          </a:prstGeom>
-          <a:noFill/>
-          <a:ln/>
-        </p:spPr>
-        <p:txBody>
-          <a:bodyPr wrap="square" lIns="635" tIns="635" rIns="635" bIns="635" rtlCol="0" anchor="t"/>
-          <a:lstStyle/>
-          <a:p>
-            <a:pPr indent="0" marL="0">
-              <a:buNone/>
-            </a:pPr>
-            <a:r>
               <a:rPr lang="en-US" sz="1300" dirty="0">
                 <a:solidFill>
                   <a:schemeClr val="tx1"/>
                 </a:solidFill>
               </a:rPr>
-              <a:t>アーチ前での記念撮影がSNS投稿のきっかけに。</a:t>
+              <a:t>スノードーム／スクイーズを選ぶ</a:t>
             </a:r>
             <a:endParaRPr lang="en-US" sz="1300" dirty="0"/>
           </a:p>
@@ -15809,14 +15357,41 @@
       </p:sp>
       <p:sp>
         <p:nvSpPr>
-          <p:cNvPr id="13" name="arch_badge_2"/>
+          <p:cNvPr id="9" name="pc_0_1"/>
           <p:cNvSpPr/>
           <p:nvPr/>
         </p:nvSpPr>
         <p:spPr>
           <a:xfrm>
-            <a:off x="4114800" y="3291840"/>
-            <a:ext cx="411480" cy="411480"/>
+            <a:off x="457200" y="2313432"/>
+            <a:ext cx="4023360" cy="530352"/>
+          </a:xfrm>
+          <a:prstGeom prst="roundRect">
+            <a:avLst>
+              <a:gd name="adj" fmla="val 13793"/>
+            </a:avLst>
+          </a:prstGeom>
+          <a:solidFill>
+            <a:schemeClr val="bg2"/>
+          </a:solidFill>
+          <a:ln w="12700">
+            <a:solidFill>
+              <a:schemeClr val="bg2"/>
+            </a:solidFill>
+            <a:prstDash val="solid"/>
+          </a:ln>
+        </p:spPr>
+      </p:sp>
+      <p:sp>
+        <p:nvSpPr>
+          <p:cNvPr id="10" name="pc_b_0_1"/>
+          <p:cNvSpPr/>
+          <p:nvPr/>
+        </p:nvSpPr>
+        <p:spPr>
+          <a:xfrm>
+            <a:off x="566928" y="2395728"/>
+            <a:ext cx="365760" cy="365760"/>
           </a:xfrm>
           <a:prstGeom prst="ellipse">
             <a:avLst/>
@@ -15834,14 +15409,14 @@
       </p:sp>
       <p:sp>
         <p:nvSpPr>
-          <p:cNvPr id="14" name="Text 11"/>
+          <p:cNvPr id="11" name="Text 9"/>
           <p:cNvSpPr txBox="1"/>
           <p:nvPr/>
         </p:nvSpPr>
         <p:spPr>
           <a:xfrm>
-            <a:off x="4114800" y="3291840"/>
-            <a:ext cx="411480" cy="411480"/>
+            <a:off x="566928" y="2395728"/>
+            <a:ext cx="365760" cy="365760"/>
           </a:xfrm>
           <a:prstGeom prst="rect">
             <a:avLst/>
@@ -15862,6 +15437,130 @@
                   <a:schemeClr val="bg1"/>
                 </a:solidFill>
               </a:rPr>
+              <a:t>2</a:t>
+            </a:r>
+            <a:endParaRPr lang="en-US" sz="1300" dirty="0"/>
+          </a:p>
+        </p:txBody>
+      </p:sp>
+      <p:sp>
+        <p:nvSpPr>
+          <p:cNvPr id="12" name="Text 10"/>
+          <p:cNvSpPr txBox="1"/>
+          <p:nvPr/>
+        </p:nvSpPr>
+        <p:spPr>
+          <a:xfrm>
+            <a:off x="1051560" y="2313432"/>
+            <a:ext cx="3337560" cy="530352"/>
+          </a:xfrm>
+          <a:prstGeom prst="rect">
+            <a:avLst/>
+          </a:prstGeom>
+          <a:noFill/>
+          <a:ln/>
+        </p:spPr>
+        <p:txBody>
+          <a:bodyPr wrap="square" lIns="635" tIns="635" rIns="635" bIns="635" rtlCol="0" anchor="ctr"/>
+          <a:lstStyle/>
+          <a:p>
+            <a:pPr indent="0" marL="0">
+              <a:buNone/>
+            </a:pPr>
+            <a:r>
+              <a:rPr lang="en-US" sz="1300" dirty="0">
+                <a:solidFill>
+                  <a:schemeClr val="tx1"/>
+                </a:solidFill>
+              </a:rPr>
+              <a:t>見本と手順カードを見ながら制作に集中</a:t>
+            </a:r>
+            <a:endParaRPr lang="en-US" sz="1300" dirty="0"/>
+          </a:p>
+        </p:txBody>
+      </p:sp>
+      <p:sp>
+        <p:nvSpPr>
+          <p:cNvPr id="13" name="pc_0_2"/>
+          <p:cNvSpPr/>
+          <p:nvPr/>
+        </p:nvSpPr>
+        <p:spPr>
+          <a:xfrm>
+            <a:off x="457200" y="2935224"/>
+            <a:ext cx="4023360" cy="530352"/>
+          </a:xfrm>
+          <a:prstGeom prst="roundRect">
+            <a:avLst>
+              <a:gd name="adj" fmla="val 13793"/>
+            </a:avLst>
+          </a:prstGeom>
+          <a:solidFill>
+            <a:schemeClr val="bg2"/>
+          </a:solidFill>
+          <a:ln w="12700">
+            <a:solidFill>
+              <a:schemeClr val="bg2"/>
+            </a:solidFill>
+            <a:prstDash val="solid"/>
+          </a:ln>
+        </p:spPr>
+      </p:sp>
+      <p:sp>
+        <p:nvSpPr>
+          <p:cNvPr id="14" name="pc_b_0_2"/>
+          <p:cNvSpPr/>
+          <p:nvPr/>
+        </p:nvSpPr>
+        <p:spPr>
+          <a:xfrm>
+            <a:off x="566928" y="3017520"/>
+            <a:ext cx="365760" cy="365760"/>
+          </a:xfrm>
+          <a:prstGeom prst="ellipse">
+            <a:avLst/>
+          </a:prstGeom>
+          <a:solidFill>
+            <a:schemeClr val="accent1"/>
+          </a:solidFill>
+          <a:ln w="12700">
+            <a:solidFill>
+              <a:schemeClr val="accent1"/>
+            </a:solidFill>
+            <a:prstDash val="solid"/>
+          </a:ln>
+        </p:spPr>
+      </p:sp>
+      <p:sp>
+        <p:nvSpPr>
+          <p:cNvPr id="15" name="Text 13"/>
+          <p:cNvSpPr txBox="1"/>
+          <p:nvPr/>
+        </p:nvSpPr>
+        <p:spPr>
+          <a:xfrm>
+            <a:off x="566928" y="3017520"/>
+            <a:ext cx="365760" cy="365760"/>
+          </a:xfrm>
+          <a:prstGeom prst="rect">
+            <a:avLst/>
+          </a:prstGeom>
+          <a:noFill/>
+          <a:ln/>
+        </p:spPr>
+        <p:txBody>
+          <a:bodyPr wrap="square" lIns="0" tIns="0" rIns="0" bIns="0" rtlCol="0" anchor="ctr"/>
+          <a:lstStyle/>
+          <a:p>
+            <a:pPr algn="ctr" indent="0" marL="0">
+              <a:buNone/>
+            </a:pPr>
+            <a:r>
+              <a:rPr lang="en-US" sz="1300" b="1" dirty="0">
+                <a:solidFill>
+                  <a:schemeClr val="bg1"/>
+                </a:solidFill>
+              </a:rPr>
               <a:t>3</a:t>
             </a:r>
             <a:endParaRPr lang="en-US" sz="1300" dirty="0"/>
@@ -15870,14 +15569,733 @@
       </p:sp>
       <p:sp>
         <p:nvSpPr>
-          <p:cNvPr id="15" name="Text 12"/>
+          <p:cNvPr id="16" name="Text 14"/>
           <p:cNvSpPr txBox="1"/>
           <p:nvPr/>
         </p:nvSpPr>
         <p:spPr>
           <a:xfrm>
-            <a:off x="4663440" y="3273552"/>
-            <a:ext cx="4023360" cy="365760"/>
+            <a:off x="1051560" y="2935224"/>
+            <a:ext cx="3337560" cy="530352"/>
+          </a:xfrm>
+          <a:prstGeom prst="rect">
+            <a:avLst/>
+          </a:prstGeom>
+          <a:noFill/>
+          <a:ln/>
+        </p:spPr>
+        <p:txBody>
+          <a:bodyPr wrap="square" lIns="635" tIns="635" rIns="635" bIns="635" rtlCol="0" anchor="ctr"/>
+          <a:lstStyle/>
+          <a:p>
+            <a:pPr indent="0" marL="0">
+              <a:buNone/>
+            </a:pPr>
+            <a:r>
+              <a:rPr lang="en-US" sz="1300" dirty="0">
+                <a:solidFill>
+                  <a:schemeClr val="tx1"/>
+                </a:solidFill>
+              </a:rPr>
+              <a:t>完成（スクイーズは型のまま袋へ）</a:t>
+            </a:r>
+            <a:endParaRPr lang="en-US" sz="1300" dirty="0"/>
+          </a:p>
+        </p:txBody>
+      </p:sp>
+      <p:sp>
+        <p:nvSpPr>
+          <p:cNvPr id="17" name="pc_0_3"/>
+          <p:cNvSpPr/>
+          <p:nvPr/>
+        </p:nvSpPr>
+        <p:spPr>
+          <a:xfrm>
+            <a:off x="457200" y="3557016"/>
+            <a:ext cx="4023360" cy="530352"/>
+          </a:xfrm>
+          <a:prstGeom prst="roundRect">
+            <a:avLst>
+              <a:gd name="adj" fmla="val 13793"/>
+            </a:avLst>
+          </a:prstGeom>
+          <a:solidFill>
+            <a:schemeClr val="bg2"/>
+          </a:solidFill>
+          <a:ln w="12700">
+            <a:solidFill>
+              <a:schemeClr val="bg2"/>
+            </a:solidFill>
+            <a:prstDash val="solid"/>
+          </a:ln>
+        </p:spPr>
+      </p:sp>
+      <p:sp>
+        <p:nvSpPr>
+          <p:cNvPr id="18" name="pc_b_0_3"/>
+          <p:cNvSpPr/>
+          <p:nvPr/>
+        </p:nvSpPr>
+        <p:spPr>
+          <a:xfrm>
+            <a:off x="566928" y="3639312"/>
+            <a:ext cx="365760" cy="365760"/>
+          </a:xfrm>
+          <a:prstGeom prst="ellipse">
+            <a:avLst/>
+          </a:prstGeom>
+          <a:solidFill>
+            <a:schemeClr val="accent1"/>
+          </a:solidFill>
+          <a:ln w="12700">
+            <a:solidFill>
+              <a:schemeClr val="accent1"/>
+            </a:solidFill>
+            <a:prstDash val="solid"/>
+          </a:ln>
+        </p:spPr>
+      </p:sp>
+      <p:sp>
+        <p:nvSpPr>
+          <p:cNvPr id="19" name="Text 17"/>
+          <p:cNvSpPr txBox="1"/>
+          <p:nvPr/>
+        </p:nvSpPr>
+        <p:spPr>
+          <a:xfrm>
+            <a:off x="566928" y="3639312"/>
+            <a:ext cx="365760" cy="365760"/>
+          </a:xfrm>
+          <a:prstGeom prst="rect">
+            <a:avLst/>
+          </a:prstGeom>
+          <a:noFill/>
+          <a:ln/>
+        </p:spPr>
+        <p:txBody>
+          <a:bodyPr wrap="square" lIns="0" tIns="0" rIns="0" bIns="0" rtlCol="0" anchor="ctr"/>
+          <a:lstStyle/>
+          <a:p>
+            <a:pPr algn="ctr" indent="0" marL="0">
+              <a:buNone/>
+            </a:pPr>
+            <a:r>
+              <a:rPr lang="en-US" sz="1300" b="1" dirty="0">
+                <a:solidFill>
+                  <a:schemeClr val="bg1"/>
+                </a:solidFill>
+              </a:rPr>
+              <a:t>4</a:t>
+            </a:r>
+            <a:endParaRPr lang="en-US" sz="1300" dirty="0"/>
+          </a:p>
+        </p:txBody>
+      </p:sp>
+      <p:sp>
+        <p:nvSpPr>
+          <p:cNvPr id="20" name="Text 18"/>
+          <p:cNvSpPr txBox="1"/>
+          <p:nvPr/>
+        </p:nvSpPr>
+        <p:spPr>
+          <a:xfrm>
+            <a:off x="1051560" y="3557016"/>
+            <a:ext cx="3337560" cy="530352"/>
+          </a:xfrm>
+          <a:prstGeom prst="rect">
+            <a:avLst/>
+          </a:prstGeom>
+          <a:noFill/>
+          <a:ln/>
+        </p:spPr>
+        <p:txBody>
+          <a:bodyPr wrap="square" lIns="635" tIns="635" rIns="635" bIns="635" rtlCol="0" anchor="ctr"/>
+          <a:lstStyle/>
+          <a:p>
+            <a:pPr indent="0" marL="0">
+              <a:buNone/>
+            </a:pPr>
+            <a:r>
+              <a:rPr lang="en-US" sz="1300" dirty="0">
+                <a:solidFill>
+                  <a:schemeClr val="tx1"/>
+                </a:solidFill>
+              </a:rPr>
+              <a:t>作品を持って保護者様と合流</a:t>
+            </a:r>
+            <a:endParaRPr lang="en-US" sz="1300" dirty="0"/>
+          </a:p>
+        </p:txBody>
+      </p:sp>
+      <p:sp>
+        <p:nvSpPr>
+          <p:cNvPr id="21" name="pc_head_1"/>
+          <p:cNvSpPr/>
+          <p:nvPr/>
+        </p:nvSpPr>
+        <p:spPr>
+          <a:xfrm>
+            <a:off x="4663440" y="1005840"/>
+            <a:ext cx="4023360" cy="548640"/>
+          </a:xfrm>
+          <a:prstGeom prst="roundRect">
+            <a:avLst>
+              <a:gd name="adj" fmla="val 13333"/>
+            </a:avLst>
+          </a:prstGeom>
+          <a:solidFill>
+            <a:schemeClr val="tx2"/>
+          </a:solidFill>
+          <a:ln w="12700">
+            <a:solidFill>
+              <a:schemeClr val="tx2"/>
+            </a:solidFill>
+            <a:prstDash val="solid"/>
+          </a:ln>
+        </p:spPr>
+      </p:sp>
+      <p:sp>
+        <p:nvSpPr>
+          <p:cNvPr id="22" name="Text 20"/>
+          <p:cNvSpPr txBox="1"/>
+          <p:nvPr/>
+        </p:nvSpPr>
+        <p:spPr>
+          <a:xfrm>
+            <a:off x="4663440" y="1005840"/>
+            <a:ext cx="4023360" cy="548640"/>
+          </a:xfrm>
+          <a:prstGeom prst="rect">
+            <a:avLst/>
+          </a:prstGeom>
+          <a:noFill/>
+          <a:ln/>
+        </p:spPr>
+        <p:txBody>
+          <a:bodyPr wrap="square" lIns="0" tIns="0" rIns="0" bIns="0" rtlCol="0" anchor="ctr"/>
+          <a:lstStyle/>
+          <a:p>
+            <a:pPr algn="ctr" indent="0" marL="0">
+              <a:buNone/>
+            </a:pPr>
+            <a:r>
+              <a:rPr lang="en-US" sz="1600" b="1" dirty="0">
+                <a:solidFill>
+                  <a:schemeClr val="bg1"/>
+                </a:solidFill>
+              </a:rPr>
+              <a:t>保護者様　約20分</a:t>
+            </a:r>
+            <a:endParaRPr lang="en-US" sz="1600" dirty="0"/>
+          </a:p>
+        </p:txBody>
+      </p:sp>
+      <p:sp>
+        <p:nvSpPr>
+          <p:cNvPr id="23" name="pc_1_0"/>
+          <p:cNvSpPr/>
+          <p:nvPr/>
+        </p:nvSpPr>
+        <p:spPr>
+          <a:xfrm>
+            <a:off x="4663440" y="1691640"/>
+            <a:ext cx="4023360" cy="530352"/>
+          </a:xfrm>
+          <a:prstGeom prst="roundRect">
+            <a:avLst>
+              <a:gd name="adj" fmla="val 13793"/>
+            </a:avLst>
+          </a:prstGeom>
+          <a:solidFill>
+            <a:schemeClr val="bg2"/>
+          </a:solidFill>
+          <a:ln w="12700">
+            <a:solidFill>
+              <a:schemeClr val="bg2"/>
+            </a:solidFill>
+            <a:prstDash val="solid"/>
+          </a:ln>
+        </p:spPr>
+      </p:sp>
+      <p:sp>
+        <p:nvSpPr>
+          <p:cNvPr id="24" name="pc_b_1_0"/>
+          <p:cNvSpPr/>
+          <p:nvPr/>
+        </p:nvSpPr>
+        <p:spPr>
+          <a:xfrm>
+            <a:off x="4773168" y="1773936"/>
+            <a:ext cx="365760" cy="365760"/>
+          </a:xfrm>
+          <a:prstGeom prst="ellipse">
+            <a:avLst/>
+          </a:prstGeom>
+          <a:solidFill>
+            <a:schemeClr val="tx2"/>
+          </a:solidFill>
+          <a:ln w="12700">
+            <a:solidFill>
+              <a:schemeClr val="tx2"/>
+            </a:solidFill>
+            <a:prstDash val="solid"/>
+          </a:ln>
+        </p:spPr>
+      </p:sp>
+      <p:sp>
+        <p:nvSpPr>
+          <p:cNvPr id="25" name="Text 23"/>
+          <p:cNvSpPr txBox="1"/>
+          <p:nvPr/>
+        </p:nvSpPr>
+        <p:spPr>
+          <a:xfrm>
+            <a:off x="4773168" y="1773936"/>
+            <a:ext cx="365760" cy="365760"/>
+          </a:xfrm>
+          <a:prstGeom prst="rect">
+            <a:avLst/>
+          </a:prstGeom>
+          <a:noFill/>
+          <a:ln/>
+        </p:spPr>
+        <p:txBody>
+          <a:bodyPr wrap="square" lIns="0" tIns="0" rIns="0" bIns="0" rtlCol="0" anchor="ctr"/>
+          <a:lstStyle/>
+          <a:p>
+            <a:pPr algn="ctr" indent="0" marL="0">
+              <a:buNone/>
+            </a:pPr>
+            <a:r>
+              <a:rPr lang="en-US" sz="1300" b="1" dirty="0">
+                <a:solidFill>
+                  <a:schemeClr val="bg1"/>
+                </a:solidFill>
+              </a:rPr>
+              <a:t>1</a:t>
+            </a:r>
+            <a:endParaRPr lang="en-US" sz="1300" dirty="0"/>
+          </a:p>
+        </p:txBody>
+      </p:sp>
+      <p:sp>
+        <p:nvSpPr>
+          <p:cNvPr id="26" name="Text 24"/>
+          <p:cNvSpPr txBox="1"/>
+          <p:nvPr/>
+        </p:nvSpPr>
+        <p:spPr>
+          <a:xfrm>
+            <a:off x="5257800" y="1691640"/>
+            <a:ext cx="3337560" cy="530352"/>
+          </a:xfrm>
+          <a:prstGeom prst="rect">
+            <a:avLst/>
+          </a:prstGeom>
+          <a:noFill/>
+          <a:ln/>
+        </p:spPr>
+        <p:txBody>
+          <a:bodyPr wrap="square" lIns="635" tIns="635" rIns="635" bIns="635" rtlCol="0" anchor="ctr"/>
+          <a:lstStyle/>
+          <a:p>
+            <a:pPr indent="0" marL="0">
+              <a:buNone/>
+            </a:pPr>
+            <a:r>
+              <a:rPr lang="en-US" sz="1300" dirty="0">
+                <a:solidFill>
+                  <a:schemeClr val="tx1"/>
+                </a:solidFill>
+              </a:rPr>
+              <a:t>隣接の商談カウンターへご案内</a:t>
+            </a:r>
+            <a:endParaRPr lang="en-US" sz="1300" dirty="0"/>
+          </a:p>
+        </p:txBody>
+      </p:sp>
+      <p:sp>
+        <p:nvSpPr>
+          <p:cNvPr id="27" name="pc_1_1"/>
+          <p:cNvSpPr/>
+          <p:nvPr/>
+        </p:nvSpPr>
+        <p:spPr>
+          <a:xfrm>
+            <a:off x="4663440" y="2313432"/>
+            <a:ext cx="4023360" cy="530352"/>
+          </a:xfrm>
+          <a:prstGeom prst="roundRect">
+            <a:avLst>
+              <a:gd name="adj" fmla="val 13793"/>
+            </a:avLst>
+          </a:prstGeom>
+          <a:solidFill>
+            <a:schemeClr val="bg2"/>
+          </a:solidFill>
+          <a:ln w="12700">
+            <a:solidFill>
+              <a:schemeClr val="bg2"/>
+            </a:solidFill>
+            <a:prstDash val="solid"/>
+          </a:ln>
+        </p:spPr>
+      </p:sp>
+      <p:sp>
+        <p:nvSpPr>
+          <p:cNvPr id="28" name="pc_b_1_1"/>
+          <p:cNvSpPr/>
+          <p:nvPr/>
+        </p:nvSpPr>
+        <p:spPr>
+          <a:xfrm>
+            <a:off x="4773168" y="2395728"/>
+            <a:ext cx="365760" cy="365760"/>
+          </a:xfrm>
+          <a:prstGeom prst="ellipse">
+            <a:avLst/>
+          </a:prstGeom>
+          <a:solidFill>
+            <a:schemeClr val="tx2"/>
+          </a:solidFill>
+          <a:ln w="12700">
+            <a:solidFill>
+              <a:schemeClr val="tx2"/>
+            </a:solidFill>
+            <a:prstDash val="solid"/>
+          </a:ln>
+        </p:spPr>
+      </p:sp>
+      <p:sp>
+        <p:nvSpPr>
+          <p:cNvPr id="29" name="Text 27"/>
+          <p:cNvSpPr txBox="1"/>
+          <p:nvPr/>
+        </p:nvSpPr>
+        <p:spPr>
+          <a:xfrm>
+            <a:off x="4773168" y="2395728"/>
+            <a:ext cx="365760" cy="365760"/>
+          </a:xfrm>
+          <a:prstGeom prst="rect">
+            <a:avLst/>
+          </a:prstGeom>
+          <a:noFill/>
+          <a:ln/>
+        </p:spPr>
+        <p:txBody>
+          <a:bodyPr wrap="square" lIns="0" tIns="0" rIns="0" bIns="0" rtlCol="0" anchor="ctr"/>
+          <a:lstStyle/>
+          <a:p>
+            <a:pPr algn="ctr" indent="0" marL="0">
+              <a:buNone/>
+            </a:pPr>
+            <a:r>
+              <a:rPr lang="en-US" sz="1300" b="1" dirty="0">
+                <a:solidFill>
+                  <a:schemeClr val="bg1"/>
+                </a:solidFill>
+              </a:rPr>
+              <a:t>2</a:t>
+            </a:r>
+            <a:endParaRPr lang="en-US" sz="1300" dirty="0"/>
+          </a:p>
+        </p:txBody>
+      </p:sp>
+      <p:sp>
+        <p:nvSpPr>
+          <p:cNvPr id="30" name="Text 28"/>
+          <p:cNvSpPr txBox="1"/>
+          <p:nvPr/>
+        </p:nvSpPr>
+        <p:spPr>
+          <a:xfrm>
+            <a:off x="5257800" y="2313432"/>
+            <a:ext cx="3337560" cy="530352"/>
+          </a:xfrm>
+          <a:prstGeom prst="rect">
+            <a:avLst/>
+          </a:prstGeom>
+          <a:noFill/>
+          <a:ln/>
+        </p:spPr>
+        <p:txBody>
+          <a:bodyPr wrap="square" lIns="635" tIns="635" rIns="635" bIns="635" rtlCol="0" anchor="ctr"/>
+          <a:lstStyle/>
+          <a:p>
+            <a:pPr indent="0" marL="0">
+              <a:buNone/>
+            </a:pPr>
+            <a:r>
+              <a:rPr lang="en-US" sz="1300" dirty="0">
+                <a:solidFill>
+                  <a:schemeClr val="tx1"/>
+                </a:solidFill>
+              </a:rPr>
+              <a:t>料金プラン・機種変更のご相談</a:t>
+            </a:r>
+            <a:endParaRPr lang="en-US" sz="1300" dirty="0"/>
+          </a:p>
+        </p:txBody>
+      </p:sp>
+      <p:sp>
+        <p:nvSpPr>
+          <p:cNvPr id="31" name="pc_1_2"/>
+          <p:cNvSpPr/>
+          <p:nvPr/>
+        </p:nvSpPr>
+        <p:spPr>
+          <a:xfrm>
+            <a:off x="4663440" y="2935224"/>
+            <a:ext cx="4023360" cy="530352"/>
+          </a:xfrm>
+          <a:prstGeom prst="roundRect">
+            <a:avLst>
+              <a:gd name="adj" fmla="val 13793"/>
+            </a:avLst>
+          </a:prstGeom>
+          <a:solidFill>
+            <a:schemeClr val="bg2"/>
+          </a:solidFill>
+          <a:ln w="12700">
+            <a:solidFill>
+              <a:schemeClr val="bg2"/>
+            </a:solidFill>
+            <a:prstDash val="solid"/>
+          </a:ln>
+        </p:spPr>
+      </p:sp>
+      <p:sp>
+        <p:nvSpPr>
+          <p:cNvPr id="32" name="pc_b_1_2"/>
+          <p:cNvSpPr/>
+          <p:nvPr/>
+        </p:nvSpPr>
+        <p:spPr>
+          <a:xfrm>
+            <a:off x="4773168" y="3017520"/>
+            <a:ext cx="365760" cy="365760"/>
+          </a:xfrm>
+          <a:prstGeom prst="ellipse">
+            <a:avLst/>
+          </a:prstGeom>
+          <a:solidFill>
+            <a:schemeClr val="tx2"/>
+          </a:solidFill>
+          <a:ln w="12700">
+            <a:solidFill>
+              <a:schemeClr val="tx2"/>
+            </a:solidFill>
+            <a:prstDash val="solid"/>
+          </a:ln>
+        </p:spPr>
+      </p:sp>
+      <p:sp>
+        <p:nvSpPr>
+          <p:cNvPr id="33" name="Text 31"/>
+          <p:cNvSpPr txBox="1"/>
+          <p:nvPr/>
+        </p:nvSpPr>
+        <p:spPr>
+          <a:xfrm>
+            <a:off x="4773168" y="3017520"/>
+            <a:ext cx="365760" cy="365760"/>
+          </a:xfrm>
+          <a:prstGeom prst="rect">
+            <a:avLst/>
+          </a:prstGeom>
+          <a:noFill/>
+          <a:ln/>
+        </p:spPr>
+        <p:txBody>
+          <a:bodyPr wrap="square" lIns="0" tIns="0" rIns="0" bIns="0" rtlCol="0" anchor="ctr"/>
+          <a:lstStyle/>
+          <a:p>
+            <a:pPr algn="ctr" indent="0" marL="0">
+              <a:buNone/>
+            </a:pPr>
+            <a:r>
+              <a:rPr lang="en-US" sz="1300" b="1" dirty="0">
+                <a:solidFill>
+                  <a:schemeClr val="bg1"/>
+                </a:solidFill>
+              </a:rPr>
+              <a:t>3</a:t>
+            </a:r>
+            <a:endParaRPr lang="en-US" sz="1300" dirty="0"/>
+          </a:p>
+        </p:txBody>
+      </p:sp>
+      <p:sp>
+        <p:nvSpPr>
+          <p:cNvPr id="34" name="Text 32"/>
+          <p:cNvSpPr txBox="1"/>
+          <p:nvPr/>
+        </p:nvSpPr>
+        <p:spPr>
+          <a:xfrm>
+            <a:off x="5257800" y="2935224"/>
+            <a:ext cx="3337560" cy="530352"/>
+          </a:xfrm>
+          <a:prstGeom prst="rect">
+            <a:avLst/>
+          </a:prstGeom>
+          <a:noFill/>
+          <a:ln/>
+        </p:spPr>
+        <p:txBody>
+          <a:bodyPr wrap="square" lIns="635" tIns="635" rIns="635" bIns="635" rtlCol="0" anchor="ctr"/>
+          <a:lstStyle/>
+          <a:p>
+            <a:pPr indent="0" marL="0">
+              <a:buNone/>
+            </a:pPr>
+            <a:r>
+              <a:rPr lang="en-US" sz="1300" dirty="0">
+                <a:solidFill>
+                  <a:schemeClr val="tx1"/>
+                </a:solidFill>
+              </a:rPr>
+              <a:t>見積ご依頼でクリスマス特典をご案内</a:t>
+            </a:r>
+            <a:endParaRPr lang="en-US" sz="1300" dirty="0"/>
+          </a:p>
+        </p:txBody>
+      </p:sp>
+      <p:sp>
+        <p:nvSpPr>
+          <p:cNvPr id="35" name="pc_1_3"/>
+          <p:cNvSpPr/>
+          <p:nvPr/>
+        </p:nvSpPr>
+        <p:spPr>
+          <a:xfrm>
+            <a:off x="4663440" y="3557016"/>
+            <a:ext cx="4023360" cy="530352"/>
+          </a:xfrm>
+          <a:prstGeom prst="roundRect">
+            <a:avLst>
+              <a:gd name="adj" fmla="val 13793"/>
+            </a:avLst>
+          </a:prstGeom>
+          <a:solidFill>
+            <a:schemeClr val="bg2"/>
+          </a:solidFill>
+          <a:ln w="12700">
+            <a:solidFill>
+              <a:schemeClr val="bg2"/>
+            </a:solidFill>
+            <a:prstDash val="solid"/>
+          </a:ln>
+        </p:spPr>
+      </p:sp>
+      <p:sp>
+        <p:nvSpPr>
+          <p:cNvPr id="36" name="pc_b_1_3"/>
+          <p:cNvSpPr/>
+          <p:nvPr/>
+        </p:nvSpPr>
+        <p:spPr>
+          <a:xfrm>
+            <a:off x="4773168" y="3639312"/>
+            <a:ext cx="365760" cy="365760"/>
+          </a:xfrm>
+          <a:prstGeom prst="ellipse">
+            <a:avLst/>
+          </a:prstGeom>
+          <a:solidFill>
+            <a:schemeClr val="tx2"/>
+          </a:solidFill>
+          <a:ln w="12700">
+            <a:solidFill>
+              <a:schemeClr val="tx2"/>
+            </a:solidFill>
+            <a:prstDash val="solid"/>
+          </a:ln>
+        </p:spPr>
+      </p:sp>
+      <p:sp>
+        <p:nvSpPr>
+          <p:cNvPr id="37" name="Text 35"/>
+          <p:cNvSpPr txBox="1"/>
+          <p:nvPr/>
+        </p:nvSpPr>
+        <p:spPr>
+          <a:xfrm>
+            <a:off x="4773168" y="3639312"/>
+            <a:ext cx="365760" cy="365760"/>
+          </a:xfrm>
+          <a:prstGeom prst="rect">
+            <a:avLst/>
+          </a:prstGeom>
+          <a:noFill/>
+          <a:ln/>
+        </p:spPr>
+        <p:txBody>
+          <a:bodyPr wrap="square" lIns="0" tIns="0" rIns="0" bIns="0" rtlCol="0" anchor="ctr"/>
+          <a:lstStyle/>
+          <a:p>
+            <a:pPr algn="ctr" indent="0" marL="0">
+              <a:buNone/>
+            </a:pPr>
+            <a:r>
+              <a:rPr lang="en-US" sz="1300" b="1" dirty="0">
+                <a:solidFill>
+                  <a:schemeClr val="bg1"/>
+                </a:solidFill>
+              </a:rPr>
+              <a:t>4</a:t>
+            </a:r>
+            <a:endParaRPr lang="en-US" sz="1300" dirty="0"/>
+          </a:p>
+        </p:txBody>
+      </p:sp>
+      <p:sp>
+        <p:nvSpPr>
+          <p:cNvPr id="38" name="Text 36"/>
+          <p:cNvSpPr txBox="1"/>
+          <p:nvPr/>
+        </p:nvSpPr>
+        <p:spPr>
+          <a:xfrm>
+            <a:off x="5257800" y="3557016"/>
+            <a:ext cx="3337560" cy="530352"/>
+          </a:xfrm>
+          <a:prstGeom prst="rect">
+            <a:avLst/>
+          </a:prstGeom>
+          <a:noFill/>
+          <a:ln/>
+        </p:spPr>
+        <p:txBody>
+          <a:bodyPr wrap="square" lIns="635" tIns="635" rIns="635" bIns="635" rtlCol="0" anchor="ctr"/>
+          <a:lstStyle/>
+          <a:p>
+            <a:pPr indent="0" marL="0">
+              <a:buNone/>
+            </a:pPr>
+            <a:r>
+              <a:rPr lang="en-US" sz="1300" dirty="0">
+                <a:solidFill>
+                  <a:schemeClr val="tx1"/>
+                </a:solidFill>
+              </a:rPr>
+              <a:t>お子様の完成作品を一緒に確認</a:t>
+            </a:r>
+            <a:endParaRPr lang="en-US" sz="1300" dirty="0"/>
+          </a:p>
+        </p:txBody>
+      </p:sp>
+      <p:sp>
+        <p:nvSpPr>
+          <p:cNvPr id="39" name="Text 37"/>
+          <p:cNvSpPr txBox="1"/>
+          <p:nvPr/>
+        </p:nvSpPr>
+        <p:spPr>
+          <a:xfrm>
+            <a:off x="457200" y="4224528"/>
+            <a:ext cx="8229600" cy="365760"/>
           </a:xfrm>
           <a:prstGeom prst="rect">
             <a:avLst/>
@@ -15893,50 +16311,14 @@
               <a:buNone/>
             </a:pPr>
             <a:r>
-              <a:rPr lang="en-US" sz="1500" b="1" dirty="0">
-                <a:solidFill>
-                  <a:schemeClr val="tx2"/>
-                </a:solidFill>
-              </a:rPr>
-              <a:t>期間中レンタル</a:t>
-            </a:r>
-            <a:endParaRPr lang="en-US" sz="1500" dirty="0"/>
-          </a:p>
-        </p:txBody>
-      </p:sp>
-      <p:sp>
-        <p:nvSpPr>
-          <p:cNvPr id="16" name="Text 13"/>
-          <p:cNvSpPr txBox="1"/>
-          <p:nvPr/>
-        </p:nvSpPr>
-        <p:spPr>
-          <a:xfrm>
-            <a:off x="4663440" y="3657600"/>
-            <a:ext cx="4023360" cy="640080"/>
-          </a:xfrm>
-          <a:prstGeom prst="rect">
-            <a:avLst/>
-          </a:prstGeom>
-          <a:noFill/>
-          <a:ln/>
-        </p:spPr>
-        <p:txBody>
-          <a:bodyPr wrap="square" lIns="635" tIns="635" rIns="635" bIns="635" rtlCol="0" anchor="t"/>
-          <a:lstStyle/>
-          <a:p>
-            <a:pPr indent="0" marL="0">
-              <a:buNone/>
-            </a:pPr>
-            <a:r>
-              <a:rPr lang="en-US" sz="1300" dirty="0">
-                <a:solidFill>
-                  <a:schemeClr val="tx1"/>
-                </a:solidFill>
-              </a:rPr>
-              <a:t>4週の期間中は返却不要。期間終了後に回収。</a:t>
-            </a:r>
-            <a:endParaRPr lang="en-US" sz="1300" dirty="0"/>
+              <a:rPr lang="en-US" sz="1200" dirty="0">
+                <a:solidFill>
+                  <a:schemeClr val="accent4"/>
+                </a:solidFill>
+              </a:rPr>
+              <a:t>運営スタッフの派遣はなし。店舗スタッフ様1名でも回せるよう、手順カードと運用マニュアルを同梱します。</a:t>
+            </a:r>
+            <a:endParaRPr lang="en-US" sz="1200" dirty="0"/>
           </a:p>
         </p:txBody>
       </p:sp>

--- a/docs/proposals/2026-12_docomo_christmas-ws/企画書_NTTドコモ_クリスマスWS.pptx
+++ b/docs/proposals/2026-12_docomo_christmas-ws/企画書_NTTドコモ_クリスマスWS.pptx
@@ -122,19 +122,19 @@
   <p:extLst>
     <p:ext uri="{521415D9-36F7-43E2-AB2F-B90AF26B5E84}">
       <p14:sectionLst xmlns:p14="http://schemas.microsoft.com/office/powerpoint/2010/main">
-        <p14:section name="表紙" id="{f93e01e8-1bb2-064e-1e6a-3282b96a3a0e}">
+        <p14:section name="表紙" id="{31e26f42-e8f8-a957-6cf1-41b8fa768999}">
           <p14:sldIdLst>
             <p14:sldId id="256"/>
           </p14:sldIdLst>
         </p14:section>
-        <p14:section name="ご提案の概要" id="{1ce7f68b-bd97-be12-940e-e3fc153e4684}">
+        <p14:section name="ご提案の概要" id="{853f4646-20ed-2769-4040-5cb77cc7b93e}">
           <p14:sldIdLst>
             <p14:sldId id="257"/>
             <p14:sldId id="258"/>
             <p14:sldId id="259"/>
           </p14:sldIdLst>
         </p14:section>
-        <p14:section name="ワークショップ" id="{3759879a-f9b7-1f19-8da7-70730d5c7ba0}">
+        <p14:section name="ワークショップ" id="{5b606de2-a938-d103-4ff6-2a5250fed22b}">
           <p14:sldIdLst>
             <p14:sldId id="260"/>
             <p14:sldId id="261"/>
@@ -143,7 +143,7 @@
             <p14:sldId id="264"/>
           </p14:sldIdLst>
         </p14:section>
-        <p14:section name="店頭演出" id="{682051b3-3d80-7a2a-39a1-c63b66754d78}">
+        <p14:section name="店頭演出" id="{a1535a14-ef3e-90dc-9d3d-658384d848af}">
           <p14:sldIdLst>
             <p14:sldId id="265"/>
             <p14:sldId id="266"/>
@@ -151,7 +151,7 @@
             <p14:sldId id="268"/>
           </p14:sldIdLst>
         </p14:section>
-        <p14:section name="運用・お見積" id="{3a3118b5-26d6-3a0d-afbd-5d6c8bae61e9}">
+        <p14:section name="運用・お見積" id="{b8469de4-10ba-c3c4-68bc-ee9501b24676}">
           <p14:sldIdLst>
             <p14:sldId id="269"/>
             <p14:sldId id="270"/>
@@ -8135,7 +8135,7 @@
                             <a:schemeClr val="tx1"/>
                           </a:solidFill>
                         </a:rPr>
-                        <a:t>企画・ディレクション・運用マニュアル</a:t>
+                        <a:t>管理運営費</a:t>
                       </a:r>
                       <a:endParaRPr lang="en-US" sz="1000" dirty="0"/>
                     </a:p>

--- a/docs/proposals/2026-12_docomo_christmas-ws/企画書_NTTドコモ_クリスマスWS.pptx
+++ b/docs/proposals/2026-12_docomo_christmas-ws/企画書_NTTドコモ_クリスマスWS.pptx
@@ -123,19 +123,19 @@
   <p:extLst>
     <p:ext uri="{521415D9-36F7-43E2-AB2F-B90AF26B5E84}">
       <p14:sectionLst xmlns:p14="http://schemas.microsoft.com/office/powerpoint/2010/main">
-        <p14:section name="表紙" id="{09c27404-1f63-d4e1-df01-e16fb2cdf90a}">
+        <p14:section name="表紙" id="{ed8c8048-3d8f-16ea-a03b-992ddfe6a8d2}">
           <p14:sldIdLst>
             <p14:sldId id="256"/>
           </p14:sldIdLst>
         </p14:section>
-        <p14:section name="ご提案の概要" id="{38c4e983-f204-02bb-2ce6-9c1387d4fc9f}">
+        <p14:section name="ご提案の概要" id="{16969e79-2a51-5178-a0a5-2a098e1a79c9}">
           <p14:sldIdLst>
             <p14:sldId id="257"/>
             <p14:sldId id="258"/>
             <p14:sldId id="259"/>
           </p14:sldIdLst>
         </p14:section>
-        <p14:section name="ワークショップ" id="{e0c2b0e5-b495-596e-a41a-8940168b14a9}">
+        <p14:section name="ワークショップ" id="{ed3c4d75-8b8e-d4f4-b78e-f1b158f803d5}">
           <p14:sldIdLst>
             <p14:sldId id="260"/>
             <p14:sldId id="261"/>
@@ -145,7 +145,7 @@
             <p14:sldId id="265"/>
           </p14:sldIdLst>
         </p14:section>
-        <p14:section name="店頭演出" id="{0d76a8e7-b52d-01ee-9b39-44375bde3ff2}">
+        <p14:section name="店頭演出" id="{33d44ca6-a0f8-2811-b943-2a8d376b0d5a}">
           <p14:sldIdLst>
             <p14:sldId id="266"/>
             <p14:sldId id="267"/>
@@ -153,7 +153,7 @@
             <p14:sldId id="269"/>
           </p14:sldIdLst>
         </p14:section>
-        <p14:section name="運用・お見積" id="{35526199-5b19-3f3f-b011-3d5599c8c1c0}">
+        <p14:section name="運用・お見積" id="{5fbf03e3-73ed-ce2c-5f01-a3100c349aa8}">
           <p14:sldIdLst>
             <p14:sldId id="270"/>
             <p14:sldId id="271"/>
@@ -2962,20 +2962,44 @@
           </a:p>
         </p:txBody>
       </p:sp>
-      <p:sp>
-        <p:nvSpPr>
-          <p:cNvPr id="3" name="pc_head_0"/>
+      <p:pic>
+        <p:nvPicPr>
+          <p:cNvPr id="3" name="img_parent_child" descr="お子様は制作、保護者様は商談のイラスト">    </p:cNvPr>
+          <p:cNvPicPr>
+            <a:picLocks noChangeAspect="1"/>
+          </p:cNvPicPr>
+          <p:nvPr/>
+        </p:nvPicPr>
+        <p:blipFill>
+          <a:blip r:embed="rId1"/>
+          <a:stretch>
+            <a:fillRect/>
+          </a:stretch>
+        </p:blipFill>
+        <p:spPr>
+          <a:xfrm>
+            <a:off x="457200" y="1005840"/>
+            <a:ext cx="3017520" cy="3017520"/>
+          </a:xfrm>
+          <a:prstGeom prst="rect">
+            <a:avLst/>
+          </a:prstGeom>
+        </p:spPr>
+      </p:pic>
+      <p:sp>
+        <p:nvSpPr>
+          <p:cNvPr id="4" name="pc_head_0"/>
           <p:cNvSpPr/>
           <p:nvPr/>
         </p:nvSpPr>
         <p:spPr>
           <a:xfrm>
-            <a:off x="457200" y="1005840"/>
-            <a:ext cx="4023360" cy="548640"/>
+            <a:off x="3657600" y="1005840"/>
+            <a:ext cx="2468880" cy="457200"/>
           </a:xfrm>
           <a:prstGeom prst="roundRect">
             <a:avLst>
-              <a:gd name="adj" fmla="val 13333"/>
+              <a:gd name="adj" fmla="val 16000"/>
             </a:avLst>
           </a:prstGeom>
           <a:solidFill>
@@ -2991,14 +3015,14 @@
       </p:sp>
       <p:sp>
         <p:nvSpPr>
-          <p:cNvPr id="4" name="Text 2"/>
+          <p:cNvPr id="5" name="Text 2"/>
           <p:cNvSpPr txBox="1"/>
           <p:nvPr/>
         </p:nvSpPr>
         <p:spPr>
           <a:xfrm>
-            <a:off x="457200" y="1005840"/>
-            <a:ext cx="4023360" cy="548640"/>
+            <a:off x="3657600" y="1005840"/>
+            <a:ext cx="2468880" cy="457200"/>
           </a:xfrm>
           <a:prstGeom prst="rect">
             <a:avLst/>
@@ -3014,31 +3038,31 @@
               <a:buNone/>
             </a:pPr>
             <a:r>
-              <a:rPr lang="en-US" sz="1600" b="1" dirty="0">
+              <a:rPr lang="en-US" sz="1400" b="1" dirty="0">
                 <a:solidFill>
                   <a:schemeClr val="bg1"/>
                 </a:solidFill>
               </a:rPr>
               <a:t>お子様　約20分</a:t>
             </a:r>
-            <a:endParaRPr lang="en-US" sz="1600" dirty="0"/>
-          </a:p>
-        </p:txBody>
-      </p:sp>
-      <p:sp>
-        <p:nvSpPr>
-          <p:cNvPr id="5" name="pc_0_0"/>
+            <a:endParaRPr lang="en-US" sz="1400" dirty="0"/>
+          </a:p>
+        </p:txBody>
+      </p:sp>
+      <p:sp>
+        <p:nvSpPr>
+          <p:cNvPr id="6" name="pc_0_0"/>
           <p:cNvSpPr/>
           <p:nvPr/>
         </p:nvSpPr>
         <p:spPr>
           <a:xfrm>
-            <a:off x="457200" y="1691640"/>
-            <a:ext cx="4023360" cy="530352"/>
+            <a:off x="3657600" y="1572768"/>
+            <a:ext cx="2468880" cy="566928"/>
           </a:xfrm>
           <a:prstGeom prst="roundRect">
             <a:avLst>
-              <a:gd name="adj" fmla="val 13793"/>
+              <a:gd name="adj" fmla="val 12903"/>
             </a:avLst>
           </a:prstGeom>
           <a:solidFill>
@@ -3054,14 +3078,14 @@
       </p:sp>
       <p:sp>
         <p:nvSpPr>
-          <p:cNvPr id="6" name="pc_b_0_0"/>
+          <p:cNvPr id="7" name="pc_b_0_0"/>
           <p:cNvSpPr/>
           <p:nvPr/>
         </p:nvSpPr>
         <p:spPr>
           <a:xfrm>
-            <a:off x="566928" y="1773936"/>
-            <a:ext cx="365760" cy="365760"/>
+            <a:off x="3730752" y="1691640"/>
+            <a:ext cx="329184" cy="329184"/>
           </a:xfrm>
           <a:prstGeom prst="ellipse">
             <a:avLst/>
@@ -3079,14 +3103,14 @@
       </p:sp>
       <p:sp>
         <p:nvSpPr>
-          <p:cNvPr id="7" name="Text 5"/>
+          <p:cNvPr id="8" name="Text 5"/>
           <p:cNvSpPr txBox="1"/>
           <p:nvPr/>
         </p:nvSpPr>
         <p:spPr>
           <a:xfrm>
-            <a:off x="566928" y="1773936"/>
-            <a:ext cx="365760" cy="365760"/>
+            <a:off x="3730752" y="1691640"/>
+            <a:ext cx="329184" cy="329184"/>
           </a:xfrm>
           <a:prstGeom prst="rect">
             <a:avLst/>
@@ -3115,14 +3139,14 @@
       </p:sp>
       <p:sp>
         <p:nvSpPr>
-          <p:cNvPr id="8" name="Text 6"/>
+          <p:cNvPr id="9" name="Text 6"/>
           <p:cNvSpPr txBox="1"/>
           <p:nvPr/>
         </p:nvSpPr>
         <p:spPr>
           <a:xfrm>
-            <a:off x="1051560" y="1691640"/>
-            <a:ext cx="3337560" cy="530352"/>
+            <a:off x="4114800" y="1572768"/>
+            <a:ext cx="1965960" cy="566928"/>
           </a:xfrm>
           <a:prstGeom prst="rect">
             <a:avLst/>
@@ -3138,31 +3162,31 @@
               <a:buNone/>
             </a:pPr>
             <a:r>
-              <a:rPr lang="en-US" sz="1300" dirty="0">
+              <a:rPr lang="en-US" sz="1100" dirty="0">
                 <a:solidFill>
                   <a:schemeClr val="tx1"/>
                 </a:solidFill>
               </a:rPr>
               <a:t>その週の作品の型・モチーフを選ぶ</a:t>
             </a:r>
-            <a:endParaRPr lang="en-US" sz="1300" dirty="0"/>
-          </a:p>
-        </p:txBody>
-      </p:sp>
-      <p:sp>
-        <p:nvSpPr>
-          <p:cNvPr id="9" name="pc_0_1"/>
+            <a:endParaRPr lang="en-US" sz="1100" dirty="0"/>
+          </a:p>
+        </p:txBody>
+      </p:sp>
+      <p:sp>
+        <p:nvSpPr>
+          <p:cNvPr id="10" name="pc_0_1"/>
           <p:cNvSpPr/>
           <p:nvPr/>
         </p:nvSpPr>
         <p:spPr>
           <a:xfrm>
-            <a:off x="457200" y="2313432"/>
-            <a:ext cx="4023360" cy="530352"/>
+            <a:off x="3657600" y="2212848"/>
+            <a:ext cx="2468880" cy="566928"/>
           </a:xfrm>
           <a:prstGeom prst="roundRect">
             <a:avLst>
-              <a:gd name="adj" fmla="val 13793"/>
+              <a:gd name="adj" fmla="val 12903"/>
             </a:avLst>
           </a:prstGeom>
           <a:solidFill>
@@ -3178,14 +3202,14 @@
       </p:sp>
       <p:sp>
         <p:nvSpPr>
-          <p:cNvPr id="10" name="pc_b_0_1"/>
+          <p:cNvPr id="11" name="pc_b_0_1"/>
           <p:cNvSpPr/>
           <p:nvPr/>
         </p:nvSpPr>
         <p:spPr>
           <a:xfrm>
-            <a:off x="566928" y="2395728"/>
-            <a:ext cx="365760" cy="365760"/>
+            <a:off x="3730752" y="2331720"/>
+            <a:ext cx="329184" cy="329184"/>
           </a:xfrm>
           <a:prstGeom prst="ellipse">
             <a:avLst/>
@@ -3203,14 +3227,14 @@
       </p:sp>
       <p:sp>
         <p:nvSpPr>
-          <p:cNvPr id="11" name="Text 9"/>
+          <p:cNvPr id="12" name="Text 9"/>
           <p:cNvSpPr txBox="1"/>
           <p:nvPr/>
         </p:nvSpPr>
         <p:spPr>
           <a:xfrm>
-            <a:off x="566928" y="2395728"/>
-            <a:ext cx="365760" cy="365760"/>
+            <a:off x="3730752" y="2331720"/>
+            <a:ext cx="329184" cy="329184"/>
           </a:xfrm>
           <a:prstGeom prst="rect">
             <a:avLst/>
@@ -3239,14 +3263,14 @@
       </p:sp>
       <p:sp>
         <p:nvSpPr>
-          <p:cNvPr id="12" name="Text 10"/>
+          <p:cNvPr id="13" name="Text 10"/>
           <p:cNvSpPr txBox="1"/>
           <p:nvPr/>
         </p:nvSpPr>
         <p:spPr>
           <a:xfrm>
-            <a:off x="1051560" y="2313432"/>
-            <a:ext cx="3337560" cy="530352"/>
+            <a:off x="4114800" y="2212848"/>
+            <a:ext cx="1965960" cy="566928"/>
           </a:xfrm>
           <a:prstGeom prst="rect">
             <a:avLst/>
@@ -3262,31 +3286,31 @@
               <a:buNone/>
             </a:pPr>
             <a:r>
-              <a:rPr lang="en-US" sz="1300" dirty="0">
+              <a:rPr lang="en-US" sz="1100" dirty="0">
                 <a:solidFill>
                   <a:schemeClr val="tx1"/>
                 </a:solidFill>
               </a:rPr>
               <a:t>見本と手順カードを見ながら制作に集中</a:t>
             </a:r>
-            <a:endParaRPr lang="en-US" sz="1300" dirty="0"/>
-          </a:p>
-        </p:txBody>
-      </p:sp>
-      <p:sp>
-        <p:nvSpPr>
-          <p:cNvPr id="13" name="pc_0_2"/>
+            <a:endParaRPr lang="en-US" sz="1100" dirty="0"/>
+          </a:p>
+        </p:txBody>
+      </p:sp>
+      <p:sp>
+        <p:nvSpPr>
+          <p:cNvPr id="14" name="pc_0_2"/>
           <p:cNvSpPr/>
           <p:nvPr/>
         </p:nvSpPr>
         <p:spPr>
           <a:xfrm>
-            <a:off x="457200" y="2935224"/>
-            <a:ext cx="4023360" cy="530352"/>
+            <a:off x="3657600" y="2852928"/>
+            <a:ext cx="2468880" cy="566928"/>
           </a:xfrm>
           <a:prstGeom prst="roundRect">
             <a:avLst>
-              <a:gd name="adj" fmla="val 13793"/>
+              <a:gd name="adj" fmla="val 12903"/>
             </a:avLst>
           </a:prstGeom>
           <a:solidFill>
@@ -3302,14 +3326,14 @@
       </p:sp>
       <p:sp>
         <p:nvSpPr>
-          <p:cNvPr id="14" name="pc_b_0_2"/>
+          <p:cNvPr id="15" name="pc_b_0_2"/>
           <p:cNvSpPr/>
           <p:nvPr/>
         </p:nvSpPr>
         <p:spPr>
           <a:xfrm>
-            <a:off x="566928" y="3017520"/>
-            <a:ext cx="365760" cy="365760"/>
+            <a:off x="3730752" y="2971800"/>
+            <a:ext cx="329184" cy="329184"/>
           </a:xfrm>
           <a:prstGeom prst="ellipse">
             <a:avLst/>
@@ -3327,14 +3351,14 @@
       </p:sp>
       <p:sp>
         <p:nvSpPr>
-          <p:cNvPr id="15" name="Text 13"/>
+          <p:cNvPr id="16" name="Text 13"/>
           <p:cNvSpPr txBox="1"/>
           <p:nvPr/>
         </p:nvSpPr>
         <p:spPr>
           <a:xfrm>
-            <a:off x="566928" y="3017520"/>
-            <a:ext cx="365760" cy="365760"/>
+            <a:off x="3730752" y="2971800"/>
+            <a:ext cx="329184" cy="329184"/>
           </a:xfrm>
           <a:prstGeom prst="rect">
             <a:avLst/>
@@ -3363,14 +3387,14 @@
       </p:sp>
       <p:sp>
         <p:nvSpPr>
-          <p:cNvPr id="16" name="Text 14"/>
+          <p:cNvPr id="17" name="Text 14"/>
           <p:cNvSpPr txBox="1"/>
           <p:nvPr/>
         </p:nvSpPr>
         <p:spPr>
           <a:xfrm>
-            <a:off x="1051560" y="2935224"/>
-            <a:ext cx="3337560" cy="530352"/>
+            <a:off x="4114800" y="2852928"/>
+            <a:ext cx="1965960" cy="566928"/>
           </a:xfrm>
           <a:prstGeom prst="rect">
             <a:avLst/>
@@ -3386,31 +3410,31 @@
               <a:buNone/>
             </a:pPr>
             <a:r>
-              <a:rPr lang="en-US" sz="1300" dirty="0">
+              <a:rPr lang="en-US" sz="1100" dirty="0">
                 <a:solidFill>
                   <a:schemeClr val="tx1"/>
                 </a:solidFill>
               </a:rPr>
               <a:t>完成した作品を袋に入れて受け取る</a:t>
             </a:r>
-            <a:endParaRPr lang="en-US" sz="1300" dirty="0"/>
-          </a:p>
-        </p:txBody>
-      </p:sp>
-      <p:sp>
-        <p:nvSpPr>
-          <p:cNvPr id="17" name="pc_0_3"/>
+            <a:endParaRPr lang="en-US" sz="1100" dirty="0"/>
+          </a:p>
+        </p:txBody>
+      </p:sp>
+      <p:sp>
+        <p:nvSpPr>
+          <p:cNvPr id="18" name="pc_0_3"/>
           <p:cNvSpPr/>
           <p:nvPr/>
         </p:nvSpPr>
         <p:spPr>
           <a:xfrm>
-            <a:off x="457200" y="3557016"/>
-            <a:ext cx="4023360" cy="530352"/>
+            <a:off x="3657600" y="3493008"/>
+            <a:ext cx="2468880" cy="566928"/>
           </a:xfrm>
           <a:prstGeom prst="roundRect">
             <a:avLst>
-              <a:gd name="adj" fmla="val 13793"/>
+              <a:gd name="adj" fmla="val 12903"/>
             </a:avLst>
           </a:prstGeom>
           <a:solidFill>
@@ -3426,14 +3450,14 @@
       </p:sp>
       <p:sp>
         <p:nvSpPr>
-          <p:cNvPr id="18" name="pc_b_0_3"/>
+          <p:cNvPr id="19" name="pc_b_0_3"/>
           <p:cNvSpPr/>
           <p:nvPr/>
         </p:nvSpPr>
         <p:spPr>
           <a:xfrm>
-            <a:off x="566928" y="3639312"/>
-            <a:ext cx="365760" cy="365760"/>
+            <a:off x="3730752" y="3611880"/>
+            <a:ext cx="329184" cy="329184"/>
           </a:xfrm>
           <a:prstGeom prst="ellipse">
             <a:avLst/>
@@ -3451,14 +3475,14 @@
       </p:sp>
       <p:sp>
         <p:nvSpPr>
-          <p:cNvPr id="19" name="Text 17"/>
+          <p:cNvPr id="20" name="Text 17"/>
           <p:cNvSpPr txBox="1"/>
           <p:nvPr/>
         </p:nvSpPr>
         <p:spPr>
           <a:xfrm>
-            <a:off x="566928" y="3639312"/>
-            <a:ext cx="365760" cy="365760"/>
+            <a:off x="3730752" y="3611880"/>
+            <a:ext cx="329184" cy="329184"/>
           </a:xfrm>
           <a:prstGeom prst="rect">
             <a:avLst/>
@@ -3487,14 +3511,14 @@
       </p:sp>
       <p:sp>
         <p:nvSpPr>
-          <p:cNvPr id="20" name="Text 18"/>
+          <p:cNvPr id="21" name="Text 18"/>
           <p:cNvSpPr txBox="1"/>
           <p:nvPr/>
         </p:nvSpPr>
         <p:spPr>
           <a:xfrm>
-            <a:off x="1051560" y="3557016"/>
-            <a:ext cx="3337560" cy="530352"/>
+            <a:off x="4114800" y="3493008"/>
+            <a:ext cx="1965960" cy="566928"/>
           </a:xfrm>
           <a:prstGeom prst="rect">
             <a:avLst/>
@@ -3510,31 +3534,31 @@
               <a:buNone/>
             </a:pPr>
             <a:r>
-              <a:rPr lang="en-US" sz="1300" dirty="0">
+              <a:rPr lang="en-US" sz="1100" dirty="0">
                 <a:solidFill>
                   <a:schemeClr val="tx1"/>
                 </a:solidFill>
               </a:rPr>
               <a:t>作品を持って保護者様と合流</a:t>
             </a:r>
-            <a:endParaRPr lang="en-US" sz="1300" dirty="0"/>
-          </a:p>
-        </p:txBody>
-      </p:sp>
-      <p:sp>
-        <p:nvSpPr>
-          <p:cNvPr id="21" name="pc_head_1"/>
+            <a:endParaRPr lang="en-US" sz="1100" dirty="0"/>
+          </a:p>
+        </p:txBody>
+      </p:sp>
+      <p:sp>
+        <p:nvSpPr>
+          <p:cNvPr id="22" name="pc_head_1"/>
           <p:cNvSpPr/>
           <p:nvPr/>
         </p:nvSpPr>
         <p:spPr>
           <a:xfrm>
-            <a:off x="4663440" y="1005840"/>
-            <a:ext cx="4023360" cy="548640"/>
+            <a:off x="6217920" y="1005840"/>
+            <a:ext cx="2468880" cy="457200"/>
           </a:xfrm>
           <a:prstGeom prst="roundRect">
             <a:avLst>
-              <a:gd name="adj" fmla="val 13333"/>
+              <a:gd name="adj" fmla="val 16000"/>
             </a:avLst>
           </a:prstGeom>
           <a:solidFill>
@@ -3550,14 +3574,14 @@
       </p:sp>
       <p:sp>
         <p:nvSpPr>
-          <p:cNvPr id="22" name="Text 20"/>
+          <p:cNvPr id="23" name="Text 20"/>
           <p:cNvSpPr txBox="1"/>
           <p:nvPr/>
         </p:nvSpPr>
         <p:spPr>
           <a:xfrm>
-            <a:off x="4663440" y="1005840"/>
-            <a:ext cx="4023360" cy="548640"/>
+            <a:off x="6217920" y="1005840"/>
+            <a:ext cx="2468880" cy="457200"/>
           </a:xfrm>
           <a:prstGeom prst="rect">
             <a:avLst/>
@@ -3573,31 +3597,31 @@
               <a:buNone/>
             </a:pPr>
             <a:r>
-              <a:rPr lang="en-US" sz="1600" b="1" dirty="0">
+              <a:rPr lang="en-US" sz="1400" b="1" dirty="0">
                 <a:solidFill>
                   <a:schemeClr val="bg1"/>
                 </a:solidFill>
               </a:rPr>
               <a:t>保護者様　約20分</a:t>
             </a:r>
-            <a:endParaRPr lang="en-US" sz="1600" dirty="0"/>
-          </a:p>
-        </p:txBody>
-      </p:sp>
-      <p:sp>
-        <p:nvSpPr>
-          <p:cNvPr id="23" name="pc_1_0"/>
+            <a:endParaRPr lang="en-US" sz="1400" dirty="0"/>
+          </a:p>
+        </p:txBody>
+      </p:sp>
+      <p:sp>
+        <p:nvSpPr>
+          <p:cNvPr id="24" name="pc_1_0"/>
           <p:cNvSpPr/>
           <p:nvPr/>
         </p:nvSpPr>
         <p:spPr>
           <a:xfrm>
-            <a:off x="4663440" y="1691640"/>
-            <a:ext cx="4023360" cy="530352"/>
+            <a:off x="6217920" y="1572768"/>
+            <a:ext cx="2468880" cy="566928"/>
           </a:xfrm>
           <a:prstGeom prst="roundRect">
             <a:avLst>
-              <a:gd name="adj" fmla="val 13793"/>
+              <a:gd name="adj" fmla="val 12903"/>
             </a:avLst>
           </a:prstGeom>
           <a:solidFill>
@@ -3613,14 +3637,14 @@
       </p:sp>
       <p:sp>
         <p:nvSpPr>
-          <p:cNvPr id="24" name="pc_b_1_0"/>
+          <p:cNvPr id="25" name="pc_b_1_0"/>
           <p:cNvSpPr/>
           <p:nvPr/>
         </p:nvSpPr>
         <p:spPr>
           <a:xfrm>
-            <a:off x="4773168" y="1773936"/>
-            <a:ext cx="365760" cy="365760"/>
+            <a:off x="6291072" y="1691640"/>
+            <a:ext cx="329184" cy="329184"/>
           </a:xfrm>
           <a:prstGeom prst="ellipse">
             <a:avLst/>
@@ -3638,14 +3662,14 @@
       </p:sp>
       <p:sp>
         <p:nvSpPr>
-          <p:cNvPr id="25" name="Text 23"/>
+          <p:cNvPr id="26" name="Text 23"/>
           <p:cNvSpPr txBox="1"/>
           <p:nvPr/>
         </p:nvSpPr>
         <p:spPr>
           <a:xfrm>
-            <a:off x="4773168" y="1773936"/>
-            <a:ext cx="365760" cy="365760"/>
+            <a:off x="6291072" y="1691640"/>
+            <a:ext cx="329184" cy="329184"/>
           </a:xfrm>
           <a:prstGeom prst="rect">
             <a:avLst/>
@@ -3674,14 +3698,14 @@
       </p:sp>
       <p:sp>
         <p:nvSpPr>
-          <p:cNvPr id="26" name="Text 24"/>
+          <p:cNvPr id="27" name="Text 24"/>
           <p:cNvSpPr txBox="1"/>
           <p:nvPr/>
         </p:nvSpPr>
         <p:spPr>
           <a:xfrm>
-            <a:off x="5257800" y="1691640"/>
-            <a:ext cx="3337560" cy="530352"/>
+            <a:off x="6675120" y="1572768"/>
+            <a:ext cx="1965960" cy="566928"/>
           </a:xfrm>
           <a:prstGeom prst="rect">
             <a:avLst/>
@@ -3697,31 +3721,31 @@
               <a:buNone/>
             </a:pPr>
             <a:r>
-              <a:rPr lang="en-US" sz="1300" dirty="0">
+              <a:rPr lang="en-US" sz="1100" dirty="0">
                 <a:solidFill>
                   <a:schemeClr val="tx1"/>
                 </a:solidFill>
               </a:rPr>
               <a:t>隣接の商談カウンターへご案内</a:t>
             </a:r>
-            <a:endParaRPr lang="en-US" sz="1300" dirty="0"/>
-          </a:p>
-        </p:txBody>
-      </p:sp>
-      <p:sp>
-        <p:nvSpPr>
-          <p:cNvPr id="27" name="pc_1_1"/>
+            <a:endParaRPr lang="en-US" sz="1100" dirty="0"/>
+          </a:p>
+        </p:txBody>
+      </p:sp>
+      <p:sp>
+        <p:nvSpPr>
+          <p:cNvPr id="28" name="pc_1_1"/>
           <p:cNvSpPr/>
           <p:nvPr/>
         </p:nvSpPr>
         <p:spPr>
           <a:xfrm>
-            <a:off x="4663440" y="2313432"/>
-            <a:ext cx="4023360" cy="530352"/>
+            <a:off x="6217920" y="2212848"/>
+            <a:ext cx="2468880" cy="566928"/>
           </a:xfrm>
           <a:prstGeom prst="roundRect">
             <a:avLst>
-              <a:gd name="adj" fmla="val 13793"/>
+              <a:gd name="adj" fmla="val 12903"/>
             </a:avLst>
           </a:prstGeom>
           <a:solidFill>
@@ -3737,14 +3761,14 @@
       </p:sp>
       <p:sp>
         <p:nvSpPr>
-          <p:cNvPr id="28" name="pc_b_1_1"/>
+          <p:cNvPr id="29" name="pc_b_1_1"/>
           <p:cNvSpPr/>
           <p:nvPr/>
         </p:nvSpPr>
         <p:spPr>
           <a:xfrm>
-            <a:off x="4773168" y="2395728"/>
-            <a:ext cx="365760" cy="365760"/>
+            <a:off x="6291072" y="2331720"/>
+            <a:ext cx="329184" cy="329184"/>
           </a:xfrm>
           <a:prstGeom prst="ellipse">
             <a:avLst/>
@@ -3762,14 +3786,14 @@
       </p:sp>
       <p:sp>
         <p:nvSpPr>
-          <p:cNvPr id="29" name="Text 27"/>
+          <p:cNvPr id="30" name="Text 27"/>
           <p:cNvSpPr txBox="1"/>
           <p:nvPr/>
         </p:nvSpPr>
         <p:spPr>
           <a:xfrm>
-            <a:off x="4773168" y="2395728"/>
-            <a:ext cx="365760" cy="365760"/>
+            <a:off x="6291072" y="2331720"/>
+            <a:ext cx="329184" cy="329184"/>
           </a:xfrm>
           <a:prstGeom prst="rect">
             <a:avLst/>
@@ -3798,14 +3822,14 @@
       </p:sp>
       <p:sp>
         <p:nvSpPr>
-          <p:cNvPr id="30" name="Text 28"/>
+          <p:cNvPr id="31" name="Text 28"/>
           <p:cNvSpPr txBox="1"/>
           <p:nvPr/>
         </p:nvSpPr>
         <p:spPr>
           <a:xfrm>
-            <a:off x="5257800" y="2313432"/>
-            <a:ext cx="3337560" cy="530352"/>
+            <a:off x="6675120" y="2212848"/>
+            <a:ext cx="1965960" cy="566928"/>
           </a:xfrm>
           <a:prstGeom prst="rect">
             <a:avLst/>
@@ -3821,31 +3845,31 @@
               <a:buNone/>
             </a:pPr>
             <a:r>
-              <a:rPr lang="en-US" sz="1300" dirty="0">
+              <a:rPr lang="en-US" sz="1100" dirty="0">
                 <a:solidFill>
                   <a:schemeClr val="tx1"/>
                 </a:solidFill>
               </a:rPr>
               <a:t>料金プラン・機種変更のご相談</a:t>
             </a:r>
-            <a:endParaRPr lang="en-US" sz="1300" dirty="0"/>
-          </a:p>
-        </p:txBody>
-      </p:sp>
-      <p:sp>
-        <p:nvSpPr>
-          <p:cNvPr id="31" name="pc_1_2"/>
+            <a:endParaRPr lang="en-US" sz="1100" dirty="0"/>
+          </a:p>
+        </p:txBody>
+      </p:sp>
+      <p:sp>
+        <p:nvSpPr>
+          <p:cNvPr id="32" name="pc_1_2"/>
           <p:cNvSpPr/>
           <p:nvPr/>
         </p:nvSpPr>
         <p:spPr>
           <a:xfrm>
-            <a:off x="4663440" y="2935224"/>
-            <a:ext cx="4023360" cy="530352"/>
+            <a:off x="6217920" y="2852928"/>
+            <a:ext cx="2468880" cy="566928"/>
           </a:xfrm>
           <a:prstGeom prst="roundRect">
             <a:avLst>
-              <a:gd name="adj" fmla="val 13793"/>
+              <a:gd name="adj" fmla="val 12903"/>
             </a:avLst>
           </a:prstGeom>
           <a:solidFill>
@@ -3861,14 +3885,14 @@
       </p:sp>
       <p:sp>
         <p:nvSpPr>
-          <p:cNvPr id="32" name="pc_b_1_2"/>
+          <p:cNvPr id="33" name="pc_b_1_2"/>
           <p:cNvSpPr/>
           <p:nvPr/>
         </p:nvSpPr>
         <p:spPr>
           <a:xfrm>
-            <a:off x="4773168" y="3017520"/>
-            <a:ext cx="365760" cy="365760"/>
+            <a:off x="6291072" y="2971800"/>
+            <a:ext cx="329184" cy="329184"/>
           </a:xfrm>
           <a:prstGeom prst="ellipse">
             <a:avLst/>
@@ -3886,14 +3910,14 @@
       </p:sp>
       <p:sp>
         <p:nvSpPr>
-          <p:cNvPr id="33" name="Text 31"/>
+          <p:cNvPr id="34" name="Text 31"/>
           <p:cNvSpPr txBox="1"/>
           <p:nvPr/>
         </p:nvSpPr>
         <p:spPr>
           <a:xfrm>
-            <a:off x="4773168" y="3017520"/>
-            <a:ext cx="365760" cy="365760"/>
+            <a:off x="6291072" y="2971800"/>
+            <a:ext cx="329184" cy="329184"/>
           </a:xfrm>
           <a:prstGeom prst="rect">
             <a:avLst/>
@@ -3922,14 +3946,14 @@
       </p:sp>
       <p:sp>
         <p:nvSpPr>
-          <p:cNvPr id="34" name="Text 32"/>
+          <p:cNvPr id="35" name="Text 32"/>
           <p:cNvSpPr txBox="1"/>
           <p:nvPr/>
         </p:nvSpPr>
         <p:spPr>
           <a:xfrm>
-            <a:off x="5257800" y="2935224"/>
-            <a:ext cx="3337560" cy="530352"/>
+            <a:off x="6675120" y="2852928"/>
+            <a:ext cx="1965960" cy="566928"/>
           </a:xfrm>
           <a:prstGeom prst="rect">
             <a:avLst/>
@@ -3945,31 +3969,31 @@
               <a:buNone/>
             </a:pPr>
             <a:r>
-              <a:rPr lang="en-US" sz="1300" dirty="0">
+              <a:rPr lang="en-US" sz="1100" dirty="0">
                 <a:solidFill>
                   <a:schemeClr val="tx1"/>
                 </a:solidFill>
               </a:rPr>
               <a:t>見積ご依頼でクリスマス特典をご案内</a:t>
             </a:r>
-            <a:endParaRPr lang="en-US" sz="1300" dirty="0"/>
-          </a:p>
-        </p:txBody>
-      </p:sp>
-      <p:sp>
-        <p:nvSpPr>
-          <p:cNvPr id="35" name="pc_1_3"/>
+            <a:endParaRPr lang="en-US" sz="1100" dirty="0"/>
+          </a:p>
+        </p:txBody>
+      </p:sp>
+      <p:sp>
+        <p:nvSpPr>
+          <p:cNvPr id="36" name="pc_1_3"/>
           <p:cNvSpPr/>
           <p:nvPr/>
         </p:nvSpPr>
         <p:spPr>
           <a:xfrm>
-            <a:off x="4663440" y="3557016"/>
-            <a:ext cx="4023360" cy="530352"/>
+            <a:off x="6217920" y="3493008"/>
+            <a:ext cx="2468880" cy="566928"/>
           </a:xfrm>
           <a:prstGeom prst="roundRect">
             <a:avLst>
-              <a:gd name="adj" fmla="val 13793"/>
+              <a:gd name="adj" fmla="val 12903"/>
             </a:avLst>
           </a:prstGeom>
           <a:solidFill>
@@ -3985,14 +4009,14 @@
       </p:sp>
       <p:sp>
         <p:nvSpPr>
-          <p:cNvPr id="36" name="pc_b_1_3"/>
+          <p:cNvPr id="37" name="pc_b_1_3"/>
           <p:cNvSpPr/>
           <p:nvPr/>
         </p:nvSpPr>
         <p:spPr>
           <a:xfrm>
-            <a:off x="4773168" y="3639312"/>
-            <a:ext cx="365760" cy="365760"/>
+            <a:off x="6291072" y="3611880"/>
+            <a:ext cx="329184" cy="329184"/>
           </a:xfrm>
           <a:prstGeom prst="ellipse">
             <a:avLst/>
@@ -4010,14 +4034,14 @@
       </p:sp>
       <p:sp>
         <p:nvSpPr>
-          <p:cNvPr id="37" name="Text 35"/>
+          <p:cNvPr id="38" name="Text 35"/>
           <p:cNvSpPr txBox="1"/>
           <p:nvPr/>
         </p:nvSpPr>
         <p:spPr>
           <a:xfrm>
-            <a:off x="4773168" y="3639312"/>
-            <a:ext cx="365760" cy="365760"/>
+            <a:off x="6291072" y="3611880"/>
+            <a:ext cx="329184" cy="329184"/>
           </a:xfrm>
           <a:prstGeom prst="rect">
             <a:avLst/>
@@ -4046,14 +4070,14 @@
       </p:sp>
       <p:sp>
         <p:nvSpPr>
-          <p:cNvPr id="38" name="Text 36"/>
+          <p:cNvPr id="39" name="Text 36"/>
           <p:cNvSpPr txBox="1"/>
           <p:nvPr/>
         </p:nvSpPr>
         <p:spPr>
           <a:xfrm>
-            <a:off x="5257800" y="3557016"/>
-            <a:ext cx="3337560" cy="530352"/>
+            <a:off x="6675120" y="3493008"/>
+            <a:ext cx="1965960" cy="566928"/>
           </a:xfrm>
           <a:prstGeom prst="rect">
             <a:avLst/>
@@ -4069,20 +4093,20 @@
               <a:buNone/>
             </a:pPr>
             <a:r>
-              <a:rPr lang="en-US" sz="1300" dirty="0">
+              <a:rPr lang="en-US" sz="1100" dirty="0">
                 <a:solidFill>
                   <a:schemeClr val="tx1"/>
                 </a:solidFill>
               </a:rPr>
               <a:t>お子様の完成作品を一緒に確認</a:t>
             </a:r>
-            <a:endParaRPr lang="en-US" sz="1300" dirty="0"/>
-          </a:p>
-        </p:txBody>
-      </p:sp>
-      <p:sp>
-        <p:nvSpPr>
-          <p:cNvPr id="39" name="Text 37"/>
+            <a:endParaRPr lang="en-US" sz="1100" dirty="0"/>
+          </a:p>
+        </p:txBody>
+      </p:sp>
+      <p:sp>
+        <p:nvSpPr>
+          <p:cNvPr id="40" name="Text 37"/>
           <p:cNvSpPr txBox="1"/>
           <p:nvPr/>
         </p:nvSpPr>
@@ -7213,8 +7237,8 @@
         </p:nvSpPr>
         <p:spPr>
           <a:xfrm>
-            <a:off x="457200" y="1188720"/>
-            <a:ext cx="1600200" cy="731520"/>
+            <a:off x="457200" y="960120"/>
+            <a:ext cx="1600200" cy="594360"/>
           </a:xfrm>
           <a:prstGeom prst="chevron">
             <a:avLst/>
@@ -7238,8 +7262,8 @@
         </p:nvSpPr>
         <p:spPr>
           <a:xfrm>
-            <a:off x="640080" y="1188720"/>
-            <a:ext cx="1280160" cy="731520"/>
+            <a:off x="640080" y="960120"/>
+            <a:ext cx="1280160" cy="594360"/>
           </a:xfrm>
           <a:prstGeom prst="rect">
             <a:avLst/>
@@ -7255,27 +7279,51 @@
               <a:buNone/>
             </a:pPr>
             <a:r>
-              <a:rPr lang="en-US" sz="1300" b="1" dirty="0">
+              <a:rPr lang="en-US" sz="1200" b="1" dirty="0">
                 <a:solidFill>
                   <a:schemeClr val="bg1"/>
                 </a:solidFill>
               </a:rPr>
               <a:t>ご発注</a:t>
             </a:r>
-            <a:endParaRPr lang="en-US" sz="1300" dirty="0"/>
-          </a:p>
-        </p:txBody>
-      </p:sp>
-      <p:sp>
-        <p:nvSpPr>
-          <p:cNvPr id="5" name="Text 3"/>
+            <a:endParaRPr lang="en-US" sz="1200" dirty="0"/>
+          </a:p>
+        </p:txBody>
+      </p:sp>
+      <p:pic>
+        <p:nvPicPr>
+          <p:cNvPr id="5" name="step_img_0" descr="ご発注のイラスト">    </p:cNvPr>
+          <p:cNvPicPr>
+            <a:picLocks noChangeAspect="1"/>
+          </p:cNvPicPr>
+          <p:nvPr/>
+        </p:nvPicPr>
+        <p:blipFill>
+          <a:blip r:embed="rId1"/>
+          <a:stretch>
+            <a:fillRect/>
+          </a:stretch>
+        </p:blipFill>
+        <p:spPr>
+          <a:xfrm>
+            <a:off x="640080" y="1645920"/>
+            <a:ext cx="1188720" cy="1188720"/>
+          </a:xfrm>
+          <a:prstGeom prst="rect">
+            <a:avLst/>
+          </a:prstGeom>
+        </p:spPr>
+      </p:pic>
+      <p:sp>
+        <p:nvSpPr>
+          <p:cNvPr id="6" name="Text 3"/>
           <p:cNvSpPr txBox="1"/>
           <p:nvPr/>
         </p:nvSpPr>
         <p:spPr>
           <a:xfrm>
-            <a:off x="457200" y="2011680"/>
-            <a:ext cx="1600200" cy="685800"/>
+            <a:off x="457200" y="2880360"/>
+            <a:ext cx="1600200" cy="502920"/>
           </a:xfrm>
           <a:prstGeom prst="rect">
             <a:avLst/>
@@ -7291,41 +7339,41 @@
               <a:buNone/>
             </a:pPr>
             <a:r>
-              <a:rPr lang="en-US" sz="1200" dirty="0">
+              <a:rPr lang="en-US" sz="1100" dirty="0">
                 <a:solidFill>
                   <a:schemeClr val="tx1"/>
                 </a:solidFill>
               </a:rPr>
               <a:t>10月下旬〜</a:t>
             </a:r>
-            <a:endParaRPr lang="en-US" sz="1200" dirty="0"/>
+            <a:endParaRPr lang="en-US" sz="1100" dirty="0"/>
           </a:p>
           <a:p>
             <a:pPr algn="ctr" indent="0" marL="0">
               <a:buNone/>
             </a:pPr>
             <a:r>
-              <a:rPr lang="en-US" sz="1200" dirty="0">
+              <a:rPr lang="en-US" sz="1100" dirty="0">
                 <a:solidFill>
                   <a:schemeClr val="tx1"/>
                 </a:solidFill>
               </a:rPr>
               <a:t>11月上旬</a:t>
             </a:r>
-            <a:endParaRPr lang="en-US" sz="1200" dirty="0"/>
-          </a:p>
-        </p:txBody>
-      </p:sp>
-      <p:sp>
-        <p:nvSpPr>
-          <p:cNvPr id="6" name="step_1"/>
+            <a:endParaRPr lang="en-US" sz="1100" dirty="0"/>
+          </a:p>
+        </p:txBody>
+      </p:sp>
+      <p:sp>
+        <p:nvSpPr>
+          <p:cNvPr id="7" name="step_1"/>
           <p:cNvSpPr/>
           <p:nvPr/>
         </p:nvSpPr>
         <p:spPr>
           <a:xfrm>
-            <a:off x="2139696" y="1188720"/>
-            <a:ext cx="1600200" cy="731520"/>
+            <a:off x="2139696" y="960120"/>
+            <a:ext cx="1600200" cy="594360"/>
           </a:xfrm>
           <a:prstGeom prst="chevron">
             <a:avLst/>
@@ -7343,14 +7391,14 @@
       </p:sp>
       <p:sp>
         <p:nvSpPr>
-          <p:cNvPr id="7" name="Text 5"/>
+          <p:cNvPr id="8" name="Text 5"/>
           <p:cNvSpPr txBox="1"/>
           <p:nvPr/>
         </p:nvSpPr>
         <p:spPr>
           <a:xfrm>
-            <a:off x="2322576" y="1188720"/>
-            <a:ext cx="1280160" cy="731520"/>
+            <a:off x="2322576" y="960120"/>
+            <a:ext cx="1280160" cy="594360"/>
           </a:xfrm>
           <a:prstGeom prst="rect">
             <a:avLst/>
@@ -7366,27 +7414,51 @@
               <a:buNone/>
             </a:pPr>
             <a:r>
-              <a:rPr lang="en-US" sz="1300" b="1" dirty="0">
+              <a:rPr lang="en-US" sz="1200" b="1" dirty="0">
                 <a:solidFill>
                   <a:schemeClr val="bg1"/>
                 </a:solidFill>
               </a:rPr>
               <a:t>制作・調達</a:t>
             </a:r>
-            <a:endParaRPr lang="en-US" sz="1300" dirty="0"/>
-          </a:p>
-        </p:txBody>
-      </p:sp>
-      <p:sp>
-        <p:nvSpPr>
-          <p:cNvPr id="8" name="Text 6"/>
+            <a:endParaRPr lang="en-US" sz="1200" dirty="0"/>
+          </a:p>
+        </p:txBody>
+      </p:sp>
+      <p:pic>
+        <p:nvPicPr>
+          <p:cNvPr id="9" name="step_img_1" descr="制作・調達のイラスト">    </p:cNvPr>
+          <p:cNvPicPr>
+            <a:picLocks noChangeAspect="1"/>
+          </p:cNvPicPr>
+          <p:nvPr/>
+        </p:nvPicPr>
+        <p:blipFill>
+          <a:blip r:embed="rId2"/>
+          <a:stretch>
+            <a:fillRect/>
+          </a:stretch>
+        </p:blipFill>
+        <p:spPr>
+          <a:xfrm>
+            <a:off x="2322576" y="1645920"/>
+            <a:ext cx="1188720" cy="1188720"/>
+          </a:xfrm>
+          <a:prstGeom prst="rect">
+            <a:avLst/>
+          </a:prstGeom>
+        </p:spPr>
+      </p:pic>
+      <p:sp>
+        <p:nvSpPr>
+          <p:cNvPr id="10" name="Text 6"/>
           <p:cNvSpPr txBox="1"/>
           <p:nvPr/>
         </p:nvSpPr>
         <p:spPr>
           <a:xfrm>
-            <a:off x="2139696" y="2011680"/>
-            <a:ext cx="1600200" cy="685800"/>
+            <a:off x="2139696" y="2880360"/>
+            <a:ext cx="1600200" cy="502920"/>
           </a:xfrm>
           <a:prstGeom prst="rect">
             <a:avLst/>
@@ -7402,41 +7474,41 @@
               <a:buNone/>
             </a:pPr>
             <a:r>
-              <a:rPr lang="en-US" sz="1200" dirty="0">
+              <a:rPr lang="en-US" sz="1100" dirty="0">
                 <a:solidFill>
                   <a:schemeClr val="tx1"/>
                 </a:solidFill>
               </a:rPr>
               <a:t>キット・ポスター</a:t>
             </a:r>
-            <a:endParaRPr lang="en-US" sz="1200" dirty="0"/>
+            <a:endParaRPr lang="en-US" sz="1100" dirty="0"/>
           </a:p>
           <a:p>
             <a:pPr algn="ctr" indent="0" marL="0">
               <a:buNone/>
             </a:pPr>
             <a:r>
-              <a:rPr lang="en-US" sz="1200" dirty="0">
+              <a:rPr lang="en-US" sz="1100" dirty="0">
                 <a:solidFill>
                   <a:schemeClr val="tx1"/>
                 </a:solidFill>
               </a:rPr>
               <a:t>衣装・ツール</a:t>
             </a:r>
-            <a:endParaRPr lang="en-US" sz="1200" dirty="0"/>
-          </a:p>
-        </p:txBody>
-      </p:sp>
-      <p:sp>
-        <p:nvSpPr>
-          <p:cNvPr id="9" name="step_2"/>
+            <a:endParaRPr lang="en-US" sz="1100" dirty="0"/>
+          </a:p>
+        </p:txBody>
+      </p:sp>
+      <p:sp>
+        <p:nvSpPr>
+          <p:cNvPr id="11" name="step_2"/>
           <p:cNvSpPr/>
           <p:nvPr/>
         </p:nvSpPr>
         <p:spPr>
           <a:xfrm>
-            <a:off x="3822192" y="1188720"/>
-            <a:ext cx="1600200" cy="731520"/>
+            <a:off x="3822192" y="960120"/>
+            <a:ext cx="1600200" cy="594360"/>
           </a:xfrm>
           <a:prstGeom prst="chevron">
             <a:avLst/>
@@ -7454,14 +7526,14 @@
       </p:sp>
       <p:sp>
         <p:nvSpPr>
-          <p:cNvPr id="10" name="Text 8"/>
+          <p:cNvPr id="12" name="Text 8"/>
           <p:cNvSpPr txBox="1"/>
           <p:nvPr/>
         </p:nvSpPr>
         <p:spPr>
           <a:xfrm>
-            <a:off x="4005072" y="1188720"/>
-            <a:ext cx="1280160" cy="731520"/>
+            <a:off x="4005072" y="960120"/>
+            <a:ext cx="1280160" cy="594360"/>
           </a:xfrm>
           <a:prstGeom prst="rect">
             <a:avLst/>
@@ -7477,27 +7549,51 @@
               <a:buNone/>
             </a:pPr>
             <a:r>
-              <a:rPr lang="en-US" sz="1300" b="1" dirty="0">
+              <a:rPr lang="en-US" sz="1200" b="1" dirty="0">
                 <a:solidFill>
                   <a:schemeClr val="bg1"/>
                 </a:solidFill>
               </a:rPr>
               <a:t>配送・検品</a:t>
             </a:r>
-            <a:endParaRPr lang="en-US" sz="1300" dirty="0"/>
-          </a:p>
-        </p:txBody>
-      </p:sp>
-      <p:sp>
-        <p:nvSpPr>
-          <p:cNvPr id="11" name="Text 9"/>
+            <a:endParaRPr lang="en-US" sz="1200" dirty="0"/>
+          </a:p>
+        </p:txBody>
+      </p:sp>
+      <p:pic>
+        <p:nvPicPr>
+          <p:cNvPr id="13" name="step_img_2" descr="配送・検品のイラスト">    </p:cNvPr>
+          <p:cNvPicPr>
+            <a:picLocks noChangeAspect="1"/>
+          </p:cNvPicPr>
+          <p:nvPr/>
+        </p:nvPicPr>
+        <p:blipFill>
+          <a:blip r:embed="rId3"/>
+          <a:stretch>
+            <a:fillRect/>
+          </a:stretch>
+        </p:blipFill>
+        <p:spPr>
+          <a:xfrm>
+            <a:off x="4005072" y="1645920"/>
+            <a:ext cx="1188720" cy="1188720"/>
+          </a:xfrm>
+          <a:prstGeom prst="rect">
+            <a:avLst/>
+          </a:prstGeom>
+        </p:spPr>
+      </p:pic>
+      <p:sp>
+        <p:nvSpPr>
+          <p:cNvPr id="14" name="Text 9"/>
           <p:cNvSpPr txBox="1"/>
           <p:nvPr/>
         </p:nvSpPr>
         <p:spPr>
           <a:xfrm>
-            <a:off x="3822192" y="2011680"/>
-            <a:ext cx="1600200" cy="685800"/>
+            <a:off x="3822192" y="2880360"/>
+            <a:ext cx="1600200" cy="502920"/>
           </a:xfrm>
           <a:prstGeom prst="rect">
             <a:avLst/>
@@ -7513,41 +7609,41 @@
               <a:buNone/>
             </a:pPr>
             <a:r>
-              <a:rPr lang="en-US" sz="1200" dirty="0">
+              <a:rPr lang="en-US" sz="1100" dirty="0">
                 <a:solidFill>
                   <a:schemeClr val="tx1"/>
                 </a:solidFill>
               </a:rPr>
               <a:t>11月下旬着</a:t>
             </a:r>
-            <a:endParaRPr lang="en-US" sz="1200" dirty="0"/>
+            <a:endParaRPr lang="en-US" sz="1100" dirty="0"/>
           </a:p>
           <a:p>
             <a:pPr algn="ctr" indent="0" marL="0">
               <a:buNone/>
             </a:pPr>
             <a:r>
-              <a:rPr lang="en-US" sz="1200" dirty="0">
+              <a:rPr lang="en-US" sz="1100" dirty="0">
                 <a:solidFill>
                   <a:schemeClr val="tx1"/>
                 </a:solidFill>
               </a:rPr>
               <a:t>検品確認書を返送</a:t>
             </a:r>
-            <a:endParaRPr lang="en-US" sz="1200" dirty="0"/>
-          </a:p>
-        </p:txBody>
-      </p:sp>
-      <p:sp>
-        <p:nvSpPr>
-          <p:cNvPr id="12" name="step_3"/>
+            <a:endParaRPr lang="en-US" sz="1100" dirty="0"/>
+          </a:p>
+        </p:txBody>
+      </p:sp>
+      <p:sp>
+        <p:nvSpPr>
+          <p:cNvPr id="15" name="step_3"/>
           <p:cNvSpPr/>
           <p:nvPr/>
         </p:nvSpPr>
         <p:spPr>
           <a:xfrm>
-            <a:off x="5504688" y="1188720"/>
-            <a:ext cx="1600200" cy="731520"/>
+            <a:off x="5504688" y="960120"/>
+            <a:ext cx="1600200" cy="594360"/>
           </a:xfrm>
           <a:prstGeom prst="chevron">
             <a:avLst/>
@@ -7565,14 +7661,14 @@
       </p:sp>
       <p:sp>
         <p:nvSpPr>
-          <p:cNvPr id="13" name="Text 11"/>
+          <p:cNvPr id="16" name="Text 11"/>
           <p:cNvSpPr txBox="1"/>
           <p:nvPr/>
         </p:nvSpPr>
         <p:spPr>
           <a:xfrm>
-            <a:off x="5687568" y="1188720"/>
-            <a:ext cx="1280160" cy="731520"/>
+            <a:off x="5687568" y="960120"/>
+            <a:ext cx="1280160" cy="594360"/>
           </a:xfrm>
           <a:prstGeom prst="rect">
             <a:avLst/>
@@ -7588,27 +7684,51 @@
               <a:buNone/>
             </a:pPr>
             <a:r>
-              <a:rPr lang="en-US" sz="1300" b="1" dirty="0">
+              <a:rPr lang="en-US" sz="1200" b="1" dirty="0">
                 <a:solidFill>
                   <a:schemeClr val="bg1"/>
                 </a:solidFill>
               </a:rPr>
               <a:t>店舗で実施</a:t>
             </a:r>
-            <a:endParaRPr lang="en-US" sz="1300" dirty="0"/>
-          </a:p>
-        </p:txBody>
-      </p:sp>
-      <p:sp>
-        <p:nvSpPr>
-          <p:cNvPr id="14" name="Text 12"/>
+            <a:endParaRPr lang="en-US" sz="1200" dirty="0"/>
+          </a:p>
+        </p:txBody>
+      </p:sp>
+      <p:pic>
+        <p:nvPicPr>
+          <p:cNvPr id="17" name="step_img_3" descr="店舗で実施のイラスト">    </p:cNvPr>
+          <p:cNvPicPr>
+            <a:picLocks noChangeAspect="1"/>
+          </p:cNvPicPr>
+          <p:nvPr/>
+        </p:nvPicPr>
+        <p:blipFill>
+          <a:blip r:embed="rId4"/>
+          <a:stretch>
+            <a:fillRect/>
+          </a:stretch>
+        </p:blipFill>
+        <p:spPr>
+          <a:xfrm>
+            <a:off x="5687568" y="1645920"/>
+            <a:ext cx="1188720" cy="1188720"/>
+          </a:xfrm>
+          <a:prstGeom prst="rect">
+            <a:avLst/>
+          </a:prstGeom>
+        </p:spPr>
+      </p:pic>
+      <p:sp>
+        <p:nvSpPr>
+          <p:cNvPr id="18" name="Text 12"/>
           <p:cNvSpPr txBox="1"/>
           <p:nvPr/>
         </p:nvSpPr>
         <p:spPr>
           <a:xfrm>
-            <a:off x="5504688" y="2011680"/>
-            <a:ext cx="1600200" cy="685800"/>
+            <a:off x="5504688" y="2880360"/>
+            <a:ext cx="1600200" cy="502920"/>
           </a:xfrm>
           <a:prstGeom prst="rect">
             <a:avLst/>
@@ -7624,41 +7744,41 @@
               <a:buNone/>
             </a:pPr>
             <a:r>
-              <a:rPr lang="en-US" sz="1200" dirty="0">
+              <a:rPr lang="en-US" sz="1100" dirty="0">
                 <a:solidFill>
                   <a:schemeClr val="tx1"/>
                 </a:solidFill>
               </a:rPr>
               <a:t>11/28〜12/25</a:t>
             </a:r>
-            <a:endParaRPr lang="en-US" sz="1200" dirty="0"/>
+            <a:endParaRPr lang="en-US" sz="1100" dirty="0"/>
           </a:p>
           <a:p>
             <a:pPr algn="ctr" indent="0" marL="0">
               <a:buNone/>
             </a:pPr>
             <a:r>
-              <a:rPr lang="en-US" sz="1200" dirty="0">
+              <a:rPr lang="en-US" sz="1100" dirty="0">
                 <a:solidFill>
                   <a:schemeClr val="tx1"/>
                 </a:solidFill>
               </a:rPr>
               <a:t>4週間</a:t>
             </a:r>
-            <a:endParaRPr lang="en-US" sz="1200" dirty="0"/>
-          </a:p>
-        </p:txBody>
-      </p:sp>
-      <p:sp>
-        <p:nvSpPr>
-          <p:cNvPr id="15" name="step_4"/>
+            <a:endParaRPr lang="en-US" sz="1100" dirty="0"/>
+          </a:p>
+        </p:txBody>
+      </p:sp>
+      <p:sp>
+        <p:nvSpPr>
+          <p:cNvPr id="19" name="step_4"/>
           <p:cNvSpPr/>
           <p:nvPr/>
         </p:nvSpPr>
         <p:spPr>
           <a:xfrm>
-            <a:off x="7187184" y="1188720"/>
-            <a:ext cx="1600200" cy="731520"/>
+            <a:off x="7187184" y="960120"/>
+            <a:ext cx="1600200" cy="594360"/>
           </a:xfrm>
           <a:prstGeom prst="chevron">
             <a:avLst/>
@@ -7676,14 +7796,14 @@
       </p:sp>
       <p:sp>
         <p:nvSpPr>
-          <p:cNvPr id="16" name="Text 14"/>
+          <p:cNvPr id="20" name="Text 14"/>
           <p:cNvSpPr txBox="1"/>
           <p:nvPr/>
         </p:nvSpPr>
         <p:spPr>
           <a:xfrm>
-            <a:off x="7370064" y="1188720"/>
-            <a:ext cx="1280160" cy="731520"/>
+            <a:off x="7370064" y="960120"/>
+            <a:ext cx="1280160" cy="594360"/>
           </a:xfrm>
           <a:prstGeom prst="rect">
             <a:avLst/>
@@ -7699,27 +7819,51 @@
               <a:buNone/>
             </a:pPr>
             <a:r>
-              <a:rPr lang="en-US" sz="1300" b="1" dirty="0">
+              <a:rPr lang="en-US" sz="1200" b="1" dirty="0">
                 <a:solidFill>
                   <a:schemeClr val="bg1"/>
                 </a:solidFill>
               </a:rPr>
               <a:t>返却</a:t>
             </a:r>
-            <a:endParaRPr lang="en-US" sz="1300" dirty="0"/>
-          </a:p>
-        </p:txBody>
-      </p:sp>
-      <p:sp>
-        <p:nvSpPr>
-          <p:cNvPr id="17" name="Text 15"/>
+            <a:endParaRPr lang="en-US" sz="1200" dirty="0"/>
+          </a:p>
+        </p:txBody>
+      </p:sp>
+      <p:pic>
+        <p:nvPicPr>
+          <p:cNvPr id="21" name="step_img_4" descr="返却のイラスト">    </p:cNvPr>
+          <p:cNvPicPr>
+            <a:picLocks noChangeAspect="1"/>
+          </p:cNvPicPr>
+          <p:nvPr/>
+        </p:nvPicPr>
+        <p:blipFill>
+          <a:blip r:embed="rId5"/>
+          <a:stretch>
+            <a:fillRect/>
+          </a:stretch>
+        </p:blipFill>
+        <p:spPr>
+          <a:xfrm>
+            <a:off x="7370064" y="1645920"/>
+            <a:ext cx="1188720" cy="1188720"/>
+          </a:xfrm>
+          <a:prstGeom prst="rect">
+            <a:avLst/>
+          </a:prstGeom>
+        </p:spPr>
+      </p:pic>
+      <p:sp>
+        <p:nvSpPr>
+          <p:cNvPr id="22" name="Text 15"/>
           <p:cNvSpPr txBox="1"/>
           <p:nvPr/>
         </p:nvSpPr>
         <p:spPr>
           <a:xfrm>
-            <a:off x="7187184" y="2011680"/>
-            <a:ext cx="1600200" cy="685800"/>
+            <a:off x="7187184" y="2880360"/>
+            <a:ext cx="1600200" cy="502920"/>
           </a:xfrm>
           <a:prstGeom prst="rect">
             <a:avLst/>
@@ -7735,45 +7879,45 @@
               <a:buNone/>
             </a:pPr>
             <a:r>
-              <a:rPr lang="en-US" sz="1200" dirty="0">
+              <a:rPr lang="en-US" sz="1100" dirty="0">
                 <a:solidFill>
                   <a:schemeClr val="tx1"/>
                 </a:solidFill>
               </a:rPr>
               <a:t>アーチを梱包</a:t>
             </a:r>
-            <a:endParaRPr lang="en-US" sz="1200" dirty="0"/>
+            <a:endParaRPr lang="en-US" sz="1100" dirty="0"/>
           </a:p>
           <a:p>
             <a:pPr algn="ctr" indent="0" marL="0">
               <a:buNone/>
             </a:pPr>
             <a:r>
-              <a:rPr lang="en-US" sz="1200" dirty="0">
+              <a:rPr lang="en-US" sz="1100" dirty="0">
                 <a:solidFill>
                   <a:schemeClr val="tx1"/>
                 </a:solidFill>
               </a:rPr>
               <a:t>着払い伝票で返送</a:t>
             </a:r>
-            <a:endParaRPr lang="en-US" sz="1200" dirty="0"/>
-          </a:p>
-        </p:txBody>
-      </p:sp>
-      <p:sp>
-        <p:nvSpPr>
-          <p:cNvPr id="18" name="ops_note"/>
+            <a:endParaRPr lang="en-US" sz="1100" dirty="0"/>
+          </a:p>
+        </p:txBody>
+      </p:sp>
+      <p:sp>
+        <p:nvSpPr>
+          <p:cNvPr id="23" name="ops_note"/>
           <p:cNvSpPr/>
           <p:nvPr/>
         </p:nvSpPr>
         <p:spPr>
           <a:xfrm>
-            <a:off x="457200" y="2926080"/>
-            <a:ext cx="8229600" cy="1600200"/>
+            <a:off x="457200" y="3520440"/>
+            <a:ext cx="8229600" cy="1097280"/>
           </a:xfrm>
           <a:prstGeom prst="roundRect">
             <a:avLst>
-              <a:gd name="adj" fmla="val 4571"/>
+              <a:gd name="adj" fmla="val 6667"/>
             </a:avLst>
           </a:prstGeom>
           <a:solidFill>
@@ -7789,14 +7933,14 @@
       </p:sp>
       <p:sp>
         <p:nvSpPr>
-          <p:cNvPr id="19" name="Text 17"/>
+          <p:cNvPr id="24" name="Text 17"/>
           <p:cNvSpPr txBox="1"/>
           <p:nvPr/>
         </p:nvSpPr>
         <p:spPr>
           <a:xfrm>
-            <a:off x="640080" y="3017520"/>
-            <a:ext cx="7863840" cy="1417320"/>
+            <a:off x="594360" y="3566160"/>
+            <a:ext cx="7955280" cy="1005840"/>
           </a:xfrm>
           <a:prstGeom prst="rect">
             <a:avLst/>
@@ -7810,73 +7954,55 @@
           <a:p>
             <a:pPr indent="0" marL="0">
               <a:spcAft>
-                <a:spcPts val="400"/>
+                <a:spcPts val="200"/>
               </a:spcAft>
               <a:buNone/>
             </a:pPr>
             <a:r>
-              <a:rPr lang="en-US" sz="1500" b="1" dirty="0">
+              <a:rPr lang="en-US" sz="1300" b="1" dirty="0">
                 <a:solidFill>
                   <a:schemeClr val="tx2"/>
                 </a:solidFill>
               </a:rPr>
               <a:t>店舗スタッフ様だけで運営できる体制</a:t>
             </a:r>
-            <a:endParaRPr lang="en-US" sz="1300" dirty="0"/>
+            <a:endParaRPr lang="en-US" sz="1100" dirty="0"/>
           </a:p>
           <a:p>
             <a:pPr marL="342900" indent="-342900">
               <a:spcAft>
-                <a:spcPts val="400"/>
+                <a:spcPts val="200"/>
               </a:spcAft>
               <a:buSzPct val="100000"/>
               <a:buChar char="•"/>
             </a:pPr>
             <a:r>
-              <a:rPr lang="en-US" sz="1300" dirty="0">
+              <a:rPr lang="en-US" sz="1100" dirty="0">
                 <a:solidFill>
                   <a:schemeClr val="tx1"/>
                 </a:solidFill>
               </a:rPr>
               <a:t>運営スタッフの派遣はなし。キット・物品と運用マニュアル（準備・受付・制作手順・片付け）をお届けします。</a:t>
             </a:r>
-            <a:endParaRPr lang="en-US" sz="1300" dirty="0"/>
+            <a:endParaRPr lang="en-US" sz="1100" dirty="0"/>
           </a:p>
           <a:p>
             <a:pPr marL="342900" indent="-342900">
               <a:spcAft>
-                <a:spcPts val="400"/>
+                <a:spcPts val="200"/>
               </a:spcAft>
               <a:buSzPct val="100000"/>
               <a:buChar char="•"/>
             </a:pPr>
             <a:r>
-              <a:rPr lang="en-US" sz="1300" dirty="0">
+              <a:rPr lang="en-US" sz="1100" dirty="0">
                 <a:solidFill>
                   <a:schemeClr val="tx1"/>
                 </a:solidFill>
               </a:rPr>
-              <a:t>週替わりの内容に合わせ、キットは週ごとに仕分けして納品します。</a:t>
-            </a:r>
-            <a:endParaRPr lang="en-US" sz="1300" dirty="0"/>
-          </a:p>
-          <a:p>
-            <a:pPr marL="342900" indent="-342900">
-              <a:spcAft>
-                <a:spcPts val="400"/>
-              </a:spcAft>
-              <a:buSzPct val="100000"/>
-              <a:buChar char="•"/>
-            </a:pPr>
-            <a:r>
-              <a:rPr lang="en-US" sz="1300" dirty="0">
-                <a:solidFill>
-                  <a:schemeClr val="tx1"/>
-                </a:solidFill>
-              </a:rPr>
-              <a:t>アーチの返却は箱・緩衝材を再利用し、同梱の着払い伝票で発送いただくだけです。</a:t>
-            </a:r>
-            <a:endParaRPr lang="en-US" sz="1300" dirty="0"/>
+              <a:t>キットは週ごとに仕分けて納品。アーチは箱を再利用し、同梱の着払い伝票で返送いただくだけです。</a:t>
+            </a:r>
+            <a:endParaRPr lang="en-US" sz="1100" dirty="0"/>
           </a:p>
         </p:txBody>
       </p:sp>
@@ -12032,20 +12158,79 @@
           </a:graphicData>
         </a:graphic>
       </p:graphicFrame>
-      <p:sp>
-        <p:nvSpPr>
-          <p:cNvPr id="4" name="area_card"/>
+      <p:pic>
+        <p:nvPicPr>
+          <p:cNvPr id="4" name="img_ship" descr="全国10地区への配送イラスト">    </p:cNvPr>
+          <p:cNvPicPr>
+            <a:picLocks noChangeAspect="1"/>
+          </p:cNvPicPr>
+          <p:nvPr/>
+        </p:nvPicPr>
+        <p:blipFill>
+          <a:blip r:embed="rId1"/>
+          <a:srcRect l="0" r="0" t="0" b="0"/>
+          <a:stretch/>
+        </p:blipFill>
+        <p:spPr>
+          <a:xfrm>
+            <a:off x="5852160" y="1005840"/>
+            <a:ext cx="2834640" cy="1600200"/>
+          </a:xfrm>
+          <a:prstGeom prst="rect">
+            <a:avLst/>
+          </a:prstGeom>
+        </p:spPr>
+      </p:pic>
+      <p:sp>
+        <p:nvSpPr>
+          <p:cNvPr id="5" name="Text 1"/>
+          <p:cNvSpPr txBox="1"/>
+          <p:nvPr/>
+        </p:nvSpPr>
+        <p:spPr>
+          <a:xfrm>
+            <a:off x="5852160" y="2697480"/>
+            <a:ext cx="2834640" cy="320040"/>
+          </a:xfrm>
+          <a:prstGeom prst="rect">
+            <a:avLst/>
+          </a:prstGeom>
+          <a:noFill/>
+          <a:ln/>
+        </p:spPr>
+        <p:txBody>
+          <a:bodyPr wrap="square" lIns="635" tIns="635" rIns="635" bIns="635" rtlCol="0" anchor="t"/>
+          <a:lstStyle/>
+          <a:p>
+            <a:pPr indent="0" marL="0">
+              <a:buNone/>
+            </a:pPr>
+            <a:r>
+              <a:rPr lang="en-US" sz="1400" b="1" dirty="0">
+                <a:solidFill>
+                  <a:schemeClr val="tx2"/>
+                </a:solidFill>
+              </a:rPr>
+              <a:t>配送先 10地区</a:t>
+            </a:r>
+            <a:endParaRPr lang="en-US" sz="1400" dirty="0"/>
+          </a:p>
+        </p:txBody>
+      </p:sp>
+      <p:sp>
+        <p:nvSpPr>
+          <p:cNvPr id="6" name="area_0"/>
           <p:cNvSpPr/>
           <p:nvPr/>
         </p:nvSpPr>
         <p:spPr>
           <a:xfrm>
-            <a:off x="5852160" y="1051560"/>
-            <a:ext cx="2834640" cy="3493008"/>
+            <a:off x="5852160" y="3063240"/>
+            <a:ext cx="1371600" cy="265176"/>
           </a:xfrm>
           <a:prstGeom prst="roundRect">
             <a:avLst>
-              <a:gd name="adj" fmla="val 2581"/>
+              <a:gd name="adj" fmla="val 17241"/>
             </a:avLst>
           </a:prstGeom>
           <a:solidFill>
@@ -12053,7 +12238,7 @@
           </a:solidFill>
           <a:ln w="12700">
             <a:solidFill>
-              <a:schemeClr val="bg2"/>
+              <a:schemeClr val="accent5"/>
             </a:solidFill>
             <a:prstDash val="solid"/>
           </a:ln>
@@ -12061,62 +12246,62 @@
       </p:sp>
       <p:sp>
         <p:nvSpPr>
-          <p:cNvPr id="5" name="Text 2"/>
+          <p:cNvPr id="7" name="Text 3"/>
           <p:cNvSpPr txBox="1"/>
           <p:nvPr/>
         </p:nvSpPr>
         <p:spPr>
           <a:xfrm>
-            <a:off x="6035040" y="1188720"/>
-            <a:ext cx="2468880" cy="365760"/>
-          </a:xfrm>
-          <a:prstGeom prst="rect">
-            <a:avLst/>
-          </a:prstGeom>
-          <a:noFill/>
-          <a:ln/>
-        </p:spPr>
-        <p:txBody>
-          <a:bodyPr wrap="square" lIns="635" tIns="635" rIns="635" bIns="635" rtlCol="0" anchor="t"/>
-          <a:lstStyle/>
-          <a:p>
-            <a:pPr indent="0" marL="0">
-              <a:buNone/>
-            </a:pPr>
-            <a:r>
-              <a:rPr lang="en-US" sz="1500" b="1" dirty="0">
-                <a:solidFill>
-                  <a:schemeClr val="tx2"/>
-                </a:solidFill>
-              </a:rPr>
-              <a:t>配送先 10地区</a:t>
-            </a:r>
-            <a:endParaRPr lang="en-US" sz="1500" dirty="0"/>
-          </a:p>
-        </p:txBody>
-      </p:sp>
-      <p:sp>
-        <p:nvSpPr>
-          <p:cNvPr id="6" name="area_0"/>
+            <a:off x="5852160" y="3063240"/>
+            <a:ext cx="1371600" cy="265176"/>
+          </a:xfrm>
+          <a:prstGeom prst="rect">
+            <a:avLst/>
+          </a:prstGeom>
+          <a:noFill/>
+          <a:ln/>
+        </p:spPr>
+        <p:txBody>
+          <a:bodyPr wrap="square" lIns="0" tIns="0" rIns="0" bIns="0" rtlCol="0" anchor="ctr"/>
+          <a:lstStyle/>
+          <a:p>
+            <a:pPr algn="ctr" indent="0" marL="0">
+              <a:buNone/>
+            </a:pPr>
+            <a:r>
+              <a:rPr lang="en-US" sz="1100" dirty="0">
+                <a:solidFill>
+                  <a:schemeClr val="tx1"/>
+                </a:solidFill>
+              </a:rPr>
+              <a:t>北海道</a:t>
+            </a:r>
+            <a:endParaRPr lang="en-US" sz="1100" dirty="0"/>
+          </a:p>
+        </p:txBody>
+      </p:sp>
+      <p:sp>
+        <p:nvSpPr>
+          <p:cNvPr id="8" name="area_1"/>
           <p:cNvSpPr/>
           <p:nvPr/>
         </p:nvSpPr>
         <p:spPr>
           <a:xfrm>
-            <a:off x="6035040" y="1691640"/>
-            <a:ext cx="1143000" cy="411480"/>
+            <a:off x="7315200" y="3063240"/>
+            <a:ext cx="1371600" cy="265176"/>
           </a:xfrm>
           <a:prstGeom prst="roundRect">
             <a:avLst>
-              <a:gd name="adj" fmla="val 13333"/>
+              <a:gd name="adj" fmla="val 17241"/>
             </a:avLst>
           </a:prstGeom>
           <a:solidFill>
-            <a:schemeClr val="bg1"/>
+            <a:schemeClr val="bg2"/>
           </a:solidFill>
           <a:ln w="12700">
             <a:solidFill>
-              <a:schemeClr val="accent4"/>
+              <a:schemeClr val="accent5"/>
             </a:solidFill>
             <a:prstDash val="solid"/>
           </a:ln>
@@ -12124,14 +12309,14 @@
       </p:sp>
       <p:sp>
         <p:nvSpPr>
-          <p:cNvPr id="7" name="Text 4"/>
+          <p:cNvPr id="9" name="Text 5"/>
           <p:cNvSpPr txBox="1"/>
           <p:nvPr/>
         </p:nvSpPr>
         <p:spPr>
           <a:xfrm>
-            <a:off x="6035040" y="1691640"/>
-            <a:ext cx="1143000" cy="411480"/>
+            <a:off x="7315200" y="3063240"/>
+            <a:ext cx="1371600" cy="265176"/>
           </a:xfrm>
           <a:prstGeom prst="rect">
             <a:avLst/>
@@ -12147,39 +12332,39 @@
               <a:buNone/>
             </a:pPr>
             <a:r>
-              <a:rPr lang="en-US" sz="1300" dirty="0">
+              <a:rPr lang="en-US" sz="1100" dirty="0">
                 <a:solidFill>
                   <a:schemeClr val="tx1"/>
                 </a:solidFill>
               </a:rPr>
-              <a:t>北海道</a:t>
-            </a:r>
-            <a:endParaRPr lang="en-US" sz="1300" dirty="0"/>
-          </a:p>
-        </p:txBody>
-      </p:sp>
-      <p:sp>
-        <p:nvSpPr>
-          <p:cNvPr id="8" name="area_1"/>
+              <a:t>東北</a:t>
+            </a:r>
+            <a:endParaRPr lang="en-US" sz="1100" dirty="0"/>
+          </a:p>
+        </p:txBody>
+      </p:sp>
+      <p:sp>
+        <p:nvSpPr>
+          <p:cNvPr id="10" name="area_2"/>
           <p:cNvSpPr/>
           <p:nvPr/>
         </p:nvSpPr>
         <p:spPr>
           <a:xfrm>
-            <a:off x="7315200" y="1691640"/>
-            <a:ext cx="1143000" cy="411480"/>
+            <a:off x="5852160" y="3374136"/>
+            <a:ext cx="1371600" cy="265176"/>
           </a:xfrm>
           <a:prstGeom prst="roundRect">
             <a:avLst>
-              <a:gd name="adj" fmla="val 13333"/>
+              <a:gd name="adj" fmla="val 17241"/>
             </a:avLst>
           </a:prstGeom>
           <a:solidFill>
-            <a:schemeClr val="bg1"/>
+            <a:schemeClr val="bg2"/>
           </a:solidFill>
           <a:ln w="12700">
             <a:solidFill>
-              <a:schemeClr val="accent4"/>
+              <a:schemeClr val="accent5"/>
             </a:solidFill>
             <a:prstDash val="solid"/>
           </a:ln>
@@ -12187,14 +12372,14 @@
       </p:sp>
       <p:sp>
         <p:nvSpPr>
-          <p:cNvPr id="9" name="Text 6"/>
+          <p:cNvPr id="11" name="Text 7"/>
           <p:cNvSpPr txBox="1"/>
           <p:nvPr/>
         </p:nvSpPr>
         <p:spPr>
           <a:xfrm>
-            <a:off x="7315200" y="1691640"/>
-            <a:ext cx="1143000" cy="411480"/>
+            <a:off x="5852160" y="3374136"/>
+            <a:ext cx="1371600" cy="265176"/>
           </a:xfrm>
           <a:prstGeom prst="rect">
             <a:avLst/>
@@ -12210,39 +12395,39 @@
               <a:buNone/>
             </a:pPr>
             <a:r>
-              <a:rPr lang="en-US" sz="1300" dirty="0">
+              <a:rPr lang="en-US" sz="1100" dirty="0">
                 <a:solidFill>
                   <a:schemeClr val="tx1"/>
                 </a:solidFill>
               </a:rPr>
-              <a:t>東北</a:t>
-            </a:r>
-            <a:endParaRPr lang="en-US" sz="1300" dirty="0"/>
-          </a:p>
-        </p:txBody>
-      </p:sp>
-      <p:sp>
-        <p:nvSpPr>
-          <p:cNvPr id="10" name="area_2"/>
+              <a:t>関信越</a:t>
+            </a:r>
+            <a:endParaRPr lang="en-US" sz="1100" dirty="0"/>
+          </a:p>
+        </p:txBody>
+      </p:sp>
+      <p:sp>
+        <p:nvSpPr>
+          <p:cNvPr id="12" name="area_3"/>
           <p:cNvSpPr/>
           <p:nvPr/>
         </p:nvSpPr>
         <p:spPr>
           <a:xfrm>
-            <a:off x="6035040" y="2240280"/>
-            <a:ext cx="1143000" cy="411480"/>
+            <a:off x="7315200" y="3374136"/>
+            <a:ext cx="1371600" cy="265176"/>
           </a:xfrm>
           <a:prstGeom prst="roundRect">
             <a:avLst>
-              <a:gd name="adj" fmla="val 13333"/>
+              <a:gd name="adj" fmla="val 17241"/>
             </a:avLst>
           </a:prstGeom>
           <a:solidFill>
-            <a:schemeClr val="bg1"/>
+            <a:schemeClr val="bg2"/>
           </a:solidFill>
           <a:ln w="12700">
             <a:solidFill>
-              <a:schemeClr val="accent4"/>
+              <a:schemeClr val="accent5"/>
             </a:solidFill>
             <a:prstDash val="solid"/>
           </a:ln>
@@ -12250,14 +12435,14 @@
       </p:sp>
       <p:sp>
         <p:nvSpPr>
-          <p:cNvPr id="11" name="Text 8"/>
+          <p:cNvPr id="13" name="Text 9"/>
           <p:cNvSpPr txBox="1"/>
           <p:nvPr/>
         </p:nvSpPr>
         <p:spPr>
           <a:xfrm>
-            <a:off x="6035040" y="2240280"/>
-            <a:ext cx="1143000" cy="411480"/>
+            <a:off x="7315200" y="3374136"/>
+            <a:ext cx="1371600" cy="265176"/>
           </a:xfrm>
           <a:prstGeom prst="rect">
             <a:avLst/>
@@ -12273,39 +12458,39 @@
               <a:buNone/>
             </a:pPr>
             <a:r>
-              <a:rPr lang="en-US" sz="1300" dirty="0">
+              <a:rPr lang="en-US" sz="1100" dirty="0">
                 <a:solidFill>
                   <a:schemeClr val="tx1"/>
                 </a:solidFill>
               </a:rPr>
-              <a:t>関信越</a:t>
-            </a:r>
-            <a:endParaRPr lang="en-US" sz="1300" dirty="0"/>
-          </a:p>
-        </p:txBody>
-      </p:sp>
-      <p:sp>
-        <p:nvSpPr>
-          <p:cNvPr id="12" name="area_3"/>
+              <a:t>首都圏</a:t>
+            </a:r>
+            <a:endParaRPr lang="en-US" sz="1100" dirty="0"/>
+          </a:p>
+        </p:txBody>
+      </p:sp>
+      <p:sp>
+        <p:nvSpPr>
+          <p:cNvPr id="14" name="area_4"/>
           <p:cNvSpPr/>
           <p:nvPr/>
         </p:nvSpPr>
         <p:spPr>
           <a:xfrm>
-            <a:off x="7315200" y="2240280"/>
-            <a:ext cx="1143000" cy="411480"/>
+            <a:off x="5852160" y="3685032"/>
+            <a:ext cx="1371600" cy="265176"/>
           </a:xfrm>
           <a:prstGeom prst="roundRect">
             <a:avLst>
-              <a:gd name="adj" fmla="val 13333"/>
+              <a:gd name="adj" fmla="val 17241"/>
             </a:avLst>
           </a:prstGeom>
           <a:solidFill>
-            <a:schemeClr val="bg1"/>
+            <a:schemeClr val="bg2"/>
           </a:solidFill>
           <a:ln w="12700">
             <a:solidFill>
-              <a:schemeClr val="accent4"/>
+              <a:schemeClr val="accent5"/>
             </a:solidFill>
             <a:prstDash val="solid"/>
           </a:ln>
@@ -12313,14 +12498,14 @@
       </p:sp>
       <p:sp>
         <p:nvSpPr>
-          <p:cNvPr id="13" name="Text 10"/>
+          <p:cNvPr id="15" name="Text 11"/>
           <p:cNvSpPr txBox="1"/>
           <p:nvPr/>
         </p:nvSpPr>
         <p:spPr>
           <a:xfrm>
-            <a:off x="7315200" y="2240280"/>
-            <a:ext cx="1143000" cy="411480"/>
+            <a:off x="5852160" y="3685032"/>
+            <a:ext cx="1371600" cy="265176"/>
           </a:xfrm>
           <a:prstGeom prst="rect">
             <a:avLst/>
@@ -12336,39 +12521,39 @@
               <a:buNone/>
             </a:pPr>
             <a:r>
-              <a:rPr lang="en-US" sz="1300" dirty="0">
+              <a:rPr lang="en-US" sz="1100" dirty="0">
                 <a:solidFill>
                   <a:schemeClr val="tx1"/>
                 </a:solidFill>
               </a:rPr>
-              <a:t>首都圏</a:t>
-            </a:r>
-            <a:endParaRPr lang="en-US" sz="1300" dirty="0"/>
-          </a:p>
-        </p:txBody>
-      </p:sp>
-      <p:sp>
-        <p:nvSpPr>
-          <p:cNvPr id="14" name="area_4"/>
+              <a:t>東海</a:t>
+            </a:r>
+            <a:endParaRPr lang="en-US" sz="1100" dirty="0"/>
+          </a:p>
+        </p:txBody>
+      </p:sp>
+      <p:sp>
+        <p:nvSpPr>
+          <p:cNvPr id="16" name="area_5"/>
           <p:cNvSpPr/>
           <p:nvPr/>
         </p:nvSpPr>
         <p:spPr>
           <a:xfrm>
-            <a:off x="6035040" y="2788920"/>
-            <a:ext cx="1143000" cy="411480"/>
+            <a:off x="7315200" y="3685032"/>
+            <a:ext cx="1371600" cy="265176"/>
           </a:xfrm>
           <a:prstGeom prst="roundRect">
             <a:avLst>
-              <a:gd name="adj" fmla="val 13333"/>
+              <a:gd name="adj" fmla="val 17241"/>
             </a:avLst>
           </a:prstGeom>
           <a:solidFill>
-            <a:schemeClr val="bg1"/>
+            <a:schemeClr val="bg2"/>
           </a:solidFill>
           <a:ln w="12700">
             <a:solidFill>
-              <a:schemeClr val="accent4"/>
+              <a:schemeClr val="accent5"/>
             </a:solidFill>
             <a:prstDash val="solid"/>
           </a:ln>
@@ -12376,14 +12561,14 @@
       </p:sp>
       <p:sp>
         <p:nvSpPr>
-          <p:cNvPr id="15" name="Text 12"/>
+          <p:cNvPr id="17" name="Text 13"/>
           <p:cNvSpPr txBox="1"/>
           <p:nvPr/>
         </p:nvSpPr>
         <p:spPr>
           <a:xfrm>
-            <a:off x="6035040" y="2788920"/>
-            <a:ext cx="1143000" cy="411480"/>
+            <a:off x="7315200" y="3685032"/>
+            <a:ext cx="1371600" cy="265176"/>
           </a:xfrm>
           <a:prstGeom prst="rect">
             <a:avLst/>
@@ -12399,39 +12584,39 @@
               <a:buNone/>
             </a:pPr>
             <a:r>
-              <a:rPr lang="en-US" sz="1300" dirty="0">
+              <a:rPr lang="en-US" sz="1100" dirty="0">
                 <a:solidFill>
                   <a:schemeClr val="tx1"/>
                 </a:solidFill>
               </a:rPr>
-              <a:t>東海</a:t>
-            </a:r>
-            <a:endParaRPr lang="en-US" sz="1300" dirty="0"/>
-          </a:p>
-        </p:txBody>
-      </p:sp>
-      <p:sp>
-        <p:nvSpPr>
-          <p:cNvPr id="16" name="area_5"/>
+              <a:t>北陸</a:t>
+            </a:r>
+            <a:endParaRPr lang="en-US" sz="1100" dirty="0"/>
+          </a:p>
+        </p:txBody>
+      </p:sp>
+      <p:sp>
+        <p:nvSpPr>
+          <p:cNvPr id="18" name="area_6"/>
           <p:cNvSpPr/>
           <p:nvPr/>
         </p:nvSpPr>
         <p:spPr>
           <a:xfrm>
-            <a:off x="7315200" y="2788920"/>
-            <a:ext cx="1143000" cy="411480"/>
+            <a:off x="5852160" y="3995928"/>
+            <a:ext cx="1371600" cy="265176"/>
           </a:xfrm>
           <a:prstGeom prst="roundRect">
             <a:avLst>
-              <a:gd name="adj" fmla="val 13333"/>
+              <a:gd name="adj" fmla="val 17241"/>
             </a:avLst>
           </a:prstGeom>
           <a:solidFill>
-            <a:schemeClr val="bg1"/>
+            <a:schemeClr val="bg2"/>
           </a:solidFill>
           <a:ln w="12700">
             <a:solidFill>
-              <a:schemeClr val="accent4"/>
+              <a:schemeClr val="accent5"/>
             </a:solidFill>
             <a:prstDash val="solid"/>
           </a:ln>
@@ -12439,14 +12624,14 @@
       </p:sp>
       <p:sp>
         <p:nvSpPr>
-          <p:cNvPr id="17" name="Text 14"/>
+          <p:cNvPr id="19" name="Text 15"/>
           <p:cNvSpPr txBox="1"/>
           <p:nvPr/>
         </p:nvSpPr>
         <p:spPr>
           <a:xfrm>
-            <a:off x="7315200" y="2788920"/>
-            <a:ext cx="1143000" cy="411480"/>
+            <a:off x="5852160" y="3995928"/>
+            <a:ext cx="1371600" cy="265176"/>
           </a:xfrm>
           <a:prstGeom prst="rect">
             <a:avLst/>
@@ -12462,39 +12647,39 @@
               <a:buNone/>
             </a:pPr>
             <a:r>
-              <a:rPr lang="en-US" sz="1300" dirty="0">
+              <a:rPr lang="en-US" sz="1100" dirty="0">
                 <a:solidFill>
                   <a:schemeClr val="tx1"/>
                 </a:solidFill>
               </a:rPr>
-              <a:t>北陸</a:t>
-            </a:r>
-            <a:endParaRPr lang="en-US" sz="1300" dirty="0"/>
-          </a:p>
-        </p:txBody>
-      </p:sp>
-      <p:sp>
-        <p:nvSpPr>
-          <p:cNvPr id="18" name="area_6"/>
+              <a:t>関西</a:t>
+            </a:r>
+            <a:endParaRPr lang="en-US" sz="1100" dirty="0"/>
+          </a:p>
+        </p:txBody>
+      </p:sp>
+      <p:sp>
+        <p:nvSpPr>
+          <p:cNvPr id="20" name="area_7"/>
           <p:cNvSpPr/>
           <p:nvPr/>
         </p:nvSpPr>
         <p:spPr>
           <a:xfrm>
-            <a:off x="6035040" y="3337560"/>
-            <a:ext cx="1143000" cy="411480"/>
+            <a:off x="7315200" y="3995928"/>
+            <a:ext cx="1371600" cy="265176"/>
           </a:xfrm>
           <a:prstGeom prst="roundRect">
             <a:avLst>
-              <a:gd name="adj" fmla="val 13333"/>
+              <a:gd name="adj" fmla="val 17241"/>
             </a:avLst>
           </a:prstGeom>
           <a:solidFill>
-            <a:schemeClr val="bg1"/>
+            <a:schemeClr val="bg2"/>
           </a:solidFill>
           <a:ln w="12700">
             <a:solidFill>
-              <a:schemeClr val="accent4"/>
+              <a:schemeClr val="accent5"/>
             </a:solidFill>
             <a:prstDash val="solid"/>
           </a:ln>
@@ -12502,14 +12687,14 @@
       </p:sp>
       <p:sp>
         <p:nvSpPr>
-          <p:cNvPr id="19" name="Text 16"/>
+          <p:cNvPr id="21" name="Text 17"/>
           <p:cNvSpPr txBox="1"/>
           <p:nvPr/>
         </p:nvSpPr>
         <p:spPr>
           <a:xfrm>
-            <a:off x="6035040" y="3337560"/>
-            <a:ext cx="1143000" cy="411480"/>
+            <a:off x="7315200" y="3995928"/>
+            <a:ext cx="1371600" cy="265176"/>
           </a:xfrm>
           <a:prstGeom prst="rect">
             <a:avLst/>
@@ -12525,39 +12710,39 @@
               <a:buNone/>
             </a:pPr>
             <a:r>
-              <a:rPr lang="en-US" sz="1300" dirty="0">
+              <a:rPr lang="en-US" sz="1100" dirty="0">
                 <a:solidFill>
                   <a:schemeClr val="tx1"/>
                 </a:solidFill>
               </a:rPr>
-              <a:t>関西</a:t>
-            </a:r>
-            <a:endParaRPr lang="en-US" sz="1300" dirty="0"/>
-          </a:p>
-        </p:txBody>
-      </p:sp>
-      <p:sp>
-        <p:nvSpPr>
-          <p:cNvPr id="20" name="area_7"/>
+              <a:t>中国</a:t>
+            </a:r>
+            <a:endParaRPr lang="en-US" sz="1100" dirty="0"/>
+          </a:p>
+        </p:txBody>
+      </p:sp>
+      <p:sp>
+        <p:nvSpPr>
+          <p:cNvPr id="22" name="area_8"/>
           <p:cNvSpPr/>
           <p:nvPr/>
         </p:nvSpPr>
         <p:spPr>
           <a:xfrm>
-            <a:off x="7315200" y="3337560"/>
-            <a:ext cx="1143000" cy="411480"/>
+            <a:off x="5852160" y="4306824"/>
+            <a:ext cx="1371600" cy="265176"/>
           </a:xfrm>
           <a:prstGeom prst="roundRect">
             <a:avLst>
-              <a:gd name="adj" fmla="val 13333"/>
+              <a:gd name="adj" fmla="val 17241"/>
             </a:avLst>
           </a:prstGeom>
           <a:solidFill>
-            <a:schemeClr val="bg1"/>
+            <a:schemeClr val="bg2"/>
           </a:solidFill>
           <a:ln w="12700">
             <a:solidFill>
-              <a:schemeClr val="accent4"/>
+              <a:schemeClr val="accent5"/>
             </a:solidFill>
             <a:prstDash val="solid"/>
           </a:ln>
@@ -12565,14 +12750,14 @@
       </p:sp>
       <p:sp>
         <p:nvSpPr>
-          <p:cNvPr id="21" name="Text 18"/>
+          <p:cNvPr id="23" name="Text 19"/>
           <p:cNvSpPr txBox="1"/>
           <p:nvPr/>
         </p:nvSpPr>
         <p:spPr>
           <a:xfrm>
-            <a:off x="7315200" y="3337560"/>
-            <a:ext cx="1143000" cy="411480"/>
+            <a:off x="5852160" y="4306824"/>
+            <a:ext cx="1371600" cy="265176"/>
           </a:xfrm>
           <a:prstGeom prst="rect">
             <a:avLst/>
@@ -12588,39 +12773,39 @@
               <a:buNone/>
             </a:pPr>
             <a:r>
-              <a:rPr lang="en-US" sz="1300" dirty="0">
+              <a:rPr lang="en-US" sz="1100" dirty="0">
                 <a:solidFill>
                   <a:schemeClr val="tx1"/>
                 </a:solidFill>
               </a:rPr>
-              <a:t>中国</a:t>
-            </a:r>
-            <a:endParaRPr lang="en-US" sz="1300" dirty="0"/>
-          </a:p>
-        </p:txBody>
-      </p:sp>
-      <p:sp>
-        <p:nvSpPr>
-          <p:cNvPr id="22" name="area_8"/>
+              <a:t>四国</a:t>
+            </a:r>
+            <a:endParaRPr lang="en-US" sz="1100" dirty="0"/>
+          </a:p>
+        </p:txBody>
+      </p:sp>
+      <p:sp>
+        <p:nvSpPr>
+          <p:cNvPr id="24" name="area_9"/>
           <p:cNvSpPr/>
           <p:nvPr/>
         </p:nvSpPr>
         <p:spPr>
           <a:xfrm>
-            <a:off x="6035040" y="3886200"/>
-            <a:ext cx="1143000" cy="411480"/>
+            <a:off x="7315200" y="4306824"/>
+            <a:ext cx="1371600" cy="265176"/>
           </a:xfrm>
           <a:prstGeom prst="roundRect">
             <a:avLst>
-              <a:gd name="adj" fmla="val 13333"/>
+              <a:gd name="adj" fmla="val 17241"/>
             </a:avLst>
           </a:prstGeom>
           <a:solidFill>
-            <a:schemeClr val="bg1"/>
+            <a:schemeClr val="bg2"/>
           </a:solidFill>
           <a:ln w="12700">
             <a:solidFill>
-              <a:schemeClr val="accent4"/>
+              <a:schemeClr val="accent5"/>
             </a:solidFill>
             <a:prstDash val="solid"/>
           </a:ln>
@@ -12628,14 +12813,14 @@
       </p:sp>
       <p:sp>
         <p:nvSpPr>
-          <p:cNvPr id="23" name="Text 20"/>
+          <p:cNvPr id="25" name="Text 21"/>
           <p:cNvSpPr txBox="1"/>
           <p:nvPr/>
         </p:nvSpPr>
         <p:spPr>
           <a:xfrm>
-            <a:off x="6035040" y="3886200"/>
-            <a:ext cx="1143000" cy="411480"/>
+            <a:off x="7315200" y="4306824"/>
+            <a:ext cx="1371600" cy="265176"/>
           </a:xfrm>
           <a:prstGeom prst="rect">
             <a:avLst/>
@@ -12651,77 +12836,14 @@
               <a:buNone/>
             </a:pPr>
             <a:r>
-              <a:rPr lang="en-US" sz="1300" dirty="0">
+              <a:rPr lang="en-US" sz="1100" dirty="0">
                 <a:solidFill>
                   <a:schemeClr val="tx1"/>
                 </a:solidFill>
               </a:rPr>
-              <a:t>四国</a:t>
-            </a:r>
-            <a:endParaRPr lang="en-US" sz="1300" dirty="0"/>
-          </a:p>
-        </p:txBody>
-      </p:sp>
-      <p:sp>
-        <p:nvSpPr>
-          <p:cNvPr id="24" name="area_9"/>
-          <p:cNvSpPr/>
-          <p:nvPr/>
-        </p:nvSpPr>
-        <p:spPr>
-          <a:xfrm>
-            <a:off x="7315200" y="3886200"/>
-            <a:ext cx="1143000" cy="411480"/>
-          </a:xfrm>
-          <a:prstGeom prst="roundRect">
-            <a:avLst>
-              <a:gd name="adj" fmla="val 13333"/>
-            </a:avLst>
-          </a:prstGeom>
-          <a:solidFill>
-            <a:schemeClr val="bg1"/>
-          </a:solidFill>
-          <a:ln w="12700">
-            <a:solidFill>
-              <a:schemeClr val="accent4"/>
-            </a:solidFill>
-            <a:prstDash val="solid"/>
-          </a:ln>
-        </p:spPr>
-      </p:sp>
-      <p:sp>
-        <p:nvSpPr>
-          <p:cNvPr id="25" name="Text 22"/>
-          <p:cNvSpPr txBox="1"/>
-          <p:nvPr/>
-        </p:nvSpPr>
-        <p:spPr>
-          <a:xfrm>
-            <a:off x="7315200" y="3886200"/>
-            <a:ext cx="1143000" cy="411480"/>
-          </a:xfrm>
-          <a:prstGeom prst="rect">
-            <a:avLst/>
-          </a:prstGeom>
-          <a:noFill/>
-          <a:ln/>
-        </p:spPr>
-        <p:txBody>
-          <a:bodyPr wrap="square" lIns="0" tIns="0" rIns="0" bIns="0" rtlCol="0" anchor="ctr"/>
-          <a:lstStyle/>
-          <a:p>
-            <a:pPr algn="ctr" indent="0" marL="0">
-              <a:buNone/>
-            </a:pPr>
-            <a:r>
-              <a:rPr lang="en-US" sz="1300" dirty="0">
-                <a:solidFill>
-                  <a:schemeClr val="tx1"/>
-                </a:solidFill>
-              </a:rPr>
               <a:t>九州</a:t>
             </a:r>
-            <a:endParaRPr lang="en-US" sz="1300" dirty="0"/>
+            <a:endParaRPr lang="en-US" sz="1100" dirty="0"/>
           </a:p>
         </p:txBody>
       </p:sp>
@@ -12877,8 +12999,8 @@
         </p:nvSpPr>
         <p:spPr>
           <a:xfrm>
-            <a:off x="457200" y="1600200"/>
-            <a:ext cx="2606040" cy="2926080"/>
+            <a:off x="457200" y="1508760"/>
+            <a:ext cx="2606040" cy="3108960"/>
           </a:xfrm>
           <a:prstGeom prst="roundRect">
             <a:avLst>
@@ -12896,16 +13018,39 @@
           </a:ln>
         </p:spPr>
       </p:sp>
-      <p:sp>
-        <p:nvSpPr>
-          <p:cNvPr id="5" name="goal_badge_1"/>
+      <p:pic>
+        <p:nvPicPr>
+          <p:cNvPr id="5" name="goal_img_1" descr="家族連れが自然に集まるのイラスト">    </p:cNvPr>
+          <p:cNvPicPr>
+            <a:picLocks noChangeAspect="1"/>
+          </p:cNvPicPr>
+          <p:nvPr/>
+        </p:nvPicPr>
+        <p:blipFill>
+          <a:blip r:embed="rId1"/>
+          <a:srcRect l="0" r="0" t="0" b="0"/>
+          <a:stretch/>
+        </p:blipFill>
+        <p:spPr>
+          <a:xfrm>
+            <a:off x="548640" y="1600200"/>
+            <a:ext cx="2423160" cy="1325880"/>
+          </a:xfrm>
+          <a:prstGeom prst="rect">
+            <a:avLst/>
+          </a:prstGeom>
+        </p:spPr>
+      </p:pic>
+      <p:sp>
+        <p:nvSpPr>
+          <p:cNvPr id="6" name="goal_badge_1"/>
           <p:cNvSpPr/>
           <p:nvPr/>
         </p:nvSpPr>
         <p:spPr>
           <a:xfrm>
-            <a:off x="640080" y="1783080"/>
-            <a:ext cx="548640" cy="548640"/>
+            <a:off x="594360" y="3035808"/>
+            <a:ext cx="457200" cy="457200"/>
           </a:xfrm>
           <a:prstGeom prst="ellipse">
             <a:avLst/>
@@ -12923,14 +13068,14 @@
       </p:sp>
       <p:sp>
         <p:nvSpPr>
-          <p:cNvPr id="6" name="Text 4"/>
+          <p:cNvPr id="7" name="Text 4"/>
           <p:cNvSpPr txBox="1"/>
           <p:nvPr/>
         </p:nvSpPr>
         <p:spPr>
           <a:xfrm>
-            <a:off x="640080" y="1783080"/>
-            <a:ext cx="548640" cy="548640"/>
+            <a:off x="594360" y="3035808"/>
+            <a:ext cx="457200" cy="457200"/>
           </a:xfrm>
           <a:prstGeom prst="rect">
             <a:avLst/>
@@ -12959,14 +13104,14 @@
       </p:sp>
       <p:sp>
         <p:nvSpPr>
-          <p:cNvPr id="7" name="Text 5"/>
+          <p:cNvPr id="8" name="Text 5"/>
           <p:cNvSpPr txBox="1"/>
           <p:nvPr/>
         </p:nvSpPr>
         <p:spPr>
           <a:xfrm>
-            <a:off x="1325880" y="1737360"/>
-            <a:ext cx="1645920" cy="685800"/>
+            <a:off x="1143000" y="2990088"/>
+            <a:ext cx="1828800" cy="548640"/>
           </a:xfrm>
           <a:prstGeom prst="rect">
             <a:avLst/>
@@ -12982,41 +13127,41 @@
               <a:buNone/>
             </a:pPr>
             <a:r>
-              <a:rPr lang="en-US" sz="1500" b="1" dirty="0">
+              <a:rPr lang="en-US" sz="1400" b="1" dirty="0">
                 <a:solidFill>
                   <a:schemeClr val="tx2"/>
                 </a:solidFill>
               </a:rPr>
               <a:t>家族連れが</a:t>
             </a:r>
-            <a:endParaRPr lang="en-US" sz="1500" dirty="0"/>
+            <a:endParaRPr lang="en-US" sz="1400" dirty="0"/>
           </a:p>
           <a:p>
             <a:pPr indent="0" marL="0">
               <a:buNone/>
             </a:pPr>
             <a:r>
-              <a:rPr lang="en-US" sz="1500" b="1" dirty="0">
+              <a:rPr lang="en-US" sz="1400" b="1" dirty="0">
                 <a:solidFill>
                   <a:schemeClr val="tx2"/>
                 </a:solidFill>
               </a:rPr>
               <a:t>自然に集まる</a:t>
             </a:r>
-            <a:endParaRPr lang="en-US" sz="1500" dirty="0"/>
-          </a:p>
-        </p:txBody>
-      </p:sp>
-      <p:sp>
-        <p:nvSpPr>
-          <p:cNvPr id="8" name="Text 6"/>
+            <a:endParaRPr lang="en-US" sz="1400" dirty="0"/>
+          </a:p>
+        </p:txBody>
+      </p:sp>
+      <p:sp>
+        <p:nvSpPr>
+          <p:cNvPr id="9" name="Text 6"/>
           <p:cNvSpPr txBox="1"/>
           <p:nvPr/>
         </p:nvSpPr>
         <p:spPr>
           <a:xfrm>
-            <a:off x="640080" y="2606040"/>
-            <a:ext cx="2286000" cy="1737360"/>
+            <a:off x="594360" y="3611880"/>
+            <a:ext cx="2331720" cy="960120"/>
           </a:xfrm>
           <a:prstGeom prst="rect">
             <a:avLst/>
@@ -13032,27 +13177,27 @@
               <a:buNone/>
             </a:pPr>
             <a:r>
-              <a:rPr lang="en-US" sz="1300" dirty="0">
+              <a:rPr lang="en-US" sz="1100" dirty="0">
                 <a:solidFill>
                   <a:schemeClr val="tx1"/>
                 </a:solidFill>
               </a:rPr>
               <a:t>クリスマスアーチ＋コスプレ＋B0ボードPOPで、通行中のファミリー層をブースへ誘導。</a:t>
             </a:r>
-            <a:endParaRPr lang="en-US" sz="1300" dirty="0"/>
-          </a:p>
-        </p:txBody>
-      </p:sp>
-      <p:sp>
-        <p:nvSpPr>
-          <p:cNvPr id="9" name="goal_2"/>
+            <a:endParaRPr lang="en-US" sz="1100" dirty="0"/>
+          </a:p>
+        </p:txBody>
+      </p:sp>
+      <p:sp>
+        <p:nvSpPr>
+          <p:cNvPr id="10" name="goal_2"/>
           <p:cNvSpPr/>
           <p:nvPr/>
         </p:nvSpPr>
         <p:spPr>
           <a:xfrm>
-            <a:off x="3246120" y="1600200"/>
-            <a:ext cx="2606040" cy="2926080"/>
+            <a:off x="3246120" y="1508760"/>
+            <a:ext cx="2606040" cy="3108960"/>
           </a:xfrm>
           <a:prstGeom prst="roundRect">
             <a:avLst>
@@ -13070,16 +13215,39 @@
           </a:ln>
         </p:spPr>
       </p:sp>
-      <p:sp>
-        <p:nvSpPr>
-          <p:cNvPr id="10" name="goal_badge_2"/>
+      <p:pic>
+        <p:nvPicPr>
+          <p:cNvPr id="11" name="goal_img_2" descr="毎週ちがう作品で再来店のイラスト">    </p:cNvPr>
+          <p:cNvPicPr>
+            <a:picLocks noChangeAspect="1"/>
+          </p:cNvPicPr>
+          <p:nvPr/>
+        </p:nvPicPr>
+        <p:blipFill>
+          <a:blip r:embed="rId2"/>
+          <a:srcRect l="0" r="0" t="0" b="0"/>
+          <a:stretch/>
+        </p:blipFill>
+        <p:spPr>
+          <a:xfrm>
+            <a:off x="3337560" y="1600200"/>
+            <a:ext cx="2423160" cy="1325880"/>
+          </a:xfrm>
+          <a:prstGeom prst="rect">
+            <a:avLst/>
+          </a:prstGeom>
+        </p:spPr>
+      </p:pic>
+      <p:sp>
+        <p:nvSpPr>
+          <p:cNvPr id="12" name="goal_badge_2"/>
           <p:cNvSpPr/>
           <p:nvPr/>
         </p:nvSpPr>
         <p:spPr>
           <a:xfrm>
-            <a:off x="3429000" y="1783080"/>
-            <a:ext cx="548640" cy="548640"/>
+            <a:off x="3383280" y="3035808"/>
+            <a:ext cx="457200" cy="457200"/>
           </a:xfrm>
           <a:prstGeom prst="ellipse">
             <a:avLst/>
@@ -13097,14 +13265,14 @@
       </p:sp>
       <p:sp>
         <p:nvSpPr>
-          <p:cNvPr id="11" name="Text 9"/>
+          <p:cNvPr id="13" name="Text 9"/>
           <p:cNvSpPr txBox="1"/>
           <p:nvPr/>
         </p:nvSpPr>
         <p:spPr>
           <a:xfrm>
-            <a:off x="3429000" y="1783080"/>
-            <a:ext cx="548640" cy="548640"/>
+            <a:off x="3383280" y="3035808"/>
+            <a:ext cx="457200" cy="457200"/>
           </a:xfrm>
           <a:prstGeom prst="rect">
             <a:avLst/>
@@ -13133,14 +13301,14 @@
       </p:sp>
       <p:sp>
         <p:nvSpPr>
-          <p:cNvPr id="12" name="Text 10"/>
+          <p:cNvPr id="14" name="Text 10"/>
           <p:cNvSpPr txBox="1"/>
           <p:nvPr/>
         </p:nvSpPr>
         <p:spPr>
           <a:xfrm>
-            <a:off x="4114800" y="1737360"/>
-            <a:ext cx="1645920" cy="685800"/>
+            <a:off x="3931920" y="2990088"/>
+            <a:ext cx="1828800" cy="548640"/>
           </a:xfrm>
           <a:prstGeom prst="rect">
             <a:avLst/>
@@ -13156,41 +13324,41 @@
               <a:buNone/>
             </a:pPr>
             <a:r>
-              <a:rPr lang="en-US" sz="1500" b="1" dirty="0">
+              <a:rPr lang="en-US" sz="1400" b="1" dirty="0">
                 <a:solidFill>
                   <a:schemeClr val="tx2"/>
                 </a:solidFill>
               </a:rPr>
               <a:t>毎週ちがう</a:t>
             </a:r>
-            <a:endParaRPr lang="en-US" sz="1500" dirty="0"/>
+            <a:endParaRPr lang="en-US" sz="1400" dirty="0"/>
           </a:p>
           <a:p>
             <a:pPr indent="0" marL="0">
               <a:buNone/>
             </a:pPr>
             <a:r>
-              <a:rPr lang="en-US" sz="1500" b="1" dirty="0">
+              <a:rPr lang="en-US" sz="1400" b="1" dirty="0">
                 <a:solidFill>
                   <a:schemeClr val="tx2"/>
                 </a:solidFill>
               </a:rPr>
               <a:t>作品で再来店</a:t>
             </a:r>
-            <a:endParaRPr lang="en-US" sz="1500" dirty="0"/>
-          </a:p>
-        </p:txBody>
-      </p:sp>
-      <p:sp>
-        <p:nvSpPr>
-          <p:cNvPr id="13" name="Text 11"/>
+            <a:endParaRPr lang="en-US" sz="1400" dirty="0"/>
+          </a:p>
+        </p:txBody>
+      </p:sp>
+      <p:sp>
+        <p:nvSpPr>
+          <p:cNvPr id="15" name="Text 11"/>
           <p:cNvSpPr txBox="1"/>
           <p:nvPr/>
         </p:nvSpPr>
         <p:spPr>
           <a:xfrm>
-            <a:off x="3429000" y="2606040"/>
-            <a:ext cx="2286000" cy="1737360"/>
+            <a:off x="3383280" y="3611880"/>
+            <a:ext cx="2331720" cy="960120"/>
           </a:xfrm>
           <a:prstGeom prst="rect">
             <a:avLst/>
@@ -13206,27 +13374,27 @@
               <a:buNone/>
             </a:pPr>
             <a:r>
-              <a:rPr lang="en-US" sz="1300" dirty="0">
+              <a:rPr lang="en-US" sz="1100" dirty="0">
                 <a:solidFill>
                   <a:schemeClr val="tx1"/>
                 </a:solidFill>
               </a:rPr>
               <a:t>スノードームとスクイーズを週替わりで。型・モチーフも変え、4週連続の来店動機に。</a:t>
             </a:r>
-            <a:endParaRPr lang="en-US" sz="1300" dirty="0"/>
-          </a:p>
-        </p:txBody>
-      </p:sp>
-      <p:sp>
-        <p:nvSpPr>
-          <p:cNvPr id="14" name="goal_3"/>
+            <a:endParaRPr lang="en-US" sz="1100" dirty="0"/>
+          </a:p>
+        </p:txBody>
+      </p:sp>
+      <p:sp>
+        <p:nvSpPr>
+          <p:cNvPr id="16" name="goal_3"/>
           <p:cNvSpPr/>
           <p:nvPr/>
         </p:nvSpPr>
         <p:spPr>
           <a:xfrm>
-            <a:off x="6035040" y="1600200"/>
-            <a:ext cx="2606040" cy="2926080"/>
+            <a:off x="6035040" y="1508760"/>
+            <a:ext cx="2606040" cy="3108960"/>
           </a:xfrm>
           <a:prstGeom prst="roundRect">
             <a:avLst>
@@ -13244,16 +13412,39 @@
           </a:ln>
         </p:spPr>
       </p:sp>
-      <p:sp>
-        <p:nvSpPr>
-          <p:cNvPr id="15" name="goal_badge_3"/>
+      <p:pic>
+        <p:nvPicPr>
+          <p:cNvPr id="17" name="goal_img_3" descr="親子分離で商談機会を創出のイラスト">    </p:cNvPr>
+          <p:cNvPicPr>
+            <a:picLocks noChangeAspect="1"/>
+          </p:cNvPicPr>
+          <p:nvPr/>
+        </p:nvPicPr>
+        <p:blipFill>
+          <a:blip r:embed="rId3"/>
+          <a:srcRect l="0" r="0" t="0" b="0"/>
+          <a:stretch/>
+        </p:blipFill>
+        <p:spPr>
+          <a:xfrm>
+            <a:off x="6126480" y="1600200"/>
+            <a:ext cx="2423160" cy="1325880"/>
+          </a:xfrm>
+          <a:prstGeom prst="rect">
+            <a:avLst/>
+          </a:prstGeom>
+        </p:spPr>
+      </p:pic>
+      <p:sp>
+        <p:nvSpPr>
+          <p:cNvPr id="18" name="goal_badge_3"/>
           <p:cNvSpPr/>
           <p:nvPr/>
         </p:nvSpPr>
         <p:spPr>
           <a:xfrm>
-            <a:off x="6217920" y="1783080"/>
-            <a:ext cx="548640" cy="548640"/>
+            <a:off x="6172200" y="3035808"/>
+            <a:ext cx="457200" cy="457200"/>
           </a:xfrm>
           <a:prstGeom prst="ellipse">
             <a:avLst/>
@@ -13271,14 +13462,14 @@
       </p:sp>
       <p:sp>
         <p:nvSpPr>
-          <p:cNvPr id="16" name="Text 14"/>
+          <p:cNvPr id="19" name="Text 14"/>
           <p:cNvSpPr txBox="1"/>
           <p:nvPr/>
         </p:nvSpPr>
         <p:spPr>
           <a:xfrm>
-            <a:off x="6217920" y="1783080"/>
-            <a:ext cx="548640" cy="548640"/>
+            <a:off x="6172200" y="3035808"/>
+            <a:ext cx="457200" cy="457200"/>
           </a:xfrm>
           <a:prstGeom prst="rect">
             <a:avLst/>
@@ -13307,14 +13498,14 @@
       </p:sp>
       <p:sp>
         <p:nvSpPr>
-          <p:cNvPr id="17" name="Text 15"/>
+          <p:cNvPr id="20" name="Text 15"/>
           <p:cNvSpPr txBox="1"/>
           <p:nvPr/>
         </p:nvSpPr>
         <p:spPr>
           <a:xfrm>
-            <a:off x="6903720" y="1737360"/>
-            <a:ext cx="1645920" cy="685800"/>
+            <a:off x="6720840" y="2990088"/>
+            <a:ext cx="1828800" cy="548640"/>
           </a:xfrm>
           <a:prstGeom prst="rect">
             <a:avLst/>
@@ -13330,41 +13521,41 @@
               <a:buNone/>
             </a:pPr>
             <a:r>
-              <a:rPr lang="en-US" sz="1500" b="1" dirty="0">
+              <a:rPr lang="en-US" sz="1400" b="1" dirty="0">
                 <a:solidFill>
                   <a:schemeClr val="tx2"/>
                 </a:solidFill>
               </a:rPr>
               <a:t>親子分離で</a:t>
             </a:r>
-            <a:endParaRPr lang="en-US" sz="1500" dirty="0"/>
+            <a:endParaRPr lang="en-US" sz="1400" dirty="0"/>
           </a:p>
           <a:p>
             <a:pPr indent="0" marL="0">
               <a:buNone/>
             </a:pPr>
             <a:r>
-              <a:rPr lang="en-US" sz="1500" b="1" dirty="0">
+              <a:rPr lang="en-US" sz="1400" b="1" dirty="0">
                 <a:solidFill>
                   <a:schemeClr val="tx2"/>
                 </a:solidFill>
               </a:rPr>
               <a:t>商談機会を創出</a:t>
             </a:r>
-            <a:endParaRPr lang="en-US" sz="1500" dirty="0"/>
-          </a:p>
-        </p:txBody>
-      </p:sp>
-      <p:sp>
-        <p:nvSpPr>
-          <p:cNvPr id="18" name="Text 16"/>
+            <a:endParaRPr lang="en-US" sz="1400" dirty="0"/>
+          </a:p>
+        </p:txBody>
+      </p:sp>
+      <p:sp>
+        <p:nvSpPr>
+          <p:cNvPr id="21" name="Text 16"/>
           <p:cNvSpPr txBox="1"/>
           <p:nvPr/>
         </p:nvSpPr>
         <p:spPr>
           <a:xfrm>
-            <a:off x="6217920" y="2606040"/>
-            <a:ext cx="2286000" cy="1737360"/>
+            <a:off x="6172200" y="3611880"/>
+            <a:ext cx="2331720" cy="960120"/>
           </a:xfrm>
           <a:prstGeom prst="rect">
             <a:avLst/>
@@ -13380,14 +13571,14 @@
               <a:buNone/>
             </a:pPr>
             <a:r>
-              <a:rPr lang="en-US" sz="1300" dirty="0">
+              <a:rPr lang="en-US" sz="1100" dirty="0">
                 <a:solidFill>
                   <a:schemeClr val="tx1"/>
                 </a:solidFill>
               </a:rPr>
               <a:t>お子様は約20分の制作に集中。その間に保護者様をカウンターへご案内できます。</a:t>
             </a:r>
-            <a:endParaRPr lang="en-US" sz="1300" dirty="0"/>
+            <a:endParaRPr lang="en-US" sz="1100" dirty="0"/>
           </a:p>
         </p:txBody>
       </p:sp>
@@ -13499,20 +13690,80 @@
           </a:p>
         </p:txBody>
       </p:sp>
-      <p:sp>
-        <p:nvSpPr>
-          <p:cNvPr id="3" name="part_0"/>
+      <p:pic>
+        <p:nvPicPr>
+          <p:cNvPr id="3" name="img_store_scene" descr="店頭ブースの完成イメージ">    </p:cNvPr>
+          <p:cNvPicPr>
+            <a:picLocks noChangeAspect="1"/>
+          </p:cNvPicPr>
+          <p:nvPr/>
+        </p:nvPicPr>
+        <p:blipFill>
+          <a:blip r:embed="rId1"/>
+          <a:stretch>
+            <a:fillRect/>
+          </a:stretch>
+        </p:blipFill>
+        <p:spPr>
+          <a:xfrm>
+            <a:off x="457200" y="960120"/>
+            <a:ext cx="3611880" cy="3611880"/>
+          </a:xfrm>
+          <a:prstGeom prst="rect">
+            <a:avLst/>
+          </a:prstGeom>
+        </p:spPr>
+      </p:pic>
+      <p:sp>
+        <p:nvSpPr>
+          <p:cNvPr id="4" name="Text 1"/>
+          <p:cNvSpPr txBox="1"/>
+          <p:nvPr/>
+        </p:nvSpPr>
+        <p:spPr>
+          <a:xfrm>
+            <a:off x="457200" y="4572000"/>
+            <a:ext cx="3611880" cy="201168"/>
+          </a:xfrm>
+          <a:prstGeom prst="rect">
+            <a:avLst/>
+          </a:prstGeom>
+          <a:noFill/>
+          <a:ln/>
+        </p:spPr>
+        <p:txBody>
+          <a:bodyPr wrap="square" lIns="635" tIns="635" rIns="635" bIns="635" rtlCol="0" anchor="t"/>
+          <a:lstStyle/>
+          <a:p>
+            <a:pPr indent="0" marL="0">
+              <a:buNone/>
+            </a:pPr>
+            <a:r>
+              <a:rPr lang="en-US" sz="900" dirty="0">
+                <a:solidFill>
+                  <a:schemeClr val="accent4"/>
+                </a:solidFill>
+              </a:rPr>
+              <a:t>店頭ブースの完成イメージ</a:t>
+            </a:r>
+            <a:endParaRPr lang="en-US" sz="900" dirty="0"/>
+          </a:p>
+        </p:txBody>
+      </p:sp>
+      <p:sp>
+        <p:nvSpPr>
+          <p:cNvPr id="5" name="part_0"/>
           <p:cNvSpPr/>
           <p:nvPr/>
         </p:nvSpPr>
         <p:spPr>
           <a:xfrm>
-            <a:off x="457200" y="1051560"/>
-            <a:ext cx="2606040" cy="1600200"/>
+            <a:off x="4297680" y="960120"/>
+            <a:ext cx="4389120" cy="548640"/>
           </a:xfrm>
           <a:prstGeom prst="roundRect">
             <a:avLst>
-              <a:gd name="adj" fmla="val 4571"/>
+              <a:gd name="adj" fmla="val 13333"/>
             </a:avLst>
           </a:prstGeom>
           <a:solidFill>
@@ -13526,167 +13777,115 @@
           </a:ln>
         </p:spPr>
       </p:sp>
-      <p:sp>
-        <p:nvSpPr>
-          <p:cNvPr id="4" name="part_badge_0"/>
+      <p:pic>
+        <p:nvPicPr>
+          <p:cNvPr id="6" name="part_img_0" descr="WSキット">    </p:cNvPr>
+          <p:cNvPicPr>
+            <a:picLocks noChangeAspect="1"/>
+          </p:cNvPicPr>
+          <p:nvPr/>
+        </p:nvPicPr>
+        <p:blipFill>
+          <a:blip r:embed="rId2"/>
+          <a:srcRect l="0" r="0" t="0" b="0"/>
+          <a:stretch/>
+        </p:blipFill>
+        <p:spPr>
+          <a:xfrm>
+            <a:off x="4352544" y="1005840"/>
+            <a:ext cx="457200" cy="457200"/>
+          </a:xfrm>
+          <a:prstGeom prst="rect">
+            <a:avLst/>
+          </a:prstGeom>
+        </p:spPr>
+      </p:pic>
+      <p:sp>
+        <p:nvSpPr>
+          <p:cNvPr id="7" name="Text 3"/>
+          <p:cNvSpPr txBox="1"/>
+          <p:nvPr/>
+        </p:nvSpPr>
+        <p:spPr>
+          <a:xfrm>
+            <a:off x="4937760" y="987552"/>
+            <a:ext cx="3657600" cy="256032"/>
+          </a:xfrm>
+          <a:prstGeom prst="rect">
+            <a:avLst/>
+          </a:prstGeom>
+          <a:noFill/>
+          <a:ln/>
+        </p:spPr>
+        <p:txBody>
+          <a:bodyPr wrap="square" lIns="0" tIns="0" rIns="0" bIns="0" rtlCol="0" anchor="t"/>
+          <a:lstStyle/>
+          <a:p>
+            <a:pPr indent="0" marL="0">
+              <a:buNone/>
+            </a:pPr>
+            <a:r>
+              <a:rPr lang="en-US" sz="1300" b="1" dirty="0">
+                <a:solidFill>
+                  <a:schemeClr val="tx2"/>
+                </a:solidFill>
+              </a:rPr>
+              <a:t>WSキット</a:t>
+            </a:r>
+            <a:endParaRPr lang="en-US" sz="1300" dirty="0"/>
+          </a:p>
+        </p:txBody>
+      </p:sp>
+      <p:sp>
+        <p:nvSpPr>
+          <p:cNvPr id="8" name="Text 4"/>
+          <p:cNvSpPr txBox="1"/>
+          <p:nvPr/>
+        </p:nvSpPr>
+        <p:spPr>
+          <a:xfrm>
+            <a:off x="4937760" y="1243584"/>
+            <a:ext cx="3657600" cy="237744"/>
+          </a:xfrm>
+          <a:prstGeom prst="rect">
+            <a:avLst/>
+          </a:prstGeom>
+          <a:noFill/>
+          <a:ln/>
+        </p:spPr>
+        <p:txBody>
+          <a:bodyPr wrap="square" lIns="0" tIns="0" rIns="0" bIns="0" rtlCol="0" anchor="t"/>
+          <a:lstStyle/>
+          <a:p>
+            <a:pPr indent="0" marL="0">
+              <a:buNone/>
+            </a:pPr>
+            <a:r>
+              <a:rPr lang="en-US" sz="1000" dirty="0">
+                <a:solidFill>
+                  <a:schemeClr val="tx1"/>
+                </a:solidFill>
+              </a:rPr>
+              <a:t>1週に1種類（スノードーム週／スクイーズ週）</a:t>
+            </a:r>
+            <a:endParaRPr lang="en-US" sz="1000" dirty="0"/>
+          </a:p>
+        </p:txBody>
+      </p:sp>
+      <p:sp>
+        <p:nvSpPr>
+          <p:cNvPr id="9" name="part_1"/>
           <p:cNvSpPr/>
           <p:nvPr/>
         </p:nvSpPr>
         <p:spPr>
           <a:xfrm>
-            <a:off x="640080" y="1234440"/>
-            <a:ext cx="502920" cy="502920"/>
-          </a:xfrm>
-          <a:prstGeom prst="ellipse">
-            <a:avLst/>
-          </a:prstGeom>
-          <a:solidFill>
-            <a:schemeClr val="accent1"/>
-          </a:solidFill>
-          <a:ln w="12700">
-            <a:solidFill>
-              <a:schemeClr val="accent1"/>
-            </a:solidFill>
-            <a:prstDash val="solid"/>
-          </a:ln>
-        </p:spPr>
-      </p:sp>
-      <p:sp>
-        <p:nvSpPr>
-          <p:cNvPr id="5" name="Text 3"/>
-          <p:cNvSpPr txBox="1"/>
-          <p:nvPr/>
-        </p:nvSpPr>
-        <p:spPr>
-          <a:xfrm>
-            <a:off x="640080" y="1234440"/>
-            <a:ext cx="502920" cy="502920"/>
-          </a:xfrm>
-          <a:prstGeom prst="rect">
-            <a:avLst/>
-          </a:prstGeom>
-          <a:noFill/>
-          <a:ln/>
-        </p:spPr>
-        <p:txBody>
-          <a:bodyPr wrap="square" lIns="0" tIns="0" rIns="0" bIns="0" rtlCol="0" anchor="ctr"/>
-          <a:lstStyle/>
-          <a:p>
-            <a:pPr algn="ctr" indent="0" marL="0">
-              <a:buNone/>
-            </a:pPr>
-            <a:r>
-              <a:rPr lang="en-US" sz="1300" b="1" dirty="0">
-                <a:solidFill>
-                  <a:schemeClr val="bg1"/>
-                </a:solidFill>
-              </a:rPr>
-              <a:t>WS</a:t>
-            </a:r>
-            <a:endParaRPr lang="en-US" sz="1300" dirty="0"/>
-          </a:p>
-        </p:txBody>
-      </p:sp>
-      <p:sp>
-        <p:nvSpPr>
-          <p:cNvPr id="6" name="Text 4"/>
-          <p:cNvSpPr txBox="1"/>
-          <p:nvPr/>
-        </p:nvSpPr>
-        <p:spPr>
-          <a:xfrm>
-            <a:off x="1280160" y="1234440"/>
-            <a:ext cx="1691640" cy="502920"/>
-          </a:xfrm>
-          <a:prstGeom prst="rect">
-            <a:avLst/>
-          </a:prstGeom>
-          <a:noFill/>
-          <a:ln/>
-        </p:spPr>
-        <p:txBody>
-          <a:bodyPr wrap="square" lIns="635" tIns="635" rIns="635" bIns="635" rtlCol="0" anchor="ctr"/>
-          <a:lstStyle/>
-          <a:p>
-            <a:pPr indent="0" marL="0">
-              <a:buNone/>
-            </a:pPr>
-            <a:r>
-              <a:rPr lang="en-US" sz="1500" b="1" dirty="0">
-                <a:solidFill>
-                  <a:schemeClr val="tx2"/>
-                </a:solidFill>
-              </a:rPr>
-              <a:t>WSキット</a:t>
-            </a:r>
-            <a:endParaRPr lang="en-US" sz="1500" dirty="0"/>
-          </a:p>
-        </p:txBody>
-      </p:sp>
-      <p:sp>
-        <p:nvSpPr>
-          <p:cNvPr id="7" name="Text 5"/>
-          <p:cNvSpPr txBox="1"/>
-          <p:nvPr/>
-        </p:nvSpPr>
-        <p:spPr>
-          <a:xfrm>
-            <a:off x="640080" y="1874520"/>
-            <a:ext cx="2286000" cy="731520"/>
-          </a:xfrm>
-          <a:prstGeom prst="rect">
-            <a:avLst/>
-          </a:prstGeom>
-          <a:noFill/>
-          <a:ln/>
-        </p:spPr>
-        <p:txBody>
-          <a:bodyPr wrap="square" lIns="635" tIns="635" rIns="635" bIns="635" rtlCol="0" anchor="t"/>
-          <a:lstStyle/>
-          <a:p>
-            <a:pPr indent="0" marL="0">
-              <a:buNone/>
-            </a:pPr>
-            <a:r>
-              <a:rPr lang="en-US" sz="1200" dirty="0">
-                <a:solidFill>
-                  <a:schemeClr val="tx1"/>
-                </a:solidFill>
-              </a:rPr>
-              <a:t>1週に1種類だけ実施</a:t>
-            </a:r>
-            <a:endParaRPr lang="en-US" sz="1200" dirty="0"/>
-          </a:p>
-          <a:p>
-            <a:pPr indent="0" marL="0">
-              <a:buNone/>
-            </a:pPr>
-            <a:r>
-              <a:rPr lang="en-US" sz="1200" dirty="0">
-                <a:solidFill>
-                  <a:schemeClr val="tx1"/>
-                </a:solidFill>
-              </a:rPr>
-              <a:t>スノードーム週／スクイーズ週</a:t>
-            </a:r>
-            <a:endParaRPr lang="en-US" sz="1200" dirty="0"/>
-          </a:p>
-        </p:txBody>
-      </p:sp>
-      <p:sp>
-        <p:nvSpPr>
-          <p:cNvPr id="8" name="part_1"/>
-          <p:cNvSpPr/>
-          <p:nvPr/>
-        </p:nvSpPr>
-        <p:spPr>
-          <a:xfrm>
-            <a:off x="3246120" y="1051560"/>
-            <a:ext cx="2606040" cy="1600200"/>
+            <a:off x="4297680" y="1572768"/>
+            <a:ext cx="4389120" cy="548640"/>
           </a:xfrm>
           <a:prstGeom prst="roundRect">
             <a:avLst>
-              <a:gd name="adj" fmla="val 4571"/>
+              <a:gd name="adj" fmla="val 13333"/>
             </a:avLst>
           </a:prstGeom>
           <a:solidFill>
@@ -13700,62 +13899,60 @@
           </a:ln>
         </p:spPr>
       </p:sp>
-      <p:sp>
-        <p:nvSpPr>
-          <p:cNvPr id="9" name="part_badge_1"/>
-          <p:cNvSpPr/>
-          <p:nvPr/>
-        </p:nvSpPr>
-        <p:spPr>
-          <a:xfrm>
-            <a:off x="3429000" y="1234440"/>
-            <a:ext cx="502920" cy="502920"/>
-          </a:xfrm>
-          <a:prstGeom prst="ellipse">
-            <a:avLst/>
-          </a:prstGeom>
-          <a:solidFill>
-            <a:schemeClr val="accent2"/>
-          </a:solidFill>
-          <a:ln w="12700">
-            <a:solidFill>
-              <a:schemeClr val="accent2"/>
-            </a:solidFill>
-            <a:prstDash val="solid"/>
-          </a:ln>
-        </p:spPr>
-      </p:sp>
-      <p:sp>
-        <p:nvSpPr>
-          <p:cNvPr id="10" name="Text 8"/>
+      <p:pic>
+        <p:nvPicPr>
+          <p:cNvPr id="10" name="part_img_1" descr="クリスマスアーチ">    </p:cNvPr>
+          <p:cNvPicPr>
+            <a:picLocks noChangeAspect="1"/>
+          </p:cNvPicPr>
+          <p:nvPr/>
+        </p:nvPicPr>
+        <p:blipFill>
+          <a:blip r:embed="rId3"/>
+          <a:srcRect l="0" r="0" t="0" b="0"/>
+          <a:stretch/>
+        </p:blipFill>
+        <p:spPr>
+          <a:xfrm>
+            <a:off x="4352544" y="1618488"/>
+            <a:ext cx="457200" cy="457200"/>
+          </a:xfrm>
+          <a:prstGeom prst="rect">
+            <a:avLst/>
+          </a:prstGeom>
+        </p:spPr>
+      </p:pic>
+      <p:sp>
+        <p:nvSpPr>
+          <p:cNvPr id="11" name="Text 6"/>
           <p:cNvSpPr txBox="1"/>
           <p:nvPr/>
         </p:nvSpPr>
         <p:spPr>
           <a:xfrm>
-            <a:off x="3429000" y="1234440"/>
-            <a:ext cx="502920" cy="502920"/>
-          </a:xfrm>
-          <a:prstGeom prst="rect">
-            <a:avLst/>
-          </a:prstGeom>
-          <a:noFill/>
-          <a:ln/>
-        </p:spPr>
-        <p:txBody>
-          <a:bodyPr wrap="square" lIns="0" tIns="0" rIns="0" bIns="0" rtlCol="0" anchor="ctr"/>
-          <a:lstStyle/>
-          <a:p>
-            <a:pPr algn="ctr" indent="0" marL="0">
+            <a:off x="4937760" y="1600200"/>
+            <a:ext cx="3657600" cy="256032"/>
+          </a:xfrm>
+          <a:prstGeom prst="rect">
+            <a:avLst/>
+          </a:prstGeom>
+          <a:noFill/>
+          <a:ln/>
+        </p:spPr>
+        <p:txBody>
+          <a:bodyPr wrap="square" lIns="0" tIns="0" rIns="0" bIns="0" rtlCol="0" anchor="t"/>
+          <a:lstStyle/>
+          <a:p>
+            <a:pPr indent="0" marL="0">
               <a:buNone/>
             </a:pPr>
             <a:r>
               <a:rPr lang="en-US" sz="1300" b="1" dirty="0">
                 <a:solidFill>
-                  <a:schemeClr val="bg1"/>
-                </a:solidFill>
-              </a:rPr>
-              <a:t>装</a:t>
+                  <a:schemeClr val="tx2"/>
+                </a:solidFill>
+              </a:rPr>
+              <a:t>クリスマスアーチ</a:t>
             </a:r>
             <a:endParaRPr lang="en-US" sz="1300" dirty="0"/>
           </a:p>
@@ -13763,73 +13960,37 @@
       </p:sp>
       <p:sp>
         <p:nvSpPr>
-          <p:cNvPr id="11" name="Text 9"/>
+          <p:cNvPr id="12" name="Text 7"/>
           <p:cNvSpPr txBox="1"/>
           <p:nvPr/>
         </p:nvSpPr>
         <p:spPr>
           <a:xfrm>
-            <a:off x="4069080" y="1234440"/>
-            <a:ext cx="1691640" cy="502920"/>
-          </a:xfrm>
-          <a:prstGeom prst="rect">
-            <a:avLst/>
-          </a:prstGeom>
-          <a:noFill/>
-          <a:ln/>
-        </p:spPr>
-        <p:txBody>
-          <a:bodyPr wrap="square" lIns="635" tIns="635" rIns="635" bIns="635" rtlCol="0" anchor="ctr"/>
+            <a:off x="4937760" y="1856232"/>
+            <a:ext cx="3657600" cy="237744"/>
+          </a:xfrm>
+          <a:prstGeom prst="rect">
+            <a:avLst/>
+          </a:prstGeom>
+          <a:noFill/>
+          <a:ln/>
+        </p:spPr>
+        <p:txBody>
+          <a:bodyPr wrap="square" lIns="0" tIns="0" rIns="0" bIns="0" rtlCol="0" anchor="t"/>
           <a:lstStyle/>
           <a:p>
             <a:pPr indent="0" marL="0">
               <a:buNone/>
             </a:pPr>
             <a:r>
-              <a:rPr lang="en-US" sz="1500" b="1" dirty="0">
-                <a:solidFill>
-                  <a:schemeClr val="tx2"/>
-                </a:solidFill>
-              </a:rPr>
-              <a:t>クリスマスアーチ</a:t>
-            </a:r>
-            <a:endParaRPr lang="en-US" sz="1500" dirty="0"/>
-          </a:p>
-        </p:txBody>
-      </p:sp>
-      <p:sp>
-        <p:nvSpPr>
-          <p:cNvPr id="12" name="Text 10"/>
-          <p:cNvSpPr txBox="1"/>
-          <p:nvPr/>
-        </p:nvSpPr>
-        <p:spPr>
-          <a:xfrm>
-            <a:off x="3429000" y="1874520"/>
-            <a:ext cx="2286000" cy="731520"/>
-          </a:xfrm>
-          <a:prstGeom prst="rect">
-            <a:avLst/>
-          </a:prstGeom>
-          <a:noFill/>
-          <a:ln/>
-        </p:spPr>
-        <p:txBody>
-          <a:bodyPr wrap="square" lIns="635" tIns="635" rIns="635" bIns="635" rtlCol="0" anchor="t"/>
-          <a:lstStyle/>
-          <a:p>
-            <a:pPr indent="0" marL="0">
-              <a:buNone/>
-            </a:pPr>
-            <a:r>
-              <a:rPr lang="en-US" sz="1200" dirty="0">
+              <a:rPr lang="en-US" sz="1000" dirty="0">
                 <a:solidFill>
                   <a:schemeClr val="tx1"/>
                 </a:solidFill>
               </a:rPr>
               <a:t>エアーディスプレイ（期間中レンタル）</a:t>
             </a:r>
-            <a:endParaRPr lang="en-US" sz="1200" dirty="0"/>
+            <a:endParaRPr lang="en-US" sz="1000" dirty="0"/>
           </a:p>
         </p:txBody>
       </p:sp>
@@ -13841,12 +14002,12 @@
         </p:nvSpPr>
         <p:spPr>
           <a:xfrm>
-            <a:off x="6035040" y="1051560"/>
-            <a:ext cx="2606040" cy="1600200"/>
+            <a:off x="4297680" y="2185416"/>
+            <a:ext cx="4389120" cy="548640"/>
           </a:xfrm>
           <a:prstGeom prst="roundRect">
             <a:avLst>
-              <a:gd name="adj" fmla="val 4571"/>
+              <a:gd name="adj" fmla="val 13333"/>
             </a:avLst>
           </a:prstGeom>
           <a:solidFill>
@@ -13860,153 +14021,115 @@
           </a:ln>
         </p:spPr>
       </p:sp>
-      <p:sp>
-        <p:nvSpPr>
-          <p:cNvPr id="14" name="part_badge_2"/>
+      <p:pic>
+        <p:nvPicPr>
+          <p:cNvPr id="14" name="part_img_2" descr="コスプレ衣装">    </p:cNvPr>
+          <p:cNvPicPr>
+            <a:picLocks noChangeAspect="1"/>
+          </p:cNvPicPr>
+          <p:nvPr/>
+        </p:nvPicPr>
+        <p:blipFill>
+          <a:blip r:embed="rId4"/>
+          <a:srcRect l="0" r="0" t="0" b="0"/>
+          <a:stretch/>
+        </p:blipFill>
+        <p:spPr>
+          <a:xfrm>
+            <a:off x="4352544" y="2231136"/>
+            <a:ext cx="457200" cy="457200"/>
+          </a:xfrm>
+          <a:prstGeom prst="rect">
+            <a:avLst/>
+          </a:prstGeom>
+        </p:spPr>
+      </p:pic>
+      <p:sp>
+        <p:nvSpPr>
+          <p:cNvPr id="15" name="Text 9"/>
+          <p:cNvSpPr txBox="1"/>
+          <p:nvPr/>
+        </p:nvSpPr>
+        <p:spPr>
+          <a:xfrm>
+            <a:off x="4937760" y="2212848"/>
+            <a:ext cx="3657600" cy="256032"/>
+          </a:xfrm>
+          <a:prstGeom prst="rect">
+            <a:avLst/>
+          </a:prstGeom>
+          <a:noFill/>
+          <a:ln/>
+        </p:spPr>
+        <p:txBody>
+          <a:bodyPr wrap="square" lIns="0" tIns="0" rIns="0" bIns="0" rtlCol="0" anchor="t"/>
+          <a:lstStyle/>
+          <a:p>
+            <a:pPr indent="0" marL="0">
+              <a:buNone/>
+            </a:pPr>
+            <a:r>
+              <a:rPr lang="en-US" sz="1300" b="1" dirty="0">
+                <a:solidFill>
+                  <a:schemeClr val="tx2"/>
+                </a:solidFill>
+              </a:rPr>
+              <a:t>コスプレ衣装</a:t>
+            </a:r>
+            <a:endParaRPr lang="en-US" sz="1300" dirty="0"/>
+          </a:p>
+        </p:txBody>
+      </p:sp>
+      <p:sp>
+        <p:nvSpPr>
+          <p:cNvPr id="16" name="Text 10"/>
+          <p:cNvSpPr txBox="1"/>
+          <p:nvPr/>
+        </p:nvSpPr>
+        <p:spPr>
+          <a:xfrm>
+            <a:off x="4937760" y="2468880"/>
+            <a:ext cx="3657600" cy="237744"/>
+          </a:xfrm>
+          <a:prstGeom prst="rect">
+            <a:avLst/>
+          </a:prstGeom>
+          <a:noFill/>
+          <a:ln/>
+        </p:spPr>
+        <p:txBody>
+          <a:bodyPr wrap="square" lIns="0" tIns="0" rIns="0" bIns="0" rtlCol="0" anchor="t"/>
+          <a:lstStyle/>
+          <a:p>
+            <a:pPr indent="0" marL="0">
+              <a:buNone/>
+            </a:pPr>
+            <a:r>
+              <a:rPr lang="en-US" sz="1000" dirty="0">
+                <a:solidFill>
+                  <a:schemeClr val="tx1"/>
+                </a:solidFill>
+              </a:rPr>
+              <a:t>サンタ・トナカイ・雪だるま・エルフ ほか</a:t>
+            </a:r>
+            <a:endParaRPr lang="en-US" sz="1000" dirty="0"/>
+          </a:p>
+        </p:txBody>
+      </p:sp>
+      <p:sp>
+        <p:nvSpPr>
+          <p:cNvPr id="17" name="part_3"/>
           <p:cNvSpPr/>
           <p:nvPr/>
         </p:nvSpPr>
         <p:spPr>
           <a:xfrm>
-            <a:off x="6217920" y="1234440"/>
-            <a:ext cx="502920" cy="502920"/>
-          </a:xfrm>
-          <a:prstGeom prst="ellipse">
-            <a:avLst/>
-          </a:prstGeom>
-          <a:solidFill>
-            <a:schemeClr val="accent3"/>
-          </a:solidFill>
-          <a:ln w="12700">
-            <a:solidFill>
-              <a:schemeClr val="accent3"/>
-            </a:solidFill>
-            <a:prstDash val="solid"/>
-          </a:ln>
-        </p:spPr>
-      </p:sp>
-      <p:sp>
-        <p:nvSpPr>
-          <p:cNvPr id="15" name="Text 13"/>
-          <p:cNvSpPr txBox="1"/>
-          <p:nvPr/>
-        </p:nvSpPr>
-        <p:spPr>
-          <a:xfrm>
-            <a:off x="6217920" y="1234440"/>
-            <a:ext cx="502920" cy="502920"/>
-          </a:xfrm>
-          <a:prstGeom prst="rect">
-            <a:avLst/>
-          </a:prstGeom>
-          <a:noFill/>
-          <a:ln/>
-        </p:spPr>
-        <p:txBody>
-          <a:bodyPr wrap="square" lIns="0" tIns="0" rIns="0" bIns="0" rtlCol="0" anchor="ctr"/>
-          <a:lstStyle/>
-          <a:p>
-            <a:pPr algn="ctr" indent="0" marL="0">
-              <a:buNone/>
-            </a:pPr>
-            <a:r>
-              <a:rPr lang="en-US" sz="1300" b="1" dirty="0">
-                <a:solidFill>
-                  <a:schemeClr val="bg1"/>
-                </a:solidFill>
-              </a:rPr>
-              <a:t>衣</a:t>
-            </a:r>
-            <a:endParaRPr lang="en-US" sz="1300" dirty="0"/>
-          </a:p>
-        </p:txBody>
-      </p:sp>
-      <p:sp>
-        <p:nvSpPr>
-          <p:cNvPr id="16" name="Text 14"/>
-          <p:cNvSpPr txBox="1"/>
-          <p:nvPr/>
-        </p:nvSpPr>
-        <p:spPr>
-          <a:xfrm>
-            <a:off x="6858000" y="1234440"/>
-            <a:ext cx="1691640" cy="502920"/>
-          </a:xfrm>
-          <a:prstGeom prst="rect">
-            <a:avLst/>
-          </a:prstGeom>
-          <a:noFill/>
-          <a:ln/>
-        </p:spPr>
-        <p:txBody>
-          <a:bodyPr wrap="square" lIns="635" tIns="635" rIns="635" bIns="635" rtlCol="0" anchor="ctr"/>
-          <a:lstStyle/>
-          <a:p>
-            <a:pPr indent="0" marL="0">
-              <a:buNone/>
-            </a:pPr>
-            <a:r>
-              <a:rPr lang="en-US" sz="1500" b="1" dirty="0">
-                <a:solidFill>
-                  <a:schemeClr val="tx2"/>
-                </a:solidFill>
-              </a:rPr>
-              <a:t>コスプレ衣装</a:t>
-            </a:r>
-            <a:endParaRPr lang="en-US" sz="1500" dirty="0"/>
-          </a:p>
-        </p:txBody>
-      </p:sp>
-      <p:sp>
-        <p:nvSpPr>
-          <p:cNvPr id="17" name="Text 15"/>
-          <p:cNvSpPr txBox="1"/>
-          <p:nvPr/>
-        </p:nvSpPr>
-        <p:spPr>
-          <a:xfrm>
-            <a:off x="6217920" y="1874520"/>
-            <a:ext cx="2286000" cy="731520"/>
-          </a:xfrm>
-          <a:prstGeom prst="rect">
-            <a:avLst/>
-          </a:prstGeom>
-          <a:noFill/>
-          <a:ln/>
-        </p:spPr>
-        <p:txBody>
-          <a:bodyPr wrap="square" lIns="635" tIns="635" rIns="635" bIns="635" rtlCol="0" anchor="t"/>
-          <a:lstStyle/>
-          <a:p>
-            <a:pPr indent="0" marL="0">
-              <a:buNone/>
-            </a:pPr>
-            <a:r>
-              <a:rPr lang="en-US" sz="1200" dirty="0">
-                <a:solidFill>
-                  <a:schemeClr val="tx1"/>
-                </a:solidFill>
-              </a:rPr>
-              <a:t>サンタ・トナカイ・雪だるま・エルフ ほか</a:t>
-            </a:r>
-            <a:endParaRPr lang="en-US" sz="1200" dirty="0"/>
-          </a:p>
-        </p:txBody>
-      </p:sp>
-      <p:sp>
-        <p:nvSpPr>
-          <p:cNvPr id="18" name="part_3"/>
-          <p:cNvSpPr/>
-          <p:nvPr/>
-        </p:nvSpPr>
-        <p:spPr>
-          <a:xfrm>
-            <a:off x="457200" y="2834640"/>
-            <a:ext cx="2606040" cy="1600200"/>
+            <a:off x="4297680" y="2798064"/>
+            <a:ext cx="4389120" cy="548640"/>
           </a:xfrm>
           <a:prstGeom prst="roundRect">
             <a:avLst>
-              <a:gd name="adj" fmla="val 4571"/>
+              <a:gd name="adj" fmla="val 13333"/>
             </a:avLst>
           </a:prstGeom>
           <a:solidFill>
@@ -14020,153 +14143,115 @@
           </a:ln>
         </p:spPr>
       </p:sp>
-      <p:sp>
-        <p:nvSpPr>
-          <p:cNvPr id="19" name="part_badge_3"/>
+      <p:pic>
+        <p:nvPicPr>
+          <p:cNvPr id="18" name="part_img_3" descr="B0ボードPOP 10枚">    </p:cNvPr>
+          <p:cNvPicPr>
+            <a:picLocks noChangeAspect="1"/>
+          </p:cNvPicPr>
+          <p:nvPr/>
+        </p:nvPicPr>
+        <p:blipFill>
+          <a:blip r:embed="rId5"/>
+          <a:srcRect l="0" r="0" t="0" b="0"/>
+          <a:stretch/>
+        </p:blipFill>
+        <p:spPr>
+          <a:xfrm>
+            <a:off x="4352544" y="2843784"/>
+            <a:ext cx="457200" cy="457200"/>
+          </a:xfrm>
+          <a:prstGeom prst="rect">
+            <a:avLst/>
+          </a:prstGeom>
+        </p:spPr>
+      </p:pic>
+      <p:sp>
+        <p:nvSpPr>
+          <p:cNvPr id="19" name="Text 12"/>
+          <p:cNvSpPr txBox="1"/>
+          <p:nvPr/>
+        </p:nvSpPr>
+        <p:spPr>
+          <a:xfrm>
+            <a:off x="4937760" y="2825496"/>
+            <a:ext cx="3657600" cy="256032"/>
+          </a:xfrm>
+          <a:prstGeom prst="rect">
+            <a:avLst/>
+          </a:prstGeom>
+          <a:noFill/>
+          <a:ln/>
+        </p:spPr>
+        <p:txBody>
+          <a:bodyPr wrap="square" lIns="0" tIns="0" rIns="0" bIns="0" rtlCol="0" anchor="t"/>
+          <a:lstStyle/>
+          <a:p>
+            <a:pPr indent="0" marL="0">
+              <a:buNone/>
+            </a:pPr>
+            <a:r>
+              <a:rPr lang="en-US" sz="1300" b="1" dirty="0">
+                <a:solidFill>
+                  <a:schemeClr val="tx2"/>
+                </a:solidFill>
+              </a:rPr>
+              <a:t>B0ボードPOP 10枚</a:t>
+            </a:r>
+            <a:endParaRPr lang="en-US" sz="1300" dirty="0"/>
+          </a:p>
+        </p:txBody>
+      </p:sp>
+      <p:sp>
+        <p:nvSpPr>
+          <p:cNvPr id="20" name="Text 13"/>
+          <p:cNvSpPr txBox="1"/>
+          <p:nvPr/>
+        </p:nvSpPr>
+        <p:spPr>
+          <a:xfrm>
+            <a:off x="4937760" y="3081528"/>
+            <a:ext cx="3657600" cy="237744"/>
+          </a:xfrm>
+          <a:prstGeom prst="rect">
+            <a:avLst/>
+          </a:prstGeom>
+          <a:noFill/>
+          <a:ln/>
+        </p:spPr>
+        <p:txBody>
+          <a:bodyPr wrap="square" lIns="0" tIns="0" rIns="0" bIns="0" rtlCol="0" anchor="t"/>
+          <a:lstStyle/>
+          <a:p>
+            <a:pPr indent="0" marL="0">
+              <a:buNone/>
+            </a:pPr>
+            <a:r>
+              <a:rPr lang="en-US" sz="1000" dirty="0">
+                <a:solidFill>
+                  <a:schemeClr val="tx1"/>
+                </a:solidFill>
+              </a:rPr>
+              <a:t>4週の内容がひと目でわかるデザイン</a:t>
+            </a:r>
+            <a:endParaRPr lang="en-US" sz="1000" dirty="0"/>
+          </a:p>
+        </p:txBody>
+      </p:sp>
+      <p:sp>
+        <p:nvSpPr>
+          <p:cNvPr id="21" name="part_4"/>
           <p:cNvSpPr/>
           <p:nvPr/>
         </p:nvSpPr>
         <p:spPr>
           <a:xfrm>
-            <a:off x="640080" y="3017520"/>
-            <a:ext cx="502920" cy="502920"/>
-          </a:xfrm>
-          <a:prstGeom prst="ellipse">
-            <a:avLst/>
-          </a:prstGeom>
-          <a:solidFill>
-            <a:schemeClr val="accent6"/>
-          </a:solidFill>
-          <a:ln w="12700">
-            <a:solidFill>
-              <a:schemeClr val="accent6"/>
-            </a:solidFill>
-            <a:prstDash val="solid"/>
-          </a:ln>
-        </p:spPr>
-      </p:sp>
-      <p:sp>
-        <p:nvSpPr>
-          <p:cNvPr id="20" name="Text 18"/>
-          <p:cNvSpPr txBox="1"/>
-          <p:nvPr/>
-        </p:nvSpPr>
-        <p:spPr>
-          <a:xfrm>
-            <a:off x="640080" y="3017520"/>
-            <a:ext cx="502920" cy="502920"/>
-          </a:xfrm>
-          <a:prstGeom prst="rect">
-            <a:avLst/>
-          </a:prstGeom>
-          <a:noFill/>
-          <a:ln/>
-        </p:spPr>
-        <p:txBody>
-          <a:bodyPr wrap="square" lIns="0" tIns="0" rIns="0" bIns="0" rtlCol="0" anchor="ctr"/>
-          <a:lstStyle/>
-          <a:p>
-            <a:pPr algn="ctr" indent="0" marL="0">
-              <a:buNone/>
-            </a:pPr>
-            <a:r>
-              <a:rPr lang="en-US" sz="1300" b="1" dirty="0">
-                <a:solidFill>
-                  <a:schemeClr val="bg1"/>
-                </a:solidFill>
-              </a:rPr>
-              <a:t>掲</a:t>
-            </a:r>
-            <a:endParaRPr lang="en-US" sz="1300" dirty="0"/>
-          </a:p>
-        </p:txBody>
-      </p:sp>
-      <p:sp>
-        <p:nvSpPr>
-          <p:cNvPr id="21" name="Text 19"/>
-          <p:cNvSpPr txBox="1"/>
-          <p:nvPr/>
-        </p:nvSpPr>
-        <p:spPr>
-          <a:xfrm>
-            <a:off x="1280160" y="3017520"/>
-            <a:ext cx="1691640" cy="502920"/>
-          </a:xfrm>
-          <a:prstGeom prst="rect">
-            <a:avLst/>
-          </a:prstGeom>
-          <a:noFill/>
-          <a:ln/>
-        </p:spPr>
-        <p:txBody>
-          <a:bodyPr wrap="square" lIns="635" tIns="635" rIns="635" bIns="635" rtlCol="0" anchor="ctr"/>
-          <a:lstStyle/>
-          <a:p>
-            <a:pPr indent="0" marL="0">
-              <a:buNone/>
-            </a:pPr>
-            <a:r>
-              <a:rPr lang="en-US" sz="1500" b="1" dirty="0">
-                <a:solidFill>
-                  <a:schemeClr val="tx2"/>
-                </a:solidFill>
-              </a:rPr>
-              <a:t>B0ボードPOP</a:t>
-            </a:r>
-            <a:endParaRPr lang="en-US" sz="1500" dirty="0"/>
-          </a:p>
-        </p:txBody>
-      </p:sp>
-      <p:sp>
-        <p:nvSpPr>
-          <p:cNvPr id="22" name="Text 20"/>
-          <p:cNvSpPr txBox="1"/>
-          <p:nvPr/>
-        </p:nvSpPr>
-        <p:spPr>
-          <a:xfrm>
-            <a:off x="640080" y="3657600"/>
-            <a:ext cx="2286000" cy="731520"/>
-          </a:xfrm>
-          <a:prstGeom prst="rect">
-            <a:avLst/>
-          </a:prstGeom>
-          <a:noFill/>
-          <a:ln/>
-        </p:spPr>
-        <p:txBody>
-          <a:bodyPr wrap="square" lIns="635" tIns="635" rIns="635" bIns="635" rtlCol="0" anchor="t"/>
-          <a:lstStyle/>
-          <a:p>
-            <a:pPr indent="0" marL="0">
-              <a:buNone/>
-            </a:pPr>
-            <a:r>
-              <a:rPr lang="en-US" sz="1200" dirty="0">
-                <a:solidFill>
-                  <a:schemeClr val="tx1"/>
-                </a:solidFill>
-              </a:rPr>
-              <a:t>10枚。4週の内容がひと目でわかるデザイン</a:t>
-            </a:r>
-            <a:endParaRPr lang="en-US" sz="1200" dirty="0"/>
-          </a:p>
-        </p:txBody>
-      </p:sp>
-      <p:sp>
-        <p:nvSpPr>
-          <p:cNvPr id="23" name="part_4"/>
-          <p:cNvSpPr/>
-          <p:nvPr/>
-        </p:nvSpPr>
-        <p:spPr>
-          <a:xfrm>
-            <a:off x="3246120" y="2834640"/>
-            <a:ext cx="2606040" cy="1600200"/>
+            <a:off x="4297680" y="3410712"/>
+            <a:ext cx="4389120" cy="548640"/>
           </a:xfrm>
           <a:prstGeom prst="roundRect">
             <a:avLst>
-              <a:gd name="adj" fmla="val 4571"/>
+              <a:gd name="adj" fmla="val 13333"/>
             </a:avLst>
           </a:prstGeom>
           <a:solidFill>
@@ -14180,153 +14265,115 @@
           </a:ln>
         </p:spPr>
       </p:sp>
-      <p:sp>
-        <p:nvSpPr>
-          <p:cNvPr id="24" name="part_badge_4"/>
+      <p:pic>
+        <p:nvPicPr>
+          <p:cNvPr id="22" name="part_img_4" descr="開催中ツール">    </p:cNvPr>
+          <p:cNvPicPr>
+            <a:picLocks noChangeAspect="1"/>
+          </p:cNvPicPr>
+          <p:nvPr/>
+        </p:nvPicPr>
+        <p:blipFill>
+          <a:blip r:embed="rId6"/>
+          <a:srcRect l="0" r="0" t="0" b="0"/>
+          <a:stretch/>
+        </p:blipFill>
+        <p:spPr>
+          <a:xfrm>
+            <a:off x="4352544" y="3456432"/>
+            <a:ext cx="457200" cy="457200"/>
+          </a:xfrm>
+          <a:prstGeom prst="rect">
+            <a:avLst/>
+          </a:prstGeom>
+        </p:spPr>
+      </p:pic>
+      <p:sp>
+        <p:nvSpPr>
+          <p:cNvPr id="23" name="Text 15"/>
+          <p:cNvSpPr txBox="1"/>
+          <p:nvPr/>
+        </p:nvSpPr>
+        <p:spPr>
+          <a:xfrm>
+            <a:off x="4937760" y="3438144"/>
+            <a:ext cx="3657600" cy="256032"/>
+          </a:xfrm>
+          <a:prstGeom prst="rect">
+            <a:avLst/>
+          </a:prstGeom>
+          <a:noFill/>
+          <a:ln/>
+        </p:spPr>
+        <p:txBody>
+          <a:bodyPr wrap="square" lIns="0" tIns="0" rIns="0" bIns="0" rtlCol="0" anchor="t"/>
+          <a:lstStyle/>
+          <a:p>
+            <a:pPr indent="0" marL="0">
+              <a:buNone/>
+            </a:pPr>
+            <a:r>
+              <a:rPr lang="en-US" sz="1300" b="1" dirty="0">
+                <a:solidFill>
+                  <a:schemeClr val="tx2"/>
+                </a:solidFill>
+              </a:rPr>
+              <a:t>開催中ツール</a:t>
+            </a:r>
+            <a:endParaRPr lang="en-US" sz="1300" dirty="0"/>
+          </a:p>
+        </p:txBody>
+      </p:sp>
+      <p:sp>
+        <p:nvSpPr>
+          <p:cNvPr id="24" name="Text 16"/>
+          <p:cNvSpPr txBox="1"/>
+          <p:nvPr/>
+        </p:nvSpPr>
+        <p:spPr>
+          <a:xfrm>
+            <a:off x="4937760" y="3694176"/>
+            <a:ext cx="3657600" cy="237744"/>
+          </a:xfrm>
+          <a:prstGeom prst="rect">
+            <a:avLst/>
+          </a:prstGeom>
+          <a:noFill/>
+          <a:ln/>
+        </p:spPr>
+        <p:txBody>
+          <a:bodyPr wrap="square" lIns="0" tIns="0" rIns="0" bIns="0" rtlCol="0" anchor="t"/>
+          <a:lstStyle/>
+          <a:p>
+            <a:pPr indent="0" marL="0">
+              <a:buNone/>
+            </a:pPr>
+            <a:r>
+              <a:rPr lang="en-US" sz="1000" dirty="0">
+                <a:solidFill>
+                  <a:schemeClr val="tx1"/>
+                </a:solidFill>
+              </a:rPr>
+              <a:t>のぼり・スタンド看板・テーブルクロス ほか</a:t>
+            </a:r>
+            <a:endParaRPr lang="en-US" sz="1000" dirty="0"/>
+          </a:p>
+        </p:txBody>
+      </p:sp>
+      <p:sp>
+        <p:nvSpPr>
+          <p:cNvPr id="25" name="part_5"/>
           <p:cNvSpPr/>
           <p:nvPr/>
         </p:nvSpPr>
         <p:spPr>
           <a:xfrm>
-            <a:off x="3429000" y="3017520"/>
-            <a:ext cx="502920" cy="502920"/>
-          </a:xfrm>
-          <a:prstGeom prst="ellipse">
-            <a:avLst/>
-          </a:prstGeom>
-          <a:solidFill>
-            <a:schemeClr val="accent4"/>
-          </a:solidFill>
-          <a:ln w="12700">
-            <a:solidFill>
-              <a:schemeClr val="accent4"/>
-            </a:solidFill>
-            <a:prstDash val="solid"/>
-          </a:ln>
-        </p:spPr>
-      </p:sp>
-      <p:sp>
-        <p:nvSpPr>
-          <p:cNvPr id="25" name="Text 23"/>
-          <p:cNvSpPr txBox="1"/>
-          <p:nvPr/>
-        </p:nvSpPr>
-        <p:spPr>
-          <a:xfrm>
-            <a:off x="3429000" y="3017520"/>
-            <a:ext cx="502920" cy="502920"/>
-          </a:xfrm>
-          <a:prstGeom prst="rect">
-            <a:avLst/>
-          </a:prstGeom>
-          <a:noFill/>
-          <a:ln/>
-        </p:spPr>
-        <p:txBody>
-          <a:bodyPr wrap="square" lIns="0" tIns="0" rIns="0" bIns="0" rtlCol="0" anchor="ctr"/>
-          <a:lstStyle/>
-          <a:p>
-            <a:pPr algn="ctr" indent="0" marL="0">
-              <a:buNone/>
-            </a:pPr>
-            <a:r>
-              <a:rPr lang="en-US" sz="1300" b="1" dirty="0">
-                <a:solidFill>
-                  <a:schemeClr val="bg1"/>
-                </a:solidFill>
-              </a:rPr>
-              <a:t>飾</a:t>
-            </a:r>
-            <a:endParaRPr lang="en-US" sz="1300" dirty="0"/>
-          </a:p>
-        </p:txBody>
-      </p:sp>
-      <p:sp>
-        <p:nvSpPr>
-          <p:cNvPr id="26" name="Text 24"/>
-          <p:cNvSpPr txBox="1"/>
-          <p:nvPr/>
-        </p:nvSpPr>
-        <p:spPr>
-          <a:xfrm>
-            <a:off x="4069080" y="3017520"/>
-            <a:ext cx="1691640" cy="502920"/>
-          </a:xfrm>
-          <a:prstGeom prst="rect">
-            <a:avLst/>
-          </a:prstGeom>
-          <a:noFill/>
-          <a:ln/>
-        </p:spPr>
-        <p:txBody>
-          <a:bodyPr wrap="square" lIns="635" tIns="635" rIns="635" bIns="635" rtlCol="0" anchor="ctr"/>
-          <a:lstStyle/>
-          <a:p>
-            <a:pPr indent="0" marL="0">
-              <a:buNone/>
-            </a:pPr>
-            <a:r>
-              <a:rPr lang="en-US" sz="1500" b="1" dirty="0">
-                <a:solidFill>
-                  <a:schemeClr val="tx2"/>
-                </a:solidFill>
-              </a:rPr>
-              <a:t>開催中ツール</a:t>
-            </a:r>
-            <a:endParaRPr lang="en-US" sz="1500" dirty="0"/>
-          </a:p>
-        </p:txBody>
-      </p:sp>
-      <p:sp>
-        <p:nvSpPr>
-          <p:cNvPr id="27" name="Text 25"/>
-          <p:cNvSpPr txBox="1"/>
-          <p:nvPr/>
-        </p:nvSpPr>
-        <p:spPr>
-          <a:xfrm>
-            <a:off x="3429000" y="3657600"/>
-            <a:ext cx="2286000" cy="731520"/>
-          </a:xfrm>
-          <a:prstGeom prst="rect">
-            <a:avLst/>
-          </a:prstGeom>
-          <a:noFill/>
-          <a:ln/>
-        </p:spPr>
-        <p:txBody>
-          <a:bodyPr wrap="square" lIns="635" tIns="635" rIns="635" bIns="635" rtlCol="0" anchor="t"/>
-          <a:lstStyle/>
-          <a:p>
-            <a:pPr indent="0" marL="0">
-              <a:buNone/>
-            </a:pPr>
-            <a:r>
-              <a:rPr lang="en-US" sz="1200" dirty="0">
-                <a:solidFill>
-                  <a:schemeClr val="tx1"/>
-                </a:solidFill>
-              </a:rPr>
-              <a:t>スタンド看板・のぼり・テーブル装飾 ほか</a:t>
-            </a:r>
-            <a:endParaRPr lang="en-US" sz="1200" dirty="0"/>
-          </a:p>
-        </p:txBody>
-      </p:sp>
-      <p:sp>
-        <p:nvSpPr>
-          <p:cNvPr id="28" name="part_5"/>
-          <p:cNvSpPr/>
-          <p:nvPr/>
-        </p:nvSpPr>
-        <p:spPr>
-          <a:xfrm>
-            <a:off x="6035040" y="2834640"/>
-            <a:ext cx="2606040" cy="1600200"/>
+            <a:off x="4297680" y="4023360"/>
+            <a:ext cx="4389120" cy="548640"/>
           </a:xfrm>
           <a:prstGeom prst="roundRect">
             <a:avLst>
-              <a:gd name="adj" fmla="val 4571"/>
+              <a:gd name="adj" fmla="val 13333"/>
             </a:avLst>
           </a:prstGeom>
           <a:solidFill>
@@ -14340,62 +14387,60 @@
           </a:ln>
         </p:spPr>
       </p:sp>
-      <p:sp>
-        <p:nvSpPr>
-          <p:cNvPr id="29" name="part_badge_5"/>
-          <p:cNvSpPr/>
-          <p:nvPr/>
-        </p:nvSpPr>
-        <p:spPr>
-          <a:xfrm>
-            <a:off x="6217920" y="3017520"/>
-            <a:ext cx="502920" cy="502920"/>
-          </a:xfrm>
-          <a:prstGeom prst="ellipse">
-            <a:avLst/>
-          </a:prstGeom>
-          <a:solidFill>
-            <a:schemeClr val="tx2"/>
-          </a:solidFill>
-          <a:ln w="12700">
-            <a:solidFill>
-              <a:schemeClr val="tx2"/>
-            </a:solidFill>
-            <a:prstDash val="solid"/>
-          </a:ln>
-        </p:spPr>
-      </p:sp>
-      <p:sp>
-        <p:nvSpPr>
-          <p:cNvPr id="30" name="Text 28"/>
+      <p:pic>
+        <p:nvPicPr>
+          <p:cNvPr id="26" name="part_img_5" descr="運用マニュアル">    </p:cNvPr>
+          <p:cNvPicPr>
+            <a:picLocks noChangeAspect="1"/>
+          </p:cNvPicPr>
+          <p:nvPr/>
+        </p:nvPicPr>
+        <p:blipFill>
+          <a:blip r:embed="rId7"/>
+          <a:srcRect l="0" r="0" t="0" b="0"/>
+          <a:stretch/>
+        </p:blipFill>
+        <p:spPr>
+          <a:xfrm>
+            <a:off x="4352544" y="4069080"/>
+            <a:ext cx="457200" cy="457200"/>
+          </a:xfrm>
+          <a:prstGeom prst="rect">
+            <a:avLst/>
+          </a:prstGeom>
+        </p:spPr>
+      </p:pic>
+      <p:sp>
+        <p:nvSpPr>
+          <p:cNvPr id="27" name="Text 18"/>
           <p:cNvSpPr txBox="1"/>
           <p:nvPr/>
         </p:nvSpPr>
         <p:spPr>
           <a:xfrm>
-            <a:off x="6217920" y="3017520"/>
-            <a:ext cx="502920" cy="502920"/>
-          </a:xfrm>
-          <a:prstGeom prst="rect">
-            <a:avLst/>
-          </a:prstGeom>
-          <a:noFill/>
-          <a:ln/>
-        </p:spPr>
-        <p:txBody>
-          <a:bodyPr wrap="square" lIns="0" tIns="0" rIns="0" bIns="0" rtlCol="0" anchor="ctr"/>
-          <a:lstStyle/>
-          <a:p>
-            <a:pPr algn="ctr" indent="0" marL="0">
+            <a:off x="4937760" y="4050792"/>
+            <a:ext cx="3657600" cy="256032"/>
+          </a:xfrm>
+          <a:prstGeom prst="rect">
+            <a:avLst/>
+          </a:prstGeom>
+          <a:noFill/>
+          <a:ln/>
+        </p:spPr>
+        <p:txBody>
+          <a:bodyPr wrap="square" lIns="0" tIns="0" rIns="0" bIns="0" rtlCol="0" anchor="t"/>
+          <a:lstStyle/>
+          <a:p>
+            <a:pPr indent="0" marL="0">
               <a:buNone/>
             </a:pPr>
             <a:r>
               <a:rPr lang="en-US" sz="1300" b="1" dirty="0">
                 <a:solidFill>
-                  <a:schemeClr val="bg1"/>
-                </a:solidFill>
-              </a:rPr>
-              <a:t>手</a:t>
+                  <a:schemeClr val="tx2"/>
+                </a:solidFill>
+              </a:rPr>
+              <a:t>運用マニュアル</a:t>
             </a:r>
             <a:endParaRPr lang="en-US" sz="1300" dirty="0"/>
           </a:p>
@@ -14403,73 +14448,37 @@
       </p:sp>
       <p:sp>
         <p:nvSpPr>
-          <p:cNvPr id="31" name="Text 29"/>
+          <p:cNvPr id="28" name="Text 19"/>
           <p:cNvSpPr txBox="1"/>
           <p:nvPr/>
         </p:nvSpPr>
         <p:spPr>
           <a:xfrm>
-            <a:off x="6858000" y="3017520"/>
-            <a:ext cx="1691640" cy="502920"/>
-          </a:xfrm>
-          <a:prstGeom prst="rect">
-            <a:avLst/>
-          </a:prstGeom>
-          <a:noFill/>
-          <a:ln/>
-        </p:spPr>
-        <p:txBody>
-          <a:bodyPr wrap="square" lIns="635" tIns="635" rIns="635" bIns="635" rtlCol="0" anchor="ctr"/>
+            <a:off x="4937760" y="4306824"/>
+            <a:ext cx="3657600" cy="237744"/>
+          </a:xfrm>
+          <a:prstGeom prst="rect">
+            <a:avLst/>
+          </a:prstGeom>
+          <a:noFill/>
+          <a:ln/>
+        </p:spPr>
+        <p:txBody>
+          <a:bodyPr wrap="square" lIns="0" tIns="0" rIns="0" bIns="0" rtlCol="0" anchor="t"/>
           <a:lstStyle/>
           <a:p>
             <a:pPr indent="0" marL="0">
               <a:buNone/>
             </a:pPr>
             <a:r>
-              <a:rPr lang="en-US" sz="1500" b="1" dirty="0">
-                <a:solidFill>
-                  <a:schemeClr val="tx2"/>
-                </a:solidFill>
-              </a:rPr>
-              <a:t>運用マニュアル</a:t>
-            </a:r>
-            <a:endParaRPr lang="en-US" sz="1500" dirty="0"/>
-          </a:p>
-        </p:txBody>
-      </p:sp>
-      <p:sp>
-        <p:nvSpPr>
-          <p:cNvPr id="32" name="Text 30"/>
-          <p:cNvSpPr txBox="1"/>
-          <p:nvPr/>
-        </p:nvSpPr>
-        <p:spPr>
-          <a:xfrm>
-            <a:off x="6217920" y="3657600"/>
-            <a:ext cx="2286000" cy="731520"/>
-          </a:xfrm>
-          <a:prstGeom prst="rect">
-            <a:avLst/>
-          </a:prstGeom>
-          <a:noFill/>
-          <a:ln/>
-        </p:spPr>
-        <p:txBody>
-          <a:bodyPr wrap="square" lIns="635" tIns="635" rIns="635" bIns="635" rtlCol="0" anchor="t"/>
-          <a:lstStyle/>
-          <a:p>
-            <a:pPr indent="0" marL="0">
-              <a:buNone/>
-            </a:pPr>
-            <a:r>
-              <a:rPr lang="en-US" sz="1200" dirty="0">
+              <a:rPr lang="en-US" sz="1000" dirty="0">
                 <a:solidFill>
                   <a:schemeClr val="tx1"/>
                 </a:solidFill>
               </a:rPr>
               <a:t>店舗スタッフ様だけで運営できる手順書</a:t>
             </a:r>
-            <a:endParaRPr lang="en-US" sz="1200" dirty="0"/>
+            <a:endParaRPr lang="en-US" sz="1000" dirty="0"/>
           </a:p>
         </p:txBody>
       </p:sp>
@@ -14667,7 +14676,7 @@
         <p:spPr>
           <a:xfrm>
             <a:off x="457200" y="1783080"/>
-            <a:ext cx="1920240" cy="2011680"/>
+            <a:ext cx="1920240" cy="2057400"/>
           </a:xfrm>
           <a:prstGeom prst="roundRect">
             <a:avLst>
@@ -14685,16 +14694,40 @@
           </a:ln>
         </p:spPr>
       </p:sp>
-      <p:sp>
-        <p:nvSpPr>
-          <p:cNvPr id="6" name="Text 4"/>
+      <p:pic>
+        <p:nvPicPr>
+          <p:cNvPr id="6" name="wk_img_0" descr="スノードームのイラスト">    </p:cNvPr>
+          <p:cNvPicPr>
+            <a:picLocks noChangeAspect="1"/>
+          </p:cNvPicPr>
+          <p:nvPr/>
+        </p:nvPicPr>
+        <p:blipFill>
+          <a:blip r:embed="rId1"/>
+          <a:stretch>
+            <a:fillRect/>
+          </a:stretch>
+        </p:blipFill>
+        <p:spPr>
+          <a:xfrm>
+            <a:off x="914400" y="1810512"/>
+            <a:ext cx="1005840" cy="1005840"/>
+          </a:xfrm>
+          <a:prstGeom prst="rect">
+            <a:avLst/>
+          </a:prstGeom>
+        </p:spPr>
+      </p:pic>
+      <p:sp>
+        <p:nvSpPr>
+          <p:cNvPr id="7" name="Text 4"/>
           <p:cNvSpPr txBox="1"/>
           <p:nvPr/>
         </p:nvSpPr>
         <p:spPr>
           <a:xfrm>
-            <a:off x="566928" y="1874520"/>
-            <a:ext cx="1700784" cy="1828800"/>
+            <a:off x="548640" y="2816352"/>
+            <a:ext cx="1737360" cy="987552"/>
           </a:xfrm>
           <a:prstGeom prst="rect">
             <a:avLst/>
@@ -14706,94 +14739,52 @@
           <a:bodyPr wrap="square" lIns="635" tIns="635" rIns="635" bIns="635" rtlCol="0" anchor="t"/>
           <a:lstStyle/>
           <a:p>
-            <a:pPr indent="0" marL="0">
+            <a:pPr algn="ctr" indent="0" marL="0">
+              <a:buNone/>
+            </a:pPr>
+            <a:r>
+              <a:rPr lang="en-US" sz="1500" b="1" dirty="0">
+                <a:solidFill>
+                  <a:schemeClr val="accent1"/>
+                </a:solidFill>
+              </a:rPr>
+              <a:t>スノードーム</a:t>
+            </a:r>
+            <a:endParaRPr lang="en-US" sz="1400" dirty="0"/>
+          </a:p>
+          <a:p>
+            <a:pPr algn="ctr" indent="0" marL="0">
               <a:buNone/>
             </a:pPr>
             <a:r>
               <a:rPr lang="en-US" sz="1100" dirty="0">
                 <a:solidFill>
+                  <a:schemeClr val="tx1"/>
+                </a:solidFill>
+              </a:rPr>
+              <a:t>サンタモチーフ</a:t>
+            </a:r>
+            <a:endParaRPr lang="en-US" sz="1400" dirty="0"/>
+          </a:p>
+          <a:p>
+            <a:pPr algn="ctr" indent="0" marL="0">
+              <a:buNone/>
+            </a:pPr>
+            <a:r>
+              <a:rPr lang="en-US" sz="1000" dirty="0">
+                <a:solidFill>
                   <a:schemeClr val="accent4"/>
                 </a:solidFill>
               </a:rPr>
-              <a:t>ワークショップ</a:t>
+              <a:t>コスプレ：サンタ／トナカイ</a:t>
             </a:r>
             <a:endParaRPr lang="en-US" sz="1400" dirty="0"/>
           </a:p>
-          <a:p>
-            <a:pPr indent="0" marL="0">
-              <a:buNone/>
-            </a:pPr>
-            <a:r>
-              <a:rPr lang="en-US" sz="1600" b="1" dirty="0">
-                <a:solidFill>
-                  <a:schemeClr val="accent1"/>
-                </a:solidFill>
-              </a:rPr>
-              <a:t>スノードーム</a:t>
-            </a:r>
-            <a:endParaRPr lang="en-US" sz="1400" dirty="0"/>
-          </a:p>
-          <a:p>
-            <a:pPr indent="0" marL="0">
-              <a:buNone/>
-            </a:pPr>
-            <a:r>
-              <a:rPr lang="en-US" sz="1200" dirty="0">
-                <a:solidFill>
-                  <a:schemeClr val="tx1"/>
-                </a:solidFill>
-              </a:rPr>
-              <a:t>サンタモチーフ</a:t>
-            </a:r>
-            <a:endParaRPr lang="en-US" sz="1400" dirty="0"/>
-          </a:p>
-          <a:p>
-            <a:pPr indent="0" marL="0">
-              <a:buNone/>
-            </a:pPr>
-            <a:r>
-              <a:rPr lang="en-US" sz="800" dirty="0">
-                <a:solidFill>
-                  <a:schemeClr val="tx1"/>
-                </a:solidFill>
-              </a:rPr>
-              <a:t> </a:t>
-            </a:r>
-            <a:endParaRPr lang="en-US" sz="1400" dirty="0"/>
-          </a:p>
-          <a:p>
-            <a:pPr indent="0" marL="0">
-              <a:buNone/>
-            </a:pPr>
-            <a:r>
-              <a:rPr lang="en-US" sz="1100" dirty="0">
-                <a:solidFill>
-                  <a:schemeClr val="accent4"/>
-                </a:solidFill>
-              </a:rPr>
-              <a:t>コスプレ</a:t>
-            </a:r>
-            <a:endParaRPr lang="en-US" sz="1400" dirty="0"/>
-          </a:p>
-          <a:p>
-            <a:pPr indent="0" marL="0">
-              <a:buNone/>
-            </a:pPr>
-            <a:r>
-              <a:rPr lang="en-US" sz="1200" dirty="0">
-                <a:solidFill>
-                  <a:schemeClr val="tx1"/>
-                </a:solidFill>
-              </a:rPr>
-              <a:t>サンタ／トナカイ</a:t>
-            </a:r>
-            <a:endParaRPr lang="en-US" sz="1400" dirty="0"/>
-          </a:p>
-        </p:txBody>
-      </p:sp>
-      <p:sp>
-        <p:nvSpPr>
-          <p:cNvPr id="7" name="wk_head_1"/>
+        </p:txBody>
+      </p:sp>
+      <p:sp>
+        <p:nvSpPr>
+          <p:cNvPr id="8" name="wk_head_1"/>
           <p:cNvSpPr/>
           <p:nvPr/>
         </p:nvSpPr>
@@ -14820,7 +14811,7 @@
       </p:sp>
       <p:sp>
         <p:nvSpPr>
-          <p:cNvPr id="8" name="Text 6"/>
+          <p:cNvPr id="9" name="Text 6"/>
           <p:cNvSpPr txBox="1"/>
           <p:nvPr/>
         </p:nvSpPr>
@@ -14870,14 +14861,14 @@
       </p:sp>
       <p:sp>
         <p:nvSpPr>
-          <p:cNvPr id="9" name="wk_body_1"/>
+          <p:cNvPr id="10" name="wk_body_1"/>
           <p:cNvSpPr/>
           <p:nvPr/>
         </p:nvSpPr>
         <p:spPr>
           <a:xfrm>
             <a:off x="2560320" y="1783080"/>
-            <a:ext cx="1920240" cy="2011680"/>
+            <a:ext cx="1920240" cy="2057400"/>
           </a:xfrm>
           <a:prstGeom prst="roundRect">
             <a:avLst>
@@ -14895,16 +14886,40 @@
           </a:ln>
         </p:spPr>
       </p:sp>
-      <p:sp>
-        <p:nvSpPr>
-          <p:cNvPr id="10" name="Text 8"/>
+      <p:pic>
+        <p:nvPicPr>
+          <p:cNvPr id="11" name="wk_img_1" descr="スクイーズのイラスト">    </p:cNvPr>
+          <p:cNvPicPr>
+            <a:picLocks noChangeAspect="1"/>
+          </p:cNvPicPr>
+          <p:nvPr/>
+        </p:nvPicPr>
+        <p:blipFill>
+          <a:blip r:embed="rId2"/>
+          <a:stretch>
+            <a:fillRect/>
+          </a:stretch>
+        </p:blipFill>
+        <p:spPr>
+          <a:xfrm>
+            <a:off x="3017520" y="1810512"/>
+            <a:ext cx="1005840" cy="1005840"/>
+          </a:xfrm>
+          <a:prstGeom prst="rect">
+            <a:avLst/>
+          </a:prstGeom>
+        </p:spPr>
+      </p:pic>
+      <p:sp>
+        <p:nvSpPr>
+          <p:cNvPr id="12" name="Text 8"/>
           <p:cNvSpPr txBox="1"/>
           <p:nvPr/>
         </p:nvSpPr>
         <p:spPr>
           <a:xfrm>
-            <a:off x="2670048" y="1874520"/>
-            <a:ext cx="1700784" cy="1828800"/>
+            <a:off x="2651760" y="2816352"/>
+            <a:ext cx="1737360" cy="987552"/>
           </a:xfrm>
           <a:prstGeom prst="rect">
             <a:avLst/>
@@ -14916,94 +14931,52 @@
           <a:bodyPr wrap="square" lIns="635" tIns="635" rIns="635" bIns="635" rtlCol="0" anchor="t"/>
           <a:lstStyle/>
           <a:p>
-            <a:pPr indent="0" marL="0">
+            <a:pPr algn="ctr" indent="0" marL="0">
+              <a:buNone/>
+            </a:pPr>
+            <a:r>
+              <a:rPr lang="en-US" sz="1500" b="1" dirty="0">
+                <a:solidFill>
+                  <a:schemeClr val="tx2"/>
+                </a:solidFill>
+              </a:rPr>
+              <a:t>スクイーズ</a:t>
+            </a:r>
+            <a:endParaRPr lang="en-US" sz="1400" dirty="0"/>
+          </a:p>
+          <a:p>
+            <a:pPr algn="ctr" indent="0" marL="0">
               <a:buNone/>
             </a:pPr>
             <a:r>
               <a:rPr lang="en-US" sz="1100" dirty="0">
                 <a:solidFill>
+                  <a:schemeClr val="tx1"/>
+                </a:solidFill>
+              </a:rPr>
+              <a:t>ツリー・ブーツ型</a:t>
+            </a:r>
+            <a:endParaRPr lang="en-US" sz="1400" dirty="0"/>
+          </a:p>
+          <a:p>
+            <a:pPr algn="ctr" indent="0" marL="0">
+              <a:buNone/>
+            </a:pPr>
+            <a:r>
+              <a:rPr lang="en-US" sz="1000" dirty="0">
+                <a:solidFill>
                   <a:schemeClr val="accent4"/>
                 </a:solidFill>
               </a:rPr>
-              <a:t>ワークショップ</a:t>
+              <a:t>コスプレ：雪だるま／エルフ</a:t>
             </a:r>
             <a:endParaRPr lang="en-US" sz="1400" dirty="0"/>
           </a:p>
-          <a:p>
-            <a:pPr indent="0" marL="0">
-              <a:buNone/>
-            </a:pPr>
-            <a:r>
-              <a:rPr lang="en-US" sz="1600" b="1" dirty="0">
-                <a:solidFill>
-                  <a:schemeClr val="tx2"/>
-                </a:solidFill>
-              </a:rPr>
-              <a:t>スクイーズ</a:t>
-            </a:r>
-            <a:endParaRPr lang="en-US" sz="1400" dirty="0"/>
-          </a:p>
-          <a:p>
-            <a:pPr indent="0" marL="0">
-              <a:buNone/>
-            </a:pPr>
-            <a:r>
-              <a:rPr lang="en-US" sz="1200" dirty="0">
-                <a:solidFill>
-                  <a:schemeClr val="tx1"/>
-                </a:solidFill>
-              </a:rPr>
-              <a:t>ツリー・ブーツ型</a:t>
-            </a:r>
-            <a:endParaRPr lang="en-US" sz="1400" dirty="0"/>
-          </a:p>
-          <a:p>
-            <a:pPr indent="0" marL="0">
-              <a:buNone/>
-            </a:pPr>
-            <a:r>
-              <a:rPr lang="en-US" sz="800" dirty="0">
-                <a:solidFill>
-                  <a:schemeClr val="tx1"/>
-                </a:solidFill>
-              </a:rPr>
-              <a:t> </a:t>
-            </a:r>
-            <a:endParaRPr lang="en-US" sz="1400" dirty="0"/>
-          </a:p>
-          <a:p>
-            <a:pPr indent="0" marL="0">
-              <a:buNone/>
-            </a:pPr>
-            <a:r>
-              <a:rPr lang="en-US" sz="1100" dirty="0">
-                <a:solidFill>
-                  <a:schemeClr val="accent4"/>
-                </a:solidFill>
-              </a:rPr>
-              <a:t>コスプレ</a:t>
-            </a:r>
-            <a:endParaRPr lang="en-US" sz="1400" dirty="0"/>
-          </a:p>
-          <a:p>
-            <a:pPr indent="0" marL="0">
-              <a:buNone/>
-            </a:pPr>
-            <a:r>
-              <a:rPr lang="en-US" sz="1200" dirty="0">
-                <a:solidFill>
-                  <a:schemeClr val="tx1"/>
-                </a:solidFill>
-              </a:rPr>
-              <a:t>雪だるま／エルフ</a:t>
-            </a:r>
-            <a:endParaRPr lang="en-US" sz="1400" dirty="0"/>
-          </a:p>
-        </p:txBody>
-      </p:sp>
-      <p:sp>
-        <p:nvSpPr>
-          <p:cNvPr id="11" name="wk_head_2"/>
+        </p:txBody>
+      </p:sp>
+      <p:sp>
+        <p:nvSpPr>
+          <p:cNvPr id="13" name="wk_head_2"/>
           <p:cNvSpPr/>
           <p:nvPr/>
         </p:nvSpPr>
@@ -15030,7 +15003,7 @@
       </p:sp>
       <p:sp>
         <p:nvSpPr>
-          <p:cNvPr id="12" name="Text 10"/>
+          <p:cNvPr id="14" name="Text 10"/>
           <p:cNvSpPr txBox="1"/>
           <p:nvPr/>
         </p:nvSpPr>
@@ -15080,14 +15053,14 @@
       </p:sp>
       <p:sp>
         <p:nvSpPr>
-          <p:cNvPr id="13" name="wk_body_2"/>
+          <p:cNvPr id="15" name="wk_body_2"/>
           <p:cNvSpPr/>
           <p:nvPr/>
         </p:nvSpPr>
         <p:spPr>
           <a:xfrm>
             <a:off x="4663440" y="1783080"/>
-            <a:ext cx="1920240" cy="2011680"/>
+            <a:ext cx="1920240" cy="2057400"/>
           </a:xfrm>
           <a:prstGeom prst="roundRect">
             <a:avLst>
@@ -15105,16 +15078,40 @@
           </a:ln>
         </p:spPr>
       </p:sp>
-      <p:sp>
-        <p:nvSpPr>
-          <p:cNvPr id="14" name="Text 12"/>
+      <p:pic>
+        <p:nvPicPr>
+          <p:cNvPr id="16" name="wk_img_2" descr="スクイーズのイラスト">    </p:cNvPr>
+          <p:cNvPicPr>
+            <a:picLocks noChangeAspect="1"/>
+          </p:cNvPicPr>
+          <p:nvPr/>
+        </p:nvPicPr>
+        <p:blipFill>
+          <a:blip r:embed="rId3"/>
+          <a:stretch>
+            <a:fillRect/>
+          </a:stretch>
+        </p:blipFill>
+        <p:spPr>
+          <a:xfrm>
+            <a:off x="5120640" y="1810512"/>
+            <a:ext cx="1005840" cy="1005840"/>
+          </a:xfrm>
+          <a:prstGeom prst="rect">
+            <a:avLst/>
+          </a:prstGeom>
+        </p:spPr>
+      </p:pic>
+      <p:sp>
+        <p:nvSpPr>
+          <p:cNvPr id="17" name="Text 12"/>
           <p:cNvSpPr txBox="1"/>
           <p:nvPr/>
         </p:nvSpPr>
         <p:spPr>
           <a:xfrm>
-            <a:off x="4773168" y="1874520"/>
-            <a:ext cx="1700784" cy="1828800"/>
+            <a:off x="4754880" y="2816352"/>
+            <a:ext cx="1737360" cy="987552"/>
           </a:xfrm>
           <a:prstGeom prst="rect">
             <a:avLst/>
@@ -15126,94 +15123,52 @@
           <a:bodyPr wrap="square" lIns="635" tIns="635" rIns="635" bIns="635" rtlCol="0" anchor="t"/>
           <a:lstStyle/>
           <a:p>
-            <a:pPr indent="0" marL="0">
+            <a:pPr algn="ctr" indent="0" marL="0">
+              <a:buNone/>
+            </a:pPr>
+            <a:r>
+              <a:rPr lang="en-US" sz="1500" b="1" dirty="0">
+                <a:solidFill>
+                  <a:schemeClr val="tx2"/>
+                </a:solidFill>
+              </a:rPr>
+              <a:t>スクイーズ</a:t>
+            </a:r>
+            <a:endParaRPr lang="en-US" sz="1400" dirty="0"/>
+          </a:p>
+          <a:p>
+            <a:pPr algn="ctr" indent="0" marL="0">
               <a:buNone/>
             </a:pPr>
             <a:r>
               <a:rPr lang="en-US" sz="1100" dirty="0">
                 <a:solidFill>
+                  <a:schemeClr val="tx1"/>
+                </a:solidFill>
+              </a:rPr>
+              <a:t>雪だるま・プレゼント型</a:t>
+            </a:r>
+            <a:endParaRPr lang="en-US" sz="1400" dirty="0"/>
+          </a:p>
+          <a:p>
+            <a:pPr algn="ctr" indent="0" marL="0">
+              <a:buNone/>
+            </a:pPr>
+            <a:r>
+              <a:rPr lang="en-US" sz="1000" dirty="0">
+                <a:solidFill>
                   <a:schemeClr val="accent4"/>
                 </a:solidFill>
               </a:rPr>
-              <a:t>ワークショップ</a:t>
+              <a:t>コスプレ：トナカイ／ジンジャーブレッド</a:t>
             </a:r>
             <a:endParaRPr lang="en-US" sz="1400" dirty="0"/>
           </a:p>
-          <a:p>
-            <a:pPr indent="0" marL="0">
-              <a:buNone/>
-            </a:pPr>
-            <a:r>
-              <a:rPr lang="en-US" sz="1600" b="1" dirty="0">
-                <a:solidFill>
-                  <a:schemeClr val="tx2"/>
-                </a:solidFill>
-              </a:rPr>
-              <a:t>スクイーズ</a:t>
-            </a:r>
-            <a:endParaRPr lang="en-US" sz="1400" dirty="0"/>
-          </a:p>
-          <a:p>
-            <a:pPr indent="0" marL="0">
-              <a:buNone/>
-            </a:pPr>
-            <a:r>
-              <a:rPr lang="en-US" sz="1200" dirty="0">
-                <a:solidFill>
-                  <a:schemeClr val="tx1"/>
-                </a:solidFill>
-              </a:rPr>
-              <a:t>雪だるま・プレゼント型</a:t>
-            </a:r>
-            <a:endParaRPr lang="en-US" sz="1400" dirty="0"/>
-          </a:p>
-          <a:p>
-            <a:pPr indent="0" marL="0">
-              <a:buNone/>
-            </a:pPr>
-            <a:r>
-              <a:rPr lang="en-US" sz="800" dirty="0">
-                <a:solidFill>
-                  <a:schemeClr val="tx1"/>
-                </a:solidFill>
-              </a:rPr>
-              <a:t> </a:t>
-            </a:r>
-            <a:endParaRPr lang="en-US" sz="1400" dirty="0"/>
-          </a:p>
-          <a:p>
-            <a:pPr indent="0" marL="0">
-              <a:buNone/>
-            </a:pPr>
-            <a:r>
-              <a:rPr lang="en-US" sz="1100" dirty="0">
-                <a:solidFill>
-                  <a:schemeClr val="accent4"/>
-                </a:solidFill>
-              </a:rPr>
-              <a:t>コスプレ</a:t>
-            </a:r>
-            <a:endParaRPr lang="en-US" sz="1400" dirty="0"/>
-          </a:p>
-          <a:p>
-            <a:pPr indent="0" marL="0">
-              <a:buNone/>
-            </a:pPr>
-            <a:r>
-              <a:rPr lang="en-US" sz="1200" dirty="0">
-                <a:solidFill>
-                  <a:schemeClr val="tx1"/>
-                </a:solidFill>
-              </a:rPr>
-              <a:t>トナカイ／ジンジャーブレッド</a:t>
-            </a:r>
-            <a:endParaRPr lang="en-US" sz="1400" dirty="0"/>
-          </a:p>
-        </p:txBody>
-      </p:sp>
-      <p:sp>
-        <p:nvSpPr>
-          <p:cNvPr id="15" name="wk_head_3"/>
+        </p:txBody>
+      </p:sp>
+      <p:sp>
+        <p:nvSpPr>
+          <p:cNvPr id="18" name="wk_head_3"/>
           <p:cNvSpPr/>
           <p:nvPr/>
         </p:nvSpPr>
@@ -15240,7 +15195,7 @@
       </p:sp>
       <p:sp>
         <p:nvSpPr>
-          <p:cNvPr id="16" name="Text 14"/>
+          <p:cNvPr id="19" name="Text 14"/>
           <p:cNvSpPr txBox="1"/>
           <p:nvPr/>
         </p:nvSpPr>
@@ -15290,14 +15245,14 @@
       </p:sp>
       <p:sp>
         <p:nvSpPr>
-          <p:cNvPr id="17" name="wk_body_3"/>
+          <p:cNvPr id="20" name="wk_body_3"/>
           <p:cNvSpPr/>
           <p:nvPr/>
         </p:nvSpPr>
         <p:spPr>
           <a:xfrm>
             <a:off x="6766560" y="1783080"/>
-            <a:ext cx="1920240" cy="2011680"/>
+            <a:ext cx="1920240" cy="2057400"/>
           </a:xfrm>
           <a:prstGeom prst="roundRect">
             <a:avLst>
@@ -15315,16 +15270,40 @@
           </a:ln>
         </p:spPr>
       </p:sp>
-      <p:sp>
-        <p:nvSpPr>
-          <p:cNvPr id="18" name="Text 16"/>
+      <p:pic>
+        <p:nvPicPr>
+          <p:cNvPr id="21" name="wk_img_3" descr="スノードームのイラスト">    </p:cNvPr>
+          <p:cNvPicPr>
+            <a:picLocks noChangeAspect="1"/>
+          </p:cNvPicPr>
+          <p:nvPr/>
+        </p:nvPicPr>
+        <p:blipFill>
+          <a:blip r:embed="rId4"/>
+          <a:stretch>
+            <a:fillRect/>
+          </a:stretch>
+        </p:blipFill>
+        <p:spPr>
+          <a:xfrm>
+            <a:off x="7223760" y="1810512"/>
+            <a:ext cx="1005840" cy="1005840"/>
+          </a:xfrm>
+          <a:prstGeom prst="rect">
+            <a:avLst/>
+          </a:prstGeom>
+        </p:spPr>
+      </p:pic>
+      <p:sp>
+        <p:nvSpPr>
+          <p:cNvPr id="22" name="Text 16"/>
           <p:cNvSpPr txBox="1"/>
           <p:nvPr/>
         </p:nvSpPr>
         <p:spPr>
           <a:xfrm>
-            <a:off x="6876288" y="1874520"/>
-            <a:ext cx="1700784" cy="1828800"/>
+            <a:off x="6858000" y="2816352"/>
+            <a:ext cx="1737360" cy="987552"/>
           </a:xfrm>
           <a:prstGeom prst="rect">
             <a:avLst/>
@@ -15336,94 +15315,52 @@
           <a:bodyPr wrap="square" lIns="635" tIns="635" rIns="635" bIns="635" rtlCol="0" anchor="t"/>
           <a:lstStyle/>
           <a:p>
-            <a:pPr indent="0" marL="0">
+            <a:pPr algn="ctr" indent="0" marL="0">
+              <a:buNone/>
+            </a:pPr>
+            <a:r>
+              <a:rPr lang="en-US" sz="1500" b="1" dirty="0">
+                <a:solidFill>
+                  <a:schemeClr val="accent1"/>
+                </a:solidFill>
+              </a:rPr>
+              <a:t>スノードーム</a:t>
+            </a:r>
+            <a:endParaRPr lang="en-US" sz="1400" dirty="0"/>
+          </a:p>
+          <a:p>
+            <a:pPr algn="ctr" indent="0" marL="0">
               <a:buNone/>
             </a:pPr>
             <a:r>
               <a:rPr lang="en-US" sz="1100" dirty="0">
                 <a:solidFill>
+                  <a:schemeClr val="tx1"/>
+                </a:solidFill>
+              </a:rPr>
+              <a:t>雪だるま・トナカイモチーフ</a:t>
+            </a:r>
+            <a:endParaRPr lang="en-US" sz="1400" dirty="0"/>
+          </a:p>
+          <a:p>
+            <a:pPr algn="ctr" indent="0" marL="0">
+              <a:buNone/>
+            </a:pPr>
+            <a:r>
+              <a:rPr lang="en-US" sz="1000" dirty="0">
+                <a:solidFill>
                   <a:schemeClr val="accent4"/>
                 </a:solidFill>
               </a:rPr>
-              <a:t>ワークショップ</a:t>
+              <a:t>コスプレ：サンタ（男女）／ツリー</a:t>
             </a:r>
             <a:endParaRPr lang="en-US" sz="1400" dirty="0"/>
           </a:p>
-          <a:p>
-            <a:pPr indent="0" marL="0">
-              <a:buNone/>
-            </a:pPr>
-            <a:r>
-              <a:rPr lang="en-US" sz="1600" b="1" dirty="0">
-                <a:solidFill>
-                  <a:schemeClr val="accent1"/>
-                </a:solidFill>
-              </a:rPr>
-              <a:t>スノードーム</a:t>
-            </a:r>
-            <a:endParaRPr lang="en-US" sz="1400" dirty="0"/>
-          </a:p>
-          <a:p>
-            <a:pPr indent="0" marL="0">
-              <a:buNone/>
-            </a:pPr>
-            <a:r>
-              <a:rPr lang="en-US" sz="1200" dirty="0">
-                <a:solidFill>
-                  <a:schemeClr val="tx1"/>
-                </a:solidFill>
-              </a:rPr>
-              <a:t>雪だるま・トナカイモチーフ</a:t>
-            </a:r>
-            <a:endParaRPr lang="en-US" sz="1400" dirty="0"/>
-          </a:p>
-          <a:p>
-            <a:pPr indent="0" marL="0">
-              <a:buNone/>
-            </a:pPr>
-            <a:r>
-              <a:rPr lang="en-US" sz="800" dirty="0">
-                <a:solidFill>
-                  <a:schemeClr val="tx1"/>
-                </a:solidFill>
-              </a:rPr>
-              <a:t> </a:t>
-            </a:r>
-            <a:endParaRPr lang="en-US" sz="1400" dirty="0"/>
-          </a:p>
-          <a:p>
-            <a:pPr indent="0" marL="0">
-              <a:buNone/>
-            </a:pPr>
-            <a:r>
-              <a:rPr lang="en-US" sz="1100" dirty="0">
-                <a:solidFill>
-                  <a:schemeClr val="accent4"/>
-                </a:solidFill>
-              </a:rPr>
-              <a:t>コスプレ</a:t>
-            </a:r>
-            <a:endParaRPr lang="en-US" sz="1400" dirty="0"/>
-          </a:p>
-          <a:p>
-            <a:pPr indent="0" marL="0">
-              <a:buNone/>
-            </a:pPr>
-            <a:r>
-              <a:rPr lang="en-US" sz="1200" dirty="0">
-                <a:solidFill>
-                  <a:schemeClr val="tx1"/>
-                </a:solidFill>
-              </a:rPr>
-              <a:t>サンタ（男女）／ツリー</a:t>
-            </a:r>
-            <a:endParaRPr lang="en-US" sz="1400" dirty="0"/>
-          </a:p>
-        </p:txBody>
-      </p:sp>
-      <p:sp>
-        <p:nvSpPr>
-          <p:cNvPr id="19" name="rot_note"/>
+        </p:txBody>
+      </p:sp>
+      <p:sp>
+        <p:nvSpPr>
+          <p:cNvPr id="23" name="rot_note"/>
           <p:cNvSpPr/>
           <p:nvPr/>
         </p:nvSpPr>
@@ -15450,7 +15387,7 @@
       </p:sp>
       <p:sp>
         <p:nvSpPr>
-          <p:cNvPr id="20" name="Text 18"/>
+          <p:cNvPr id="24" name="Text 18"/>
           <p:cNvSpPr txBox="1"/>
           <p:nvPr/>
         </p:nvSpPr>

--- a/docs/proposals/2026-12_docomo_christmas-ws/企画書_NTTドコモ_クリスマスWS.pptx
+++ b/docs/proposals/2026-12_docomo_christmas-ws/企画書_NTTドコモ_クリスマスWS.pptx
@@ -123,19 +123,19 @@
   <p:extLst>
     <p:ext uri="{521415D9-36F7-43E2-AB2F-B90AF26B5E84}">
       <p14:sectionLst xmlns:p14="http://schemas.microsoft.com/office/powerpoint/2010/main">
-        <p14:section name="表紙" id="{ed8c8048-3d8f-16ea-a03b-992ddfe6a8d2}">
+        <p14:section name="表紙" id="{ce4b90e2-39c5-0d34-ea73-b118a829293d}">
           <p14:sldIdLst>
             <p14:sldId id="256"/>
           </p14:sldIdLst>
         </p14:section>
-        <p14:section name="ご提案の概要" id="{16969e79-2a51-5178-a0a5-2a098e1a79c9}">
+        <p14:section name="ご提案の概要" id="{e604de96-f654-67c2-f081-3392b8ea9275}">
           <p14:sldIdLst>
             <p14:sldId id="257"/>
             <p14:sldId id="258"/>
             <p14:sldId id="259"/>
           </p14:sldIdLst>
         </p14:section>
-        <p14:section name="ワークショップ" id="{ed3c4d75-8b8e-d4f4-b78e-f1b158f803d5}">
+        <p14:section name="ワークショップ" id="{a835a302-4aaa-d8f0-226f-0ebcffbf2675}">
           <p14:sldIdLst>
             <p14:sldId id="260"/>
             <p14:sldId id="261"/>
@@ -145,7 +145,7 @@
             <p14:sldId id="265"/>
           </p14:sldIdLst>
         </p14:section>
-        <p14:section name="店頭演出" id="{33d44ca6-a0f8-2811-b943-2a8d376b0d5a}">
+        <p14:section name="店頭演出" id="{0b4f5905-0675-4046-1b3e-204b2b3727d5}">
           <p14:sldIdLst>
             <p14:sldId id="266"/>
             <p14:sldId id="267"/>
@@ -153,7 +153,7 @@
             <p14:sldId id="269"/>
           </p14:sldIdLst>
         </p14:section>
-        <p14:section name="運用・お見積" id="{5fbf03e3-73ed-ce2c-5f01-a3100c349aa8}">
+        <p14:section name="運用・お見積" id="{bdca3d4d-79e1-b9c9-66e8-75d57c5512bf}">
           <p14:sldIdLst>
             <p14:sldId id="270"/>
             <p14:sldId id="271"/>
@@ -7554,7 +7554,7 @@
                   <a:schemeClr val="bg1"/>
                 </a:solidFill>
               </a:rPr>
-              <a:t>配送・検品</a:t>
+              <a:t>一括配送</a:t>
             </a:r>
             <a:endParaRPr lang="en-US" sz="1200" dirty="0"/>
           </a:p>
@@ -7562,7 +7562,7 @@
       </p:sp>
       <p:pic>
         <p:nvPicPr>
-          <p:cNvPr id="13" name="step_img_2" descr="配送・検品のイラスト">    </p:cNvPr>
+          <p:cNvPr id="13" name="step_img_2" descr="一括配送のイラスト">    </p:cNvPr>
           <p:cNvPicPr>
             <a:picLocks noChangeAspect="1"/>
           </p:cNvPicPr>
@@ -7614,7 +7614,7 @@
                   <a:schemeClr val="tx1"/>
                 </a:solidFill>
               </a:rPr>
-              <a:t>11月下旬着</a:t>
+              <a:t>4週分を11月下旬に</a:t>
             </a:r>
             <a:endParaRPr lang="en-US" sz="1100" dirty="0"/>
           </a:p>
@@ -7628,7 +7628,7 @@
                   <a:schemeClr val="tx1"/>
                 </a:solidFill>
               </a:rPr>
-              <a:t>検品確認書を返送</a:t>
+              <a:t>一括配送・検品</a:t>
             </a:r>
             <a:endParaRPr lang="en-US" sz="1100" dirty="0"/>
           </a:p>
@@ -8000,7 +8000,7 @@
                   <a:schemeClr val="tx1"/>
                 </a:solidFill>
               </a:rPr>
-              <a:t>キットは週ごとに仕分けて納品。アーチは箱を再利用し、同梱の着払い伝票で返送いただくだけです。</a:t>
+              <a:t>4週分のキット・物品は開始前に一括配送（週ごとに仕分けて梱包）。アーチは箱を再利用し、同梱の着払い伝票で返送いただくだけです。</a:t>
             </a:r>
             <a:endParaRPr lang="en-US" sz="1100" dirty="0"/>
           </a:p>
@@ -16394,7 +16394,7 @@
                   <a:schemeClr val="tx1"/>
                 </a:solidFill>
               </a:rPr>
-              <a:t>第1週分・第4週分に分けて納品（10地区で計6,000個）</a:t>
+              <a:t>4週分を開始前に一括配送（10地区で計6,000個）</a:t>
             </a:r>
             <a:endParaRPr lang="en-US" sz="1400" dirty="0"/>
           </a:p>
@@ -17361,7 +17361,7 @@
                   <a:schemeClr val="tx1"/>
                 </a:solidFill>
               </a:rPr>
-              <a:t>第2週分・第3週分に分けて納品（10地区で計6,000個）</a:t>
+              <a:t>4週分を開始前に一括配送（10地区で計6,000個）</a:t>
             </a:r>
             <a:endParaRPr lang="en-US" sz="1400" dirty="0"/>
           </a:p>

--- a/docs/proposals/2026-12_docomo_christmas-ws/企画書_NTTドコモ_クリスマスWS.pptx
+++ b/docs/proposals/2026-12_docomo_christmas-ws/企画書_NTTドコモ_クリスマスWS.pptx
@@ -123,19 +123,19 @@
   <p:extLst>
     <p:ext uri="{521415D9-36F7-43E2-AB2F-B90AF26B5E84}">
       <p14:sectionLst xmlns:p14="http://schemas.microsoft.com/office/powerpoint/2010/main">
-        <p14:section name="表紙" id="{ce4b90e2-39c5-0d34-ea73-b118a829293d}">
+        <p14:section name="表紙" id="{3bb8dd65-c3d5-0c64-012e-b5b3b3793f52}">
           <p14:sldIdLst>
             <p14:sldId id="256"/>
           </p14:sldIdLst>
         </p14:section>
-        <p14:section name="ご提案の概要" id="{e604de96-f654-67c2-f081-3392b8ea9275}">
+        <p14:section name="ご提案の概要" id="{02917561-ed5f-fb96-8c64-3d09e868ee34}">
           <p14:sldIdLst>
             <p14:sldId id="257"/>
             <p14:sldId id="258"/>
             <p14:sldId id="259"/>
           </p14:sldIdLst>
         </p14:section>
-        <p14:section name="ワークショップ" id="{a835a302-4aaa-d8f0-226f-0ebcffbf2675}">
+        <p14:section name="ワークショップ" id="{9d35b3f6-2cb9-c9f6-85eb-9ae0664d41f1}">
           <p14:sldIdLst>
             <p14:sldId id="260"/>
             <p14:sldId id="261"/>
@@ -145,7 +145,7 @@
             <p14:sldId id="265"/>
           </p14:sldIdLst>
         </p14:section>
-        <p14:section name="店頭演出" id="{0b4f5905-0675-4046-1b3e-204b2b3727d5}">
+        <p14:section name="店頭演出" id="{98c411d2-186a-2206-8517-3be2189df82e}">
           <p14:sldIdLst>
             <p14:sldId id="266"/>
             <p14:sldId id="267"/>
@@ -153,7 +153,7 @@
             <p14:sldId id="269"/>
           </p14:sldIdLst>
         </p14:section>
-        <p14:section name="運用・お見積" id="{bdca3d4d-79e1-b9c9-66e8-75d57c5512bf}">
+        <p14:section name="運用・お見積" id="{2999079d-6c0a-c85b-a6ba-407deb8c9dda}">
           <p14:sldIdLst>
             <p14:sldId id="270"/>
             <p14:sldId id="271"/>
@@ -8000,7 +8000,7 @@
                   <a:schemeClr val="tx1"/>
                 </a:solidFill>
               </a:rPr>
-              <a:t>4週分のキット・物品は開始前に一括配送（週ごとに仕分けて梱包）。アーチは箱を再利用し、同梱の着払い伝票で返送いただくだけです。</a:t>
+              <a:t>4週分のキット・物品は開始前に一括配送。アーチは箱を再利用し、同梱の着払い伝票で返送いただくだけです。</a:t>
             </a:r>
             <a:endParaRPr lang="en-US" sz="1100" dirty="0"/>
           </a:p>
